--- a/LabBook_10.pptx
+++ b/LabBook_10.pptx
@@ -4948,7 +4948,7 @@
         <p:spPr>
           <a:xfrm>
             <a:off x="2667000" y="858867"/>
-            <a:ext cx="6120880" cy="1754326"/>
+            <a:ext cx="6120880" cy="2308324"/>
           </a:xfrm>
           <a:prstGeom prst="rect">
             <a:avLst/>
@@ -4961,15 +4961,47 @@
           </a:bodyPr>
           <a:lstStyle/>
           <a:p>
+            <a:r>
+              <a:rPr lang="es-ES" b="1" dirty="0" err="1"/>
+              <a:t>git</a:t>
+            </a:r>
+            <a:r>
+              <a:rPr lang="es-ES" b="1" dirty="0"/>
+              <a:t> </a:t>
+            </a:r>
+            <a:r>
+              <a:rPr lang="es-ES" b="1" dirty="0" err="1"/>
+              <a:t>config</a:t>
+            </a:r>
+            <a:r>
+              <a:rPr lang="es-ES" b="1" dirty="0"/>
+              <a:t> --global user.name "{Tu nombre de usuario}"</a:t>
+            </a:r>
+            <a:endParaRPr lang="es-ES" dirty="0"/>
+          </a:p>
+          <a:p>
+            <a:r>
+              <a:rPr lang="es-ES"/>
+              <a:t> </a:t>
+            </a:r>
+          </a:p>
+          <a:p>
             <a:pPr>
               <a:buNone/>
             </a:pPr>
             <a:r>
+              <a:rPr lang="en-US">
+                <a:effectLst/>
+                <a:latin typeface="-apple-system"/>
+              </a:rPr>
+              <a:t>git </a:t>
+            </a:r>
+            <a:r>
               <a:rPr lang="en-US" dirty="0">
                 <a:effectLst/>
                 <a:latin typeface="-apple-system"/>
               </a:rPr>
-              <a:t>git add -A</a:t>
+              <a:t>add -A</a:t>
             </a:r>
           </a:p>
           <a:p>

--- a/LabBook_10.pptx
+++ b/LabBook_10.pptx
@@ -5,10 +5,10 @@
     <p:sldMasterId id="2147483648" r:id="rId1"/>
   </p:sldMasterIdLst>
   <p:notesMasterIdLst>
-    <p:notesMasterId r:id="rId14"/>
+    <p:notesMasterId r:id="rId15"/>
   </p:notesMasterIdLst>
   <p:handoutMasterIdLst>
-    <p:handoutMasterId r:id="rId15"/>
+    <p:handoutMasterId r:id="rId16"/>
   </p:handoutMasterIdLst>
   <p:sldIdLst>
     <p:sldId id="256" r:id="rId2"/>
@@ -21,8 +21,9 @@
     <p:sldId id="292" r:id="rId9"/>
     <p:sldId id="303" r:id="rId10"/>
     <p:sldId id="297" r:id="rId11"/>
-    <p:sldId id="293" r:id="rId12"/>
-    <p:sldId id="288" r:id="rId13"/>
+    <p:sldId id="304" r:id="rId12"/>
+    <p:sldId id="293" r:id="rId13"/>
+    <p:sldId id="288" r:id="rId14"/>
   </p:sldIdLst>
   <p:sldSz cx="12192000" cy="6858000"/>
   <p:notesSz cx="12192000" cy="6858000"/>
@@ -765,6 +766,114 @@
 </p:notes>
 </file>
 
+<file path=ppt/notesSlides/notesSlide10.xml><?xml version="1.0" encoding="utf-8"?>
+<p:notes xmlns:a="http://schemas.openxmlformats.org/drawingml/2006/main" xmlns:r="http://schemas.openxmlformats.org/officeDocument/2006/relationships" xmlns:p="http://schemas.openxmlformats.org/presentationml/2006/main">
+  <p:cSld>
+    <p:spTree>
+      <p:nvGrpSpPr>
+        <p:cNvPr id="1" name="">
+          <a:extLst>
+            <a:ext uri="{FF2B5EF4-FFF2-40B4-BE49-F238E27FC236}">
+              <a16:creationId xmlns:a16="http://schemas.microsoft.com/office/drawing/2014/main" id="{7B023B86-D15F-9CD8-C5EA-3EAAD8BACCF7}"/>
+            </a:ext>
+          </a:extLst>
+        </p:cNvPr>
+        <p:cNvGrpSpPr/>
+        <p:nvPr/>
+      </p:nvGrpSpPr>
+      <p:grpSpPr>
+        <a:xfrm>
+          <a:off x="0" y="0"/>
+          <a:ext cx="0" cy="0"/>
+          <a:chOff x="0" y="0"/>
+          <a:chExt cx="0" cy="0"/>
+        </a:xfrm>
+      </p:grpSpPr>
+      <p:sp>
+        <p:nvSpPr>
+          <p:cNvPr id="2" name="Marcador de imagen de diapositiva 1">
+            <a:extLst>
+              <a:ext uri="{FF2B5EF4-FFF2-40B4-BE49-F238E27FC236}">
+                <a16:creationId xmlns:a16="http://schemas.microsoft.com/office/drawing/2014/main" id="{5C73881A-26A5-ECF9-C6F2-3DEFA77AEFCC}"/>
+              </a:ext>
+            </a:extLst>
+          </p:cNvPr>
+          <p:cNvSpPr>
+            <a:spLocks noGrp="1" noRot="1" noChangeAspect="1"/>
+          </p:cNvSpPr>
+          <p:nvPr>
+            <p:ph type="sldImg"/>
+          </p:nvPr>
+        </p:nvSpPr>
+        <p:spPr/>
+      </p:sp>
+      <p:sp>
+        <p:nvSpPr>
+          <p:cNvPr id="3" name="Marcador de notas 2">
+            <a:extLst>
+              <a:ext uri="{FF2B5EF4-FFF2-40B4-BE49-F238E27FC236}">
+                <a16:creationId xmlns:a16="http://schemas.microsoft.com/office/drawing/2014/main" id="{3B7AFC79-4973-3930-959B-AEF8810CFE6A}"/>
+              </a:ext>
+            </a:extLst>
+          </p:cNvPr>
+          <p:cNvSpPr>
+            <a:spLocks noGrp="1"/>
+          </p:cNvSpPr>
+          <p:nvPr>
+            <p:ph type="body" idx="1"/>
+          </p:nvPr>
+        </p:nvSpPr>
+        <p:spPr/>
+        <p:txBody>
+          <a:bodyPr/>
+          <a:lstStyle/>
+          <a:p>
+            <a:endParaRPr lang="es-ES" dirty="0"/>
+          </a:p>
+        </p:txBody>
+      </p:sp>
+      <p:sp>
+        <p:nvSpPr>
+          <p:cNvPr id="4" name="Marcador de número de diapositiva 3">
+            <a:extLst>
+              <a:ext uri="{FF2B5EF4-FFF2-40B4-BE49-F238E27FC236}">
+                <a16:creationId xmlns:a16="http://schemas.microsoft.com/office/drawing/2014/main" id="{8345D0F3-6273-0338-FCDA-175B73D7C9EB}"/>
+              </a:ext>
+            </a:extLst>
+          </p:cNvPr>
+          <p:cNvSpPr>
+            <a:spLocks noGrp="1"/>
+          </p:cNvSpPr>
+          <p:nvPr>
+            <p:ph type="sldNum" sz="quarter" idx="5"/>
+          </p:nvPr>
+        </p:nvSpPr>
+        <p:spPr/>
+        <p:txBody>
+          <a:bodyPr/>
+          <a:lstStyle/>
+          <a:p>
+            <a:fld id="{676223B9-C868-4436-87D9-1A3152E1157A}" type="slidenum">
+              <a:rPr lang="es-ES" smtClean="0"/>
+              <a:t>12</a:t>
+            </a:fld>
+            <a:endParaRPr lang="es-ES"/>
+          </a:p>
+        </p:txBody>
+      </p:sp>
+    </p:spTree>
+    <p:extLst>
+      <p:ext uri="{BB962C8B-B14F-4D97-AF65-F5344CB8AC3E}">
+        <p14:creationId xmlns:p14="http://schemas.microsoft.com/office/powerpoint/2010/main" val="2917382716"/>
+      </p:ext>
+    </p:extLst>
+  </p:cSld>
+  <p:clrMapOvr>
+    <a:masterClrMapping/>
+  </p:clrMapOvr>
+</p:notes>
+</file>
+
 <file path=ppt/notesSlides/notesSlide2.xml><?xml version="1.0" encoding="utf-8"?>
 <p:notes xmlns:a="http://schemas.openxmlformats.org/drawingml/2006/main" xmlns:r="http://schemas.openxmlformats.org/officeDocument/2006/relationships" xmlns:p="http://schemas.openxmlformats.org/presentationml/2006/main">
   <p:cSld>
@@ -1529,7 +1638,7 @@
         <p:cNvPr id="1" name="">
           <a:extLst>
             <a:ext uri="{FF2B5EF4-FFF2-40B4-BE49-F238E27FC236}">
-              <a16:creationId xmlns:a16="http://schemas.microsoft.com/office/drawing/2014/main" id="{7B023B86-D15F-9CD8-C5EA-3EAAD8BACCF7}"/>
+              <a16:creationId xmlns:a16="http://schemas.microsoft.com/office/drawing/2014/main" id="{D6E49ECA-B518-50D2-8604-23126DCCD362}"/>
             </a:ext>
           </a:extLst>
         </p:cNvPr>
@@ -1549,7 +1658,7 @@
           <p:cNvPr id="2" name="Marcador de imagen de diapositiva 1">
             <a:extLst>
               <a:ext uri="{FF2B5EF4-FFF2-40B4-BE49-F238E27FC236}">
-                <a16:creationId xmlns:a16="http://schemas.microsoft.com/office/drawing/2014/main" id="{5C73881A-26A5-ECF9-C6F2-3DEFA77AEFCC}"/>
+                <a16:creationId xmlns:a16="http://schemas.microsoft.com/office/drawing/2014/main" id="{70B53A5A-0048-C702-8F7E-860224547119}"/>
               </a:ext>
             </a:extLst>
           </p:cNvPr>
@@ -1567,7 +1676,7 @@
           <p:cNvPr id="3" name="Marcador de notas 2">
             <a:extLst>
               <a:ext uri="{FF2B5EF4-FFF2-40B4-BE49-F238E27FC236}">
-                <a16:creationId xmlns:a16="http://schemas.microsoft.com/office/drawing/2014/main" id="{3B7AFC79-4973-3930-959B-AEF8810CFE6A}"/>
+                <a16:creationId xmlns:a16="http://schemas.microsoft.com/office/drawing/2014/main" id="{075348C2-C668-42AD-11C3-D9A2AAB49F17}"/>
               </a:ext>
             </a:extLst>
           </p:cNvPr>
@@ -1592,7 +1701,7 @@
           <p:cNvPr id="4" name="Marcador de número de diapositiva 3">
             <a:extLst>
               <a:ext uri="{FF2B5EF4-FFF2-40B4-BE49-F238E27FC236}">
-                <a16:creationId xmlns:a16="http://schemas.microsoft.com/office/drawing/2014/main" id="{8345D0F3-6273-0338-FCDA-175B73D7C9EB}"/>
+                <a16:creationId xmlns:a16="http://schemas.microsoft.com/office/drawing/2014/main" id="{7E2FB511-3713-07BB-835C-A6009AC63F50}"/>
               </a:ext>
             </a:extLst>
           </p:cNvPr>
@@ -1619,7 +1728,7 @@
     </p:spTree>
     <p:extLst>
       <p:ext uri="{BB962C8B-B14F-4D97-AF65-F5344CB8AC3E}">
-        <p14:creationId xmlns:p14="http://schemas.microsoft.com/office/powerpoint/2010/main" val="2917382716"/>
+        <p14:creationId xmlns:p14="http://schemas.microsoft.com/office/powerpoint/2010/main" val="4056018782"/>
       </p:ext>
     </p:extLst>
   </p:cSld>
@@ -3442,7 +3551,7 @@
             <p:spPr>
               <a:xfrm>
                 <a:off x="609441" y="4860334"/>
-                <a:ext cx="11198542" cy="1361911"/>
+                <a:ext cx="11198542" cy="2925224"/>
               </a:xfrm>
               <a:prstGeom prst="rect">
                 <a:avLst/>
@@ -3868,7 +3977,7 @@
                     <a:latin typeface="Arial" panose="020B0604020202020204" pitchFamily="34" charset="0"/>
                     <a:cs typeface="Arial" panose="020B0604020202020204" pitchFamily="34" charset="0"/>
                   </a:rPr>
-                  <a:t> N1 TIENE QUE SER EL NEFF EL QUE EMPIEZAS, N2 TIENE QUE DAR ENTRE 1.9 Y 2</a:t>
+                  <a:t> Comment on the results found for the TE0 and TM0 for both deep and shallow waveguides. </a:t>
                 </a:r>
               </a:p>
               <a:p>
@@ -3878,7 +3987,385 @@
                     <a:latin typeface="Arial" panose="020B0604020202020204" pitchFamily="34" charset="0"/>
                     <a:cs typeface="Arial" panose="020B0604020202020204" pitchFamily="34" charset="0"/>
                   </a:rPr>
-                  <a:t>Comment on the results found for the TE0 and TM0 for both deep and shallow waveguides. </a:t>
+                  <a:t> A </a:t>
+                </a:r>
+                <a:r>
+                  <a:rPr lang="en-US" sz="1200" dirty="0" err="1">
+                    <a:latin typeface="Arial" panose="020B0604020202020204" pitchFamily="34" charset="0"/>
+                    <a:cs typeface="Arial" panose="020B0604020202020204" pitchFamily="34" charset="0"/>
+                  </a:rPr>
+                  <a:t>continuación</a:t>
+                </a:r>
+                <a:r>
+                  <a:rPr lang="en-US" sz="1200" dirty="0">
+                    <a:latin typeface="Arial" panose="020B0604020202020204" pitchFamily="34" charset="0"/>
+                    <a:cs typeface="Arial" panose="020B0604020202020204" pitchFamily="34" charset="0"/>
+                  </a:rPr>
+                  <a:t> se </a:t>
+                </a:r>
+                <a:r>
+                  <a:rPr lang="en-US" sz="1200" dirty="0" err="1">
+                    <a:latin typeface="Arial" panose="020B0604020202020204" pitchFamily="34" charset="0"/>
+                    <a:cs typeface="Arial" panose="020B0604020202020204" pitchFamily="34" charset="0"/>
+                  </a:rPr>
+                  <a:t>presenta</a:t>
+                </a:r>
+                <a:r>
+                  <a:rPr lang="en-US" sz="1200" dirty="0">
+                    <a:latin typeface="Arial" panose="020B0604020202020204" pitchFamily="34" charset="0"/>
+                    <a:cs typeface="Arial" panose="020B0604020202020204" pitchFamily="34" charset="0"/>
+                  </a:rPr>
+                  <a:t> la </a:t>
+                </a:r>
+                <a:r>
+                  <a:rPr lang="en-US" sz="1200" dirty="0" err="1">
+                    <a:latin typeface="Arial" panose="020B0604020202020204" pitchFamily="34" charset="0"/>
+                    <a:cs typeface="Arial" panose="020B0604020202020204" pitchFamily="34" charset="0"/>
+                  </a:rPr>
+                  <a:t>ecuacion</a:t>
+                </a:r>
+                <a:r>
+                  <a:rPr lang="en-US" sz="1200" dirty="0">
+                    <a:latin typeface="Arial" panose="020B0604020202020204" pitchFamily="34" charset="0"/>
+                    <a:cs typeface="Arial" panose="020B0604020202020204" pitchFamily="34" charset="0"/>
+                  </a:rPr>
+                  <a:t> de </a:t>
+                </a:r>
+                <a:r>
+                  <a:rPr lang="en-US" sz="1200" dirty="0" err="1">
+                    <a:latin typeface="Arial" panose="020B0604020202020204" pitchFamily="34" charset="0"/>
+                    <a:cs typeface="Arial" panose="020B0604020202020204" pitchFamily="34" charset="0"/>
+                  </a:rPr>
+                  <a:t>segundo</a:t>
+                </a:r>
+                <a:r>
+                  <a:rPr lang="en-US" sz="1200" dirty="0">
+                    <a:latin typeface="Arial" panose="020B0604020202020204" pitchFamily="34" charset="0"/>
+                    <a:cs typeface="Arial" panose="020B0604020202020204" pitchFamily="34" charset="0"/>
+                  </a:rPr>
+                  <a:t> </a:t>
+                </a:r>
+                <a:r>
+                  <a:rPr lang="en-US" sz="1200" dirty="0" err="1">
+                    <a:latin typeface="Arial" panose="020B0604020202020204" pitchFamily="34" charset="0"/>
+                    <a:cs typeface="Arial" panose="020B0604020202020204" pitchFamily="34" charset="0"/>
+                  </a:rPr>
+                  <a:t>grado</a:t>
+                </a:r>
+                <a:r>
+                  <a:rPr lang="en-US" sz="1200" dirty="0">
+                    <a:latin typeface="Arial" panose="020B0604020202020204" pitchFamily="34" charset="0"/>
+                    <a:cs typeface="Arial" panose="020B0604020202020204" pitchFamily="34" charset="0"/>
+                  </a:rPr>
+                  <a:t> con </a:t>
+                </a:r>
+                <a:r>
+                  <a:rPr lang="en-US" sz="1200" dirty="0" err="1">
+                    <a:latin typeface="Arial" panose="020B0604020202020204" pitchFamily="34" charset="0"/>
+                    <a:cs typeface="Arial" panose="020B0604020202020204" pitchFamily="34" charset="0"/>
+                  </a:rPr>
+                  <a:t>los</a:t>
+                </a:r>
+                <a:r>
+                  <a:rPr lang="en-US" sz="1200" dirty="0">
+                    <a:latin typeface="Arial" panose="020B0604020202020204" pitchFamily="34" charset="0"/>
+                    <a:cs typeface="Arial" panose="020B0604020202020204" pitchFamily="34" charset="0"/>
+                  </a:rPr>
+                  <a:t> </a:t>
+                </a:r>
+                <a:r>
+                  <a:rPr lang="en-US" sz="1200" dirty="0" err="1">
+                    <a:latin typeface="Arial" panose="020B0604020202020204" pitchFamily="34" charset="0"/>
+                    <a:cs typeface="Arial" panose="020B0604020202020204" pitchFamily="34" charset="0"/>
+                  </a:rPr>
+                  <a:t>coeficientes</a:t>
+                </a:r>
+                <a:r>
+                  <a:rPr lang="en-US" sz="1200" dirty="0">
+                    <a:latin typeface="Arial" panose="020B0604020202020204" pitchFamily="34" charset="0"/>
+                    <a:cs typeface="Arial" panose="020B0604020202020204" pitchFamily="34" charset="0"/>
+                  </a:rPr>
+                  <a:t> </a:t>
+                </a:r>
+                <a:r>
+                  <a:rPr lang="en-US" sz="1200" dirty="0" err="1">
+                    <a:latin typeface="Arial" panose="020B0604020202020204" pitchFamily="34" charset="0"/>
+                    <a:cs typeface="Arial" panose="020B0604020202020204" pitchFamily="34" charset="0"/>
+                  </a:rPr>
+                  <a:t>polinomicos</a:t>
+                </a:r>
+                <a:r>
+                  <a:rPr lang="en-US" sz="1200" dirty="0">
+                    <a:latin typeface="Arial" panose="020B0604020202020204" pitchFamily="34" charset="0"/>
+                    <a:cs typeface="Arial" panose="020B0604020202020204" pitchFamily="34" charset="0"/>
+                  </a:rPr>
+                  <a:t>. Su </a:t>
+                </a:r>
+                <a:r>
+                  <a:rPr lang="en-US" sz="1200" dirty="0" err="1">
+                    <a:latin typeface="Arial" panose="020B0604020202020204" pitchFamily="34" charset="0"/>
+                    <a:cs typeface="Arial" panose="020B0604020202020204" pitchFamily="34" charset="0"/>
+                  </a:rPr>
+                  <a:t>objetivo</a:t>
+                </a:r>
+                <a:r>
+                  <a:rPr lang="en-US" sz="1200" dirty="0">
+                    <a:latin typeface="Arial" panose="020B0604020202020204" pitchFamily="34" charset="0"/>
+                    <a:cs typeface="Arial" panose="020B0604020202020204" pitchFamily="34" charset="0"/>
+                  </a:rPr>
+                  <a:t> es </a:t>
+                </a:r>
+                <a:r>
+                  <a:rPr lang="en-US" sz="1200" dirty="0" err="1">
+                    <a:latin typeface="Arial" panose="020B0604020202020204" pitchFamily="34" charset="0"/>
+                    <a:cs typeface="Arial" panose="020B0604020202020204" pitchFamily="34" charset="0"/>
+                  </a:rPr>
+                  <a:t>disminuir</a:t>
+                </a:r>
+                <a:r>
+                  <a:rPr lang="en-US" sz="1200" dirty="0">
+                    <a:latin typeface="Arial" panose="020B0604020202020204" pitchFamily="34" charset="0"/>
+                    <a:cs typeface="Arial" panose="020B0604020202020204" pitchFamily="34" charset="0"/>
+                  </a:rPr>
+                  <a:t> la </a:t>
+                </a:r>
+                <a:r>
+                  <a:rPr lang="en-US" sz="1200" dirty="0" err="1">
+                    <a:latin typeface="Arial" panose="020B0604020202020204" pitchFamily="34" charset="0"/>
+                    <a:cs typeface="Arial" panose="020B0604020202020204" pitchFamily="34" charset="0"/>
+                  </a:rPr>
+                  <a:t>complejidad</a:t>
+                </a:r>
+                <a:r>
+                  <a:rPr lang="en-US" sz="1200" dirty="0">
+                    <a:latin typeface="Arial" panose="020B0604020202020204" pitchFamily="34" charset="0"/>
+                    <a:cs typeface="Arial" panose="020B0604020202020204" pitchFamily="34" charset="0"/>
+                  </a:rPr>
+                  <a:t> de la </a:t>
+                </a:r>
+                <a:r>
+                  <a:rPr lang="en-US" sz="1200" dirty="0" err="1">
+                    <a:latin typeface="Arial" panose="020B0604020202020204" pitchFamily="34" charset="0"/>
+                    <a:cs typeface="Arial" panose="020B0604020202020204" pitchFamily="34" charset="0"/>
+                  </a:rPr>
+                  <a:t>representacion</a:t>
+                </a:r>
+                <a:r>
+                  <a:rPr lang="en-US" sz="1200" dirty="0">
+                    <a:latin typeface="Arial" panose="020B0604020202020204" pitchFamily="34" charset="0"/>
+                    <a:cs typeface="Arial" panose="020B0604020202020204" pitchFamily="34" charset="0"/>
+                  </a:rPr>
+                  <a:t> y del </a:t>
+                </a:r>
+                <a:r>
+                  <a:rPr lang="en-US" sz="1200" dirty="0" err="1">
+                    <a:latin typeface="Arial" panose="020B0604020202020204" pitchFamily="34" charset="0"/>
+                    <a:cs typeface="Arial" panose="020B0604020202020204" pitchFamily="34" charset="0"/>
+                  </a:rPr>
+                  <a:t>calculo</a:t>
+                </a:r>
+                <a:r>
+                  <a:rPr lang="en-US" sz="1200" dirty="0">
+                    <a:latin typeface="Arial" panose="020B0604020202020204" pitchFamily="34" charset="0"/>
+                    <a:cs typeface="Arial" panose="020B0604020202020204" pitchFamily="34" charset="0"/>
+                  </a:rPr>
+                  <a:t> de las </a:t>
+                </a:r>
+                <a:r>
+                  <a:rPr lang="en-US" sz="1200" dirty="0" err="1">
+                    <a:latin typeface="Arial" panose="020B0604020202020204" pitchFamily="34" charset="0"/>
+                    <a:cs typeface="Arial" panose="020B0604020202020204" pitchFamily="34" charset="0"/>
+                  </a:rPr>
+                  <a:t>guias</a:t>
+                </a:r>
+                <a:r>
+                  <a:rPr lang="en-US" sz="1200" dirty="0">
+                    <a:latin typeface="Arial" panose="020B0604020202020204" pitchFamily="34" charset="0"/>
+                    <a:cs typeface="Arial" panose="020B0604020202020204" pitchFamily="34" charset="0"/>
+                  </a:rPr>
+                  <a:t> de </a:t>
+                </a:r>
+                <a:r>
+                  <a:rPr lang="en-US" sz="1200" dirty="0" err="1">
+                    <a:latin typeface="Arial" panose="020B0604020202020204" pitchFamily="34" charset="0"/>
+                    <a:cs typeface="Arial" panose="020B0604020202020204" pitchFamily="34" charset="0"/>
+                  </a:rPr>
+                  <a:t>onda</a:t>
+                </a:r>
+                <a:r>
+                  <a:rPr lang="en-US" sz="1200" dirty="0">
+                    <a:latin typeface="Arial" panose="020B0604020202020204" pitchFamily="34" charset="0"/>
+                    <a:cs typeface="Arial" panose="020B0604020202020204" pitchFamily="34" charset="0"/>
+                  </a:rPr>
+                  <a:t>, </a:t>
+                </a:r>
+                <a:r>
+                  <a:rPr lang="en-US" sz="1200" dirty="0" err="1">
+                    <a:latin typeface="Arial" panose="020B0604020202020204" pitchFamily="34" charset="0"/>
+                    <a:cs typeface="Arial" panose="020B0604020202020204" pitchFamily="34" charset="0"/>
+                  </a:rPr>
+                  <a:t>llevando</a:t>
+                </a:r>
+                <a:r>
+                  <a:rPr lang="en-US" sz="1200" dirty="0">
+                    <a:latin typeface="Arial" panose="020B0604020202020204" pitchFamily="34" charset="0"/>
+                    <a:cs typeface="Arial" panose="020B0604020202020204" pitchFamily="34" charset="0"/>
+                  </a:rPr>
+                  <a:t> a </a:t>
+                </a:r>
+                <a:r>
+                  <a:rPr lang="en-US" sz="1200" dirty="0" err="1">
+                    <a:latin typeface="Arial" panose="020B0604020202020204" pitchFamily="34" charset="0"/>
+                    <a:cs typeface="Arial" panose="020B0604020202020204" pitchFamily="34" charset="0"/>
+                  </a:rPr>
+                  <a:t>cabo</a:t>
+                </a:r>
+                <a:r>
+                  <a:rPr lang="en-US" sz="1200" dirty="0">
+                    <a:latin typeface="Arial" panose="020B0604020202020204" pitchFamily="34" charset="0"/>
+                    <a:cs typeface="Arial" panose="020B0604020202020204" pitchFamily="34" charset="0"/>
+                  </a:rPr>
+                  <a:t> </a:t>
+                </a:r>
+                <a:r>
+                  <a:rPr lang="en-US" sz="1200" dirty="0" err="1">
+                    <a:latin typeface="Arial" panose="020B0604020202020204" pitchFamily="34" charset="0"/>
+                    <a:cs typeface="Arial" panose="020B0604020202020204" pitchFamily="34" charset="0"/>
+                  </a:rPr>
+                  <a:t>una</a:t>
+                </a:r>
+                <a:r>
+                  <a:rPr lang="en-US" sz="1200" dirty="0">
+                    <a:latin typeface="Arial" panose="020B0604020202020204" pitchFamily="34" charset="0"/>
+                    <a:cs typeface="Arial" panose="020B0604020202020204" pitchFamily="34" charset="0"/>
+                  </a:rPr>
+                  <a:t> </a:t>
+                </a:r>
+                <a:r>
+                  <a:rPr lang="en-US" sz="1200" dirty="0" err="1">
+                    <a:latin typeface="Arial" panose="020B0604020202020204" pitchFamily="34" charset="0"/>
+                    <a:cs typeface="Arial" panose="020B0604020202020204" pitchFamily="34" charset="0"/>
+                  </a:rPr>
+                  <a:t>aproximacion</a:t>
+                </a:r>
+                <a:r>
+                  <a:rPr lang="en-US" sz="1200" dirty="0">
+                    <a:latin typeface="Arial" panose="020B0604020202020204" pitchFamily="34" charset="0"/>
+                    <a:cs typeface="Arial" panose="020B0604020202020204" pitchFamily="34" charset="0"/>
+                  </a:rPr>
+                  <a:t> de sus indices </a:t>
+                </a:r>
+                <a:r>
+                  <a:rPr lang="en-US" sz="1200" dirty="0" err="1">
+                    <a:latin typeface="Arial" panose="020B0604020202020204" pitchFamily="34" charset="0"/>
+                    <a:cs typeface="Arial" panose="020B0604020202020204" pitchFamily="34" charset="0"/>
+                  </a:rPr>
+                  <a:t>efectivos</a:t>
+                </a:r>
+                <a:r>
+                  <a:rPr lang="en-US" sz="1200" dirty="0">
+                    <a:latin typeface="Arial" panose="020B0604020202020204" pitchFamily="34" charset="0"/>
+                    <a:cs typeface="Arial" panose="020B0604020202020204" pitchFamily="34" charset="0"/>
+                  </a:rPr>
+                  <a:t> </a:t>
+                </a:r>
+                <a:r>
+                  <a:rPr lang="en-US" sz="1200" dirty="0" err="1">
+                    <a:latin typeface="Arial" panose="020B0604020202020204" pitchFamily="34" charset="0"/>
+                    <a:cs typeface="Arial" panose="020B0604020202020204" pitchFamily="34" charset="0"/>
+                  </a:rPr>
+                  <a:t>en</a:t>
+                </a:r>
+                <a:r>
+                  <a:rPr lang="en-US" sz="1200" dirty="0">
+                    <a:latin typeface="Arial" panose="020B0604020202020204" pitchFamily="34" charset="0"/>
+                    <a:cs typeface="Arial" panose="020B0604020202020204" pitchFamily="34" charset="0"/>
+                  </a:rPr>
+                  <a:t> </a:t>
+                </a:r>
+                <a:r>
+                  <a:rPr lang="en-US" sz="1200" dirty="0" err="1">
+                    <a:latin typeface="Arial" panose="020B0604020202020204" pitchFamily="34" charset="0"/>
+                    <a:cs typeface="Arial" panose="020B0604020202020204" pitchFamily="34" charset="0"/>
+                  </a:rPr>
+                  <a:t>el</a:t>
+                </a:r>
+                <a:r>
+                  <a:rPr lang="en-US" sz="1200" dirty="0">
+                    <a:latin typeface="Arial" panose="020B0604020202020204" pitchFamily="34" charset="0"/>
+                    <a:cs typeface="Arial" panose="020B0604020202020204" pitchFamily="34" charset="0"/>
+                  </a:rPr>
+                  <a:t> </a:t>
+                </a:r>
+                <a:r>
+                  <a:rPr lang="en-US" sz="1200" dirty="0" err="1">
+                    <a:latin typeface="Arial" panose="020B0604020202020204" pitchFamily="34" charset="0"/>
+                    <a:cs typeface="Arial" panose="020B0604020202020204" pitchFamily="34" charset="0"/>
+                  </a:rPr>
+                  <a:t>rango</a:t>
+                </a:r>
+                <a:r>
+                  <a:rPr lang="en-US" sz="1200" dirty="0">
+                    <a:latin typeface="Arial" panose="020B0604020202020204" pitchFamily="34" charset="0"/>
+                    <a:cs typeface="Arial" panose="020B0604020202020204" pitchFamily="34" charset="0"/>
+                  </a:rPr>
+                  <a:t> de longitudes de </a:t>
+                </a:r>
+                <a:r>
+                  <a:rPr lang="en-US" sz="1200" dirty="0" err="1">
+                    <a:latin typeface="Arial" panose="020B0604020202020204" pitchFamily="34" charset="0"/>
+                    <a:cs typeface="Arial" panose="020B0604020202020204" pitchFamily="34" charset="0"/>
+                  </a:rPr>
+                  <a:t>onda</a:t>
+                </a:r>
+                <a:r>
+                  <a:rPr lang="en-US" sz="1200" dirty="0">
+                    <a:latin typeface="Arial" panose="020B0604020202020204" pitchFamily="34" charset="0"/>
+                    <a:cs typeface="Arial" panose="020B0604020202020204" pitchFamily="34" charset="0"/>
+                  </a:rPr>
+                  <a:t> de 1.50 a 1.6, </a:t>
+                </a:r>
+                <a:r>
+                  <a:rPr lang="en-US" sz="1200" dirty="0" err="1">
+                    <a:latin typeface="Arial" panose="020B0604020202020204" pitchFamily="34" charset="0"/>
+                    <a:cs typeface="Arial" panose="020B0604020202020204" pitchFamily="34" charset="0"/>
+                  </a:rPr>
+                  <a:t>tomando</a:t>
+                </a:r>
+                <a:r>
+                  <a:rPr lang="en-US" sz="1200" dirty="0">
+                    <a:latin typeface="Arial" panose="020B0604020202020204" pitchFamily="34" charset="0"/>
+                    <a:cs typeface="Arial" panose="020B0604020202020204" pitchFamily="34" charset="0"/>
+                  </a:rPr>
+                  <a:t> </a:t>
+                </a:r>
+                <a:r>
+                  <a:rPr lang="en-US" sz="1200" dirty="0" err="1">
+                    <a:latin typeface="Arial" panose="020B0604020202020204" pitchFamily="34" charset="0"/>
+                    <a:cs typeface="Arial" panose="020B0604020202020204" pitchFamily="34" charset="0"/>
+                  </a:rPr>
+                  <a:t>como</a:t>
+                </a:r>
+                <a:r>
+                  <a:rPr lang="en-US" sz="1200" dirty="0">
+                    <a:latin typeface="Arial" panose="020B0604020202020204" pitchFamily="34" charset="0"/>
+                    <a:cs typeface="Arial" panose="020B0604020202020204" pitchFamily="34" charset="0"/>
+                  </a:rPr>
+                  <a:t> </a:t>
+                </a:r>
+                <a:r>
+                  <a:rPr lang="en-US" sz="1200" dirty="0" err="1">
+                    <a:latin typeface="Arial" panose="020B0604020202020204" pitchFamily="34" charset="0"/>
+                    <a:cs typeface="Arial" panose="020B0604020202020204" pitchFamily="34" charset="0"/>
+                  </a:rPr>
+                  <a:t>referencia</a:t>
+                </a:r>
+                <a:r>
+                  <a:rPr lang="en-US" sz="1200" dirty="0">
+                    <a:latin typeface="Arial" panose="020B0604020202020204" pitchFamily="34" charset="0"/>
+                    <a:cs typeface="Arial" panose="020B0604020202020204" pitchFamily="34" charset="0"/>
+                  </a:rPr>
+                  <a:t> 1.55.</a:t>
                 </a:r>
               </a:p>
               <a:p>
@@ -3887,6 +4374,733 @@
                   <a:latin typeface="Arial" panose="020B0604020202020204" pitchFamily="34" charset="0"/>
                   <a:cs typeface="Arial" panose="020B0604020202020204" pitchFamily="34" charset="0"/>
                 </a:endParaRPr>
+              </a:p>
+              <a:p>
+                <a:pPr algn="just"/>
+                <a:r>
+                  <a:rPr lang="en-US" sz="1200" dirty="0">
+                    <a:latin typeface="Arial" panose="020B0604020202020204" pitchFamily="34" charset="0"/>
+                    <a:cs typeface="Arial" panose="020B0604020202020204" pitchFamily="34" charset="0"/>
+                  </a:rPr>
+                  <a:t>Para </a:t>
+                </a:r>
+                <a:r>
+                  <a:rPr lang="en-US" sz="1200" dirty="0" err="1">
+                    <a:latin typeface="Arial" panose="020B0604020202020204" pitchFamily="34" charset="0"/>
+                    <a:cs typeface="Arial" panose="020B0604020202020204" pitchFamily="34" charset="0"/>
+                  </a:rPr>
+                  <a:t>ello</a:t>
+                </a:r>
+                <a:r>
+                  <a:rPr lang="en-US" sz="1200" dirty="0">
+                    <a:latin typeface="Arial" panose="020B0604020202020204" pitchFamily="34" charset="0"/>
+                    <a:cs typeface="Arial" panose="020B0604020202020204" pitchFamily="34" charset="0"/>
+                  </a:rPr>
+                  <a:t>, se </a:t>
+                </a:r>
+                <a:r>
+                  <a:rPr lang="en-US" sz="1200" dirty="0" err="1">
+                    <a:latin typeface="Arial" panose="020B0604020202020204" pitchFamily="34" charset="0"/>
+                    <a:cs typeface="Arial" panose="020B0604020202020204" pitchFamily="34" charset="0"/>
+                  </a:rPr>
+                  <a:t>han</a:t>
+                </a:r>
+                <a:r>
+                  <a:rPr lang="en-US" sz="1200" dirty="0">
+                    <a:latin typeface="Arial" panose="020B0604020202020204" pitchFamily="34" charset="0"/>
+                    <a:cs typeface="Arial" panose="020B0604020202020204" pitchFamily="34" charset="0"/>
+                  </a:rPr>
+                  <a:t> </a:t>
+                </a:r>
+                <a:r>
+                  <a:rPr lang="en-US" sz="1200" dirty="0" err="1">
+                    <a:latin typeface="Arial" panose="020B0604020202020204" pitchFamily="34" charset="0"/>
+                    <a:cs typeface="Arial" panose="020B0604020202020204" pitchFamily="34" charset="0"/>
+                  </a:rPr>
+                  <a:t>tomado</a:t>
+                </a:r>
+                <a:r>
+                  <a:rPr lang="en-US" sz="1200" dirty="0">
+                    <a:latin typeface="Arial" panose="020B0604020202020204" pitchFamily="34" charset="0"/>
+                    <a:cs typeface="Arial" panose="020B0604020202020204" pitchFamily="34" charset="0"/>
+                  </a:rPr>
+                  <a:t> las dos </a:t>
+                </a:r>
+                <a:r>
+                  <a:rPr lang="en-US" sz="1200" dirty="0" err="1">
+                    <a:latin typeface="Arial" panose="020B0604020202020204" pitchFamily="34" charset="0"/>
+                    <a:cs typeface="Arial" panose="020B0604020202020204" pitchFamily="34" charset="0"/>
+                  </a:rPr>
+                  <a:t>funciones</a:t>
+                </a:r>
+                <a:r>
+                  <a:rPr lang="en-US" sz="1200" dirty="0">
+                    <a:latin typeface="Arial" panose="020B0604020202020204" pitchFamily="34" charset="0"/>
+                    <a:cs typeface="Arial" panose="020B0604020202020204" pitchFamily="34" charset="0"/>
+                  </a:rPr>
+                  <a:t> </a:t>
+                </a:r>
+                <a:r>
+                  <a:rPr lang="en-US" sz="1200" dirty="0" err="1">
+                    <a:latin typeface="Arial" panose="020B0604020202020204" pitchFamily="34" charset="0"/>
+                    <a:cs typeface="Arial" panose="020B0604020202020204" pitchFamily="34" charset="0"/>
+                  </a:rPr>
+                  <a:t>creadas</a:t>
+                </a:r>
+                <a:r>
+                  <a:rPr lang="en-US" sz="1200" dirty="0">
+                    <a:latin typeface="Arial" panose="020B0604020202020204" pitchFamily="34" charset="0"/>
+                    <a:cs typeface="Arial" panose="020B0604020202020204" pitchFamily="34" charset="0"/>
+                  </a:rPr>
+                  <a:t> </a:t>
+                </a:r>
+                <a:r>
+                  <a:rPr lang="en-US" sz="1200" dirty="0" err="1">
+                    <a:latin typeface="Arial" panose="020B0604020202020204" pitchFamily="34" charset="0"/>
+                    <a:cs typeface="Arial" panose="020B0604020202020204" pitchFamily="34" charset="0"/>
+                  </a:rPr>
+                  <a:t>en</a:t>
+                </a:r>
+                <a:r>
+                  <a:rPr lang="en-US" sz="1200" dirty="0">
+                    <a:latin typeface="Arial" panose="020B0604020202020204" pitchFamily="34" charset="0"/>
+                    <a:cs typeface="Arial" panose="020B0604020202020204" pitchFamily="34" charset="0"/>
+                  </a:rPr>
+                  <a:t> </a:t>
+                </a:r>
+                <a:r>
+                  <a:rPr lang="en-US" sz="1200" dirty="0" err="1">
+                    <a:latin typeface="Arial" panose="020B0604020202020204" pitchFamily="34" charset="0"/>
+                    <a:cs typeface="Arial" panose="020B0604020202020204" pitchFamily="34" charset="0"/>
+                  </a:rPr>
+                  <a:t>el</a:t>
+                </a:r>
+                <a:r>
+                  <a:rPr lang="en-US" sz="1200" dirty="0">
+                    <a:latin typeface="Arial" panose="020B0604020202020204" pitchFamily="34" charset="0"/>
+                    <a:cs typeface="Arial" panose="020B0604020202020204" pitchFamily="34" charset="0"/>
+                  </a:rPr>
+                  <a:t> LO.2, tanto para la deep </a:t>
+                </a:r>
+                <a:r>
+                  <a:rPr lang="en-US" sz="1200" dirty="0" err="1">
+                    <a:latin typeface="Arial" panose="020B0604020202020204" pitchFamily="34" charset="0"/>
+                    <a:cs typeface="Arial" panose="020B0604020202020204" pitchFamily="34" charset="0"/>
+                  </a:rPr>
+                  <a:t>como</a:t>
+                </a:r>
+                <a:r>
+                  <a:rPr lang="en-US" sz="1200" dirty="0">
+                    <a:latin typeface="Arial" panose="020B0604020202020204" pitchFamily="34" charset="0"/>
+                    <a:cs typeface="Arial" panose="020B0604020202020204" pitchFamily="34" charset="0"/>
+                  </a:rPr>
+                  <a:t> para la shallow. A </a:t>
+                </a:r>
+                <a:r>
+                  <a:rPr lang="en-US" sz="1200" dirty="0" err="1">
+                    <a:latin typeface="Arial" panose="020B0604020202020204" pitchFamily="34" charset="0"/>
+                    <a:cs typeface="Arial" panose="020B0604020202020204" pitchFamily="34" charset="0"/>
+                  </a:rPr>
+                  <a:t>partir</a:t>
+                </a:r>
+                <a:r>
+                  <a:rPr lang="en-US" sz="1200" dirty="0">
+                    <a:latin typeface="Arial" panose="020B0604020202020204" pitchFamily="34" charset="0"/>
+                    <a:cs typeface="Arial" panose="020B0604020202020204" pitchFamily="34" charset="0"/>
+                  </a:rPr>
+                  <a:t> </a:t>
+                </a:r>
+                <a:r>
+                  <a:rPr lang="es-ES" sz="1200" dirty="0"/>
+                  <a:t>de los resultados obtenidos con el </a:t>
+                </a:r>
+                <a:r>
+                  <a:rPr lang="es-ES" sz="1200" dirty="0" err="1"/>
+                  <a:t>ModeSolver</a:t>
+                </a:r>
+                <a:r>
+                  <a:rPr lang="en-US" sz="1200" dirty="0">
+                    <a:latin typeface="Arial" panose="020B0604020202020204" pitchFamily="34" charset="0"/>
+                    <a:cs typeface="Arial" panose="020B0604020202020204" pitchFamily="34" charset="0"/>
+                  </a:rPr>
+                  <a:t>, </a:t>
+                </a:r>
+                <a:r>
+                  <a:rPr lang="es-ES" sz="1200" dirty="0"/>
+                  <a:t>se ha realizado un ajuste polinómico de segundo orden en torno a </a:t>
+                </a:r>
+                <a:r>
+                  <a:rPr lang="el-GR" sz="1200" dirty="0"/>
+                  <a:t>λ₀, </a:t>
+                </a:r>
+                <a:r>
+                  <a:rPr lang="es-ES" sz="1200" dirty="0"/>
+                  <a:t>obteniendo los coeficientes </a:t>
+                </a:r>
+                <a14:m>
+                  <m:oMath xmlns:m="http://schemas.openxmlformats.org/officeDocument/2006/math">
+                    <m:sSub>
+                      <m:sSubPr>
+                        <m:ctrlPr>
+                          <a:rPr lang="ar-AE"/>
+                        </m:ctrlPr>
+                      </m:sSubPr>
+                      <m:e>
+                        <m:r>
+                          <a:rPr lang="ar-AE" i="1"/>
+                          <m:t>𝑛</m:t>
+                        </m:r>
+                      </m:e>
+                      <m:sub>
+                        <m:r>
+                          <a:rPr lang="ar-AE"/>
+                          <m:t>1</m:t>
+                        </m:r>
+                      </m:sub>
+                    </m:sSub>
+                  </m:oMath>
+                </a14:m>
+                <a:r>
+                  <a:rPr lang="ar-AE" sz="1200" dirty="0"/>
+                  <a:t>, </a:t>
+                </a:r>
+                <a14:m>
+                  <m:oMath xmlns:m="http://schemas.openxmlformats.org/officeDocument/2006/math">
+                    <m:sSub>
+                      <m:sSubPr>
+                        <m:ctrlPr>
+                          <a:rPr lang="ar-AE"/>
+                        </m:ctrlPr>
+                      </m:sSubPr>
+                      <m:e>
+                        <m:r>
+                          <a:rPr lang="ar-AE" i="1"/>
+                          <m:t>𝑛</m:t>
+                        </m:r>
+                      </m:e>
+                      <m:sub>
+                        <m:r>
+                          <a:rPr lang="ar-AE"/>
+                          <m:t>2</m:t>
+                        </m:r>
+                      </m:sub>
+                    </m:sSub>
+                  </m:oMath>
+                </a14:m>
+                <a:r>
+                  <a:rPr lang="es-ES" sz="1200" dirty="0"/>
+                  <a:t>y </a:t>
+                </a:r>
+                <a14:m>
+                  <m:oMath xmlns:m="http://schemas.openxmlformats.org/officeDocument/2006/math">
+                    <m:sSub>
+                      <m:sSubPr>
+                        <m:ctrlPr>
+                          <a:rPr lang="ar-AE"/>
+                        </m:ctrlPr>
+                      </m:sSubPr>
+                      <m:e>
+                        <m:r>
+                          <a:rPr lang="ar-AE" i="1"/>
+                          <m:t>𝑛</m:t>
+                        </m:r>
+                      </m:e>
+                      <m:sub>
+                        <m:r>
+                          <a:rPr lang="ar-AE"/>
+                          <m:t>3</m:t>
+                        </m:r>
+                      </m:sub>
+                    </m:sSub>
+                  </m:oMath>
+                </a14:m>
+                <a:r>
+                  <a:rPr lang="ar-AE" sz="1200" dirty="0"/>
+                  <a:t>, </a:t>
+                </a:r>
+                <a:r>
+                  <a:rPr lang="es-ES" sz="1200" dirty="0"/>
+                  <a:t>así como el índice de grupo y el parámetro de dispersión.</a:t>
+                </a:r>
+                <a:r>
+                  <a:rPr lang="en-US" sz="1200" dirty="0">
+                    <a:latin typeface="Arial" panose="020B0604020202020204" pitchFamily="34" charset="0"/>
+                    <a:cs typeface="Arial" panose="020B0604020202020204" pitchFamily="34" charset="0"/>
+                  </a:rPr>
+                  <a:t>. </a:t>
+                </a:r>
+              </a:p>
+              <a:p>
+                <a:pPr algn="just"/>
+                <a:endParaRPr lang="en-US" sz="1200" dirty="0">
+                  <a:latin typeface="Arial" panose="020B0604020202020204" pitchFamily="34" charset="0"/>
+                  <a:cs typeface="Arial" panose="020B0604020202020204" pitchFamily="34" charset="0"/>
+                </a:endParaRPr>
+              </a:p>
+              <a:p>
+                <a:pPr algn="just"/>
+                <a:r>
+                  <a:rPr lang="en-US" sz="1200" dirty="0" err="1">
+                    <a:latin typeface="Arial" panose="020B0604020202020204" pitchFamily="34" charset="0"/>
+                    <a:cs typeface="Arial" panose="020B0604020202020204" pitchFamily="34" charset="0"/>
+                  </a:rPr>
+                  <a:t>Posteriormente</a:t>
+                </a:r>
+                <a:r>
+                  <a:rPr lang="en-US" sz="1200" dirty="0">
+                    <a:latin typeface="Arial" panose="020B0604020202020204" pitchFamily="34" charset="0"/>
+                    <a:cs typeface="Arial" panose="020B0604020202020204" pitchFamily="34" charset="0"/>
+                  </a:rPr>
+                  <a:t>, se </a:t>
+                </a:r>
+                <a:r>
+                  <a:rPr lang="en-US" sz="1200" dirty="0" err="1">
+                    <a:latin typeface="Arial" panose="020B0604020202020204" pitchFamily="34" charset="0"/>
+                    <a:cs typeface="Arial" panose="020B0604020202020204" pitchFamily="34" charset="0"/>
+                  </a:rPr>
+                  <a:t>han</a:t>
+                </a:r>
+                <a:r>
+                  <a:rPr lang="en-US" sz="1200" dirty="0">
+                    <a:latin typeface="Arial" panose="020B0604020202020204" pitchFamily="34" charset="0"/>
+                    <a:cs typeface="Arial" panose="020B0604020202020204" pitchFamily="34" charset="0"/>
+                  </a:rPr>
+                  <a:t> </a:t>
+                </a:r>
+                <a:r>
+                  <a:rPr lang="en-US" sz="1200" dirty="0" err="1">
+                    <a:latin typeface="Arial" panose="020B0604020202020204" pitchFamily="34" charset="0"/>
+                    <a:cs typeface="Arial" panose="020B0604020202020204" pitchFamily="34" charset="0"/>
+                  </a:rPr>
+                  <a:t>analizado</a:t>
+                </a:r>
+                <a:r>
+                  <a:rPr lang="en-US" sz="1200" dirty="0">
+                    <a:latin typeface="Arial" panose="020B0604020202020204" pitchFamily="34" charset="0"/>
+                    <a:cs typeface="Arial" panose="020B0604020202020204" pitchFamily="34" charset="0"/>
+                  </a:rPr>
+                  <a:t> </a:t>
+                </a:r>
+                <a:r>
+                  <a:rPr lang="en-US" sz="1200" dirty="0" err="1">
+                    <a:latin typeface="Arial" panose="020B0604020202020204" pitchFamily="34" charset="0"/>
+                    <a:cs typeface="Arial" panose="020B0604020202020204" pitchFamily="34" charset="0"/>
+                  </a:rPr>
+                  <a:t>los</a:t>
+                </a:r>
+                <a:r>
+                  <a:rPr lang="en-US" sz="1200" dirty="0">
+                    <a:latin typeface="Arial" panose="020B0604020202020204" pitchFamily="34" charset="0"/>
+                    <a:cs typeface="Arial" panose="020B0604020202020204" pitchFamily="34" charset="0"/>
+                  </a:rPr>
+                  <a:t> </a:t>
+                </a:r>
+                <a:r>
+                  <a:rPr lang="en-US" sz="1200" dirty="0" err="1">
+                    <a:latin typeface="Arial" panose="020B0604020202020204" pitchFamily="34" charset="0"/>
+                    <a:cs typeface="Arial" panose="020B0604020202020204" pitchFamily="34" charset="0"/>
+                  </a:rPr>
+                  <a:t>resultados</a:t>
+                </a:r>
+                <a:r>
+                  <a:rPr lang="en-US" sz="1200" dirty="0">
+                    <a:latin typeface="Arial" panose="020B0604020202020204" pitchFamily="34" charset="0"/>
+                    <a:cs typeface="Arial" panose="020B0604020202020204" pitchFamily="34" charset="0"/>
+                  </a:rPr>
+                  <a:t> y se ha </a:t>
+                </a:r>
+                <a:r>
+                  <a:rPr lang="en-US" sz="1200" dirty="0" err="1">
+                    <a:latin typeface="Arial" panose="020B0604020202020204" pitchFamily="34" charset="0"/>
+                    <a:cs typeface="Arial" panose="020B0604020202020204" pitchFamily="34" charset="0"/>
+                  </a:rPr>
+                  <a:t>llegado</a:t>
+                </a:r>
+                <a:r>
+                  <a:rPr lang="en-US" sz="1200" dirty="0">
+                    <a:latin typeface="Arial" panose="020B0604020202020204" pitchFamily="34" charset="0"/>
+                    <a:cs typeface="Arial" panose="020B0604020202020204" pitchFamily="34" charset="0"/>
+                  </a:rPr>
+                  <a:t> a la conclusion de </a:t>
+                </a:r>
+                <a:r>
+                  <a:rPr lang="en-US" sz="1200" dirty="0" err="1">
+                    <a:latin typeface="Arial" panose="020B0604020202020204" pitchFamily="34" charset="0"/>
+                    <a:cs typeface="Arial" panose="020B0604020202020204" pitchFamily="34" charset="0"/>
+                  </a:rPr>
+                  <a:t>que</a:t>
+                </a:r>
+                <a:r>
+                  <a:rPr lang="en-US" sz="1200" dirty="0">
+                    <a:latin typeface="Arial" panose="020B0604020202020204" pitchFamily="34" charset="0"/>
+                    <a:cs typeface="Arial" panose="020B0604020202020204" pitchFamily="34" charset="0"/>
+                  </a:rPr>
+                  <a:t> son </a:t>
+                </a:r>
+                <a:r>
+                  <a:rPr lang="en-US" sz="1200" dirty="0" err="1">
+                    <a:latin typeface="Arial" panose="020B0604020202020204" pitchFamily="34" charset="0"/>
+                    <a:cs typeface="Arial" panose="020B0604020202020204" pitchFamily="34" charset="0"/>
+                  </a:rPr>
+                  <a:t>correctos</a:t>
+                </a:r>
+                <a:r>
+                  <a:rPr lang="en-US" sz="1200" dirty="0">
+                    <a:latin typeface="Arial" panose="020B0604020202020204" pitchFamily="34" charset="0"/>
+                    <a:cs typeface="Arial" panose="020B0604020202020204" pitchFamily="34" charset="0"/>
+                  </a:rPr>
+                  <a:t>, </a:t>
+                </a:r>
+                <a:r>
+                  <a:rPr lang="en-US" sz="1200" dirty="0" err="1">
+                    <a:latin typeface="Arial" panose="020B0604020202020204" pitchFamily="34" charset="0"/>
+                    <a:cs typeface="Arial" panose="020B0604020202020204" pitchFamily="34" charset="0"/>
+                  </a:rPr>
+                  <a:t>ya</a:t>
+                </a:r>
+                <a:r>
+                  <a:rPr lang="en-US" sz="1200" dirty="0">
+                    <a:latin typeface="Arial" panose="020B0604020202020204" pitchFamily="34" charset="0"/>
+                    <a:cs typeface="Arial" panose="020B0604020202020204" pitchFamily="34" charset="0"/>
+                  </a:rPr>
+                  <a:t> </a:t>
+                </a:r>
+                <a:r>
+                  <a:rPr lang="en-US" sz="1200" dirty="0" err="1">
+                    <a:latin typeface="Arial" panose="020B0604020202020204" pitchFamily="34" charset="0"/>
+                    <a:cs typeface="Arial" panose="020B0604020202020204" pitchFamily="34" charset="0"/>
+                  </a:rPr>
+                  <a:t>que</a:t>
+                </a:r>
+                <a:r>
+                  <a:rPr lang="en-US" sz="1200" dirty="0">
+                    <a:latin typeface="Arial" panose="020B0604020202020204" pitchFamily="34" charset="0"/>
+                    <a:cs typeface="Arial" panose="020B0604020202020204" pitchFamily="34" charset="0"/>
+                  </a:rPr>
+                  <a:t> </a:t>
+                </a:r>
+                <a:r>
+                  <a:rPr lang="en-US" sz="1200" dirty="0" err="1">
+                    <a:latin typeface="Arial" panose="020B0604020202020204" pitchFamily="34" charset="0"/>
+                    <a:cs typeface="Arial" panose="020B0604020202020204" pitchFamily="34" charset="0"/>
+                  </a:rPr>
+                  <a:t>el</a:t>
+                </a:r>
+                <a:r>
+                  <a:rPr lang="en-US" sz="1200" dirty="0">
+                    <a:latin typeface="Arial" panose="020B0604020202020204" pitchFamily="34" charset="0"/>
+                    <a:cs typeface="Arial" panose="020B0604020202020204" pitchFamily="34" charset="0"/>
+                  </a:rPr>
+                  <a:t> </a:t>
+                </a:r>
+                <a:r>
+                  <a:rPr lang="en-US" sz="1200" dirty="0" err="1">
+                    <a:latin typeface="Arial" panose="020B0604020202020204" pitchFamily="34" charset="0"/>
+                    <a:cs typeface="Arial" panose="020B0604020202020204" pitchFamily="34" charset="0"/>
+                  </a:rPr>
+                  <a:t>coeficiente</a:t>
+                </a:r>
+                <a:r>
+                  <a:rPr lang="en-US" sz="1200" dirty="0">
+                    <a:latin typeface="Arial" panose="020B0604020202020204" pitchFamily="34" charset="0"/>
+                    <a:cs typeface="Arial" panose="020B0604020202020204" pitchFamily="34" charset="0"/>
+                  </a:rPr>
+                  <a:t> n1 </a:t>
+                </a:r>
+                <a:r>
+                  <a:rPr lang="en-US" sz="1200" dirty="0" err="1">
+                    <a:latin typeface="Arial" panose="020B0604020202020204" pitchFamily="34" charset="0"/>
+                    <a:cs typeface="Arial" panose="020B0604020202020204" pitchFamily="34" charset="0"/>
+                  </a:rPr>
+                  <a:t>corresponde</a:t>
+                </a:r>
+                <a:r>
+                  <a:rPr lang="en-US" sz="1200" dirty="0">
+                    <a:latin typeface="Arial" panose="020B0604020202020204" pitchFamily="34" charset="0"/>
+                    <a:cs typeface="Arial" panose="020B0604020202020204" pitchFamily="34" charset="0"/>
+                  </a:rPr>
+                  <a:t> al </a:t>
+                </a:r>
+                <a:r>
+                  <a:rPr lang="en-US" sz="1200" dirty="0" err="1">
+                    <a:latin typeface="Arial" panose="020B0604020202020204" pitchFamily="34" charset="0"/>
+                    <a:cs typeface="Arial" panose="020B0604020202020204" pitchFamily="34" charset="0"/>
+                  </a:rPr>
+                  <a:t>indice</a:t>
+                </a:r>
+                <a:r>
+                  <a:rPr lang="en-US" sz="1200" dirty="0">
+                    <a:latin typeface="Arial" panose="020B0604020202020204" pitchFamily="34" charset="0"/>
+                    <a:cs typeface="Arial" panose="020B0604020202020204" pitchFamily="34" charset="0"/>
+                  </a:rPr>
+                  <a:t> </a:t>
+                </a:r>
+                <a:r>
+                  <a:rPr lang="en-US" sz="1200" dirty="0" err="1">
+                    <a:latin typeface="Arial" panose="020B0604020202020204" pitchFamily="34" charset="0"/>
+                    <a:cs typeface="Arial" panose="020B0604020202020204" pitchFamily="34" charset="0"/>
+                  </a:rPr>
+                  <a:t>efectivo</a:t>
+                </a:r>
+                <a:r>
+                  <a:rPr lang="en-US" sz="1200" dirty="0">
+                    <a:latin typeface="Arial" panose="020B0604020202020204" pitchFamily="34" charset="0"/>
+                    <a:cs typeface="Arial" panose="020B0604020202020204" pitchFamily="34" charset="0"/>
+                  </a:rPr>
+                  <a:t> </a:t>
+                </a:r>
+                <a:r>
+                  <a:rPr lang="en-US" sz="1200" dirty="0" err="1">
+                    <a:latin typeface="Arial" panose="020B0604020202020204" pitchFamily="34" charset="0"/>
+                    <a:cs typeface="Arial" panose="020B0604020202020204" pitchFamily="34" charset="0"/>
+                  </a:rPr>
+                  <a:t>en</a:t>
+                </a:r>
+                <a:r>
+                  <a:rPr lang="en-US" sz="1200" dirty="0">
+                    <a:latin typeface="Arial" panose="020B0604020202020204" pitchFamily="34" charset="0"/>
+                    <a:cs typeface="Arial" panose="020B0604020202020204" pitchFamily="34" charset="0"/>
+                  </a:rPr>
+                  <a:t> </a:t>
+                </a:r>
+                <a:r>
+                  <a:rPr lang="en-US" sz="1200" dirty="0" err="1">
+                    <a:latin typeface="Arial" panose="020B0604020202020204" pitchFamily="34" charset="0"/>
+                    <a:cs typeface="Arial" panose="020B0604020202020204" pitchFamily="34" charset="0"/>
+                  </a:rPr>
+                  <a:t>cada</a:t>
+                </a:r>
+                <a:r>
+                  <a:rPr lang="en-US" sz="1200" dirty="0">
+                    <a:latin typeface="Arial" panose="020B0604020202020204" pitchFamily="34" charset="0"/>
+                    <a:cs typeface="Arial" panose="020B0604020202020204" pitchFamily="34" charset="0"/>
+                  </a:rPr>
+                  <a:t> modo </a:t>
+                </a:r>
+                <a:r>
+                  <a:rPr lang="en-US" sz="1200" dirty="0" err="1">
+                    <a:latin typeface="Arial" panose="020B0604020202020204" pitchFamily="34" charset="0"/>
+                    <a:cs typeface="Arial" panose="020B0604020202020204" pitchFamily="34" charset="0"/>
+                  </a:rPr>
+                  <a:t>en</a:t>
+                </a:r>
+                <a:r>
+                  <a:rPr lang="en-US" sz="1200" dirty="0">
+                    <a:latin typeface="Arial" panose="020B0604020202020204" pitchFamily="34" charset="0"/>
+                    <a:cs typeface="Arial" panose="020B0604020202020204" pitchFamily="34" charset="0"/>
+                  </a:rPr>
+                  <a:t> la longitude de </a:t>
+                </a:r>
+                <a:r>
+                  <a:rPr lang="en-US" sz="1200" dirty="0" err="1">
+                    <a:latin typeface="Arial" panose="020B0604020202020204" pitchFamily="34" charset="0"/>
+                    <a:cs typeface="Arial" panose="020B0604020202020204" pitchFamily="34" charset="0"/>
+                  </a:rPr>
+                  <a:t>onda</a:t>
+                </a:r>
+                <a:r>
+                  <a:rPr lang="en-US" sz="1200" dirty="0">
+                    <a:latin typeface="Arial" panose="020B0604020202020204" pitchFamily="34" charset="0"/>
+                    <a:cs typeface="Arial" panose="020B0604020202020204" pitchFamily="34" charset="0"/>
+                  </a:rPr>
+                  <a:t> de </a:t>
+                </a:r>
+                <a:r>
+                  <a:rPr lang="en-US" sz="1200" dirty="0" err="1">
+                    <a:latin typeface="Arial" panose="020B0604020202020204" pitchFamily="34" charset="0"/>
+                    <a:cs typeface="Arial" panose="020B0604020202020204" pitchFamily="34" charset="0"/>
+                  </a:rPr>
+                  <a:t>referencia</a:t>
+                </a:r>
+                <a:r>
+                  <a:rPr lang="en-US" sz="1200" dirty="0">
+                    <a:latin typeface="Arial" panose="020B0604020202020204" pitchFamily="34" charset="0"/>
+                    <a:cs typeface="Arial" panose="020B0604020202020204" pitchFamily="34" charset="0"/>
+                  </a:rPr>
+                  <a:t>, la dispersion da </a:t>
+                </a:r>
+                <a:r>
+                  <a:rPr lang="en-US" sz="1200" dirty="0" err="1">
+                    <a:latin typeface="Arial" panose="020B0604020202020204" pitchFamily="34" charset="0"/>
+                    <a:cs typeface="Arial" panose="020B0604020202020204" pitchFamily="34" charset="0"/>
+                  </a:rPr>
+                  <a:t>negativo</a:t>
+                </a:r>
+                <a:r>
+                  <a:rPr lang="en-US" sz="1200" dirty="0">
+                    <a:latin typeface="Arial" panose="020B0604020202020204" pitchFamily="34" charset="0"/>
+                    <a:cs typeface="Arial" panose="020B0604020202020204" pitchFamily="34" charset="0"/>
+                  </a:rPr>
+                  <a:t> </a:t>
+                </a:r>
+                <a:r>
+                  <a:rPr lang="en-US" sz="1200" dirty="0" err="1">
+                    <a:latin typeface="Arial" panose="020B0604020202020204" pitchFamily="34" charset="0"/>
+                    <a:cs typeface="Arial" panose="020B0604020202020204" pitchFamily="34" charset="0"/>
+                  </a:rPr>
+                  <a:t>ya</a:t>
+                </a:r>
+                <a:r>
+                  <a:rPr lang="en-US" sz="1200" dirty="0">
+                    <a:latin typeface="Arial" panose="020B0604020202020204" pitchFamily="34" charset="0"/>
+                    <a:cs typeface="Arial" panose="020B0604020202020204" pitchFamily="34" charset="0"/>
+                  </a:rPr>
+                  <a:t> </a:t>
+                </a:r>
+                <a:r>
+                  <a:rPr lang="en-US" sz="1200" dirty="0" err="1">
+                    <a:latin typeface="Arial" panose="020B0604020202020204" pitchFamily="34" charset="0"/>
+                    <a:cs typeface="Arial" panose="020B0604020202020204" pitchFamily="34" charset="0"/>
+                  </a:rPr>
+                  <a:t>que</a:t>
+                </a:r>
+                <a:r>
+                  <a:rPr lang="en-US" sz="1200" dirty="0">
+                    <a:latin typeface="Arial" panose="020B0604020202020204" pitchFamily="34" charset="0"/>
+                    <a:cs typeface="Arial" panose="020B0604020202020204" pitchFamily="34" charset="0"/>
+                  </a:rPr>
+                  <a:t> </a:t>
+                </a:r>
+                <a:r>
+                  <a:rPr lang="en-US" sz="1200" dirty="0" err="1">
+                    <a:latin typeface="Arial" panose="020B0604020202020204" pitchFamily="34" charset="0"/>
+                    <a:cs typeface="Arial" panose="020B0604020202020204" pitchFamily="34" charset="0"/>
+                  </a:rPr>
+                  <a:t>el</a:t>
+                </a:r>
+                <a:r>
+                  <a:rPr lang="en-US" sz="1200" dirty="0">
+                    <a:latin typeface="Arial" panose="020B0604020202020204" pitchFamily="34" charset="0"/>
+                    <a:cs typeface="Arial" panose="020B0604020202020204" pitchFamily="34" charset="0"/>
+                  </a:rPr>
+                  <a:t> </a:t>
+                </a:r>
+                <a:r>
+                  <a:rPr lang="en-US" sz="1200" dirty="0" err="1">
+                    <a:latin typeface="Arial" panose="020B0604020202020204" pitchFamily="34" charset="0"/>
+                    <a:cs typeface="Arial" panose="020B0604020202020204" pitchFamily="34" charset="0"/>
+                  </a:rPr>
+                  <a:t>indice</a:t>
+                </a:r>
+                <a:r>
+                  <a:rPr lang="en-US" sz="1200" dirty="0">
+                    <a:latin typeface="Arial" panose="020B0604020202020204" pitchFamily="34" charset="0"/>
+                    <a:cs typeface="Arial" panose="020B0604020202020204" pitchFamily="34" charset="0"/>
+                  </a:rPr>
+                  <a:t> n3 es </a:t>
+                </a:r>
+                <a:r>
+                  <a:rPr lang="en-US" sz="1200" dirty="0" err="1">
+                    <a:latin typeface="Arial" panose="020B0604020202020204" pitchFamily="34" charset="0"/>
+                    <a:cs typeface="Arial" panose="020B0604020202020204" pitchFamily="34" charset="0"/>
+                  </a:rPr>
+                  <a:t>positivo</a:t>
+                </a:r>
+                <a:r>
+                  <a:rPr lang="en-US" sz="1200" dirty="0">
+                    <a:latin typeface="Arial" panose="020B0604020202020204" pitchFamily="34" charset="0"/>
+                    <a:cs typeface="Arial" panose="020B0604020202020204" pitchFamily="34" charset="0"/>
+                  </a:rPr>
+                  <a:t>, y </a:t>
+                </a:r>
+                <a:r>
+                  <a:rPr lang="en-US" sz="1200" dirty="0" err="1">
+                    <a:latin typeface="Arial" panose="020B0604020202020204" pitchFamily="34" charset="0"/>
+                    <a:cs typeface="Arial" panose="020B0604020202020204" pitchFamily="34" charset="0"/>
+                  </a:rPr>
+                  <a:t>ademas</a:t>
+                </a:r>
+                <a:r>
+                  <a:rPr lang="en-US" sz="1200" dirty="0">
+                    <a:latin typeface="Arial" panose="020B0604020202020204" pitchFamily="34" charset="0"/>
+                    <a:cs typeface="Arial" panose="020B0604020202020204" pitchFamily="34" charset="0"/>
+                  </a:rPr>
+                  <a:t> </a:t>
+                </a:r>
+                <a:r>
+                  <a:rPr lang="en-US" sz="1200" dirty="0" err="1">
+                    <a:latin typeface="Arial" panose="020B0604020202020204" pitchFamily="34" charset="0"/>
+                    <a:cs typeface="Arial" panose="020B0604020202020204" pitchFamily="34" charset="0"/>
+                  </a:rPr>
+                  <a:t>el</a:t>
+                </a:r>
+                <a:r>
+                  <a:rPr lang="en-US" sz="1200" dirty="0">
+                    <a:latin typeface="Arial" panose="020B0604020202020204" pitchFamily="34" charset="0"/>
+                    <a:cs typeface="Arial" panose="020B0604020202020204" pitchFamily="34" charset="0"/>
+                  </a:rPr>
+                  <a:t> n2 es </a:t>
+                </a:r>
+                <a:r>
+                  <a:rPr lang="en-US" sz="1200" dirty="0" err="1">
+                    <a:latin typeface="Arial" panose="020B0604020202020204" pitchFamily="34" charset="0"/>
+                    <a:cs typeface="Arial" panose="020B0604020202020204" pitchFamily="34" charset="0"/>
+                  </a:rPr>
+                  <a:t>menor</a:t>
+                </a:r>
+                <a:r>
+                  <a:rPr lang="en-US" sz="1200" dirty="0">
+                    <a:latin typeface="Arial" panose="020B0604020202020204" pitchFamily="34" charset="0"/>
+                    <a:cs typeface="Arial" panose="020B0604020202020204" pitchFamily="34" charset="0"/>
+                  </a:rPr>
+                  <a:t> </a:t>
+                </a:r>
+                <a:r>
+                  <a:rPr lang="en-US" sz="1200" dirty="0" err="1">
+                    <a:latin typeface="Arial" panose="020B0604020202020204" pitchFamily="34" charset="0"/>
+                    <a:cs typeface="Arial" panose="020B0604020202020204" pitchFamily="34" charset="0"/>
+                  </a:rPr>
+                  <a:t>que</a:t>
+                </a:r>
+                <a:r>
+                  <a:rPr lang="en-US" sz="1200" dirty="0">
+                    <a:latin typeface="Arial" panose="020B0604020202020204" pitchFamily="34" charset="0"/>
+                    <a:cs typeface="Arial" panose="020B0604020202020204" pitchFamily="34" charset="0"/>
+                  </a:rPr>
+                  <a:t> 0 al ser </a:t>
+                </a:r>
+                <a:r>
+                  <a:rPr lang="en-US" sz="1200" dirty="0" err="1">
+                    <a:latin typeface="Arial" panose="020B0604020202020204" pitchFamily="34" charset="0"/>
+                    <a:cs typeface="Arial" panose="020B0604020202020204" pitchFamily="34" charset="0"/>
+                  </a:rPr>
+                  <a:t>una</a:t>
+                </a:r>
+                <a:r>
+                  <a:rPr lang="en-US" sz="1200" dirty="0">
+                    <a:latin typeface="Arial" panose="020B0604020202020204" pitchFamily="34" charset="0"/>
+                    <a:cs typeface="Arial" panose="020B0604020202020204" pitchFamily="34" charset="0"/>
+                  </a:rPr>
+                  <a:t> </a:t>
+                </a:r>
+                <a:r>
+                  <a:rPr lang="en-US" sz="1200" dirty="0" err="1">
+                    <a:latin typeface="Arial" panose="020B0604020202020204" pitchFamily="34" charset="0"/>
+                    <a:cs typeface="Arial" panose="020B0604020202020204" pitchFamily="34" charset="0"/>
+                  </a:rPr>
+                  <a:t>pendiente</a:t>
+                </a:r>
+                <a:r>
+                  <a:rPr lang="en-US" sz="1200" dirty="0">
+                    <a:latin typeface="Arial" panose="020B0604020202020204" pitchFamily="34" charset="0"/>
+                    <a:cs typeface="Arial" panose="020B0604020202020204" pitchFamily="34" charset="0"/>
+                  </a:rPr>
+                  <a:t> </a:t>
+                </a:r>
+                <a:r>
+                  <a:rPr lang="en-US" sz="1200" dirty="0" err="1">
+                    <a:latin typeface="Arial" panose="020B0604020202020204" pitchFamily="34" charset="0"/>
+                    <a:cs typeface="Arial" panose="020B0604020202020204" pitchFamily="34" charset="0"/>
+                  </a:rPr>
+                  <a:t>negativa</a:t>
+                </a:r>
+                <a:r>
+                  <a:rPr lang="en-US" sz="1200" dirty="0">
+                    <a:latin typeface="Arial" panose="020B0604020202020204" pitchFamily="34" charset="0"/>
+                    <a:cs typeface="Arial" panose="020B0604020202020204" pitchFamily="34" charset="0"/>
+                  </a:rPr>
+                  <a:t>. </a:t>
+                </a:r>
               </a:p>
             </p:txBody>
           </p:sp>
@@ -3909,7 +5123,7 @@
             <p:spPr>
               <a:xfrm>
                 <a:off x="609441" y="4860334"/>
-                <a:ext cx="11198542" cy="1361911"/>
+                <a:ext cx="11198542" cy="2925224"/>
               </a:xfrm>
               <a:prstGeom prst="rect">
                 <a:avLst/>
@@ -4045,298 +5259,6 @@
           </a:p>
         </p:txBody>
       </p:sp>
-      <mc:AlternateContent xmlns:mc="http://schemas.openxmlformats.org/markup-compatibility/2006" xmlns:a14="http://schemas.microsoft.com/office/drawing/2010/main">
-        <mc:Choice Requires="a14">
-          <p:sp>
-            <p:nvSpPr>
-              <p:cNvPr id="9" name="CuadroTexto 8">
-                <a:extLst>
-                  <a:ext uri="{FF2B5EF4-FFF2-40B4-BE49-F238E27FC236}">
-                    <a16:creationId xmlns:a16="http://schemas.microsoft.com/office/drawing/2014/main" id="{C59B6428-4395-242F-54D8-A9FC610F2D7A}"/>
-                  </a:ext>
-                </a:extLst>
-              </p:cNvPr>
-              <p:cNvSpPr txBox="1"/>
-              <p:nvPr/>
-            </p:nvSpPr>
-            <p:spPr>
-              <a:xfrm>
-                <a:off x="609440" y="2709096"/>
-                <a:ext cx="5486559" cy="1200329"/>
-              </a:xfrm>
-              <a:prstGeom prst="rect">
-                <a:avLst/>
-              </a:prstGeom>
-              <a:noFill/>
-            </p:spPr>
-            <p:txBody>
-              <a:bodyPr wrap="square" rtlCol="0">
-                <a:spAutoFit/>
-              </a:bodyPr>
-              <a:lstStyle/>
-              <a:p>
-                <a:pPr algn="ctr"/>
-                <a:r>
-                  <a:rPr lang="en-US" b="1" dirty="0"/>
-                  <a:t>deep</a:t>
-                </a:r>
-                <a:r>
-                  <a:rPr lang="en-US" dirty="0"/>
-                  <a:t> waveguide</a:t>
-                </a:r>
-              </a:p>
-              <a:p>
-                <a:pPr algn="ctr"/>
-                <a:endParaRPr lang="en-US" dirty="0"/>
-              </a:p>
-              <a:p>
-                <a:pPr algn="ctr"/>
-                <a:r>
-                  <a:rPr lang="en-US" b="1" dirty="0"/>
-                  <a:t>neff_TE0 vs </a:t>
-                </a:r>
-                <a14:m>
-                  <m:oMath xmlns:m="http://schemas.openxmlformats.org/officeDocument/2006/math">
-                    <m:r>
-                      <a:rPr lang="es-ES" b="1" i="1" smtClean="0">
-                        <a:latin typeface="Cambria Math" panose="02040503050406030204" pitchFamily="18" charset="0"/>
-                      </a:rPr>
-                      <m:t>𝝀</m:t>
-                    </m:r>
-                  </m:oMath>
-                </a14:m>
-                <a:r>
-                  <a:rPr lang="en-US" b="1" dirty="0"/>
-                  <a:t> </a:t>
-                </a:r>
-                <a:r>
-                  <a:rPr lang="en-US" dirty="0"/>
-                  <a:t>with the second-degree polynomial fit  </a:t>
-                </a:r>
-              </a:p>
-              <a:p>
-                <a:pPr algn="ctr"/>
-                <a:r>
-                  <a:rPr lang="en-US" dirty="0"/>
-                  <a:t>&amp; </a:t>
-                </a:r>
-                <a:r>
-                  <a:rPr lang="en-US" b="1" dirty="0"/>
-                  <a:t>neff_TM0 vs </a:t>
-                </a:r>
-                <a14:m>
-                  <m:oMath xmlns:m="http://schemas.openxmlformats.org/officeDocument/2006/math">
-                    <m:r>
-                      <a:rPr lang="es-ES" b="1" i="1">
-                        <a:latin typeface="Cambria Math" panose="02040503050406030204" pitchFamily="18" charset="0"/>
-                      </a:rPr>
-                      <m:t>𝝀</m:t>
-                    </m:r>
-                  </m:oMath>
-                </a14:m>
-                <a:r>
-                  <a:rPr lang="en-US" b="1" dirty="0"/>
-                  <a:t> </a:t>
-                </a:r>
-                <a:r>
-                  <a:rPr lang="en-US" dirty="0"/>
-                  <a:t>with the second-degree polynomial fit </a:t>
-                </a:r>
-              </a:p>
-            </p:txBody>
-          </p:sp>
-        </mc:Choice>
-        <mc:Fallback xmlns="">
-          <p:sp>
-            <p:nvSpPr>
-              <p:cNvPr id="9" name="CuadroTexto 8">
-                <a:extLst>
-                  <a:ext uri="{FF2B5EF4-FFF2-40B4-BE49-F238E27FC236}">
-                    <a16:creationId xmlns:a16="http://schemas.microsoft.com/office/drawing/2014/main" id="{C59B6428-4395-242F-54D8-A9FC610F2D7A}"/>
-                  </a:ext>
-                </a:extLst>
-              </p:cNvPr>
-              <p:cNvSpPr txBox="1">
-                <a:spLocks noRot="1" noChangeAspect="1" noMove="1" noResize="1" noEditPoints="1" noAdjustHandles="1" noChangeArrowheads="1" noChangeShapeType="1" noTextEdit="1"/>
-              </p:cNvSpPr>
-              <p:nvPr/>
-            </p:nvSpPr>
-            <p:spPr>
-              <a:xfrm>
-                <a:off x="609440" y="2709096"/>
-                <a:ext cx="5486559" cy="1200329"/>
-              </a:xfrm>
-              <a:prstGeom prst="rect">
-                <a:avLst/>
-              </a:prstGeom>
-              <a:blipFill>
-                <a:blip r:embed="rId7"/>
-                <a:stretch>
-                  <a:fillRect t="-2538" r="-556" b="-7107"/>
-                </a:stretch>
-              </a:blipFill>
-            </p:spPr>
-            <p:txBody>
-              <a:bodyPr/>
-              <a:lstStyle/>
-              <a:p>
-                <a:r>
-                  <a:rPr lang="es-ES">
-                    <a:noFill/>
-                  </a:rPr>
-                  <a:t> </a:t>
-                </a:r>
-              </a:p>
-            </p:txBody>
-          </p:sp>
-        </mc:Fallback>
-      </mc:AlternateContent>
-      <mc:AlternateContent xmlns:mc="http://schemas.openxmlformats.org/markup-compatibility/2006" xmlns:a14="http://schemas.microsoft.com/office/drawing/2010/main">
-        <mc:Choice Requires="a14">
-          <p:sp>
-            <p:nvSpPr>
-              <p:cNvPr id="10" name="CuadroTexto 9">
-                <a:extLst>
-                  <a:ext uri="{FF2B5EF4-FFF2-40B4-BE49-F238E27FC236}">
-                    <a16:creationId xmlns:a16="http://schemas.microsoft.com/office/drawing/2014/main" id="{9320AF78-1FC6-19F4-8E0B-8A414F20C6DE}"/>
-                  </a:ext>
-                </a:extLst>
-              </p:cNvPr>
-              <p:cNvSpPr txBox="1"/>
-              <p:nvPr/>
-            </p:nvSpPr>
-            <p:spPr>
-              <a:xfrm>
-                <a:off x="6321421" y="2709096"/>
-                <a:ext cx="5486559" cy="1200329"/>
-              </a:xfrm>
-              <a:prstGeom prst="rect">
-                <a:avLst/>
-              </a:prstGeom>
-              <a:noFill/>
-            </p:spPr>
-            <p:txBody>
-              <a:bodyPr wrap="square" rtlCol="0">
-                <a:spAutoFit/>
-              </a:bodyPr>
-              <a:lstStyle/>
-              <a:p>
-                <a:pPr algn="ctr"/>
-                <a:r>
-                  <a:rPr lang="en-US" b="1" dirty="0"/>
-                  <a:t>shallow</a:t>
-                </a:r>
-                <a:r>
-                  <a:rPr lang="en-US" dirty="0"/>
-                  <a:t> waveguide</a:t>
-                </a:r>
-              </a:p>
-              <a:p>
-                <a:pPr algn="ctr"/>
-                <a:endParaRPr lang="en-US" dirty="0"/>
-              </a:p>
-              <a:p>
-                <a:pPr algn="ctr"/>
-                <a:r>
-                  <a:rPr lang="en-US" b="1" dirty="0"/>
-                  <a:t>neff_TE0 vs </a:t>
-                </a:r>
-                <a14:m>
-                  <m:oMath xmlns:m="http://schemas.openxmlformats.org/officeDocument/2006/math">
-                    <m:r>
-                      <a:rPr lang="es-ES" b="1" i="1">
-                        <a:latin typeface="Cambria Math" panose="02040503050406030204" pitchFamily="18" charset="0"/>
-                      </a:rPr>
-                      <m:t>𝝀</m:t>
-                    </m:r>
-                  </m:oMath>
-                </a14:m>
-                <a:r>
-                  <a:rPr lang="en-US" b="1" dirty="0"/>
-                  <a:t> </a:t>
-                </a:r>
-                <a:r>
-                  <a:rPr lang="en-US" dirty="0"/>
-                  <a:t>with the second-degree polynomial fit  </a:t>
-                </a:r>
-              </a:p>
-              <a:p>
-                <a:pPr algn="ctr"/>
-                <a:r>
-                  <a:rPr lang="en-US" dirty="0"/>
-                  <a:t>&amp; </a:t>
-                </a:r>
-                <a:r>
-                  <a:rPr lang="en-US" b="1" dirty="0"/>
-                  <a:t>neff_TM0 vs </a:t>
-                </a:r>
-                <a14:m>
-                  <m:oMath xmlns:m="http://schemas.openxmlformats.org/officeDocument/2006/math">
-                    <m:r>
-                      <a:rPr lang="es-ES" b="1" i="1">
-                        <a:latin typeface="Cambria Math" panose="02040503050406030204" pitchFamily="18" charset="0"/>
-                      </a:rPr>
-                      <m:t>𝝀</m:t>
-                    </m:r>
-                  </m:oMath>
-                </a14:m>
-                <a:r>
-                  <a:rPr lang="en-US" b="1" dirty="0"/>
-                  <a:t> </a:t>
-                </a:r>
-                <a:r>
-                  <a:rPr lang="en-US" dirty="0"/>
-                  <a:t>with the second-degree polynomial fit </a:t>
-                </a:r>
-              </a:p>
-            </p:txBody>
-          </p:sp>
-        </mc:Choice>
-        <mc:Fallback xmlns="">
-          <p:sp>
-            <p:nvSpPr>
-              <p:cNvPr id="10" name="CuadroTexto 9">
-                <a:extLst>
-                  <a:ext uri="{FF2B5EF4-FFF2-40B4-BE49-F238E27FC236}">
-                    <a16:creationId xmlns:a16="http://schemas.microsoft.com/office/drawing/2014/main" id="{9320AF78-1FC6-19F4-8E0B-8A414F20C6DE}"/>
-                  </a:ext>
-                </a:extLst>
-              </p:cNvPr>
-              <p:cNvSpPr txBox="1">
-                <a:spLocks noRot="1" noChangeAspect="1" noMove="1" noResize="1" noEditPoints="1" noAdjustHandles="1" noChangeArrowheads="1" noChangeShapeType="1" noTextEdit="1"/>
-              </p:cNvSpPr>
-              <p:nvPr/>
-            </p:nvSpPr>
-            <p:spPr>
-              <a:xfrm>
-                <a:off x="6321421" y="2709096"/>
-                <a:ext cx="5486559" cy="1200329"/>
-              </a:xfrm>
-              <a:prstGeom prst="rect">
-                <a:avLst/>
-              </a:prstGeom>
-              <a:blipFill>
-                <a:blip r:embed="rId8"/>
-                <a:stretch>
-                  <a:fillRect t="-2538" r="-556" b="-7107"/>
-                </a:stretch>
-              </a:blipFill>
-            </p:spPr>
-            <p:txBody>
-              <a:bodyPr/>
-              <a:lstStyle/>
-              <a:p>
-                <a:r>
-                  <a:rPr lang="es-ES">
-                    <a:noFill/>
-                  </a:rPr>
-                  <a:t> </a:t>
-                </a:r>
-              </a:p>
-            </p:txBody>
-          </p:sp>
-        </mc:Fallback>
-      </mc:AlternateContent>
       <p:sp>
         <p:nvSpPr>
           <p:cNvPr id="8" name="CuadroTexto 7">
@@ -4386,6 +5308,66 @@
           </a:p>
         </p:txBody>
       </p:sp>
+      <p:pic>
+        <p:nvPicPr>
+          <p:cNvPr id="7" name="Imagen 6" descr="Gráfico&#10;&#10;El contenido generado por IA puede ser incorrecto.">
+            <a:extLst>
+              <a:ext uri="{FF2B5EF4-FFF2-40B4-BE49-F238E27FC236}">
+                <a16:creationId xmlns:a16="http://schemas.microsoft.com/office/drawing/2014/main" id="{6EE6A301-802F-71A8-D45A-719DDCE2374F}"/>
+              </a:ext>
+            </a:extLst>
+          </p:cNvPr>
+          <p:cNvPicPr>
+            <a:picLocks noChangeAspect="1"/>
+          </p:cNvPicPr>
+          <p:nvPr/>
+        </p:nvPicPr>
+        <p:blipFill>
+          <a:blip r:embed="rId6"/>
+          <a:stretch>
+            <a:fillRect/>
+          </a:stretch>
+        </p:blipFill>
+        <p:spPr>
+          <a:xfrm>
+            <a:off x="609440" y="1462655"/>
+            <a:ext cx="5486560" cy="3291174"/>
+          </a:xfrm>
+          <a:prstGeom prst="rect">
+            <a:avLst/>
+          </a:prstGeom>
+        </p:spPr>
+      </p:pic>
+      <p:pic>
+        <p:nvPicPr>
+          <p:cNvPr id="12" name="Imagen 11" descr="Gráfico, Gráfico de líneas&#10;&#10;El contenido generado por IA puede ser incorrecto.">
+            <a:extLst>
+              <a:ext uri="{FF2B5EF4-FFF2-40B4-BE49-F238E27FC236}">
+                <a16:creationId xmlns:a16="http://schemas.microsoft.com/office/drawing/2014/main" id="{53B7AF3B-D6BB-A7C0-88D3-336824D54616}"/>
+              </a:ext>
+            </a:extLst>
+          </p:cNvPr>
+          <p:cNvPicPr>
+            <a:picLocks noChangeAspect="1"/>
+          </p:cNvPicPr>
+          <p:nvPr/>
+        </p:nvPicPr>
+        <p:blipFill>
+          <a:blip r:embed="rId7"/>
+          <a:stretch>
+            <a:fillRect/>
+          </a:stretch>
+        </p:blipFill>
+        <p:spPr>
+          <a:xfrm>
+            <a:off x="6321423" y="1462655"/>
+            <a:ext cx="5486560" cy="3291173"/>
+          </a:xfrm>
+          <a:prstGeom prst="rect">
+            <a:avLst/>
+          </a:prstGeom>
+        </p:spPr>
+      </p:pic>
     </p:spTree>
     <p:extLst>
       <p:ext uri="{BB962C8B-B14F-4D97-AF65-F5344CB8AC3E}">
@@ -4400,6 +5382,1696 @@
 </file>
 
 <file path=ppt/slides/slide11.xml><?xml version="1.0" encoding="utf-8"?>
+<p:sld xmlns:a="http://schemas.openxmlformats.org/drawingml/2006/main" xmlns:r="http://schemas.openxmlformats.org/officeDocument/2006/relationships" xmlns:p="http://schemas.openxmlformats.org/presentationml/2006/main">
+  <p:cSld>
+    <p:spTree>
+      <p:nvGrpSpPr>
+        <p:cNvPr id="1" name="">
+          <a:extLst>
+            <a:ext uri="{FF2B5EF4-FFF2-40B4-BE49-F238E27FC236}">
+              <a16:creationId xmlns:a16="http://schemas.microsoft.com/office/drawing/2014/main" id="{A27EFB58-B666-0C41-4C72-3ABC0EC43882}"/>
+            </a:ext>
+          </a:extLst>
+        </p:cNvPr>
+        <p:cNvGrpSpPr/>
+        <p:nvPr/>
+      </p:nvGrpSpPr>
+      <p:grpSpPr>
+        <a:xfrm>
+          <a:off x="0" y="0"/>
+          <a:ext cx="0" cy="0"/>
+          <a:chOff x="0" y="0"/>
+          <a:chExt cx="0" cy="0"/>
+        </a:xfrm>
+      </p:grpSpPr>
+      <p:sp>
+        <p:nvSpPr>
+          <p:cNvPr id="16" name="object 16">
+            <a:extLst>
+              <a:ext uri="{FF2B5EF4-FFF2-40B4-BE49-F238E27FC236}">
+                <a16:creationId xmlns:a16="http://schemas.microsoft.com/office/drawing/2014/main" id="{83DF2B24-AC21-643D-B8C0-62993AB27B88}"/>
+              </a:ext>
+            </a:extLst>
+          </p:cNvPr>
+          <p:cNvSpPr txBox="1">
+            <a:spLocks noGrp="1"/>
+          </p:cNvSpPr>
+          <p:nvPr>
+            <p:ph type="title"/>
+          </p:nvPr>
+        </p:nvSpPr>
+        <p:spPr>
+          <a:xfrm>
+            <a:off x="685800" y="408883"/>
+            <a:ext cx="10994410" cy="1397819"/>
+          </a:xfrm>
+          <a:prstGeom prst="rect">
+            <a:avLst/>
+          </a:prstGeom>
+        </p:spPr>
+        <p:txBody>
+          <a:bodyPr vert="horz" wrap="square" lIns="0" tIns="12700" rIns="0" bIns="0" rtlCol="0">
+            <a:spAutoFit/>
+          </a:bodyPr>
+          <a:lstStyle/>
+          <a:p>
+            <a:pPr marL="12700">
+              <a:lnSpc>
+                <a:spcPct val="100000"/>
+              </a:lnSpc>
+              <a:spcBef>
+                <a:spcPts val="100"/>
+              </a:spcBef>
+            </a:pPr>
+            <a:r>
+              <a:rPr lang="en-US" sz="2500" dirty="0"/>
+              <a:t>Learning outcome #4 – Waveguide compact model</a:t>
+            </a:r>
+            <a:br>
+              <a:rPr lang="en-US" sz="2500" spc="-5" dirty="0">
+                <a:latin typeface="+mj-lt"/>
+                <a:cs typeface="Lucida Sans"/>
+              </a:rPr>
+            </a:br>
+            <a:r>
+              <a:rPr lang="en-US" b="0" dirty="0"/>
+              <a:t>- Find the compact models of the following waveguides: </a:t>
+            </a:r>
+            <a:br>
+              <a:rPr lang="en-US" b="0" dirty="0"/>
+            </a:br>
+            <a:r>
+              <a:rPr lang="en-US" dirty="0"/>
+              <a:t>Deep</a:t>
+            </a:r>
+            <a:r>
+              <a:rPr lang="en-US" b="0" dirty="0"/>
+              <a:t> waveguide, h=300nm, w=1.2um   - </a:t>
+            </a:r>
+            <a:r>
+              <a:rPr lang="en-US" dirty="0"/>
+              <a:t>Shallow</a:t>
+            </a:r>
+            <a:r>
+              <a:rPr lang="en-US" b="0" dirty="0"/>
+              <a:t> waveguide, core h=300nm, slab h=150 nm, w = 1.2um </a:t>
+            </a:r>
+            <a:br>
+              <a:rPr lang="en-US" b="0" dirty="0"/>
+            </a:br>
+            <a:endParaRPr lang="en-US" sz="2500" b="0" dirty="0">
+              <a:latin typeface="+mj-lt"/>
+              <a:cs typeface="Lucida Sans"/>
+            </a:endParaRPr>
+          </a:p>
+        </p:txBody>
+      </p:sp>
+      <p:pic>
+        <p:nvPicPr>
+          <p:cNvPr id="83" name="Gráfico 82">
+            <a:extLst>
+              <a:ext uri="{FF2B5EF4-FFF2-40B4-BE49-F238E27FC236}">
+                <a16:creationId xmlns:a16="http://schemas.microsoft.com/office/drawing/2014/main" id="{37813654-26E9-7238-D73E-68BA1316A31E}"/>
+              </a:ext>
+            </a:extLst>
+          </p:cNvPr>
+          <p:cNvPicPr>
+            <a:picLocks noChangeAspect="1"/>
+          </p:cNvPicPr>
+          <p:nvPr/>
+        </p:nvPicPr>
+        <p:blipFill>
+          <a:blip r:embed="rId3">
+            <a:extLst>
+              <a:ext uri="{96DAC541-7B7A-43D3-8B79-37D633B846F1}">
+                <asvg:svgBlip xmlns:asvg="http://schemas.microsoft.com/office/drawing/2016/SVG/main" r:embed="rId4"/>
+              </a:ext>
+            </a:extLst>
+          </a:blip>
+          <a:stretch>
+            <a:fillRect/>
+          </a:stretch>
+        </p:blipFill>
+        <p:spPr>
+          <a:xfrm>
+            <a:off x="5045006" y="6356057"/>
+            <a:ext cx="6409575" cy="363174"/>
+          </a:xfrm>
+          <a:prstGeom prst="rect">
+            <a:avLst/>
+          </a:prstGeom>
+        </p:spPr>
+      </p:pic>
+      <p:sp>
+        <p:nvSpPr>
+          <p:cNvPr id="84" name="Marcador de número de diapositiva 83">
+            <a:extLst>
+              <a:ext uri="{FF2B5EF4-FFF2-40B4-BE49-F238E27FC236}">
+                <a16:creationId xmlns:a16="http://schemas.microsoft.com/office/drawing/2014/main" id="{8E2D0D11-BF34-FF92-6520-B37F368C0D94}"/>
+              </a:ext>
+            </a:extLst>
+          </p:cNvPr>
+          <p:cNvSpPr>
+            <a:spLocks noGrp="1"/>
+          </p:cNvSpPr>
+          <p:nvPr>
+            <p:ph type="sldNum" sz="quarter" idx="7"/>
+          </p:nvPr>
+        </p:nvSpPr>
+        <p:spPr/>
+        <p:txBody>
+          <a:bodyPr/>
+          <a:lstStyle/>
+          <a:p>
+            <a:fld id="{B6F15528-21DE-4FAA-801E-634DDDAF4B2B}" type="slidenum">
+              <a:rPr lang="es-ES" smtClean="0"/>
+              <a:t>11</a:t>
+            </a:fld>
+            <a:endParaRPr lang="es-ES"/>
+          </a:p>
+        </p:txBody>
+      </p:sp>
+      <p:sp>
+        <p:nvSpPr>
+          <p:cNvPr id="3" name="Marcador de pie de página 2">
+            <a:extLst>
+              <a:ext uri="{FF2B5EF4-FFF2-40B4-BE49-F238E27FC236}">
+                <a16:creationId xmlns:a16="http://schemas.microsoft.com/office/drawing/2014/main" id="{FB835810-53AB-5DA6-6898-CDFC21E038D3}"/>
+              </a:ext>
+            </a:extLst>
+          </p:cNvPr>
+          <p:cNvSpPr>
+            <a:spLocks noGrp="1"/>
+          </p:cNvSpPr>
+          <p:nvPr>
+            <p:ph type="ftr" sz="quarter" idx="5"/>
+          </p:nvPr>
+        </p:nvSpPr>
+        <p:spPr/>
+        <p:txBody>
+          <a:bodyPr/>
+          <a:lstStyle/>
+          <a:p>
+            <a:pPr marL="12700">
+              <a:spcBef>
+                <a:spcPts val="15"/>
+              </a:spcBef>
+            </a:pPr>
+            <a:r>
+              <a:rPr lang="es-ES" spc="-5" dirty="0"/>
+              <a:t>LAB 1.0 WAVEGUIDES</a:t>
+            </a:r>
+          </a:p>
+        </p:txBody>
+      </p:sp>
+      <mc:AlternateContent xmlns:mc="http://schemas.openxmlformats.org/markup-compatibility/2006">
+        <mc:Choice xmlns:a14="http://schemas.microsoft.com/office/drawing/2010/main" Requires="a14">
+          <p:sp>
+            <p:nvSpPr>
+              <p:cNvPr id="2" name="CuadroTexto 1">
+                <a:extLst>
+                  <a:ext uri="{FF2B5EF4-FFF2-40B4-BE49-F238E27FC236}">
+                    <a16:creationId xmlns:a16="http://schemas.microsoft.com/office/drawing/2014/main" id="{11E2B217-7A2F-7F84-8CFC-E023D5FB8F3B}"/>
+                  </a:ext>
+                </a:extLst>
+              </p:cNvPr>
+              <p:cNvSpPr txBox="1"/>
+              <p:nvPr/>
+            </p:nvSpPr>
+            <p:spPr>
+              <a:xfrm>
+                <a:off x="481668" y="1690095"/>
+                <a:ext cx="11198542" cy="3849324"/>
+              </a:xfrm>
+              <a:prstGeom prst="rect">
+                <a:avLst/>
+              </a:prstGeom>
+              <a:solidFill>
+                <a:schemeClr val="bg1">
+                  <a:lumMod val="95000"/>
+                </a:schemeClr>
+              </a:solidFill>
+              <a:ln w="28575">
+                <a:solidFill>
+                  <a:srgbClr val="E0700D"/>
+                </a:solidFill>
+              </a:ln>
+            </p:spPr>
+            <p:txBody>
+              <a:bodyPr wrap="square" rtlCol="0">
+                <a:spAutoFit/>
+              </a:bodyPr>
+              <a:lstStyle/>
+              <a:p>
+                <a:pPr algn="just"/>
+                <a:r>
+                  <a:rPr lang="en-US" sz="1200" dirty="0">
+                    <a:cs typeface="Arial" panose="020B0604020202020204" pitchFamily="34" charset="0"/>
+                  </a:rPr>
+                  <a:t>Find the second-degree polynomial coefficients and relate them with the group index and the dispersion parameter. </a:t>
+                </a:r>
+                <a14:m>
+                  <m:oMath xmlns:m="http://schemas.openxmlformats.org/officeDocument/2006/math">
+                    <m:d>
+                      <m:dPr>
+                        <m:begChr m:val="{"/>
+                        <m:endChr m:val=""/>
+                        <m:ctrlPr>
+                          <a:rPr lang="es-ES" sz="1200" b="0" i="1" smtClean="0">
+                            <a:cs typeface="Arial" panose="020B0604020202020204" pitchFamily="34" charset="0"/>
+                          </a:rPr>
+                        </m:ctrlPr>
+                      </m:dPr>
+                      <m:e>
+                        <m:eqArr>
+                          <m:eqArrPr>
+                            <m:ctrlPr>
+                              <a:rPr lang="es-ES" sz="1200" b="0" i="1" smtClean="0">
+                                <a:cs typeface="Arial" panose="020B0604020202020204" pitchFamily="34" charset="0"/>
+                              </a:rPr>
+                            </m:ctrlPr>
+                          </m:eqArrPr>
+                          <m:e>
+                            <m:sSub>
+                              <m:sSubPr>
+                                <m:ctrlPr>
+                                  <a:rPr lang="es-ES" sz="1200" b="0" i="1" smtClean="0">
+                                    <a:cs typeface="Arial" panose="020B0604020202020204" pitchFamily="34" charset="0"/>
+                                  </a:rPr>
+                                </m:ctrlPr>
+                              </m:sSubPr>
+                              <m:e>
+                                <m:r>
+                                  <a:rPr lang="es-ES" sz="1200" b="0" i="1" smtClean="0">
+                                    <a:cs typeface="Arial" panose="020B0604020202020204" pitchFamily="34" charset="0"/>
+                                  </a:rPr>
+                                  <m:t>𝑛</m:t>
+                                </m:r>
+                              </m:e>
+                              <m:sub>
+                                <m:r>
+                                  <a:rPr lang="es-ES" sz="1200" b="0" i="1" smtClean="0">
+                                    <a:cs typeface="Arial" panose="020B0604020202020204" pitchFamily="34" charset="0"/>
+                                  </a:rPr>
+                                  <m:t>𝑒𝑓𝑓</m:t>
+                                </m:r>
+                              </m:sub>
+                            </m:sSub>
+                            <m:r>
+                              <a:rPr lang="es-ES" sz="1200" b="0" i="1" smtClean="0">
+                                <a:cs typeface="Arial" panose="020B0604020202020204" pitchFamily="34" charset="0"/>
+                              </a:rPr>
+                              <m:t>=</m:t>
+                            </m:r>
+                            <m:sSub>
+                              <m:sSubPr>
+                                <m:ctrlPr>
+                                  <a:rPr lang="es-ES" sz="1200" b="0" i="1" smtClean="0">
+                                    <a:cs typeface="Arial" panose="020B0604020202020204" pitchFamily="34" charset="0"/>
+                                  </a:rPr>
+                                </m:ctrlPr>
+                              </m:sSubPr>
+                              <m:e>
+                                <m:r>
+                                  <a:rPr lang="es-ES" sz="1200" b="0" i="1" smtClean="0">
+                                    <a:cs typeface="Arial" panose="020B0604020202020204" pitchFamily="34" charset="0"/>
+                                  </a:rPr>
+                                  <m:t>𝑛</m:t>
+                                </m:r>
+                              </m:e>
+                              <m:sub>
+                                <m:r>
+                                  <a:rPr lang="es-ES" sz="1200" b="0" i="1" smtClean="0">
+                                    <a:cs typeface="Arial" panose="020B0604020202020204" pitchFamily="34" charset="0"/>
+                                  </a:rPr>
+                                  <m:t>1</m:t>
+                                </m:r>
+                              </m:sub>
+                            </m:sSub>
+                          </m:e>
+                          <m:e>
+                            <m:sSub>
+                              <m:sSubPr>
+                                <m:ctrlPr>
+                                  <a:rPr lang="es-ES" sz="1200" b="0" i="1" smtClean="0">
+                                    <a:cs typeface="Arial" panose="020B0604020202020204" pitchFamily="34" charset="0"/>
+                                  </a:rPr>
+                                </m:ctrlPr>
+                              </m:sSubPr>
+                              <m:e>
+                                <m:r>
+                                  <a:rPr lang="es-ES" sz="1200" b="0" i="1" smtClean="0">
+                                    <a:cs typeface="Arial" panose="020B0604020202020204" pitchFamily="34" charset="0"/>
+                                  </a:rPr>
+                                  <m:t>𝑛</m:t>
+                                </m:r>
+                              </m:e>
+                              <m:sub>
+                                <m:r>
+                                  <a:rPr lang="es-ES" sz="1200" b="0" i="1" smtClean="0">
+                                    <a:cs typeface="Arial" panose="020B0604020202020204" pitchFamily="34" charset="0"/>
+                                  </a:rPr>
+                                  <m:t>𝑔</m:t>
+                                </m:r>
+                              </m:sub>
+                            </m:sSub>
+                            <m:r>
+                              <a:rPr lang="es-ES" sz="1200" b="0" i="1" smtClean="0">
+                                <a:cs typeface="Arial" panose="020B0604020202020204" pitchFamily="34" charset="0"/>
+                              </a:rPr>
+                              <m:t>=</m:t>
+                            </m:r>
+                            <m:sSub>
+                              <m:sSubPr>
+                                <m:ctrlPr>
+                                  <a:rPr lang="es-ES" sz="1200" b="0" i="1" smtClean="0">
+                                    <a:cs typeface="Arial" panose="020B0604020202020204" pitchFamily="34" charset="0"/>
+                                  </a:rPr>
+                                </m:ctrlPr>
+                              </m:sSubPr>
+                              <m:e>
+                                <m:r>
+                                  <a:rPr lang="es-ES" sz="1200" b="0" i="1" smtClean="0">
+                                    <a:cs typeface="Arial" panose="020B0604020202020204" pitchFamily="34" charset="0"/>
+                                  </a:rPr>
+                                  <m:t>𝑛</m:t>
+                                </m:r>
+                              </m:e>
+                              <m:sub>
+                                <m:r>
+                                  <a:rPr lang="es-ES" sz="1200" b="0" i="1" smtClean="0">
+                                    <a:cs typeface="Arial" panose="020B0604020202020204" pitchFamily="34" charset="0"/>
+                                  </a:rPr>
+                                  <m:t>1</m:t>
+                                </m:r>
+                              </m:sub>
+                            </m:sSub>
+                            <m:r>
+                              <a:rPr lang="es-ES" sz="1200" b="0" i="1" smtClean="0">
+                                <a:cs typeface="Arial" panose="020B0604020202020204" pitchFamily="34" charset="0"/>
+                              </a:rPr>
+                              <m:t>−</m:t>
+                            </m:r>
+                            <m:sSub>
+                              <m:sSubPr>
+                                <m:ctrlPr>
+                                  <a:rPr lang="es-ES" sz="1200" b="0" i="1" smtClean="0">
+                                    <a:cs typeface="Arial" panose="020B0604020202020204" pitchFamily="34" charset="0"/>
+                                  </a:rPr>
+                                </m:ctrlPr>
+                              </m:sSubPr>
+                              <m:e>
+                                <m:r>
+                                  <a:rPr lang="es-ES" sz="1200" b="0" i="1" smtClean="0">
+                                    <a:cs typeface="Arial" panose="020B0604020202020204" pitchFamily="34" charset="0"/>
+                                  </a:rPr>
+                                  <m:t>𝑛</m:t>
+                                </m:r>
+                              </m:e>
+                              <m:sub>
+                                <m:r>
+                                  <a:rPr lang="es-ES" sz="1200" b="0" i="1" smtClean="0">
+                                    <a:cs typeface="Arial" panose="020B0604020202020204" pitchFamily="34" charset="0"/>
+                                  </a:rPr>
+                                  <m:t>2</m:t>
+                                </m:r>
+                              </m:sub>
+                            </m:sSub>
+                            <m:sSub>
+                              <m:sSubPr>
+                                <m:ctrlPr>
+                                  <a:rPr lang="es-ES" sz="1200" b="0" i="1" smtClean="0">
+                                    <a:cs typeface="Arial" panose="020B0604020202020204" pitchFamily="34" charset="0"/>
+                                  </a:rPr>
+                                </m:ctrlPr>
+                              </m:sSubPr>
+                              <m:e>
+                                <m:r>
+                                  <a:rPr lang="es-ES" sz="1200" b="0" i="1" smtClean="0">
+                                    <a:cs typeface="Arial" panose="020B0604020202020204" pitchFamily="34" charset="0"/>
+                                  </a:rPr>
+                                  <m:t>𝜆</m:t>
+                                </m:r>
+                              </m:e>
+                              <m:sub>
+                                <m:r>
+                                  <a:rPr lang="es-ES" sz="1200" b="0" i="1" smtClean="0">
+                                    <a:cs typeface="Arial" panose="020B0604020202020204" pitchFamily="34" charset="0"/>
+                                  </a:rPr>
+                                  <m:t>0</m:t>
+                                </m:r>
+                              </m:sub>
+                            </m:sSub>
+                          </m:e>
+                          <m:e>
+                            <m:r>
+                              <a:rPr lang="es-ES" sz="1200" b="0" i="1" smtClean="0">
+                                <a:cs typeface="Arial" panose="020B0604020202020204" pitchFamily="34" charset="0"/>
+                              </a:rPr>
+                              <m:t>𝐷</m:t>
+                            </m:r>
+                            <m:r>
+                              <a:rPr lang="es-ES" sz="1200" b="0" i="1" smtClean="0">
+                                <a:cs typeface="Arial" panose="020B0604020202020204" pitchFamily="34" charset="0"/>
+                              </a:rPr>
+                              <m:t>=−</m:t>
+                            </m:r>
+                            <m:f>
+                              <m:fPr>
+                                <m:ctrlPr>
+                                  <a:rPr lang="es-ES" sz="1200" b="0" i="1" smtClean="0">
+                                    <a:cs typeface="Arial" panose="020B0604020202020204" pitchFamily="34" charset="0"/>
+                                  </a:rPr>
+                                </m:ctrlPr>
+                              </m:fPr>
+                              <m:num>
+                                <m:r>
+                                  <a:rPr lang="es-ES" sz="1200" b="0" i="1" smtClean="0">
+                                    <a:cs typeface="Arial" panose="020B0604020202020204" pitchFamily="34" charset="0"/>
+                                  </a:rPr>
+                                  <m:t>2</m:t>
+                                </m:r>
+                                <m:sSub>
+                                  <m:sSubPr>
+                                    <m:ctrlPr>
+                                      <a:rPr lang="es-ES" sz="1200" b="0" i="1" smtClean="0">
+                                        <a:cs typeface="Arial" panose="020B0604020202020204" pitchFamily="34" charset="0"/>
+                                      </a:rPr>
+                                    </m:ctrlPr>
+                                  </m:sSubPr>
+                                  <m:e>
+                                    <m:r>
+                                      <a:rPr lang="es-ES" sz="1200" b="0" i="1" smtClean="0">
+                                        <a:cs typeface="Arial" panose="020B0604020202020204" pitchFamily="34" charset="0"/>
+                                      </a:rPr>
+                                      <m:t>𝜆</m:t>
+                                    </m:r>
+                                  </m:e>
+                                  <m:sub>
+                                    <m:r>
+                                      <a:rPr lang="es-ES" sz="1200" b="0" i="1" smtClean="0">
+                                        <a:cs typeface="Arial" panose="020B0604020202020204" pitchFamily="34" charset="0"/>
+                                      </a:rPr>
+                                      <m:t>0</m:t>
+                                    </m:r>
+                                  </m:sub>
+                                </m:sSub>
+                                <m:sSub>
+                                  <m:sSubPr>
+                                    <m:ctrlPr>
+                                      <a:rPr lang="es-ES" sz="1200" b="0" i="1" smtClean="0">
+                                        <a:cs typeface="Arial" panose="020B0604020202020204" pitchFamily="34" charset="0"/>
+                                      </a:rPr>
+                                    </m:ctrlPr>
+                                  </m:sSubPr>
+                                  <m:e>
+                                    <m:r>
+                                      <a:rPr lang="es-ES" sz="1200" b="0" i="1" smtClean="0">
+                                        <a:cs typeface="Arial" panose="020B0604020202020204" pitchFamily="34" charset="0"/>
+                                      </a:rPr>
+                                      <m:t>𝑛</m:t>
+                                    </m:r>
+                                  </m:e>
+                                  <m:sub>
+                                    <m:r>
+                                      <a:rPr lang="es-ES" sz="1200" b="0" i="1" smtClean="0">
+                                        <a:cs typeface="Arial" panose="020B0604020202020204" pitchFamily="34" charset="0"/>
+                                      </a:rPr>
+                                      <m:t>3</m:t>
+                                    </m:r>
+                                  </m:sub>
+                                </m:sSub>
+                              </m:num>
+                              <m:den>
+                                <m:r>
+                                  <a:rPr lang="es-ES" sz="1200" b="0" i="1" smtClean="0">
+                                    <a:cs typeface="Arial" panose="020B0604020202020204" pitchFamily="34" charset="0"/>
+                                  </a:rPr>
+                                  <m:t>𝑐</m:t>
+                                </m:r>
+                              </m:den>
+                            </m:f>
+                            <m:d>
+                              <m:dPr>
+                                <m:begChr m:val="["/>
+                                <m:endChr m:val="]"/>
+                                <m:ctrlPr>
+                                  <a:rPr lang="es-ES" sz="1200" b="0" i="1" smtClean="0">
+                                    <a:cs typeface="Arial" panose="020B0604020202020204" pitchFamily="34" charset="0"/>
+                                  </a:rPr>
+                                </m:ctrlPr>
+                              </m:dPr>
+                              <m:e>
+                                <m:f>
+                                  <m:fPr>
+                                    <m:ctrlPr>
+                                      <a:rPr lang="es-ES" sz="1200" b="0" i="1" smtClean="0">
+                                        <a:cs typeface="Arial" panose="020B0604020202020204" pitchFamily="34" charset="0"/>
+                                      </a:rPr>
+                                    </m:ctrlPr>
+                                  </m:fPr>
+                                  <m:num>
+                                    <m:sSup>
+                                      <m:sSupPr>
+                                        <m:ctrlPr>
+                                          <a:rPr lang="es-ES" sz="1200" b="0" i="1" smtClean="0">
+                                            <a:cs typeface="Arial" panose="020B0604020202020204" pitchFamily="34" charset="0"/>
+                                          </a:rPr>
+                                        </m:ctrlPr>
+                                      </m:sSupPr>
+                                      <m:e>
+                                        <m:r>
+                                          <a:rPr lang="es-ES" sz="1200" b="0" i="1" smtClean="0">
+                                            <a:cs typeface="Arial" panose="020B0604020202020204" pitchFamily="34" charset="0"/>
+                                          </a:rPr>
+                                          <m:t>𝑠</m:t>
+                                        </m:r>
+                                      </m:e>
+                                      <m:sup>
+                                        <m:r>
+                                          <a:rPr lang="es-ES" sz="1200" b="0" i="1" smtClean="0">
+                                            <a:cs typeface="Arial" panose="020B0604020202020204" pitchFamily="34" charset="0"/>
+                                          </a:rPr>
+                                          <m:t>2</m:t>
+                                        </m:r>
+                                      </m:sup>
+                                    </m:sSup>
+                                  </m:num>
+                                  <m:den>
+                                    <m:r>
+                                      <a:rPr lang="es-ES" sz="1200" b="0" i="1" smtClean="0">
+                                        <a:cs typeface="Arial" panose="020B0604020202020204" pitchFamily="34" charset="0"/>
+                                      </a:rPr>
+                                      <m:t>𝑚</m:t>
+                                    </m:r>
+                                  </m:den>
+                                </m:f>
+                              </m:e>
+                            </m:d>
+                          </m:e>
+                        </m:eqArr>
+                      </m:e>
+                    </m:d>
+                  </m:oMath>
+                </a14:m>
+                <a:endParaRPr lang="es-ES" sz="1200" b="0" dirty="0">
+                  <a:cs typeface="Arial" panose="020B0604020202020204" pitchFamily="34" charset="0"/>
+                </a:endParaRPr>
+              </a:p>
+              <a:p>
+                <a:pPr algn="just"/>
+                <a:r>
+                  <a:rPr lang="en-US" sz="1200" dirty="0">
+                    <a:cs typeface="Arial" panose="020B0604020202020204" pitchFamily="34" charset="0"/>
+                  </a:rPr>
+                  <a:t>Comment on the results found for the TE0 and TM0 for both deep and shallow waveguides. </a:t>
+                </a:r>
+              </a:p>
+              <a:p>
+                <a:pPr algn="just"/>
+                <a:endParaRPr lang="en-US" sz="1200" dirty="0">
+                  <a:cs typeface="Arial" panose="020B0604020202020204" pitchFamily="34" charset="0"/>
+                </a:endParaRPr>
+              </a:p>
+              <a:p>
+                <a:pPr algn="just"/>
+                <a:r>
+                  <a:rPr lang="en-US" sz="1200" dirty="0">
+                    <a:cs typeface="Arial" panose="020B0604020202020204" pitchFamily="34" charset="0"/>
+                  </a:rPr>
+                  <a:t>A </a:t>
+                </a:r>
+                <a:r>
+                  <a:rPr lang="en-US" sz="1200" dirty="0" err="1">
+                    <a:cs typeface="Arial" panose="020B0604020202020204" pitchFamily="34" charset="0"/>
+                  </a:rPr>
+                  <a:t>continuación</a:t>
+                </a:r>
+                <a:r>
+                  <a:rPr lang="en-US" sz="1200" dirty="0">
+                    <a:cs typeface="Arial" panose="020B0604020202020204" pitchFamily="34" charset="0"/>
+                  </a:rPr>
+                  <a:t> se </a:t>
+                </a:r>
+                <a:r>
+                  <a:rPr lang="en-US" sz="1200" dirty="0" err="1">
+                    <a:cs typeface="Arial" panose="020B0604020202020204" pitchFamily="34" charset="0"/>
+                  </a:rPr>
+                  <a:t>presenta</a:t>
+                </a:r>
+                <a:r>
+                  <a:rPr lang="en-US" sz="1200" dirty="0">
+                    <a:cs typeface="Arial" panose="020B0604020202020204" pitchFamily="34" charset="0"/>
+                  </a:rPr>
+                  <a:t> la </a:t>
+                </a:r>
+                <a:r>
+                  <a:rPr lang="en-US" sz="1200" dirty="0" err="1">
+                    <a:cs typeface="Arial" panose="020B0604020202020204" pitchFamily="34" charset="0"/>
+                  </a:rPr>
+                  <a:t>ecuacion</a:t>
+                </a:r>
+                <a:r>
+                  <a:rPr lang="en-US" sz="1200" dirty="0">
+                    <a:cs typeface="Arial" panose="020B0604020202020204" pitchFamily="34" charset="0"/>
+                  </a:rPr>
+                  <a:t> de </a:t>
+                </a:r>
+                <a:r>
+                  <a:rPr lang="en-US" sz="1200" dirty="0" err="1">
+                    <a:cs typeface="Arial" panose="020B0604020202020204" pitchFamily="34" charset="0"/>
+                  </a:rPr>
+                  <a:t>segundo</a:t>
+                </a:r>
+                <a:r>
+                  <a:rPr lang="en-US" sz="1200" dirty="0">
+                    <a:cs typeface="Arial" panose="020B0604020202020204" pitchFamily="34" charset="0"/>
+                  </a:rPr>
+                  <a:t> </a:t>
+                </a:r>
+                <a:r>
+                  <a:rPr lang="en-US" sz="1200" dirty="0" err="1">
+                    <a:cs typeface="Arial" panose="020B0604020202020204" pitchFamily="34" charset="0"/>
+                  </a:rPr>
+                  <a:t>grado</a:t>
+                </a:r>
+                <a:r>
+                  <a:rPr lang="en-US" sz="1200" dirty="0">
+                    <a:cs typeface="Arial" panose="020B0604020202020204" pitchFamily="34" charset="0"/>
+                  </a:rPr>
+                  <a:t> con </a:t>
+                </a:r>
+                <a:r>
+                  <a:rPr lang="en-US" sz="1200" dirty="0" err="1">
+                    <a:cs typeface="Arial" panose="020B0604020202020204" pitchFamily="34" charset="0"/>
+                  </a:rPr>
+                  <a:t>los</a:t>
+                </a:r>
+                <a:r>
+                  <a:rPr lang="en-US" sz="1200" dirty="0">
+                    <a:cs typeface="Arial" panose="020B0604020202020204" pitchFamily="34" charset="0"/>
+                  </a:rPr>
+                  <a:t> </a:t>
+                </a:r>
+                <a:r>
+                  <a:rPr lang="en-US" sz="1200" dirty="0" err="1">
+                    <a:cs typeface="Arial" panose="020B0604020202020204" pitchFamily="34" charset="0"/>
+                  </a:rPr>
+                  <a:t>coeficientes</a:t>
+                </a:r>
+                <a:r>
+                  <a:rPr lang="en-US" sz="1200" dirty="0">
+                    <a:cs typeface="Arial" panose="020B0604020202020204" pitchFamily="34" charset="0"/>
+                  </a:rPr>
+                  <a:t> </a:t>
+                </a:r>
+                <a:r>
+                  <a:rPr lang="en-US" sz="1200" dirty="0" err="1">
+                    <a:cs typeface="Arial" panose="020B0604020202020204" pitchFamily="34" charset="0"/>
+                  </a:rPr>
+                  <a:t>polinomicos</a:t>
+                </a:r>
+                <a:r>
+                  <a:rPr lang="en-US" sz="1200" dirty="0">
+                    <a:cs typeface="Arial" panose="020B0604020202020204" pitchFamily="34" charset="0"/>
+                  </a:rPr>
+                  <a:t>. Su </a:t>
+                </a:r>
+                <a:r>
+                  <a:rPr lang="en-US" sz="1200" dirty="0" err="1">
+                    <a:cs typeface="Arial" panose="020B0604020202020204" pitchFamily="34" charset="0"/>
+                  </a:rPr>
+                  <a:t>objetivo</a:t>
+                </a:r>
+                <a:r>
+                  <a:rPr lang="en-US" sz="1200" dirty="0">
+                    <a:cs typeface="Arial" panose="020B0604020202020204" pitchFamily="34" charset="0"/>
+                  </a:rPr>
+                  <a:t> es </a:t>
+                </a:r>
+                <a:r>
+                  <a:rPr lang="en-US" sz="1200" dirty="0" err="1">
+                    <a:cs typeface="Arial" panose="020B0604020202020204" pitchFamily="34" charset="0"/>
+                  </a:rPr>
+                  <a:t>disminuir</a:t>
+                </a:r>
+                <a:r>
+                  <a:rPr lang="en-US" sz="1200" dirty="0">
+                    <a:cs typeface="Arial" panose="020B0604020202020204" pitchFamily="34" charset="0"/>
+                  </a:rPr>
+                  <a:t> la </a:t>
+                </a:r>
+                <a:r>
+                  <a:rPr lang="en-US" sz="1200" dirty="0" err="1">
+                    <a:cs typeface="Arial" panose="020B0604020202020204" pitchFamily="34" charset="0"/>
+                  </a:rPr>
+                  <a:t>complejidad</a:t>
+                </a:r>
+                <a:r>
+                  <a:rPr lang="en-US" sz="1200" dirty="0">
+                    <a:cs typeface="Arial" panose="020B0604020202020204" pitchFamily="34" charset="0"/>
+                  </a:rPr>
+                  <a:t> de la </a:t>
+                </a:r>
+                <a:r>
+                  <a:rPr lang="en-US" sz="1200" dirty="0" err="1">
+                    <a:cs typeface="Arial" panose="020B0604020202020204" pitchFamily="34" charset="0"/>
+                  </a:rPr>
+                  <a:t>representacion</a:t>
+                </a:r>
+                <a:r>
+                  <a:rPr lang="en-US" sz="1200" dirty="0">
+                    <a:cs typeface="Arial" panose="020B0604020202020204" pitchFamily="34" charset="0"/>
+                  </a:rPr>
+                  <a:t> y del </a:t>
+                </a:r>
+                <a:r>
+                  <a:rPr lang="en-US" sz="1200" dirty="0" err="1">
+                    <a:cs typeface="Arial" panose="020B0604020202020204" pitchFamily="34" charset="0"/>
+                  </a:rPr>
+                  <a:t>calculo</a:t>
+                </a:r>
+                <a:r>
+                  <a:rPr lang="en-US" sz="1200" dirty="0">
+                    <a:cs typeface="Arial" panose="020B0604020202020204" pitchFamily="34" charset="0"/>
+                  </a:rPr>
+                  <a:t> de las </a:t>
+                </a:r>
+                <a:r>
+                  <a:rPr lang="en-US" sz="1200" dirty="0" err="1">
+                    <a:cs typeface="Arial" panose="020B0604020202020204" pitchFamily="34" charset="0"/>
+                  </a:rPr>
+                  <a:t>guias</a:t>
+                </a:r>
+                <a:r>
+                  <a:rPr lang="en-US" sz="1200" dirty="0">
+                    <a:cs typeface="Arial" panose="020B0604020202020204" pitchFamily="34" charset="0"/>
+                  </a:rPr>
+                  <a:t> de </a:t>
+                </a:r>
+                <a:r>
+                  <a:rPr lang="en-US" sz="1200" dirty="0" err="1">
+                    <a:cs typeface="Arial" panose="020B0604020202020204" pitchFamily="34" charset="0"/>
+                  </a:rPr>
+                  <a:t>onda</a:t>
+                </a:r>
+                <a:r>
+                  <a:rPr lang="en-US" sz="1200" dirty="0">
+                    <a:cs typeface="Arial" panose="020B0604020202020204" pitchFamily="34" charset="0"/>
+                  </a:rPr>
+                  <a:t>, </a:t>
+                </a:r>
+                <a:r>
+                  <a:rPr lang="en-US" sz="1200" dirty="0" err="1">
+                    <a:cs typeface="Arial" panose="020B0604020202020204" pitchFamily="34" charset="0"/>
+                  </a:rPr>
+                  <a:t>llevando</a:t>
+                </a:r>
+                <a:r>
+                  <a:rPr lang="en-US" sz="1200" dirty="0">
+                    <a:cs typeface="Arial" panose="020B0604020202020204" pitchFamily="34" charset="0"/>
+                  </a:rPr>
+                  <a:t> a </a:t>
+                </a:r>
+                <a:r>
+                  <a:rPr lang="en-US" sz="1200" dirty="0" err="1">
+                    <a:cs typeface="Arial" panose="020B0604020202020204" pitchFamily="34" charset="0"/>
+                  </a:rPr>
+                  <a:t>cabo</a:t>
+                </a:r>
+                <a:r>
+                  <a:rPr lang="en-US" sz="1200" dirty="0">
+                    <a:cs typeface="Arial" panose="020B0604020202020204" pitchFamily="34" charset="0"/>
+                  </a:rPr>
+                  <a:t> </a:t>
+                </a:r>
+                <a:r>
+                  <a:rPr lang="en-US" sz="1200" dirty="0" err="1">
+                    <a:cs typeface="Arial" panose="020B0604020202020204" pitchFamily="34" charset="0"/>
+                  </a:rPr>
+                  <a:t>una</a:t>
+                </a:r>
+                <a:r>
+                  <a:rPr lang="en-US" sz="1200" dirty="0">
+                    <a:cs typeface="Arial" panose="020B0604020202020204" pitchFamily="34" charset="0"/>
+                  </a:rPr>
+                  <a:t> </a:t>
+                </a:r>
+                <a:r>
+                  <a:rPr lang="en-US" sz="1200" dirty="0" err="1">
+                    <a:cs typeface="Arial" panose="020B0604020202020204" pitchFamily="34" charset="0"/>
+                  </a:rPr>
+                  <a:t>aproximacion</a:t>
+                </a:r>
+                <a:r>
+                  <a:rPr lang="en-US" sz="1200" dirty="0">
+                    <a:cs typeface="Arial" panose="020B0604020202020204" pitchFamily="34" charset="0"/>
+                  </a:rPr>
+                  <a:t> de sus indices </a:t>
+                </a:r>
+                <a:r>
+                  <a:rPr lang="en-US" sz="1200" dirty="0" err="1">
+                    <a:cs typeface="Arial" panose="020B0604020202020204" pitchFamily="34" charset="0"/>
+                  </a:rPr>
+                  <a:t>efectivos</a:t>
+                </a:r>
+                <a:r>
+                  <a:rPr lang="en-US" sz="1200" dirty="0">
+                    <a:cs typeface="Arial" panose="020B0604020202020204" pitchFamily="34" charset="0"/>
+                  </a:rPr>
+                  <a:t> </a:t>
+                </a:r>
+                <a:r>
+                  <a:rPr lang="en-US" sz="1200" dirty="0" err="1">
+                    <a:cs typeface="Arial" panose="020B0604020202020204" pitchFamily="34" charset="0"/>
+                  </a:rPr>
+                  <a:t>en</a:t>
+                </a:r>
+                <a:r>
+                  <a:rPr lang="en-US" sz="1200" dirty="0">
+                    <a:cs typeface="Arial" panose="020B0604020202020204" pitchFamily="34" charset="0"/>
+                  </a:rPr>
+                  <a:t> </a:t>
+                </a:r>
+                <a:r>
+                  <a:rPr lang="en-US" sz="1200" dirty="0" err="1">
+                    <a:cs typeface="Arial" panose="020B0604020202020204" pitchFamily="34" charset="0"/>
+                  </a:rPr>
+                  <a:t>el</a:t>
+                </a:r>
+                <a:r>
+                  <a:rPr lang="en-US" sz="1200" dirty="0">
+                    <a:cs typeface="Arial" panose="020B0604020202020204" pitchFamily="34" charset="0"/>
+                  </a:rPr>
+                  <a:t> </a:t>
+                </a:r>
+                <a:r>
+                  <a:rPr lang="en-US" sz="1200" dirty="0" err="1">
+                    <a:cs typeface="Arial" panose="020B0604020202020204" pitchFamily="34" charset="0"/>
+                  </a:rPr>
+                  <a:t>rango</a:t>
+                </a:r>
+                <a:r>
+                  <a:rPr lang="en-US" sz="1200" dirty="0">
+                    <a:cs typeface="Arial" panose="020B0604020202020204" pitchFamily="34" charset="0"/>
+                  </a:rPr>
+                  <a:t> de longitudes de </a:t>
+                </a:r>
+                <a:r>
+                  <a:rPr lang="en-US" sz="1200" dirty="0" err="1">
+                    <a:cs typeface="Arial" panose="020B0604020202020204" pitchFamily="34" charset="0"/>
+                  </a:rPr>
+                  <a:t>onda</a:t>
+                </a:r>
+                <a:r>
+                  <a:rPr lang="en-US" sz="1200" dirty="0">
+                    <a:cs typeface="Arial" panose="020B0604020202020204" pitchFamily="34" charset="0"/>
+                  </a:rPr>
+                  <a:t> de 1.50 a 1.6, </a:t>
+                </a:r>
+                <a:r>
+                  <a:rPr lang="en-US" sz="1200" dirty="0" err="1">
+                    <a:cs typeface="Arial" panose="020B0604020202020204" pitchFamily="34" charset="0"/>
+                  </a:rPr>
+                  <a:t>tomando</a:t>
+                </a:r>
+                <a:r>
+                  <a:rPr lang="en-US" sz="1200" dirty="0">
+                    <a:cs typeface="Arial" panose="020B0604020202020204" pitchFamily="34" charset="0"/>
+                  </a:rPr>
+                  <a:t> </a:t>
+                </a:r>
+                <a:r>
+                  <a:rPr lang="en-US" sz="1200" dirty="0" err="1">
+                    <a:cs typeface="Arial" panose="020B0604020202020204" pitchFamily="34" charset="0"/>
+                  </a:rPr>
+                  <a:t>como</a:t>
+                </a:r>
+                <a:r>
+                  <a:rPr lang="en-US" sz="1200" dirty="0">
+                    <a:cs typeface="Arial" panose="020B0604020202020204" pitchFamily="34" charset="0"/>
+                  </a:rPr>
+                  <a:t> </a:t>
+                </a:r>
+                <a:r>
+                  <a:rPr lang="en-US" sz="1200" dirty="0" err="1">
+                    <a:cs typeface="Arial" panose="020B0604020202020204" pitchFamily="34" charset="0"/>
+                  </a:rPr>
+                  <a:t>referencia</a:t>
+                </a:r>
+                <a:r>
+                  <a:rPr lang="en-US" sz="1200" dirty="0">
+                    <a:cs typeface="Arial" panose="020B0604020202020204" pitchFamily="34" charset="0"/>
+                  </a:rPr>
+                  <a:t> 1.55.</a:t>
+                </a:r>
+              </a:p>
+              <a:p>
+                <a:pPr algn="just"/>
+                <a:endParaRPr lang="en-US" sz="1200" dirty="0">
+                  <a:cs typeface="Arial" panose="020B0604020202020204" pitchFamily="34" charset="0"/>
+                </a:endParaRPr>
+              </a:p>
+              <a:p>
+                <a:pPr algn="just"/>
+                <a:r>
+                  <a:rPr lang="en-US" sz="1200" dirty="0">
+                    <a:cs typeface="Arial" panose="020B0604020202020204" pitchFamily="34" charset="0"/>
+                  </a:rPr>
+                  <a:t>Para </a:t>
+                </a:r>
+                <a:r>
+                  <a:rPr lang="en-US" sz="1200" dirty="0" err="1">
+                    <a:cs typeface="Arial" panose="020B0604020202020204" pitchFamily="34" charset="0"/>
+                  </a:rPr>
+                  <a:t>ello</a:t>
+                </a:r>
+                <a:r>
+                  <a:rPr lang="en-US" sz="1200" dirty="0">
+                    <a:cs typeface="Arial" panose="020B0604020202020204" pitchFamily="34" charset="0"/>
+                  </a:rPr>
+                  <a:t>, se </a:t>
+                </a:r>
+                <a:r>
+                  <a:rPr lang="en-US" sz="1200" dirty="0" err="1">
+                    <a:cs typeface="Arial" panose="020B0604020202020204" pitchFamily="34" charset="0"/>
+                  </a:rPr>
+                  <a:t>han</a:t>
+                </a:r>
+                <a:r>
+                  <a:rPr lang="en-US" sz="1200" dirty="0">
+                    <a:cs typeface="Arial" panose="020B0604020202020204" pitchFamily="34" charset="0"/>
+                  </a:rPr>
+                  <a:t> </a:t>
+                </a:r>
+                <a:r>
+                  <a:rPr lang="en-US" sz="1200" dirty="0" err="1">
+                    <a:cs typeface="Arial" panose="020B0604020202020204" pitchFamily="34" charset="0"/>
+                  </a:rPr>
+                  <a:t>tomado</a:t>
+                </a:r>
+                <a:r>
+                  <a:rPr lang="en-US" sz="1200" dirty="0">
+                    <a:cs typeface="Arial" panose="020B0604020202020204" pitchFamily="34" charset="0"/>
+                  </a:rPr>
+                  <a:t> las dos </a:t>
+                </a:r>
+                <a:r>
+                  <a:rPr lang="en-US" sz="1200" dirty="0" err="1">
+                    <a:cs typeface="Arial" panose="020B0604020202020204" pitchFamily="34" charset="0"/>
+                  </a:rPr>
+                  <a:t>funciones</a:t>
+                </a:r>
+                <a:r>
+                  <a:rPr lang="en-US" sz="1200" dirty="0">
+                    <a:cs typeface="Arial" panose="020B0604020202020204" pitchFamily="34" charset="0"/>
+                  </a:rPr>
+                  <a:t> </a:t>
+                </a:r>
+                <a:r>
+                  <a:rPr lang="en-US" sz="1200" dirty="0" err="1">
+                    <a:cs typeface="Arial" panose="020B0604020202020204" pitchFamily="34" charset="0"/>
+                  </a:rPr>
+                  <a:t>creadas</a:t>
+                </a:r>
+                <a:r>
+                  <a:rPr lang="en-US" sz="1200" dirty="0">
+                    <a:cs typeface="Arial" panose="020B0604020202020204" pitchFamily="34" charset="0"/>
+                  </a:rPr>
+                  <a:t> </a:t>
+                </a:r>
+                <a:r>
+                  <a:rPr lang="en-US" sz="1200" dirty="0" err="1">
+                    <a:cs typeface="Arial" panose="020B0604020202020204" pitchFamily="34" charset="0"/>
+                  </a:rPr>
+                  <a:t>en</a:t>
+                </a:r>
+                <a:r>
+                  <a:rPr lang="en-US" sz="1200" dirty="0">
+                    <a:cs typeface="Arial" panose="020B0604020202020204" pitchFamily="34" charset="0"/>
+                  </a:rPr>
+                  <a:t> </a:t>
+                </a:r>
+                <a:r>
+                  <a:rPr lang="en-US" sz="1200" dirty="0" err="1">
+                    <a:cs typeface="Arial" panose="020B0604020202020204" pitchFamily="34" charset="0"/>
+                  </a:rPr>
+                  <a:t>el</a:t>
+                </a:r>
+                <a:r>
+                  <a:rPr lang="en-US" sz="1200" dirty="0">
+                    <a:cs typeface="Arial" panose="020B0604020202020204" pitchFamily="34" charset="0"/>
+                  </a:rPr>
+                  <a:t> LO.2, tanto para la deep </a:t>
+                </a:r>
+                <a:r>
+                  <a:rPr lang="en-US" sz="1200" dirty="0" err="1">
+                    <a:cs typeface="Arial" panose="020B0604020202020204" pitchFamily="34" charset="0"/>
+                  </a:rPr>
+                  <a:t>como</a:t>
+                </a:r>
+                <a:r>
+                  <a:rPr lang="en-US" sz="1200" dirty="0">
+                    <a:cs typeface="Arial" panose="020B0604020202020204" pitchFamily="34" charset="0"/>
+                  </a:rPr>
+                  <a:t> para la shallow. A </a:t>
+                </a:r>
+                <a:r>
+                  <a:rPr lang="en-US" sz="1200" dirty="0" err="1">
+                    <a:cs typeface="Arial" panose="020B0604020202020204" pitchFamily="34" charset="0"/>
+                  </a:rPr>
+                  <a:t>partir</a:t>
+                </a:r>
+                <a:r>
+                  <a:rPr lang="en-US" sz="1200" dirty="0">
+                    <a:cs typeface="Arial" panose="020B0604020202020204" pitchFamily="34" charset="0"/>
+                  </a:rPr>
+                  <a:t> </a:t>
+                </a:r>
+                <a:r>
+                  <a:rPr lang="es-ES" sz="1200" dirty="0"/>
+                  <a:t>de los resultados obtenidos con el </a:t>
+                </a:r>
+                <a:r>
+                  <a:rPr lang="es-ES" sz="1200" dirty="0" err="1"/>
+                  <a:t>ModeSolver</a:t>
+                </a:r>
+                <a:r>
+                  <a:rPr lang="en-US" sz="1200" dirty="0">
+                    <a:cs typeface="Arial" panose="020B0604020202020204" pitchFamily="34" charset="0"/>
+                  </a:rPr>
+                  <a:t>, </a:t>
+                </a:r>
+                <a:r>
+                  <a:rPr lang="es-ES" sz="1200" dirty="0"/>
+                  <a:t>se ha realizado un ajuste polinómico de segundo orden en torno a </a:t>
+                </a:r>
+                <a:r>
+                  <a:rPr lang="el-GR" sz="1200" dirty="0"/>
+                  <a:t>λ₀, </a:t>
+                </a:r>
+                <a:r>
+                  <a:rPr lang="es-ES" sz="1200" dirty="0"/>
+                  <a:t>obteniendo los coeficientes </a:t>
+                </a:r>
+                <a14:m>
+                  <m:oMath xmlns:m="http://schemas.openxmlformats.org/officeDocument/2006/math">
+                    <m:sSub>
+                      <m:sSubPr>
+                        <m:ctrlPr>
+                          <a:rPr lang="ar-AE" sz="1200"/>
+                        </m:ctrlPr>
+                      </m:sSubPr>
+                      <m:e>
+                        <m:r>
+                          <a:rPr lang="ar-AE" sz="1200" i="1"/>
+                          <m:t>𝑛</m:t>
+                        </m:r>
+                      </m:e>
+                      <m:sub>
+                        <m:r>
+                          <a:rPr lang="ar-AE" sz="1200"/>
+                          <m:t>1</m:t>
+                        </m:r>
+                      </m:sub>
+                    </m:sSub>
+                  </m:oMath>
+                </a14:m>
+                <a:r>
+                  <a:rPr lang="ar-AE" sz="1200" dirty="0"/>
+                  <a:t>, </a:t>
+                </a:r>
+                <a14:m>
+                  <m:oMath xmlns:m="http://schemas.openxmlformats.org/officeDocument/2006/math">
+                    <m:sSub>
+                      <m:sSubPr>
+                        <m:ctrlPr>
+                          <a:rPr lang="ar-AE" sz="1200"/>
+                        </m:ctrlPr>
+                      </m:sSubPr>
+                      <m:e>
+                        <m:r>
+                          <a:rPr lang="ar-AE" sz="1200" i="1"/>
+                          <m:t>𝑛</m:t>
+                        </m:r>
+                      </m:e>
+                      <m:sub>
+                        <m:r>
+                          <a:rPr lang="ar-AE" sz="1200"/>
+                          <m:t>2</m:t>
+                        </m:r>
+                      </m:sub>
+                    </m:sSub>
+                  </m:oMath>
+                </a14:m>
+                <a:r>
+                  <a:rPr lang="es-ES" sz="1200" dirty="0"/>
+                  <a:t>y </a:t>
+                </a:r>
+                <a14:m>
+                  <m:oMath xmlns:m="http://schemas.openxmlformats.org/officeDocument/2006/math">
+                    <m:sSub>
+                      <m:sSubPr>
+                        <m:ctrlPr>
+                          <a:rPr lang="ar-AE" sz="1200"/>
+                        </m:ctrlPr>
+                      </m:sSubPr>
+                      <m:e>
+                        <m:r>
+                          <a:rPr lang="ar-AE" sz="1200" i="1"/>
+                          <m:t>𝑛</m:t>
+                        </m:r>
+                      </m:e>
+                      <m:sub>
+                        <m:r>
+                          <a:rPr lang="ar-AE" sz="1200"/>
+                          <m:t>3</m:t>
+                        </m:r>
+                      </m:sub>
+                    </m:sSub>
+                  </m:oMath>
+                </a14:m>
+                <a:r>
+                  <a:rPr lang="ar-AE" sz="1200" dirty="0"/>
+                  <a:t>, </a:t>
+                </a:r>
+                <a:r>
+                  <a:rPr lang="es-ES" sz="1200" dirty="0"/>
+                  <a:t>así como el índice de grupo y el parámetro de dispersión.</a:t>
+                </a:r>
+                <a:r>
+                  <a:rPr lang="en-US" sz="1200" dirty="0">
+                    <a:cs typeface="Arial" panose="020B0604020202020204" pitchFamily="34" charset="0"/>
+                  </a:rPr>
+                  <a:t>. </a:t>
+                </a:r>
+              </a:p>
+              <a:p>
+                <a:pPr algn="just"/>
+                <a:endParaRPr lang="en-US" sz="1200" dirty="0">
+                  <a:cs typeface="Arial" panose="020B0604020202020204" pitchFamily="34" charset="0"/>
+                </a:endParaRPr>
+              </a:p>
+              <a:p>
+                <a:pPr algn="just"/>
+                <a:r>
+                  <a:rPr lang="en-US" sz="1200" dirty="0" err="1">
+                    <a:cs typeface="Arial" panose="020B0604020202020204" pitchFamily="34" charset="0"/>
+                  </a:rPr>
+                  <a:t>Posteriormente</a:t>
+                </a:r>
+                <a:r>
+                  <a:rPr lang="en-US" sz="1200" dirty="0">
+                    <a:cs typeface="Arial" panose="020B0604020202020204" pitchFamily="34" charset="0"/>
+                  </a:rPr>
+                  <a:t>, se </a:t>
+                </a:r>
+                <a:r>
+                  <a:rPr lang="en-US" sz="1200" dirty="0" err="1">
+                    <a:cs typeface="Arial" panose="020B0604020202020204" pitchFamily="34" charset="0"/>
+                  </a:rPr>
+                  <a:t>han</a:t>
+                </a:r>
+                <a:r>
+                  <a:rPr lang="en-US" sz="1200" dirty="0">
+                    <a:cs typeface="Arial" panose="020B0604020202020204" pitchFamily="34" charset="0"/>
+                  </a:rPr>
+                  <a:t> </a:t>
+                </a:r>
+                <a:r>
+                  <a:rPr lang="en-US" sz="1200" dirty="0" err="1">
+                    <a:cs typeface="Arial" panose="020B0604020202020204" pitchFamily="34" charset="0"/>
+                  </a:rPr>
+                  <a:t>analizado</a:t>
+                </a:r>
+                <a:r>
+                  <a:rPr lang="en-US" sz="1200" dirty="0">
+                    <a:cs typeface="Arial" panose="020B0604020202020204" pitchFamily="34" charset="0"/>
+                  </a:rPr>
+                  <a:t> </a:t>
+                </a:r>
+                <a:r>
+                  <a:rPr lang="en-US" sz="1200" dirty="0" err="1">
+                    <a:cs typeface="Arial" panose="020B0604020202020204" pitchFamily="34" charset="0"/>
+                  </a:rPr>
+                  <a:t>los</a:t>
+                </a:r>
+                <a:r>
+                  <a:rPr lang="en-US" sz="1200" dirty="0">
+                    <a:cs typeface="Arial" panose="020B0604020202020204" pitchFamily="34" charset="0"/>
+                  </a:rPr>
+                  <a:t> </a:t>
+                </a:r>
+                <a:r>
+                  <a:rPr lang="en-US" sz="1200" dirty="0" err="1">
+                    <a:cs typeface="Arial" panose="020B0604020202020204" pitchFamily="34" charset="0"/>
+                  </a:rPr>
+                  <a:t>resultados</a:t>
+                </a:r>
+                <a:r>
+                  <a:rPr lang="en-US" sz="1200" dirty="0">
+                    <a:cs typeface="Arial" panose="020B0604020202020204" pitchFamily="34" charset="0"/>
+                  </a:rPr>
+                  <a:t> y se ha </a:t>
+                </a:r>
+                <a:r>
+                  <a:rPr lang="en-US" sz="1200" dirty="0" err="1">
+                    <a:cs typeface="Arial" panose="020B0604020202020204" pitchFamily="34" charset="0"/>
+                  </a:rPr>
+                  <a:t>llegado</a:t>
+                </a:r>
+                <a:r>
+                  <a:rPr lang="en-US" sz="1200" dirty="0">
+                    <a:cs typeface="Arial" panose="020B0604020202020204" pitchFamily="34" charset="0"/>
+                  </a:rPr>
+                  <a:t> a la conclusion de </a:t>
+                </a:r>
+                <a:r>
+                  <a:rPr lang="en-US" sz="1200" dirty="0" err="1">
+                    <a:cs typeface="Arial" panose="020B0604020202020204" pitchFamily="34" charset="0"/>
+                  </a:rPr>
+                  <a:t>que</a:t>
+                </a:r>
+                <a:r>
+                  <a:rPr lang="en-US" sz="1200" dirty="0">
+                    <a:cs typeface="Arial" panose="020B0604020202020204" pitchFamily="34" charset="0"/>
+                  </a:rPr>
+                  <a:t> son </a:t>
+                </a:r>
+                <a:r>
+                  <a:rPr lang="en-US" sz="1200" dirty="0" err="1">
+                    <a:cs typeface="Arial" panose="020B0604020202020204" pitchFamily="34" charset="0"/>
+                  </a:rPr>
+                  <a:t>correctos</a:t>
+                </a:r>
+                <a:r>
+                  <a:rPr lang="en-US" sz="1200" dirty="0">
+                    <a:cs typeface="Arial" panose="020B0604020202020204" pitchFamily="34" charset="0"/>
+                  </a:rPr>
+                  <a:t>, </a:t>
+                </a:r>
+                <a:r>
+                  <a:rPr lang="en-US" sz="1200" dirty="0" err="1">
+                    <a:cs typeface="Arial" panose="020B0604020202020204" pitchFamily="34" charset="0"/>
+                  </a:rPr>
+                  <a:t>ya</a:t>
+                </a:r>
+                <a:r>
+                  <a:rPr lang="en-US" sz="1200" dirty="0">
+                    <a:cs typeface="Arial" panose="020B0604020202020204" pitchFamily="34" charset="0"/>
+                  </a:rPr>
+                  <a:t> </a:t>
+                </a:r>
+                <a:r>
+                  <a:rPr lang="en-US" sz="1200" dirty="0" err="1">
+                    <a:cs typeface="Arial" panose="020B0604020202020204" pitchFamily="34" charset="0"/>
+                  </a:rPr>
+                  <a:t>que</a:t>
+                </a:r>
+                <a:r>
+                  <a:rPr lang="en-US" sz="1200" dirty="0">
+                    <a:cs typeface="Arial" panose="020B0604020202020204" pitchFamily="34" charset="0"/>
+                  </a:rPr>
+                  <a:t> </a:t>
+                </a:r>
+                <a:r>
+                  <a:rPr lang="en-US" sz="1200" dirty="0" err="1">
+                    <a:cs typeface="Arial" panose="020B0604020202020204" pitchFamily="34" charset="0"/>
+                  </a:rPr>
+                  <a:t>el</a:t>
+                </a:r>
+                <a:r>
+                  <a:rPr lang="en-US" sz="1200" dirty="0">
+                    <a:cs typeface="Arial" panose="020B0604020202020204" pitchFamily="34" charset="0"/>
+                  </a:rPr>
+                  <a:t> </a:t>
+                </a:r>
+                <a:r>
+                  <a:rPr lang="en-US" sz="1200" dirty="0" err="1">
+                    <a:cs typeface="Arial" panose="020B0604020202020204" pitchFamily="34" charset="0"/>
+                  </a:rPr>
+                  <a:t>coeficiente</a:t>
+                </a:r>
+                <a:r>
+                  <a:rPr lang="en-US" sz="1200" dirty="0">
+                    <a:cs typeface="Arial" panose="020B0604020202020204" pitchFamily="34" charset="0"/>
+                  </a:rPr>
+                  <a:t> n1 </a:t>
+                </a:r>
+                <a:r>
+                  <a:rPr lang="en-US" sz="1200" dirty="0" err="1">
+                    <a:cs typeface="Arial" panose="020B0604020202020204" pitchFamily="34" charset="0"/>
+                  </a:rPr>
+                  <a:t>corresponde</a:t>
+                </a:r>
+                <a:r>
+                  <a:rPr lang="en-US" sz="1200" dirty="0">
+                    <a:cs typeface="Arial" panose="020B0604020202020204" pitchFamily="34" charset="0"/>
+                  </a:rPr>
+                  <a:t> al </a:t>
+                </a:r>
+                <a:r>
+                  <a:rPr lang="en-US" sz="1200" dirty="0" err="1">
+                    <a:cs typeface="Arial" panose="020B0604020202020204" pitchFamily="34" charset="0"/>
+                  </a:rPr>
+                  <a:t>indice</a:t>
+                </a:r>
+                <a:r>
+                  <a:rPr lang="en-US" sz="1200" dirty="0">
+                    <a:cs typeface="Arial" panose="020B0604020202020204" pitchFamily="34" charset="0"/>
+                  </a:rPr>
+                  <a:t> </a:t>
+                </a:r>
+                <a:r>
+                  <a:rPr lang="en-US" sz="1200" dirty="0" err="1">
+                    <a:cs typeface="Arial" panose="020B0604020202020204" pitchFamily="34" charset="0"/>
+                  </a:rPr>
+                  <a:t>efectivo</a:t>
+                </a:r>
+                <a:r>
+                  <a:rPr lang="en-US" sz="1200" dirty="0">
+                    <a:cs typeface="Arial" panose="020B0604020202020204" pitchFamily="34" charset="0"/>
+                  </a:rPr>
+                  <a:t> </a:t>
+                </a:r>
+                <a:r>
+                  <a:rPr lang="en-US" sz="1200" dirty="0" err="1">
+                    <a:cs typeface="Arial" panose="020B0604020202020204" pitchFamily="34" charset="0"/>
+                  </a:rPr>
+                  <a:t>en</a:t>
+                </a:r>
+                <a:r>
+                  <a:rPr lang="en-US" sz="1200" dirty="0">
+                    <a:cs typeface="Arial" panose="020B0604020202020204" pitchFamily="34" charset="0"/>
+                  </a:rPr>
+                  <a:t> </a:t>
+                </a:r>
+                <a:r>
+                  <a:rPr lang="en-US" sz="1200" dirty="0" err="1">
+                    <a:cs typeface="Arial" panose="020B0604020202020204" pitchFamily="34" charset="0"/>
+                  </a:rPr>
+                  <a:t>cada</a:t>
+                </a:r>
+                <a:r>
+                  <a:rPr lang="en-US" sz="1200" dirty="0">
+                    <a:cs typeface="Arial" panose="020B0604020202020204" pitchFamily="34" charset="0"/>
+                  </a:rPr>
+                  <a:t> modo </a:t>
+                </a:r>
+                <a:r>
+                  <a:rPr lang="en-US" sz="1200" dirty="0" err="1">
+                    <a:cs typeface="Arial" panose="020B0604020202020204" pitchFamily="34" charset="0"/>
+                  </a:rPr>
+                  <a:t>en</a:t>
+                </a:r>
+                <a:r>
+                  <a:rPr lang="en-US" sz="1200" dirty="0">
+                    <a:cs typeface="Arial" panose="020B0604020202020204" pitchFamily="34" charset="0"/>
+                  </a:rPr>
+                  <a:t> la longitude de </a:t>
+                </a:r>
+                <a:r>
+                  <a:rPr lang="en-US" sz="1200" dirty="0" err="1">
+                    <a:cs typeface="Arial" panose="020B0604020202020204" pitchFamily="34" charset="0"/>
+                  </a:rPr>
+                  <a:t>onda</a:t>
+                </a:r>
+                <a:r>
+                  <a:rPr lang="en-US" sz="1200" dirty="0">
+                    <a:cs typeface="Arial" panose="020B0604020202020204" pitchFamily="34" charset="0"/>
+                  </a:rPr>
+                  <a:t> de </a:t>
+                </a:r>
+                <a:r>
+                  <a:rPr lang="en-US" sz="1200" dirty="0" err="1">
+                    <a:cs typeface="Arial" panose="020B0604020202020204" pitchFamily="34" charset="0"/>
+                  </a:rPr>
+                  <a:t>referencia</a:t>
+                </a:r>
+                <a:r>
+                  <a:rPr lang="en-US" sz="1200" dirty="0">
+                    <a:cs typeface="Arial" panose="020B0604020202020204" pitchFamily="34" charset="0"/>
+                  </a:rPr>
+                  <a:t>. </a:t>
+                </a:r>
+                <a:r>
+                  <a:rPr lang="es-ES" sz="1200" dirty="0"/>
+                  <a:t>Además, </a:t>
+                </a:r>
+                <a14:m>
+                  <m:oMath xmlns:m="http://schemas.openxmlformats.org/officeDocument/2006/math">
+                    <m:sSub>
+                      <m:sSubPr>
+                        <m:ctrlPr>
+                          <a:rPr lang="ar-AE" sz="1200"/>
+                        </m:ctrlPr>
+                      </m:sSubPr>
+                      <m:e>
+                        <m:r>
+                          <a:rPr lang="ar-AE" sz="1200" i="1"/>
+                          <m:t>𝑛</m:t>
+                        </m:r>
+                      </m:e>
+                      <m:sub>
+                        <m:r>
+                          <a:rPr lang="ar-AE" sz="1200"/>
+                          <m:t>2</m:t>
+                        </m:r>
+                      </m:sub>
+                    </m:sSub>
+                  </m:oMath>
+                </a14:m>
+                <a:r>
+                  <a:rPr lang="es-ES" sz="1200" dirty="0"/>
+                  <a:t>es menor que cero, lo que indica que el índice efectivo disminuye al aumentar la longitud de onda debido al </a:t>
+                </a:r>
+                <a:r>
+                  <a:rPr lang="es-ES" sz="1200" dirty="0" err="1"/>
+                  <a:t>desconfiamiento</a:t>
+                </a:r>
+                <a:r>
+                  <a:rPr lang="es-ES" sz="1200" dirty="0"/>
+                  <a:t> modal. Por otro lado, la dispersión resulta negativa porque el coeficiente </a:t>
+                </a:r>
+                <a14:m>
+                  <m:oMath xmlns:m="http://schemas.openxmlformats.org/officeDocument/2006/math">
+                    <m:sSub>
+                      <m:sSubPr>
+                        <m:ctrlPr>
+                          <a:rPr lang="ar-AE" sz="1200"/>
+                        </m:ctrlPr>
+                      </m:sSubPr>
+                      <m:e>
+                        <m:r>
+                          <a:rPr lang="ar-AE" sz="1200" i="1"/>
+                          <m:t>𝑛</m:t>
+                        </m:r>
+                      </m:e>
+                      <m:sub>
+                        <m:r>
+                          <a:rPr lang="ar-AE" sz="1200"/>
+                          <m:t>3</m:t>
+                        </m:r>
+                      </m:sub>
+                    </m:sSub>
+                  </m:oMath>
+                </a14:m>
+                <a:r>
+                  <a:rPr lang="es-ES" sz="1200" dirty="0"/>
+                  <a:t>es positivo, según la relación </a:t>
+                </a:r>
+                <a14:m>
+                  <m:oMath xmlns:m="http://schemas.openxmlformats.org/officeDocument/2006/math">
+                    <m:r>
+                      <a:rPr lang="es-ES" sz="1200" i="1"/>
+                      <m:t>𝐷</m:t>
+                    </m:r>
+                    <m:r>
+                      <a:rPr lang="es-ES" sz="1200"/>
+                      <m:t>=−</m:t>
+                    </m:r>
+                    <m:f>
+                      <m:fPr>
+                        <m:ctrlPr>
+                          <a:rPr lang="ar-AE" sz="1200" i="1"/>
+                        </m:ctrlPr>
+                      </m:fPr>
+                      <m:num>
+                        <m:r>
+                          <a:rPr lang="ar-AE" sz="1200"/>
+                          <m:t>2</m:t>
+                        </m:r>
+                        <m:sSub>
+                          <m:sSubPr>
+                            <m:ctrlPr>
+                              <a:rPr lang="ar-AE" sz="1200" i="1"/>
+                            </m:ctrlPr>
+                          </m:sSubPr>
+                          <m:e>
+                            <m:r>
+                              <a:rPr lang="ar-AE" sz="1200" i="1"/>
+                              <m:t>𝜆</m:t>
+                            </m:r>
+                          </m:e>
+                          <m:sub>
+                            <m:r>
+                              <a:rPr lang="ar-AE" sz="1200"/>
+                              <m:t>0</m:t>
+                            </m:r>
+                          </m:sub>
+                        </m:sSub>
+                        <m:sSub>
+                          <m:sSubPr>
+                            <m:ctrlPr>
+                              <a:rPr lang="ar-AE" sz="1200" i="1"/>
+                            </m:ctrlPr>
+                          </m:sSubPr>
+                          <m:e>
+                            <m:r>
+                              <a:rPr lang="ar-AE" sz="1200" i="1"/>
+                              <m:t>𝑛</m:t>
+                            </m:r>
+                          </m:e>
+                          <m:sub>
+                            <m:r>
+                              <a:rPr lang="ar-AE" sz="1200"/>
+                              <m:t>3</m:t>
+                            </m:r>
+                          </m:sub>
+                        </m:sSub>
+                      </m:num>
+                      <m:den>
+                        <m:r>
+                          <a:rPr lang="ar-AE" sz="1200" i="1"/>
+                          <m:t>𝑐</m:t>
+                        </m:r>
+                      </m:den>
+                    </m:f>
+                  </m:oMath>
+                </a14:m>
+                <a:r>
+                  <a:rPr lang="ar-AE" sz="1200" dirty="0"/>
+                  <a:t>, </a:t>
+                </a:r>
+                <a:r>
+                  <a:rPr lang="es-ES" sz="1200" dirty="0"/>
+                  <a:t>lo que implica una curvatura cóncava hacia arriba del índice efectivo en el rango analizado.</a:t>
+                </a:r>
+              </a:p>
+              <a:p>
+                <a:pPr algn="just"/>
+                <a:endParaRPr lang="en-US" sz="1200" dirty="0">
+                  <a:cs typeface="Arial" panose="020B0604020202020204" pitchFamily="34" charset="0"/>
+                </a:endParaRPr>
+              </a:p>
+              <a:p>
+                <a:pPr algn="just"/>
+                <a:r>
+                  <a:rPr lang="es-ES" sz="1200" dirty="0"/>
+                  <a:t>Asimismo, se observa que la guía </a:t>
+                </a:r>
+                <a:r>
+                  <a:rPr lang="es-ES" sz="1200" dirty="0" err="1"/>
+                  <a:t>shallow</a:t>
+                </a:r>
+                <a:r>
+                  <a:rPr lang="es-ES" sz="1200" dirty="0"/>
+                  <a:t> presenta valores ligeramente mayores de índice efectivo que la </a:t>
+                </a:r>
+                <a:r>
+                  <a:rPr lang="es-ES" sz="1200" dirty="0" err="1"/>
+                  <a:t>deep</a:t>
+                </a:r>
+                <a:r>
+                  <a:rPr lang="es-ES" sz="1200" dirty="0"/>
+                  <a:t>, lo que indica un mayor confinamiento modal debido a la presencia del </a:t>
+                </a:r>
+                <a:r>
+                  <a:rPr lang="es-ES" sz="1200" dirty="0" err="1"/>
+                  <a:t>slab</a:t>
+                </a:r>
+                <a:r>
+                  <a:rPr lang="es-ES" sz="1200" dirty="0"/>
+                  <a:t>.</a:t>
+                </a:r>
+                <a:endParaRPr lang="en-US" sz="1200" dirty="0">
+                  <a:cs typeface="Arial" panose="020B0604020202020204" pitchFamily="34" charset="0"/>
+                </a:endParaRPr>
+              </a:p>
+              <a:p>
+                <a:pPr algn="just"/>
+                <a:endParaRPr lang="en-US" sz="1200" dirty="0">
+                  <a:latin typeface="Arial" panose="020B0604020202020204" pitchFamily="34" charset="0"/>
+                  <a:cs typeface="Arial" panose="020B0604020202020204" pitchFamily="34" charset="0"/>
+                </a:endParaRPr>
+              </a:p>
+            </p:txBody>
+          </p:sp>
+        </mc:Choice>
+        <mc:Fallback>
+          <p:sp>
+            <p:nvSpPr>
+              <p:cNvPr id="2" name="CuadroTexto 1">
+                <a:extLst>
+                  <a:ext uri="{FF2B5EF4-FFF2-40B4-BE49-F238E27FC236}">
+                    <a16:creationId xmlns:a16="http://schemas.microsoft.com/office/drawing/2014/main" id="{11E2B217-7A2F-7F84-8CFC-E023D5FB8F3B}"/>
+                  </a:ext>
+                </a:extLst>
+              </p:cNvPr>
+              <p:cNvSpPr txBox="1">
+                <a:spLocks noRot="1" noChangeAspect="1" noMove="1" noResize="1" noEditPoints="1" noAdjustHandles="1" noChangeArrowheads="1" noChangeShapeType="1" noTextEdit="1"/>
+              </p:cNvSpPr>
+              <p:nvPr/>
+            </p:nvSpPr>
+            <p:spPr>
+              <a:xfrm>
+                <a:off x="481668" y="1690095"/>
+                <a:ext cx="11198542" cy="3849324"/>
+              </a:xfrm>
+              <a:prstGeom prst="rect">
+                <a:avLst/>
+              </a:prstGeom>
+              <a:blipFill>
+                <a:blip r:embed="rId5"/>
+                <a:stretch>
+                  <a:fillRect/>
+                </a:stretch>
+              </a:blipFill>
+              <a:ln w="28575">
+                <a:solidFill>
+                  <a:srgbClr val="E0700D"/>
+                </a:solidFill>
+              </a:ln>
+            </p:spPr>
+            <p:txBody>
+              <a:bodyPr/>
+              <a:lstStyle/>
+              <a:p>
+                <a:r>
+                  <a:rPr lang="es-ES">
+                    <a:noFill/>
+                  </a:rPr>
+                  <a:t> </a:t>
+                </a:r>
+              </a:p>
+            </p:txBody>
+          </p:sp>
+        </mc:Fallback>
+      </mc:AlternateContent>
+    </p:spTree>
+    <p:extLst>
+      <p:ext uri="{BB962C8B-B14F-4D97-AF65-F5344CB8AC3E}">
+        <p14:creationId xmlns:p14="http://schemas.microsoft.com/office/powerpoint/2010/main" val="3463398200"/>
+      </p:ext>
+    </p:extLst>
+  </p:cSld>
+  <p:clrMapOvr>
+    <a:masterClrMapping/>
+  </p:clrMapOvr>
+</p:sld>
+</file>
+
+<file path=ppt/slides/slide12.xml><?xml version="1.0" encoding="utf-8"?>
 <p:sld xmlns:a="http://schemas.openxmlformats.org/drawingml/2006/main" xmlns:r="http://schemas.openxmlformats.org/officeDocument/2006/relationships" xmlns:p="http://schemas.openxmlformats.org/presentationml/2006/main">
   <p:cSld>
     <p:spTree>
@@ -4549,7 +7221,7 @@
           <a:p>
             <a:fld id="{B6F15528-21DE-4FAA-801E-634DDDAF4B2B}" type="slidenum">
               <a:rPr lang="es-ES" smtClean="0"/>
-              <a:t>11</a:t>
+              <a:t>12</a:t>
             </a:fld>
             <a:endParaRPr lang="es-ES"/>
           </a:p>
@@ -4788,7 +7460,7 @@
 </p:sld>
 </file>
 
-<file path=ppt/slides/slide12.xml><?xml version="1.0" encoding="utf-8"?>
+<file path=ppt/slides/slide13.xml><?xml version="1.0" encoding="utf-8"?>
 <p:sld xmlns:a="http://schemas.openxmlformats.org/drawingml/2006/main" xmlns:r="http://schemas.openxmlformats.org/officeDocument/2006/relationships" xmlns:p="http://schemas.openxmlformats.org/presentationml/2006/main">
   <p:cSld>
     <p:spTree>
@@ -4927,7 +7599,7 @@
           <a:p>
             <a:fld id="{B6F15528-21DE-4FAA-801E-634DDDAF4B2B}" type="slidenum">
               <a:rPr lang="es-ES" smtClean="0"/>
-              <a:t>12</a:t>
+              <a:t>13</a:t>
             </a:fld>
             <a:endParaRPr lang="es-ES"/>
           </a:p>
@@ -4947,7 +7619,7 @@
         </p:nvSpPr>
         <p:spPr>
           <a:xfrm>
-            <a:off x="2667000" y="858867"/>
+            <a:off x="1452886" y="312322"/>
             <a:ext cx="6120880" cy="2308324"/>
           </a:xfrm>
           <a:prstGeom prst="rect">
@@ -4981,7 +7653,7 @@
           </a:p>
           <a:p>
             <a:r>
-              <a:rPr lang="es-ES"/>
+              <a:rPr lang="es-ES" dirty="0"/>
               <a:t> </a:t>
             </a:r>
           </a:p>
@@ -4990,18 +7662,11 @@
               <a:buNone/>
             </a:pPr>
             <a:r>
-              <a:rPr lang="en-US">
-                <a:effectLst/>
-                <a:latin typeface="-apple-system"/>
-              </a:rPr>
-              <a:t>git </a:t>
-            </a:r>
-            <a:r>
               <a:rPr lang="en-US" dirty="0">
                 <a:effectLst/>
                 <a:latin typeface="-apple-system"/>
               </a:rPr>
-              <a:t>add -A</a:t>
+              <a:t>git add -A</a:t>
             </a:r>
           </a:p>
           <a:p>

--- a/LabBook_10.pptx
+++ b/LabBook_10.pptx
@@ -5,10 +5,10 @@
     <p:sldMasterId id="2147483648" r:id="rId1"/>
   </p:sldMasterIdLst>
   <p:notesMasterIdLst>
-    <p:notesMasterId r:id="rId15"/>
+    <p:notesMasterId r:id="rId16"/>
   </p:notesMasterIdLst>
   <p:handoutMasterIdLst>
-    <p:handoutMasterId r:id="rId16"/>
+    <p:handoutMasterId r:id="rId17"/>
   </p:handoutMasterIdLst>
   <p:sldIdLst>
     <p:sldId id="256" r:id="rId2"/>
@@ -23,7 +23,8 @@
     <p:sldId id="297" r:id="rId11"/>
     <p:sldId id="304" r:id="rId12"/>
     <p:sldId id="293" r:id="rId13"/>
-    <p:sldId id="288" r:id="rId14"/>
+    <p:sldId id="305" r:id="rId14"/>
+    <p:sldId id="288" r:id="rId15"/>
   </p:sldIdLst>
   <p:sldSz cx="12192000" cy="6858000"/>
   <p:notesSz cx="12192000" cy="6858000"/>
@@ -238,7 +239,7 @@
           <a:p>
             <a:fld id="{8438F8DC-35B0-48E6-A86E-42F1F08DD00F}" type="datetimeFigureOut">
               <a:rPr lang="es-ES" smtClean="0"/>
-              <a:t>28/02/2026</a:t>
+              <a:t>04/03/2026</a:t>
             </a:fld>
             <a:endParaRPr lang="es-ES"/>
           </a:p>
@@ -415,7 +416,7 @@
           <a:p>
             <a:fld id="{FACBDC12-F39B-4B97-8F4D-6734F9D366FF}" type="datetimeFigureOut">
               <a:rPr lang="es-ES" smtClean="0"/>
-              <a:t>28/02/2026</a:t>
+              <a:t>04/03/2026</a:t>
             </a:fld>
             <a:endParaRPr lang="es-ES"/>
           </a:p>
@@ -865,6 +866,114 @@
     <p:extLst>
       <p:ext uri="{BB962C8B-B14F-4D97-AF65-F5344CB8AC3E}">
         <p14:creationId xmlns:p14="http://schemas.microsoft.com/office/powerpoint/2010/main" val="2917382716"/>
+      </p:ext>
+    </p:extLst>
+  </p:cSld>
+  <p:clrMapOvr>
+    <a:masterClrMapping/>
+  </p:clrMapOvr>
+</p:notes>
+</file>
+
+<file path=ppt/notesSlides/notesSlide11.xml><?xml version="1.0" encoding="utf-8"?>
+<p:notes xmlns:a="http://schemas.openxmlformats.org/drawingml/2006/main" xmlns:r="http://schemas.openxmlformats.org/officeDocument/2006/relationships" xmlns:p="http://schemas.openxmlformats.org/presentationml/2006/main">
+  <p:cSld>
+    <p:spTree>
+      <p:nvGrpSpPr>
+        <p:cNvPr id="1" name="">
+          <a:extLst>
+            <a:ext uri="{FF2B5EF4-FFF2-40B4-BE49-F238E27FC236}">
+              <a16:creationId xmlns:a16="http://schemas.microsoft.com/office/drawing/2014/main" id="{6804C9DC-82CC-4670-22D4-5992593A56DE}"/>
+            </a:ext>
+          </a:extLst>
+        </p:cNvPr>
+        <p:cNvGrpSpPr/>
+        <p:nvPr/>
+      </p:nvGrpSpPr>
+      <p:grpSpPr>
+        <a:xfrm>
+          <a:off x="0" y="0"/>
+          <a:ext cx="0" cy="0"/>
+          <a:chOff x="0" y="0"/>
+          <a:chExt cx="0" cy="0"/>
+        </a:xfrm>
+      </p:grpSpPr>
+      <p:sp>
+        <p:nvSpPr>
+          <p:cNvPr id="2" name="Marcador de imagen de diapositiva 1">
+            <a:extLst>
+              <a:ext uri="{FF2B5EF4-FFF2-40B4-BE49-F238E27FC236}">
+                <a16:creationId xmlns:a16="http://schemas.microsoft.com/office/drawing/2014/main" id="{2674CF7F-E690-9508-0B5F-2BA0A5C06413}"/>
+              </a:ext>
+            </a:extLst>
+          </p:cNvPr>
+          <p:cNvSpPr>
+            <a:spLocks noGrp="1" noRot="1" noChangeAspect="1"/>
+          </p:cNvSpPr>
+          <p:nvPr>
+            <p:ph type="sldImg"/>
+          </p:nvPr>
+        </p:nvSpPr>
+        <p:spPr/>
+      </p:sp>
+      <p:sp>
+        <p:nvSpPr>
+          <p:cNvPr id="3" name="Marcador de notas 2">
+            <a:extLst>
+              <a:ext uri="{FF2B5EF4-FFF2-40B4-BE49-F238E27FC236}">
+                <a16:creationId xmlns:a16="http://schemas.microsoft.com/office/drawing/2014/main" id="{7EDAB5C4-3DE9-E2AC-1B13-49A58BDA5989}"/>
+              </a:ext>
+            </a:extLst>
+          </p:cNvPr>
+          <p:cNvSpPr>
+            <a:spLocks noGrp="1"/>
+          </p:cNvSpPr>
+          <p:nvPr>
+            <p:ph type="body" idx="1"/>
+          </p:nvPr>
+        </p:nvSpPr>
+        <p:spPr/>
+        <p:txBody>
+          <a:bodyPr/>
+          <a:lstStyle/>
+          <a:p>
+            <a:endParaRPr lang="es-ES" dirty="0"/>
+          </a:p>
+        </p:txBody>
+      </p:sp>
+      <p:sp>
+        <p:nvSpPr>
+          <p:cNvPr id="4" name="Marcador de número de diapositiva 3">
+            <a:extLst>
+              <a:ext uri="{FF2B5EF4-FFF2-40B4-BE49-F238E27FC236}">
+                <a16:creationId xmlns:a16="http://schemas.microsoft.com/office/drawing/2014/main" id="{E90CFDBC-951D-3FB9-8D9B-0680D6DEAB33}"/>
+              </a:ext>
+            </a:extLst>
+          </p:cNvPr>
+          <p:cNvSpPr>
+            <a:spLocks noGrp="1"/>
+          </p:cNvSpPr>
+          <p:nvPr>
+            <p:ph type="sldNum" sz="quarter" idx="5"/>
+          </p:nvPr>
+        </p:nvSpPr>
+        <p:spPr/>
+        <p:txBody>
+          <a:bodyPr/>
+          <a:lstStyle/>
+          <a:p>
+            <a:fld id="{676223B9-C868-4436-87D9-1A3152E1157A}" type="slidenum">
+              <a:rPr lang="es-ES" smtClean="0"/>
+              <a:t>13</a:t>
+            </a:fld>
+            <a:endParaRPr lang="es-ES"/>
+          </a:p>
+        </p:txBody>
+      </p:sp>
+    </p:spTree>
+    <p:extLst>
+      <p:ext uri="{BB962C8B-B14F-4D97-AF65-F5344CB8AC3E}">
+        <p14:creationId xmlns:p14="http://schemas.microsoft.com/office/powerpoint/2010/main" val="1117091669"/>
       </p:ext>
     </p:extLst>
   </p:cSld>
@@ -3534,6 +3643,435 @@
           </a:p>
         </p:txBody>
       </p:sp>
+      <p:sp>
+        <p:nvSpPr>
+          <p:cNvPr id="5" name="Rectángulo 4">
+            <a:extLst>
+              <a:ext uri="{FF2B5EF4-FFF2-40B4-BE49-F238E27FC236}">
+                <a16:creationId xmlns:a16="http://schemas.microsoft.com/office/drawing/2014/main" id="{A6B92C76-6772-2E00-346F-532321092C04}"/>
+              </a:ext>
+            </a:extLst>
+          </p:cNvPr>
+          <p:cNvSpPr/>
+          <p:nvPr/>
+        </p:nvSpPr>
+        <p:spPr>
+          <a:xfrm>
+            <a:off x="609441" y="1447800"/>
+            <a:ext cx="5486559" cy="3306028"/>
+          </a:xfrm>
+          <a:prstGeom prst="rect">
+            <a:avLst/>
+          </a:prstGeom>
+          <a:noFill/>
+          <a:ln w="28575">
+            <a:solidFill>
+              <a:srgbClr val="E0700D"/>
+            </a:solidFill>
+          </a:ln>
+        </p:spPr>
+        <p:style>
+          <a:lnRef idx="2">
+            <a:schemeClr val="accent1">
+              <a:shade val="15000"/>
+            </a:schemeClr>
+          </a:lnRef>
+          <a:fillRef idx="1">
+            <a:schemeClr val="accent1"/>
+          </a:fillRef>
+          <a:effectRef idx="0">
+            <a:schemeClr val="accent1"/>
+          </a:effectRef>
+          <a:fontRef idx="minor">
+            <a:schemeClr val="lt1"/>
+          </a:fontRef>
+        </p:style>
+        <p:txBody>
+          <a:bodyPr rtlCol="0" anchor="ctr"/>
+          <a:lstStyle/>
+          <a:p>
+            <a:pPr algn="ctr"/>
+            <a:endParaRPr lang="en-US"/>
+          </a:p>
+        </p:txBody>
+      </p:sp>
+      <p:sp>
+        <p:nvSpPr>
+          <p:cNvPr id="6" name="Rectángulo 5">
+            <a:extLst>
+              <a:ext uri="{FF2B5EF4-FFF2-40B4-BE49-F238E27FC236}">
+                <a16:creationId xmlns:a16="http://schemas.microsoft.com/office/drawing/2014/main" id="{2886628E-6E58-1F7E-B6C6-432B9A228397}"/>
+              </a:ext>
+            </a:extLst>
+          </p:cNvPr>
+          <p:cNvSpPr/>
+          <p:nvPr/>
+        </p:nvSpPr>
+        <p:spPr>
+          <a:xfrm>
+            <a:off x="6321424" y="1447800"/>
+            <a:ext cx="5486559" cy="3306028"/>
+          </a:xfrm>
+          <a:prstGeom prst="rect">
+            <a:avLst/>
+          </a:prstGeom>
+          <a:noFill/>
+          <a:ln w="28575">
+            <a:solidFill>
+              <a:srgbClr val="E0700D"/>
+            </a:solidFill>
+          </a:ln>
+        </p:spPr>
+        <p:style>
+          <a:lnRef idx="2">
+            <a:schemeClr val="accent1">
+              <a:shade val="15000"/>
+            </a:schemeClr>
+          </a:lnRef>
+          <a:fillRef idx="1">
+            <a:schemeClr val="accent1"/>
+          </a:fillRef>
+          <a:effectRef idx="0">
+            <a:schemeClr val="accent1"/>
+          </a:effectRef>
+          <a:fontRef idx="minor">
+            <a:schemeClr val="lt1"/>
+          </a:fontRef>
+        </p:style>
+        <p:txBody>
+          <a:bodyPr rtlCol="0" anchor="ctr"/>
+          <a:lstStyle/>
+          <a:p>
+            <a:pPr algn="ctr"/>
+            <a:endParaRPr lang="en-US"/>
+          </a:p>
+        </p:txBody>
+      </p:sp>
+      <p:sp>
+        <p:nvSpPr>
+          <p:cNvPr id="8" name="CuadroTexto 7">
+            <a:extLst>
+              <a:ext uri="{FF2B5EF4-FFF2-40B4-BE49-F238E27FC236}">
+                <a16:creationId xmlns:a16="http://schemas.microsoft.com/office/drawing/2014/main" id="{0F38E924-A0E7-A039-C837-916BA77FE89B}"/>
+              </a:ext>
+            </a:extLst>
+          </p:cNvPr>
+          <p:cNvSpPr txBox="1"/>
+          <p:nvPr/>
+        </p:nvSpPr>
+        <p:spPr>
+          <a:xfrm>
+            <a:off x="6347361" y="4498712"/>
+            <a:ext cx="5486560" cy="276999"/>
+          </a:xfrm>
+          <a:prstGeom prst="rect">
+            <a:avLst/>
+          </a:prstGeom>
+          <a:noFill/>
+        </p:spPr>
+        <p:txBody>
+          <a:bodyPr wrap="square">
+            <a:spAutoFit/>
+          </a:bodyPr>
+          <a:lstStyle/>
+          <a:p>
+            <a:pPr algn="r"/>
+            <a:r>
+              <a:rPr lang="en-US" sz="1200" b="1" dirty="0">
+                <a:solidFill>
+                  <a:schemeClr val="tx1"/>
+                </a:solidFill>
+                <a:latin typeface="Arial" panose="020B0604020202020204" pitchFamily="34" charset="0"/>
+                <a:cs typeface="Arial" panose="020B0604020202020204" pitchFamily="34" charset="0"/>
+              </a:rPr>
+              <a:t>slab: 150nm</a:t>
+            </a:r>
+            <a:endParaRPr lang="en-US" sz="1200" dirty="0">
+              <a:solidFill>
+                <a:schemeClr val="tx1"/>
+              </a:solidFill>
+              <a:latin typeface="Arial" panose="020B0604020202020204" pitchFamily="34" charset="0"/>
+              <a:cs typeface="Arial" panose="020B0604020202020204" pitchFamily="34" charset="0"/>
+            </a:endParaRPr>
+          </a:p>
+        </p:txBody>
+      </p:sp>
+      <p:pic>
+        <p:nvPicPr>
+          <p:cNvPr id="7" name="Imagen 6" descr="Gráfico&#10;&#10;El contenido generado por IA puede ser incorrecto.">
+            <a:extLst>
+              <a:ext uri="{FF2B5EF4-FFF2-40B4-BE49-F238E27FC236}">
+                <a16:creationId xmlns:a16="http://schemas.microsoft.com/office/drawing/2014/main" id="{6EE6A301-802F-71A8-D45A-719DDCE2374F}"/>
+              </a:ext>
+            </a:extLst>
+          </p:cNvPr>
+          <p:cNvPicPr>
+            <a:picLocks noChangeAspect="1"/>
+          </p:cNvPicPr>
+          <p:nvPr/>
+        </p:nvPicPr>
+        <p:blipFill>
+          <a:blip r:embed="rId5"/>
+          <a:stretch>
+            <a:fillRect/>
+          </a:stretch>
+        </p:blipFill>
+        <p:spPr>
+          <a:xfrm>
+            <a:off x="609440" y="1462655"/>
+            <a:ext cx="5486560" cy="3291174"/>
+          </a:xfrm>
+          <a:prstGeom prst="rect">
+            <a:avLst/>
+          </a:prstGeom>
+        </p:spPr>
+      </p:pic>
+      <p:pic>
+        <p:nvPicPr>
+          <p:cNvPr id="12" name="Imagen 11" descr="Gráfico, Gráfico de líneas&#10;&#10;El contenido generado por IA puede ser incorrecto.">
+            <a:extLst>
+              <a:ext uri="{FF2B5EF4-FFF2-40B4-BE49-F238E27FC236}">
+                <a16:creationId xmlns:a16="http://schemas.microsoft.com/office/drawing/2014/main" id="{53B7AF3B-D6BB-A7C0-88D3-336824D54616}"/>
+              </a:ext>
+            </a:extLst>
+          </p:cNvPr>
+          <p:cNvPicPr>
+            <a:picLocks noChangeAspect="1"/>
+          </p:cNvPicPr>
+          <p:nvPr/>
+        </p:nvPicPr>
+        <p:blipFill>
+          <a:blip r:embed="rId6"/>
+          <a:stretch>
+            <a:fillRect/>
+          </a:stretch>
+        </p:blipFill>
+        <p:spPr>
+          <a:xfrm>
+            <a:off x="6321423" y="1462655"/>
+            <a:ext cx="5486560" cy="3291173"/>
+          </a:xfrm>
+          <a:prstGeom prst="rect">
+            <a:avLst/>
+          </a:prstGeom>
+        </p:spPr>
+      </p:pic>
+    </p:spTree>
+    <p:extLst>
+      <p:ext uri="{BB962C8B-B14F-4D97-AF65-F5344CB8AC3E}">
+        <p14:creationId xmlns:p14="http://schemas.microsoft.com/office/powerpoint/2010/main" val="236054401"/>
+      </p:ext>
+    </p:extLst>
+  </p:cSld>
+  <p:clrMapOvr>
+    <a:masterClrMapping/>
+  </p:clrMapOvr>
+</p:sld>
+</file>
+
+<file path=ppt/slides/slide11.xml><?xml version="1.0" encoding="utf-8"?>
+<p:sld xmlns:a="http://schemas.openxmlformats.org/drawingml/2006/main" xmlns:r="http://schemas.openxmlformats.org/officeDocument/2006/relationships" xmlns:p="http://schemas.openxmlformats.org/presentationml/2006/main">
+  <p:cSld>
+    <p:spTree>
+      <p:nvGrpSpPr>
+        <p:cNvPr id="1" name="">
+          <a:extLst>
+            <a:ext uri="{FF2B5EF4-FFF2-40B4-BE49-F238E27FC236}">
+              <a16:creationId xmlns:a16="http://schemas.microsoft.com/office/drawing/2014/main" id="{A27EFB58-B666-0C41-4C72-3ABC0EC43882}"/>
+            </a:ext>
+          </a:extLst>
+        </p:cNvPr>
+        <p:cNvGrpSpPr/>
+        <p:nvPr/>
+      </p:nvGrpSpPr>
+      <p:grpSpPr>
+        <a:xfrm>
+          <a:off x="0" y="0"/>
+          <a:ext cx="0" cy="0"/>
+          <a:chOff x="0" y="0"/>
+          <a:chExt cx="0" cy="0"/>
+        </a:xfrm>
+      </p:grpSpPr>
+      <p:sp>
+        <p:nvSpPr>
+          <p:cNvPr id="16" name="object 16">
+            <a:extLst>
+              <a:ext uri="{FF2B5EF4-FFF2-40B4-BE49-F238E27FC236}">
+                <a16:creationId xmlns:a16="http://schemas.microsoft.com/office/drawing/2014/main" id="{83DF2B24-AC21-643D-B8C0-62993AB27B88}"/>
+              </a:ext>
+            </a:extLst>
+          </p:cNvPr>
+          <p:cNvSpPr txBox="1">
+            <a:spLocks noGrp="1"/>
+          </p:cNvSpPr>
+          <p:nvPr>
+            <p:ph type="title"/>
+          </p:nvPr>
+        </p:nvSpPr>
+        <p:spPr>
+          <a:xfrm>
+            <a:off x="685800" y="408883"/>
+            <a:ext cx="10994410" cy="1397819"/>
+          </a:xfrm>
+          <a:prstGeom prst="rect">
+            <a:avLst/>
+          </a:prstGeom>
+        </p:spPr>
+        <p:txBody>
+          <a:bodyPr vert="horz" wrap="square" lIns="0" tIns="12700" rIns="0" bIns="0" rtlCol="0">
+            <a:spAutoFit/>
+          </a:bodyPr>
+          <a:lstStyle/>
+          <a:p>
+            <a:pPr marL="12700">
+              <a:lnSpc>
+                <a:spcPct val="100000"/>
+              </a:lnSpc>
+              <a:spcBef>
+                <a:spcPts val="100"/>
+              </a:spcBef>
+            </a:pPr>
+            <a:r>
+              <a:rPr lang="en-US" sz="2500" dirty="0"/>
+              <a:t>Learning outcome #4 – Waveguide compact model</a:t>
+            </a:r>
+            <a:br>
+              <a:rPr lang="en-US" sz="2500" spc="-5" dirty="0">
+                <a:latin typeface="+mj-lt"/>
+                <a:cs typeface="Lucida Sans"/>
+              </a:rPr>
+            </a:br>
+            <a:r>
+              <a:rPr lang="en-US" b="0" dirty="0"/>
+              <a:t>- Find the compact models of the following waveguides: </a:t>
+            </a:r>
+            <a:br>
+              <a:rPr lang="en-US" b="0" dirty="0"/>
+            </a:br>
+            <a:r>
+              <a:rPr lang="en-US" dirty="0"/>
+              <a:t>Deep</a:t>
+            </a:r>
+            <a:r>
+              <a:rPr lang="en-US" b="0" dirty="0"/>
+              <a:t> waveguide, h=300nm, w=1.2um   - </a:t>
+            </a:r>
+            <a:r>
+              <a:rPr lang="en-US" dirty="0"/>
+              <a:t>Shallow</a:t>
+            </a:r>
+            <a:r>
+              <a:rPr lang="en-US" b="0" dirty="0"/>
+              <a:t> waveguide, core h=300nm, slab h=150 nm, w = 1.2um </a:t>
+            </a:r>
+            <a:br>
+              <a:rPr lang="en-US" b="0" dirty="0"/>
+            </a:br>
+            <a:endParaRPr lang="en-US" sz="2500" b="0" dirty="0">
+              <a:latin typeface="+mj-lt"/>
+              <a:cs typeface="Lucida Sans"/>
+            </a:endParaRPr>
+          </a:p>
+        </p:txBody>
+      </p:sp>
+      <p:pic>
+        <p:nvPicPr>
+          <p:cNvPr id="83" name="Gráfico 82">
+            <a:extLst>
+              <a:ext uri="{FF2B5EF4-FFF2-40B4-BE49-F238E27FC236}">
+                <a16:creationId xmlns:a16="http://schemas.microsoft.com/office/drawing/2014/main" id="{37813654-26E9-7238-D73E-68BA1316A31E}"/>
+              </a:ext>
+            </a:extLst>
+          </p:cNvPr>
+          <p:cNvPicPr>
+            <a:picLocks noChangeAspect="1"/>
+          </p:cNvPicPr>
+          <p:nvPr/>
+        </p:nvPicPr>
+        <p:blipFill>
+          <a:blip r:embed="rId3">
+            <a:extLst>
+              <a:ext uri="{96DAC541-7B7A-43D3-8B79-37D633B846F1}">
+                <asvg:svgBlip xmlns:asvg="http://schemas.microsoft.com/office/drawing/2016/SVG/main" r:embed="rId4"/>
+              </a:ext>
+            </a:extLst>
+          </a:blip>
+          <a:stretch>
+            <a:fillRect/>
+          </a:stretch>
+        </p:blipFill>
+        <p:spPr>
+          <a:xfrm>
+            <a:off x="5045006" y="6356057"/>
+            <a:ext cx="6409575" cy="363174"/>
+          </a:xfrm>
+          <a:prstGeom prst="rect">
+            <a:avLst/>
+          </a:prstGeom>
+        </p:spPr>
+      </p:pic>
+      <p:sp>
+        <p:nvSpPr>
+          <p:cNvPr id="84" name="Marcador de número de diapositiva 83">
+            <a:extLst>
+              <a:ext uri="{FF2B5EF4-FFF2-40B4-BE49-F238E27FC236}">
+                <a16:creationId xmlns:a16="http://schemas.microsoft.com/office/drawing/2014/main" id="{8E2D0D11-BF34-FF92-6520-B37F368C0D94}"/>
+              </a:ext>
+            </a:extLst>
+          </p:cNvPr>
+          <p:cNvSpPr>
+            <a:spLocks noGrp="1"/>
+          </p:cNvSpPr>
+          <p:nvPr>
+            <p:ph type="sldNum" sz="quarter" idx="7"/>
+          </p:nvPr>
+        </p:nvSpPr>
+        <p:spPr/>
+        <p:txBody>
+          <a:bodyPr/>
+          <a:lstStyle/>
+          <a:p>
+            <a:fld id="{B6F15528-21DE-4FAA-801E-634DDDAF4B2B}" type="slidenum">
+              <a:rPr lang="es-ES" smtClean="0"/>
+              <a:t>11</a:t>
+            </a:fld>
+            <a:endParaRPr lang="es-ES"/>
+          </a:p>
+        </p:txBody>
+      </p:sp>
+      <p:sp>
+        <p:nvSpPr>
+          <p:cNvPr id="3" name="Marcador de pie de página 2">
+            <a:extLst>
+              <a:ext uri="{FF2B5EF4-FFF2-40B4-BE49-F238E27FC236}">
+                <a16:creationId xmlns:a16="http://schemas.microsoft.com/office/drawing/2014/main" id="{FB835810-53AB-5DA6-6898-CDFC21E038D3}"/>
+              </a:ext>
+            </a:extLst>
+          </p:cNvPr>
+          <p:cNvSpPr>
+            <a:spLocks noGrp="1"/>
+          </p:cNvSpPr>
+          <p:nvPr>
+            <p:ph type="ftr" sz="quarter" idx="5"/>
+          </p:nvPr>
+        </p:nvSpPr>
+        <p:spPr/>
+        <p:txBody>
+          <a:bodyPr/>
+          <a:lstStyle/>
+          <a:p>
+            <a:pPr marL="12700">
+              <a:spcBef>
+                <a:spcPts val="15"/>
+              </a:spcBef>
+            </a:pPr>
+            <a:r>
+              <a:rPr lang="es-ES" spc="-5" dirty="0"/>
+              <a:t>LAB 1.0 WAVEGUIDES</a:t>
+            </a:r>
+          </a:p>
+        </p:txBody>
+      </p:sp>
       <mc:AlternateContent xmlns:mc="http://schemas.openxmlformats.org/markup-compatibility/2006">
         <mc:Choice xmlns:a14="http://schemas.microsoft.com/office/drawing/2010/main" Requires="a14">
           <p:sp>
@@ -3541,7 +4079,7 @@
               <p:cNvPr id="2" name="CuadroTexto 1">
                 <a:extLst>
                   <a:ext uri="{FF2B5EF4-FFF2-40B4-BE49-F238E27FC236}">
-                    <a16:creationId xmlns:a16="http://schemas.microsoft.com/office/drawing/2014/main" id="{A440F587-93A3-E474-C0B0-883BB9DAFD85}"/>
+                    <a16:creationId xmlns:a16="http://schemas.microsoft.com/office/drawing/2014/main" id="{11E2B217-7A2F-7F84-8CFC-E023D5FB8F3B}"/>
                   </a:ext>
                 </a:extLst>
               </p:cNvPr>
@@ -3550,8 +4088,8 @@
             </p:nvSpPr>
             <p:spPr>
               <a:xfrm>
-                <a:off x="609441" y="4860334"/>
-                <a:ext cx="11198542" cy="2925224"/>
+                <a:off x="481668" y="1690095"/>
+                <a:ext cx="11198542" cy="3849324"/>
               </a:xfrm>
               <a:prstGeom prst="rect">
                 <a:avLst/>
@@ -3576,7 +4114,6 @@
                 <a:pPr algn="just"/>
                 <a:r>
                   <a:rPr lang="en-US" sz="1200" dirty="0">
-                    <a:latin typeface="Arial" panose="020B0604020202020204" pitchFamily="34" charset="0"/>
                     <a:cs typeface="Arial" panose="020B0604020202020204" pitchFamily="34" charset="0"/>
                   </a:rPr>
                   <a:t>Find the second-degree polynomial coefficients and relate them with the group index and the dispersion parameter. </a:t>
@@ -3966,2015 +4503,6 @@
                   </m:oMath>
                 </a14:m>
                 <a:endParaRPr lang="es-ES" sz="1200" b="0" dirty="0">
-                  <a:latin typeface="Arial" panose="020B0604020202020204" pitchFamily="34" charset="0"/>
-                  <a:cs typeface="Arial" panose="020B0604020202020204" pitchFamily="34" charset="0"/>
-                </a:endParaRPr>
-              </a:p>
-              <a:p>
-                <a:pPr algn="just"/>
-                <a:r>
-                  <a:rPr lang="en-US" sz="1200" dirty="0">
-                    <a:latin typeface="Arial" panose="020B0604020202020204" pitchFamily="34" charset="0"/>
-                    <a:cs typeface="Arial" panose="020B0604020202020204" pitchFamily="34" charset="0"/>
-                  </a:rPr>
-                  <a:t> Comment on the results found for the TE0 and TM0 for both deep and shallow waveguides. </a:t>
-                </a:r>
-              </a:p>
-              <a:p>
-                <a:pPr algn="just"/>
-                <a:r>
-                  <a:rPr lang="en-US" sz="1200" dirty="0">
-                    <a:latin typeface="Arial" panose="020B0604020202020204" pitchFamily="34" charset="0"/>
-                    <a:cs typeface="Arial" panose="020B0604020202020204" pitchFamily="34" charset="0"/>
-                  </a:rPr>
-                  <a:t> A </a:t>
-                </a:r>
-                <a:r>
-                  <a:rPr lang="en-US" sz="1200" dirty="0" err="1">
-                    <a:latin typeface="Arial" panose="020B0604020202020204" pitchFamily="34" charset="0"/>
-                    <a:cs typeface="Arial" panose="020B0604020202020204" pitchFamily="34" charset="0"/>
-                  </a:rPr>
-                  <a:t>continuación</a:t>
-                </a:r>
-                <a:r>
-                  <a:rPr lang="en-US" sz="1200" dirty="0">
-                    <a:latin typeface="Arial" panose="020B0604020202020204" pitchFamily="34" charset="0"/>
-                    <a:cs typeface="Arial" panose="020B0604020202020204" pitchFamily="34" charset="0"/>
-                  </a:rPr>
-                  <a:t> se </a:t>
-                </a:r>
-                <a:r>
-                  <a:rPr lang="en-US" sz="1200" dirty="0" err="1">
-                    <a:latin typeface="Arial" panose="020B0604020202020204" pitchFamily="34" charset="0"/>
-                    <a:cs typeface="Arial" panose="020B0604020202020204" pitchFamily="34" charset="0"/>
-                  </a:rPr>
-                  <a:t>presenta</a:t>
-                </a:r>
-                <a:r>
-                  <a:rPr lang="en-US" sz="1200" dirty="0">
-                    <a:latin typeface="Arial" panose="020B0604020202020204" pitchFamily="34" charset="0"/>
-                    <a:cs typeface="Arial" panose="020B0604020202020204" pitchFamily="34" charset="0"/>
-                  </a:rPr>
-                  <a:t> la </a:t>
-                </a:r>
-                <a:r>
-                  <a:rPr lang="en-US" sz="1200" dirty="0" err="1">
-                    <a:latin typeface="Arial" panose="020B0604020202020204" pitchFamily="34" charset="0"/>
-                    <a:cs typeface="Arial" panose="020B0604020202020204" pitchFamily="34" charset="0"/>
-                  </a:rPr>
-                  <a:t>ecuacion</a:t>
-                </a:r>
-                <a:r>
-                  <a:rPr lang="en-US" sz="1200" dirty="0">
-                    <a:latin typeface="Arial" panose="020B0604020202020204" pitchFamily="34" charset="0"/>
-                    <a:cs typeface="Arial" panose="020B0604020202020204" pitchFamily="34" charset="0"/>
-                  </a:rPr>
-                  <a:t> de </a:t>
-                </a:r>
-                <a:r>
-                  <a:rPr lang="en-US" sz="1200" dirty="0" err="1">
-                    <a:latin typeface="Arial" panose="020B0604020202020204" pitchFamily="34" charset="0"/>
-                    <a:cs typeface="Arial" panose="020B0604020202020204" pitchFamily="34" charset="0"/>
-                  </a:rPr>
-                  <a:t>segundo</a:t>
-                </a:r>
-                <a:r>
-                  <a:rPr lang="en-US" sz="1200" dirty="0">
-                    <a:latin typeface="Arial" panose="020B0604020202020204" pitchFamily="34" charset="0"/>
-                    <a:cs typeface="Arial" panose="020B0604020202020204" pitchFamily="34" charset="0"/>
-                  </a:rPr>
-                  <a:t> </a:t>
-                </a:r>
-                <a:r>
-                  <a:rPr lang="en-US" sz="1200" dirty="0" err="1">
-                    <a:latin typeface="Arial" panose="020B0604020202020204" pitchFamily="34" charset="0"/>
-                    <a:cs typeface="Arial" panose="020B0604020202020204" pitchFamily="34" charset="0"/>
-                  </a:rPr>
-                  <a:t>grado</a:t>
-                </a:r>
-                <a:r>
-                  <a:rPr lang="en-US" sz="1200" dirty="0">
-                    <a:latin typeface="Arial" panose="020B0604020202020204" pitchFamily="34" charset="0"/>
-                    <a:cs typeface="Arial" panose="020B0604020202020204" pitchFamily="34" charset="0"/>
-                  </a:rPr>
-                  <a:t> con </a:t>
-                </a:r>
-                <a:r>
-                  <a:rPr lang="en-US" sz="1200" dirty="0" err="1">
-                    <a:latin typeface="Arial" panose="020B0604020202020204" pitchFamily="34" charset="0"/>
-                    <a:cs typeface="Arial" panose="020B0604020202020204" pitchFamily="34" charset="0"/>
-                  </a:rPr>
-                  <a:t>los</a:t>
-                </a:r>
-                <a:r>
-                  <a:rPr lang="en-US" sz="1200" dirty="0">
-                    <a:latin typeface="Arial" panose="020B0604020202020204" pitchFamily="34" charset="0"/>
-                    <a:cs typeface="Arial" panose="020B0604020202020204" pitchFamily="34" charset="0"/>
-                  </a:rPr>
-                  <a:t> </a:t>
-                </a:r>
-                <a:r>
-                  <a:rPr lang="en-US" sz="1200" dirty="0" err="1">
-                    <a:latin typeface="Arial" panose="020B0604020202020204" pitchFamily="34" charset="0"/>
-                    <a:cs typeface="Arial" panose="020B0604020202020204" pitchFamily="34" charset="0"/>
-                  </a:rPr>
-                  <a:t>coeficientes</a:t>
-                </a:r>
-                <a:r>
-                  <a:rPr lang="en-US" sz="1200" dirty="0">
-                    <a:latin typeface="Arial" panose="020B0604020202020204" pitchFamily="34" charset="0"/>
-                    <a:cs typeface="Arial" panose="020B0604020202020204" pitchFamily="34" charset="0"/>
-                  </a:rPr>
-                  <a:t> </a:t>
-                </a:r>
-                <a:r>
-                  <a:rPr lang="en-US" sz="1200" dirty="0" err="1">
-                    <a:latin typeface="Arial" panose="020B0604020202020204" pitchFamily="34" charset="0"/>
-                    <a:cs typeface="Arial" panose="020B0604020202020204" pitchFamily="34" charset="0"/>
-                  </a:rPr>
-                  <a:t>polinomicos</a:t>
-                </a:r>
-                <a:r>
-                  <a:rPr lang="en-US" sz="1200" dirty="0">
-                    <a:latin typeface="Arial" panose="020B0604020202020204" pitchFamily="34" charset="0"/>
-                    <a:cs typeface="Arial" panose="020B0604020202020204" pitchFamily="34" charset="0"/>
-                  </a:rPr>
-                  <a:t>. Su </a:t>
-                </a:r>
-                <a:r>
-                  <a:rPr lang="en-US" sz="1200" dirty="0" err="1">
-                    <a:latin typeface="Arial" panose="020B0604020202020204" pitchFamily="34" charset="0"/>
-                    <a:cs typeface="Arial" panose="020B0604020202020204" pitchFamily="34" charset="0"/>
-                  </a:rPr>
-                  <a:t>objetivo</a:t>
-                </a:r>
-                <a:r>
-                  <a:rPr lang="en-US" sz="1200" dirty="0">
-                    <a:latin typeface="Arial" panose="020B0604020202020204" pitchFamily="34" charset="0"/>
-                    <a:cs typeface="Arial" panose="020B0604020202020204" pitchFamily="34" charset="0"/>
-                  </a:rPr>
-                  <a:t> es </a:t>
-                </a:r>
-                <a:r>
-                  <a:rPr lang="en-US" sz="1200" dirty="0" err="1">
-                    <a:latin typeface="Arial" panose="020B0604020202020204" pitchFamily="34" charset="0"/>
-                    <a:cs typeface="Arial" panose="020B0604020202020204" pitchFamily="34" charset="0"/>
-                  </a:rPr>
-                  <a:t>disminuir</a:t>
-                </a:r>
-                <a:r>
-                  <a:rPr lang="en-US" sz="1200" dirty="0">
-                    <a:latin typeface="Arial" panose="020B0604020202020204" pitchFamily="34" charset="0"/>
-                    <a:cs typeface="Arial" panose="020B0604020202020204" pitchFamily="34" charset="0"/>
-                  </a:rPr>
-                  <a:t> la </a:t>
-                </a:r>
-                <a:r>
-                  <a:rPr lang="en-US" sz="1200" dirty="0" err="1">
-                    <a:latin typeface="Arial" panose="020B0604020202020204" pitchFamily="34" charset="0"/>
-                    <a:cs typeface="Arial" panose="020B0604020202020204" pitchFamily="34" charset="0"/>
-                  </a:rPr>
-                  <a:t>complejidad</a:t>
-                </a:r>
-                <a:r>
-                  <a:rPr lang="en-US" sz="1200" dirty="0">
-                    <a:latin typeface="Arial" panose="020B0604020202020204" pitchFamily="34" charset="0"/>
-                    <a:cs typeface="Arial" panose="020B0604020202020204" pitchFamily="34" charset="0"/>
-                  </a:rPr>
-                  <a:t> de la </a:t>
-                </a:r>
-                <a:r>
-                  <a:rPr lang="en-US" sz="1200" dirty="0" err="1">
-                    <a:latin typeface="Arial" panose="020B0604020202020204" pitchFamily="34" charset="0"/>
-                    <a:cs typeface="Arial" panose="020B0604020202020204" pitchFamily="34" charset="0"/>
-                  </a:rPr>
-                  <a:t>representacion</a:t>
-                </a:r>
-                <a:r>
-                  <a:rPr lang="en-US" sz="1200" dirty="0">
-                    <a:latin typeface="Arial" panose="020B0604020202020204" pitchFamily="34" charset="0"/>
-                    <a:cs typeface="Arial" panose="020B0604020202020204" pitchFamily="34" charset="0"/>
-                  </a:rPr>
-                  <a:t> y del </a:t>
-                </a:r>
-                <a:r>
-                  <a:rPr lang="en-US" sz="1200" dirty="0" err="1">
-                    <a:latin typeface="Arial" panose="020B0604020202020204" pitchFamily="34" charset="0"/>
-                    <a:cs typeface="Arial" panose="020B0604020202020204" pitchFamily="34" charset="0"/>
-                  </a:rPr>
-                  <a:t>calculo</a:t>
-                </a:r>
-                <a:r>
-                  <a:rPr lang="en-US" sz="1200" dirty="0">
-                    <a:latin typeface="Arial" panose="020B0604020202020204" pitchFamily="34" charset="0"/>
-                    <a:cs typeface="Arial" panose="020B0604020202020204" pitchFamily="34" charset="0"/>
-                  </a:rPr>
-                  <a:t> de las </a:t>
-                </a:r>
-                <a:r>
-                  <a:rPr lang="en-US" sz="1200" dirty="0" err="1">
-                    <a:latin typeface="Arial" panose="020B0604020202020204" pitchFamily="34" charset="0"/>
-                    <a:cs typeface="Arial" panose="020B0604020202020204" pitchFamily="34" charset="0"/>
-                  </a:rPr>
-                  <a:t>guias</a:t>
-                </a:r>
-                <a:r>
-                  <a:rPr lang="en-US" sz="1200" dirty="0">
-                    <a:latin typeface="Arial" panose="020B0604020202020204" pitchFamily="34" charset="0"/>
-                    <a:cs typeface="Arial" panose="020B0604020202020204" pitchFamily="34" charset="0"/>
-                  </a:rPr>
-                  <a:t> de </a:t>
-                </a:r>
-                <a:r>
-                  <a:rPr lang="en-US" sz="1200" dirty="0" err="1">
-                    <a:latin typeface="Arial" panose="020B0604020202020204" pitchFamily="34" charset="0"/>
-                    <a:cs typeface="Arial" panose="020B0604020202020204" pitchFamily="34" charset="0"/>
-                  </a:rPr>
-                  <a:t>onda</a:t>
-                </a:r>
-                <a:r>
-                  <a:rPr lang="en-US" sz="1200" dirty="0">
-                    <a:latin typeface="Arial" panose="020B0604020202020204" pitchFamily="34" charset="0"/>
-                    <a:cs typeface="Arial" panose="020B0604020202020204" pitchFamily="34" charset="0"/>
-                  </a:rPr>
-                  <a:t>, </a:t>
-                </a:r>
-                <a:r>
-                  <a:rPr lang="en-US" sz="1200" dirty="0" err="1">
-                    <a:latin typeface="Arial" panose="020B0604020202020204" pitchFamily="34" charset="0"/>
-                    <a:cs typeface="Arial" panose="020B0604020202020204" pitchFamily="34" charset="0"/>
-                  </a:rPr>
-                  <a:t>llevando</a:t>
-                </a:r>
-                <a:r>
-                  <a:rPr lang="en-US" sz="1200" dirty="0">
-                    <a:latin typeface="Arial" panose="020B0604020202020204" pitchFamily="34" charset="0"/>
-                    <a:cs typeface="Arial" panose="020B0604020202020204" pitchFamily="34" charset="0"/>
-                  </a:rPr>
-                  <a:t> a </a:t>
-                </a:r>
-                <a:r>
-                  <a:rPr lang="en-US" sz="1200" dirty="0" err="1">
-                    <a:latin typeface="Arial" panose="020B0604020202020204" pitchFamily="34" charset="0"/>
-                    <a:cs typeface="Arial" panose="020B0604020202020204" pitchFamily="34" charset="0"/>
-                  </a:rPr>
-                  <a:t>cabo</a:t>
-                </a:r>
-                <a:r>
-                  <a:rPr lang="en-US" sz="1200" dirty="0">
-                    <a:latin typeface="Arial" panose="020B0604020202020204" pitchFamily="34" charset="0"/>
-                    <a:cs typeface="Arial" panose="020B0604020202020204" pitchFamily="34" charset="0"/>
-                  </a:rPr>
-                  <a:t> </a:t>
-                </a:r>
-                <a:r>
-                  <a:rPr lang="en-US" sz="1200" dirty="0" err="1">
-                    <a:latin typeface="Arial" panose="020B0604020202020204" pitchFamily="34" charset="0"/>
-                    <a:cs typeface="Arial" panose="020B0604020202020204" pitchFamily="34" charset="0"/>
-                  </a:rPr>
-                  <a:t>una</a:t>
-                </a:r>
-                <a:r>
-                  <a:rPr lang="en-US" sz="1200" dirty="0">
-                    <a:latin typeface="Arial" panose="020B0604020202020204" pitchFamily="34" charset="0"/>
-                    <a:cs typeface="Arial" panose="020B0604020202020204" pitchFamily="34" charset="0"/>
-                  </a:rPr>
-                  <a:t> </a:t>
-                </a:r>
-                <a:r>
-                  <a:rPr lang="en-US" sz="1200" dirty="0" err="1">
-                    <a:latin typeface="Arial" panose="020B0604020202020204" pitchFamily="34" charset="0"/>
-                    <a:cs typeface="Arial" panose="020B0604020202020204" pitchFamily="34" charset="0"/>
-                  </a:rPr>
-                  <a:t>aproximacion</a:t>
-                </a:r>
-                <a:r>
-                  <a:rPr lang="en-US" sz="1200" dirty="0">
-                    <a:latin typeface="Arial" panose="020B0604020202020204" pitchFamily="34" charset="0"/>
-                    <a:cs typeface="Arial" panose="020B0604020202020204" pitchFamily="34" charset="0"/>
-                  </a:rPr>
-                  <a:t> de sus indices </a:t>
-                </a:r>
-                <a:r>
-                  <a:rPr lang="en-US" sz="1200" dirty="0" err="1">
-                    <a:latin typeface="Arial" panose="020B0604020202020204" pitchFamily="34" charset="0"/>
-                    <a:cs typeface="Arial" panose="020B0604020202020204" pitchFamily="34" charset="0"/>
-                  </a:rPr>
-                  <a:t>efectivos</a:t>
-                </a:r>
-                <a:r>
-                  <a:rPr lang="en-US" sz="1200" dirty="0">
-                    <a:latin typeface="Arial" panose="020B0604020202020204" pitchFamily="34" charset="0"/>
-                    <a:cs typeface="Arial" panose="020B0604020202020204" pitchFamily="34" charset="0"/>
-                  </a:rPr>
-                  <a:t> </a:t>
-                </a:r>
-                <a:r>
-                  <a:rPr lang="en-US" sz="1200" dirty="0" err="1">
-                    <a:latin typeface="Arial" panose="020B0604020202020204" pitchFamily="34" charset="0"/>
-                    <a:cs typeface="Arial" panose="020B0604020202020204" pitchFamily="34" charset="0"/>
-                  </a:rPr>
-                  <a:t>en</a:t>
-                </a:r>
-                <a:r>
-                  <a:rPr lang="en-US" sz="1200" dirty="0">
-                    <a:latin typeface="Arial" panose="020B0604020202020204" pitchFamily="34" charset="0"/>
-                    <a:cs typeface="Arial" panose="020B0604020202020204" pitchFamily="34" charset="0"/>
-                  </a:rPr>
-                  <a:t> </a:t>
-                </a:r>
-                <a:r>
-                  <a:rPr lang="en-US" sz="1200" dirty="0" err="1">
-                    <a:latin typeface="Arial" panose="020B0604020202020204" pitchFamily="34" charset="0"/>
-                    <a:cs typeface="Arial" panose="020B0604020202020204" pitchFamily="34" charset="0"/>
-                  </a:rPr>
-                  <a:t>el</a:t>
-                </a:r>
-                <a:r>
-                  <a:rPr lang="en-US" sz="1200" dirty="0">
-                    <a:latin typeface="Arial" panose="020B0604020202020204" pitchFamily="34" charset="0"/>
-                    <a:cs typeface="Arial" panose="020B0604020202020204" pitchFamily="34" charset="0"/>
-                  </a:rPr>
-                  <a:t> </a:t>
-                </a:r>
-                <a:r>
-                  <a:rPr lang="en-US" sz="1200" dirty="0" err="1">
-                    <a:latin typeface="Arial" panose="020B0604020202020204" pitchFamily="34" charset="0"/>
-                    <a:cs typeface="Arial" panose="020B0604020202020204" pitchFamily="34" charset="0"/>
-                  </a:rPr>
-                  <a:t>rango</a:t>
-                </a:r>
-                <a:r>
-                  <a:rPr lang="en-US" sz="1200" dirty="0">
-                    <a:latin typeface="Arial" panose="020B0604020202020204" pitchFamily="34" charset="0"/>
-                    <a:cs typeface="Arial" panose="020B0604020202020204" pitchFamily="34" charset="0"/>
-                  </a:rPr>
-                  <a:t> de longitudes de </a:t>
-                </a:r>
-                <a:r>
-                  <a:rPr lang="en-US" sz="1200" dirty="0" err="1">
-                    <a:latin typeface="Arial" panose="020B0604020202020204" pitchFamily="34" charset="0"/>
-                    <a:cs typeface="Arial" panose="020B0604020202020204" pitchFamily="34" charset="0"/>
-                  </a:rPr>
-                  <a:t>onda</a:t>
-                </a:r>
-                <a:r>
-                  <a:rPr lang="en-US" sz="1200" dirty="0">
-                    <a:latin typeface="Arial" panose="020B0604020202020204" pitchFamily="34" charset="0"/>
-                    <a:cs typeface="Arial" panose="020B0604020202020204" pitchFamily="34" charset="0"/>
-                  </a:rPr>
-                  <a:t> de 1.50 a 1.6, </a:t>
-                </a:r>
-                <a:r>
-                  <a:rPr lang="en-US" sz="1200" dirty="0" err="1">
-                    <a:latin typeface="Arial" panose="020B0604020202020204" pitchFamily="34" charset="0"/>
-                    <a:cs typeface="Arial" panose="020B0604020202020204" pitchFamily="34" charset="0"/>
-                  </a:rPr>
-                  <a:t>tomando</a:t>
-                </a:r>
-                <a:r>
-                  <a:rPr lang="en-US" sz="1200" dirty="0">
-                    <a:latin typeface="Arial" panose="020B0604020202020204" pitchFamily="34" charset="0"/>
-                    <a:cs typeface="Arial" panose="020B0604020202020204" pitchFamily="34" charset="0"/>
-                  </a:rPr>
-                  <a:t> </a:t>
-                </a:r>
-                <a:r>
-                  <a:rPr lang="en-US" sz="1200" dirty="0" err="1">
-                    <a:latin typeface="Arial" panose="020B0604020202020204" pitchFamily="34" charset="0"/>
-                    <a:cs typeface="Arial" panose="020B0604020202020204" pitchFamily="34" charset="0"/>
-                  </a:rPr>
-                  <a:t>como</a:t>
-                </a:r>
-                <a:r>
-                  <a:rPr lang="en-US" sz="1200" dirty="0">
-                    <a:latin typeface="Arial" panose="020B0604020202020204" pitchFamily="34" charset="0"/>
-                    <a:cs typeface="Arial" panose="020B0604020202020204" pitchFamily="34" charset="0"/>
-                  </a:rPr>
-                  <a:t> </a:t>
-                </a:r>
-                <a:r>
-                  <a:rPr lang="en-US" sz="1200" dirty="0" err="1">
-                    <a:latin typeface="Arial" panose="020B0604020202020204" pitchFamily="34" charset="0"/>
-                    <a:cs typeface="Arial" panose="020B0604020202020204" pitchFamily="34" charset="0"/>
-                  </a:rPr>
-                  <a:t>referencia</a:t>
-                </a:r>
-                <a:r>
-                  <a:rPr lang="en-US" sz="1200" dirty="0">
-                    <a:latin typeface="Arial" panose="020B0604020202020204" pitchFamily="34" charset="0"/>
-                    <a:cs typeface="Arial" panose="020B0604020202020204" pitchFamily="34" charset="0"/>
-                  </a:rPr>
-                  <a:t> 1.55.</a:t>
-                </a:r>
-              </a:p>
-              <a:p>
-                <a:pPr algn="just"/>
-                <a:endParaRPr lang="en-US" sz="1200" dirty="0">
-                  <a:latin typeface="Arial" panose="020B0604020202020204" pitchFamily="34" charset="0"/>
-                  <a:cs typeface="Arial" panose="020B0604020202020204" pitchFamily="34" charset="0"/>
-                </a:endParaRPr>
-              </a:p>
-              <a:p>
-                <a:pPr algn="just"/>
-                <a:r>
-                  <a:rPr lang="en-US" sz="1200" dirty="0">
-                    <a:latin typeface="Arial" panose="020B0604020202020204" pitchFamily="34" charset="0"/>
-                    <a:cs typeface="Arial" panose="020B0604020202020204" pitchFamily="34" charset="0"/>
-                  </a:rPr>
-                  <a:t>Para </a:t>
-                </a:r>
-                <a:r>
-                  <a:rPr lang="en-US" sz="1200" dirty="0" err="1">
-                    <a:latin typeface="Arial" panose="020B0604020202020204" pitchFamily="34" charset="0"/>
-                    <a:cs typeface="Arial" panose="020B0604020202020204" pitchFamily="34" charset="0"/>
-                  </a:rPr>
-                  <a:t>ello</a:t>
-                </a:r>
-                <a:r>
-                  <a:rPr lang="en-US" sz="1200" dirty="0">
-                    <a:latin typeface="Arial" panose="020B0604020202020204" pitchFamily="34" charset="0"/>
-                    <a:cs typeface="Arial" panose="020B0604020202020204" pitchFamily="34" charset="0"/>
-                  </a:rPr>
-                  <a:t>, se </a:t>
-                </a:r>
-                <a:r>
-                  <a:rPr lang="en-US" sz="1200" dirty="0" err="1">
-                    <a:latin typeface="Arial" panose="020B0604020202020204" pitchFamily="34" charset="0"/>
-                    <a:cs typeface="Arial" panose="020B0604020202020204" pitchFamily="34" charset="0"/>
-                  </a:rPr>
-                  <a:t>han</a:t>
-                </a:r>
-                <a:r>
-                  <a:rPr lang="en-US" sz="1200" dirty="0">
-                    <a:latin typeface="Arial" panose="020B0604020202020204" pitchFamily="34" charset="0"/>
-                    <a:cs typeface="Arial" panose="020B0604020202020204" pitchFamily="34" charset="0"/>
-                  </a:rPr>
-                  <a:t> </a:t>
-                </a:r>
-                <a:r>
-                  <a:rPr lang="en-US" sz="1200" dirty="0" err="1">
-                    <a:latin typeface="Arial" panose="020B0604020202020204" pitchFamily="34" charset="0"/>
-                    <a:cs typeface="Arial" panose="020B0604020202020204" pitchFamily="34" charset="0"/>
-                  </a:rPr>
-                  <a:t>tomado</a:t>
-                </a:r>
-                <a:r>
-                  <a:rPr lang="en-US" sz="1200" dirty="0">
-                    <a:latin typeface="Arial" panose="020B0604020202020204" pitchFamily="34" charset="0"/>
-                    <a:cs typeface="Arial" panose="020B0604020202020204" pitchFamily="34" charset="0"/>
-                  </a:rPr>
-                  <a:t> las dos </a:t>
-                </a:r>
-                <a:r>
-                  <a:rPr lang="en-US" sz="1200" dirty="0" err="1">
-                    <a:latin typeface="Arial" panose="020B0604020202020204" pitchFamily="34" charset="0"/>
-                    <a:cs typeface="Arial" panose="020B0604020202020204" pitchFamily="34" charset="0"/>
-                  </a:rPr>
-                  <a:t>funciones</a:t>
-                </a:r>
-                <a:r>
-                  <a:rPr lang="en-US" sz="1200" dirty="0">
-                    <a:latin typeface="Arial" panose="020B0604020202020204" pitchFamily="34" charset="0"/>
-                    <a:cs typeface="Arial" panose="020B0604020202020204" pitchFamily="34" charset="0"/>
-                  </a:rPr>
-                  <a:t> </a:t>
-                </a:r>
-                <a:r>
-                  <a:rPr lang="en-US" sz="1200" dirty="0" err="1">
-                    <a:latin typeface="Arial" panose="020B0604020202020204" pitchFamily="34" charset="0"/>
-                    <a:cs typeface="Arial" panose="020B0604020202020204" pitchFamily="34" charset="0"/>
-                  </a:rPr>
-                  <a:t>creadas</a:t>
-                </a:r>
-                <a:r>
-                  <a:rPr lang="en-US" sz="1200" dirty="0">
-                    <a:latin typeface="Arial" panose="020B0604020202020204" pitchFamily="34" charset="0"/>
-                    <a:cs typeface="Arial" panose="020B0604020202020204" pitchFamily="34" charset="0"/>
-                  </a:rPr>
-                  <a:t> </a:t>
-                </a:r>
-                <a:r>
-                  <a:rPr lang="en-US" sz="1200" dirty="0" err="1">
-                    <a:latin typeface="Arial" panose="020B0604020202020204" pitchFamily="34" charset="0"/>
-                    <a:cs typeface="Arial" panose="020B0604020202020204" pitchFamily="34" charset="0"/>
-                  </a:rPr>
-                  <a:t>en</a:t>
-                </a:r>
-                <a:r>
-                  <a:rPr lang="en-US" sz="1200" dirty="0">
-                    <a:latin typeface="Arial" panose="020B0604020202020204" pitchFamily="34" charset="0"/>
-                    <a:cs typeface="Arial" panose="020B0604020202020204" pitchFamily="34" charset="0"/>
-                  </a:rPr>
-                  <a:t> </a:t>
-                </a:r>
-                <a:r>
-                  <a:rPr lang="en-US" sz="1200" dirty="0" err="1">
-                    <a:latin typeface="Arial" panose="020B0604020202020204" pitchFamily="34" charset="0"/>
-                    <a:cs typeface="Arial" panose="020B0604020202020204" pitchFamily="34" charset="0"/>
-                  </a:rPr>
-                  <a:t>el</a:t>
-                </a:r>
-                <a:r>
-                  <a:rPr lang="en-US" sz="1200" dirty="0">
-                    <a:latin typeface="Arial" panose="020B0604020202020204" pitchFamily="34" charset="0"/>
-                    <a:cs typeface="Arial" panose="020B0604020202020204" pitchFamily="34" charset="0"/>
-                  </a:rPr>
-                  <a:t> LO.2, tanto para la deep </a:t>
-                </a:r>
-                <a:r>
-                  <a:rPr lang="en-US" sz="1200" dirty="0" err="1">
-                    <a:latin typeface="Arial" panose="020B0604020202020204" pitchFamily="34" charset="0"/>
-                    <a:cs typeface="Arial" panose="020B0604020202020204" pitchFamily="34" charset="0"/>
-                  </a:rPr>
-                  <a:t>como</a:t>
-                </a:r>
-                <a:r>
-                  <a:rPr lang="en-US" sz="1200" dirty="0">
-                    <a:latin typeface="Arial" panose="020B0604020202020204" pitchFamily="34" charset="0"/>
-                    <a:cs typeface="Arial" panose="020B0604020202020204" pitchFamily="34" charset="0"/>
-                  </a:rPr>
-                  <a:t> para la shallow. A </a:t>
-                </a:r>
-                <a:r>
-                  <a:rPr lang="en-US" sz="1200" dirty="0" err="1">
-                    <a:latin typeface="Arial" panose="020B0604020202020204" pitchFamily="34" charset="0"/>
-                    <a:cs typeface="Arial" panose="020B0604020202020204" pitchFamily="34" charset="0"/>
-                  </a:rPr>
-                  <a:t>partir</a:t>
-                </a:r>
-                <a:r>
-                  <a:rPr lang="en-US" sz="1200" dirty="0">
-                    <a:latin typeface="Arial" panose="020B0604020202020204" pitchFamily="34" charset="0"/>
-                    <a:cs typeface="Arial" panose="020B0604020202020204" pitchFamily="34" charset="0"/>
-                  </a:rPr>
-                  <a:t> </a:t>
-                </a:r>
-                <a:r>
-                  <a:rPr lang="es-ES" sz="1200" dirty="0"/>
-                  <a:t>de los resultados obtenidos con el </a:t>
-                </a:r>
-                <a:r>
-                  <a:rPr lang="es-ES" sz="1200" dirty="0" err="1"/>
-                  <a:t>ModeSolver</a:t>
-                </a:r>
-                <a:r>
-                  <a:rPr lang="en-US" sz="1200" dirty="0">
-                    <a:latin typeface="Arial" panose="020B0604020202020204" pitchFamily="34" charset="0"/>
-                    <a:cs typeface="Arial" panose="020B0604020202020204" pitchFamily="34" charset="0"/>
-                  </a:rPr>
-                  <a:t>, </a:t>
-                </a:r>
-                <a:r>
-                  <a:rPr lang="es-ES" sz="1200" dirty="0"/>
-                  <a:t>se ha realizado un ajuste polinómico de segundo orden en torno a </a:t>
-                </a:r>
-                <a:r>
-                  <a:rPr lang="el-GR" sz="1200" dirty="0"/>
-                  <a:t>λ₀, </a:t>
-                </a:r>
-                <a:r>
-                  <a:rPr lang="es-ES" sz="1200" dirty="0"/>
-                  <a:t>obteniendo los coeficientes </a:t>
-                </a:r>
-                <a14:m>
-                  <m:oMath xmlns:m="http://schemas.openxmlformats.org/officeDocument/2006/math">
-                    <m:sSub>
-                      <m:sSubPr>
-                        <m:ctrlPr>
-                          <a:rPr lang="ar-AE"/>
-                        </m:ctrlPr>
-                      </m:sSubPr>
-                      <m:e>
-                        <m:r>
-                          <a:rPr lang="ar-AE" i="1"/>
-                          <m:t>𝑛</m:t>
-                        </m:r>
-                      </m:e>
-                      <m:sub>
-                        <m:r>
-                          <a:rPr lang="ar-AE"/>
-                          <m:t>1</m:t>
-                        </m:r>
-                      </m:sub>
-                    </m:sSub>
-                  </m:oMath>
-                </a14:m>
-                <a:r>
-                  <a:rPr lang="ar-AE" sz="1200" dirty="0"/>
-                  <a:t>, </a:t>
-                </a:r>
-                <a14:m>
-                  <m:oMath xmlns:m="http://schemas.openxmlformats.org/officeDocument/2006/math">
-                    <m:sSub>
-                      <m:sSubPr>
-                        <m:ctrlPr>
-                          <a:rPr lang="ar-AE"/>
-                        </m:ctrlPr>
-                      </m:sSubPr>
-                      <m:e>
-                        <m:r>
-                          <a:rPr lang="ar-AE" i="1"/>
-                          <m:t>𝑛</m:t>
-                        </m:r>
-                      </m:e>
-                      <m:sub>
-                        <m:r>
-                          <a:rPr lang="ar-AE"/>
-                          <m:t>2</m:t>
-                        </m:r>
-                      </m:sub>
-                    </m:sSub>
-                  </m:oMath>
-                </a14:m>
-                <a:r>
-                  <a:rPr lang="es-ES" sz="1200" dirty="0"/>
-                  <a:t>y </a:t>
-                </a:r>
-                <a14:m>
-                  <m:oMath xmlns:m="http://schemas.openxmlformats.org/officeDocument/2006/math">
-                    <m:sSub>
-                      <m:sSubPr>
-                        <m:ctrlPr>
-                          <a:rPr lang="ar-AE"/>
-                        </m:ctrlPr>
-                      </m:sSubPr>
-                      <m:e>
-                        <m:r>
-                          <a:rPr lang="ar-AE" i="1"/>
-                          <m:t>𝑛</m:t>
-                        </m:r>
-                      </m:e>
-                      <m:sub>
-                        <m:r>
-                          <a:rPr lang="ar-AE"/>
-                          <m:t>3</m:t>
-                        </m:r>
-                      </m:sub>
-                    </m:sSub>
-                  </m:oMath>
-                </a14:m>
-                <a:r>
-                  <a:rPr lang="ar-AE" sz="1200" dirty="0"/>
-                  <a:t>, </a:t>
-                </a:r>
-                <a:r>
-                  <a:rPr lang="es-ES" sz="1200" dirty="0"/>
-                  <a:t>así como el índice de grupo y el parámetro de dispersión.</a:t>
-                </a:r>
-                <a:r>
-                  <a:rPr lang="en-US" sz="1200" dirty="0">
-                    <a:latin typeface="Arial" panose="020B0604020202020204" pitchFamily="34" charset="0"/>
-                    <a:cs typeface="Arial" panose="020B0604020202020204" pitchFamily="34" charset="0"/>
-                  </a:rPr>
-                  <a:t>. </a:t>
-                </a:r>
-              </a:p>
-              <a:p>
-                <a:pPr algn="just"/>
-                <a:endParaRPr lang="en-US" sz="1200" dirty="0">
-                  <a:latin typeface="Arial" panose="020B0604020202020204" pitchFamily="34" charset="0"/>
-                  <a:cs typeface="Arial" panose="020B0604020202020204" pitchFamily="34" charset="0"/>
-                </a:endParaRPr>
-              </a:p>
-              <a:p>
-                <a:pPr algn="just"/>
-                <a:r>
-                  <a:rPr lang="en-US" sz="1200" dirty="0" err="1">
-                    <a:latin typeface="Arial" panose="020B0604020202020204" pitchFamily="34" charset="0"/>
-                    <a:cs typeface="Arial" panose="020B0604020202020204" pitchFamily="34" charset="0"/>
-                  </a:rPr>
-                  <a:t>Posteriormente</a:t>
-                </a:r>
-                <a:r>
-                  <a:rPr lang="en-US" sz="1200" dirty="0">
-                    <a:latin typeface="Arial" panose="020B0604020202020204" pitchFamily="34" charset="0"/>
-                    <a:cs typeface="Arial" panose="020B0604020202020204" pitchFamily="34" charset="0"/>
-                  </a:rPr>
-                  <a:t>, se </a:t>
-                </a:r>
-                <a:r>
-                  <a:rPr lang="en-US" sz="1200" dirty="0" err="1">
-                    <a:latin typeface="Arial" panose="020B0604020202020204" pitchFamily="34" charset="0"/>
-                    <a:cs typeface="Arial" panose="020B0604020202020204" pitchFamily="34" charset="0"/>
-                  </a:rPr>
-                  <a:t>han</a:t>
-                </a:r>
-                <a:r>
-                  <a:rPr lang="en-US" sz="1200" dirty="0">
-                    <a:latin typeface="Arial" panose="020B0604020202020204" pitchFamily="34" charset="0"/>
-                    <a:cs typeface="Arial" panose="020B0604020202020204" pitchFamily="34" charset="0"/>
-                  </a:rPr>
-                  <a:t> </a:t>
-                </a:r>
-                <a:r>
-                  <a:rPr lang="en-US" sz="1200" dirty="0" err="1">
-                    <a:latin typeface="Arial" panose="020B0604020202020204" pitchFamily="34" charset="0"/>
-                    <a:cs typeface="Arial" panose="020B0604020202020204" pitchFamily="34" charset="0"/>
-                  </a:rPr>
-                  <a:t>analizado</a:t>
-                </a:r>
-                <a:r>
-                  <a:rPr lang="en-US" sz="1200" dirty="0">
-                    <a:latin typeface="Arial" panose="020B0604020202020204" pitchFamily="34" charset="0"/>
-                    <a:cs typeface="Arial" panose="020B0604020202020204" pitchFamily="34" charset="0"/>
-                  </a:rPr>
-                  <a:t> </a:t>
-                </a:r>
-                <a:r>
-                  <a:rPr lang="en-US" sz="1200" dirty="0" err="1">
-                    <a:latin typeface="Arial" panose="020B0604020202020204" pitchFamily="34" charset="0"/>
-                    <a:cs typeface="Arial" panose="020B0604020202020204" pitchFamily="34" charset="0"/>
-                  </a:rPr>
-                  <a:t>los</a:t>
-                </a:r>
-                <a:r>
-                  <a:rPr lang="en-US" sz="1200" dirty="0">
-                    <a:latin typeface="Arial" panose="020B0604020202020204" pitchFamily="34" charset="0"/>
-                    <a:cs typeface="Arial" panose="020B0604020202020204" pitchFamily="34" charset="0"/>
-                  </a:rPr>
-                  <a:t> </a:t>
-                </a:r>
-                <a:r>
-                  <a:rPr lang="en-US" sz="1200" dirty="0" err="1">
-                    <a:latin typeface="Arial" panose="020B0604020202020204" pitchFamily="34" charset="0"/>
-                    <a:cs typeface="Arial" panose="020B0604020202020204" pitchFamily="34" charset="0"/>
-                  </a:rPr>
-                  <a:t>resultados</a:t>
-                </a:r>
-                <a:r>
-                  <a:rPr lang="en-US" sz="1200" dirty="0">
-                    <a:latin typeface="Arial" panose="020B0604020202020204" pitchFamily="34" charset="0"/>
-                    <a:cs typeface="Arial" panose="020B0604020202020204" pitchFamily="34" charset="0"/>
-                  </a:rPr>
-                  <a:t> y se ha </a:t>
-                </a:r>
-                <a:r>
-                  <a:rPr lang="en-US" sz="1200" dirty="0" err="1">
-                    <a:latin typeface="Arial" panose="020B0604020202020204" pitchFamily="34" charset="0"/>
-                    <a:cs typeface="Arial" panose="020B0604020202020204" pitchFamily="34" charset="0"/>
-                  </a:rPr>
-                  <a:t>llegado</a:t>
-                </a:r>
-                <a:r>
-                  <a:rPr lang="en-US" sz="1200" dirty="0">
-                    <a:latin typeface="Arial" panose="020B0604020202020204" pitchFamily="34" charset="0"/>
-                    <a:cs typeface="Arial" panose="020B0604020202020204" pitchFamily="34" charset="0"/>
-                  </a:rPr>
-                  <a:t> a la conclusion de </a:t>
-                </a:r>
-                <a:r>
-                  <a:rPr lang="en-US" sz="1200" dirty="0" err="1">
-                    <a:latin typeface="Arial" panose="020B0604020202020204" pitchFamily="34" charset="0"/>
-                    <a:cs typeface="Arial" panose="020B0604020202020204" pitchFamily="34" charset="0"/>
-                  </a:rPr>
-                  <a:t>que</a:t>
-                </a:r>
-                <a:r>
-                  <a:rPr lang="en-US" sz="1200" dirty="0">
-                    <a:latin typeface="Arial" panose="020B0604020202020204" pitchFamily="34" charset="0"/>
-                    <a:cs typeface="Arial" panose="020B0604020202020204" pitchFamily="34" charset="0"/>
-                  </a:rPr>
-                  <a:t> son </a:t>
-                </a:r>
-                <a:r>
-                  <a:rPr lang="en-US" sz="1200" dirty="0" err="1">
-                    <a:latin typeface="Arial" panose="020B0604020202020204" pitchFamily="34" charset="0"/>
-                    <a:cs typeface="Arial" panose="020B0604020202020204" pitchFamily="34" charset="0"/>
-                  </a:rPr>
-                  <a:t>correctos</a:t>
-                </a:r>
-                <a:r>
-                  <a:rPr lang="en-US" sz="1200" dirty="0">
-                    <a:latin typeface="Arial" panose="020B0604020202020204" pitchFamily="34" charset="0"/>
-                    <a:cs typeface="Arial" panose="020B0604020202020204" pitchFamily="34" charset="0"/>
-                  </a:rPr>
-                  <a:t>, </a:t>
-                </a:r>
-                <a:r>
-                  <a:rPr lang="en-US" sz="1200" dirty="0" err="1">
-                    <a:latin typeface="Arial" panose="020B0604020202020204" pitchFamily="34" charset="0"/>
-                    <a:cs typeface="Arial" panose="020B0604020202020204" pitchFamily="34" charset="0"/>
-                  </a:rPr>
-                  <a:t>ya</a:t>
-                </a:r>
-                <a:r>
-                  <a:rPr lang="en-US" sz="1200" dirty="0">
-                    <a:latin typeface="Arial" panose="020B0604020202020204" pitchFamily="34" charset="0"/>
-                    <a:cs typeface="Arial" panose="020B0604020202020204" pitchFamily="34" charset="0"/>
-                  </a:rPr>
-                  <a:t> </a:t>
-                </a:r>
-                <a:r>
-                  <a:rPr lang="en-US" sz="1200" dirty="0" err="1">
-                    <a:latin typeface="Arial" panose="020B0604020202020204" pitchFamily="34" charset="0"/>
-                    <a:cs typeface="Arial" panose="020B0604020202020204" pitchFamily="34" charset="0"/>
-                  </a:rPr>
-                  <a:t>que</a:t>
-                </a:r>
-                <a:r>
-                  <a:rPr lang="en-US" sz="1200" dirty="0">
-                    <a:latin typeface="Arial" panose="020B0604020202020204" pitchFamily="34" charset="0"/>
-                    <a:cs typeface="Arial" panose="020B0604020202020204" pitchFamily="34" charset="0"/>
-                  </a:rPr>
-                  <a:t> </a:t>
-                </a:r>
-                <a:r>
-                  <a:rPr lang="en-US" sz="1200" dirty="0" err="1">
-                    <a:latin typeface="Arial" panose="020B0604020202020204" pitchFamily="34" charset="0"/>
-                    <a:cs typeface="Arial" panose="020B0604020202020204" pitchFamily="34" charset="0"/>
-                  </a:rPr>
-                  <a:t>el</a:t>
-                </a:r>
-                <a:r>
-                  <a:rPr lang="en-US" sz="1200" dirty="0">
-                    <a:latin typeface="Arial" panose="020B0604020202020204" pitchFamily="34" charset="0"/>
-                    <a:cs typeface="Arial" panose="020B0604020202020204" pitchFamily="34" charset="0"/>
-                  </a:rPr>
-                  <a:t> </a:t>
-                </a:r>
-                <a:r>
-                  <a:rPr lang="en-US" sz="1200" dirty="0" err="1">
-                    <a:latin typeface="Arial" panose="020B0604020202020204" pitchFamily="34" charset="0"/>
-                    <a:cs typeface="Arial" panose="020B0604020202020204" pitchFamily="34" charset="0"/>
-                  </a:rPr>
-                  <a:t>coeficiente</a:t>
-                </a:r>
-                <a:r>
-                  <a:rPr lang="en-US" sz="1200" dirty="0">
-                    <a:latin typeface="Arial" panose="020B0604020202020204" pitchFamily="34" charset="0"/>
-                    <a:cs typeface="Arial" panose="020B0604020202020204" pitchFamily="34" charset="0"/>
-                  </a:rPr>
-                  <a:t> n1 </a:t>
-                </a:r>
-                <a:r>
-                  <a:rPr lang="en-US" sz="1200" dirty="0" err="1">
-                    <a:latin typeface="Arial" panose="020B0604020202020204" pitchFamily="34" charset="0"/>
-                    <a:cs typeface="Arial" panose="020B0604020202020204" pitchFamily="34" charset="0"/>
-                  </a:rPr>
-                  <a:t>corresponde</a:t>
-                </a:r>
-                <a:r>
-                  <a:rPr lang="en-US" sz="1200" dirty="0">
-                    <a:latin typeface="Arial" panose="020B0604020202020204" pitchFamily="34" charset="0"/>
-                    <a:cs typeface="Arial" panose="020B0604020202020204" pitchFamily="34" charset="0"/>
-                  </a:rPr>
-                  <a:t> al </a:t>
-                </a:r>
-                <a:r>
-                  <a:rPr lang="en-US" sz="1200" dirty="0" err="1">
-                    <a:latin typeface="Arial" panose="020B0604020202020204" pitchFamily="34" charset="0"/>
-                    <a:cs typeface="Arial" panose="020B0604020202020204" pitchFamily="34" charset="0"/>
-                  </a:rPr>
-                  <a:t>indice</a:t>
-                </a:r>
-                <a:r>
-                  <a:rPr lang="en-US" sz="1200" dirty="0">
-                    <a:latin typeface="Arial" panose="020B0604020202020204" pitchFamily="34" charset="0"/>
-                    <a:cs typeface="Arial" panose="020B0604020202020204" pitchFamily="34" charset="0"/>
-                  </a:rPr>
-                  <a:t> </a:t>
-                </a:r>
-                <a:r>
-                  <a:rPr lang="en-US" sz="1200" dirty="0" err="1">
-                    <a:latin typeface="Arial" panose="020B0604020202020204" pitchFamily="34" charset="0"/>
-                    <a:cs typeface="Arial" panose="020B0604020202020204" pitchFamily="34" charset="0"/>
-                  </a:rPr>
-                  <a:t>efectivo</a:t>
-                </a:r>
-                <a:r>
-                  <a:rPr lang="en-US" sz="1200" dirty="0">
-                    <a:latin typeface="Arial" panose="020B0604020202020204" pitchFamily="34" charset="0"/>
-                    <a:cs typeface="Arial" panose="020B0604020202020204" pitchFamily="34" charset="0"/>
-                  </a:rPr>
-                  <a:t> </a:t>
-                </a:r>
-                <a:r>
-                  <a:rPr lang="en-US" sz="1200" dirty="0" err="1">
-                    <a:latin typeface="Arial" panose="020B0604020202020204" pitchFamily="34" charset="0"/>
-                    <a:cs typeface="Arial" panose="020B0604020202020204" pitchFamily="34" charset="0"/>
-                  </a:rPr>
-                  <a:t>en</a:t>
-                </a:r>
-                <a:r>
-                  <a:rPr lang="en-US" sz="1200" dirty="0">
-                    <a:latin typeface="Arial" panose="020B0604020202020204" pitchFamily="34" charset="0"/>
-                    <a:cs typeface="Arial" panose="020B0604020202020204" pitchFamily="34" charset="0"/>
-                  </a:rPr>
-                  <a:t> </a:t>
-                </a:r>
-                <a:r>
-                  <a:rPr lang="en-US" sz="1200" dirty="0" err="1">
-                    <a:latin typeface="Arial" panose="020B0604020202020204" pitchFamily="34" charset="0"/>
-                    <a:cs typeface="Arial" panose="020B0604020202020204" pitchFamily="34" charset="0"/>
-                  </a:rPr>
-                  <a:t>cada</a:t>
-                </a:r>
-                <a:r>
-                  <a:rPr lang="en-US" sz="1200" dirty="0">
-                    <a:latin typeface="Arial" panose="020B0604020202020204" pitchFamily="34" charset="0"/>
-                    <a:cs typeface="Arial" panose="020B0604020202020204" pitchFamily="34" charset="0"/>
-                  </a:rPr>
-                  <a:t> modo </a:t>
-                </a:r>
-                <a:r>
-                  <a:rPr lang="en-US" sz="1200" dirty="0" err="1">
-                    <a:latin typeface="Arial" panose="020B0604020202020204" pitchFamily="34" charset="0"/>
-                    <a:cs typeface="Arial" panose="020B0604020202020204" pitchFamily="34" charset="0"/>
-                  </a:rPr>
-                  <a:t>en</a:t>
-                </a:r>
-                <a:r>
-                  <a:rPr lang="en-US" sz="1200" dirty="0">
-                    <a:latin typeface="Arial" panose="020B0604020202020204" pitchFamily="34" charset="0"/>
-                    <a:cs typeface="Arial" panose="020B0604020202020204" pitchFamily="34" charset="0"/>
-                  </a:rPr>
-                  <a:t> la longitude de </a:t>
-                </a:r>
-                <a:r>
-                  <a:rPr lang="en-US" sz="1200" dirty="0" err="1">
-                    <a:latin typeface="Arial" panose="020B0604020202020204" pitchFamily="34" charset="0"/>
-                    <a:cs typeface="Arial" panose="020B0604020202020204" pitchFamily="34" charset="0"/>
-                  </a:rPr>
-                  <a:t>onda</a:t>
-                </a:r>
-                <a:r>
-                  <a:rPr lang="en-US" sz="1200" dirty="0">
-                    <a:latin typeface="Arial" panose="020B0604020202020204" pitchFamily="34" charset="0"/>
-                    <a:cs typeface="Arial" panose="020B0604020202020204" pitchFamily="34" charset="0"/>
-                  </a:rPr>
-                  <a:t> de </a:t>
-                </a:r>
-                <a:r>
-                  <a:rPr lang="en-US" sz="1200" dirty="0" err="1">
-                    <a:latin typeface="Arial" panose="020B0604020202020204" pitchFamily="34" charset="0"/>
-                    <a:cs typeface="Arial" panose="020B0604020202020204" pitchFamily="34" charset="0"/>
-                  </a:rPr>
-                  <a:t>referencia</a:t>
-                </a:r>
-                <a:r>
-                  <a:rPr lang="en-US" sz="1200" dirty="0">
-                    <a:latin typeface="Arial" panose="020B0604020202020204" pitchFamily="34" charset="0"/>
-                    <a:cs typeface="Arial" panose="020B0604020202020204" pitchFamily="34" charset="0"/>
-                  </a:rPr>
-                  <a:t>, la dispersion da </a:t>
-                </a:r>
-                <a:r>
-                  <a:rPr lang="en-US" sz="1200" dirty="0" err="1">
-                    <a:latin typeface="Arial" panose="020B0604020202020204" pitchFamily="34" charset="0"/>
-                    <a:cs typeface="Arial" panose="020B0604020202020204" pitchFamily="34" charset="0"/>
-                  </a:rPr>
-                  <a:t>negativo</a:t>
-                </a:r>
-                <a:r>
-                  <a:rPr lang="en-US" sz="1200" dirty="0">
-                    <a:latin typeface="Arial" panose="020B0604020202020204" pitchFamily="34" charset="0"/>
-                    <a:cs typeface="Arial" panose="020B0604020202020204" pitchFamily="34" charset="0"/>
-                  </a:rPr>
-                  <a:t> </a:t>
-                </a:r>
-                <a:r>
-                  <a:rPr lang="en-US" sz="1200" dirty="0" err="1">
-                    <a:latin typeface="Arial" panose="020B0604020202020204" pitchFamily="34" charset="0"/>
-                    <a:cs typeface="Arial" panose="020B0604020202020204" pitchFamily="34" charset="0"/>
-                  </a:rPr>
-                  <a:t>ya</a:t>
-                </a:r>
-                <a:r>
-                  <a:rPr lang="en-US" sz="1200" dirty="0">
-                    <a:latin typeface="Arial" panose="020B0604020202020204" pitchFamily="34" charset="0"/>
-                    <a:cs typeface="Arial" panose="020B0604020202020204" pitchFamily="34" charset="0"/>
-                  </a:rPr>
-                  <a:t> </a:t>
-                </a:r>
-                <a:r>
-                  <a:rPr lang="en-US" sz="1200" dirty="0" err="1">
-                    <a:latin typeface="Arial" panose="020B0604020202020204" pitchFamily="34" charset="0"/>
-                    <a:cs typeface="Arial" panose="020B0604020202020204" pitchFamily="34" charset="0"/>
-                  </a:rPr>
-                  <a:t>que</a:t>
-                </a:r>
-                <a:r>
-                  <a:rPr lang="en-US" sz="1200" dirty="0">
-                    <a:latin typeface="Arial" panose="020B0604020202020204" pitchFamily="34" charset="0"/>
-                    <a:cs typeface="Arial" panose="020B0604020202020204" pitchFamily="34" charset="0"/>
-                  </a:rPr>
-                  <a:t> </a:t>
-                </a:r>
-                <a:r>
-                  <a:rPr lang="en-US" sz="1200" dirty="0" err="1">
-                    <a:latin typeface="Arial" panose="020B0604020202020204" pitchFamily="34" charset="0"/>
-                    <a:cs typeface="Arial" panose="020B0604020202020204" pitchFamily="34" charset="0"/>
-                  </a:rPr>
-                  <a:t>el</a:t>
-                </a:r>
-                <a:r>
-                  <a:rPr lang="en-US" sz="1200" dirty="0">
-                    <a:latin typeface="Arial" panose="020B0604020202020204" pitchFamily="34" charset="0"/>
-                    <a:cs typeface="Arial" panose="020B0604020202020204" pitchFamily="34" charset="0"/>
-                  </a:rPr>
-                  <a:t> </a:t>
-                </a:r>
-                <a:r>
-                  <a:rPr lang="en-US" sz="1200" dirty="0" err="1">
-                    <a:latin typeface="Arial" panose="020B0604020202020204" pitchFamily="34" charset="0"/>
-                    <a:cs typeface="Arial" panose="020B0604020202020204" pitchFamily="34" charset="0"/>
-                  </a:rPr>
-                  <a:t>indice</a:t>
-                </a:r>
-                <a:r>
-                  <a:rPr lang="en-US" sz="1200" dirty="0">
-                    <a:latin typeface="Arial" panose="020B0604020202020204" pitchFamily="34" charset="0"/>
-                    <a:cs typeface="Arial" panose="020B0604020202020204" pitchFamily="34" charset="0"/>
-                  </a:rPr>
-                  <a:t> n3 es </a:t>
-                </a:r>
-                <a:r>
-                  <a:rPr lang="en-US" sz="1200" dirty="0" err="1">
-                    <a:latin typeface="Arial" panose="020B0604020202020204" pitchFamily="34" charset="0"/>
-                    <a:cs typeface="Arial" panose="020B0604020202020204" pitchFamily="34" charset="0"/>
-                  </a:rPr>
-                  <a:t>positivo</a:t>
-                </a:r>
-                <a:r>
-                  <a:rPr lang="en-US" sz="1200" dirty="0">
-                    <a:latin typeface="Arial" panose="020B0604020202020204" pitchFamily="34" charset="0"/>
-                    <a:cs typeface="Arial" panose="020B0604020202020204" pitchFamily="34" charset="0"/>
-                  </a:rPr>
-                  <a:t>, y </a:t>
-                </a:r>
-                <a:r>
-                  <a:rPr lang="en-US" sz="1200" dirty="0" err="1">
-                    <a:latin typeface="Arial" panose="020B0604020202020204" pitchFamily="34" charset="0"/>
-                    <a:cs typeface="Arial" panose="020B0604020202020204" pitchFamily="34" charset="0"/>
-                  </a:rPr>
-                  <a:t>ademas</a:t>
-                </a:r>
-                <a:r>
-                  <a:rPr lang="en-US" sz="1200" dirty="0">
-                    <a:latin typeface="Arial" panose="020B0604020202020204" pitchFamily="34" charset="0"/>
-                    <a:cs typeface="Arial" panose="020B0604020202020204" pitchFamily="34" charset="0"/>
-                  </a:rPr>
-                  <a:t> </a:t>
-                </a:r>
-                <a:r>
-                  <a:rPr lang="en-US" sz="1200" dirty="0" err="1">
-                    <a:latin typeface="Arial" panose="020B0604020202020204" pitchFamily="34" charset="0"/>
-                    <a:cs typeface="Arial" panose="020B0604020202020204" pitchFamily="34" charset="0"/>
-                  </a:rPr>
-                  <a:t>el</a:t>
-                </a:r>
-                <a:r>
-                  <a:rPr lang="en-US" sz="1200" dirty="0">
-                    <a:latin typeface="Arial" panose="020B0604020202020204" pitchFamily="34" charset="0"/>
-                    <a:cs typeface="Arial" panose="020B0604020202020204" pitchFamily="34" charset="0"/>
-                  </a:rPr>
-                  <a:t> n2 es </a:t>
-                </a:r>
-                <a:r>
-                  <a:rPr lang="en-US" sz="1200" dirty="0" err="1">
-                    <a:latin typeface="Arial" panose="020B0604020202020204" pitchFamily="34" charset="0"/>
-                    <a:cs typeface="Arial" panose="020B0604020202020204" pitchFamily="34" charset="0"/>
-                  </a:rPr>
-                  <a:t>menor</a:t>
-                </a:r>
-                <a:r>
-                  <a:rPr lang="en-US" sz="1200" dirty="0">
-                    <a:latin typeface="Arial" panose="020B0604020202020204" pitchFamily="34" charset="0"/>
-                    <a:cs typeface="Arial" panose="020B0604020202020204" pitchFamily="34" charset="0"/>
-                  </a:rPr>
-                  <a:t> </a:t>
-                </a:r>
-                <a:r>
-                  <a:rPr lang="en-US" sz="1200" dirty="0" err="1">
-                    <a:latin typeface="Arial" panose="020B0604020202020204" pitchFamily="34" charset="0"/>
-                    <a:cs typeface="Arial" panose="020B0604020202020204" pitchFamily="34" charset="0"/>
-                  </a:rPr>
-                  <a:t>que</a:t>
-                </a:r>
-                <a:r>
-                  <a:rPr lang="en-US" sz="1200" dirty="0">
-                    <a:latin typeface="Arial" panose="020B0604020202020204" pitchFamily="34" charset="0"/>
-                    <a:cs typeface="Arial" panose="020B0604020202020204" pitchFamily="34" charset="0"/>
-                  </a:rPr>
-                  <a:t> 0 al ser </a:t>
-                </a:r>
-                <a:r>
-                  <a:rPr lang="en-US" sz="1200" dirty="0" err="1">
-                    <a:latin typeface="Arial" panose="020B0604020202020204" pitchFamily="34" charset="0"/>
-                    <a:cs typeface="Arial" panose="020B0604020202020204" pitchFamily="34" charset="0"/>
-                  </a:rPr>
-                  <a:t>una</a:t>
-                </a:r>
-                <a:r>
-                  <a:rPr lang="en-US" sz="1200" dirty="0">
-                    <a:latin typeface="Arial" panose="020B0604020202020204" pitchFamily="34" charset="0"/>
-                    <a:cs typeface="Arial" panose="020B0604020202020204" pitchFamily="34" charset="0"/>
-                  </a:rPr>
-                  <a:t> </a:t>
-                </a:r>
-                <a:r>
-                  <a:rPr lang="en-US" sz="1200" dirty="0" err="1">
-                    <a:latin typeface="Arial" panose="020B0604020202020204" pitchFamily="34" charset="0"/>
-                    <a:cs typeface="Arial" panose="020B0604020202020204" pitchFamily="34" charset="0"/>
-                  </a:rPr>
-                  <a:t>pendiente</a:t>
-                </a:r>
-                <a:r>
-                  <a:rPr lang="en-US" sz="1200" dirty="0">
-                    <a:latin typeface="Arial" panose="020B0604020202020204" pitchFamily="34" charset="0"/>
-                    <a:cs typeface="Arial" panose="020B0604020202020204" pitchFamily="34" charset="0"/>
-                  </a:rPr>
-                  <a:t> </a:t>
-                </a:r>
-                <a:r>
-                  <a:rPr lang="en-US" sz="1200" dirty="0" err="1">
-                    <a:latin typeface="Arial" panose="020B0604020202020204" pitchFamily="34" charset="0"/>
-                    <a:cs typeface="Arial" panose="020B0604020202020204" pitchFamily="34" charset="0"/>
-                  </a:rPr>
-                  <a:t>negativa</a:t>
-                </a:r>
-                <a:r>
-                  <a:rPr lang="en-US" sz="1200" dirty="0">
-                    <a:latin typeface="Arial" panose="020B0604020202020204" pitchFamily="34" charset="0"/>
-                    <a:cs typeface="Arial" panose="020B0604020202020204" pitchFamily="34" charset="0"/>
-                  </a:rPr>
-                  <a:t>. </a:t>
-                </a:r>
-              </a:p>
-            </p:txBody>
-          </p:sp>
-        </mc:Choice>
-        <mc:Fallback>
-          <p:sp>
-            <p:nvSpPr>
-              <p:cNvPr id="2" name="CuadroTexto 1">
-                <a:extLst>
-                  <a:ext uri="{FF2B5EF4-FFF2-40B4-BE49-F238E27FC236}">
-                    <a16:creationId xmlns:a16="http://schemas.microsoft.com/office/drawing/2014/main" id="{A440F587-93A3-E474-C0B0-883BB9DAFD85}"/>
-                  </a:ext>
-                </a:extLst>
-              </p:cNvPr>
-              <p:cNvSpPr txBox="1">
-                <a:spLocks noRot="1" noChangeAspect="1" noMove="1" noResize="1" noEditPoints="1" noAdjustHandles="1" noChangeArrowheads="1" noChangeShapeType="1" noTextEdit="1"/>
-              </p:cNvSpPr>
-              <p:nvPr/>
-            </p:nvSpPr>
-            <p:spPr>
-              <a:xfrm>
-                <a:off x="609441" y="4860334"/>
-                <a:ext cx="11198542" cy="2925224"/>
-              </a:xfrm>
-              <a:prstGeom prst="rect">
-                <a:avLst/>
-              </a:prstGeom>
-              <a:blipFill>
-                <a:blip r:embed="rId5"/>
-                <a:stretch>
-                  <a:fillRect/>
-                </a:stretch>
-              </a:blipFill>
-              <a:ln w="28575">
-                <a:solidFill>
-                  <a:srgbClr val="E0700D"/>
-                </a:solidFill>
-              </a:ln>
-            </p:spPr>
-            <p:txBody>
-              <a:bodyPr/>
-              <a:lstStyle/>
-              <a:p>
-                <a:r>
-                  <a:rPr lang="es-ES">
-                    <a:noFill/>
-                  </a:rPr>
-                  <a:t> </a:t>
-                </a:r>
-              </a:p>
-            </p:txBody>
-          </p:sp>
-        </mc:Fallback>
-      </mc:AlternateContent>
-      <p:sp>
-        <p:nvSpPr>
-          <p:cNvPr id="5" name="Rectángulo 4">
-            <a:extLst>
-              <a:ext uri="{FF2B5EF4-FFF2-40B4-BE49-F238E27FC236}">
-                <a16:creationId xmlns:a16="http://schemas.microsoft.com/office/drawing/2014/main" id="{A6B92C76-6772-2E00-346F-532321092C04}"/>
-              </a:ext>
-            </a:extLst>
-          </p:cNvPr>
-          <p:cNvSpPr/>
-          <p:nvPr/>
-        </p:nvSpPr>
-        <p:spPr>
-          <a:xfrm>
-            <a:off x="609441" y="1447800"/>
-            <a:ext cx="5486559" cy="3306028"/>
-          </a:xfrm>
-          <a:prstGeom prst="rect">
-            <a:avLst/>
-          </a:prstGeom>
-          <a:noFill/>
-          <a:ln w="28575">
-            <a:solidFill>
-              <a:srgbClr val="E0700D"/>
-            </a:solidFill>
-          </a:ln>
-        </p:spPr>
-        <p:style>
-          <a:lnRef idx="2">
-            <a:schemeClr val="accent1">
-              <a:shade val="15000"/>
-            </a:schemeClr>
-          </a:lnRef>
-          <a:fillRef idx="1">
-            <a:schemeClr val="accent1"/>
-          </a:fillRef>
-          <a:effectRef idx="0">
-            <a:schemeClr val="accent1"/>
-          </a:effectRef>
-          <a:fontRef idx="minor">
-            <a:schemeClr val="lt1"/>
-          </a:fontRef>
-        </p:style>
-        <p:txBody>
-          <a:bodyPr rtlCol="0" anchor="ctr"/>
-          <a:lstStyle/>
-          <a:p>
-            <a:pPr algn="ctr"/>
-            <a:endParaRPr lang="en-US"/>
-          </a:p>
-        </p:txBody>
-      </p:sp>
-      <p:sp>
-        <p:nvSpPr>
-          <p:cNvPr id="6" name="Rectángulo 5">
-            <a:extLst>
-              <a:ext uri="{FF2B5EF4-FFF2-40B4-BE49-F238E27FC236}">
-                <a16:creationId xmlns:a16="http://schemas.microsoft.com/office/drawing/2014/main" id="{2886628E-6E58-1F7E-B6C6-432B9A228397}"/>
-              </a:ext>
-            </a:extLst>
-          </p:cNvPr>
-          <p:cNvSpPr/>
-          <p:nvPr/>
-        </p:nvSpPr>
-        <p:spPr>
-          <a:xfrm>
-            <a:off x="6321424" y="1447800"/>
-            <a:ext cx="5486559" cy="3306028"/>
-          </a:xfrm>
-          <a:prstGeom prst="rect">
-            <a:avLst/>
-          </a:prstGeom>
-          <a:noFill/>
-          <a:ln w="28575">
-            <a:solidFill>
-              <a:srgbClr val="E0700D"/>
-            </a:solidFill>
-          </a:ln>
-        </p:spPr>
-        <p:style>
-          <a:lnRef idx="2">
-            <a:schemeClr val="accent1">
-              <a:shade val="15000"/>
-            </a:schemeClr>
-          </a:lnRef>
-          <a:fillRef idx="1">
-            <a:schemeClr val="accent1"/>
-          </a:fillRef>
-          <a:effectRef idx="0">
-            <a:schemeClr val="accent1"/>
-          </a:effectRef>
-          <a:fontRef idx="minor">
-            <a:schemeClr val="lt1"/>
-          </a:fontRef>
-        </p:style>
-        <p:txBody>
-          <a:bodyPr rtlCol="0" anchor="ctr"/>
-          <a:lstStyle/>
-          <a:p>
-            <a:pPr algn="ctr"/>
-            <a:endParaRPr lang="en-US"/>
-          </a:p>
-        </p:txBody>
-      </p:sp>
-      <p:sp>
-        <p:nvSpPr>
-          <p:cNvPr id="8" name="CuadroTexto 7">
-            <a:extLst>
-              <a:ext uri="{FF2B5EF4-FFF2-40B4-BE49-F238E27FC236}">
-                <a16:creationId xmlns:a16="http://schemas.microsoft.com/office/drawing/2014/main" id="{0F38E924-A0E7-A039-C837-916BA77FE89B}"/>
-              </a:ext>
-            </a:extLst>
-          </p:cNvPr>
-          <p:cNvSpPr txBox="1"/>
-          <p:nvPr/>
-        </p:nvSpPr>
-        <p:spPr>
-          <a:xfrm>
-            <a:off x="6347361" y="4498712"/>
-            <a:ext cx="5486560" cy="276999"/>
-          </a:xfrm>
-          <a:prstGeom prst="rect">
-            <a:avLst/>
-          </a:prstGeom>
-          <a:noFill/>
-        </p:spPr>
-        <p:txBody>
-          <a:bodyPr wrap="square">
-            <a:spAutoFit/>
-          </a:bodyPr>
-          <a:lstStyle/>
-          <a:p>
-            <a:pPr algn="r"/>
-            <a:r>
-              <a:rPr lang="en-US" sz="1200" b="1" dirty="0">
-                <a:solidFill>
-                  <a:schemeClr val="tx1"/>
-                </a:solidFill>
-                <a:latin typeface="Arial" panose="020B0604020202020204" pitchFamily="34" charset="0"/>
-                <a:cs typeface="Arial" panose="020B0604020202020204" pitchFamily="34" charset="0"/>
-              </a:rPr>
-              <a:t>slab: 150nm</a:t>
-            </a:r>
-            <a:endParaRPr lang="en-US" sz="1200" dirty="0">
-              <a:solidFill>
-                <a:schemeClr val="tx1"/>
-              </a:solidFill>
-              <a:latin typeface="Arial" panose="020B0604020202020204" pitchFamily="34" charset="0"/>
-              <a:cs typeface="Arial" panose="020B0604020202020204" pitchFamily="34" charset="0"/>
-            </a:endParaRPr>
-          </a:p>
-        </p:txBody>
-      </p:sp>
-      <p:pic>
-        <p:nvPicPr>
-          <p:cNvPr id="7" name="Imagen 6" descr="Gráfico&#10;&#10;El contenido generado por IA puede ser incorrecto.">
-            <a:extLst>
-              <a:ext uri="{FF2B5EF4-FFF2-40B4-BE49-F238E27FC236}">
-                <a16:creationId xmlns:a16="http://schemas.microsoft.com/office/drawing/2014/main" id="{6EE6A301-802F-71A8-D45A-719DDCE2374F}"/>
-              </a:ext>
-            </a:extLst>
-          </p:cNvPr>
-          <p:cNvPicPr>
-            <a:picLocks noChangeAspect="1"/>
-          </p:cNvPicPr>
-          <p:nvPr/>
-        </p:nvPicPr>
-        <p:blipFill>
-          <a:blip r:embed="rId6"/>
-          <a:stretch>
-            <a:fillRect/>
-          </a:stretch>
-        </p:blipFill>
-        <p:spPr>
-          <a:xfrm>
-            <a:off x="609440" y="1462655"/>
-            <a:ext cx="5486560" cy="3291174"/>
-          </a:xfrm>
-          <a:prstGeom prst="rect">
-            <a:avLst/>
-          </a:prstGeom>
-        </p:spPr>
-      </p:pic>
-      <p:pic>
-        <p:nvPicPr>
-          <p:cNvPr id="12" name="Imagen 11" descr="Gráfico, Gráfico de líneas&#10;&#10;El contenido generado por IA puede ser incorrecto.">
-            <a:extLst>
-              <a:ext uri="{FF2B5EF4-FFF2-40B4-BE49-F238E27FC236}">
-                <a16:creationId xmlns:a16="http://schemas.microsoft.com/office/drawing/2014/main" id="{53B7AF3B-D6BB-A7C0-88D3-336824D54616}"/>
-              </a:ext>
-            </a:extLst>
-          </p:cNvPr>
-          <p:cNvPicPr>
-            <a:picLocks noChangeAspect="1"/>
-          </p:cNvPicPr>
-          <p:nvPr/>
-        </p:nvPicPr>
-        <p:blipFill>
-          <a:blip r:embed="rId7"/>
-          <a:stretch>
-            <a:fillRect/>
-          </a:stretch>
-        </p:blipFill>
-        <p:spPr>
-          <a:xfrm>
-            <a:off x="6321423" y="1462655"/>
-            <a:ext cx="5486560" cy="3291173"/>
-          </a:xfrm>
-          <a:prstGeom prst="rect">
-            <a:avLst/>
-          </a:prstGeom>
-        </p:spPr>
-      </p:pic>
-    </p:spTree>
-    <p:extLst>
-      <p:ext uri="{BB962C8B-B14F-4D97-AF65-F5344CB8AC3E}">
-        <p14:creationId xmlns:p14="http://schemas.microsoft.com/office/powerpoint/2010/main" val="236054401"/>
-      </p:ext>
-    </p:extLst>
-  </p:cSld>
-  <p:clrMapOvr>
-    <a:masterClrMapping/>
-  </p:clrMapOvr>
-</p:sld>
-</file>
-
-<file path=ppt/slides/slide11.xml><?xml version="1.0" encoding="utf-8"?>
-<p:sld xmlns:a="http://schemas.openxmlformats.org/drawingml/2006/main" xmlns:r="http://schemas.openxmlformats.org/officeDocument/2006/relationships" xmlns:p="http://schemas.openxmlformats.org/presentationml/2006/main">
-  <p:cSld>
-    <p:spTree>
-      <p:nvGrpSpPr>
-        <p:cNvPr id="1" name="">
-          <a:extLst>
-            <a:ext uri="{FF2B5EF4-FFF2-40B4-BE49-F238E27FC236}">
-              <a16:creationId xmlns:a16="http://schemas.microsoft.com/office/drawing/2014/main" id="{A27EFB58-B666-0C41-4C72-3ABC0EC43882}"/>
-            </a:ext>
-          </a:extLst>
-        </p:cNvPr>
-        <p:cNvGrpSpPr/>
-        <p:nvPr/>
-      </p:nvGrpSpPr>
-      <p:grpSpPr>
-        <a:xfrm>
-          <a:off x="0" y="0"/>
-          <a:ext cx="0" cy="0"/>
-          <a:chOff x="0" y="0"/>
-          <a:chExt cx="0" cy="0"/>
-        </a:xfrm>
-      </p:grpSpPr>
-      <p:sp>
-        <p:nvSpPr>
-          <p:cNvPr id="16" name="object 16">
-            <a:extLst>
-              <a:ext uri="{FF2B5EF4-FFF2-40B4-BE49-F238E27FC236}">
-                <a16:creationId xmlns:a16="http://schemas.microsoft.com/office/drawing/2014/main" id="{83DF2B24-AC21-643D-B8C0-62993AB27B88}"/>
-              </a:ext>
-            </a:extLst>
-          </p:cNvPr>
-          <p:cNvSpPr txBox="1">
-            <a:spLocks noGrp="1"/>
-          </p:cNvSpPr>
-          <p:nvPr>
-            <p:ph type="title"/>
-          </p:nvPr>
-        </p:nvSpPr>
-        <p:spPr>
-          <a:xfrm>
-            <a:off x="685800" y="408883"/>
-            <a:ext cx="10994410" cy="1397819"/>
-          </a:xfrm>
-          <a:prstGeom prst="rect">
-            <a:avLst/>
-          </a:prstGeom>
-        </p:spPr>
-        <p:txBody>
-          <a:bodyPr vert="horz" wrap="square" lIns="0" tIns="12700" rIns="0" bIns="0" rtlCol="0">
-            <a:spAutoFit/>
-          </a:bodyPr>
-          <a:lstStyle/>
-          <a:p>
-            <a:pPr marL="12700">
-              <a:lnSpc>
-                <a:spcPct val="100000"/>
-              </a:lnSpc>
-              <a:spcBef>
-                <a:spcPts val="100"/>
-              </a:spcBef>
-            </a:pPr>
-            <a:r>
-              <a:rPr lang="en-US" sz="2500" dirty="0"/>
-              <a:t>Learning outcome #4 – Waveguide compact model</a:t>
-            </a:r>
-            <a:br>
-              <a:rPr lang="en-US" sz="2500" spc="-5" dirty="0">
-                <a:latin typeface="+mj-lt"/>
-                <a:cs typeface="Lucida Sans"/>
-              </a:rPr>
-            </a:br>
-            <a:r>
-              <a:rPr lang="en-US" b="0" dirty="0"/>
-              <a:t>- Find the compact models of the following waveguides: </a:t>
-            </a:r>
-            <a:br>
-              <a:rPr lang="en-US" b="0" dirty="0"/>
-            </a:br>
-            <a:r>
-              <a:rPr lang="en-US" dirty="0"/>
-              <a:t>Deep</a:t>
-            </a:r>
-            <a:r>
-              <a:rPr lang="en-US" b="0" dirty="0"/>
-              <a:t> waveguide, h=300nm, w=1.2um   - </a:t>
-            </a:r>
-            <a:r>
-              <a:rPr lang="en-US" dirty="0"/>
-              <a:t>Shallow</a:t>
-            </a:r>
-            <a:r>
-              <a:rPr lang="en-US" b="0" dirty="0"/>
-              <a:t> waveguide, core h=300nm, slab h=150 nm, w = 1.2um </a:t>
-            </a:r>
-            <a:br>
-              <a:rPr lang="en-US" b="0" dirty="0"/>
-            </a:br>
-            <a:endParaRPr lang="en-US" sz="2500" b="0" dirty="0">
-              <a:latin typeface="+mj-lt"/>
-              <a:cs typeface="Lucida Sans"/>
-            </a:endParaRPr>
-          </a:p>
-        </p:txBody>
-      </p:sp>
-      <p:pic>
-        <p:nvPicPr>
-          <p:cNvPr id="83" name="Gráfico 82">
-            <a:extLst>
-              <a:ext uri="{FF2B5EF4-FFF2-40B4-BE49-F238E27FC236}">
-                <a16:creationId xmlns:a16="http://schemas.microsoft.com/office/drawing/2014/main" id="{37813654-26E9-7238-D73E-68BA1316A31E}"/>
-              </a:ext>
-            </a:extLst>
-          </p:cNvPr>
-          <p:cNvPicPr>
-            <a:picLocks noChangeAspect="1"/>
-          </p:cNvPicPr>
-          <p:nvPr/>
-        </p:nvPicPr>
-        <p:blipFill>
-          <a:blip r:embed="rId3">
-            <a:extLst>
-              <a:ext uri="{96DAC541-7B7A-43D3-8B79-37D633B846F1}">
-                <asvg:svgBlip xmlns:asvg="http://schemas.microsoft.com/office/drawing/2016/SVG/main" r:embed="rId4"/>
-              </a:ext>
-            </a:extLst>
-          </a:blip>
-          <a:stretch>
-            <a:fillRect/>
-          </a:stretch>
-        </p:blipFill>
-        <p:spPr>
-          <a:xfrm>
-            <a:off x="5045006" y="6356057"/>
-            <a:ext cx="6409575" cy="363174"/>
-          </a:xfrm>
-          <a:prstGeom prst="rect">
-            <a:avLst/>
-          </a:prstGeom>
-        </p:spPr>
-      </p:pic>
-      <p:sp>
-        <p:nvSpPr>
-          <p:cNvPr id="84" name="Marcador de número de diapositiva 83">
-            <a:extLst>
-              <a:ext uri="{FF2B5EF4-FFF2-40B4-BE49-F238E27FC236}">
-                <a16:creationId xmlns:a16="http://schemas.microsoft.com/office/drawing/2014/main" id="{8E2D0D11-BF34-FF92-6520-B37F368C0D94}"/>
-              </a:ext>
-            </a:extLst>
-          </p:cNvPr>
-          <p:cNvSpPr>
-            <a:spLocks noGrp="1"/>
-          </p:cNvSpPr>
-          <p:nvPr>
-            <p:ph type="sldNum" sz="quarter" idx="7"/>
-          </p:nvPr>
-        </p:nvSpPr>
-        <p:spPr/>
-        <p:txBody>
-          <a:bodyPr/>
-          <a:lstStyle/>
-          <a:p>
-            <a:fld id="{B6F15528-21DE-4FAA-801E-634DDDAF4B2B}" type="slidenum">
-              <a:rPr lang="es-ES" smtClean="0"/>
-              <a:t>11</a:t>
-            </a:fld>
-            <a:endParaRPr lang="es-ES"/>
-          </a:p>
-        </p:txBody>
-      </p:sp>
-      <p:sp>
-        <p:nvSpPr>
-          <p:cNvPr id="3" name="Marcador de pie de página 2">
-            <a:extLst>
-              <a:ext uri="{FF2B5EF4-FFF2-40B4-BE49-F238E27FC236}">
-                <a16:creationId xmlns:a16="http://schemas.microsoft.com/office/drawing/2014/main" id="{FB835810-53AB-5DA6-6898-CDFC21E038D3}"/>
-              </a:ext>
-            </a:extLst>
-          </p:cNvPr>
-          <p:cNvSpPr>
-            <a:spLocks noGrp="1"/>
-          </p:cNvSpPr>
-          <p:nvPr>
-            <p:ph type="ftr" sz="quarter" idx="5"/>
-          </p:nvPr>
-        </p:nvSpPr>
-        <p:spPr/>
-        <p:txBody>
-          <a:bodyPr/>
-          <a:lstStyle/>
-          <a:p>
-            <a:pPr marL="12700">
-              <a:spcBef>
-                <a:spcPts val="15"/>
-              </a:spcBef>
-            </a:pPr>
-            <a:r>
-              <a:rPr lang="es-ES" spc="-5" dirty="0"/>
-              <a:t>LAB 1.0 WAVEGUIDES</a:t>
-            </a:r>
-          </a:p>
-        </p:txBody>
-      </p:sp>
-      <mc:AlternateContent xmlns:mc="http://schemas.openxmlformats.org/markup-compatibility/2006">
-        <mc:Choice xmlns:a14="http://schemas.microsoft.com/office/drawing/2010/main" Requires="a14">
-          <p:sp>
-            <p:nvSpPr>
-              <p:cNvPr id="2" name="CuadroTexto 1">
-                <a:extLst>
-                  <a:ext uri="{FF2B5EF4-FFF2-40B4-BE49-F238E27FC236}">
-                    <a16:creationId xmlns:a16="http://schemas.microsoft.com/office/drawing/2014/main" id="{11E2B217-7A2F-7F84-8CFC-E023D5FB8F3B}"/>
-                  </a:ext>
-                </a:extLst>
-              </p:cNvPr>
-              <p:cNvSpPr txBox="1"/>
-              <p:nvPr/>
-            </p:nvSpPr>
-            <p:spPr>
-              <a:xfrm>
-                <a:off x="481668" y="1690095"/>
-                <a:ext cx="11198542" cy="3849324"/>
-              </a:xfrm>
-              <a:prstGeom prst="rect">
-                <a:avLst/>
-              </a:prstGeom>
-              <a:solidFill>
-                <a:schemeClr val="bg1">
-                  <a:lumMod val="95000"/>
-                </a:schemeClr>
-              </a:solidFill>
-              <a:ln w="28575">
-                <a:solidFill>
-                  <a:srgbClr val="E0700D"/>
-                </a:solidFill>
-              </a:ln>
-            </p:spPr>
-            <p:txBody>
-              <a:bodyPr wrap="square" rtlCol="0">
-                <a:spAutoFit/>
-              </a:bodyPr>
-              <a:lstStyle/>
-              <a:p>
-                <a:pPr algn="just"/>
-                <a:r>
-                  <a:rPr lang="en-US" sz="1200" dirty="0">
-                    <a:cs typeface="Arial" panose="020B0604020202020204" pitchFamily="34" charset="0"/>
-                  </a:rPr>
-                  <a:t>Find the second-degree polynomial coefficients and relate them with the group index and the dispersion parameter. </a:t>
-                </a:r>
-                <a14:m>
-                  <m:oMath xmlns:m="http://schemas.openxmlformats.org/officeDocument/2006/math">
-                    <m:d>
-                      <m:dPr>
-                        <m:begChr m:val="{"/>
-                        <m:endChr m:val=""/>
-                        <m:ctrlPr>
-                          <a:rPr lang="es-ES" sz="1200" b="0" i="1" smtClean="0">
-                            <a:cs typeface="Arial" panose="020B0604020202020204" pitchFamily="34" charset="0"/>
-                          </a:rPr>
-                        </m:ctrlPr>
-                      </m:dPr>
-                      <m:e>
-                        <m:eqArr>
-                          <m:eqArrPr>
-                            <m:ctrlPr>
-                              <a:rPr lang="es-ES" sz="1200" b="0" i="1" smtClean="0">
-                                <a:cs typeface="Arial" panose="020B0604020202020204" pitchFamily="34" charset="0"/>
-                              </a:rPr>
-                            </m:ctrlPr>
-                          </m:eqArrPr>
-                          <m:e>
-                            <m:sSub>
-                              <m:sSubPr>
-                                <m:ctrlPr>
-                                  <a:rPr lang="es-ES" sz="1200" b="0" i="1" smtClean="0">
-                                    <a:cs typeface="Arial" panose="020B0604020202020204" pitchFamily="34" charset="0"/>
-                                  </a:rPr>
-                                </m:ctrlPr>
-                              </m:sSubPr>
-                              <m:e>
-                                <m:r>
-                                  <a:rPr lang="es-ES" sz="1200" b="0" i="1" smtClean="0">
-                                    <a:cs typeface="Arial" panose="020B0604020202020204" pitchFamily="34" charset="0"/>
-                                  </a:rPr>
-                                  <m:t>𝑛</m:t>
-                                </m:r>
-                              </m:e>
-                              <m:sub>
-                                <m:r>
-                                  <a:rPr lang="es-ES" sz="1200" b="0" i="1" smtClean="0">
-                                    <a:cs typeface="Arial" panose="020B0604020202020204" pitchFamily="34" charset="0"/>
-                                  </a:rPr>
-                                  <m:t>𝑒𝑓𝑓</m:t>
-                                </m:r>
-                              </m:sub>
-                            </m:sSub>
-                            <m:r>
-                              <a:rPr lang="es-ES" sz="1200" b="0" i="1" smtClean="0">
-                                <a:cs typeface="Arial" panose="020B0604020202020204" pitchFamily="34" charset="0"/>
-                              </a:rPr>
-                              <m:t>=</m:t>
-                            </m:r>
-                            <m:sSub>
-                              <m:sSubPr>
-                                <m:ctrlPr>
-                                  <a:rPr lang="es-ES" sz="1200" b="0" i="1" smtClean="0">
-                                    <a:cs typeface="Arial" panose="020B0604020202020204" pitchFamily="34" charset="0"/>
-                                  </a:rPr>
-                                </m:ctrlPr>
-                              </m:sSubPr>
-                              <m:e>
-                                <m:r>
-                                  <a:rPr lang="es-ES" sz="1200" b="0" i="1" smtClean="0">
-                                    <a:cs typeface="Arial" panose="020B0604020202020204" pitchFamily="34" charset="0"/>
-                                  </a:rPr>
-                                  <m:t>𝑛</m:t>
-                                </m:r>
-                              </m:e>
-                              <m:sub>
-                                <m:r>
-                                  <a:rPr lang="es-ES" sz="1200" b="0" i="1" smtClean="0">
-                                    <a:cs typeface="Arial" panose="020B0604020202020204" pitchFamily="34" charset="0"/>
-                                  </a:rPr>
-                                  <m:t>1</m:t>
-                                </m:r>
-                              </m:sub>
-                            </m:sSub>
-                          </m:e>
-                          <m:e>
-                            <m:sSub>
-                              <m:sSubPr>
-                                <m:ctrlPr>
-                                  <a:rPr lang="es-ES" sz="1200" b="0" i="1" smtClean="0">
-                                    <a:cs typeface="Arial" panose="020B0604020202020204" pitchFamily="34" charset="0"/>
-                                  </a:rPr>
-                                </m:ctrlPr>
-                              </m:sSubPr>
-                              <m:e>
-                                <m:r>
-                                  <a:rPr lang="es-ES" sz="1200" b="0" i="1" smtClean="0">
-                                    <a:cs typeface="Arial" panose="020B0604020202020204" pitchFamily="34" charset="0"/>
-                                  </a:rPr>
-                                  <m:t>𝑛</m:t>
-                                </m:r>
-                              </m:e>
-                              <m:sub>
-                                <m:r>
-                                  <a:rPr lang="es-ES" sz="1200" b="0" i="1" smtClean="0">
-                                    <a:cs typeface="Arial" panose="020B0604020202020204" pitchFamily="34" charset="0"/>
-                                  </a:rPr>
-                                  <m:t>𝑔</m:t>
-                                </m:r>
-                              </m:sub>
-                            </m:sSub>
-                            <m:r>
-                              <a:rPr lang="es-ES" sz="1200" b="0" i="1" smtClean="0">
-                                <a:cs typeface="Arial" panose="020B0604020202020204" pitchFamily="34" charset="0"/>
-                              </a:rPr>
-                              <m:t>=</m:t>
-                            </m:r>
-                            <m:sSub>
-                              <m:sSubPr>
-                                <m:ctrlPr>
-                                  <a:rPr lang="es-ES" sz="1200" b="0" i="1" smtClean="0">
-                                    <a:cs typeface="Arial" panose="020B0604020202020204" pitchFamily="34" charset="0"/>
-                                  </a:rPr>
-                                </m:ctrlPr>
-                              </m:sSubPr>
-                              <m:e>
-                                <m:r>
-                                  <a:rPr lang="es-ES" sz="1200" b="0" i="1" smtClean="0">
-                                    <a:cs typeface="Arial" panose="020B0604020202020204" pitchFamily="34" charset="0"/>
-                                  </a:rPr>
-                                  <m:t>𝑛</m:t>
-                                </m:r>
-                              </m:e>
-                              <m:sub>
-                                <m:r>
-                                  <a:rPr lang="es-ES" sz="1200" b="0" i="1" smtClean="0">
-                                    <a:cs typeface="Arial" panose="020B0604020202020204" pitchFamily="34" charset="0"/>
-                                  </a:rPr>
-                                  <m:t>1</m:t>
-                                </m:r>
-                              </m:sub>
-                            </m:sSub>
-                            <m:r>
-                              <a:rPr lang="es-ES" sz="1200" b="0" i="1" smtClean="0">
-                                <a:cs typeface="Arial" panose="020B0604020202020204" pitchFamily="34" charset="0"/>
-                              </a:rPr>
-                              <m:t>−</m:t>
-                            </m:r>
-                            <m:sSub>
-                              <m:sSubPr>
-                                <m:ctrlPr>
-                                  <a:rPr lang="es-ES" sz="1200" b="0" i="1" smtClean="0">
-                                    <a:cs typeface="Arial" panose="020B0604020202020204" pitchFamily="34" charset="0"/>
-                                  </a:rPr>
-                                </m:ctrlPr>
-                              </m:sSubPr>
-                              <m:e>
-                                <m:r>
-                                  <a:rPr lang="es-ES" sz="1200" b="0" i="1" smtClean="0">
-                                    <a:cs typeface="Arial" panose="020B0604020202020204" pitchFamily="34" charset="0"/>
-                                  </a:rPr>
-                                  <m:t>𝑛</m:t>
-                                </m:r>
-                              </m:e>
-                              <m:sub>
-                                <m:r>
-                                  <a:rPr lang="es-ES" sz="1200" b="0" i="1" smtClean="0">
-                                    <a:cs typeface="Arial" panose="020B0604020202020204" pitchFamily="34" charset="0"/>
-                                  </a:rPr>
-                                  <m:t>2</m:t>
-                                </m:r>
-                              </m:sub>
-                            </m:sSub>
-                            <m:sSub>
-                              <m:sSubPr>
-                                <m:ctrlPr>
-                                  <a:rPr lang="es-ES" sz="1200" b="0" i="1" smtClean="0">
-                                    <a:cs typeface="Arial" panose="020B0604020202020204" pitchFamily="34" charset="0"/>
-                                  </a:rPr>
-                                </m:ctrlPr>
-                              </m:sSubPr>
-                              <m:e>
-                                <m:r>
-                                  <a:rPr lang="es-ES" sz="1200" b="0" i="1" smtClean="0">
-                                    <a:cs typeface="Arial" panose="020B0604020202020204" pitchFamily="34" charset="0"/>
-                                  </a:rPr>
-                                  <m:t>𝜆</m:t>
-                                </m:r>
-                              </m:e>
-                              <m:sub>
-                                <m:r>
-                                  <a:rPr lang="es-ES" sz="1200" b="0" i="1" smtClean="0">
-                                    <a:cs typeface="Arial" panose="020B0604020202020204" pitchFamily="34" charset="0"/>
-                                  </a:rPr>
-                                  <m:t>0</m:t>
-                                </m:r>
-                              </m:sub>
-                            </m:sSub>
-                          </m:e>
-                          <m:e>
-                            <m:r>
-                              <a:rPr lang="es-ES" sz="1200" b="0" i="1" smtClean="0">
-                                <a:cs typeface="Arial" panose="020B0604020202020204" pitchFamily="34" charset="0"/>
-                              </a:rPr>
-                              <m:t>𝐷</m:t>
-                            </m:r>
-                            <m:r>
-                              <a:rPr lang="es-ES" sz="1200" b="0" i="1" smtClean="0">
-                                <a:cs typeface="Arial" panose="020B0604020202020204" pitchFamily="34" charset="0"/>
-                              </a:rPr>
-                              <m:t>=−</m:t>
-                            </m:r>
-                            <m:f>
-                              <m:fPr>
-                                <m:ctrlPr>
-                                  <a:rPr lang="es-ES" sz="1200" b="0" i="1" smtClean="0">
-                                    <a:cs typeface="Arial" panose="020B0604020202020204" pitchFamily="34" charset="0"/>
-                                  </a:rPr>
-                                </m:ctrlPr>
-                              </m:fPr>
-                              <m:num>
-                                <m:r>
-                                  <a:rPr lang="es-ES" sz="1200" b="0" i="1" smtClean="0">
-                                    <a:cs typeface="Arial" panose="020B0604020202020204" pitchFamily="34" charset="0"/>
-                                  </a:rPr>
-                                  <m:t>2</m:t>
-                                </m:r>
-                                <m:sSub>
-                                  <m:sSubPr>
-                                    <m:ctrlPr>
-                                      <a:rPr lang="es-ES" sz="1200" b="0" i="1" smtClean="0">
-                                        <a:cs typeface="Arial" panose="020B0604020202020204" pitchFamily="34" charset="0"/>
-                                      </a:rPr>
-                                    </m:ctrlPr>
-                                  </m:sSubPr>
-                                  <m:e>
-                                    <m:r>
-                                      <a:rPr lang="es-ES" sz="1200" b="0" i="1" smtClean="0">
-                                        <a:cs typeface="Arial" panose="020B0604020202020204" pitchFamily="34" charset="0"/>
-                                      </a:rPr>
-                                      <m:t>𝜆</m:t>
-                                    </m:r>
-                                  </m:e>
-                                  <m:sub>
-                                    <m:r>
-                                      <a:rPr lang="es-ES" sz="1200" b="0" i="1" smtClean="0">
-                                        <a:cs typeface="Arial" panose="020B0604020202020204" pitchFamily="34" charset="0"/>
-                                      </a:rPr>
-                                      <m:t>0</m:t>
-                                    </m:r>
-                                  </m:sub>
-                                </m:sSub>
-                                <m:sSub>
-                                  <m:sSubPr>
-                                    <m:ctrlPr>
-                                      <a:rPr lang="es-ES" sz="1200" b="0" i="1" smtClean="0">
-                                        <a:cs typeface="Arial" panose="020B0604020202020204" pitchFamily="34" charset="0"/>
-                                      </a:rPr>
-                                    </m:ctrlPr>
-                                  </m:sSubPr>
-                                  <m:e>
-                                    <m:r>
-                                      <a:rPr lang="es-ES" sz="1200" b="0" i="1" smtClean="0">
-                                        <a:cs typeface="Arial" panose="020B0604020202020204" pitchFamily="34" charset="0"/>
-                                      </a:rPr>
-                                      <m:t>𝑛</m:t>
-                                    </m:r>
-                                  </m:e>
-                                  <m:sub>
-                                    <m:r>
-                                      <a:rPr lang="es-ES" sz="1200" b="0" i="1" smtClean="0">
-                                        <a:cs typeface="Arial" panose="020B0604020202020204" pitchFamily="34" charset="0"/>
-                                      </a:rPr>
-                                      <m:t>3</m:t>
-                                    </m:r>
-                                  </m:sub>
-                                </m:sSub>
-                              </m:num>
-                              <m:den>
-                                <m:r>
-                                  <a:rPr lang="es-ES" sz="1200" b="0" i="1" smtClean="0">
-                                    <a:cs typeface="Arial" panose="020B0604020202020204" pitchFamily="34" charset="0"/>
-                                  </a:rPr>
-                                  <m:t>𝑐</m:t>
-                                </m:r>
-                              </m:den>
-                            </m:f>
-                            <m:d>
-                              <m:dPr>
-                                <m:begChr m:val="["/>
-                                <m:endChr m:val="]"/>
-                                <m:ctrlPr>
-                                  <a:rPr lang="es-ES" sz="1200" b="0" i="1" smtClean="0">
-                                    <a:cs typeface="Arial" panose="020B0604020202020204" pitchFamily="34" charset="0"/>
-                                  </a:rPr>
-                                </m:ctrlPr>
-                              </m:dPr>
-                              <m:e>
-                                <m:f>
-                                  <m:fPr>
-                                    <m:ctrlPr>
-                                      <a:rPr lang="es-ES" sz="1200" b="0" i="1" smtClean="0">
-                                        <a:cs typeface="Arial" panose="020B0604020202020204" pitchFamily="34" charset="0"/>
-                                      </a:rPr>
-                                    </m:ctrlPr>
-                                  </m:fPr>
-                                  <m:num>
-                                    <m:sSup>
-                                      <m:sSupPr>
-                                        <m:ctrlPr>
-                                          <a:rPr lang="es-ES" sz="1200" b="0" i="1" smtClean="0">
-                                            <a:cs typeface="Arial" panose="020B0604020202020204" pitchFamily="34" charset="0"/>
-                                          </a:rPr>
-                                        </m:ctrlPr>
-                                      </m:sSupPr>
-                                      <m:e>
-                                        <m:r>
-                                          <a:rPr lang="es-ES" sz="1200" b="0" i="1" smtClean="0">
-                                            <a:cs typeface="Arial" panose="020B0604020202020204" pitchFamily="34" charset="0"/>
-                                          </a:rPr>
-                                          <m:t>𝑠</m:t>
-                                        </m:r>
-                                      </m:e>
-                                      <m:sup>
-                                        <m:r>
-                                          <a:rPr lang="es-ES" sz="1200" b="0" i="1" smtClean="0">
-                                            <a:cs typeface="Arial" panose="020B0604020202020204" pitchFamily="34" charset="0"/>
-                                          </a:rPr>
-                                          <m:t>2</m:t>
-                                        </m:r>
-                                      </m:sup>
-                                    </m:sSup>
-                                  </m:num>
-                                  <m:den>
-                                    <m:r>
-                                      <a:rPr lang="es-ES" sz="1200" b="0" i="1" smtClean="0">
-                                        <a:cs typeface="Arial" panose="020B0604020202020204" pitchFamily="34" charset="0"/>
-                                      </a:rPr>
-                                      <m:t>𝑚</m:t>
-                                    </m:r>
-                                  </m:den>
-                                </m:f>
-                              </m:e>
-                            </m:d>
-                          </m:e>
-                        </m:eqArr>
-                      </m:e>
-                    </m:d>
-                  </m:oMath>
-                </a14:m>
-                <a:endParaRPr lang="es-ES" sz="1200" b="0" dirty="0">
                   <a:cs typeface="Arial" panose="020B0604020202020204" pitchFamily="34" charset="0"/>
                 </a:endParaRPr>
               </a:p>
@@ -6479,18 +5007,24 @@
                     <m:sSub>
                       <m:sSubPr>
                         <m:ctrlPr>
-                          <a:rPr lang="ar-AE" sz="1200"/>
+                          <a:rPr lang="ar-AE" sz="1200" i="1">
+                            <a:latin typeface="Cambria Math" panose="02040503050406030204" pitchFamily="18" charset="0"/>
+                          </a:rPr>
                         </m:ctrlPr>
                       </m:sSubPr>
                       <m:e>
                         <m:r>
-                          <a:rPr lang="ar-AE" sz="1200" i="1"/>
+                          <a:rPr lang="ar-AE" sz="1200" i="1">
+                            <a:latin typeface="Cambria Math" panose="02040503050406030204" pitchFamily="18" charset="0"/>
+                          </a:rPr>
                           <m:t>𝑛</m:t>
                         </m:r>
                       </m:e>
                       <m:sub>
                         <m:r>
-                          <a:rPr lang="ar-AE" sz="1200"/>
+                          <a:rPr lang="ar-AE" sz="1200">
+                            <a:latin typeface="Cambria Math" panose="02040503050406030204" pitchFamily="18" charset="0"/>
+                          </a:rPr>
                           <m:t>1</m:t>
                         </m:r>
                       </m:sub>
@@ -6506,18 +5040,24 @@
                     <m:sSub>
                       <m:sSubPr>
                         <m:ctrlPr>
-                          <a:rPr lang="ar-AE" sz="1200"/>
+                          <a:rPr lang="ar-AE" sz="1200" i="1">
+                            <a:latin typeface="Cambria Math" panose="02040503050406030204" pitchFamily="18" charset="0"/>
+                          </a:rPr>
                         </m:ctrlPr>
                       </m:sSubPr>
                       <m:e>
                         <m:r>
-                          <a:rPr lang="ar-AE" sz="1200" i="1"/>
+                          <a:rPr lang="ar-AE" sz="1200" i="1">
+                            <a:latin typeface="Cambria Math" panose="02040503050406030204" pitchFamily="18" charset="0"/>
+                          </a:rPr>
                           <m:t>𝑛</m:t>
                         </m:r>
                       </m:e>
                       <m:sub>
                         <m:r>
-                          <a:rPr lang="ar-AE" sz="1200"/>
+                          <a:rPr lang="ar-AE" sz="1200">
+                            <a:latin typeface="Cambria Math" panose="02040503050406030204" pitchFamily="18" charset="0"/>
+                          </a:rPr>
                           <m:t>2</m:t>
                         </m:r>
                       </m:sub>
@@ -6533,18 +5073,24 @@
                     <m:sSub>
                       <m:sSubPr>
                         <m:ctrlPr>
-                          <a:rPr lang="ar-AE" sz="1200"/>
+                          <a:rPr lang="ar-AE" sz="1200" i="1">
+                            <a:latin typeface="Cambria Math" panose="02040503050406030204" pitchFamily="18" charset="0"/>
+                          </a:rPr>
                         </m:ctrlPr>
                       </m:sSubPr>
                       <m:e>
                         <m:r>
-                          <a:rPr lang="ar-AE" sz="1200" i="1"/>
+                          <a:rPr lang="ar-AE" sz="1200" i="1">
+                            <a:latin typeface="Cambria Math" panose="02040503050406030204" pitchFamily="18" charset="0"/>
+                          </a:rPr>
                           <m:t>𝑛</m:t>
                         </m:r>
                       </m:e>
                       <m:sub>
                         <m:r>
-                          <a:rPr lang="ar-AE" sz="1200"/>
+                          <a:rPr lang="ar-AE" sz="1200">
+                            <a:latin typeface="Cambria Math" panose="02040503050406030204" pitchFamily="18" charset="0"/>
+                          </a:rPr>
                           <m:t>3</m:t>
                         </m:r>
                       </m:sub>
@@ -6788,7 +5334,19 @@
                   <a:rPr lang="en-US" sz="1200" dirty="0">
                     <a:cs typeface="Arial" panose="020B0604020202020204" pitchFamily="34" charset="0"/>
                   </a:rPr>
-                  <a:t> la longitude de </a:t>
+                  <a:t> la </a:t>
+                </a:r>
+                <a:r>
+                  <a:rPr lang="en-US" sz="1200" dirty="0" err="1">
+                    <a:cs typeface="Arial" panose="020B0604020202020204" pitchFamily="34" charset="0"/>
+                  </a:rPr>
+                  <a:t>longitud</a:t>
+                </a:r>
+                <a:r>
+                  <a:rPr lang="en-US" sz="1200" dirty="0">
+                    <a:cs typeface="Arial" panose="020B0604020202020204" pitchFamily="34" charset="0"/>
+                  </a:rPr>
+                  <a:t> de de </a:t>
                 </a:r>
                 <a:r>
                   <a:rPr lang="en-US" sz="1200" dirty="0" err="1">
@@ -6823,18 +5381,24 @@
                     <m:sSub>
                       <m:sSubPr>
                         <m:ctrlPr>
-                          <a:rPr lang="ar-AE" sz="1200"/>
+                          <a:rPr lang="ar-AE" sz="1200" i="1">
+                            <a:latin typeface="Cambria Math" panose="02040503050406030204" pitchFamily="18" charset="0"/>
+                          </a:rPr>
                         </m:ctrlPr>
                       </m:sSubPr>
                       <m:e>
                         <m:r>
-                          <a:rPr lang="ar-AE" sz="1200" i="1"/>
+                          <a:rPr lang="ar-AE" sz="1200" i="1">
+                            <a:latin typeface="Cambria Math" panose="02040503050406030204" pitchFamily="18" charset="0"/>
+                          </a:rPr>
                           <m:t>𝑛</m:t>
                         </m:r>
                       </m:e>
                       <m:sub>
                         <m:r>
-                          <a:rPr lang="ar-AE" sz="1200"/>
+                          <a:rPr lang="ar-AE" sz="1200">
+                            <a:latin typeface="Cambria Math" panose="02040503050406030204" pitchFamily="18" charset="0"/>
+                          </a:rPr>
                           <m:t>2</m:t>
                         </m:r>
                       </m:sub>
@@ -6858,18 +5422,24 @@
                     <m:sSub>
                       <m:sSubPr>
                         <m:ctrlPr>
-                          <a:rPr lang="ar-AE" sz="1200"/>
+                          <a:rPr lang="ar-AE" sz="1200" i="1">
+                            <a:latin typeface="Cambria Math" panose="02040503050406030204" pitchFamily="18" charset="0"/>
+                          </a:rPr>
                         </m:ctrlPr>
                       </m:sSubPr>
                       <m:e>
                         <m:r>
-                          <a:rPr lang="ar-AE" sz="1200" i="1"/>
+                          <a:rPr lang="ar-AE" sz="1200" i="1">
+                            <a:latin typeface="Cambria Math" panose="02040503050406030204" pitchFamily="18" charset="0"/>
+                          </a:rPr>
                           <m:t>𝑛</m:t>
                         </m:r>
                       </m:e>
                       <m:sub>
                         <m:r>
-                          <a:rPr lang="ar-AE" sz="1200"/>
+                          <a:rPr lang="ar-AE" sz="1200">
+                            <a:latin typeface="Cambria Math" panose="02040503050406030204" pitchFamily="18" charset="0"/>
+                          </a:rPr>
                           <m:t>3</m:t>
                         </m:r>
                       </m:sub>
@@ -6883,39 +5453,53 @@
                 <a14:m>
                   <m:oMath xmlns:m="http://schemas.openxmlformats.org/officeDocument/2006/math">
                     <m:r>
-                      <a:rPr lang="es-ES" sz="1200" i="1"/>
+                      <a:rPr lang="es-ES" sz="1200" i="1">
+                        <a:latin typeface="Cambria Math" panose="02040503050406030204" pitchFamily="18" charset="0"/>
+                      </a:rPr>
                       <m:t>𝐷</m:t>
                     </m:r>
                     <m:r>
-                      <a:rPr lang="es-ES" sz="1200"/>
+                      <a:rPr lang="es-ES" sz="1200">
+                        <a:latin typeface="Cambria Math" panose="02040503050406030204" pitchFamily="18" charset="0"/>
+                      </a:rPr>
                       <m:t>=−</m:t>
                     </m:r>
                     <m:f>
                       <m:fPr>
                         <m:ctrlPr>
-                          <a:rPr lang="ar-AE" sz="1200" i="1"/>
+                          <a:rPr lang="ar-AE" sz="1200" i="1">
+                            <a:latin typeface="Cambria Math" panose="02040503050406030204" pitchFamily="18" charset="0"/>
+                          </a:rPr>
                         </m:ctrlPr>
                       </m:fPr>
                       <m:num>
                         <m:r>
-                          <a:rPr lang="ar-AE" sz="1200"/>
+                          <a:rPr lang="ar-AE" sz="1200">
+                            <a:latin typeface="Cambria Math" panose="02040503050406030204" pitchFamily="18" charset="0"/>
+                          </a:rPr>
                           <m:t>2</m:t>
                         </m:r>
                         <m:sSub>
                           <m:sSubPr>
                             <m:ctrlPr>
-                              <a:rPr lang="ar-AE" sz="1200" i="1"/>
+                              <a:rPr lang="ar-AE" sz="1200" i="1">
+                                <a:latin typeface="Cambria Math" panose="02040503050406030204" pitchFamily="18" charset="0"/>
+                              </a:rPr>
                             </m:ctrlPr>
                           </m:sSubPr>
                           <m:e>
                             <m:r>
-                              <a:rPr lang="ar-AE" sz="1200" i="1"/>
+                              <a:rPr lang="ar-AE" sz="1200" i="1">
+                                <a:latin typeface="Cambria Math" panose="02040503050406030204" pitchFamily="18" charset="0"/>
+                              </a:rPr>
                               <m:t>𝜆</m:t>
                             </m:r>
                           </m:e>
                           <m:sub>
                             <m:r>
-                              <a:rPr lang="ar-AE" sz="1200"/>
+                              <a:rPr lang="ar-AE" sz="1200">
+                                <a:latin typeface="Cambria Math" panose="02040503050406030204" pitchFamily="18" charset="0"/>
+                              </a:rPr>
                               <m:t>0</m:t>
                             </m:r>
                           </m:sub>
@@ -6923,18 +5507,24 @@
                         <m:sSub>
                           <m:sSubPr>
                             <m:ctrlPr>
-                              <a:rPr lang="ar-AE" sz="1200" i="1"/>
+                              <a:rPr lang="ar-AE" sz="1200" i="1">
+                                <a:latin typeface="Cambria Math" panose="02040503050406030204" pitchFamily="18" charset="0"/>
+                              </a:rPr>
                             </m:ctrlPr>
                           </m:sSubPr>
                           <m:e>
                             <m:r>
-                              <a:rPr lang="ar-AE" sz="1200" i="1"/>
+                              <a:rPr lang="ar-AE" sz="1200" i="1">
+                                <a:latin typeface="Cambria Math" panose="02040503050406030204" pitchFamily="18" charset="0"/>
+                              </a:rPr>
                               <m:t>𝑛</m:t>
                             </m:r>
                           </m:e>
                           <m:sub>
                             <m:r>
-                              <a:rPr lang="ar-AE" sz="1200"/>
+                              <a:rPr lang="ar-AE" sz="1200">
+                                <a:latin typeface="Cambria Math" panose="02040503050406030204" pitchFamily="18" charset="0"/>
+                              </a:rPr>
                               <m:t>3</m:t>
                             </m:r>
                           </m:sub>
@@ -6942,7 +5532,9 @@
                       </m:num>
                       <m:den>
                         <m:r>
-                          <a:rPr lang="ar-AE" sz="1200" i="1"/>
+                          <a:rPr lang="ar-AE" sz="1200" i="1">
+                            <a:latin typeface="Cambria Math" panose="02040503050406030204" pitchFamily="18" charset="0"/>
+                          </a:rPr>
                           <m:t>𝑐</m:t>
                         </m:r>
                       </m:den>
@@ -7410,7 +6002,7 @@
         </p:nvSpPr>
         <p:spPr>
           <a:xfrm>
-            <a:off x="2978141" y="2784355"/>
+            <a:off x="6078894" y="1816202"/>
             <a:ext cx="6235717" cy="923330"/>
           </a:xfrm>
           <a:prstGeom prst="rect">
@@ -7447,6 +6039,68 @@
           </a:p>
         </p:txBody>
       </p:sp>
+      <p:pic>
+        <p:nvPicPr>
+          <p:cNvPr id="5" name="Imagen 4" descr="Gráfico, Gráfico de dispersión&#10;&#10;El contenido generado por IA puede ser incorrecto.">
+            <a:extLst>
+              <a:ext uri="{FF2B5EF4-FFF2-40B4-BE49-F238E27FC236}">
+                <a16:creationId xmlns:a16="http://schemas.microsoft.com/office/drawing/2014/main" id="{70A89036-EB7E-9A46-D116-F1BAD743101C}"/>
+              </a:ext>
+            </a:extLst>
+          </p:cNvPr>
+          <p:cNvPicPr>
+            <a:picLocks noChangeAspect="1"/>
+          </p:cNvPicPr>
+          <p:nvPr/>
+        </p:nvPicPr>
+        <p:blipFill>
+          <a:blip r:embed="rId5"/>
+          <a:srcRect l="1995" t="902" r="1855" b="2727"/>
+          <a:stretch>
+            <a:fillRect/>
+          </a:stretch>
+        </p:blipFill>
+        <p:spPr>
+          <a:xfrm>
+            <a:off x="609441" y="1418373"/>
+            <a:ext cx="5118270" cy="3306028"/>
+          </a:xfrm>
+          <a:prstGeom prst="rect">
+            <a:avLst/>
+          </a:prstGeom>
+        </p:spPr>
+      </p:pic>
+      <p:pic>
+        <p:nvPicPr>
+          <p:cNvPr id="9" name="Imagen 8" descr="Gráfico, Gráfico de líneas&#10;&#10;El contenido generado por IA puede ser incorrecto.">
+            <a:extLst>
+              <a:ext uri="{FF2B5EF4-FFF2-40B4-BE49-F238E27FC236}">
+                <a16:creationId xmlns:a16="http://schemas.microsoft.com/office/drawing/2014/main" id="{9A312882-DF5D-CE26-F7E3-9D817AD22C22}"/>
+              </a:ext>
+            </a:extLst>
+          </p:cNvPr>
+          <p:cNvPicPr>
+            <a:picLocks noChangeAspect="1"/>
+          </p:cNvPicPr>
+          <p:nvPr/>
+        </p:nvPicPr>
+        <p:blipFill>
+          <a:blip r:embed="rId6"/>
+          <a:srcRect t="2021" b="733"/>
+          <a:stretch>
+            <a:fillRect/>
+          </a:stretch>
+        </p:blipFill>
+        <p:spPr>
+          <a:xfrm>
+            <a:off x="5802118" y="1417356"/>
+            <a:ext cx="6007293" cy="3306028"/>
+          </a:xfrm>
+          <a:prstGeom prst="rect">
+            <a:avLst/>
+          </a:prstGeom>
+        </p:spPr>
+      </p:pic>
     </p:spTree>
     <p:extLst>
       <p:ext uri="{BB962C8B-B14F-4D97-AF65-F5344CB8AC3E}">
@@ -7461,6 +6115,387 @@
 </file>
 
 <file path=ppt/slides/slide13.xml><?xml version="1.0" encoding="utf-8"?>
+<p:sld xmlns:a="http://schemas.openxmlformats.org/drawingml/2006/main" xmlns:r="http://schemas.openxmlformats.org/officeDocument/2006/relationships" xmlns:p="http://schemas.openxmlformats.org/presentationml/2006/main">
+  <p:cSld>
+    <p:spTree>
+      <p:nvGrpSpPr>
+        <p:cNvPr id="1" name="">
+          <a:extLst>
+            <a:ext uri="{FF2B5EF4-FFF2-40B4-BE49-F238E27FC236}">
+              <a16:creationId xmlns:a16="http://schemas.microsoft.com/office/drawing/2014/main" id="{7E806822-3A24-FB58-76CE-9324C16E45EA}"/>
+            </a:ext>
+          </a:extLst>
+        </p:cNvPr>
+        <p:cNvGrpSpPr/>
+        <p:nvPr/>
+      </p:nvGrpSpPr>
+      <p:grpSpPr>
+        <a:xfrm>
+          <a:off x="0" y="0"/>
+          <a:ext cx="0" cy="0"/>
+          <a:chOff x="0" y="0"/>
+          <a:chExt cx="0" cy="0"/>
+        </a:xfrm>
+      </p:grpSpPr>
+      <p:sp>
+        <p:nvSpPr>
+          <p:cNvPr id="16" name="object 16">
+            <a:extLst>
+              <a:ext uri="{FF2B5EF4-FFF2-40B4-BE49-F238E27FC236}">
+                <a16:creationId xmlns:a16="http://schemas.microsoft.com/office/drawing/2014/main" id="{3A8B6833-B776-2CE7-8E76-D65DBBF61FA2}"/>
+              </a:ext>
+            </a:extLst>
+          </p:cNvPr>
+          <p:cNvSpPr txBox="1">
+            <a:spLocks noGrp="1"/>
+          </p:cNvSpPr>
+          <p:nvPr>
+            <p:ph type="title"/>
+          </p:nvPr>
+        </p:nvSpPr>
+        <p:spPr>
+          <a:xfrm>
+            <a:off x="685800" y="408883"/>
+            <a:ext cx="10994410" cy="1474763"/>
+          </a:xfrm>
+          <a:prstGeom prst="rect">
+            <a:avLst/>
+          </a:prstGeom>
+        </p:spPr>
+        <p:txBody>
+          <a:bodyPr vert="horz" wrap="square" lIns="0" tIns="12700" rIns="0" bIns="0" rtlCol="0">
+            <a:spAutoFit/>
+          </a:bodyPr>
+          <a:lstStyle/>
+          <a:p>
+            <a:pPr marL="12700">
+              <a:spcBef>
+                <a:spcPts val="100"/>
+              </a:spcBef>
+            </a:pPr>
+            <a:r>
+              <a:rPr lang="en-US" sz="2500" dirty="0"/>
+              <a:t>EXTRA EJERCICIO 3: </a:t>
+            </a:r>
+            <a:br>
+              <a:rPr lang="en-US" sz="2500" dirty="0"/>
+            </a:br>
+            <a:r>
+              <a:rPr lang="en-US" b="0" dirty="0"/>
+              <a:t>Find the safe radius for this technology. Consider sweeping the radius in a 5um to 30um range. </a:t>
+            </a:r>
+            <a:br>
+              <a:rPr lang="en-US" b="0" dirty="0"/>
+            </a:br>
+            <a:br>
+              <a:rPr lang="en-US" sz="2500" dirty="0"/>
+            </a:br>
+            <a:endParaRPr lang="en-US" sz="2500" b="0" dirty="0">
+              <a:latin typeface="+mj-lt"/>
+              <a:cs typeface="Lucida Sans"/>
+            </a:endParaRPr>
+          </a:p>
+        </p:txBody>
+      </p:sp>
+      <p:pic>
+        <p:nvPicPr>
+          <p:cNvPr id="83" name="Gráfico 82">
+            <a:extLst>
+              <a:ext uri="{FF2B5EF4-FFF2-40B4-BE49-F238E27FC236}">
+                <a16:creationId xmlns:a16="http://schemas.microsoft.com/office/drawing/2014/main" id="{F8CA8DF3-52A3-9289-8DE3-7B7BB0DB4AB3}"/>
+              </a:ext>
+            </a:extLst>
+          </p:cNvPr>
+          <p:cNvPicPr>
+            <a:picLocks noChangeAspect="1"/>
+          </p:cNvPicPr>
+          <p:nvPr/>
+        </p:nvPicPr>
+        <p:blipFill>
+          <a:blip r:embed="rId3">
+            <a:extLst>
+              <a:ext uri="{96DAC541-7B7A-43D3-8B79-37D633B846F1}">
+                <asvg:svgBlip xmlns:asvg="http://schemas.microsoft.com/office/drawing/2016/SVG/main" r:embed="rId4"/>
+              </a:ext>
+            </a:extLst>
+          </a:blip>
+          <a:stretch>
+            <a:fillRect/>
+          </a:stretch>
+        </p:blipFill>
+        <p:spPr>
+          <a:xfrm>
+            <a:off x="5045006" y="6356057"/>
+            <a:ext cx="6409575" cy="363174"/>
+          </a:xfrm>
+          <a:prstGeom prst="rect">
+            <a:avLst/>
+          </a:prstGeom>
+        </p:spPr>
+      </p:pic>
+      <p:sp>
+        <p:nvSpPr>
+          <p:cNvPr id="84" name="Marcador de número de diapositiva 83">
+            <a:extLst>
+              <a:ext uri="{FF2B5EF4-FFF2-40B4-BE49-F238E27FC236}">
+                <a16:creationId xmlns:a16="http://schemas.microsoft.com/office/drawing/2014/main" id="{811EF6B9-DF66-2F6E-E308-A01D0BE1C4E5}"/>
+              </a:ext>
+            </a:extLst>
+          </p:cNvPr>
+          <p:cNvSpPr>
+            <a:spLocks noGrp="1"/>
+          </p:cNvSpPr>
+          <p:nvPr>
+            <p:ph type="sldNum" sz="quarter" idx="7"/>
+          </p:nvPr>
+        </p:nvSpPr>
+        <p:spPr/>
+        <p:txBody>
+          <a:bodyPr/>
+          <a:lstStyle/>
+          <a:p>
+            <a:fld id="{B6F15528-21DE-4FAA-801E-634DDDAF4B2B}" type="slidenum">
+              <a:rPr lang="es-ES" smtClean="0"/>
+              <a:t>13</a:t>
+            </a:fld>
+            <a:endParaRPr lang="es-ES"/>
+          </a:p>
+        </p:txBody>
+      </p:sp>
+      <p:sp>
+        <p:nvSpPr>
+          <p:cNvPr id="3" name="Marcador de pie de página 2">
+            <a:extLst>
+              <a:ext uri="{FF2B5EF4-FFF2-40B4-BE49-F238E27FC236}">
+                <a16:creationId xmlns:a16="http://schemas.microsoft.com/office/drawing/2014/main" id="{BA473A4B-4497-23A4-301A-204E9E70628F}"/>
+              </a:ext>
+            </a:extLst>
+          </p:cNvPr>
+          <p:cNvSpPr>
+            <a:spLocks noGrp="1"/>
+          </p:cNvSpPr>
+          <p:nvPr>
+            <p:ph type="ftr" sz="quarter" idx="5"/>
+          </p:nvPr>
+        </p:nvSpPr>
+        <p:spPr/>
+        <p:txBody>
+          <a:bodyPr/>
+          <a:lstStyle/>
+          <a:p>
+            <a:pPr marL="12700">
+              <a:spcBef>
+                <a:spcPts val="15"/>
+              </a:spcBef>
+            </a:pPr>
+            <a:r>
+              <a:rPr lang="es-ES" spc="-5"/>
+              <a:t>LAB 1.0 WAVEGUIDES</a:t>
+            </a:r>
+            <a:endParaRPr lang="es-ES" spc="-5" dirty="0"/>
+          </a:p>
+        </p:txBody>
+      </p:sp>
+      <p:sp>
+        <p:nvSpPr>
+          <p:cNvPr id="2" name="CuadroTexto 1">
+            <a:extLst>
+              <a:ext uri="{FF2B5EF4-FFF2-40B4-BE49-F238E27FC236}">
+                <a16:creationId xmlns:a16="http://schemas.microsoft.com/office/drawing/2014/main" id="{22467BDE-5898-90E9-5123-6AFA90AEA990}"/>
+              </a:ext>
+            </a:extLst>
+          </p:cNvPr>
+          <p:cNvSpPr txBox="1"/>
+          <p:nvPr/>
+        </p:nvSpPr>
+        <p:spPr>
+          <a:xfrm>
+            <a:off x="609441" y="4860334"/>
+            <a:ext cx="11199971" cy="1200329"/>
+          </a:xfrm>
+          <a:prstGeom prst="rect">
+            <a:avLst/>
+          </a:prstGeom>
+          <a:solidFill>
+            <a:schemeClr val="bg1">
+              <a:lumMod val="95000"/>
+            </a:schemeClr>
+          </a:solidFill>
+          <a:ln w="28575">
+            <a:solidFill>
+              <a:srgbClr val="E0700D"/>
+            </a:solidFill>
+          </a:ln>
+        </p:spPr>
+        <p:txBody>
+          <a:bodyPr wrap="square" rtlCol="0">
+            <a:spAutoFit/>
+          </a:bodyPr>
+          <a:lstStyle/>
+          <a:p>
+            <a:pPr algn="just"/>
+            <a:r>
+              <a:rPr lang="en-US" sz="1200" dirty="0">
+                <a:latin typeface="Arial" panose="020B0604020202020204" pitchFamily="34" charset="0"/>
+                <a:cs typeface="Arial" panose="020B0604020202020204" pitchFamily="34" charset="0"/>
+              </a:rPr>
+              <a:t>Comment results, which is the safe radius?, consider safe means less than 0.1 dB/90º.</a:t>
+            </a:r>
+          </a:p>
+          <a:p>
+            <a:pPr algn="just"/>
+            <a:endParaRPr lang="en-US" sz="1200" u="sng" dirty="0">
+              <a:latin typeface="Arial" panose="020B0604020202020204" pitchFamily="34" charset="0"/>
+              <a:cs typeface="Arial" panose="020B0604020202020204" pitchFamily="34" charset="0"/>
+            </a:endParaRPr>
+          </a:p>
+          <a:p>
+            <a:pPr algn="just"/>
+            <a:endParaRPr lang="en-US" sz="1200" dirty="0">
+              <a:latin typeface="Arial" panose="020B0604020202020204" pitchFamily="34" charset="0"/>
+              <a:cs typeface="Arial" panose="020B0604020202020204" pitchFamily="34" charset="0"/>
+            </a:endParaRPr>
+          </a:p>
+          <a:p>
+            <a:pPr algn="just"/>
+            <a:endParaRPr lang="en-US" sz="1200" dirty="0">
+              <a:latin typeface="Arial" panose="020B0604020202020204" pitchFamily="34" charset="0"/>
+              <a:cs typeface="Arial" panose="020B0604020202020204" pitchFamily="34" charset="0"/>
+            </a:endParaRPr>
+          </a:p>
+          <a:p>
+            <a:pPr algn="just"/>
+            <a:endParaRPr lang="en-US" sz="1200" dirty="0">
+              <a:latin typeface="Arial" panose="020B0604020202020204" pitchFamily="34" charset="0"/>
+              <a:cs typeface="Arial" panose="020B0604020202020204" pitchFamily="34" charset="0"/>
+            </a:endParaRPr>
+          </a:p>
+          <a:p>
+            <a:pPr algn="just"/>
+            <a:endParaRPr lang="en-US" sz="1200" dirty="0">
+              <a:latin typeface="Arial" panose="020B0604020202020204" pitchFamily="34" charset="0"/>
+              <a:cs typeface="Arial" panose="020B0604020202020204" pitchFamily="34" charset="0"/>
+            </a:endParaRPr>
+          </a:p>
+        </p:txBody>
+      </p:sp>
+      <p:sp>
+        <p:nvSpPr>
+          <p:cNvPr id="7" name="Rectángulo 6">
+            <a:extLst>
+              <a:ext uri="{FF2B5EF4-FFF2-40B4-BE49-F238E27FC236}">
+                <a16:creationId xmlns:a16="http://schemas.microsoft.com/office/drawing/2014/main" id="{E42F5523-C7A7-5575-059C-24A284198CE1}"/>
+              </a:ext>
+            </a:extLst>
+          </p:cNvPr>
+          <p:cNvSpPr/>
+          <p:nvPr/>
+        </p:nvSpPr>
+        <p:spPr>
+          <a:xfrm>
+            <a:off x="609441" y="1418373"/>
+            <a:ext cx="11199971" cy="3306028"/>
+          </a:xfrm>
+          <a:prstGeom prst="rect">
+            <a:avLst/>
+          </a:prstGeom>
+          <a:noFill/>
+          <a:ln w="28575">
+            <a:solidFill>
+              <a:srgbClr val="E0700D"/>
+            </a:solidFill>
+          </a:ln>
+        </p:spPr>
+        <p:style>
+          <a:lnRef idx="2">
+            <a:schemeClr val="accent1">
+              <a:shade val="15000"/>
+            </a:schemeClr>
+          </a:lnRef>
+          <a:fillRef idx="1">
+            <a:schemeClr val="accent1"/>
+          </a:fillRef>
+          <a:effectRef idx="0">
+            <a:schemeClr val="accent1"/>
+          </a:effectRef>
+          <a:fontRef idx="minor">
+            <a:schemeClr val="lt1"/>
+          </a:fontRef>
+        </p:style>
+        <p:txBody>
+          <a:bodyPr rtlCol="0" anchor="ctr"/>
+          <a:lstStyle/>
+          <a:p>
+            <a:pPr algn="ctr"/>
+            <a:endParaRPr lang="en-US"/>
+          </a:p>
+        </p:txBody>
+      </p:sp>
+      <p:sp>
+        <p:nvSpPr>
+          <p:cNvPr id="8" name="CuadroTexto 7">
+            <a:extLst>
+              <a:ext uri="{FF2B5EF4-FFF2-40B4-BE49-F238E27FC236}">
+                <a16:creationId xmlns:a16="http://schemas.microsoft.com/office/drawing/2014/main" id="{8DCAFA40-BCD7-345B-29CF-394AE5BE4A73}"/>
+              </a:ext>
+            </a:extLst>
+          </p:cNvPr>
+          <p:cNvSpPr txBox="1"/>
+          <p:nvPr/>
+        </p:nvSpPr>
+        <p:spPr>
+          <a:xfrm>
+            <a:off x="6078894" y="1816202"/>
+            <a:ext cx="6235717" cy="923330"/>
+          </a:xfrm>
+          <a:prstGeom prst="rect">
+            <a:avLst/>
+          </a:prstGeom>
+          <a:noFill/>
+        </p:spPr>
+        <p:txBody>
+          <a:bodyPr wrap="square" rtlCol="0">
+            <a:spAutoFit/>
+          </a:bodyPr>
+          <a:lstStyle/>
+          <a:p>
+            <a:pPr algn="ctr"/>
+            <a:r>
+              <a:rPr lang="en-US" b="1" dirty="0"/>
+              <a:t>deep</a:t>
+            </a:r>
+            <a:r>
+              <a:rPr lang="en-US" dirty="0"/>
+              <a:t> waveguide</a:t>
+            </a:r>
+          </a:p>
+          <a:p>
+            <a:pPr algn="ctr"/>
+            <a:endParaRPr lang="en-US" dirty="0"/>
+          </a:p>
+          <a:p>
+            <a:pPr algn="ctr"/>
+            <a:r>
+              <a:rPr lang="en-US" dirty="0"/>
+              <a:t>Paste Total Loss (dB/90º) vs R &amp; neff_TE0 vs R</a:t>
+            </a:r>
+          </a:p>
+        </p:txBody>
+      </p:sp>
+    </p:spTree>
+    <p:extLst>
+      <p:ext uri="{BB962C8B-B14F-4D97-AF65-F5344CB8AC3E}">
+        <p14:creationId xmlns:p14="http://schemas.microsoft.com/office/powerpoint/2010/main" val="2252519473"/>
+      </p:ext>
+    </p:extLst>
+  </p:cSld>
+  <p:clrMapOvr>
+    <a:masterClrMapping/>
+  </p:clrMapOvr>
+</p:sld>
+</file>
+
+<file path=ppt/slides/slide14.xml><?xml version="1.0" encoding="utf-8"?>
 <p:sld xmlns:a="http://schemas.openxmlformats.org/drawingml/2006/main" xmlns:r="http://schemas.openxmlformats.org/officeDocument/2006/relationships" xmlns:p="http://schemas.openxmlformats.org/presentationml/2006/main">
   <p:cSld>
     <p:spTree>
@@ -7599,7 +6634,7 @@
           <a:p>
             <a:fld id="{B6F15528-21DE-4FAA-801E-634DDDAF4B2B}" type="slidenum">
               <a:rPr lang="es-ES" smtClean="0"/>
-              <a:t>13</a:t>
+              <a:t>14</a:t>
             </a:fld>
             <a:endParaRPr lang="es-ES"/>
           </a:p>
@@ -12173,8 +11208,8 @@
           </a:p>
         </p:txBody>
       </p:sp>
-      <mc:AlternateContent xmlns:mc="http://schemas.openxmlformats.org/markup-compatibility/2006">
-        <mc:Choice xmlns:a14="http://schemas.microsoft.com/office/drawing/2010/main" Requires="a14">
+      <mc:AlternateContent xmlns:mc="http://schemas.openxmlformats.org/markup-compatibility/2006" xmlns:a14="http://schemas.microsoft.com/office/drawing/2010/main">
+        <mc:Choice Requires="a14">
           <p:sp>
             <p:nvSpPr>
               <p:cNvPr id="2" name="CuadroTexto 1">
@@ -12611,8 +11646,8 @@
                     <m:sSub>
                       <m:sSubPr>
                         <m:ctrlPr>
-                          <a:rPr lang="ar-AE" sz="1200">
-                            <a:latin typeface="+mj-lt"/>
+                          <a:rPr lang="ar-AE" sz="1200" i="1">
+                            <a:latin typeface="Cambria Math" panose="02040503050406030204" pitchFamily="18" charset="0"/>
                           </a:rPr>
                         </m:ctrlPr>
                       </m:sSubPr>
@@ -12622,7 +11657,7 @@
                             <m:sty m:val="p"/>
                           </m:rPr>
                           <a:rPr lang="ar-AE" sz="1200" i="0">
-                            <a:latin typeface="+mj-lt"/>
+                            <a:latin typeface="Cambria Math" panose="02040503050406030204" pitchFamily="18" charset="0"/>
                           </a:rPr>
                           <m:t>n</m:t>
                         </m:r>
@@ -12664,8 +11699,8 @@
                     <m:sSub>
                       <m:sSubPr>
                         <m:ctrlPr>
-                          <a:rPr lang="ar-AE" sz="1200">
-                            <a:latin typeface="+mj-lt"/>
+                          <a:rPr lang="ar-AE" sz="1200" i="1">
+                            <a:latin typeface="Cambria Math" panose="02040503050406030204" pitchFamily="18" charset="0"/>
                           </a:rPr>
                         </m:ctrlPr>
                       </m:sSubPr>
@@ -12675,7 +11710,7 @@
                             <m:sty m:val="p"/>
                           </m:rPr>
                           <a:rPr lang="ar-AE" sz="1200" i="0">
-                            <a:latin typeface="+mj-lt"/>
+                            <a:latin typeface="Cambria Math" panose="02040503050406030204" pitchFamily="18" charset="0"/>
                           </a:rPr>
                           <m:t>n</m:t>
                         </m:r>
@@ -12702,7 +11737,7 @@
             </p:txBody>
           </p:sp>
         </mc:Choice>
-        <mc:Fallback>
+        <mc:Fallback xmlns="">
           <p:sp>
             <p:nvSpPr>
               <p:cNvPr id="2" name="CuadroTexto 1">

--- a/LabBook_10.pptx
+++ b/LabBook_10.pptx
@@ -5,10 +5,10 @@
     <p:sldMasterId id="2147483648" r:id="rId1"/>
   </p:sldMasterIdLst>
   <p:notesMasterIdLst>
-    <p:notesMasterId r:id="rId16"/>
+    <p:notesMasterId r:id="rId18"/>
   </p:notesMasterIdLst>
   <p:handoutMasterIdLst>
-    <p:handoutMasterId r:id="rId17"/>
+    <p:handoutMasterId r:id="rId19"/>
   </p:handoutMasterIdLst>
   <p:sldIdLst>
     <p:sldId id="256" r:id="rId2"/>
@@ -23,8 +23,10 @@
     <p:sldId id="297" r:id="rId11"/>
     <p:sldId id="304" r:id="rId12"/>
     <p:sldId id="293" r:id="rId13"/>
-    <p:sldId id="305" r:id="rId14"/>
-    <p:sldId id="288" r:id="rId15"/>
+    <p:sldId id="306" r:id="rId14"/>
+    <p:sldId id="305" r:id="rId15"/>
+    <p:sldId id="307" r:id="rId16"/>
+    <p:sldId id="288" r:id="rId17"/>
   </p:sldIdLst>
   <p:sldSz cx="12192000" cy="6858000"/>
   <p:notesSz cx="12192000" cy="6858000"/>
@@ -239,7 +241,7 @@
           <a:p>
             <a:fld id="{8438F8DC-35B0-48E6-A86E-42F1F08DD00F}" type="datetimeFigureOut">
               <a:rPr lang="es-ES" smtClean="0"/>
-              <a:t>04/03/2026</a:t>
+              <a:t>10/03/2026</a:t>
             </a:fld>
             <a:endParaRPr lang="es-ES"/>
           </a:p>
@@ -416,7 +418,7 @@
           <a:p>
             <a:fld id="{FACBDC12-F39B-4B97-8F4D-6734F9D366FF}" type="datetimeFigureOut">
               <a:rPr lang="es-ES" smtClean="0"/>
-              <a:t>04/03/2026</a:t>
+              <a:t>10/03/2026</a:t>
             </a:fld>
             <a:endParaRPr lang="es-ES"/>
           </a:p>
@@ -883,6 +885,114 @@
         <p:cNvPr id="1" name="">
           <a:extLst>
             <a:ext uri="{FF2B5EF4-FFF2-40B4-BE49-F238E27FC236}">
+              <a16:creationId xmlns:a16="http://schemas.microsoft.com/office/drawing/2014/main" id="{6E526408-1DE0-A656-A80B-1236EC139702}"/>
+            </a:ext>
+          </a:extLst>
+        </p:cNvPr>
+        <p:cNvGrpSpPr/>
+        <p:nvPr/>
+      </p:nvGrpSpPr>
+      <p:grpSpPr>
+        <a:xfrm>
+          <a:off x="0" y="0"/>
+          <a:ext cx="0" cy="0"/>
+          <a:chOff x="0" y="0"/>
+          <a:chExt cx="0" cy="0"/>
+        </a:xfrm>
+      </p:grpSpPr>
+      <p:sp>
+        <p:nvSpPr>
+          <p:cNvPr id="2" name="Marcador de imagen de diapositiva 1">
+            <a:extLst>
+              <a:ext uri="{FF2B5EF4-FFF2-40B4-BE49-F238E27FC236}">
+                <a16:creationId xmlns:a16="http://schemas.microsoft.com/office/drawing/2014/main" id="{B9D7B021-1265-D78A-7F4F-E71E8E9E286F}"/>
+              </a:ext>
+            </a:extLst>
+          </p:cNvPr>
+          <p:cNvSpPr>
+            <a:spLocks noGrp="1" noRot="1" noChangeAspect="1"/>
+          </p:cNvSpPr>
+          <p:nvPr>
+            <p:ph type="sldImg"/>
+          </p:nvPr>
+        </p:nvSpPr>
+        <p:spPr/>
+      </p:sp>
+      <p:sp>
+        <p:nvSpPr>
+          <p:cNvPr id="3" name="Marcador de notas 2">
+            <a:extLst>
+              <a:ext uri="{FF2B5EF4-FFF2-40B4-BE49-F238E27FC236}">
+                <a16:creationId xmlns:a16="http://schemas.microsoft.com/office/drawing/2014/main" id="{BC224371-A96C-7DD9-5725-A1ABAE701B1D}"/>
+              </a:ext>
+            </a:extLst>
+          </p:cNvPr>
+          <p:cNvSpPr>
+            <a:spLocks noGrp="1"/>
+          </p:cNvSpPr>
+          <p:nvPr>
+            <p:ph type="body" idx="1"/>
+          </p:nvPr>
+        </p:nvSpPr>
+        <p:spPr/>
+        <p:txBody>
+          <a:bodyPr/>
+          <a:lstStyle/>
+          <a:p>
+            <a:endParaRPr lang="es-ES" dirty="0"/>
+          </a:p>
+        </p:txBody>
+      </p:sp>
+      <p:sp>
+        <p:nvSpPr>
+          <p:cNvPr id="4" name="Marcador de número de diapositiva 3">
+            <a:extLst>
+              <a:ext uri="{FF2B5EF4-FFF2-40B4-BE49-F238E27FC236}">
+                <a16:creationId xmlns:a16="http://schemas.microsoft.com/office/drawing/2014/main" id="{2E52CE88-5FEE-6A1A-9972-51BE52A267EA}"/>
+              </a:ext>
+            </a:extLst>
+          </p:cNvPr>
+          <p:cNvSpPr>
+            <a:spLocks noGrp="1"/>
+          </p:cNvSpPr>
+          <p:nvPr>
+            <p:ph type="sldNum" sz="quarter" idx="5"/>
+          </p:nvPr>
+        </p:nvSpPr>
+        <p:spPr/>
+        <p:txBody>
+          <a:bodyPr/>
+          <a:lstStyle/>
+          <a:p>
+            <a:fld id="{676223B9-C868-4436-87D9-1A3152E1157A}" type="slidenum">
+              <a:rPr lang="es-ES" smtClean="0"/>
+              <a:t>13</a:t>
+            </a:fld>
+            <a:endParaRPr lang="es-ES"/>
+          </a:p>
+        </p:txBody>
+      </p:sp>
+    </p:spTree>
+    <p:extLst>
+      <p:ext uri="{BB962C8B-B14F-4D97-AF65-F5344CB8AC3E}">
+        <p14:creationId xmlns:p14="http://schemas.microsoft.com/office/powerpoint/2010/main" val="602641702"/>
+      </p:ext>
+    </p:extLst>
+  </p:cSld>
+  <p:clrMapOvr>
+    <a:masterClrMapping/>
+  </p:clrMapOvr>
+</p:notes>
+</file>
+
+<file path=ppt/notesSlides/notesSlide12.xml><?xml version="1.0" encoding="utf-8"?>
+<p:notes xmlns:a="http://schemas.openxmlformats.org/drawingml/2006/main" xmlns:r="http://schemas.openxmlformats.org/officeDocument/2006/relationships" xmlns:p="http://schemas.openxmlformats.org/presentationml/2006/main">
+  <p:cSld>
+    <p:spTree>
+      <p:nvGrpSpPr>
+        <p:cNvPr id="1" name="">
+          <a:extLst>
+            <a:ext uri="{FF2B5EF4-FFF2-40B4-BE49-F238E27FC236}">
               <a16:creationId xmlns:a16="http://schemas.microsoft.com/office/drawing/2014/main" id="{6804C9DC-82CC-4670-22D4-5992593A56DE}"/>
             </a:ext>
           </a:extLst>
@@ -964,7 +1074,7 @@
           <a:p>
             <a:fld id="{676223B9-C868-4436-87D9-1A3152E1157A}" type="slidenum">
               <a:rPr lang="es-ES" smtClean="0"/>
-              <a:t>13</a:t>
+              <a:t>14</a:t>
             </a:fld>
             <a:endParaRPr lang="es-ES"/>
           </a:p>
@@ -974,6 +1084,114 @@
     <p:extLst>
       <p:ext uri="{BB962C8B-B14F-4D97-AF65-F5344CB8AC3E}">
         <p14:creationId xmlns:p14="http://schemas.microsoft.com/office/powerpoint/2010/main" val="1117091669"/>
+      </p:ext>
+    </p:extLst>
+  </p:cSld>
+  <p:clrMapOvr>
+    <a:masterClrMapping/>
+  </p:clrMapOvr>
+</p:notes>
+</file>
+
+<file path=ppt/notesSlides/notesSlide13.xml><?xml version="1.0" encoding="utf-8"?>
+<p:notes xmlns:a="http://schemas.openxmlformats.org/drawingml/2006/main" xmlns:r="http://schemas.openxmlformats.org/officeDocument/2006/relationships" xmlns:p="http://schemas.openxmlformats.org/presentationml/2006/main">
+  <p:cSld>
+    <p:spTree>
+      <p:nvGrpSpPr>
+        <p:cNvPr id="1" name="">
+          <a:extLst>
+            <a:ext uri="{FF2B5EF4-FFF2-40B4-BE49-F238E27FC236}">
+              <a16:creationId xmlns:a16="http://schemas.microsoft.com/office/drawing/2014/main" id="{E43BE712-D320-AEAC-AE88-1D20EF6D6214}"/>
+            </a:ext>
+          </a:extLst>
+        </p:cNvPr>
+        <p:cNvGrpSpPr/>
+        <p:nvPr/>
+      </p:nvGrpSpPr>
+      <p:grpSpPr>
+        <a:xfrm>
+          <a:off x="0" y="0"/>
+          <a:ext cx="0" cy="0"/>
+          <a:chOff x="0" y="0"/>
+          <a:chExt cx="0" cy="0"/>
+        </a:xfrm>
+      </p:grpSpPr>
+      <p:sp>
+        <p:nvSpPr>
+          <p:cNvPr id="2" name="Marcador de imagen de diapositiva 1">
+            <a:extLst>
+              <a:ext uri="{FF2B5EF4-FFF2-40B4-BE49-F238E27FC236}">
+                <a16:creationId xmlns:a16="http://schemas.microsoft.com/office/drawing/2014/main" id="{D127AAAF-A4A4-0842-375C-2CCF552A5675}"/>
+              </a:ext>
+            </a:extLst>
+          </p:cNvPr>
+          <p:cNvSpPr>
+            <a:spLocks noGrp="1" noRot="1" noChangeAspect="1"/>
+          </p:cNvSpPr>
+          <p:nvPr>
+            <p:ph type="sldImg"/>
+          </p:nvPr>
+        </p:nvSpPr>
+        <p:spPr/>
+      </p:sp>
+      <p:sp>
+        <p:nvSpPr>
+          <p:cNvPr id="3" name="Marcador de notas 2">
+            <a:extLst>
+              <a:ext uri="{FF2B5EF4-FFF2-40B4-BE49-F238E27FC236}">
+                <a16:creationId xmlns:a16="http://schemas.microsoft.com/office/drawing/2014/main" id="{3CCC4585-06EE-4A93-5FD9-1010BAE00E66}"/>
+              </a:ext>
+            </a:extLst>
+          </p:cNvPr>
+          <p:cNvSpPr>
+            <a:spLocks noGrp="1"/>
+          </p:cNvSpPr>
+          <p:nvPr>
+            <p:ph type="body" idx="1"/>
+          </p:nvPr>
+        </p:nvSpPr>
+        <p:spPr/>
+        <p:txBody>
+          <a:bodyPr/>
+          <a:lstStyle/>
+          <a:p>
+            <a:endParaRPr lang="es-ES" dirty="0"/>
+          </a:p>
+        </p:txBody>
+      </p:sp>
+      <p:sp>
+        <p:nvSpPr>
+          <p:cNvPr id="4" name="Marcador de número de diapositiva 3">
+            <a:extLst>
+              <a:ext uri="{FF2B5EF4-FFF2-40B4-BE49-F238E27FC236}">
+                <a16:creationId xmlns:a16="http://schemas.microsoft.com/office/drawing/2014/main" id="{3332B67C-6D68-F307-323F-B762197FFD2F}"/>
+              </a:ext>
+            </a:extLst>
+          </p:cNvPr>
+          <p:cNvSpPr>
+            <a:spLocks noGrp="1"/>
+          </p:cNvSpPr>
+          <p:nvPr>
+            <p:ph type="sldNum" sz="quarter" idx="5"/>
+          </p:nvPr>
+        </p:nvSpPr>
+        <p:spPr/>
+        <p:txBody>
+          <a:bodyPr/>
+          <a:lstStyle/>
+          <a:p>
+            <a:fld id="{676223B9-C868-4436-87D9-1A3152E1157A}" type="slidenum">
+              <a:rPr lang="es-ES" smtClean="0"/>
+              <a:t>15</a:t>
+            </a:fld>
+            <a:endParaRPr lang="es-ES"/>
+          </a:p>
+        </p:txBody>
+      </p:sp>
+    </p:spTree>
+    <p:extLst>
+      <p:ext uri="{BB962C8B-B14F-4D97-AF65-F5344CB8AC3E}">
+        <p14:creationId xmlns:p14="http://schemas.microsoft.com/office/powerpoint/2010/main" val="681044253"/>
       </p:ext>
     </p:extLst>
   </p:cSld>
@@ -4072,8 +4290,8 @@
           </a:p>
         </p:txBody>
       </p:sp>
-      <mc:AlternateContent xmlns:mc="http://schemas.openxmlformats.org/markup-compatibility/2006">
-        <mc:Choice xmlns:a14="http://schemas.microsoft.com/office/drawing/2010/main" Requires="a14">
+      <mc:AlternateContent xmlns:mc="http://schemas.openxmlformats.org/markup-compatibility/2006" xmlns:a14="http://schemas.microsoft.com/office/drawing/2010/main">
+        <mc:Choice Requires="a14">
           <p:sp>
             <p:nvSpPr>
               <p:cNvPr id="2" name="CuadroTexto 1">
@@ -5600,7 +5818,7 @@
             </p:txBody>
           </p:sp>
         </mc:Choice>
-        <mc:Fallback>
+        <mc:Fallback xmlns="">
           <p:sp>
             <p:nvSpPr>
               <p:cNvPr id="2" name="CuadroTexto 1">
@@ -5855,89 +6073,6 @@
       </p:sp>
       <p:sp>
         <p:nvSpPr>
-          <p:cNvPr id="2" name="CuadroTexto 1">
-            <a:extLst>
-              <a:ext uri="{FF2B5EF4-FFF2-40B4-BE49-F238E27FC236}">
-                <a16:creationId xmlns:a16="http://schemas.microsoft.com/office/drawing/2014/main" id="{FDE3A197-9508-F9F1-1FEB-FF883D78C151}"/>
-              </a:ext>
-            </a:extLst>
-          </p:cNvPr>
-          <p:cNvSpPr txBox="1"/>
-          <p:nvPr/>
-        </p:nvSpPr>
-        <p:spPr>
-          <a:xfrm>
-            <a:off x="609441" y="4860334"/>
-            <a:ext cx="11199971" cy="1200329"/>
-          </a:xfrm>
-          <a:prstGeom prst="rect">
-            <a:avLst/>
-          </a:prstGeom>
-          <a:solidFill>
-            <a:schemeClr val="bg1">
-              <a:lumMod val="95000"/>
-            </a:schemeClr>
-          </a:solidFill>
-          <a:ln w="28575">
-            <a:solidFill>
-              <a:srgbClr val="E0700D"/>
-            </a:solidFill>
-          </a:ln>
-        </p:spPr>
-        <p:txBody>
-          <a:bodyPr wrap="square" rtlCol="0">
-            <a:spAutoFit/>
-          </a:bodyPr>
-          <a:lstStyle/>
-          <a:p>
-            <a:pPr algn="just"/>
-            <a:r>
-              <a:rPr lang="en-US" sz="1200" dirty="0">
-                <a:latin typeface="Arial" panose="020B0604020202020204" pitchFamily="34" charset="0"/>
-                <a:cs typeface="Arial" panose="020B0604020202020204" pitchFamily="34" charset="0"/>
-              </a:rPr>
-              <a:t>Comment results, which is the safe radius?, consider safe means less than 0.1 dB/90º.</a:t>
-            </a:r>
-          </a:p>
-          <a:p>
-            <a:pPr algn="just"/>
-            <a:endParaRPr lang="en-US" sz="1200" u="sng" dirty="0">
-              <a:latin typeface="Arial" panose="020B0604020202020204" pitchFamily="34" charset="0"/>
-              <a:cs typeface="Arial" panose="020B0604020202020204" pitchFamily="34" charset="0"/>
-            </a:endParaRPr>
-          </a:p>
-          <a:p>
-            <a:pPr algn="just"/>
-            <a:endParaRPr lang="en-US" sz="1200" dirty="0">
-              <a:latin typeface="Arial" panose="020B0604020202020204" pitchFamily="34" charset="0"/>
-              <a:cs typeface="Arial" panose="020B0604020202020204" pitchFamily="34" charset="0"/>
-            </a:endParaRPr>
-          </a:p>
-          <a:p>
-            <a:pPr algn="just"/>
-            <a:endParaRPr lang="en-US" sz="1200" dirty="0">
-              <a:latin typeface="Arial" panose="020B0604020202020204" pitchFamily="34" charset="0"/>
-              <a:cs typeface="Arial" panose="020B0604020202020204" pitchFamily="34" charset="0"/>
-            </a:endParaRPr>
-          </a:p>
-          <a:p>
-            <a:pPr algn="just"/>
-            <a:endParaRPr lang="en-US" sz="1200" dirty="0">
-              <a:latin typeface="Arial" panose="020B0604020202020204" pitchFamily="34" charset="0"/>
-              <a:cs typeface="Arial" panose="020B0604020202020204" pitchFamily="34" charset="0"/>
-            </a:endParaRPr>
-          </a:p>
-          <a:p>
-            <a:pPr algn="just"/>
-            <a:endParaRPr lang="en-US" sz="1200" dirty="0">
-              <a:latin typeface="Arial" panose="020B0604020202020204" pitchFamily="34" charset="0"/>
-              <a:cs typeface="Arial" panose="020B0604020202020204" pitchFamily="34" charset="0"/>
-            </a:endParaRPr>
-          </a:p>
-        </p:txBody>
-      </p:sp>
-      <p:sp>
-        <p:nvSpPr>
           <p:cNvPr id="7" name="Rectángulo 6">
             <a:extLst>
               <a:ext uri="{FF2B5EF4-FFF2-40B4-BE49-F238E27FC236}">
@@ -6093,8 +6228,8 @@
         </p:blipFill>
         <p:spPr>
           <a:xfrm>
-            <a:off x="5802118" y="1417356"/>
-            <a:ext cx="6007293" cy="3306028"/>
+            <a:off x="5867400" y="1453282"/>
+            <a:ext cx="5942011" cy="3270101"/>
           </a:xfrm>
           <a:prstGeom prst="rect">
             <a:avLst/>
@@ -6115,6 +6250,1813 @@
 </file>
 
 <file path=ppt/slides/slide13.xml><?xml version="1.0" encoding="utf-8"?>
+<p:sld xmlns:a="http://schemas.openxmlformats.org/drawingml/2006/main" xmlns:r="http://schemas.openxmlformats.org/officeDocument/2006/relationships" xmlns:p="http://schemas.openxmlformats.org/presentationml/2006/main">
+  <p:cSld>
+    <p:spTree>
+      <p:nvGrpSpPr>
+        <p:cNvPr id="1" name="">
+          <a:extLst>
+            <a:ext uri="{FF2B5EF4-FFF2-40B4-BE49-F238E27FC236}">
+              <a16:creationId xmlns:a16="http://schemas.microsoft.com/office/drawing/2014/main" id="{3B3D025F-7C56-CF6A-394E-203CB01B0E1D}"/>
+            </a:ext>
+          </a:extLst>
+        </p:cNvPr>
+        <p:cNvGrpSpPr/>
+        <p:nvPr/>
+      </p:nvGrpSpPr>
+      <p:grpSpPr>
+        <a:xfrm>
+          <a:off x="0" y="0"/>
+          <a:ext cx="0" cy="0"/>
+          <a:chOff x="0" y="0"/>
+          <a:chExt cx="0" cy="0"/>
+        </a:xfrm>
+      </p:grpSpPr>
+      <p:sp>
+        <p:nvSpPr>
+          <p:cNvPr id="16" name="object 16">
+            <a:extLst>
+              <a:ext uri="{FF2B5EF4-FFF2-40B4-BE49-F238E27FC236}">
+                <a16:creationId xmlns:a16="http://schemas.microsoft.com/office/drawing/2014/main" id="{D811E270-6497-C24F-31EF-DFFBAE5521EA}"/>
+              </a:ext>
+            </a:extLst>
+          </p:cNvPr>
+          <p:cNvSpPr txBox="1">
+            <a:spLocks noGrp="1"/>
+          </p:cNvSpPr>
+          <p:nvPr>
+            <p:ph type="title"/>
+          </p:nvPr>
+        </p:nvSpPr>
+        <p:spPr>
+          <a:xfrm>
+            <a:off x="685800" y="408883"/>
+            <a:ext cx="10994410" cy="1090042"/>
+          </a:xfrm>
+          <a:prstGeom prst="rect">
+            <a:avLst/>
+          </a:prstGeom>
+        </p:spPr>
+        <p:txBody>
+          <a:bodyPr vert="horz" wrap="square" lIns="0" tIns="12700" rIns="0" bIns="0" rtlCol="0">
+            <a:spAutoFit/>
+          </a:bodyPr>
+          <a:lstStyle/>
+          <a:p>
+            <a:pPr marL="12700">
+              <a:lnSpc>
+                <a:spcPct val="100000"/>
+              </a:lnSpc>
+              <a:spcBef>
+                <a:spcPts val="100"/>
+              </a:spcBef>
+            </a:pPr>
+            <a:r>
+              <a:rPr lang="en-US" sz="2500" dirty="0"/>
+              <a:t>Learning outcome #5 – Bend waveguide radius vs. loss – deep</a:t>
+            </a:r>
+            <a:br>
+              <a:rPr lang="en-US" sz="2500" dirty="0"/>
+            </a:br>
+            <a:r>
+              <a:rPr lang="en-US" b="0" dirty="0"/>
+              <a:t>Find  neff_TE0 for </a:t>
+            </a:r>
+            <a:r>
+              <a:rPr lang="en-US" b="0" dirty="0" err="1"/>
+              <a:t>wvl</a:t>
+            </a:r>
+            <a:r>
+              <a:rPr lang="en-US" b="0" dirty="0"/>
+              <a:t> 1.55 µm, width 1.2 µm for R=25,50,75,100, 125,150 µm</a:t>
+            </a:r>
+            <a:br>
+              <a:rPr lang="en-US" sz="2500" dirty="0"/>
+            </a:br>
+            <a:endParaRPr lang="en-US" sz="2500" b="0" dirty="0">
+              <a:latin typeface="+mj-lt"/>
+              <a:cs typeface="Lucida Sans"/>
+            </a:endParaRPr>
+          </a:p>
+        </p:txBody>
+      </p:sp>
+      <p:pic>
+        <p:nvPicPr>
+          <p:cNvPr id="83" name="Gráfico 82">
+            <a:extLst>
+              <a:ext uri="{FF2B5EF4-FFF2-40B4-BE49-F238E27FC236}">
+                <a16:creationId xmlns:a16="http://schemas.microsoft.com/office/drawing/2014/main" id="{BBE2C89A-E812-F179-8A96-5A335CB2A3A8}"/>
+              </a:ext>
+            </a:extLst>
+          </p:cNvPr>
+          <p:cNvPicPr>
+            <a:picLocks noChangeAspect="1"/>
+          </p:cNvPicPr>
+          <p:nvPr/>
+        </p:nvPicPr>
+        <p:blipFill>
+          <a:blip r:embed="rId3">
+            <a:extLst>
+              <a:ext uri="{96DAC541-7B7A-43D3-8B79-37D633B846F1}">
+                <asvg:svgBlip xmlns:asvg="http://schemas.microsoft.com/office/drawing/2016/SVG/main" r:embed="rId4"/>
+              </a:ext>
+            </a:extLst>
+          </a:blip>
+          <a:stretch>
+            <a:fillRect/>
+          </a:stretch>
+        </p:blipFill>
+        <p:spPr>
+          <a:xfrm>
+            <a:off x="5045006" y="6356057"/>
+            <a:ext cx="6409575" cy="363174"/>
+          </a:xfrm>
+          <a:prstGeom prst="rect">
+            <a:avLst/>
+          </a:prstGeom>
+        </p:spPr>
+      </p:pic>
+      <p:sp>
+        <p:nvSpPr>
+          <p:cNvPr id="84" name="Marcador de número de diapositiva 83">
+            <a:extLst>
+              <a:ext uri="{FF2B5EF4-FFF2-40B4-BE49-F238E27FC236}">
+                <a16:creationId xmlns:a16="http://schemas.microsoft.com/office/drawing/2014/main" id="{74571273-BA80-70DE-5420-91DCEDAF3C4C}"/>
+              </a:ext>
+            </a:extLst>
+          </p:cNvPr>
+          <p:cNvSpPr>
+            <a:spLocks noGrp="1"/>
+          </p:cNvSpPr>
+          <p:nvPr>
+            <p:ph type="sldNum" sz="quarter" idx="7"/>
+          </p:nvPr>
+        </p:nvSpPr>
+        <p:spPr/>
+        <p:txBody>
+          <a:bodyPr/>
+          <a:lstStyle/>
+          <a:p>
+            <a:fld id="{B6F15528-21DE-4FAA-801E-634DDDAF4B2B}" type="slidenum">
+              <a:rPr lang="es-ES" smtClean="0"/>
+              <a:t>13</a:t>
+            </a:fld>
+            <a:endParaRPr lang="es-ES"/>
+          </a:p>
+        </p:txBody>
+      </p:sp>
+      <p:sp>
+        <p:nvSpPr>
+          <p:cNvPr id="3" name="Marcador de pie de página 2">
+            <a:extLst>
+              <a:ext uri="{FF2B5EF4-FFF2-40B4-BE49-F238E27FC236}">
+                <a16:creationId xmlns:a16="http://schemas.microsoft.com/office/drawing/2014/main" id="{01FB8752-4AC3-FBE5-E695-D52471548915}"/>
+              </a:ext>
+            </a:extLst>
+          </p:cNvPr>
+          <p:cNvSpPr>
+            <a:spLocks noGrp="1"/>
+          </p:cNvSpPr>
+          <p:nvPr>
+            <p:ph type="ftr" sz="quarter" idx="5"/>
+          </p:nvPr>
+        </p:nvSpPr>
+        <p:spPr/>
+        <p:txBody>
+          <a:bodyPr/>
+          <a:lstStyle/>
+          <a:p>
+            <a:pPr marL="12700">
+              <a:spcBef>
+                <a:spcPts val="15"/>
+              </a:spcBef>
+            </a:pPr>
+            <a:r>
+              <a:rPr lang="es-ES" spc="-5"/>
+              <a:t>LAB 1.0 WAVEGUIDES</a:t>
+            </a:r>
+            <a:endParaRPr lang="es-ES" spc="-5" dirty="0"/>
+          </a:p>
+        </p:txBody>
+      </p:sp>
+      <p:sp>
+        <p:nvSpPr>
+          <p:cNvPr id="2" name="CuadroTexto 1">
+            <a:extLst>
+              <a:ext uri="{FF2B5EF4-FFF2-40B4-BE49-F238E27FC236}">
+                <a16:creationId xmlns:a16="http://schemas.microsoft.com/office/drawing/2014/main" id="{C1DBD8C0-0238-565F-ED3C-EDDA517BD7D2}"/>
+              </a:ext>
+            </a:extLst>
+          </p:cNvPr>
+          <p:cNvSpPr txBox="1"/>
+          <p:nvPr/>
+        </p:nvSpPr>
+        <p:spPr>
+          <a:xfrm>
+            <a:off x="228600" y="1219200"/>
+            <a:ext cx="11734800" cy="5078313"/>
+          </a:xfrm>
+          <a:prstGeom prst="rect">
+            <a:avLst/>
+          </a:prstGeom>
+          <a:solidFill>
+            <a:schemeClr val="bg1">
+              <a:lumMod val="95000"/>
+            </a:schemeClr>
+          </a:solidFill>
+          <a:ln w="28575">
+            <a:solidFill>
+              <a:srgbClr val="E0700D"/>
+            </a:solidFill>
+          </a:ln>
+        </p:spPr>
+        <p:txBody>
+          <a:bodyPr wrap="square" rtlCol="0">
+            <a:spAutoFit/>
+          </a:bodyPr>
+          <a:lstStyle/>
+          <a:p>
+            <a:pPr algn="just"/>
+            <a:r>
+              <a:rPr lang="en-US" sz="1200" dirty="0">
+                <a:latin typeface="Arial" panose="020B0604020202020204" pitchFamily="34" charset="0"/>
+                <a:cs typeface="Arial" panose="020B0604020202020204" pitchFamily="34" charset="0"/>
+              </a:rPr>
+              <a:t>Comment results, which is the safe radius?, consider safe means less than 0.1 dB/90º</a:t>
+            </a:r>
+          </a:p>
+          <a:p>
+            <a:pPr algn="just"/>
+            <a:endParaRPr lang="en-US" sz="1200" dirty="0">
+              <a:latin typeface="Arial" panose="020B0604020202020204" pitchFamily="34" charset="0"/>
+              <a:cs typeface="Arial" panose="020B0604020202020204" pitchFamily="34" charset="0"/>
+            </a:endParaRPr>
+          </a:p>
+          <a:p>
+            <a:pPr algn="just"/>
+            <a:r>
+              <a:rPr lang="en-US" sz="1200" dirty="0">
+                <a:latin typeface="Arial" panose="020B0604020202020204" pitchFamily="34" charset="0"/>
+                <a:cs typeface="Arial" panose="020B0604020202020204" pitchFamily="34" charset="0"/>
+              </a:rPr>
+              <a:t>Para la </a:t>
+            </a:r>
+            <a:r>
+              <a:rPr lang="en-US" sz="1200" dirty="0" err="1">
+                <a:latin typeface="Arial" panose="020B0604020202020204" pitchFamily="34" charset="0"/>
+                <a:cs typeface="Arial" panose="020B0604020202020204" pitchFamily="34" charset="0"/>
+              </a:rPr>
+              <a:t>ejecución</a:t>
+            </a:r>
+            <a:r>
+              <a:rPr lang="en-US" sz="1200" dirty="0">
+                <a:latin typeface="Arial" panose="020B0604020202020204" pitchFamily="34" charset="0"/>
+                <a:cs typeface="Arial" panose="020B0604020202020204" pitchFamily="34" charset="0"/>
+              </a:rPr>
+              <a:t> de </a:t>
+            </a:r>
+            <a:r>
+              <a:rPr lang="en-US" sz="1200" dirty="0" err="1">
+                <a:latin typeface="Arial" panose="020B0604020202020204" pitchFamily="34" charset="0"/>
+                <a:cs typeface="Arial" panose="020B0604020202020204" pitchFamily="34" charset="0"/>
+              </a:rPr>
+              <a:t>este</a:t>
+            </a:r>
+            <a:r>
+              <a:rPr lang="en-US" sz="1200" dirty="0">
+                <a:latin typeface="Arial" panose="020B0604020202020204" pitchFamily="34" charset="0"/>
+                <a:cs typeface="Arial" panose="020B0604020202020204" pitchFamily="34" charset="0"/>
+              </a:rPr>
+              <a:t> </a:t>
+            </a:r>
+            <a:r>
+              <a:rPr lang="en-US" sz="1200" dirty="0" err="1">
+                <a:latin typeface="Arial" panose="020B0604020202020204" pitchFamily="34" charset="0"/>
+                <a:cs typeface="Arial" panose="020B0604020202020204" pitchFamily="34" charset="0"/>
+              </a:rPr>
+              <a:t>ejercicio</a:t>
+            </a:r>
+            <a:r>
+              <a:rPr lang="en-US" sz="1200" dirty="0">
+                <a:latin typeface="Arial" panose="020B0604020202020204" pitchFamily="34" charset="0"/>
+                <a:cs typeface="Arial" panose="020B0604020202020204" pitchFamily="34" charset="0"/>
+              </a:rPr>
+              <a:t>, se </a:t>
+            </a:r>
+            <a:r>
+              <a:rPr lang="en-US" sz="1200" dirty="0" err="1">
+                <a:latin typeface="Arial" panose="020B0604020202020204" pitchFamily="34" charset="0"/>
+                <a:cs typeface="Arial" panose="020B0604020202020204" pitchFamily="34" charset="0"/>
+              </a:rPr>
+              <a:t>han</a:t>
+            </a:r>
+            <a:r>
+              <a:rPr lang="en-US" sz="1200" dirty="0">
+                <a:latin typeface="Arial" panose="020B0604020202020204" pitchFamily="34" charset="0"/>
+                <a:cs typeface="Arial" panose="020B0604020202020204" pitchFamily="34" charset="0"/>
+              </a:rPr>
+              <a:t> </a:t>
+            </a:r>
+            <a:r>
+              <a:rPr lang="en-US" sz="1200" dirty="0" err="1">
+                <a:latin typeface="Arial" panose="020B0604020202020204" pitchFamily="34" charset="0"/>
+                <a:cs typeface="Arial" panose="020B0604020202020204" pitchFamily="34" charset="0"/>
+              </a:rPr>
+              <a:t>simulado</a:t>
+            </a:r>
+            <a:r>
+              <a:rPr lang="en-US" sz="1200" dirty="0">
+                <a:latin typeface="Arial" panose="020B0604020202020204" pitchFamily="34" charset="0"/>
+                <a:cs typeface="Arial" panose="020B0604020202020204" pitchFamily="34" charset="0"/>
+              </a:rPr>
+              <a:t> las </a:t>
+            </a:r>
+            <a:r>
+              <a:rPr lang="en-US" sz="1200" dirty="0" err="1">
+                <a:latin typeface="Arial" panose="020B0604020202020204" pitchFamily="34" charset="0"/>
+                <a:cs typeface="Arial" panose="020B0604020202020204" pitchFamily="34" charset="0"/>
+              </a:rPr>
+              <a:t>pérdidas</a:t>
+            </a:r>
+            <a:r>
+              <a:rPr lang="en-US" sz="1200" dirty="0">
+                <a:latin typeface="Arial" panose="020B0604020202020204" pitchFamily="34" charset="0"/>
+                <a:cs typeface="Arial" panose="020B0604020202020204" pitchFamily="34" charset="0"/>
+              </a:rPr>
+              <a:t> de la </a:t>
+            </a:r>
+            <a:r>
+              <a:rPr lang="en-US" sz="1200" dirty="0" err="1">
+                <a:latin typeface="Arial" panose="020B0604020202020204" pitchFamily="34" charset="0"/>
+                <a:cs typeface="Arial" panose="020B0604020202020204" pitchFamily="34" charset="0"/>
+              </a:rPr>
+              <a:t>guía</a:t>
+            </a:r>
+            <a:r>
+              <a:rPr lang="en-US" sz="1200" dirty="0">
+                <a:latin typeface="Arial" panose="020B0604020202020204" pitchFamily="34" charset="0"/>
+                <a:cs typeface="Arial" panose="020B0604020202020204" pitchFamily="34" charset="0"/>
+              </a:rPr>
+              <a:t> de </a:t>
+            </a:r>
+            <a:r>
+              <a:rPr lang="en-US" sz="1200" dirty="0" err="1">
+                <a:latin typeface="Arial" panose="020B0604020202020204" pitchFamily="34" charset="0"/>
+                <a:cs typeface="Arial" panose="020B0604020202020204" pitchFamily="34" charset="0"/>
+              </a:rPr>
+              <a:t>onda</a:t>
+            </a:r>
+            <a:r>
+              <a:rPr lang="en-US" sz="1200" dirty="0">
+                <a:latin typeface="Arial" panose="020B0604020202020204" pitchFamily="34" charset="0"/>
+                <a:cs typeface="Arial" panose="020B0604020202020204" pitchFamily="34" charset="0"/>
+              </a:rPr>
+              <a:t> </a:t>
+            </a:r>
+            <a:r>
+              <a:rPr lang="en-US" sz="1200" dirty="0" err="1">
+                <a:latin typeface="Arial" panose="020B0604020202020204" pitchFamily="34" charset="0"/>
+                <a:cs typeface="Arial" panose="020B0604020202020204" pitchFamily="34" charset="0"/>
+              </a:rPr>
+              <a:t>en</a:t>
+            </a:r>
+            <a:r>
+              <a:rPr lang="en-US" sz="1200" dirty="0">
+                <a:latin typeface="Arial" panose="020B0604020202020204" pitchFamily="34" charset="0"/>
+                <a:cs typeface="Arial" panose="020B0604020202020204" pitchFamily="34" charset="0"/>
+              </a:rPr>
+              <a:t> </a:t>
+            </a:r>
+            <a:r>
+              <a:rPr lang="en-US" sz="1200" dirty="0" err="1">
+                <a:latin typeface="Arial" panose="020B0604020202020204" pitchFamily="34" charset="0"/>
+                <a:cs typeface="Arial" panose="020B0604020202020204" pitchFamily="34" charset="0"/>
+              </a:rPr>
+              <a:t>función</a:t>
+            </a:r>
+            <a:r>
+              <a:rPr lang="en-US" sz="1200" dirty="0">
+                <a:latin typeface="Arial" panose="020B0604020202020204" pitchFamily="34" charset="0"/>
+                <a:cs typeface="Arial" panose="020B0604020202020204" pitchFamily="34" charset="0"/>
+              </a:rPr>
+              <a:t> del radio de </a:t>
+            </a:r>
+            <a:r>
+              <a:rPr lang="en-US" sz="1200" dirty="0" err="1">
+                <a:latin typeface="Arial" panose="020B0604020202020204" pitchFamily="34" charset="0"/>
+                <a:cs typeface="Arial" panose="020B0604020202020204" pitchFamily="34" charset="0"/>
+              </a:rPr>
+              <a:t>curvatura</a:t>
+            </a:r>
+            <a:r>
+              <a:rPr lang="en-US" sz="1200" dirty="0">
+                <a:latin typeface="Arial" panose="020B0604020202020204" pitchFamily="34" charset="0"/>
+                <a:cs typeface="Arial" panose="020B0604020202020204" pitchFamily="34" charset="0"/>
+              </a:rPr>
+              <a:t>, </a:t>
+            </a:r>
+            <a:r>
+              <a:rPr lang="en-US" sz="1200" dirty="0" err="1">
+                <a:latin typeface="Arial" panose="020B0604020202020204" pitchFamily="34" charset="0"/>
+                <a:cs typeface="Arial" panose="020B0604020202020204" pitchFamily="34" charset="0"/>
+              </a:rPr>
+              <a:t>el</a:t>
+            </a:r>
+            <a:r>
+              <a:rPr lang="en-US" sz="1200" dirty="0">
+                <a:latin typeface="Arial" panose="020B0604020202020204" pitchFamily="34" charset="0"/>
+                <a:cs typeface="Arial" panose="020B0604020202020204" pitchFamily="34" charset="0"/>
+              </a:rPr>
+              <a:t> </a:t>
+            </a:r>
+            <a:r>
+              <a:rPr lang="en-US" sz="1200" dirty="0" err="1">
+                <a:latin typeface="Arial" panose="020B0604020202020204" pitchFamily="34" charset="0"/>
+                <a:cs typeface="Arial" panose="020B0604020202020204" pitchFamily="34" charset="0"/>
+              </a:rPr>
+              <a:t>cual</a:t>
+            </a:r>
+            <a:r>
+              <a:rPr lang="en-US" sz="1200" dirty="0">
+                <a:latin typeface="Arial" panose="020B0604020202020204" pitchFamily="34" charset="0"/>
+                <a:cs typeface="Arial" panose="020B0604020202020204" pitchFamily="34" charset="0"/>
+              </a:rPr>
+              <a:t> </a:t>
+            </a:r>
+            <a:r>
+              <a:rPr lang="en-US" sz="1200" dirty="0" err="1">
+                <a:latin typeface="Arial" panose="020B0604020202020204" pitchFamily="34" charset="0"/>
+                <a:cs typeface="Arial" panose="020B0604020202020204" pitchFamily="34" charset="0"/>
+              </a:rPr>
+              <a:t>en</a:t>
+            </a:r>
+            <a:r>
+              <a:rPr lang="en-US" sz="1200" dirty="0">
+                <a:latin typeface="Arial" panose="020B0604020202020204" pitchFamily="34" charset="0"/>
+                <a:cs typeface="Arial" panose="020B0604020202020204" pitchFamily="34" charset="0"/>
+              </a:rPr>
+              <a:t> </a:t>
+            </a:r>
+            <a:r>
+              <a:rPr lang="en-US" sz="1200" dirty="0" err="1">
+                <a:latin typeface="Arial" panose="020B0604020202020204" pitchFamily="34" charset="0"/>
+                <a:cs typeface="Arial" panose="020B0604020202020204" pitchFamily="34" charset="0"/>
+              </a:rPr>
+              <a:t>este</a:t>
+            </a:r>
+            <a:r>
+              <a:rPr lang="en-US" sz="1200" dirty="0">
+                <a:latin typeface="Arial" panose="020B0604020202020204" pitchFamily="34" charset="0"/>
+                <a:cs typeface="Arial" panose="020B0604020202020204" pitchFamily="34" charset="0"/>
+              </a:rPr>
+              <a:t> </a:t>
+            </a:r>
+            <a:r>
+              <a:rPr lang="en-US" sz="1200" dirty="0" err="1">
+                <a:latin typeface="Arial" panose="020B0604020202020204" pitchFamily="34" charset="0"/>
+                <a:cs typeface="Arial" panose="020B0604020202020204" pitchFamily="34" charset="0"/>
+              </a:rPr>
+              <a:t>caso</a:t>
+            </a:r>
+            <a:r>
+              <a:rPr lang="en-US" sz="1200" dirty="0">
+                <a:latin typeface="Arial" panose="020B0604020202020204" pitchFamily="34" charset="0"/>
+                <a:cs typeface="Arial" panose="020B0604020202020204" pitchFamily="34" charset="0"/>
+              </a:rPr>
+              <a:t> se ha </a:t>
+            </a:r>
+            <a:r>
+              <a:rPr lang="en-US" sz="1200" dirty="0" err="1">
+                <a:latin typeface="Arial" panose="020B0604020202020204" pitchFamily="34" charset="0"/>
+                <a:cs typeface="Arial" panose="020B0604020202020204" pitchFamily="34" charset="0"/>
+              </a:rPr>
+              <a:t>simulado</a:t>
+            </a:r>
+            <a:r>
+              <a:rPr lang="en-US" sz="1200" dirty="0">
+                <a:latin typeface="Arial" panose="020B0604020202020204" pitchFamily="34" charset="0"/>
+                <a:cs typeface="Arial" panose="020B0604020202020204" pitchFamily="34" charset="0"/>
+              </a:rPr>
+              <a:t> </a:t>
+            </a:r>
+            <a:r>
+              <a:rPr lang="en-US" sz="1200" dirty="0" err="1">
+                <a:latin typeface="Arial" panose="020B0604020202020204" pitchFamily="34" charset="0"/>
+                <a:cs typeface="Arial" panose="020B0604020202020204" pitchFamily="34" charset="0"/>
+              </a:rPr>
+              <a:t>en</a:t>
+            </a:r>
+            <a:r>
+              <a:rPr lang="en-US" sz="1200" dirty="0">
+                <a:latin typeface="Arial" panose="020B0604020202020204" pitchFamily="34" charset="0"/>
+                <a:cs typeface="Arial" panose="020B0604020202020204" pitchFamily="34" charset="0"/>
+              </a:rPr>
+              <a:t> un </a:t>
+            </a:r>
+            <a:r>
+              <a:rPr lang="en-US" sz="1200" dirty="0" err="1">
+                <a:latin typeface="Arial" panose="020B0604020202020204" pitchFamily="34" charset="0"/>
+                <a:cs typeface="Arial" panose="020B0604020202020204" pitchFamily="34" charset="0"/>
+              </a:rPr>
+              <a:t>rango</a:t>
+            </a:r>
+            <a:r>
+              <a:rPr lang="en-US" sz="1200" dirty="0">
+                <a:latin typeface="Arial" panose="020B0604020202020204" pitchFamily="34" charset="0"/>
+                <a:cs typeface="Arial" panose="020B0604020202020204" pitchFamily="34" charset="0"/>
+              </a:rPr>
+              <a:t> de 25 a 150 um. Cabe </a:t>
+            </a:r>
+            <a:r>
+              <a:rPr lang="en-US" sz="1200" dirty="0" err="1">
+                <a:latin typeface="Arial" panose="020B0604020202020204" pitchFamily="34" charset="0"/>
+                <a:cs typeface="Arial" panose="020B0604020202020204" pitchFamily="34" charset="0"/>
+              </a:rPr>
+              <a:t>mencionar</a:t>
+            </a:r>
+            <a:r>
+              <a:rPr lang="en-US" sz="1200" dirty="0">
+                <a:latin typeface="Arial" panose="020B0604020202020204" pitchFamily="34" charset="0"/>
+                <a:cs typeface="Arial" panose="020B0604020202020204" pitchFamily="34" charset="0"/>
+              </a:rPr>
+              <a:t> </a:t>
+            </a:r>
+            <a:r>
+              <a:rPr lang="en-US" sz="1200" dirty="0" err="1">
+                <a:latin typeface="Arial" panose="020B0604020202020204" pitchFamily="34" charset="0"/>
+                <a:cs typeface="Arial" panose="020B0604020202020204" pitchFamily="34" charset="0"/>
+              </a:rPr>
+              <a:t>que</a:t>
+            </a:r>
+            <a:r>
+              <a:rPr lang="en-US" sz="1200" dirty="0">
+                <a:latin typeface="Arial" panose="020B0604020202020204" pitchFamily="34" charset="0"/>
+                <a:cs typeface="Arial" panose="020B0604020202020204" pitchFamily="34" charset="0"/>
+              </a:rPr>
+              <a:t> </a:t>
+            </a:r>
+            <a:r>
+              <a:rPr lang="en-US" sz="1200" dirty="0" err="1">
+                <a:latin typeface="Arial" panose="020B0604020202020204" pitchFamily="34" charset="0"/>
+                <a:cs typeface="Arial" panose="020B0604020202020204" pitchFamily="34" charset="0"/>
+              </a:rPr>
+              <a:t>dichas</a:t>
+            </a:r>
+            <a:r>
+              <a:rPr lang="en-US" sz="1200" dirty="0">
+                <a:latin typeface="Arial" panose="020B0604020202020204" pitchFamily="34" charset="0"/>
+                <a:cs typeface="Arial" panose="020B0604020202020204" pitchFamily="34" charset="0"/>
+              </a:rPr>
+              <a:t> </a:t>
+            </a:r>
+            <a:r>
+              <a:rPr lang="en-US" sz="1200" dirty="0" err="1">
+                <a:latin typeface="Arial" panose="020B0604020202020204" pitchFamily="34" charset="0"/>
+                <a:cs typeface="Arial" panose="020B0604020202020204" pitchFamily="34" charset="0"/>
+              </a:rPr>
+              <a:t>pérdidas</a:t>
+            </a:r>
+            <a:r>
+              <a:rPr lang="en-US" sz="1200" dirty="0">
+                <a:latin typeface="Arial" panose="020B0604020202020204" pitchFamily="34" charset="0"/>
+                <a:cs typeface="Arial" panose="020B0604020202020204" pitchFamily="34" charset="0"/>
+              </a:rPr>
+              <a:t> </a:t>
+            </a:r>
+            <a:r>
+              <a:rPr lang="en-US" sz="1200" dirty="0" err="1">
+                <a:latin typeface="Arial" panose="020B0604020202020204" pitchFamily="34" charset="0"/>
+                <a:cs typeface="Arial" panose="020B0604020202020204" pitchFamily="34" charset="0"/>
+              </a:rPr>
+              <a:t>resultan</a:t>
+            </a:r>
+            <a:r>
+              <a:rPr lang="en-US" sz="1200" dirty="0">
+                <a:latin typeface="Arial" panose="020B0604020202020204" pitchFamily="34" charset="0"/>
+                <a:cs typeface="Arial" panose="020B0604020202020204" pitchFamily="34" charset="0"/>
+              </a:rPr>
+              <a:t> de la </a:t>
+            </a:r>
+            <a:r>
+              <a:rPr lang="en-US" sz="1200" dirty="0" err="1">
+                <a:latin typeface="Arial" panose="020B0604020202020204" pitchFamily="34" charset="0"/>
+                <a:cs typeface="Arial" panose="020B0604020202020204" pitchFamily="34" charset="0"/>
+              </a:rPr>
+              <a:t>suma</a:t>
+            </a:r>
+            <a:r>
+              <a:rPr lang="en-US" sz="1200" dirty="0">
+                <a:latin typeface="Arial" panose="020B0604020202020204" pitchFamily="34" charset="0"/>
+                <a:cs typeface="Arial" panose="020B0604020202020204" pitchFamily="34" charset="0"/>
+              </a:rPr>
+              <a:t> de las </a:t>
+            </a:r>
+            <a:r>
+              <a:rPr lang="en-US" sz="1200" dirty="0" err="1">
+                <a:latin typeface="Arial" panose="020B0604020202020204" pitchFamily="34" charset="0"/>
+                <a:cs typeface="Arial" panose="020B0604020202020204" pitchFamily="34" charset="0"/>
+              </a:rPr>
+              <a:t>pérdidas</a:t>
+            </a:r>
+            <a:r>
+              <a:rPr lang="en-US" sz="1200" dirty="0">
+                <a:latin typeface="Arial" panose="020B0604020202020204" pitchFamily="34" charset="0"/>
+                <a:cs typeface="Arial" panose="020B0604020202020204" pitchFamily="34" charset="0"/>
+              </a:rPr>
+              <a:t> </a:t>
+            </a:r>
+            <a:r>
+              <a:rPr lang="en-US" sz="1200" dirty="0" err="1">
+                <a:latin typeface="Arial" panose="020B0604020202020204" pitchFamily="34" charset="0"/>
+                <a:cs typeface="Arial" panose="020B0604020202020204" pitchFamily="34" charset="0"/>
+              </a:rPr>
+              <a:t>por</a:t>
+            </a:r>
+            <a:r>
+              <a:rPr lang="en-US" sz="1200" dirty="0">
+                <a:latin typeface="Arial" panose="020B0604020202020204" pitchFamily="34" charset="0"/>
+                <a:cs typeface="Arial" panose="020B0604020202020204" pitchFamily="34" charset="0"/>
+              </a:rPr>
+              <a:t> </a:t>
+            </a:r>
+            <a:r>
+              <a:rPr lang="en-US" sz="1200" dirty="0" err="1">
+                <a:latin typeface="Arial" panose="020B0604020202020204" pitchFamily="34" charset="0"/>
+                <a:cs typeface="Arial" panose="020B0604020202020204" pitchFamily="34" charset="0"/>
+              </a:rPr>
+              <a:t>el</a:t>
+            </a:r>
+            <a:r>
+              <a:rPr lang="en-US" sz="1200" dirty="0">
+                <a:latin typeface="Arial" panose="020B0604020202020204" pitchFamily="34" charset="0"/>
+                <a:cs typeface="Arial" panose="020B0604020202020204" pitchFamily="34" charset="0"/>
+              </a:rPr>
+              <a:t> modo y las </a:t>
+            </a:r>
+            <a:r>
+              <a:rPr lang="en-US" sz="1200" dirty="0" err="1">
+                <a:latin typeface="Arial" panose="020B0604020202020204" pitchFamily="34" charset="0"/>
+                <a:cs typeface="Arial" panose="020B0604020202020204" pitchFamily="34" charset="0"/>
+              </a:rPr>
+              <a:t>pérdidas</a:t>
+            </a:r>
+            <a:r>
+              <a:rPr lang="en-US" sz="1200" dirty="0">
+                <a:latin typeface="Arial" panose="020B0604020202020204" pitchFamily="34" charset="0"/>
+                <a:cs typeface="Arial" panose="020B0604020202020204" pitchFamily="34" charset="0"/>
+              </a:rPr>
+              <a:t> de </a:t>
+            </a:r>
+            <a:r>
+              <a:rPr lang="en-US" sz="1200" dirty="0" err="1">
+                <a:latin typeface="Arial" panose="020B0604020202020204" pitchFamily="34" charset="0"/>
+                <a:cs typeface="Arial" panose="020B0604020202020204" pitchFamily="34" charset="0"/>
+              </a:rPr>
+              <a:t>propagacion</a:t>
+            </a:r>
+            <a:r>
+              <a:rPr lang="en-US" sz="1200" dirty="0">
+                <a:latin typeface="Arial" panose="020B0604020202020204" pitchFamily="34" charset="0"/>
+                <a:cs typeface="Arial" panose="020B0604020202020204" pitchFamily="34" charset="0"/>
+              </a:rPr>
+              <a:t>. Las de </a:t>
+            </a:r>
+            <a:r>
+              <a:rPr lang="en-US" sz="1200" dirty="0" err="1">
+                <a:latin typeface="Arial" panose="020B0604020202020204" pitchFamily="34" charset="0"/>
+                <a:cs typeface="Arial" panose="020B0604020202020204" pitchFamily="34" charset="0"/>
+              </a:rPr>
+              <a:t>radiación</a:t>
+            </a:r>
+            <a:r>
+              <a:rPr lang="en-US" sz="1200" dirty="0">
+                <a:latin typeface="Arial" panose="020B0604020202020204" pitchFamily="34" charset="0"/>
+                <a:cs typeface="Arial" panose="020B0604020202020204" pitchFamily="34" charset="0"/>
+              </a:rPr>
+              <a:t> no se </a:t>
+            </a:r>
+            <a:r>
+              <a:rPr lang="en-US" sz="1200" dirty="0" err="1">
+                <a:latin typeface="Arial" panose="020B0604020202020204" pitchFamily="34" charset="0"/>
+                <a:cs typeface="Arial" panose="020B0604020202020204" pitchFamily="34" charset="0"/>
+              </a:rPr>
+              <a:t>han</a:t>
+            </a:r>
+            <a:r>
+              <a:rPr lang="en-US" sz="1200" dirty="0">
+                <a:latin typeface="Arial" panose="020B0604020202020204" pitchFamily="34" charset="0"/>
+                <a:cs typeface="Arial" panose="020B0604020202020204" pitchFamily="34" charset="0"/>
+              </a:rPr>
+              <a:t> </a:t>
+            </a:r>
+            <a:r>
+              <a:rPr lang="en-US" sz="1200" dirty="0" err="1">
+                <a:latin typeface="Arial" panose="020B0604020202020204" pitchFamily="34" charset="0"/>
+                <a:cs typeface="Arial" panose="020B0604020202020204" pitchFamily="34" charset="0"/>
+              </a:rPr>
+              <a:t>tenido</a:t>
+            </a:r>
+            <a:r>
+              <a:rPr lang="en-US" sz="1200" dirty="0">
+                <a:latin typeface="Arial" panose="020B0604020202020204" pitchFamily="34" charset="0"/>
+                <a:cs typeface="Arial" panose="020B0604020202020204" pitchFamily="34" charset="0"/>
+              </a:rPr>
+              <a:t> </a:t>
+            </a:r>
+            <a:r>
+              <a:rPr lang="en-US" sz="1200" dirty="0" err="1">
+                <a:latin typeface="Arial" panose="020B0604020202020204" pitchFamily="34" charset="0"/>
+                <a:cs typeface="Arial" panose="020B0604020202020204" pitchFamily="34" charset="0"/>
+              </a:rPr>
+              <a:t>en</a:t>
+            </a:r>
+            <a:r>
+              <a:rPr lang="en-US" sz="1200" dirty="0">
+                <a:latin typeface="Arial" panose="020B0604020202020204" pitchFamily="34" charset="0"/>
+                <a:cs typeface="Arial" panose="020B0604020202020204" pitchFamily="34" charset="0"/>
+              </a:rPr>
+              <a:t> </a:t>
+            </a:r>
+            <a:r>
+              <a:rPr lang="en-US" sz="1200" dirty="0" err="1">
+                <a:latin typeface="Arial" panose="020B0604020202020204" pitchFamily="34" charset="0"/>
+                <a:cs typeface="Arial" panose="020B0604020202020204" pitchFamily="34" charset="0"/>
+              </a:rPr>
+              <a:t>cuenta</a:t>
+            </a:r>
+            <a:r>
+              <a:rPr lang="en-US" sz="1200" dirty="0">
+                <a:latin typeface="Arial" panose="020B0604020202020204" pitchFamily="34" charset="0"/>
+                <a:cs typeface="Arial" panose="020B0604020202020204" pitchFamily="34" charset="0"/>
+              </a:rPr>
+              <a:t>, </a:t>
+            </a:r>
+            <a:r>
+              <a:rPr lang="en-US" sz="1200" dirty="0" err="1">
+                <a:latin typeface="Arial" panose="020B0604020202020204" pitchFamily="34" charset="0"/>
+                <a:cs typeface="Arial" panose="020B0604020202020204" pitchFamily="34" charset="0"/>
+              </a:rPr>
+              <a:t>debido</a:t>
+            </a:r>
+            <a:r>
+              <a:rPr lang="en-US" sz="1200" dirty="0">
+                <a:latin typeface="Arial" panose="020B0604020202020204" pitchFamily="34" charset="0"/>
+                <a:cs typeface="Arial" panose="020B0604020202020204" pitchFamily="34" charset="0"/>
+              </a:rPr>
+              <a:t> a </a:t>
+            </a:r>
+            <a:r>
+              <a:rPr lang="en-US" sz="1200" dirty="0" err="1">
+                <a:latin typeface="Arial" panose="020B0604020202020204" pitchFamily="34" charset="0"/>
+                <a:cs typeface="Arial" panose="020B0604020202020204" pitchFamily="34" charset="0"/>
+              </a:rPr>
+              <a:t>que</a:t>
+            </a:r>
+            <a:r>
+              <a:rPr lang="en-US" sz="1200" dirty="0">
+                <a:latin typeface="Arial" panose="020B0604020202020204" pitchFamily="34" charset="0"/>
+                <a:cs typeface="Arial" panose="020B0604020202020204" pitchFamily="34" charset="0"/>
+              </a:rPr>
+              <a:t> para </a:t>
+            </a:r>
+            <a:r>
+              <a:rPr lang="en-US" sz="1200" dirty="0" err="1">
+                <a:latin typeface="Arial" panose="020B0604020202020204" pitchFamily="34" charset="0"/>
+                <a:cs typeface="Arial" panose="020B0604020202020204" pitchFamily="34" charset="0"/>
+              </a:rPr>
+              <a:t>esta</a:t>
+            </a:r>
+            <a:r>
+              <a:rPr lang="en-US" sz="1200" dirty="0">
+                <a:latin typeface="Arial" panose="020B0604020202020204" pitchFamily="34" charset="0"/>
+                <a:cs typeface="Arial" panose="020B0604020202020204" pitchFamily="34" charset="0"/>
+              </a:rPr>
+              <a:t> </a:t>
+            </a:r>
+            <a:r>
+              <a:rPr lang="en-US" sz="1200" dirty="0" err="1">
+                <a:latin typeface="Arial" panose="020B0604020202020204" pitchFamily="34" charset="0"/>
+                <a:cs typeface="Arial" panose="020B0604020202020204" pitchFamily="34" charset="0"/>
+              </a:rPr>
+              <a:t>guía</a:t>
+            </a:r>
+            <a:r>
+              <a:rPr lang="en-US" sz="1200" dirty="0">
+                <a:latin typeface="Arial" panose="020B0604020202020204" pitchFamily="34" charset="0"/>
+                <a:cs typeface="Arial" panose="020B0604020202020204" pitchFamily="34" charset="0"/>
+              </a:rPr>
+              <a:t> de </a:t>
+            </a:r>
+            <a:r>
+              <a:rPr lang="en-US" sz="1200" dirty="0" err="1">
+                <a:latin typeface="Arial" panose="020B0604020202020204" pitchFamily="34" charset="0"/>
+                <a:cs typeface="Arial" panose="020B0604020202020204" pitchFamily="34" charset="0"/>
+              </a:rPr>
+              <a:t>onda</a:t>
+            </a:r>
+            <a:r>
+              <a:rPr lang="en-US" sz="1200" dirty="0">
+                <a:latin typeface="Arial" panose="020B0604020202020204" pitchFamily="34" charset="0"/>
+                <a:cs typeface="Arial" panose="020B0604020202020204" pitchFamily="34" charset="0"/>
+              </a:rPr>
+              <a:t> de </a:t>
+            </a:r>
+            <a:r>
+              <a:rPr lang="en-US" sz="1200" dirty="0" err="1">
+                <a:latin typeface="Arial" panose="020B0604020202020204" pitchFamily="34" charset="0"/>
+                <a:cs typeface="Arial" panose="020B0604020202020204" pitchFamily="34" charset="0"/>
+              </a:rPr>
+              <a:t>nitruro</a:t>
+            </a:r>
+            <a:r>
+              <a:rPr lang="en-US" sz="1200" dirty="0">
+                <a:latin typeface="Arial" panose="020B0604020202020204" pitchFamily="34" charset="0"/>
+                <a:cs typeface="Arial" panose="020B0604020202020204" pitchFamily="34" charset="0"/>
+              </a:rPr>
+              <a:t> de </a:t>
+            </a:r>
+            <a:r>
+              <a:rPr lang="en-US" sz="1200" dirty="0" err="1">
+                <a:latin typeface="Arial" panose="020B0604020202020204" pitchFamily="34" charset="0"/>
+                <a:cs typeface="Arial" panose="020B0604020202020204" pitchFamily="34" charset="0"/>
+              </a:rPr>
+              <a:t>silicio</a:t>
+            </a:r>
+            <a:r>
+              <a:rPr lang="en-US" sz="1200" dirty="0">
+                <a:latin typeface="Arial" panose="020B0604020202020204" pitchFamily="34" charset="0"/>
+                <a:cs typeface="Arial" panose="020B0604020202020204" pitchFamily="34" charset="0"/>
+              </a:rPr>
+              <a:t>, </a:t>
+            </a:r>
+            <a:r>
+              <a:rPr lang="en-US" sz="1200" dirty="0" err="1">
+                <a:latin typeface="Arial" panose="020B0604020202020204" pitchFamily="34" charset="0"/>
+                <a:cs typeface="Arial" panose="020B0604020202020204" pitchFamily="34" charset="0"/>
+              </a:rPr>
+              <a:t>dichas</a:t>
+            </a:r>
+            <a:r>
+              <a:rPr lang="en-US" sz="1200" dirty="0">
+                <a:latin typeface="Arial" panose="020B0604020202020204" pitchFamily="34" charset="0"/>
+                <a:cs typeface="Arial" panose="020B0604020202020204" pitchFamily="34" charset="0"/>
+              </a:rPr>
+              <a:t> </a:t>
+            </a:r>
+            <a:r>
+              <a:rPr lang="en-US" sz="1200" dirty="0" err="1">
+                <a:latin typeface="Arial" panose="020B0604020202020204" pitchFamily="34" charset="0"/>
+                <a:cs typeface="Arial" panose="020B0604020202020204" pitchFamily="34" charset="0"/>
+              </a:rPr>
+              <a:t>pérdidas</a:t>
+            </a:r>
+            <a:r>
+              <a:rPr lang="en-US" sz="1200" dirty="0">
+                <a:latin typeface="Arial" panose="020B0604020202020204" pitchFamily="34" charset="0"/>
+                <a:cs typeface="Arial" panose="020B0604020202020204" pitchFamily="34" charset="0"/>
+              </a:rPr>
+              <a:t> de </a:t>
+            </a:r>
+            <a:r>
+              <a:rPr lang="en-US" sz="1200" dirty="0" err="1">
+                <a:latin typeface="Arial" panose="020B0604020202020204" pitchFamily="34" charset="0"/>
+                <a:cs typeface="Arial" panose="020B0604020202020204" pitchFamily="34" charset="0"/>
+              </a:rPr>
+              <a:t>radiación</a:t>
+            </a:r>
+            <a:r>
+              <a:rPr lang="en-US" sz="1200" dirty="0">
+                <a:latin typeface="Arial" panose="020B0604020202020204" pitchFamily="34" charset="0"/>
+                <a:cs typeface="Arial" panose="020B0604020202020204" pitchFamily="34" charset="0"/>
+              </a:rPr>
+              <a:t> </a:t>
+            </a:r>
+            <a:r>
+              <a:rPr lang="en-US" sz="1200" dirty="0" err="1">
+                <a:latin typeface="Arial" panose="020B0604020202020204" pitchFamily="34" charset="0"/>
+                <a:cs typeface="Arial" panose="020B0604020202020204" pitchFamily="34" charset="0"/>
+              </a:rPr>
+              <a:t>resultan</a:t>
+            </a:r>
+            <a:r>
+              <a:rPr lang="en-US" sz="1200" dirty="0">
+                <a:latin typeface="Arial" panose="020B0604020202020204" pitchFamily="34" charset="0"/>
+                <a:cs typeface="Arial" panose="020B0604020202020204" pitchFamily="34" charset="0"/>
+              </a:rPr>
+              <a:t> </a:t>
+            </a:r>
+            <a:r>
+              <a:rPr lang="en-US" sz="1200" dirty="0" err="1">
+                <a:latin typeface="Arial" panose="020B0604020202020204" pitchFamily="34" charset="0"/>
+                <a:cs typeface="Arial" panose="020B0604020202020204" pitchFamily="34" charset="0"/>
+              </a:rPr>
+              <a:t>muy</a:t>
+            </a:r>
+            <a:r>
+              <a:rPr lang="en-US" sz="1200" dirty="0">
+                <a:latin typeface="Arial" panose="020B0604020202020204" pitchFamily="34" charset="0"/>
+                <a:cs typeface="Arial" panose="020B0604020202020204" pitchFamily="34" charset="0"/>
+              </a:rPr>
+              <a:t> </a:t>
+            </a:r>
+            <a:r>
+              <a:rPr lang="en-US" sz="1200" dirty="0" err="1">
+                <a:latin typeface="Arial" panose="020B0604020202020204" pitchFamily="34" charset="0"/>
+                <a:cs typeface="Arial" panose="020B0604020202020204" pitchFamily="34" charset="0"/>
+              </a:rPr>
+              <a:t>pequeñas</a:t>
+            </a:r>
+            <a:r>
+              <a:rPr lang="en-US" sz="1200" dirty="0">
+                <a:latin typeface="Arial" panose="020B0604020202020204" pitchFamily="34" charset="0"/>
+                <a:cs typeface="Arial" panose="020B0604020202020204" pitchFamily="34" charset="0"/>
+              </a:rPr>
+              <a:t> y </a:t>
+            </a:r>
+            <a:r>
+              <a:rPr lang="en-US" sz="1200" dirty="0" err="1">
+                <a:latin typeface="Arial" panose="020B0604020202020204" pitchFamily="34" charset="0"/>
+                <a:cs typeface="Arial" panose="020B0604020202020204" pitchFamily="34" charset="0"/>
+              </a:rPr>
+              <a:t>por</a:t>
+            </a:r>
+            <a:r>
+              <a:rPr lang="en-US" sz="1200" dirty="0">
+                <a:latin typeface="Arial" panose="020B0604020202020204" pitchFamily="34" charset="0"/>
+                <a:cs typeface="Arial" panose="020B0604020202020204" pitchFamily="34" charset="0"/>
+              </a:rPr>
+              <a:t> tanto no es </a:t>
+            </a:r>
+            <a:r>
+              <a:rPr lang="en-US" sz="1200" dirty="0" err="1">
+                <a:latin typeface="Arial" panose="020B0604020202020204" pitchFamily="34" charset="0"/>
+                <a:cs typeface="Arial" panose="020B0604020202020204" pitchFamily="34" charset="0"/>
+              </a:rPr>
+              <a:t>necesario</a:t>
+            </a:r>
+            <a:r>
+              <a:rPr lang="en-US" sz="1200" dirty="0">
+                <a:latin typeface="Arial" panose="020B0604020202020204" pitchFamily="34" charset="0"/>
+                <a:cs typeface="Arial" panose="020B0604020202020204" pitchFamily="34" charset="0"/>
+              </a:rPr>
+              <a:t> </a:t>
+            </a:r>
+            <a:r>
+              <a:rPr lang="en-US" sz="1200" dirty="0" err="1">
+                <a:latin typeface="Arial" panose="020B0604020202020204" pitchFamily="34" charset="0"/>
+                <a:cs typeface="Arial" panose="020B0604020202020204" pitchFamily="34" charset="0"/>
+              </a:rPr>
+              <a:t>su</a:t>
+            </a:r>
+            <a:r>
+              <a:rPr lang="en-US" sz="1200" dirty="0">
+                <a:latin typeface="Arial" panose="020B0604020202020204" pitchFamily="34" charset="0"/>
+                <a:cs typeface="Arial" panose="020B0604020202020204" pitchFamily="34" charset="0"/>
+              </a:rPr>
+              <a:t> </a:t>
+            </a:r>
+            <a:r>
+              <a:rPr lang="en-US" sz="1200" dirty="0" err="1">
+                <a:latin typeface="Arial" panose="020B0604020202020204" pitchFamily="34" charset="0"/>
+                <a:cs typeface="Arial" panose="020B0604020202020204" pitchFamily="34" charset="0"/>
+              </a:rPr>
+              <a:t>estudio</a:t>
+            </a:r>
+            <a:r>
+              <a:rPr lang="en-US" sz="1200" dirty="0">
+                <a:latin typeface="Arial" panose="020B0604020202020204" pitchFamily="34" charset="0"/>
+                <a:cs typeface="Arial" panose="020B0604020202020204" pitchFamily="34" charset="0"/>
+              </a:rPr>
+              <a:t>.</a:t>
+            </a:r>
+          </a:p>
+          <a:p>
+            <a:pPr algn="just"/>
+            <a:endParaRPr lang="en-US" sz="1200" dirty="0">
+              <a:latin typeface="Arial" panose="020B0604020202020204" pitchFamily="34" charset="0"/>
+              <a:cs typeface="Arial" panose="020B0604020202020204" pitchFamily="34" charset="0"/>
+            </a:endParaRPr>
+          </a:p>
+          <a:p>
+            <a:pPr algn="just"/>
+            <a:r>
+              <a:rPr lang="en-US" sz="1200" dirty="0">
+                <a:latin typeface="Arial" panose="020B0604020202020204" pitchFamily="34" charset="0"/>
+                <a:cs typeface="Arial" panose="020B0604020202020204" pitchFamily="34" charset="0"/>
+              </a:rPr>
+              <a:t>En la </a:t>
+            </a:r>
+            <a:r>
+              <a:rPr lang="en-US" sz="1200" dirty="0" err="1">
+                <a:latin typeface="Arial" panose="020B0604020202020204" pitchFamily="34" charset="0"/>
+                <a:cs typeface="Arial" panose="020B0604020202020204" pitchFamily="34" charset="0"/>
+              </a:rPr>
+              <a:t>primera</a:t>
+            </a:r>
+            <a:r>
+              <a:rPr lang="en-US" sz="1200" dirty="0">
+                <a:latin typeface="Arial" panose="020B0604020202020204" pitchFamily="34" charset="0"/>
+                <a:cs typeface="Arial" panose="020B0604020202020204" pitchFamily="34" charset="0"/>
+              </a:rPr>
+              <a:t> </a:t>
+            </a:r>
+            <a:r>
+              <a:rPr lang="en-US" sz="1200" dirty="0" err="1">
+                <a:latin typeface="Arial" panose="020B0604020202020204" pitchFamily="34" charset="0"/>
+                <a:cs typeface="Arial" panose="020B0604020202020204" pitchFamily="34" charset="0"/>
+              </a:rPr>
+              <a:t>gráfica</a:t>
+            </a:r>
+            <a:r>
+              <a:rPr lang="en-US" sz="1200" dirty="0">
+                <a:latin typeface="Arial" panose="020B0604020202020204" pitchFamily="34" charset="0"/>
+                <a:cs typeface="Arial" panose="020B0604020202020204" pitchFamily="34" charset="0"/>
+              </a:rPr>
+              <a:t> </a:t>
+            </a:r>
+            <a:r>
+              <a:rPr lang="en-US" sz="1200" dirty="0" err="1">
+                <a:latin typeface="Arial" panose="020B0604020202020204" pitchFamily="34" charset="0"/>
+                <a:cs typeface="Arial" panose="020B0604020202020204" pitchFamily="34" charset="0"/>
+              </a:rPr>
+              <a:t>observamos</a:t>
+            </a:r>
+            <a:r>
+              <a:rPr lang="en-US" sz="1200" dirty="0">
+                <a:latin typeface="Arial" panose="020B0604020202020204" pitchFamily="34" charset="0"/>
+                <a:cs typeface="Arial" panose="020B0604020202020204" pitchFamily="34" charset="0"/>
+              </a:rPr>
+              <a:t>, </a:t>
+            </a:r>
+            <a:r>
+              <a:rPr lang="en-US" sz="1200" dirty="0" err="1">
+                <a:latin typeface="Arial" panose="020B0604020202020204" pitchFamily="34" charset="0"/>
+                <a:cs typeface="Arial" panose="020B0604020202020204" pitchFamily="34" charset="0"/>
+              </a:rPr>
+              <a:t>por</a:t>
+            </a:r>
+            <a:r>
+              <a:rPr lang="en-US" sz="1200" dirty="0">
+                <a:latin typeface="Arial" panose="020B0604020202020204" pitchFamily="34" charset="0"/>
+                <a:cs typeface="Arial" panose="020B0604020202020204" pitchFamily="34" charset="0"/>
+              </a:rPr>
+              <a:t> un </a:t>
+            </a:r>
+            <a:r>
+              <a:rPr lang="en-US" sz="1200" dirty="0" err="1">
+                <a:latin typeface="Arial" panose="020B0604020202020204" pitchFamily="34" charset="0"/>
+                <a:cs typeface="Arial" panose="020B0604020202020204" pitchFamily="34" charset="0"/>
+              </a:rPr>
+              <a:t>lado</a:t>
+            </a:r>
+            <a:r>
+              <a:rPr lang="en-US" sz="1200" dirty="0">
+                <a:latin typeface="Arial" panose="020B0604020202020204" pitchFamily="34" charset="0"/>
+                <a:cs typeface="Arial" panose="020B0604020202020204" pitchFamily="34" charset="0"/>
+              </a:rPr>
+              <a:t> las </a:t>
+            </a:r>
+            <a:r>
+              <a:rPr lang="en-US" sz="1200" dirty="0" err="1">
+                <a:latin typeface="Arial" panose="020B0604020202020204" pitchFamily="34" charset="0"/>
+                <a:cs typeface="Arial" panose="020B0604020202020204" pitchFamily="34" charset="0"/>
+              </a:rPr>
+              <a:t>pérdidas</a:t>
+            </a:r>
+            <a:r>
+              <a:rPr lang="en-US" sz="1200" dirty="0">
+                <a:latin typeface="Arial" panose="020B0604020202020204" pitchFamily="34" charset="0"/>
+                <a:cs typeface="Arial" panose="020B0604020202020204" pitchFamily="34" charset="0"/>
+              </a:rPr>
+              <a:t> de modo y </a:t>
+            </a:r>
+            <a:r>
+              <a:rPr lang="en-US" sz="1200" dirty="0" err="1">
+                <a:latin typeface="Arial" panose="020B0604020202020204" pitchFamily="34" charset="0"/>
+                <a:cs typeface="Arial" panose="020B0604020202020204" pitchFamily="34" charset="0"/>
+              </a:rPr>
+              <a:t>por</a:t>
+            </a:r>
+            <a:r>
+              <a:rPr lang="en-US" sz="1200" dirty="0">
+                <a:latin typeface="Arial" panose="020B0604020202020204" pitchFamily="34" charset="0"/>
+                <a:cs typeface="Arial" panose="020B0604020202020204" pitchFamily="34" charset="0"/>
+              </a:rPr>
+              <a:t> </a:t>
+            </a:r>
+            <a:r>
+              <a:rPr lang="en-US" sz="1200" dirty="0" err="1">
+                <a:latin typeface="Arial" panose="020B0604020202020204" pitchFamily="34" charset="0"/>
+                <a:cs typeface="Arial" panose="020B0604020202020204" pitchFamily="34" charset="0"/>
+              </a:rPr>
+              <a:t>otro</a:t>
+            </a:r>
+            <a:r>
+              <a:rPr lang="en-US" sz="1200" dirty="0">
+                <a:latin typeface="Arial" panose="020B0604020202020204" pitchFamily="34" charset="0"/>
+                <a:cs typeface="Arial" panose="020B0604020202020204" pitchFamily="34" charset="0"/>
+              </a:rPr>
+              <a:t> </a:t>
+            </a:r>
+            <a:r>
+              <a:rPr lang="en-US" sz="1200" dirty="0" err="1">
+                <a:latin typeface="Arial" panose="020B0604020202020204" pitchFamily="34" charset="0"/>
+                <a:cs typeface="Arial" panose="020B0604020202020204" pitchFamily="34" charset="0"/>
+              </a:rPr>
+              <a:t>lado</a:t>
+            </a:r>
+            <a:r>
+              <a:rPr lang="en-US" sz="1200" dirty="0">
+                <a:latin typeface="Arial" panose="020B0604020202020204" pitchFamily="34" charset="0"/>
+                <a:cs typeface="Arial" panose="020B0604020202020204" pitchFamily="34" charset="0"/>
+              </a:rPr>
+              <a:t> las </a:t>
+            </a:r>
+            <a:r>
+              <a:rPr lang="en-US" sz="1200" dirty="0" err="1">
+                <a:latin typeface="Arial" panose="020B0604020202020204" pitchFamily="34" charset="0"/>
+                <a:cs typeface="Arial" panose="020B0604020202020204" pitchFamily="34" charset="0"/>
+              </a:rPr>
+              <a:t>pérdidas</a:t>
+            </a:r>
+            <a:r>
+              <a:rPr lang="en-US" sz="1200" dirty="0">
+                <a:latin typeface="Arial" panose="020B0604020202020204" pitchFamily="34" charset="0"/>
+                <a:cs typeface="Arial" panose="020B0604020202020204" pitchFamily="34" charset="0"/>
+              </a:rPr>
+              <a:t> de </a:t>
+            </a:r>
+            <a:r>
+              <a:rPr lang="en-US" sz="1200" dirty="0" err="1">
+                <a:latin typeface="Arial" panose="020B0604020202020204" pitchFamily="34" charset="0"/>
+                <a:cs typeface="Arial" panose="020B0604020202020204" pitchFamily="34" charset="0"/>
+              </a:rPr>
+              <a:t>propagación</a:t>
+            </a:r>
+            <a:r>
+              <a:rPr lang="en-US" sz="1200" dirty="0">
+                <a:latin typeface="Arial" panose="020B0604020202020204" pitchFamily="34" charset="0"/>
+                <a:cs typeface="Arial" panose="020B0604020202020204" pitchFamily="34" charset="0"/>
+              </a:rPr>
+              <a:t>. Para </a:t>
+            </a:r>
+            <a:r>
+              <a:rPr lang="en-US" sz="1200" dirty="0" err="1">
+                <a:latin typeface="Arial" panose="020B0604020202020204" pitchFamily="34" charset="0"/>
+                <a:cs typeface="Arial" panose="020B0604020202020204" pitchFamily="34" charset="0"/>
+              </a:rPr>
+              <a:t>esta</a:t>
+            </a:r>
+            <a:r>
+              <a:rPr lang="en-US" sz="1200" dirty="0">
+                <a:latin typeface="Arial" panose="020B0604020202020204" pitchFamily="34" charset="0"/>
+                <a:cs typeface="Arial" panose="020B0604020202020204" pitchFamily="34" charset="0"/>
+              </a:rPr>
+              <a:t> </a:t>
+            </a:r>
+            <a:r>
+              <a:rPr lang="en-US" sz="1200" dirty="0" err="1">
+                <a:latin typeface="Arial" panose="020B0604020202020204" pitchFamily="34" charset="0"/>
+                <a:cs typeface="Arial" panose="020B0604020202020204" pitchFamily="34" charset="0"/>
+              </a:rPr>
+              <a:t>simulación</a:t>
+            </a:r>
+            <a:r>
+              <a:rPr lang="en-US" sz="1200" dirty="0">
+                <a:latin typeface="Arial" panose="020B0604020202020204" pitchFamily="34" charset="0"/>
+                <a:cs typeface="Arial" panose="020B0604020202020204" pitchFamily="34" charset="0"/>
+              </a:rPr>
+              <a:t> se </a:t>
+            </a:r>
+            <a:r>
+              <a:rPr lang="en-US" sz="1200" dirty="0" err="1">
+                <a:latin typeface="Arial" panose="020B0604020202020204" pitchFamily="34" charset="0"/>
+                <a:cs typeface="Arial" panose="020B0604020202020204" pitchFamily="34" charset="0"/>
+              </a:rPr>
+              <a:t>han</a:t>
+            </a:r>
+            <a:r>
+              <a:rPr lang="en-US" sz="1200" dirty="0">
+                <a:latin typeface="Arial" panose="020B0604020202020204" pitchFamily="34" charset="0"/>
+                <a:cs typeface="Arial" panose="020B0604020202020204" pitchFamily="34" charset="0"/>
+              </a:rPr>
+              <a:t> </a:t>
+            </a:r>
+            <a:r>
+              <a:rPr lang="en-US" sz="1200" dirty="0" err="1">
+                <a:latin typeface="Arial" panose="020B0604020202020204" pitchFamily="34" charset="0"/>
+                <a:cs typeface="Arial" panose="020B0604020202020204" pitchFamily="34" charset="0"/>
+              </a:rPr>
+              <a:t>elegido</a:t>
+            </a:r>
+            <a:r>
+              <a:rPr lang="en-US" sz="1200" dirty="0">
+                <a:latin typeface="Arial" panose="020B0604020202020204" pitchFamily="34" charset="0"/>
+                <a:cs typeface="Arial" panose="020B0604020202020204" pitchFamily="34" charset="0"/>
+              </a:rPr>
+              <a:t> </a:t>
+            </a:r>
+            <a:r>
+              <a:rPr lang="en-US" sz="1200" dirty="0" err="1">
+                <a:latin typeface="Arial" panose="020B0604020202020204" pitchFamily="34" charset="0"/>
+                <a:cs typeface="Arial" panose="020B0604020202020204" pitchFamily="34" charset="0"/>
+              </a:rPr>
+              <a:t>unas</a:t>
+            </a:r>
+            <a:r>
+              <a:rPr lang="en-US" sz="1200" dirty="0">
+                <a:latin typeface="Arial" panose="020B0604020202020204" pitchFamily="34" charset="0"/>
+                <a:cs typeface="Arial" panose="020B0604020202020204" pitchFamily="34" charset="0"/>
+              </a:rPr>
+              <a:t> </a:t>
+            </a:r>
+            <a:r>
+              <a:rPr lang="en-US" sz="1200" dirty="0" err="1">
+                <a:latin typeface="Arial" panose="020B0604020202020204" pitchFamily="34" charset="0"/>
+                <a:cs typeface="Arial" panose="020B0604020202020204" pitchFamily="34" charset="0"/>
+              </a:rPr>
+              <a:t>perdidas</a:t>
+            </a:r>
+            <a:r>
+              <a:rPr lang="en-US" sz="1200" dirty="0">
+                <a:latin typeface="Arial" panose="020B0604020202020204" pitchFamily="34" charset="0"/>
+                <a:cs typeface="Arial" panose="020B0604020202020204" pitchFamily="34" charset="0"/>
+              </a:rPr>
+              <a:t> de </a:t>
+            </a:r>
+            <a:r>
+              <a:rPr lang="en-US" sz="1200" dirty="0" err="1">
+                <a:latin typeface="Arial" panose="020B0604020202020204" pitchFamily="34" charset="0"/>
+                <a:cs typeface="Arial" panose="020B0604020202020204" pitchFamily="34" charset="0"/>
+              </a:rPr>
+              <a:t>propagación</a:t>
+            </a:r>
+            <a:r>
+              <a:rPr lang="en-US" sz="1200" dirty="0">
+                <a:latin typeface="Arial" panose="020B0604020202020204" pitchFamily="34" charset="0"/>
+                <a:cs typeface="Arial" panose="020B0604020202020204" pitchFamily="34" charset="0"/>
+              </a:rPr>
+              <a:t> de 1.5 dB/cm. Se </a:t>
+            </a:r>
+            <a:r>
+              <a:rPr lang="en-US" sz="1200" dirty="0" err="1">
+                <a:latin typeface="Arial" panose="020B0604020202020204" pitchFamily="34" charset="0"/>
+                <a:cs typeface="Arial" panose="020B0604020202020204" pitchFamily="34" charset="0"/>
+              </a:rPr>
+              <a:t>puede</a:t>
+            </a:r>
+            <a:r>
+              <a:rPr lang="en-US" sz="1200" dirty="0">
+                <a:latin typeface="Arial" panose="020B0604020202020204" pitchFamily="34" charset="0"/>
+                <a:cs typeface="Arial" panose="020B0604020202020204" pitchFamily="34" charset="0"/>
+              </a:rPr>
+              <a:t> </a:t>
+            </a:r>
+            <a:r>
+              <a:rPr lang="en-US" sz="1200" dirty="0" err="1">
+                <a:latin typeface="Arial" panose="020B0604020202020204" pitchFamily="34" charset="0"/>
+                <a:cs typeface="Arial" panose="020B0604020202020204" pitchFamily="34" charset="0"/>
+              </a:rPr>
+              <a:t>concluir</a:t>
+            </a:r>
+            <a:r>
+              <a:rPr lang="en-US" sz="1200" dirty="0">
+                <a:latin typeface="Arial" panose="020B0604020202020204" pitchFamily="34" charset="0"/>
+                <a:cs typeface="Arial" panose="020B0604020202020204" pitchFamily="34" charset="0"/>
+              </a:rPr>
+              <a:t> </a:t>
+            </a:r>
+            <a:r>
+              <a:rPr lang="en-US" sz="1200" dirty="0" err="1">
+                <a:latin typeface="Arial" panose="020B0604020202020204" pitchFamily="34" charset="0"/>
+                <a:cs typeface="Arial" panose="020B0604020202020204" pitchFamily="34" charset="0"/>
+              </a:rPr>
+              <a:t>que</a:t>
+            </a:r>
+            <a:r>
+              <a:rPr lang="en-US" sz="1200" dirty="0">
+                <a:latin typeface="Arial" panose="020B0604020202020204" pitchFamily="34" charset="0"/>
+                <a:cs typeface="Arial" panose="020B0604020202020204" pitchFamily="34" charset="0"/>
+              </a:rPr>
+              <a:t> para radios de </a:t>
+            </a:r>
+            <a:r>
+              <a:rPr lang="en-US" sz="1200" dirty="0" err="1">
+                <a:latin typeface="Arial" panose="020B0604020202020204" pitchFamily="34" charset="0"/>
+                <a:cs typeface="Arial" panose="020B0604020202020204" pitchFamily="34" charset="0"/>
+              </a:rPr>
+              <a:t>curvatura</a:t>
+            </a:r>
+            <a:r>
+              <a:rPr lang="en-US" sz="1200" dirty="0">
+                <a:latin typeface="Arial" panose="020B0604020202020204" pitchFamily="34" charset="0"/>
+                <a:cs typeface="Arial" panose="020B0604020202020204" pitchFamily="34" charset="0"/>
+              </a:rPr>
+              <a:t> </a:t>
+            </a:r>
+            <a:r>
+              <a:rPr lang="en-US" sz="1200" dirty="0" err="1">
+                <a:latin typeface="Arial" panose="020B0604020202020204" pitchFamily="34" charset="0"/>
+                <a:cs typeface="Arial" panose="020B0604020202020204" pitchFamily="34" charset="0"/>
+              </a:rPr>
+              <a:t>menores</a:t>
+            </a:r>
+            <a:r>
+              <a:rPr lang="en-US" sz="1200" dirty="0">
+                <a:latin typeface="Arial" panose="020B0604020202020204" pitchFamily="34" charset="0"/>
+                <a:cs typeface="Arial" panose="020B0604020202020204" pitchFamily="34" charset="0"/>
+              </a:rPr>
+              <a:t> de 75 um, las </a:t>
+            </a:r>
+            <a:r>
+              <a:rPr lang="en-US" sz="1200" dirty="0" err="1">
+                <a:latin typeface="Arial" panose="020B0604020202020204" pitchFamily="34" charset="0"/>
+                <a:cs typeface="Arial" panose="020B0604020202020204" pitchFamily="34" charset="0"/>
+              </a:rPr>
+              <a:t>pérdidas</a:t>
+            </a:r>
+            <a:r>
+              <a:rPr lang="en-US" sz="1200" dirty="0">
+                <a:latin typeface="Arial" panose="020B0604020202020204" pitchFamily="34" charset="0"/>
+                <a:cs typeface="Arial" panose="020B0604020202020204" pitchFamily="34" charset="0"/>
+              </a:rPr>
+              <a:t> </a:t>
+            </a:r>
+            <a:r>
+              <a:rPr lang="en-US" sz="1200" dirty="0" err="1">
+                <a:latin typeface="Arial" panose="020B0604020202020204" pitchFamily="34" charset="0"/>
+                <a:cs typeface="Arial" panose="020B0604020202020204" pitchFamily="34" charset="0"/>
+              </a:rPr>
+              <a:t>por</a:t>
+            </a:r>
+            <a:r>
+              <a:rPr lang="en-US" sz="1200" dirty="0">
+                <a:latin typeface="Arial" panose="020B0604020202020204" pitchFamily="34" charset="0"/>
+                <a:cs typeface="Arial" panose="020B0604020202020204" pitchFamily="34" charset="0"/>
+              </a:rPr>
+              <a:t> modo son </a:t>
+            </a:r>
+            <a:r>
+              <a:rPr lang="en-US" sz="1200" dirty="0" err="1">
+                <a:latin typeface="Arial" panose="020B0604020202020204" pitchFamily="34" charset="0"/>
+                <a:cs typeface="Arial" panose="020B0604020202020204" pitchFamily="34" charset="0"/>
+              </a:rPr>
+              <a:t>mucho</a:t>
+            </a:r>
+            <a:r>
+              <a:rPr lang="en-US" sz="1200" dirty="0">
+                <a:latin typeface="Arial" panose="020B0604020202020204" pitchFamily="34" charset="0"/>
+                <a:cs typeface="Arial" panose="020B0604020202020204" pitchFamily="34" charset="0"/>
+              </a:rPr>
+              <a:t> mas </a:t>
+            </a:r>
+            <a:r>
+              <a:rPr lang="en-US" sz="1200" dirty="0" err="1">
+                <a:latin typeface="Arial" panose="020B0604020202020204" pitchFamily="34" charset="0"/>
+                <a:cs typeface="Arial" panose="020B0604020202020204" pitchFamily="34" charset="0"/>
+              </a:rPr>
+              <a:t>significativas</a:t>
+            </a:r>
+            <a:r>
+              <a:rPr lang="en-US" sz="1200" dirty="0">
+                <a:latin typeface="Arial" panose="020B0604020202020204" pitchFamily="34" charset="0"/>
+                <a:cs typeface="Arial" panose="020B0604020202020204" pitchFamily="34" charset="0"/>
+              </a:rPr>
+              <a:t> </a:t>
+            </a:r>
+            <a:r>
+              <a:rPr lang="en-US" sz="1200" dirty="0" err="1">
+                <a:latin typeface="Arial" panose="020B0604020202020204" pitchFamily="34" charset="0"/>
+                <a:cs typeface="Arial" panose="020B0604020202020204" pitchFamily="34" charset="0"/>
+              </a:rPr>
+              <a:t>que</a:t>
+            </a:r>
+            <a:r>
+              <a:rPr lang="en-US" sz="1200" dirty="0">
+                <a:latin typeface="Arial" panose="020B0604020202020204" pitchFamily="34" charset="0"/>
+                <a:cs typeface="Arial" panose="020B0604020202020204" pitchFamily="34" charset="0"/>
+              </a:rPr>
+              <a:t> las de </a:t>
+            </a:r>
+            <a:r>
+              <a:rPr lang="en-US" sz="1200" dirty="0" err="1">
+                <a:latin typeface="Arial" panose="020B0604020202020204" pitchFamily="34" charset="0"/>
+                <a:cs typeface="Arial" panose="020B0604020202020204" pitchFamily="34" charset="0"/>
+              </a:rPr>
+              <a:t>propagación</a:t>
+            </a:r>
+            <a:r>
+              <a:rPr lang="en-US" sz="1200" dirty="0">
+                <a:latin typeface="Arial" panose="020B0604020202020204" pitchFamily="34" charset="0"/>
+                <a:cs typeface="Arial" panose="020B0604020202020204" pitchFamily="34" charset="0"/>
+              </a:rPr>
+              <a:t>. Por </a:t>
+            </a:r>
+            <a:r>
+              <a:rPr lang="en-US" sz="1200" dirty="0" err="1">
+                <a:latin typeface="Arial" panose="020B0604020202020204" pitchFamily="34" charset="0"/>
+                <a:cs typeface="Arial" panose="020B0604020202020204" pitchFamily="34" charset="0"/>
+              </a:rPr>
+              <a:t>otro</a:t>
+            </a:r>
+            <a:r>
+              <a:rPr lang="en-US" sz="1200" dirty="0">
+                <a:latin typeface="Arial" panose="020B0604020202020204" pitchFamily="34" charset="0"/>
+                <a:cs typeface="Arial" panose="020B0604020202020204" pitchFamily="34" charset="0"/>
+              </a:rPr>
+              <a:t> </a:t>
+            </a:r>
+            <a:r>
+              <a:rPr lang="en-US" sz="1200" dirty="0" err="1">
+                <a:latin typeface="Arial" panose="020B0604020202020204" pitchFamily="34" charset="0"/>
+                <a:cs typeface="Arial" panose="020B0604020202020204" pitchFamily="34" charset="0"/>
+              </a:rPr>
+              <a:t>lado</a:t>
+            </a:r>
+            <a:r>
+              <a:rPr lang="en-US" sz="1200" dirty="0">
+                <a:latin typeface="Arial" panose="020B0604020202020204" pitchFamily="34" charset="0"/>
+                <a:cs typeface="Arial" panose="020B0604020202020204" pitchFamily="34" charset="0"/>
+              </a:rPr>
+              <a:t>, a </a:t>
+            </a:r>
+            <a:r>
+              <a:rPr lang="en-US" sz="1200" dirty="0" err="1">
+                <a:latin typeface="Arial" panose="020B0604020202020204" pitchFamily="34" charset="0"/>
+                <a:cs typeface="Arial" panose="020B0604020202020204" pitchFamily="34" charset="0"/>
+              </a:rPr>
+              <a:t>partir</a:t>
+            </a:r>
+            <a:r>
+              <a:rPr lang="en-US" sz="1200" dirty="0">
+                <a:latin typeface="Arial" panose="020B0604020202020204" pitchFamily="34" charset="0"/>
+                <a:cs typeface="Arial" panose="020B0604020202020204" pitchFamily="34" charset="0"/>
+              </a:rPr>
+              <a:t> de radios </a:t>
+            </a:r>
+            <a:r>
+              <a:rPr lang="en-US" sz="1200" dirty="0" err="1">
+                <a:latin typeface="Arial" panose="020B0604020202020204" pitchFamily="34" charset="0"/>
+                <a:cs typeface="Arial" panose="020B0604020202020204" pitchFamily="34" charset="0"/>
+              </a:rPr>
+              <a:t>mayores</a:t>
+            </a:r>
+            <a:r>
+              <a:rPr lang="en-US" sz="1200" dirty="0">
+                <a:latin typeface="Arial" panose="020B0604020202020204" pitchFamily="34" charset="0"/>
+                <a:cs typeface="Arial" panose="020B0604020202020204" pitchFamily="34" charset="0"/>
+              </a:rPr>
+              <a:t> de 75 um </a:t>
+            </a:r>
+            <a:r>
+              <a:rPr lang="en-US" sz="1200" dirty="0" err="1">
+                <a:latin typeface="Arial" panose="020B0604020202020204" pitchFamily="34" charset="0"/>
+                <a:cs typeface="Arial" panose="020B0604020202020204" pitchFamily="34" charset="0"/>
+              </a:rPr>
+              <a:t>empiezan</a:t>
+            </a:r>
+            <a:r>
+              <a:rPr lang="en-US" sz="1200" dirty="0">
+                <a:latin typeface="Arial" panose="020B0604020202020204" pitchFamily="34" charset="0"/>
+                <a:cs typeface="Arial" panose="020B0604020202020204" pitchFamily="34" charset="0"/>
+              </a:rPr>
+              <a:t> a </a:t>
+            </a:r>
+            <a:r>
+              <a:rPr lang="en-US" sz="1200" dirty="0" err="1">
+                <a:latin typeface="Arial" panose="020B0604020202020204" pitchFamily="34" charset="0"/>
+                <a:cs typeface="Arial" panose="020B0604020202020204" pitchFamily="34" charset="0"/>
+              </a:rPr>
+              <a:t>predominar</a:t>
+            </a:r>
+            <a:r>
+              <a:rPr lang="en-US" sz="1200" dirty="0">
+                <a:latin typeface="Arial" panose="020B0604020202020204" pitchFamily="34" charset="0"/>
+                <a:cs typeface="Arial" panose="020B0604020202020204" pitchFamily="34" charset="0"/>
+              </a:rPr>
+              <a:t> las de </a:t>
+            </a:r>
+            <a:r>
+              <a:rPr lang="en-US" sz="1200" dirty="0" err="1">
+                <a:latin typeface="Arial" panose="020B0604020202020204" pitchFamily="34" charset="0"/>
+                <a:cs typeface="Arial" panose="020B0604020202020204" pitchFamily="34" charset="0"/>
+              </a:rPr>
+              <a:t>propagación</a:t>
+            </a:r>
+            <a:r>
+              <a:rPr lang="en-US" sz="1200" dirty="0">
+                <a:latin typeface="Arial" panose="020B0604020202020204" pitchFamily="34" charset="0"/>
+                <a:cs typeface="Arial" panose="020B0604020202020204" pitchFamily="34" charset="0"/>
+              </a:rPr>
+              <a:t>. </a:t>
+            </a:r>
+            <a:r>
+              <a:rPr lang="en-US" sz="1200" dirty="0" err="1">
+                <a:latin typeface="Arial" panose="020B0604020202020204" pitchFamily="34" charset="0"/>
+                <a:cs typeface="Arial" panose="020B0604020202020204" pitchFamily="34" charset="0"/>
+              </a:rPr>
+              <a:t>Además</a:t>
+            </a:r>
+            <a:r>
+              <a:rPr lang="en-US" sz="1200" dirty="0">
+                <a:latin typeface="Arial" panose="020B0604020202020204" pitchFamily="34" charset="0"/>
+                <a:cs typeface="Arial" panose="020B0604020202020204" pitchFamily="34" charset="0"/>
+              </a:rPr>
+              <a:t>, se también se </a:t>
+            </a:r>
+            <a:r>
+              <a:rPr lang="en-US" sz="1200" dirty="0" err="1">
+                <a:latin typeface="Arial" panose="020B0604020202020204" pitchFamily="34" charset="0"/>
+                <a:cs typeface="Arial" panose="020B0604020202020204" pitchFamily="34" charset="0"/>
+              </a:rPr>
+              <a:t>puede</a:t>
+            </a:r>
+            <a:r>
+              <a:rPr lang="en-US" sz="1200" dirty="0">
+                <a:latin typeface="Arial" panose="020B0604020202020204" pitchFamily="34" charset="0"/>
+                <a:cs typeface="Arial" panose="020B0604020202020204" pitchFamily="34" charset="0"/>
+              </a:rPr>
+              <a:t> observer </a:t>
+            </a:r>
+            <a:r>
+              <a:rPr lang="en-US" sz="1200" dirty="0" err="1">
+                <a:latin typeface="Arial" panose="020B0604020202020204" pitchFamily="34" charset="0"/>
+                <a:cs typeface="Arial" panose="020B0604020202020204" pitchFamily="34" charset="0"/>
+              </a:rPr>
+              <a:t>que</a:t>
+            </a:r>
+            <a:r>
+              <a:rPr lang="en-US" sz="1200" dirty="0">
+                <a:latin typeface="Arial" panose="020B0604020202020204" pitchFamily="34" charset="0"/>
+                <a:cs typeface="Arial" panose="020B0604020202020204" pitchFamily="34" charset="0"/>
+              </a:rPr>
+              <a:t> las </a:t>
+            </a:r>
+            <a:r>
+              <a:rPr lang="en-US" sz="1200" dirty="0" err="1">
+                <a:latin typeface="Arial" panose="020B0604020202020204" pitchFamily="34" charset="0"/>
+                <a:cs typeface="Arial" panose="020B0604020202020204" pitchFamily="34" charset="0"/>
+              </a:rPr>
+              <a:t>pérdidas</a:t>
+            </a:r>
+            <a:r>
+              <a:rPr lang="en-US" sz="1200" dirty="0">
+                <a:latin typeface="Arial" panose="020B0604020202020204" pitchFamily="34" charset="0"/>
+                <a:cs typeface="Arial" panose="020B0604020202020204" pitchFamily="34" charset="0"/>
+              </a:rPr>
+              <a:t> de modo </a:t>
+            </a:r>
+            <a:r>
+              <a:rPr lang="en-US" sz="1200" dirty="0" err="1">
+                <a:latin typeface="Arial" panose="020B0604020202020204" pitchFamily="34" charset="0"/>
+                <a:cs typeface="Arial" panose="020B0604020202020204" pitchFamily="34" charset="0"/>
+              </a:rPr>
+              <a:t>disminuyen</a:t>
+            </a:r>
+            <a:r>
+              <a:rPr lang="en-US" sz="1200" dirty="0">
+                <a:latin typeface="Arial" panose="020B0604020202020204" pitchFamily="34" charset="0"/>
+                <a:cs typeface="Arial" panose="020B0604020202020204" pitchFamily="34" charset="0"/>
+              </a:rPr>
+              <a:t> </a:t>
+            </a:r>
+            <a:r>
+              <a:rPr lang="en-US" sz="1200" dirty="0" err="1">
+                <a:latin typeface="Arial" panose="020B0604020202020204" pitchFamily="34" charset="0"/>
+                <a:cs typeface="Arial" panose="020B0604020202020204" pitchFamily="34" charset="0"/>
+              </a:rPr>
+              <a:t>aproximadamente</a:t>
+            </a:r>
+            <a:r>
+              <a:rPr lang="en-US" sz="1200" dirty="0">
+                <a:latin typeface="Arial" panose="020B0604020202020204" pitchFamily="34" charset="0"/>
+                <a:cs typeface="Arial" panose="020B0604020202020204" pitchFamily="34" charset="0"/>
+              </a:rPr>
+              <a:t> de forma </a:t>
+            </a:r>
+            <a:r>
+              <a:rPr lang="en-US" sz="1200" dirty="0" err="1">
+                <a:latin typeface="Arial" panose="020B0604020202020204" pitchFamily="34" charset="0"/>
+                <a:cs typeface="Arial" panose="020B0604020202020204" pitchFamily="34" charset="0"/>
+              </a:rPr>
+              <a:t>exponencial</a:t>
+            </a:r>
+            <a:r>
+              <a:rPr lang="en-US" sz="1200" dirty="0">
+                <a:latin typeface="Arial" panose="020B0604020202020204" pitchFamily="34" charset="0"/>
+                <a:cs typeface="Arial" panose="020B0604020202020204" pitchFamily="34" charset="0"/>
+              </a:rPr>
+              <a:t> al </a:t>
+            </a:r>
+            <a:r>
+              <a:rPr lang="en-US" sz="1200" dirty="0" err="1">
+                <a:latin typeface="Arial" panose="020B0604020202020204" pitchFamily="34" charset="0"/>
+                <a:cs typeface="Arial" panose="020B0604020202020204" pitchFamily="34" charset="0"/>
+              </a:rPr>
+              <a:t>aumentar</a:t>
+            </a:r>
+            <a:r>
+              <a:rPr lang="en-US" sz="1200" dirty="0">
+                <a:latin typeface="Arial" panose="020B0604020202020204" pitchFamily="34" charset="0"/>
+                <a:cs typeface="Arial" panose="020B0604020202020204" pitchFamily="34" charset="0"/>
+              </a:rPr>
+              <a:t> </a:t>
+            </a:r>
+            <a:r>
+              <a:rPr lang="en-US" sz="1200" dirty="0" err="1">
+                <a:latin typeface="Arial" panose="020B0604020202020204" pitchFamily="34" charset="0"/>
+                <a:cs typeface="Arial" panose="020B0604020202020204" pitchFamily="34" charset="0"/>
+              </a:rPr>
+              <a:t>el</a:t>
+            </a:r>
+            <a:r>
+              <a:rPr lang="en-US" sz="1200" dirty="0">
+                <a:latin typeface="Arial" panose="020B0604020202020204" pitchFamily="34" charset="0"/>
+                <a:cs typeface="Arial" panose="020B0604020202020204" pitchFamily="34" charset="0"/>
+              </a:rPr>
+              <a:t> radio de </a:t>
+            </a:r>
+            <a:r>
+              <a:rPr lang="en-US" sz="1200" dirty="0" err="1">
+                <a:latin typeface="Arial" panose="020B0604020202020204" pitchFamily="34" charset="0"/>
+                <a:cs typeface="Arial" panose="020B0604020202020204" pitchFamily="34" charset="0"/>
+              </a:rPr>
+              <a:t>curvatura</a:t>
+            </a:r>
+            <a:r>
+              <a:rPr lang="en-US" sz="1200" dirty="0">
+                <a:latin typeface="Arial" panose="020B0604020202020204" pitchFamily="34" charset="0"/>
+                <a:cs typeface="Arial" panose="020B0604020202020204" pitchFamily="34" charset="0"/>
+              </a:rPr>
+              <a:t>, </a:t>
+            </a:r>
+            <a:r>
+              <a:rPr lang="en-US" sz="1200" dirty="0" err="1">
+                <a:latin typeface="Arial" panose="020B0604020202020204" pitchFamily="34" charset="0"/>
+                <a:cs typeface="Arial" panose="020B0604020202020204" pitchFamily="34" charset="0"/>
+              </a:rPr>
+              <a:t>mientras</a:t>
+            </a:r>
+            <a:r>
+              <a:rPr lang="en-US" sz="1200" dirty="0">
+                <a:latin typeface="Arial" panose="020B0604020202020204" pitchFamily="34" charset="0"/>
+                <a:cs typeface="Arial" panose="020B0604020202020204" pitchFamily="34" charset="0"/>
+              </a:rPr>
+              <a:t> </a:t>
+            </a:r>
+            <a:r>
+              <a:rPr lang="en-US" sz="1200" dirty="0" err="1">
+                <a:latin typeface="Arial" panose="020B0604020202020204" pitchFamily="34" charset="0"/>
+                <a:cs typeface="Arial" panose="020B0604020202020204" pitchFamily="34" charset="0"/>
+              </a:rPr>
+              <a:t>que</a:t>
+            </a:r>
+            <a:r>
+              <a:rPr lang="en-US" sz="1200" dirty="0">
+                <a:latin typeface="Arial" panose="020B0604020202020204" pitchFamily="34" charset="0"/>
+                <a:cs typeface="Arial" panose="020B0604020202020204" pitchFamily="34" charset="0"/>
+              </a:rPr>
+              <a:t> las </a:t>
+            </a:r>
+            <a:r>
+              <a:rPr lang="en-US" sz="1200" dirty="0" err="1">
+                <a:latin typeface="Arial" panose="020B0604020202020204" pitchFamily="34" charset="0"/>
+                <a:cs typeface="Arial" panose="020B0604020202020204" pitchFamily="34" charset="0"/>
+              </a:rPr>
+              <a:t>pérdidas</a:t>
+            </a:r>
+            <a:r>
+              <a:rPr lang="en-US" sz="1200" dirty="0">
+                <a:latin typeface="Arial" panose="020B0604020202020204" pitchFamily="34" charset="0"/>
+                <a:cs typeface="Arial" panose="020B0604020202020204" pitchFamily="34" charset="0"/>
+              </a:rPr>
+              <a:t> de </a:t>
+            </a:r>
+            <a:r>
+              <a:rPr lang="en-US" sz="1200" dirty="0" err="1">
+                <a:latin typeface="Arial" panose="020B0604020202020204" pitchFamily="34" charset="0"/>
+                <a:cs typeface="Arial" panose="020B0604020202020204" pitchFamily="34" charset="0"/>
+              </a:rPr>
+              <a:t>propagación</a:t>
+            </a:r>
+            <a:r>
+              <a:rPr lang="en-US" sz="1200" dirty="0">
+                <a:latin typeface="Arial" panose="020B0604020202020204" pitchFamily="34" charset="0"/>
+                <a:cs typeface="Arial" panose="020B0604020202020204" pitchFamily="34" charset="0"/>
+              </a:rPr>
+              <a:t> </a:t>
+            </a:r>
+            <a:r>
+              <a:rPr lang="en-US" sz="1200" dirty="0" err="1">
+                <a:latin typeface="Arial" panose="020B0604020202020204" pitchFamily="34" charset="0"/>
+                <a:cs typeface="Arial" panose="020B0604020202020204" pitchFamily="34" charset="0"/>
+              </a:rPr>
+              <a:t>aumentan</a:t>
+            </a:r>
+            <a:r>
+              <a:rPr lang="en-US" sz="1200" dirty="0">
+                <a:latin typeface="Arial" panose="020B0604020202020204" pitchFamily="34" charset="0"/>
+                <a:cs typeface="Arial" panose="020B0604020202020204" pitchFamily="34" charset="0"/>
+              </a:rPr>
+              <a:t> </a:t>
+            </a:r>
+            <a:r>
+              <a:rPr lang="en-US" sz="1200" dirty="0" err="1">
+                <a:latin typeface="Arial" panose="020B0604020202020204" pitchFamily="34" charset="0"/>
+                <a:cs typeface="Arial" panose="020B0604020202020204" pitchFamily="34" charset="0"/>
+              </a:rPr>
+              <a:t>aproximadamente</a:t>
+            </a:r>
+            <a:r>
+              <a:rPr lang="en-US" sz="1200" dirty="0">
+                <a:latin typeface="Arial" panose="020B0604020202020204" pitchFamily="34" charset="0"/>
+                <a:cs typeface="Arial" panose="020B0604020202020204" pitchFamily="34" charset="0"/>
+              </a:rPr>
+              <a:t> de forma lineal.</a:t>
+            </a:r>
+          </a:p>
+          <a:p>
+            <a:pPr algn="just"/>
+            <a:endParaRPr lang="en-US" sz="1200" dirty="0">
+              <a:latin typeface="Arial" panose="020B0604020202020204" pitchFamily="34" charset="0"/>
+              <a:cs typeface="Arial" panose="020B0604020202020204" pitchFamily="34" charset="0"/>
+            </a:endParaRPr>
+          </a:p>
+          <a:p>
+            <a:pPr algn="just"/>
+            <a:r>
+              <a:rPr lang="es-ES" sz="1200" dirty="0">
+                <a:latin typeface="Arial" panose="020B0604020202020204" pitchFamily="34" charset="0"/>
+                <a:cs typeface="Arial" panose="020B0604020202020204" pitchFamily="34" charset="0"/>
+              </a:rPr>
+              <a:t>Para radios de curvatura pequeños, la fuerte curvatura provoca un desplazamiento del modo óptico hacia el borde exterior de la guía de onda, reduciendo su confinamiento y dando lugar a pérdidas significativas de modo, ya que parte del modo deja de estar guiado. A medida que el radio de curvatura aumenta, la curvatura se suaviza y las pérdidas de modo disminuyen. En este régimen, las pérdidas de propagación pasan a dominar debido al aumento de la longitud del recorrido del modo en la sección curvada.</a:t>
+            </a:r>
+            <a:endParaRPr lang="en-US" sz="1200" dirty="0">
+              <a:latin typeface="Arial" panose="020B0604020202020204" pitchFamily="34" charset="0"/>
+              <a:cs typeface="Arial" panose="020B0604020202020204" pitchFamily="34" charset="0"/>
+            </a:endParaRPr>
+          </a:p>
+          <a:p>
+            <a:pPr algn="just"/>
+            <a:endParaRPr lang="en-US" sz="1200" dirty="0">
+              <a:latin typeface="Arial" panose="020B0604020202020204" pitchFamily="34" charset="0"/>
+              <a:cs typeface="Arial" panose="020B0604020202020204" pitchFamily="34" charset="0"/>
+            </a:endParaRPr>
+          </a:p>
+          <a:p>
+            <a:pPr algn="just"/>
+            <a:r>
+              <a:rPr lang="es-ES" sz="1200" dirty="0">
+                <a:latin typeface="Arial" panose="020B0604020202020204" pitchFamily="34" charset="0"/>
+                <a:cs typeface="Arial" panose="020B0604020202020204" pitchFamily="34" charset="0"/>
+              </a:rPr>
+              <a:t>A partir de la gráfica de pérdidas totales también es posible determinar el radio seguro y el radio óptimo de curvatura. El radio seguro se define como aquel para el cual las pérdidas totales son menores de 0.1 dB. En este caso, dicha condición se cumple a partir de aproximadamente 30 µm. Por otro lado, el radio óptimo corresponde al valor del radio para el cual las pérdidas totales son mínimas. Observando la gráfica, este mínimo se encuentra aproximadamente en el rango de 80 a 85 µm.</a:t>
+            </a:r>
+            <a:endParaRPr lang="en-US" sz="1200" dirty="0">
+              <a:latin typeface="Arial" panose="020B0604020202020204" pitchFamily="34" charset="0"/>
+              <a:cs typeface="Arial" panose="020B0604020202020204" pitchFamily="34" charset="0"/>
+            </a:endParaRPr>
+          </a:p>
+          <a:p>
+            <a:pPr algn="just"/>
+            <a:r>
+              <a:rPr lang="en-US" sz="1200" dirty="0">
+                <a:latin typeface="Arial" panose="020B0604020202020204" pitchFamily="34" charset="0"/>
+                <a:cs typeface="Arial" panose="020B0604020202020204" pitchFamily="34" charset="0"/>
+              </a:rPr>
+              <a:t>.</a:t>
+            </a:r>
+          </a:p>
+          <a:p>
+            <a:pPr algn="just"/>
+            <a:r>
+              <a:rPr lang="es-ES" sz="1200" dirty="0">
+                <a:latin typeface="Arial" panose="020B0604020202020204" pitchFamily="34" charset="0"/>
+                <a:cs typeface="Arial" panose="020B0604020202020204" pitchFamily="34" charset="0"/>
+              </a:rPr>
+              <a:t>Además de las pérdidas, también se ha analizado cómo varía el índice efectivo del modo fundamental TE con el radio de curvatura. En la segunda gráfica se observa que, para radios pequeños, el índice efectivo es ligeramente mayor debido a que la fuerte curvatura altera la distribución del modo dentro de la guía. A medida que el radio de curvatura aumenta, la guía se comporta de forma más similar a una guía recta, por lo que el índice efectivo disminuye ligeramente y tiende a estabilizarse. Para radios grandes, las variaciones del índice efectivo son muy pequeñas, lo que indica que la influencia de la curvatura sobre la propagación del modo es prácticamente despreciable. El ligero aumento observado a partir de aproximadamente 125 µm se debe a que el modo vuelve a concentrarse más en el núcleo de la guía, acercándose así al valor de índice efectivo correspondiente a una guía recta.</a:t>
+            </a:r>
+            <a:endParaRPr lang="en-US" sz="1200" u="sng" dirty="0">
+              <a:latin typeface="Arial" panose="020B0604020202020204" pitchFamily="34" charset="0"/>
+              <a:cs typeface="Arial" panose="020B0604020202020204" pitchFamily="34" charset="0"/>
+            </a:endParaRPr>
+          </a:p>
+        </p:txBody>
+      </p:sp>
+    </p:spTree>
+    <p:extLst>
+      <p:ext uri="{BB962C8B-B14F-4D97-AF65-F5344CB8AC3E}">
+        <p14:creationId xmlns:p14="http://schemas.microsoft.com/office/powerpoint/2010/main" val="53677878"/>
+      </p:ext>
+    </p:extLst>
+  </p:cSld>
+  <p:clrMapOvr>
+    <a:masterClrMapping/>
+  </p:clrMapOvr>
+</p:sld>
+</file>
+
+<file path=ppt/slides/slide14.xml><?xml version="1.0" encoding="utf-8"?>
 <p:sld xmlns:a="http://schemas.openxmlformats.org/drawingml/2006/main" xmlns:r="http://schemas.openxmlformats.org/officeDocument/2006/relationships" xmlns:p="http://schemas.openxmlformats.org/presentationml/2006/main">
   <p:cSld>
     <p:spTree>
@@ -6156,7 +8098,7 @@
         <p:spPr>
           <a:xfrm>
             <a:off x="685800" y="408883"/>
-            <a:ext cx="10994410" cy="1474763"/>
+            <a:ext cx="10994410" cy="1782539"/>
           </a:xfrm>
           <a:prstGeom prst="rect">
             <a:avLst/>
@@ -6182,7 +8124,7 @@
             </a:br>
             <a:r>
               <a:rPr lang="en-US" b="0" dirty="0"/>
-              <a:t>Find the safe radius for this technology. Consider sweeping the radius in a 5um to 30um range. </a:t>
+              <a:t>Find the safe radius for this technology using silicon as the core material. Consider sweeping the radius in a 5um to 30um range. </a:t>
             </a:r>
             <a:br>
               <a:rPr lang="en-US" b="0" dirty="0"/>
@@ -6256,7 +8198,7 @@
           <a:p>
             <a:fld id="{B6F15528-21DE-4FAA-801E-634DDDAF4B2B}" type="slidenum">
               <a:rPr lang="es-ES" smtClean="0"/>
-              <a:t>13</a:t>
+              <a:t>14</a:t>
             </a:fld>
             <a:endParaRPr lang="es-ES"/>
           </a:p>
@@ -6298,89 +8240,6 @@
       </p:sp>
       <p:sp>
         <p:nvSpPr>
-          <p:cNvPr id="2" name="CuadroTexto 1">
-            <a:extLst>
-              <a:ext uri="{FF2B5EF4-FFF2-40B4-BE49-F238E27FC236}">
-                <a16:creationId xmlns:a16="http://schemas.microsoft.com/office/drawing/2014/main" id="{22467BDE-5898-90E9-5123-6AFA90AEA990}"/>
-              </a:ext>
-            </a:extLst>
-          </p:cNvPr>
-          <p:cNvSpPr txBox="1"/>
-          <p:nvPr/>
-        </p:nvSpPr>
-        <p:spPr>
-          <a:xfrm>
-            <a:off x="609441" y="4860334"/>
-            <a:ext cx="11199971" cy="1200329"/>
-          </a:xfrm>
-          <a:prstGeom prst="rect">
-            <a:avLst/>
-          </a:prstGeom>
-          <a:solidFill>
-            <a:schemeClr val="bg1">
-              <a:lumMod val="95000"/>
-            </a:schemeClr>
-          </a:solidFill>
-          <a:ln w="28575">
-            <a:solidFill>
-              <a:srgbClr val="E0700D"/>
-            </a:solidFill>
-          </a:ln>
-        </p:spPr>
-        <p:txBody>
-          <a:bodyPr wrap="square" rtlCol="0">
-            <a:spAutoFit/>
-          </a:bodyPr>
-          <a:lstStyle/>
-          <a:p>
-            <a:pPr algn="just"/>
-            <a:r>
-              <a:rPr lang="en-US" sz="1200" dirty="0">
-                <a:latin typeface="Arial" panose="020B0604020202020204" pitchFamily="34" charset="0"/>
-                <a:cs typeface="Arial" panose="020B0604020202020204" pitchFamily="34" charset="0"/>
-              </a:rPr>
-              <a:t>Comment results, which is the safe radius?, consider safe means less than 0.1 dB/90º.</a:t>
-            </a:r>
-          </a:p>
-          <a:p>
-            <a:pPr algn="just"/>
-            <a:endParaRPr lang="en-US" sz="1200" u="sng" dirty="0">
-              <a:latin typeface="Arial" panose="020B0604020202020204" pitchFamily="34" charset="0"/>
-              <a:cs typeface="Arial" panose="020B0604020202020204" pitchFamily="34" charset="0"/>
-            </a:endParaRPr>
-          </a:p>
-          <a:p>
-            <a:pPr algn="just"/>
-            <a:endParaRPr lang="en-US" sz="1200" dirty="0">
-              <a:latin typeface="Arial" panose="020B0604020202020204" pitchFamily="34" charset="0"/>
-              <a:cs typeface="Arial" panose="020B0604020202020204" pitchFamily="34" charset="0"/>
-            </a:endParaRPr>
-          </a:p>
-          <a:p>
-            <a:pPr algn="just"/>
-            <a:endParaRPr lang="en-US" sz="1200" dirty="0">
-              <a:latin typeface="Arial" panose="020B0604020202020204" pitchFamily="34" charset="0"/>
-              <a:cs typeface="Arial" panose="020B0604020202020204" pitchFamily="34" charset="0"/>
-            </a:endParaRPr>
-          </a:p>
-          <a:p>
-            <a:pPr algn="just"/>
-            <a:endParaRPr lang="en-US" sz="1200" dirty="0">
-              <a:latin typeface="Arial" panose="020B0604020202020204" pitchFamily="34" charset="0"/>
-              <a:cs typeface="Arial" panose="020B0604020202020204" pitchFamily="34" charset="0"/>
-            </a:endParaRPr>
-          </a:p>
-          <a:p>
-            <a:pPr algn="just"/>
-            <a:endParaRPr lang="en-US" sz="1200" dirty="0">
-              <a:latin typeface="Arial" panose="020B0604020202020204" pitchFamily="34" charset="0"/>
-              <a:cs typeface="Arial" panose="020B0604020202020204" pitchFamily="34" charset="0"/>
-            </a:endParaRPr>
-          </a:p>
-        </p:txBody>
-      </p:sp>
-      <p:sp>
-        <p:nvSpPr>
           <p:cNvPr id="7" name="Rectángulo 6">
             <a:extLst>
               <a:ext uri="{FF2B5EF4-FFF2-40B4-BE49-F238E27FC236}">
@@ -6394,7 +8253,7 @@
         <p:spPr>
           <a:xfrm>
             <a:off x="609441" y="1418373"/>
-            <a:ext cx="11199971" cy="3306028"/>
+            <a:ext cx="11199971" cy="4021254"/>
           </a:xfrm>
           <a:prstGeom prst="rect">
             <a:avLst/>
@@ -6482,6 +8341,66 @@
           </a:p>
         </p:txBody>
       </p:sp>
+      <p:pic>
+        <p:nvPicPr>
+          <p:cNvPr id="5" name="Imagen 4">
+            <a:extLst>
+              <a:ext uri="{FF2B5EF4-FFF2-40B4-BE49-F238E27FC236}">
+                <a16:creationId xmlns:a16="http://schemas.microsoft.com/office/drawing/2014/main" id="{D4EFAC10-DFCF-3A7B-C489-24213B4545D2}"/>
+              </a:ext>
+            </a:extLst>
+          </p:cNvPr>
+          <p:cNvPicPr>
+            <a:picLocks noChangeAspect="1"/>
+          </p:cNvPicPr>
+          <p:nvPr/>
+        </p:nvPicPr>
+        <p:blipFill>
+          <a:blip r:embed="rId5"/>
+          <a:stretch>
+            <a:fillRect/>
+          </a:stretch>
+        </p:blipFill>
+        <p:spPr>
+          <a:xfrm>
+            <a:off x="609440" y="1442806"/>
+            <a:ext cx="4964255" cy="3920691"/>
+          </a:xfrm>
+          <a:prstGeom prst="rect">
+            <a:avLst/>
+          </a:prstGeom>
+        </p:spPr>
+      </p:pic>
+      <p:pic>
+        <p:nvPicPr>
+          <p:cNvPr id="9" name="Imagen 8">
+            <a:extLst>
+              <a:ext uri="{FF2B5EF4-FFF2-40B4-BE49-F238E27FC236}">
+                <a16:creationId xmlns:a16="http://schemas.microsoft.com/office/drawing/2014/main" id="{374C1AFF-12D3-AEAD-1EC6-2DD02BE72CA0}"/>
+              </a:ext>
+            </a:extLst>
+          </p:cNvPr>
+          <p:cNvPicPr>
+            <a:picLocks noChangeAspect="1"/>
+          </p:cNvPicPr>
+          <p:nvPr/>
+        </p:nvPicPr>
+        <p:blipFill>
+          <a:blip r:embed="rId6"/>
+          <a:stretch>
+            <a:fillRect/>
+          </a:stretch>
+        </p:blipFill>
+        <p:spPr>
+          <a:xfrm>
+            <a:off x="5777326" y="1480423"/>
+            <a:ext cx="6032086" cy="3920691"/>
+          </a:xfrm>
+          <a:prstGeom prst="rect">
+            <a:avLst/>
+          </a:prstGeom>
+        </p:spPr>
+      </p:pic>
     </p:spTree>
     <p:extLst>
       <p:ext uri="{BB962C8B-B14F-4D97-AF65-F5344CB8AC3E}">
@@ -6495,7 +8414,336 @@
 </p:sld>
 </file>
 
-<file path=ppt/slides/slide14.xml><?xml version="1.0" encoding="utf-8"?>
+<file path=ppt/slides/slide15.xml><?xml version="1.0" encoding="utf-8"?>
+<p:sld xmlns:a="http://schemas.openxmlformats.org/drawingml/2006/main" xmlns:r="http://schemas.openxmlformats.org/officeDocument/2006/relationships" xmlns:p="http://schemas.openxmlformats.org/presentationml/2006/main">
+  <p:cSld>
+    <p:spTree>
+      <p:nvGrpSpPr>
+        <p:cNvPr id="1" name="">
+          <a:extLst>
+            <a:ext uri="{FF2B5EF4-FFF2-40B4-BE49-F238E27FC236}">
+              <a16:creationId xmlns:a16="http://schemas.microsoft.com/office/drawing/2014/main" id="{C530346F-1C11-6CE4-0C56-1065A674B672}"/>
+            </a:ext>
+          </a:extLst>
+        </p:cNvPr>
+        <p:cNvGrpSpPr/>
+        <p:nvPr/>
+      </p:nvGrpSpPr>
+      <p:grpSpPr>
+        <a:xfrm>
+          <a:off x="0" y="0"/>
+          <a:ext cx="0" cy="0"/>
+          <a:chOff x="0" y="0"/>
+          <a:chExt cx="0" cy="0"/>
+        </a:xfrm>
+      </p:grpSpPr>
+      <p:sp>
+        <p:nvSpPr>
+          <p:cNvPr id="16" name="object 16">
+            <a:extLst>
+              <a:ext uri="{FF2B5EF4-FFF2-40B4-BE49-F238E27FC236}">
+                <a16:creationId xmlns:a16="http://schemas.microsoft.com/office/drawing/2014/main" id="{75AB3941-E729-8651-6AFB-3F9FB2BFBCF8}"/>
+              </a:ext>
+            </a:extLst>
+          </p:cNvPr>
+          <p:cNvSpPr txBox="1">
+            <a:spLocks noGrp="1"/>
+          </p:cNvSpPr>
+          <p:nvPr>
+            <p:ph type="title"/>
+          </p:nvPr>
+        </p:nvSpPr>
+        <p:spPr>
+          <a:xfrm>
+            <a:off x="583019" y="408883"/>
+            <a:ext cx="11199971" cy="1782539"/>
+          </a:xfrm>
+          <a:prstGeom prst="rect">
+            <a:avLst/>
+          </a:prstGeom>
+        </p:spPr>
+        <p:txBody>
+          <a:bodyPr vert="horz" wrap="square" lIns="0" tIns="12700" rIns="0" bIns="0" rtlCol="0">
+            <a:spAutoFit/>
+          </a:bodyPr>
+          <a:lstStyle/>
+          <a:p>
+            <a:pPr marL="12700">
+              <a:spcBef>
+                <a:spcPts val="100"/>
+              </a:spcBef>
+            </a:pPr>
+            <a:r>
+              <a:rPr lang="en-US" sz="2500" dirty="0"/>
+              <a:t>EXTRA EJERCICIO 3: </a:t>
+            </a:r>
+            <a:br>
+              <a:rPr lang="en-US" sz="2500" dirty="0"/>
+            </a:br>
+            <a:r>
+              <a:rPr lang="en-US" b="0" dirty="0"/>
+              <a:t>Find the safe radius for this technology using silicon as the core material. Consider sweeping the radius in a 5um to 30um range. </a:t>
+            </a:r>
+            <a:br>
+              <a:rPr lang="en-US" b="0" dirty="0"/>
+            </a:br>
+            <a:br>
+              <a:rPr lang="en-US" sz="2500" dirty="0"/>
+            </a:br>
+            <a:endParaRPr lang="en-US" sz="2500" b="0" dirty="0">
+              <a:latin typeface="+mj-lt"/>
+              <a:cs typeface="Lucida Sans"/>
+            </a:endParaRPr>
+          </a:p>
+        </p:txBody>
+      </p:sp>
+      <p:pic>
+        <p:nvPicPr>
+          <p:cNvPr id="83" name="Gráfico 82">
+            <a:extLst>
+              <a:ext uri="{FF2B5EF4-FFF2-40B4-BE49-F238E27FC236}">
+                <a16:creationId xmlns:a16="http://schemas.microsoft.com/office/drawing/2014/main" id="{ACC6507C-92BA-53C7-C456-8329F38B795F}"/>
+              </a:ext>
+            </a:extLst>
+          </p:cNvPr>
+          <p:cNvPicPr>
+            <a:picLocks noChangeAspect="1"/>
+          </p:cNvPicPr>
+          <p:nvPr/>
+        </p:nvPicPr>
+        <p:blipFill>
+          <a:blip r:embed="rId3">
+            <a:extLst>
+              <a:ext uri="{96DAC541-7B7A-43D3-8B79-37D633B846F1}">
+                <asvg:svgBlip xmlns:asvg="http://schemas.microsoft.com/office/drawing/2016/SVG/main" r:embed="rId4"/>
+              </a:ext>
+            </a:extLst>
+          </a:blip>
+          <a:stretch>
+            <a:fillRect/>
+          </a:stretch>
+        </p:blipFill>
+        <p:spPr>
+          <a:xfrm>
+            <a:off x="5045006" y="6356057"/>
+            <a:ext cx="6409575" cy="363174"/>
+          </a:xfrm>
+          <a:prstGeom prst="rect">
+            <a:avLst/>
+          </a:prstGeom>
+        </p:spPr>
+      </p:pic>
+      <p:sp>
+        <p:nvSpPr>
+          <p:cNvPr id="84" name="Marcador de número de diapositiva 83">
+            <a:extLst>
+              <a:ext uri="{FF2B5EF4-FFF2-40B4-BE49-F238E27FC236}">
+                <a16:creationId xmlns:a16="http://schemas.microsoft.com/office/drawing/2014/main" id="{50E4FA01-F4C5-3E20-A4C9-EDA76A24D394}"/>
+              </a:ext>
+            </a:extLst>
+          </p:cNvPr>
+          <p:cNvSpPr>
+            <a:spLocks noGrp="1"/>
+          </p:cNvSpPr>
+          <p:nvPr>
+            <p:ph type="sldNum" sz="quarter" idx="7"/>
+          </p:nvPr>
+        </p:nvSpPr>
+        <p:spPr/>
+        <p:txBody>
+          <a:bodyPr/>
+          <a:lstStyle/>
+          <a:p>
+            <a:fld id="{B6F15528-21DE-4FAA-801E-634DDDAF4B2B}" type="slidenum">
+              <a:rPr lang="es-ES" smtClean="0"/>
+              <a:t>15</a:t>
+            </a:fld>
+            <a:endParaRPr lang="es-ES"/>
+          </a:p>
+        </p:txBody>
+      </p:sp>
+      <p:sp>
+        <p:nvSpPr>
+          <p:cNvPr id="3" name="Marcador de pie de página 2">
+            <a:extLst>
+              <a:ext uri="{FF2B5EF4-FFF2-40B4-BE49-F238E27FC236}">
+                <a16:creationId xmlns:a16="http://schemas.microsoft.com/office/drawing/2014/main" id="{3683F575-02B7-209A-F54D-D143B334522B}"/>
+              </a:ext>
+            </a:extLst>
+          </p:cNvPr>
+          <p:cNvSpPr>
+            <a:spLocks noGrp="1"/>
+          </p:cNvSpPr>
+          <p:nvPr>
+            <p:ph type="ftr" sz="quarter" idx="5"/>
+          </p:nvPr>
+        </p:nvSpPr>
+        <p:spPr/>
+        <p:txBody>
+          <a:bodyPr/>
+          <a:lstStyle/>
+          <a:p>
+            <a:pPr marL="12700">
+              <a:spcBef>
+                <a:spcPts val="15"/>
+              </a:spcBef>
+            </a:pPr>
+            <a:r>
+              <a:rPr lang="es-ES" spc="-5"/>
+              <a:t>LAB 1.0 WAVEGUIDES</a:t>
+            </a:r>
+            <a:endParaRPr lang="es-ES" spc="-5" dirty="0"/>
+          </a:p>
+        </p:txBody>
+      </p:sp>
+      <p:sp>
+        <p:nvSpPr>
+          <p:cNvPr id="2" name="CuadroTexto 1">
+            <a:extLst>
+              <a:ext uri="{FF2B5EF4-FFF2-40B4-BE49-F238E27FC236}">
+                <a16:creationId xmlns:a16="http://schemas.microsoft.com/office/drawing/2014/main" id="{0B9C3132-D722-0D81-F5A5-5CA88DA6E9D0}"/>
+              </a:ext>
+            </a:extLst>
+          </p:cNvPr>
+          <p:cNvSpPr txBox="1"/>
+          <p:nvPr/>
+        </p:nvSpPr>
+        <p:spPr>
+          <a:xfrm>
+            <a:off x="583019" y="1612918"/>
+            <a:ext cx="11199971" cy="3416320"/>
+          </a:xfrm>
+          <a:prstGeom prst="rect">
+            <a:avLst/>
+          </a:prstGeom>
+          <a:solidFill>
+            <a:schemeClr val="bg1">
+              <a:lumMod val="95000"/>
+            </a:schemeClr>
+          </a:solidFill>
+          <a:ln w="28575">
+            <a:solidFill>
+              <a:srgbClr val="E0700D"/>
+            </a:solidFill>
+          </a:ln>
+        </p:spPr>
+        <p:txBody>
+          <a:bodyPr wrap="square" rtlCol="0">
+            <a:spAutoFit/>
+          </a:bodyPr>
+          <a:lstStyle/>
+          <a:p>
+            <a:pPr algn="just"/>
+            <a:r>
+              <a:rPr lang="en-US" sz="1200" dirty="0">
+                <a:latin typeface="Arial" panose="020B0604020202020204" pitchFamily="34" charset="0"/>
+                <a:cs typeface="Arial" panose="020B0604020202020204" pitchFamily="34" charset="0"/>
+              </a:rPr>
+              <a:t>Comment results, which is the safe radius?, consider safe means less than 0.1 dB/90º.</a:t>
+            </a:r>
+          </a:p>
+          <a:p>
+            <a:pPr algn="just"/>
+            <a:endParaRPr lang="en-US" sz="1200" u="sng" dirty="0">
+              <a:latin typeface="Arial" panose="020B0604020202020204" pitchFamily="34" charset="0"/>
+              <a:cs typeface="Arial" panose="020B0604020202020204" pitchFamily="34" charset="0"/>
+            </a:endParaRPr>
+          </a:p>
+          <a:p>
+            <a:r>
+              <a:rPr lang="es-ES" sz="1200" dirty="0">
+                <a:latin typeface="Arial" panose="020B0604020202020204" pitchFamily="34" charset="0"/>
+                <a:cs typeface="Arial" panose="020B0604020202020204" pitchFamily="34" charset="0"/>
+              </a:rPr>
+              <a:t>En estas nuevas simulaciones se ha sustituido el núcleo de nitruro de silicio por silicio, manteniendo el dióxido de silicio como material de la cubierta. Además, en este caso se ha considerado una pérdida de propagación mayor, de 3 dB/cm. Debido al mayor índice de refracción del silicio, el modo se encuentra mucho más confinado en el núcleo, lo que da lugar a valores de índice efectivo significativamente mayores que en el caso anterior.</a:t>
+            </a:r>
+          </a:p>
+          <a:p>
+            <a:endParaRPr lang="es-ES" sz="1200" dirty="0">
+              <a:latin typeface="Arial" panose="020B0604020202020204" pitchFamily="34" charset="0"/>
+              <a:cs typeface="Arial" panose="020B0604020202020204" pitchFamily="34" charset="0"/>
+            </a:endParaRPr>
+          </a:p>
+          <a:p>
+            <a:r>
+              <a:rPr lang="es-ES" sz="1200" dirty="0">
+                <a:latin typeface="Arial" panose="020B0604020202020204" pitchFamily="34" charset="0"/>
+                <a:cs typeface="Arial" panose="020B0604020202020204" pitchFamily="34" charset="0"/>
+              </a:rPr>
+              <a:t>En la gráfica de pérdidas de la izquierda se observa un comportamiento similar al descrito previamente: las pérdidas de modo disminuyen al aumentar el radio de curvatura, mientras que las pérdidas de propagación aumentan debido al mayor recorrido del modo. Sin embargo, al considerar una pérdida de propagación mayor, la contribución de estas pérdidas es más significativa incluso siendo radios relativamente pequeños los simulados.</a:t>
+            </a:r>
+          </a:p>
+          <a:p>
+            <a:endParaRPr lang="es-ES" sz="1200" dirty="0">
+              <a:latin typeface="Arial" panose="020B0604020202020204" pitchFamily="34" charset="0"/>
+              <a:cs typeface="Arial" panose="020B0604020202020204" pitchFamily="34" charset="0"/>
+            </a:endParaRPr>
+          </a:p>
+          <a:p>
+            <a:r>
+              <a:rPr lang="es-ES" sz="1200" dirty="0">
+                <a:latin typeface="Arial" panose="020B0604020202020204" pitchFamily="34" charset="0"/>
+                <a:cs typeface="Arial" panose="020B0604020202020204" pitchFamily="34" charset="0"/>
+              </a:rPr>
+              <a:t>Por otro lado, en la gráfica del índice efectivo en función del radio de curvatura, se observa que los valores son considerablemente mayores que en el caso del nitruro de silicio, situándose alrededor de 3. Esto se debe al mayor índice de refracción del silicio, que provoca un confinamiento más fuerte del modo dentro del núcleo. A medida que el radio de curvatura aumenta, el índice efectivo disminuye ligeramente y tiende a estabilizarse, ya que la guía se comporta cada vez más como una guía recta.</a:t>
+            </a:r>
+          </a:p>
+          <a:p>
+            <a:endParaRPr lang="es-ES" sz="1200" dirty="0">
+              <a:latin typeface="Arial" panose="020B0604020202020204" pitchFamily="34" charset="0"/>
+              <a:cs typeface="Arial" panose="020B0604020202020204" pitchFamily="34" charset="0"/>
+            </a:endParaRPr>
+          </a:p>
+          <a:p>
+            <a:r>
+              <a:rPr lang="es-ES" sz="1200" dirty="0">
+                <a:latin typeface="Arial" panose="020B0604020202020204" pitchFamily="34" charset="0"/>
+                <a:cs typeface="Arial" panose="020B0604020202020204" pitchFamily="34" charset="0"/>
+              </a:rPr>
+              <a:t>Por último, podríamos decir que el rango de radios óptimos de 10-15 </a:t>
+            </a:r>
+            <a:r>
+              <a:rPr lang="es-ES" sz="1200" dirty="0" err="1">
+                <a:latin typeface="Arial" panose="020B0604020202020204" pitchFamily="34" charset="0"/>
+                <a:cs typeface="Arial" panose="020B0604020202020204" pitchFamily="34" charset="0"/>
+              </a:rPr>
+              <a:t>um</a:t>
+            </a:r>
+            <a:r>
+              <a:rPr lang="es-ES" sz="1200" dirty="0">
+                <a:latin typeface="Arial" panose="020B0604020202020204" pitchFamily="34" charset="0"/>
+                <a:cs typeface="Arial" panose="020B0604020202020204" pitchFamily="34" charset="0"/>
+              </a:rPr>
+              <a:t>, mientras que el rango de radios seguros va a ser de todos los valores simulados como mínimo, ya que para todos estos radios, su suma de pérdidas es menor a 0.1 dB.</a:t>
+            </a:r>
+            <a:endParaRPr lang="en-US" sz="1200" dirty="0">
+              <a:latin typeface="Arial" panose="020B0604020202020204" pitchFamily="34" charset="0"/>
+              <a:cs typeface="Arial" panose="020B0604020202020204" pitchFamily="34" charset="0"/>
+            </a:endParaRPr>
+          </a:p>
+          <a:p>
+            <a:pPr algn="just"/>
+            <a:endParaRPr lang="en-US" sz="1200" dirty="0">
+              <a:latin typeface="Arial" panose="020B0604020202020204" pitchFamily="34" charset="0"/>
+              <a:cs typeface="Arial" panose="020B0604020202020204" pitchFamily="34" charset="0"/>
+            </a:endParaRPr>
+          </a:p>
+        </p:txBody>
+      </p:sp>
+    </p:spTree>
+    <p:extLst>
+      <p:ext uri="{BB962C8B-B14F-4D97-AF65-F5344CB8AC3E}">
+        <p14:creationId xmlns:p14="http://schemas.microsoft.com/office/powerpoint/2010/main" val="1950442400"/>
+      </p:ext>
+    </p:extLst>
+  </p:cSld>
+  <p:clrMapOvr>
+    <a:masterClrMapping/>
+  </p:clrMapOvr>
+</p:sld>
+</file>
+
+<file path=ppt/slides/slide16.xml><?xml version="1.0" encoding="utf-8"?>
 <p:sld xmlns:a="http://schemas.openxmlformats.org/drawingml/2006/main" xmlns:r="http://schemas.openxmlformats.org/officeDocument/2006/relationships" xmlns:p="http://schemas.openxmlformats.org/presentationml/2006/main">
   <p:cSld>
     <p:spTree>
@@ -6634,7 +8882,7 @@
           <a:p>
             <a:fld id="{B6F15528-21DE-4FAA-801E-634DDDAF4B2B}" type="slidenum">
               <a:rPr lang="es-ES" smtClean="0"/>
-              <a:t>14</a:t>
+              <a:t>16</a:t>
             </a:fld>
             <a:endParaRPr lang="es-ES"/>
           </a:p>

--- a/LabBook_10.pptx
+++ b/LabBook_10.pptx
@@ -5,10 +5,10 @@
     <p:sldMasterId id="2147483648" r:id="rId1"/>
   </p:sldMasterIdLst>
   <p:notesMasterIdLst>
-    <p:notesMasterId r:id="rId18"/>
+    <p:notesMasterId r:id="rId23"/>
   </p:notesMasterIdLst>
   <p:handoutMasterIdLst>
-    <p:handoutMasterId r:id="rId19"/>
+    <p:handoutMasterId r:id="rId24"/>
   </p:handoutMasterIdLst>
   <p:sldIdLst>
     <p:sldId id="256" r:id="rId2"/>
@@ -24,9 +24,14 @@
     <p:sldId id="304" r:id="rId12"/>
     <p:sldId id="293" r:id="rId13"/>
     <p:sldId id="306" r:id="rId14"/>
-    <p:sldId id="305" r:id="rId15"/>
-    <p:sldId id="307" r:id="rId16"/>
-    <p:sldId id="288" r:id="rId17"/>
+    <p:sldId id="309" r:id="rId15"/>
+    <p:sldId id="308" r:id="rId16"/>
+    <p:sldId id="310" r:id="rId17"/>
+    <p:sldId id="311" r:id="rId18"/>
+    <p:sldId id="312" r:id="rId19"/>
+    <p:sldId id="305" r:id="rId20"/>
+    <p:sldId id="307" r:id="rId21"/>
+    <p:sldId id="288" r:id="rId22"/>
   </p:sldIdLst>
   <p:sldSz cx="12192000" cy="6858000"/>
   <p:notesSz cx="12192000" cy="6858000"/>
@@ -241,7 +246,7 @@
           <a:p>
             <a:fld id="{8438F8DC-35B0-48E6-A86E-42F1F08DD00F}" type="datetimeFigureOut">
               <a:rPr lang="es-ES" smtClean="0"/>
-              <a:t>10/03/2026</a:t>
+              <a:t>11/03/2026</a:t>
             </a:fld>
             <a:endParaRPr lang="es-ES"/>
           </a:p>
@@ -418,7 +423,7 @@
           <a:p>
             <a:fld id="{FACBDC12-F39B-4B97-8F4D-6734F9D366FF}" type="datetimeFigureOut">
               <a:rPr lang="es-ES" smtClean="0"/>
-              <a:t>10/03/2026</a:t>
+              <a:t>11/03/2026</a:t>
             </a:fld>
             <a:endParaRPr lang="es-ES"/>
           </a:p>
@@ -993,6 +998,546 @@
         <p:cNvPr id="1" name="">
           <a:extLst>
             <a:ext uri="{FF2B5EF4-FFF2-40B4-BE49-F238E27FC236}">
+              <a16:creationId xmlns:a16="http://schemas.microsoft.com/office/drawing/2014/main" id="{2BCFE13D-3B4E-739F-356B-1ED6EACA3174}"/>
+            </a:ext>
+          </a:extLst>
+        </p:cNvPr>
+        <p:cNvGrpSpPr/>
+        <p:nvPr/>
+      </p:nvGrpSpPr>
+      <p:grpSpPr>
+        <a:xfrm>
+          <a:off x="0" y="0"/>
+          <a:ext cx="0" cy="0"/>
+          <a:chOff x="0" y="0"/>
+          <a:chExt cx="0" cy="0"/>
+        </a:xfrm>
+      </p:grpSpPr>
+      <p:sp>
+        <p:nvSpPr>
+          <p:cNvPr id="2" name="Marcador de imagen de diapositiva 1">
+            <a:extLst>
+              <a:ext uri="{FF2B5EF4-FFF2-40B4-BE49-F238E27FC236}">
+                <a16:creationId xmlns:a16="http://schemas.microsoft.com/office/drawing/2014/main" id="{FE17FAAF-7923-8437-91A7-199F79AB017B}"/>
+              </a:ext>
+            </a:extLst>
+          </p:cNvPr>
+          <p:cNvSpPr>
+            <a:spLocks noGrp="1" noRot="1" noChangeAspect="1"/>
+          </p:cNvSpPr>
+          <p:nvPr>
+            <p:ph type="sldImg"/>
+          </p:nvPr>
+        </p:nvSpPr>
+        <p:spPr/>
+      </p:sp>
+      <p:sp>
+        <p:nvSpPr>
+          <p:cNvPr id="3" name="Marcador de notas 2">
+            <a:extLst>
+              <a:ext uri="{FF2B5EF4-FFF2-40B4-BE49-F238E27FC236}">
+                <a16:creationId xmlns:a16="http://schemas.microsoft.com/office/drawing/2014/main" id="{66093DF6-FD67-A5BB-E03C-1655C8630A69}"/>
+              </a:ext>
+            </a:extLst>
+          </p:cNvPr>
+          <p:cNvSpPr>
+            <a:spLocks noGrp="1"/>
+          </p:cNvSpPr>
+          <p:nvPr>
+            <p:ph type="body" idx="1"/>
+          </p:nvPr>
+        </p:nvSpPr>
+        <p:spPr/>
+        <p:txBody>
+          <a:bodyPr/>
+          <a:lstStyle/>
+          <a:p>
+            <a:endParaRPr lang="es-ES" dirty="0"/>
+          </a:p>
+        </p:txBody>
+      </p:sp>
+      <p:sp>
+        <p:nvSpPr>
+          <p:cNvPr id="4" name="Marcador de número de diapositiva 3">
+            <a:extLst>
+              <a:ext uri="{FF2B5EF4-FFF2-40B4-BE49-F238E27FC236}">
+                <a16:creationId xmlns:a16="http://schemas.microsoft.com/office/drawing/2014/main" id="{361BD152-8B49-F521-00DA-4812CCF7624A}"/>
+              </a:ext>
+            </a:extLst>
+          </p:cNvPr>
+          <p:cNvSpPr>
+            <a:spLocks noGrp="1"/>
+          </p:cNvSpPr>
+          <p:nvPr>
+            <p:ph type="sldNum" sz="quarter" idx="5"/>
+          </p:nvPr>
+        </p:nvSpPr>
+        <p:spPr/>
+        <p:txBody>
+          <a:bodyPr/>
+          <a:lstStyle/>
+          <a:p>
+            <a:fld id="{676223B9-C868-4436-87D9-1A3152E1157A}" type="slidenum">
+              <a:rPr lang="es-ES" smtClean="0"/>
+              <a:t>14</a:t>
+            </a:fld>
+            <a:endParaRPr lang="es-ES"/>
+          </a:p>
+        </p:txBody>
+      </p:sp>
+    </p:spTree>
+    <p:extLst>
+      <p:ext uri="{BB962C8B-B14F-4D97-AF65-F5344CB8AC3E}">
+        <p14:creationId xmlns:p14="http://schemas.microsoft.com/office/powerpoint/2010/main" val="2757885257"/>
+      </p:ext>
+    </p:extLst>
+  </p:cSld>
+  <p:clrMapOvr>
+    <a:masterClrMapping/>
+  </p:clrMapOvr>
+</p:notes>
+</file>
+
+<file path=ppt/notesSlides/notesSlide13.xml><?xml version="1.0" encoding="utf-8"?>
+<p:notes xmlns:a="http://schemas.openxmlformats.org/drawingml/2006/main" xmlns:r="http://schemas.openxmlformats.org/officeDocument/2006/relationships" xmlns:p="http://schemas.openxmlformats.org/presentationml/2006/main">
+  <p:cSld>
+    <p:spTree>
+      <p:nvGrpSpPr>
+        <p:cNvPr id="1" name="">
+          <a:extLst>
+            <a:ext uri="{FF2B5EF4-FFF2-40B4-BE49-F238E27FC236}">
+              <a16:creationId xmlns:a16="http://schemas.microsoft.com/office/drawing/2014/main" id="{7AB0610B-BED1-5D98-B16F-3464706DCD21}"/>
+            </a:ext>
+          </a:extLst>
+        </p:cNvPr>
+        <p:cNvGrpSpPr/>
+        <p:nvPr/>
+      </p:nvGrpSpPr>
+      <p:grpSpPr>
+        <a:xfrm>
+          <a:off x="0" y="0"/>
+          <a:ext cx="0" cy="0"/>
+          <a:chOff x="0" y="0"/>
+          <a:chExt cx="0" cy="0"/>
+        </a:xfrm>
+      </p:grpSpPr>
+      <p:sp>
+        <p:nvSpPr>
+          <p:cNvPr id="2" name="Marcador de imagen de diapositiva 1">
+            <a:extLst>
+              <a:ext uri="{FF2B5EF4-FFF2-40B4-BE49-F238E27FC236}">
+                <a16:creationId xmlns:a16="http://schemas.microsoft.com/office/drawing/2014/main" id="{15BE0DE1-8042-E014-B858-8CA1F6BE23B5}"/>
+              </a:ext>
+            </a:extLst>
+          </p:cNvPr>
+          <p:cNvSpPr>
+            <a:spLocks noGrp="1" noRot="1" noChangeAspect="1"/>
+          </p:cNvSpPr>
+          <p:nvPr>
+            <p:ph type="sldImg"/>
+          </p:nvPr>
+        </p:nvSpPr>
+        <p:spPr/>
+      </p:sp>
+      <p:sp>
+        <p:nvSpPr>
+          <p:cNvPr id="3" name="Marcador de notas 2">
+            <a:extLst>
+              <a:ext uri="{FF2B5EF4-FFF2-40B4-BE49-F238E27FC236}">
+                <a16:creationId xmlns:a16="http://schemas.microsoft.com/office/drawing/2014/main" id="{515C018B-F255-FD53-2F5B-3A2C64304014}"/>
+              </a:ext>
+            </a:extLst>
+          </p:cNvPr>
+          <p:cNvSpPr>
+            <a:spLocks noGrp="1"/>
+          </p:cNvSpPr>
+          <p:nvPr>
+            <p:ph type="body" idx="1"/>
+          </p:nvPr>
+        </p:nvSpPr>
+        <p:spPr/>
+        <p:txBody>
+          <a:bodyPr/>
+          <a:lstStyle/>
+          <a:p>
+            <a:endParaRPr lang="es-ES" dirty="0"/>
+          </a:p>
+        </p:txBody>
+      </p:sp>
+      <p:sp>
+        <p:nvSpPr>
+          <p:cNvPr id="4" name="Marcador de número de diapositiva 3">
+            <a:extLst>
+              <a:ext uri="{FF2B5EF4-FFF2-40B4-BE49-F238E27FC236}">
+                <a16:creationId xmlns:a16="http://schemas.microsoft.com/office/drawing/2014/main" id="{FC4E1FFA-B94C-4CDB-A485-79DF4A7A5B37}"/>
+              </a:ext>
+            </a:extLst>
+          </p:cNvPr>
+          <p:cNvSpPr>
+            <a:spLocks noGrp="1"/>
+          </p:cNvSpPr>
+          <p:nvPr>
+            <p:ph type="sldNum" sz="quarter" idx="5"/>
+          </p:nvPr>
+        </p:nvSpPr>
+        <p:spPr/>
+        <p:txBody>
+          <a:bodyPr/>
+          <a:lstStyle/>
+          <a:p>
+            <a:fld id="{676223B9-C868-4436-87D9-1A3152E1157A}" type="slidenum">
+              <a:rPr lang="es-ES" smtClean="0"/>
+              <a:t>15</a:t>
+            </a:fld>
+            <a:endParaRPr lang="es-ES"/>
+          </a:p>
+        </p:txBody>
+      </p:sp>
+    </p:spTree>
+    <p:extLst>
+      <p:ext uri="{BB962C8B-B14F-4D97-AF65-F5344CB8AC3E}">
+        <p14:creationId xmlns:p14="http://schemas.microsoft.com/office/powerpoint/2010/main" val="2323543497"/>
+      </p:ext>
+    </p:extLst>
+  </p:cSld>
+  <p:clrMapOvr>
+    <a:masterClrMapping/>
+  </p:clrMapOvr>
+</p:notes>
+</file>
+
+<file path=ppt/notesSlides/notesSlide14.xml><?xml version="1.0" encoding="utf-8"?>
+<p:notes xmlns:a="http://schemas.openxmlformats.org/drawingml/2006/main" xmlns:r="http://schemas.openxmlformats.org/officeDocument/2006/relationships" xmlns:p="http://schemas.openxmlformats.org/presentationml/2006/main">
+  <p:cSld>
+    <p:spTree>
+      <p:nvGrpSpPr>
+        <p:cNvPr id="1" name="">
+          <a:extLst>
+            <a:ext uri="{FF2B5EF4-FFF2-40B4-BE49-F238E27FC236}">
+              <a16:creationId xmlns:a16="http://schemas.microsoft.com/office/drawing/2014/main" id="{A16A68AC-C58A-846E-7F46-638880890E36}"/>
+            </a:ext>
+          </a:extLst>
+        </p:cNvPr>
+        <p:cNvGrpSpPr/>
+        <p:nvPr/>
+      </p:nvGrpSpPr>
+      <p:grpSpPr>
+        <a:xfrm>
+          <a:off x="0" y="0"/>
+          <a:ext cx="0" cy="0"/>
+          <a:chOff x="0" y="0"/>
+          <a:chExt cx="0" cy="0"/>
+        </a:xfrm>
+      </p:grpSpPr>
+      <p:sp>
+        <p:nvSpPr>
+          <p:cNvPr id="2" name="Marcador de imagen de diapositiva 1">
+            <a:extLst>
+              <a:ext uri="{FF2B5EF4-FFF2-40B4-BE49-F238E27FC236}">
+                <a16:creationId xmlns:a16="http://schemas.microsoft.com/office/drawing/2014/main" id="{510D757F-ED03-5507-C87C-1D4AE9064362}"/>
+              </a:ext>
+            </a:extLst>
+          </p:cNvPr>
+          <p:cNvSpPr>
+            <a:spLocks noGrp="1" noRot="1" noChangeAspect="1"/>
+          </p:cNvSpPr>
+          <p:nvPr>
+            <p:ph type="sldImg"/>
+          </p:nvPr>
+        </p:nvSpPr>
+        <p:spPr/>
+      </p:sp>
+      <p:sp>
+        <p:nvSpPr>
+          <p:cNvPr id="3" name="Marcador de notas 2">
+            <a:extLst>
+              <a:ext uri="{FF2B5EF4-FFF2-40B4-BE49-F238E27FC236}">
+                <a16:creationId xmlns:a16="http://schemas.microsoft.com/office/drawing/2014/main" id="{49951EA6-7512-C325-406C-2DEFF3221B7D}"/>
+              </a:ext>
+            </a:extLst>
+          </p:cNvPr>
+          <p:cNvSpPr>
+            <a:spLocks noGrp="1"/>
+          </p:cNvSpPr>
+          <p:nvPr>
+            <p:ph type="body" idx="1"/>
+          </p:nvPr>
+        </p:nvSpPr>
+        <p:spPr/>
+        <p:txBody>
+          <a:bodyPr/>
+          <a:lstStyle/>
+          <a:p>
+            <a:endParaRPr lang="es-ES" dirty="0"/>
+          </a:p>
+        </p:txBody>
+      </p:sp>
+      <p:sp>
+        <p:nvSpPr>
+          <p:cNvPr id="4" name="Marcador de número de diapositiva 3">
+            <a:extLst>
+              <a:ext uri="{FF2B5EF4-FFF2-40B4-BE49-F238E27FC236}">
+                <a16:creationId xmlns:a16="http://schemas.microsoft.com/office/drawing/2014/main" id="{F0378E57-4CF7-C85F-6E70-31D8A10988B4}"/>
+              </a:ext>
+            </a:extLst>
+          </p:cNvPr>
+          <p:cNvSpPr>
+            <a:spLocks noGrp="1"/>
+          </p:cNvSpPr>
+          <p:nvPr>
+            <p:ph type="sldNum" sz="quarter" idx="5"/>
+          </p:nvPr>
+        </p:nvSpPr>
+        <p:spPr/>
+        <p:txBody>
+          <a:bodyPr/>
+          <a:lstStyle/>
+          <a:p>
+            <a:fld id="{676223B9-C868-4436-87D9-1A3152E1157A}" type="slidenum">
+              <a:rPr lang="es-ES" smtClean="0"/>
+              <a:t>16</a:t>
+            </a:fld>
+            <a:endParaRPr lang="es-ES"/>
+          </a:p>
+        </p:txBody>
+      </p:sp>
+    </p:spTree>
+    <p:extLst>
+      <p:ext uri="{BB962C8B-B14F-4D97-AF65-F5344CB8AC3E}">
+        <p14:creationId xmlns:p14="http://schemas.microsoft.com/office/powerpoint/2010/main" val="321573311"/>
+      </p:ext>
+    </p:extLst>
+  </p:cSld>
+  <p:clrMapOvr>
+    <a:masterClrMapping/>
+  </p:clrMapOvr>
+</p:notes>
+</file>
+
+<file path=ppt/notesSlides/notesSlide15.xml><?xml version="1.0" encoding="utf-8"?>
+<p:notes xmlns:a="http://schemas.openxmlformats.org/drawingml/2006/main" xmlns:r="http://schemas.openxmlformats.org/officeDocument/2006/relationships" xmlns:p="http://schemas.openxmlformats.org/presentationml/2006/main">
+  <p:cSld>
+    <p:spTree>
+      <p:nvGrpSpPr>
+        <p:cNvPr id="1" name="">
+          <a:extLst>
+            <a:ext uri="{FF2B5EF4-FFF2-40B4-BE49-F238E27FC236}">
+              <a16:creationId xmlns:a16="http://schemas.microsoft.com/office/drawing/2014/main" id="{418A2924-4DE5-DB9A-502C-CD2C5F87BCB9}"/>
+            </a:ext>
+          </a:extLst>
+        </p:cNvPr>
+        <p:cNvGrpSpPr/>
+        <p:nvPr/>
+      </p:nvGrpSpPr>
+      <p:grpSpPr>
+        <a:xfrm>
+          <a:off x="0" y="0"/>
+          <a:ext cx="0" cy="0"/>
+          <a:chOff x="0" y="0"/>
+          <a:chExt cx="0" cy="0"/>
+        </a:xfrm>
+      </p:grpSpPr>
+      <p:sp>
+        <p:nvSpPr>
+          <p:cNvPr id="2" name="Marcador de imagen de diapositiva 1">
+            <a:extLst>
+              <a:ext uri="{FF2B5EF4-FFF2-40B4-BE49-F238E27FC236}">
+                <a16:creationId xmlns:a16="http://schemas.microsoft.com/office/drawing/2014/main" id="{AFCE5034-74D5-8549-84B9-24C49876E66F}"/>
+              </a:ext>
+            </a:extLst>
+          </p:cNvPr>
+          <p:cNvSpPr>
+            <a:spLocks noGrp="1" noRot="1" noChangeAspect="1"/>
+          </p:cNvSpPr>
+          <p:nvPr>
+            <p:ph type="sldImg"/>
+          </p:nvPr>
+        </p:nvSpPr>
+        <p:spPr/>
+      </p:sp>
+      <p:sp>
+        <p:nvSpPr>
+          <p:cNvPr id="3" name="Marcador de notas 2">
+            <a:extLst>
+              <a:ext uri="{FF2B5EF4-FFF2-40B4-BE49-F238E27FC236}">
+                <a16:creationId xmlns:a16="http://schemas.microsoft.com/office/drawing/2014/main" id="{3D1E3FC3-B083-70D9-3AB0-53D58AE4027A}"/>
+              </a:ext>
+            </a:extLst>
+          </p:cNvPr>
+          <p:cNvSpPr>
+            <a:spLocks noGrp="1"/>
+          </p:cNvSpPr>
+          <p:nvPr>
+            <p:ph type="body" idx="1"/>
+          </p:nvPr>
+        </p:nvSpPr>
+        <p:spPr/>
+        <p:txBody>
+          <a:bodyPr/>
+          <a:lstStyle/>
+          <a:p>
+            <a:endParaRPr lang="es-ES" dirty="0"/>
+          </a:p>
+        </p:txBody>
+      </p:sp>
+      <p:sp>
+        <p:nvSpPr>
+          <p:cNvPr id="4" name="Marcador de número de diapositiva 3">
+            <a:extLst>
+              <a:ext uri="{FF2B5EF4-FFF2-40B4-BE49-F238E27FC236}">
+                <a16:creationId xmlns:a16="http://schemas.microsoft.com/office/drawing/2014/main" id="{DAD32042-FA4B-3BEE-66AC-A5B970A1239D}"/>
+              </a:ext>
+            </a:extLst>
+          </p:cNvPr>
+          <p:cNvSpPr>
+            <a:spLocks noGrp="1"/>
+          </p:cNvSpPr>
+          <p:nvPr>
+            <p:ph type="sldNum" sz="quarter" idx="5"/>
+          </p:nvPr>
+        </p:nvSpPr>
+        <p:spPr/>
+        <p:txBody>
+          <a:bodyPr/>
+          <a:lstStyle/>
+          <a:p>
+            <a:fld id="{676223B9-C868-4436-87D9-1A3152E1157A}" type="slidenum">
+              <a:rPr lang="es-ES" smtClean="0"/>
+              <a:t>17</a:t>
+            </a:fld>
+            <a:endParaRPr lang="es-ES"/>
+          </a:p>
+        </p:txBody>
+      </p:sp>
+    </p:spTree>
+    <p:extLst>
+      <p:ext uri="{BB962C8B-B14F-4D97-AF65-F5344CB8AC3E}">
+        <p14:creationId xmlns:p14="http://schemas.microsoft.com/office/powerpoint/2010/main" val="2943365190"/>
+      </p:ext>
+    </p:extLst>
+  </p:cSld>
+  <p:clrMapOvr>
+    <a:masterClrMapping/>
+  </p:clrMapOvr>
+</p:notes>
+</file>
+
+<file path=ppt/notesSlides/notesSlide16.xml><?xml version="1.0" encoding="utf-8"?>
+<p:notes xmlns:a="http://schemas.openxmlformats.org/drawingml/2006/main" xmlns:r="http://schemas.openxmlformats.org/officeDocument/2006/relationships" xmlns:p="http://schemas.openxmlformats.org/presentationml/2006/main">
+  <p:cSld>
+    <p:spTree>
+      <p:nvGrpSpPr>
+        <p:cNvPr id="1" name="">
+          <a:extLst>
+            <a:ext uri="{FF2B5EF4-FFF2-40B4-BE49-F238E27FC236}">
+              <a16:creationId xmlns:a16="http://schemas.microsoft.com/office/drawing/2014/main" id="{6D150DEA-1BDB-A16C-45B1-0AC88190C4C0}"/>
+            </a:ext>
+          </a:extLst>
+        </p:cNvPr>
+        <p:cNvGrpSpPr/>
+        <p:nvPr/>
+      </p:nvGrpSpPr>
+      <p:grpSpPr>
+        <a:xfrm>
+          <a:off x="0" y="0"/>
+          <a:ext cx="0" cy="0"/>
+          <a:chOff x="0" y="0"/>
+          <a:chExt cx="0" cy="0"/>
+        </a:xfrm>
+      </p:grpSpPr>
+      <p:sp>
+        <p:nvSpPr>
+          <p:cNvPr id="2" name="Marcador de imagen de diapositiva 1">
+            <a:extLst>
+              <a:ext uri="{FF2B5EF4-FFF2-40B4-BE49-F238E27FC236}">
+                <a16:creationId xmlns:a16="http://schemas.microsoft.com/office/drawing/2014/main" id="{3767B5BE-CD77-28ED-9AD6-E16A79DE4251}"/>
+              </a:ext>
+            </a:extLst>
+          </p:cNvPr>
+          <p:cNvSpPr>
+            <a:spLocks noGrp="1" noRot="1" noChangeAspect="1"/>
+          </p:cNvSpPr>
+          <p:nvPr>
+            <p:ph type="sldImg"/>
+          </p:nvPr>
+        </p:nvSpPr>
+        <p:spPr/>
+      </p:sp>
+      <p:sp>
+        <p:nvSpPr>
+          <p:cNvPr id="3" name="Marcador de notas 2">
+            <a:extLst>
+              <a:ext uri="{FF2B5EF4-FFF2-40B4-BE49-F238E27FC236}">
+                <a16:creationId xmlns:a16="http://schemas.microsoft.com/office/drawing/2014/main" id="{BBCA1DCA-6470-56DA-C4DC-28B8BFD3F2BB}"/>
+              </a:ext>
+            </a:extLst>
+          </p:cNvPr>
+          <p:cNvSpPr>
+            <a:spLocks noGrp="1"/>
+          </p:cNvSpPr>
+          <p:nvPr>
+            <p:ph type="body" idx="1"/>
+          </p:nvPr>
+        </p:nvSpPr>
+        <p:spPr/>
+        <p:txBody>
+          <a:bodyPr/>
+          <a:lstStyle/>
+          <a:p>
+            <a:endParaRPr lang="es-ES" dirty="0"/>
+          </a:p>
+        </p:txBody>
+      </p:sp>
+      <p:sp>
+        <p:nvSpPr>
+          <p:cNvPr id="4" name="Marcador de número de diapositiva 3">
+            <a:extLst>
+              <a:ext uri="{FF2B5EF4-FFF2-40B4-BE49-F238E27FC236}">
+                <a16:creationId xmlns:a16="http://schemas.microsoft.com/office/drawing/2014/main" id="{14C01E22-D5AD-CE4C-3CED-5ACD260915D3}"/>
+              </a:ext>
+            </a:extLst>
+          </p:cNvPr>
+          <p:cNvSpPr>
+            <a:spLocks noGrp="1"/>
+          </p:cNvSpPr>
+          <p:nvPr>
+            <p:ph type="sldNum" sz="quarter" idx="5"/>
+          </p:nvPr>
+        </p:nvSpPr>
+        <p:spPr/>
+        <p:txBody>
+          <a:bodyPr/>
+          <a:lstStyle/>
+          <a:p>
+            <a:fld id="{676223B9-C868-4436-87D9-1A3152E1157A}" type="slidenum">
+              <a:rPr lang="es-ES" smtClean="0"/>
+              <a:t>18</a:t>
+            </a:fld>
+            <a:endParaRPr lang="es-ES"/>
+          </a:p>
+        </p:txBody>
+      </p:sp>
+    </p:spTree>
+    <p:extLst>
+      <p:ext uri="{BB962C8B-B14F-4D97-AF65-F5344CB8AC3E}">
+        <p14:creationId xmlns:p14="http://schemas.microsoft.com/office/powerpoint/2010/main" val="3014335671"/>
+      </p:ext>
+    </p:extLst>
+  </p:cSld>
+  <p:clrMapOvr>
+    <a:masterClrMapping/>
+  </p:clrMapOvr>
+</p:notes>
+</file>
+
+<file path=ppt/notesSlides/notesSlide17.xml><?xml version="1.0" encoding="utf-8"?>
+<p:notes xmlns:a="http://schemas.openxmlformats.org/drawingml/2006/main" xmlns:r="http://schemas.openxmlformats.org/officeDocument/2006/relationships" xmlns:p="http://schemas.openxmlformats.org/presentationml/2006/main">
+  <p:cSld>
+    <p:spTree>
+      <p:nvGrpSpPr>
+        <p:cNvPr id="1" name="">
+          <a:extLst>
+            <a:ext uri="{FF2B5EF4-FFF2-40B4-BE49-F238E27FC236}">
               <a16:creationId xmlns:a16="http://schemas.microsoft.com/office/drawing/2014/main" id="{6804C9DC-82CC-4670-22D4-5992593A56DE}"/>
             </a:ext>
           </a:extLst>
@@ -1074,7 +1619,7 @@
           <a:p>
             <a:fld id="{676223B9-C868-4436-87D9-1A3152E1157A}" type="slidenum">
               <a:rPr lang="es-ES" smtClean="0"/>
-              <a:t>14</a:t>
+              <a:t>19</a:t>
             </a:fld>
             <a:endParaRPr lang="es-ES"/>
           </a:p>
@@ -1093,7 +1638,7 @@
 </p:notes>
 </file>
 
-<file path=ppt/notesSlides/notesSlide13.xml><?xml version="1.0" encoding="utf-8"?>
+<file path=ppt/notesSlides/notesSlide18.xml><?xml version="1.0" encoding="utf-8"?>
 <p:notes xmlns:a="http://schemas.openxmlformats.org/drawingml/2006/main" xmlns:r="http://schemas.openxmlformats.org/officeDocument/2006/relationships" xmlns:p="http://schemas.openxmlformats.org/presentationml/2006/main">
   <p:cSld>
     <p:spTree>
@@ -1182,7 +1727,7 @@
           <a:p>
             <a:fld id="{676223B9-C868-4436-87D9-1A3152E1157A}" type="slidenum">
               <a:rPr lang="es-ES" smtClean="0"/>
-              <a:t>15</a:t>
+              <a:t>20</a:t>
             </a:fld>
             <a:endParaRPr lang="es-ES"/>
           </a:p>
@@ -3646,6 +4191,49 @@
               <a:t>1</a:t>
             </a:fld>
             <a:endParaRPr lang="es-ES"/>
+          </a:p>
+        </p:txBody>
+      </p:sp>
+      <p:sp>
+        <p:nvSpPr>
+          <p:cNvPr id="2" name="CuadroTexto 1">
+            <a:extLst>
+              <a:ext uri="{FF2B5EF4-FFF2-40B4-BE49-F238E27FC236}">
+                <a16:creationId xmlns:a16="http://schemas.microsoft.com/office/drawing/2014/main" id="{B0D34455-D259-6803-6157-D4D57EF20FC9}"/>
+              </a:ext>
+            </a:extLst>
+          </p:cNvPr>
+          <p:cNvSpPr txBox="1"/>
+          <p:nvPr/>
+        </p:nvSpPr>
+        <p:spPr>
+          <a:xfrm>
+            <a:off x="2667000" y="5911435"/>
+            <a:ext cx="8305800" cy="369332"/>
+          </a:xfrm>
+          <a:prstGeom prst="rect">
+            <a:avLst/>
+          </a:prstGeom>
+          <a:noFill/>
+        </p:spPr>
+        <p:txBody>
+          <a:bodyPr wrap="square">
+            <a:spAutoFit/>
+          </a:bodyPr>
+          <a:lstStyle/>
+          <a:p>
+            <a:r>
+              <a:rPr lang="es-ES" dirty="0"/>
+              <a:t>URL </a:t>
+            </a:r>
+            <a:r>
+              <a:rPr lang="es-ES" dirty="0" err="1"/>
+              <a:t>direction</a:t>
+            </a:r>
+            <a:r>
+              <a:rPr lang="es-ES" dirty="0"/>
+              <a:t>: https://github.com/cccanvas-upv/cifoin-lab1/tree/Lab1_Lidia</a:t>
+            </a:r>
           </a:p>
         </p:txBody>
       </p:sp>
@@ -8064,6 +8652,3774 @@
         <p:cNvPr id="1" name="">
           <a:extLst>
             <a:ext uri="{FF2B5EF4-FFF2-40B4-BE49-F238E27FC236}">
+              <a16:creationId xmlns:a16="http://schemas.microsoft.com/office/drawing/2014/main" id="{318550AF-7EAA-8177-5F2B-4FAF9EC9E93F}"/>
+            </a:ext>
+          </a:extLst>
+        </p:cNvPr>
+        <p:cNvGrpSpPr/>
+        <p:nvPr/>
+      </p:nvGrpSpPr>
+      <p:grpSpPr>
+        <a:xfrm>
+          <a:off x="0" y="0"/>
+          <a:ext cx="0" cy="0"/>
+          <a:chOff x="0" y="0"/>
+          <a:chExt cx="0" cy="0"/>
+        </a:xfrm>
+      </p:grpSpPr>
+      <p:sp>
+        <p:nvSpPr>
+          <p:cNvPr id="16" name="object 16">
+            <a:extLst>
+              <a:ext uri="{FF2B5EF4-FFF2-40B4-BE49-F238E27FC236}">
+                <a16:creationId xmlns:a16="http://schemas.microsoft.com/office/drawing/2014/main" id="{33AB4E06-78AA-34FE-920A-700390F13354}"/>
+              </a:ext>
+            </a:extLst>
+          </p:cNvPr>
+          <p:cNvSpPr txBox="1">
+            <a:spLocks noGrp="1"/>
+          </p:cNvSpPr>
+          <p:nvPr>
+            <p:ph type="title"/>
+          </p:nvPr>
+        </p:nvSpPr>
+        <p:spPr>
+          <a:xfrm>
+            <a:off x="685800" y="408883"/>
+            <a:ext cx="10994410" cy="1474763"/>
+          </a:xfrm>
+          <a:prstGeom prst="rect">
+            <a:avLst/>
+          </a:prstGeom>
+        </p:spPr>
+        <p:txBody>
+          <a:bodyPr vert="horz" wrap="square" lIns="0" tIns="12700" rIns="0" bIns="0" rtlCol="0">
+            <a:spAutoFit/>
+          </a:bodyPr>
+          <a:lstStyle/>
+          <a:p>
+            <a:pPr marL="12700">
+              <a:spcBef>
+                <a:spcPts val="100"/>
+              </a:spcBef>
+            </a:pPr>
+            <a:r>
+              <a:rPr lang="en-US" sz="2500" dirty="0"/>
+              <a:t>EJERCICIOS EXTRA</a:t>
+            </a:r>
+            <a:br>
+              <a:rPr lang="en-US" sz="2500" dirty="0"/>
+            </a:br>
+            <a:br>
+              <a:rPr lang="en-US" b="0" dirty="0"/>
+            </a:br>
+            <a:br>
+              <a:rPr lang="en-US" sz="2500" dirty="0"/>
+            </a:br>
+            <a:endParaRPr lang="en-US" sz="2500" b="0" dirty="0">
+              <a:latin typeface="+mj-lt"/>
+              <a:cs typeface="Lucida Sans"/>
+            </a:endParaRPr>
+          </a:p>
+        </p:txBody>
+      </p:sp>
+      <p:pic>
+        <p:nvPicPr>
+          <p:cNvPr id="83" name="Gráfico 82">
+            <a:extLst>
+              <a:ext uri="{FF2B5EF4-FFF2-40B4-BE49-F238E27FC236}">
+                <a16:creationId xmlns:a16="http://schemas.microsoft.com/office/drawing/2014/main" id="{0C62A384-9894-F4AB-7152-DDD1B519DE6D}"/>
+              </a:ext>
+            </a:extLst>
+          </p:cNvPr>
+          <p:cNvPicPr>
+            <a:picLocks noChangeAspect="1"/>
+          </p:cNvPicPr>
+          <p:nvPr/>
+        </p:nvPicPr>
+        <p:blipFill>
+          <a:blip r:embed="rId3">
+            <a:extLst>
+              <a:ext uri="{96DAC541-7B7A-43D3-8B79-37D633B846F1}">
+                <asvg:svgBlip xmlns:asvg="http://schemas.microsoft.com/office/drawing/2016/SVG/main" r:embed="rId4"/>
+              </a:ext>
+            </a:extLst>
+          </a:blip>
+          <a:stretch>
+            <a:fillRect/>
+          </a:stretch>
+        </p:blipFill>
+        <p:spPr>
+          <a:xfrm>
+            <a:off x="5045006" y="6356057"/>
+            <a:ext cx="6409575" cy="363174"/>
+          </a:xfrm>
+          <a:prstGeom prst="rect">
+            <a:avLst/>
+          </a:prstGeom>
+        </p:spPr>
+      </p:pic>
+      <p:sp>
+        <p:nvSpPr>
+          <p:cNvPr id="84" name="Marcador de número de diapositiva 83">
+            <a:extLst>
+              <a:ext uri="{FF2B5EF4-FFF2-40B4-BE49-F238E27FC236}">
+                <a16:creationId xmlns:a16="http://schemas.microsoft.com/office/drawing/2014/main" id="{B7F7A888-9AFD-46FE-5D0B-9A1149CAA8AF}"/>
+              </a:ext>
+            </a:extLst>
+          </p:cNvPr>
+          <p:cNvSpPr>
+            <a:spLocks noGrp="1"/>
+          </p:cNvSpPr>
+          <p:nvPr>
+            <p:ph type="sldNum" sz="quarter" idx="7"/>
+          </p:nvPr>
+        </p:nvSpPr>
+        <p:spPr/>
+        <p:txBody>
+          <a:bodyPr/>
+          <a:lstStyle/>
+          <a:p>
+            <a:fld id="{B6F15528-21DE-4FAA-801E-634DDDAF4B2B}" type="slidenum">
+              <a:rPr lang="es-ES" smtClean="0"/>
+              <a:t>14</a:t>
+            </a:fld>
+            <a:endParaRPr lang="es-ES"/>
+          </a:p>
+        </p:txBody>
+      </p:sp>
+      <p:sp>
+        <p:nvSpPr>
+          <p:cNvPr id="3" name="Marcador de pie de página 2">
+            <a:extLst>
+              <a:ext uri="{FF2B5EF4-FFF2-40B4-BE49-F238E27FC236}">
+                <a16:creationId xmlns:a16="http://schemas.microsoft.com/office/drawing/2014/main" id="{3F8F78A0-2405-D366-9165-4CB016A56926}"/>
+              </a:ext>
+            </a:extLst>
+          </p:cNvPr>
+          <p:cNvSpPr>
+            <a:spLocks noGrp="1"/>
+          </p:cNvSpPr>
+          <p:nvPr>
+            <p:ph type="ftr" sz="quarter" idx="5"/>
+          </p:nvPr>
+        </p:nvSpPr>
+        <p:spPr/>
+        <p:txBody>
+          <a:bodyPr/>
+          <a:lstStyle/>
+          <a:p>
+            <a:pPr marL="12700">
+              <a:spcBef>
+                <a:spcPts val="15"/>
+              </a:spcBef>
+            </a:pPr>
+            <a:r>
+              <a:rPr lang="es-ES" spc="-5"/>
+              <a:t>LAB 1.0 WAVEGUIDES</a:t>
+            </a:r>
+            <a:endParaRPr lang="es-ES" spc="-5" dirty="0"/>
+          </a:p>
+        </p:txBody>
+      </p:sp>
+      <p:sp>
+        <p:nvSpPr>
+          <p:cNvPr id="14" name="CuadroTexto 13">
+            <a:extLst>
+              <a:ext uri="{FF2B5EF4-FFF2-40B4-BE49-F238E27FC236}">
+                <a16:creationId xmlns:a16="http://schemas.microsoft.com/office/drawing/2014/main" id="{D10220D1-AE1F-A176-41E7-4E5B9E0A66FB}"/>
+              </a:ext>
+            </a:extLst>
+          </p:cNvPr>
+          <p:cNvSpPr txBox="1"/>
+          <p:nvPr/>
+        </p:nvSpPr>
+        <p:spPr>
+          <a:xfrm>
+            <a:off x="496014" y="2133600"/>
+            <a:ext cx="11199971" cy="1569660"/>
+          </a:xfrm>
+          <a:prstGeom prst="rect">
+            <a:avLst/>
+          </a:prstGeom>
+          <a:solidFill>
+            <a:schemeClr val="bg1">
+              <a:lumMod val="95000"/>
+            </a:schemeClr>
+          </a:solidFill>
+          <a:ln w="28575">
+            <a:solidFill>
+              <a:srgbClr val="E0700D"/>
+            </a:solidFill>
+          </a:ln>
+        </p:spPr>
+        <p:txBody>
+          <a:bodyPr wrap="square" rtlCol="0">
+            <a:spAutoFit/>
+          </a:bodyPr>
+          <a:lstStyle/>
+          <a:p>
+            <a:pPr algn="just"/>
+            <a:endParaRPr lang="en-US" sz="1200" dirty="0">
+              <a:latin typeface="Arial" panose="020B0604020202020204" pitchFamily="34" charset="0"/>
+              <a:cs typeface="Arial" panose="020B0604020202020204" pitchFamily="34" charset="0"/>
+            </a:endParaRPr>
+          </a:p>
+          <a:p>
+            <a:pPr algn="just"/>
+            <a:r>
+              <a:rPr lang="en-US" sz="1200" b="1" i="1" dirty="0">
+                <a:latin typeface="Arial" panose="020B0604020202020204" pitchFamily="34" charset="0"/>
+                <a:cs typeface="Arial" panose="020B0604020202020204" pitchFamily="34" charset="0"/>
+              </a:rPr>
+              <a:t>En </a:t>
+            </a:r>
+            <a:r>
+              <a:rPr lang="en-US" sz="1200" b="1" i="1" dirty="0" err="1">
+                <a:latin typeface="Arial" panose="020B0604020202020204" pitchFamily="34" charset="0"/>
+                <a:cs typeface="Arial" panose="020B0604020202020204" pitchFamily="34" charset="0"/>
+              </a:rPr>
+              <a:t>este</a:t>
+            </a:r>
+            <a:r>
+              <a:rPr lang="en-US" sz="1200" b="1" i="1" dirty="0">
+                <a:latin typeface="Arial" panose="020B0604020202020204" pitchFamily="34" charset="0"/>
+                <a:cs typeface="Arial" panose="020B0604020202020204" pitchFamily="34" charset="0"/>
+              </a:rPr>
+              <a:t> </a:t>
+            </a:r>
+            <a:r>
+              <a:rPr lang="en-US" sz="1200" b="1" i="1" dirty="0" err="1">
+                <a:latin typeface="Arial" panose="020B0604020202020204" pitchFamily="34" charset="0"/>
+                <a:cs typeface="Arial" panose="020B0604020202020204" pitchFamily="34" charset="0"/>
+              </a:rPr>
+              <a:t>ejercicio</a:t>
+            </a:r>
+            <a:r>
+              <a:rPr lang="en-US" sz="1200" b="1" i="1" dirty="0">
+                <a:latin typeface="Arial" panose="020B0604020202020204" pitchFamily="34" charset="0"/>
+                <a:cs typeface="Arial" panose="020B0604020202020204" pitchFamily="34" charset="0"/>
+              </a:rPr>
+              <a:t> y </a:t>
+            </a:r>
+            <a:r>
+              <a:rPr lang="en-US" sz="1200" b="1" i="1" dirty="0" err="1">
+                <a:latin typeface="Arial" panose="020B0604020202020204" pitchFamily="34" charset="0"/>
+                <a:cs typeface="Arial" panose="020B0604020202020204" pitchFamily="34" charset="0"/>
+              </a:rPr>
+              <a:t>en</a:t>
+            </a:r>
+            <a:r>
+              <a:rPr lang="en-US" sz="1200" b="1" i="1" dirty="0">
+                <a:latin typeface="Arial" panose="020B0604020202020204" pitchFamily="34" charset="0"/>
+                <a:cs typeface="Arial" panose="020B0604020202020204" pitchFamily="34" charset="0"/>
+              </a:rPr>
+              <a:t> </a:t>
+            </a:r>
+            <a:r>
+              <a:rPr lang="en-US" sz="1200" b="1" i="1" dirty="0" err="1">
+                <a:latin typeface="Arial" panose="020B0604020202020204" pitchFamily="34" charset="0"/>
+                <a:cs typeface="Arial" panose="020B0604020202020204" pitchFamily="34" charset="0"/>
+              </a:rPr>
+              <a:t>los</a:t>
+            </a:r>
+            <a:r>
+              <a:rPr lang="en-US" sz="1200" b="1" i="1" dirty="0">
+                <a:latin typeface="Arial" panose="020B0604020202020204" pitchFamily="34" charset="0"/>
+                <a:cs typeface="Arial" panose="020B0604020202020204" pitchFamily="34" charset="0"/>
+              </a:rPr>
+              <a:t> </a:t>
+            </a:r>
+            <a:r>
+              <a:rPr lang="en-US" sz="1200" b="1" i="1" dirty="0" err="1">
+                <a:latin typeface="Arial" panose="020B0604020202020204" pitchFamily="34" charset="0"/>
+                <a:cs typeface="Arial" panose="020B0604020202020204" pitchFamily="34" charset="0"/>
+              </a:rPr>
+              <a:t>próximos</a:t>
+            </a:r>
+            <a:r>
+              <a:rPr lang="en-US" sz="1200" b="1" i="1" dirty="0">
+                <a:latin typeface="Arial" panose="020B0604020202020204" pitchFamily="34" charset="0"/>
+                <a:cs typeface="Arial" panose="020B0604020202020204" pitchFamily="34" charset="0"/>
+              </a:rPr>
+              <a:t>, se ha </a:t>
+            </a:r>
+            <a:r>
+              <a:rPr lang="en-US" sz="1200" b="1" i="1" dirty="0" err="1">
+                <a:latin typeface="Arial" panose="020B0604020202020204" pitchFamily="34" charset="0"/>
+                <a:cs typeface="Arial" panose="020B0604020202020204" pitchFamily="34" charset="0"/>
+              </a:rPr>
+              <a:t>sustituido</a:t>
+            </a:r>
+            <a:r>
+              <a:rPr lang="en-US" sz="1200" b="1" i="1" dirty="0">
+                <a:latin typeface="Arial" panose="020B0604020202020204" pitchFamily="34" charset="0"/>
+                <a:cs typeface="Arial" panose="020B0604020202020204" pitchFamily="34" charset="0"/>
+              </a:rPr>
+              <a:t> </a:t>
+            </a:r>
+            <a:r>
+              <a:rPr lang="en-US" sz="1200" b="1" i="1" dirty="0" err="1">
+                <a:latin typeface="Arial" panose="020B0604020202020204" pitchFamily="34" charset="0"/>
+                <a:cs typeface="Arial" panose="020B0604020202020204" pitchFamily="34" charset="0"/>
+              </a:rPr>
+              <a:t>el</a:t>
+            </a:r>
+            <a:r>
+              <a:rPr lang="en-US" sz="1200" b="1" i="1" dirty="0">
+                <a:latin typeface="Arial" panose="020B0604020202020204" pitchFamily="34" charset="0"/>
+                <a:cs typeface="Arial" panose="020B0604020202020204" pitchFamily="34" charset="0"/>
+              </a:rPr>
+              <a:t> material del </a:t>
+            </a:r>
+            <a:r>
+              <a:rPr lang="en-US" sz="1200" b="1" i="1" dirty="0" err="1">
+                <a:latin typeface="Arial" panose="020B0604020202020204" pitchFamily="34" charset="0"/>
+                <a:cs typeface="Arial" panose="020B0604020202020204" pitchFamily="34" charset="0"/>
+              </a:rPr>
+              <a:t>núcleo</a:t>
+            </a:r>
+            <a:r>
+              <a:rPr lang="en-US" sz="1200" b="1" i="1" dirty="0">
+                <a:latin typeface="Arial" panose="020B0604020202020204" pitchFamily="34" charset="0"/>
+                <a:cs typeface="Arial" panose="020B0604020202020204" pitchFamily="34" charset="0"/>
+              </a:rPr>
+              <a:t> de la </a:t>
+            </a:r>
+            <a:r>
+              <a:rPr lang="en-US" sz="1200" b="1" i="1" dirty="0" err="1">
+                <a:latin typeface="Arial" panose="020B0604020202020204" pitchFamily="34" charset="0"/>
+                <a:cs typeface="Arial" panose="020B0604020202020204" pitchFamily="34" charset="0"/>
+              </a:rPr>
+              <a:t>guía</a:t>
+            </a:r>
+            <a:r>
+              <a:rPr lang="en-US" sz="1200" b="1" i="1" dirty="0">
+                <a:latin typeface="Arial" panose="020B0604020202020204" pitchFamily="34" charset="0"/>
+                <a:cs typeface="Arial" panose="020B0604020202020204" pitchFamily="34" charset="0"/>
+              </a:rPr>
+              <a:t> de </a:t>
+            </a:r>
+            <a:r>
+              <a:rPr lang="en-US" sz="1200" b="1" i="1" dirty="0" err="1">
+                <a:latin typeface="Arial" panose="020B0604020202020204" pitchFamily="34" charset="0"/>
+                <a:cs typeface="Arial" panose="020B0604020202020204" pitchFamily="34" charset="0"/>
+              </a:rPr>
+              <a:t>onda</a:t>
+            </a:r>
+            <a:r>
+              <a:rPr lang="en-US" sz="1200" b="1" i="1" dirty="0">
+                <a:latin typeface="Arial" panose="020B0604020202020204" pitchFamily="34" charset="0"/>
+                <a:cs typeface="Arial" panose="020B0604020202020204" pitchFamily="34" charset="0"/>
+              </a:rPr>
+              <a:t> </a:t>
+            </a:r>
+            <a:r>
+              <a:rPr lang="en-US" sz="1200" b="1" i="1" dirty="0" err="1">
+                <a:latin typeface="Arial" panose="020B0604020202020204" pitchFamily="34" charset="0"/>
+                <a:cs typeface="Arial" panose="020B0604020202020204" pitchFamily="34" charset="0"/>
+              </a:rPr>
+              <a:t>por</a:t>
+            </a:r>
+            <a:r>
+              <a:rPr lang="en-US" sz="1200" b="1" i="1" dirty="0">
+                <a:latin typeface="Arial" panose="020B0604020202020204" pitchFamily="34" charset="0"/>
+                <a:cs typeface="Arial" panose="020B0604020202020204" pitchFamily="34" charset="0"/>
+              </a:rPr>
+              <a:t> </a:t>
+            </a:r>
+            <a:r>
+              <a:rPr lang="en-US" sz="1200" b="1" i="1" dirty="0" err="1">
+                <a:latin typeface="Arial" panose="020B0604020202020204" pitchFamily="34" charset="0"/>
+                <a:cs typeface="Arial" panose="020B0604020202020204" pitchFamily="34" charset="0"/>
+              </a:rPr>
+              <a:t>silicio</a:t>
+            </a:r>
+            <a:r>
+              <a:rPr lang="en-US" sz="1200" b="1" i="1" dirty="0">
+                <a:latin typeface="Arial" panose="020B0604020202020204" pitchFamily="34" charset="0"/>
+                <a:cs typeface="Arial" panose="020B0604020202020204" pitchFamily="34" charset="0"/>
+              </a:rPr>
+              <a:t> (Si), </a:t>
+            </a:r>
+            <a:r>
+              <a:rPr lang="en-US" sz="1200" b="1" i="1" dirty="0" err="1">
+                <a:latin typeface="Arial" panose="020B0604020202020204" pitchFamily="34" charset="0"/>
+                <a:cs typeface="Arial" panose="020B0604020202020204" pitchFamily="34" charset="0"/>
+              </a:rPr>
+              <a:t>mientras</a:t>
+            </a:r>
+            <a:r>
+              <a:rPr lang="en-US" sz="1200" b="1" i="1" dirty="0">
+                <a:latin typeface="Arial" panose="020B0604020202020204" pitchFamily="34" charset="0"/>
+                <a:cs typeface="Arial" panose="020B0604020202020204" pitchFamily="34" charset="0"/>
+              </a:rPr>
+              <a:t> </a:t>
+            </a:r>
+            <a:r>
+              <a:rPr lang="en-US" sz="1200" b="1" i="1" dirty="0" err="1">
+                <a:latin typeface="Arial" panose="020B0604020202020204" pitchFamily="34" charset="0"/>
+                <a:cs typeface="Arial" panose="020B0604020202020204" pitchFamily="34" charset="0"/>
+              </a:rPr>
+              <a:t>que</a:t>
+            </a:r>
+            <a:r>
+              <a:rPr lang="en-US" sz="1200" b="1" i="1" dirty="0">
+                <a:latin typeface="Arial" panose="020B0604020202020204" pitchFamily="34" charset="0"/>
+                <a:cs typeface="Arial" panose="020B0604020202020204" pitchFamily="34" charset="0"/>
+              </a:rPr>
+              <a:t> </a:t>
+            </a:r>
+            <a:r>
+              <a:rPr lang="en-US" sz="1200" b="1" i="1" dirty="0" err="1">
+                <a:latin typeface="Arial" panose="020B0604020202020204" pitchFamily="34" charset="0"/>
+                <a:cs typeface="Arial" panose="020B0604020202020204" pitchFamily="34" charset="0"/>
+              </a:rPr>
+              <a:t>el</a:t>
+            </a:r>
+            <a:r>
+              <a:rPr lang="en-US" sz="1200" b="1" i="1" dirty="0">
+                <a:latin typeface="Arial" panose="020B0604020202020204" pitchFamily="34" charset="0"/>
+                <a:cs typeface="Arial" panose="020B0604020202020204" pitchFamily="34" charset="0"/>
+              </a:rPr>
+              <a:t> de la </a:t>
+            </a:r>
+            <a:r>
+              <a:rPr lang="en-US" sz="1200" b="1" i="1" dirty="0" err="1">
+                <a:latin typeface="Arial" panose="020B0604020202020204" pitchFamily="34" charset="0"/>
+                <a:cs typeface="Arial" panose="020B0604020202020204" pitchFamily="34" charset="0"/>
+              </a:rPr>
+              <a:t>cubierta</a:t>
+            </a:r>
+            <a:r>
+              <a:rPr lang="en-US" sz="1200" b="1" i="1" dirty="0">
+                <a:latin typeface="Arial" panose="020B0604020202020204" pitchFamily="34" charset="0"/>
+                <a:cs typeface="Arial" panose="020B0604020202020204" pitchFamily="34" charset="0"/>
+              </a:rPr>
+              <a:t> </a:t>
+            </a:r>
+            <a:r>
+              <a:rPr lang="en-US" sz="1200" b="1" i="1" dirty="0" err="1">
+                <a:latin typeface="Arial" panose="020B0604020202020204" pitchFamily="34" charset="0"/>
+                <a:cs typeface="Arial" panose="020B0604020202020204" pitchFamily="34" charset="0"/>
+              </a:rPr>
+              <a:t>va</a:t>
+            </a:r>
+            <a:r>
+              <a:rPr lang="en-US" sz="1200" b="1" i="1" dirty="0">
+                <a:latin typeface="Arial" panose="020B0604020202020204" pitchFamily="34" charset="0"/>
+                <a:cs typeface="Arial" panose="020B0604020202020204" pitchFamily="34" charset="0"/>
+              </a:rPr>
+              <a:t> a ser </a:t>
+            </a:r>
+            <a:r>
+              <a:rPr lang="en-US" sz="1200" b="1" i="1" dirty="0" err="1">
+                <a:latin typeface="Arial" panose="020B0604020202020204" pitchFamily="34" charset="0"/>
+                <a:cs typeface="Arial" panose="020B0604020202020204" pitchFamily="34" charset="0"/>
+              </a:rPr>
+              <a:t>el</a:t>
+            </a:r>
+            <a:r>
+              <a:rPr lang="en-US" sz="1200" b="1" i="1" dirty="0">
+                <a:latin typeface="Arial" panose="020B0604020202020204" pitchFamily="34" charset="0"/>
+                <a:cs typeface="Arial" panose="020B0604020202020204" pitchFamily="34" charset="0"/>
+              </a:rPr>
+              <a:t> </a:t>
+            </a:r>
+            <a:r>
+              <a:rPr lang="en-US" sz="1200" b="1" i="1" dirty="0" err="1">
+                <a:latin typeface="Arial" panose="020B0604020202020204" pitchFamily="34" charset="0"/>
+                <a:cs typeface="Arial" panose="020B0604020202020204" pitchFamily="34" charset="0"/>
+              </a:rPr>
+              <a:t>mismo</a:t>
+            </a:r>
+            <a:r>
+              <a:rPr lang="en-US" sz="1200" b="1" i="1" dirty="0">
+                <a:latin typeface="Arial" panose="020B0604020202020204" pitchFamily="34" charset="0"/>
+                <a:cs typeface="Arial" panose="020B0604020202020204" pitchFamily="34" charset="0"/>
+              </a:rPr>
+              <a:t> </a:t>
+            </a:r>
+            <a:r>
+              <a:rPr lang="en-US" sz="1200" b="1" i="1" dirty="0" err="1">
+                <a:latin typeface="Arial" panose="020B0604020202020204" pitchFamily="34" charset="0"/>
+                <a:cs typeface="Arial" panose="020B0604020202020204" pitchFamily="34" charset="0"/>
+              </a:rPr>
+              <a:t>que</a:t>
+            </a:r>
+            <a:r>
+              <a:rPr lang="en-US" sz="1200" b="1" i="1" dirty="0">
+                <a:latin typeface="Arial" panose="020B0604020202020204" pitchFamily="34" charset="0"/>
+                <a:cs typeface="Arial" panose="020B0604020202020204" pitchFamily="34" charset="0"/>
+              </a:rPr>
+              <a:t> </a:t>
+            </a:r>
+            <a:r>
+              <a:rPr lang="en-US" sz="1200" b="1" i="1" dirty="0" err="1">
+                <a:latin typeface="Arial" panose="020B0604020202020204" pitchFamily="34" charset="0"/>
+                <a:cs typeface="Arial" panose="020B0604020202020204" pitchFamily="34" charset="0"/>
+              </a:rPr>
+              <a:t>anteriormente</a:t>
+            </a:r>
+            <a:r>
+              <a:rPr lang="en-US" sz="1200" b="1" i="1" dirty="0">
+                <a:latin typeface="Arial" panose="020B0604020202020204" pitchFamily="34" charset="0"/>
+                <a:cs typeface="Arial" panose="020B0604020202020204" pitchFamily="34" charset="0"/>
+              </a:rPr>
+              <a:t> (Si02). El </a:t>
+            </a:r>
+            <a:r>
+              <a:rPr lang="en-US" sz="1200" b="1" i="1" dirty="0" err="1">
+                <a:latin typeface="Arial" panose="020B0604020202020204" pitchFamily="34" charset="0"/>
+                <a:cs typeface="Arial" panose="020B0604020202020204" pitchFamily="34" charset="0"/>
+              </a:rPr>
+              <a:t>silicio</a:t>
+            </a:r>
+            <a:r>
+              <a:rPr lang="en-US" sz="1200" b="1" i="1" dirty="0">
+                <a:latin typeface="Arial" panose="020B0604020202020204" pitchFamily="34" charset="0"/>
+                <a:cs typeface="Arial" panose="020B0604020202020204" pitchFamily="34" charset="0"/>
+              </a:rPr>
+              <a:t> </a:t>
+            </a:r>
+            <a:r>
+              <a:rPr lang="en-US" sz="1200" b="1" i="1" dirty="0" err="1">
+                <a:latin typeface="Arial" panose="020B0604020202020204" pitchFamily="34" charset="0"/>
+                <a:cs typeface="Arial" panose="020B0604020202020204" pitchFamily="34" charset="0"/>
+              </a:rPr>
+              <a:t>presenta</a:t>
+            </a:r>
+            <a:r>
+              <a:rPr lang="en-US" sz="1200" b="1" i="1" dirty="0">
+                <a:latin typeface="Arial" panose="020B0604020202020204" pitchFamily="34" charset="0"/>
+                <a:cs typeface="Arial" panose="020B0604020202020204" pitchFamily="34" charset="0"/>
+              </a:rPr>
+              <a:t> un </a:t>
+            </a:r>
+            <a:r>
+              <a:rPr lang="en-US" sz="1200" b="1" i="1" dirty="0" err="1">
+                <a:latin typeface="Arial" panose="020B0604020202020204" pitchFamily="34" charset="0"/>
+                <a:cs typeface="Arial" panose="020B0604020202020204" pitchFamily="34" charset="0"/>
+              </a:rPr>
+              <a:t>índice</a:t>
+            </a:r>
+            <a:r>
+              <a:rPr lang="en-US" sz="1200" b="1" i="1" dirty="0">
+                <a:latin typeface="Arial" panose="020B0604020202020204" pitchFamily="34" charset="0"/>
+                <a:cs typeface="Arial" panose="020B0604020202020204" pitchFamily="34" charset="0"/>
+              </a:rPr>
+              <a:t> </a:t>
+            </a:r>
+            <a:r>
+              <a:rPr lang="en-US" sz="1200" b="1" i="1" dirty="0" err="1">
+                <a:latin typeface="Arial" panose="020B0604020202020204" pitchFamily="34" charset="0"/>
+                <a:cs typeface="Arial" panose="020B0604020202020204" pitchFamily="34" charset="0"/>
+              </a:rPr>
+              <a:t>efectivo</a:t>
+            </a:r>
+            <a:r>
+              <a:rPr lang="en-US" sz="1200" b="1" i="1" dirty="0">
+                <a:latin typeface="Arial" panose="020B0604020202020204" pitchFamily="34" charset="0"/>
+                <a:cs typeface="Arial" panose="020B0604020202020204" pitchFamily="34" charset="0"/>
+              </a:rPr>
+              <a:t> de </a:t>
+            </a:r>
+            <a:r>
+              <a:rPr lang="en-US" sz="1200" b="1" i="1" dirty="0" err="1">
+                <a:latin typeface="Arial" panose="020B0604020202020204" pitchFamily="34" charset="0"/>
+                <a:cs typeface="Arial" panose="020B0604020202020204" pitchFamily="34" charset="0"/>
+              </a:rPr>
+              <a:t>alrededor</a:t>
+            </a:r>
+            <a:r>
+              <a:rPr lang="en-US" sz="1200" b="1" i="1" dirty="0">
+                <a:latin typeface="Arial" panose="020B0604020202020204" pitchFamily="34" charset="0"/>
+                <a:cs typeface="Arial" panose="020B0604020202020204" pitchFamily="34" charset="0"/>
+              </a:rPr>
+              <a:t> de 3.47 </a:t>
+            </a:r>
+            <a:r>
+              <a:rPr lang="en-US" sz="1200" b="1" i="1" dirty="0" err="1">
+                <a:latin typeface="Arial" panose="020B0604020202020204" pitchFamily="34" charset="0"/>
+                <a:cs typeface="Arial" panose="020B0604020202020204" pitchFamily="34" charset="0"/>
+              </a:rPr>
+              <a:t>en</a:t>
+            </a:r>
+            <a:r>
+              <a:rPr lang="en-US" sz="1200" b="1" i="1" dirty="0">
+                <a:latin typeface="Arial" panose="020B0604020202020204" pitchFamily="34" charset="0"/>
+                <a:cs typeface="Arial" panose="020B0604020202020204" pitchFamily="34" charset="0"/>
+              </a:rPr>
+              <a:t> </a:t>
+            </a:r>
+            <a:r>
+              <a:rPr lang="en-US" sz="1200" b="1" i="1" dirty="0" err="1">
+                <a:latin typeface="Arial" panose="020B0604020202020204" pitchFamily="34" charset="0"/>
+                <a:cs typeface="Arial" panose="020B0604020202020204" pitchFamily="34" charset="0"/>
+              </a:rPr>
+              <a:t>el</a:t>
+            </a:r>
+            <a:r>
+              <a:rPr lang="en-US" sz="1200" b="1" i="1" dirty="0">
+                <a:latin typeface="Arial" panose="020B0604020202020204" pitchFamily="34" charset="0"/>
+                <a:cs typeface="Arial" panose="020B0604020202020204" pitchFamily="34" charset="0"/>
+              </a:rPr>
+              <a:t> </a:t>
+            </a:r>
+            <a:r>
+              <a:rPr lang="en-US" sz="1200" b="1" i="1" dirty="0" err="1">
+                <a:latin typeface="Arial" panose="020B0604020202020204" pitchFamily="34" charset="0"/>
+                <a:cs typeface="Arial" panose="020B0604020202020204" pitchFamily="34" charset="0"/>
+              </a:rPr>
+              <a:t>rango</a:t>
+            </a:r>
+            <a:r>
+              <a:rPr lang="en-US" sz="1200" b="1" i="1" dirty="0">
+                <a:latin typeface="Arial" panose="020B0604020202020204" pitchFamily="34" charset="0"/>
+                <a:cs typeface="Arial" panose="020B0604020202020204" pitchFamily="34" charset="0"/>
+              </a:rPr>
+              <a:t> de longitudes de </a:t>
+            </a:r>
+            <a:r>
+              <a:rPr lang="en-US" sz="1200" b="1" i="1" dirty="0" err="1">
+                <a:latin typeface="Arial" panose="020B0604020202020204" pitchFamily="34" charset="0"/>
+                <a:cs typeface="Arial" panose="020B0604020202020204" pitchFamily="34" charset="0"/>
+              </a:rPr>
+              <a:t>onda</a:t>
+            </a:r>
+            <a:r>
+              <a:rPr lang="en-US" sz="1200" b="1" i="1" dirty="0">
+                <a:latin typeface="Arial" panose="020B0604020202020204" pitchFamily="34" charset="0"/>
+                <a:cs typeface="Arial" panose="020B0604020202020204" pitchFamily="34" charset="0"/>
+              </a:rPr>
+              <a:t> </a:t>
+            </a:r>
+            <a:r>
+              <a:rPr lang="en-US" sz="1200" b="1" i="1" dirty="0" err="1">
+                <a:latin typeface="Arial" panose="020B0604020202020204" pitchFamily="34" charset="0"/>
+                <a:cs typeface="Arial" panose="020B0604020202020204" pitchFamily="34" charset="0"/>
+              </a:rPr>
+              <a:t>estudiados</a:t>
+            </a:r>
+            <a:r>
+              <a:rPr lang="en-US" sz="1200" b="1" i="1" dirty="0">
+                <a:latin typeface="Arial" panose="020B0604020202020204" pitchFamily="34" charset="0"/>
+                <a:cs typeface="Arial" panose="020B0604020202020204" pitchFamily="34" charset="0"/>
+              </a:rPr>
+              <a:t>. </a:t>
+            </a:r>
+          </a:p>
+          <a:p>
+            <a:pPr algn="just"/>
+            <a:endParaRPr lang="en-US" sz="1200" b="1" i="1" dirty="0">
+              <a:latin typeface="Arial" panose="020B0604020202020204" pitchFamily="34" charset="0"/>
+              <a:cs typeface="Arial" panose="020B0604020202020204" pitchFamily="34" charset="0"/>
+            </a:endParaRPr>
+          </a:p>
+          <a:p>
+            <a:pPr algn="just"/>
+            <a:r>
+              <a:rPr lang="en-US" sz="1200" b="1" i="1" dirty="0" err="1">
+                <a:latin typeface="Arial" panose="020B0604020202020204" pitchFamily="34" charset="0"/>
+                <a:cs typeface="Arial" panose="020B0604020202020204" pitchFamily="34" charset="0"/>
+              </a:rPr>
+              <a:t>Además</a:t>
+            </a:r>
+            <a:r>
+              <a:rPr lang="en-US" sz="1200" b="1" i="1" dirty="0">
+                <a:latin typeface="Arial" panose="020B0604020202020204" pitchFamily="34" charset="0"/>
+                <a:cs typeface="Arial" panose="020B0604020202020204" pitchFamily="34" charset="0"/>
+              </a:rPr>
+              <a:t> de </a:t>
+            </a:r>
+            <a:r>
+              <a:rPr lang="en-US" sz="1200" b="1" i="1" dirty="0" err="1">
+                <a:latin typeface="Arial" panose="020B0604020202020204" pitchFamily="34" charset="0"/>
+                <a:cs typeface="Arial" panose="020B0604020202020204" pitchFamily="34" charset="0"/>
+              </a:rPr>
+              <a:t>cambiar</a:t>
+            </a:r>
+            <a:r>
+              <a:rPr lang="en-US" sz="1200" b="1" i="1" dirty="0">
+                <a:latin typeface="Arial" panose="020B0604020202020204" pitchFamily="34" charset="0"/>
+                <a:cs typeface="Arial" panose="020B0604020202020204" pitchFamily="34" charset="0"/>
+              </a:rPr>
+              <a:t> </a:t>
+            </a:r>
+            <a:r>
+              <a:rPr lang="en-US" sz="1200" b="1" i="1" dirty="0" err="1">
+                <a:latin typeface="Arial" panose="020B0604020202020204" pitchFamily="34" charset="0"/>
+                <a:cs typeface="Arial" panose="020B0604020202020204" pitchFamily="34" charset="0"/>
+              </a:rPr>
+              <a:t>el</a:t>
+            </a:r>
+            <a:r>
+              <a:rPr lang="en-US" sz="1200" b="1" i="1" dirty="0">
+                <a:latin typeface="Arial" panose="020B0604020202020204" pitchFamily="34" charset="0"/>
+                <a:cs typeface="Arial" panose="020B0604020202020204" pitchFamily="34" charset="0"/>
+              </a:rPr>
+              <a:t> material del </a:t>
+            </a:r>
+            <a:r>
+              <a:rPr lang="en-US" sz="1200" b="1" i="1" dirty="0" err="1">
+                <a:latin typeface="Arial" panose="020B0604020202020204" pitchFamily="34" charset="0"/>
+                <a:cs typeface="Arial" panose="020B0604020202020204" pitchFamily="34" charset="0"/>
+              </a:rPr>
+              <a:t>núcleo</a:t>
+            </a:r>
+            <a:r>
+              <a:rPr lang="en-US" sz="1200" b="1" i="1" dirty="0">
+                <a:latin typeface="Arial" panose="020B0604020202020204" pitchFamily="34" charset="0"/>
+                <a:cs typeface="Arial" panose="020B0604020202020204" pitchFamily="34" charset="0"/>
+              </a:rPr>
+              <a:t>, También se </a:t>
+            </a:r>
+            <a:r>
+              <a:rPr lang="en-US" sz="1200" b="1" i="1" dirty="0" err="1">
+                <a:latin typeface="Arial" panose="020B0604020202020204" pitchFamily="34" charset="0"/>
+                <a:cs typeface="Arial" panose="020B0604020202020204" pitchFamily="34" charset="0"/>
+              </a:rPr>
+              <a:t>han</a:t>
+            </a:r>
+            <a:r>
+              <a:rPr lang="en-US" sz="1200" b="1" i="1" dirty="0">
+                <a:latin typeface="Arial" panose="020B0604020202020204" pitchFamily="34" charset="0"/>
+                <a:cs typeface="Arial" panose="020B0604020202020204" pitchFamily="34" charset="0"/>
+              </a:rPr>
+              <a:t> </a:t>
+            </a:r>
+            <a:r>
+              <a:rPr lang="en-US" sz="1200" b="1" i="1" dirty="0" err="1">
+                <a:latin typeface="Arial" panose="020B0604020202020204" pitchFamily="34" charset="0"/>
+                <a:cs typeface="Arial" panose="020B0604020202020204" pitchFamily="34" charset="0"/>
+              </a:rPr>
+              <a:t>hecho</a:t>
+            </a:r>
+            <a:r>
+              <a:rPr lang="en-US" sz="1200" b="1" i="1" dirty="0">
+                <a:latin typeface="Arial" panose="020B0604020202020204" pitchFamily="34" charset="0"/>
+                <a:cs typeface="Arial" panose="020B0604020202020204" pitchFamily="34" charset="0"/>
+              </a:rPr>
+              <a:t> </a:t>
+            </a:r>
+            <a:r>
+              <a:rPr lang="en-US" sz="1200" b="1" i="1" dirty="0" err="1">
+                <a:latin typeface="Arial" panose="020B0604020202020204" pitchFamily="34" charset="0"/>
+                <a:cs typeface="Arial" panose="020B0604020202020204" pitchFamily="34" charset="0"/>
+              </a:rPr>
+              <a:t>unas</a:t>
+            </a:r>
+            <a:r>
+              <a:rPr lang="en-US" sz="1200" b="1" i="1" dirty="0">
+                <a:latin typeface="Arial" panose="020B0604020202020204" pitchFamily="34" charset="0"/>
+                <a:cs typeface="Arial" panose="020B0604020202020204" pitchFamily="34" charset="0"/>
+              </a:rPr>
+              <a:t> </a:t>
+            </a:r>
+            <a:r>
+              <a:rPr lang="en-US" sz="1200" b="1" i="1" dirty="0" err="1">
+                <a:latin typeface="Arial" panose="020B0604020202020204" pitchFamily="34" charset="0"/>
+                <a:cs typeface="Arial" panose="020B0604020202020204" pitchFamily="34" charset="0"/>
+              </a:rPr>
+              <a:t>modificaciones</a:t>
+            </a:r>
+            <a:r>
+              <a:rPr lang="en-US" sz="1200" b="1" i="1" dirty="0">
+                <a:latin typeface="Arial" panose="020B0604020202020204" pitchFamily="34" charset="0"/>
+                <a:cs typeface="Arial" panose="020B0604020202020204" pitchFamily="34" charset="0"/>
+              </a:rPr>
+              <a:t> </a:t>
+            </a:r>
+            <a:r>
+              <a:rPr lang="en-US" sz="1200" b="1" i="1" dirty="0" err="1">
+                <a:latin typeface="Arial" panose="020B0604020202020204" pitchFamily="34" charset="0"/>
+                <a:cs typeface="Arial" panose="020B0604020202020204" pitchFamily="34" charset="0"/>
+              </a:rPr>
+              <a:t>en</a:t>
+            </a:r>
+            <a:r>
+              <a:rPr lang="en-US" sz="1200" b="1" i="1" dirty="0">
+                <a:latin typeface="Arial" panose="020B0604020202020204" pitchFamily="34" charset="0"/>
+                <a:cs typeface="Arial" panose="020B0604020202020204" pitchFamily="34" charset="0"/>
+              </a:rPr>
+              <a:t> las </a:t>
+            </a:r>
+            <a:r>
+              <a:rPr lang="en-US" sz="1200" b="1" i="1" dirty="0" err="1">
+                <a:latin typeface="Arial" panose="020B0604020202020204" pitchFamily="34" charset="0"/>
+                <a:cs typeface="Arial" panose="020B0604020202020204" pitchFamily="34" charset="0"/>
+              </a:rPr>
+              <a:t>dimensiones</a:t>
+            </a:r>
+            <a:r>
+              <a:rPr lang="en-US" sz="1200" b="1" i="1" dirty="0">
+                <a:latin typeface="Arial" panose="020B0604020202020204" pitchFamily="34" charset="0"/>
+                <a:cs typeface="Arial" panose="020B0604020202020204" pitchFamily="34" charset="0"/>
+              </a:rPr>
+              <a:t> de la </a:t>
+            </a:r>
+            <a:r>
+              <a:rPr lang="en-US" sz="1200" b="1" i="1" dirty="0" err="1">
+                <a:latin typeface="Arial" panose="020B0604020202020204" pitchFamily="34" charset="0"/>
+                <a:cs typeface="Arial" panose="020B0604020202020204" pitchFamily="34" charset="0"/>
+              </a:rPr>
+              <a:t>guía</a:t>
+            </a:r>
+            <a:r>
+              <a:rPr lang="en-US" sz="1200" b="1" i="1" dirty="0">
+                <a:latin typeface="Arial" panose="020B0604020202020204" pitchFamily="34" charset="0"/>
+                <a:cs typeface="Arial" panose="020B0604020202020204" pitchFamily="34" charset="0"/>
+              </a:rPr>
+              <a:t>, </a:t>
+            </a:r>
+            <a:r>
+              <a:rPr lang="en-US" sz="1200" b="1" i="1" dirty="0" err="1">
+                <a:latin typeface="Arial" panose="020B0604020202020204" pitchFamily="34" charset="0"/>
+                <a:cs typeface="Arial" panose="020B0604020202020204" pitchFamily="34" charset="0"/>
+              </a:rPr>
+              <a:t>en</a:t>
+            </a:r>
+            <a:r>
+              <a:rPr lang="en-US" sz="1200" b="1" i="1" dirty="0">
+                <a:latin typeface="Arial" panose="020B0604020202020204" pitchFamily="34" charset="0"/>
+                <a:cs typeface="Arial" panose="020B0604020202020204" pitchFamily="34" charset="0"/>
+              </a:rPr>
+              <a:t> </a:t>
+            </a:r>
+            <a:r>
+              <a:rPr lang="en-US" sz="1200" b="1" i="1" dirty="0" err="1">
+                <a:latin typeface="Arial" panose="020B0604020202020204" pitchFamily="34" charset="0"/>
+                <a:cs typeface="Arial" panose="020B0604020202020204" pitchFamily="34" charset="0"/>
+              </a:rPr>
+              <a:t>concreto</a:t>
+            </a:r>
+            <a:r>
+              <a:rPr lang="en-US" sz="1200" b="1" i="1" dirty="0">
+                <a:latin typeface="Arial" panose="020B0604020202020204" pitchFamily="34" charset="0"/>
+                <a:cs typeface="Arial" panose="020B0604020202020204" pitchFamily="34" charset="0"/>
+              </a:rPr>
+              <a:t>: </a:t>
+            </a:r>
+            <a:r>
+              <a:rPr lang="en-US" sz="1200" b="1" i="1" dirty="0" err="1">
+                <a:latin typeface="Arial" panose="020B0604020202020204" pitchFamily="34" charset="0"/>
+                <a:cs typeface="Arial" panose="020B0604020202020204" pitchFamily="34" charset="0"/>
+              </a:rPr>
+              <a:t>el</a:t>
+            </a:r>
+            <a:r>
+              <a:rPr lang="en-US" sz="1200" b="1" i="1" dirty="0">
+                <a:latin typeface="Arial" panose="020B0604020202020204" pitchFamily="34" charset="0"/>
+                <a:cs typeface="Arial" panose="020B0604020202020204" pitchFamily="34" charset="0"/>
+              </a:rPr>
+              <a:t> ancho, </a:t>
+            </a:r>
+            <a:r>
+              <a:rPr lang="en-US" sz="1200" b="1" i="1" dirty="0" err="1">
+                <a:latin typeface="Arial" panose="020B0604020202020204" pitchFamily="34" charset="0"/>
+                <a:cs typeface="Arial" panose="020B0604020202020204" pitchFamily="34" charset="0"/>
+              </a:rPr>
+              <a:t>el</a:t>
+            </a:r>
+            <a:r>
+              <a:rPr lang="en-US" sz="1200" b="1" i="1" dirty="0">
+                <a:latin typeface="Arial" panose="020B0604020202020204" pitchFamily="34" charset="0"/>
+                <a:cs typeface="Arial" panose="020B0604020202020204" pitchFamily="34" charset="0"/>
+              </a:rPr>
+              <a:t> </a:t>
+            </a:r>
+            <a:r>
+              <a:rPr lang="en-US" sz="1200" b="1" i="1" dirty="0" err="1">
+                <a:latin typeface="Arial" panose="020B0604020202020204" pitchFamily="34" charset="0"/>
+                <a:cs typeface="Arial" panose="020B0604020202020204" pitchFamily="34" charset="0"/>
+              </a:rPr>
+              <a:t>cual</a:t>
+            </a:r>
+            <a:r>
+              <a:rPr lang="en-US" sz="1200" b="1" i="1" dirty="0">
+                <a:latin typeface="Arial" panose="020B0604020202020204" pitchFamily="34" charset="0"/>
+                <a:cs typeface="Arial" panose="020B0604020202020204" pitchFamily="34" charset="0"/>
+              </a:rPr>
+              <a:t> </a:t>
+            </a:r>
+            <a:r>
+              <a:rPr lang="en-US" sz="1200" b="1" i="1" dirty="0" err="1">
+                <a:latin typeface="Arial" panose="020B0604020202020204" pitchFamily="34" charset="0"/>
+                <a:cs typeface="Arial" panose="020B0604020202020204" pitchFamily="34" charset="0"/>
+              </a:rPr>
+              <a:t>ahora</a:t>
+            </a:r>
+            <a:r>
+              <a:rPr lang="en-US" sz="1200" b="1" i="1" dirty="0">
+                <a:latin typeface="Arial" panose="020B0604020202020204" pitchFamily="34" charset="0"/>
+                <a:cs typeface="Arial" panose="020B0604020202020204" pitchFamily="34" charset="0"/>
+              </a:rPr>
+              <a:t> </a:t>
+            </a:r>
+            <a:r>
+              <a:rPr lang="en-US" sz="1200" b="1" i="1" dirty="0" err="1">
+                <a:latin typeface="Arial" panose="020B0604020202020204" pitchFamily="34" charset="0"/>
+                <a:cs typeface="Arial" panose="020B0604020202020204" pitchFamily="34" charset="0"/>
+              </a:rPr>
+              <a:t>va</a:t>
+            </a:r>
+            <a:r>
+              <a:rPr lang="en-US" sz="1200" b="1" i="1" dirty="0">
+                <a:latin typeface="Arial" panose="020B0604020202020204" pitchFamily="34" charset="0"/>
+                <a:cs typeface="Arial" panose="020B0604020202020204" pitchFamily="34" charset="0"/>
+              </a:rPr>
+              <a:t> a ser de 0.5 um, y la </a:t>
+            </a:r>
+            <a:r>
+              <a:rPr lang="en-US" sz="1200" b="1" i="1" dirty="0" err="1">
+                <a:latin typeface="Arial" panose="020B0604020202020204" pitchFamily="34" charset="0"/>
+                <a:cs typeface="Arial" panose="020B0604020202020204" pitchFamily="34" charset="0"/>
+              </a:rPr>
+              <a:t>altura</a:t>
+            </a:r>
+            <a:r>
+              <a:rPr lang="en-US" sz="1200" b="1" i="1" dirty="0">
+                <a:latin typeface="Arial" panose="020B0604020202020204" pitchFamily="34" charset="0"/>
+                <a:cs typeface="Arial" panose="020B0604020202020204" pitchFamily="34" charset="0"/>
+              </a:rPr>
+              <a:t>, de 0.22 um. </a:t>
+            </a:r>
+          </a:p>
+          <a:p>
+            <a:pPr algn="just"/>
+            <a:endParaRPr lang="en-US" sz="1200" dirty="0">
+              <a:latin typeface="Arial" panose="020B0604020202020204" pitchFamily="34" charset="0"/>
+              <a:cs typeface="Arial" panose="020B0604020202020204" pitchFamily="34" charset="0"/>
+            </a:endParaRPr>
+          </a:p>
+          <a:p>
+            <a:pPr algn="just"/>
+            <a:endParaRPr lang="en-US" sz="1200" b="1" i="1" dirty="0">
+              <a:latin typeface="Arial" panose="020B0604020202020204" pitchFamily="34" charset="0"/>
+              <a:cs typeface="Arial" panose="020B0604020202020204" pitchFamily="34" charset="0"/>
+            </a:endParaRPr>
+          </a:p>
+        </p:txBody>
+      </p:sp>
+    </p:spTree>
+    <p:extLst>
+      <p:ext uri="{BB962C8B-B14F-4D97-AF65-F5344CB8AC3E}">
+        <p14:creationId xmlns:p14="http://schemas.microsoft.com/office/powerpoint/2010/main" val="509930090"/>
+      </p:ext>
+    </p:extLst>
+  </p:cSld>
+  <p:clrMapOvr>
+    <a:masterClrMapping/>
+  </p:clrMapOvr>
+</p:sld>
+</file>
+
+<file path=ppt/slides/slide15.xml><?xml version="1.0" encoding="utf-8"?>
+<p:sld xmlns:a="http://schemas.openxmlformats.org/drawingml/2006/main" xmlns:r="http://schemas.openxmlformats.org/officeDocument/2006/relationships" xmlns:p="http://schemas.openxmlformats.org/presentationml/2006/main">
+  <p:cSld>
+    <p:spTree>
+      <p:nvGrpSpPr>
+        <p:cNvPr id="1" name="">
+          <a:extLst>
+            <a:ext uri="{FF2B5EF4-FFF2-40B4-BE49-F238E27FC236}">
+              <a16:creationId xmlns:a16="http://schemas.microsoft.com/office/drawing/2014/main" id="{48922E24-29DB-E2F3-9307-23DB7AB34ED3}"/>
+            </a:ext>
+          </a:extLst>
+        </p:cNvPr>
+        <p:cNvGrpSpPr/>
+        <p:nvPr/>
+      </p:nvGrpSpPr>
+      <p:grpSpPr>
+        <a:xfrm>
+          <a:off x="0" y="0"/>
+          <a:ext cx="0" cy="0"/>
+          <a:chOff x="0" y="0"/>
+          <a:chExt cx="0" cy="0"/>
+        </a:xfrm>
+      </p:grpSpPr>
+      <p:sp>
+        <p:nvSpPr>
+          <p:cNvPr id="16" name="object 16">
+            <a:extLst>
+              <a:ext uri="{FF2B5EF4-FFF2-40B4-BE49-F238E27FC236}">
+                <a16:creationId xmlns:a16="http://schemas.microsoft.com/office/drawing/2014/main" id="{114FF14D-9463-1CC1-8B86-92479A35EA8B}"/>
+              </a:ext>
+            </a:extLst>
+          </p:cNvPr>
+          <p:cNvSpPr txBox="1">
+            <a:spLocks noGrp="1"/>
+          </p:cNvSpPr>
+          <p:nvPr>
+            <p:ph type="title"/>
+          </p:nvPr>
+        </p:nvSpPr>
+        <p:spPr>
+          <a:xfrm>
+            <a:off x="685800" y="408883"/>
+            <a:ext cx="10994410" cy="1474763"/>
+          </a:xfrm>
+          <a:prstGeom prst="rect">
+            <a:avLst/>
+          </a:prstGeom>
+        </p:spPr>
+        <p:txBody>
+          <a:bodyPr vert="horz" wrap="square" lIns="0" tIns="12700" rIns="0" bIns="0" rtlCol="0">
+            <a:spAutoFit/>
+          </a:bodyPr>
+          <a:lstStyle/>
+          <a:p>
+            <a:pPr marL="12700">
+              <a:spcBef>
+                <a:spcPts val="100"/>
+              </a:spcBef>
+            </a:pPr>
+            <a:r>
+              <a:rPr lang="en-US" sz="2500" dirty="0"/>
+              <a:t>EXTRA EJERCICIO 1: </a:t>
+            </a:r>
+            <a:br>
+              <a:rPr lang="en-US" sz="2500" dirty="0"/>
+            </a:br>
+            <a:r>
+              <a:rPr lang="en-US" b="0" dirty="0"/>
+              <a:t>Repeat the LO.2. wavelength behavior simulations, considering the updated materials and dimensions</a:t>
+            </a:r>
+            <a:br>
+              <a:rPr lang="en-US" b="0" dirty="0"/>
+            </a:br>
+            <a:br>
+              <a:rPr lang="en-US" sz="2500" dirty="0"/>
+            </a:br>
+            <a:endParaRPr lang="en-US" sz="2500" b="0" dirty="0">
+              <a:latin typeface="+mj-lt"/>
+              <a:cs typeface="Lucida Sans"/>
+            </a:endParaRPr>
+          </a:p>
+        </p:txBody>
+      </p:sp>
+      <p:pic>
+        <p:nvPicPr>
+          <p:cNvPr id="83" name="Gráfico 82">
+            <a:extLst>
+              <a:ext uri="{FF2B5EF4-FFF2-40B4-BE49-F238E27FC236}">
+                <a16:creationId xmlns:a16="http://schemas.microsoft.com/office/drawing/2014/main" id="{80F73181-ED8C-350B-EA9D-FDBDC57238E6}"/>
+              </a:ext>
+            </a:extLst>
+          </p:cNvPr>
+          <p:cNvPicPr>
+            <a:picLocks noChangeAspect="1"/>
+          </p:cNvPicPr>
+          <p:nvPr/>
+        </p:nvPicPr>
+        <p:blipFill>
+          <a:blip r:embed="rId3">
+            <a:extLst>
+              <a:ext uri="{96DAC541-7B7A-43D3-8B79-37D633B846F1}">
+                <asvg:svgBlip xmlns:asvg="http://schemas.microsoft.com/office/drawing/2016/SVG/main" r:embed="rId4"/>
+              </a:ext>
+            </a:extLst>
+          </a:blip>
+          <a:stretch>
+            <a:fillRect/>
+          </a:stretch>
+        </p:blipFill>
+        <p:spPr>
+          <a:xfrm>
+            <a:off x="5045006" y="6356057"/>
+            <a:ext cx="6409575" cy="363174"/>
+          </a:xfrm>
+          <a:prstGeom prst="rect">
+            <a:avLst/>
+          </a:prstGeom>
+        </p:spPr>
+      </p:pic>
+      <p:sp>
+        <p:nvSpPr>
+          <p:cNvPr id="84" name="Marcador de número de diapositiva 83">
+            <a:extLst>
+              <a:ext uri="{FF2B5EF4-FFF2-40B4-BE49-F238E27FC236}">
+                <a16:creationId xmlns:a16="http://schemas.microsoft.com/office/drawing/2014/main" id="{561864EF-26CB-788F-DAFF-2B3187D5EE91}"/>
+              </a:ext>
+            </a:extLst>
+          </p:cNvPr>
+          <p:cNvSpPr>
+            <a:spLocks noGrp="1"/>
+          </p:cNvSpPr>
+          <p:nvPr>
+            <p:ph type="sldNum" sz="quarter" idx="7"/>
+          </p:nvPr>
+        </p:nvSpPr>
+        <p:spPr/>
+        <p:txBody>
+          <a:bodyPr/>
+          <a:lstStyle/>
+          <a:p>
+            <a:fld id="{B6F15528-21DE-4FAA-801E-634DDDAF4B2B}" type="slidenum">
+              <a:rPr lang="es-ES" smtClean="0"/>
+              <a:t>15</a:t>
+            </a:fld>
+            <a:endParaRPr lang="es-ES"/>
+          </a:p>
+        </p:txBody>
+      </p:sp>
+      <p:sp>
+        <p:nvSpPr>
+          <p:cNvPr id="3" name="Marcador de pie de página 2">
+            <a:extLst>
+              <a:ext uri="{FF2B5EF4-FFF2-40B4-BE49-F238E27FC236}">
+                <a16:creationId xmlns:a16="http://schemas.microsoft.com/office/drawing/2014/main" id="{29936319-2C10-BCFC-21AA-A36400AD75F8}"/>
+              </a:ext>
+            </a:extLst>
+          </p:cNvPr>
+          <p:cNvSpPr>
+            <a:spLocks noGrp="1"/>
+          </p:cNvSpPr>
+          <p:nvPr>
+            <p:ph type="ftr" sz="quarter" idx="5"/>
+          </p:nvPr>
+        </p:nvSpPr>
+        <p:spPr/>
+        <p:txBody>
+          <a:bodyPr/>
+          <a:lstStyle/>
+          <a:p>
+            <a:pPr marL="12700">
+              <a:spcBef>
+                <a:spcPts val="15"/>
+              </a:spcBef>
+            </a:pPr>
+            <a:r>
+              <a:rPr lang="es-ES" spc="-5"/>
+              <a:t>LAB 1.0 WAVEGUIDES</a:t>
+            </a:r>
+            <a:endParaRPr lang="es-ES" spc="-5" dirty="0"/>
+          </a:p>
+        </p:txBody>
+      </p:sp>
+      <p:sp>
+        <p:nvSpPr>
+          <p:cNvPr id="7" name="Rectángulo 6">
+            <a:extLst>
+              <a:ext uri="{FF2B5EF4-FFF2-40B4-BE49-F238E27FC236}">
+                <a16:creationId xmlns:a16="http://schemas.microsoft.com/office/drawing/2014/main" id="{0A82FF6F-244E-0422-0BBA-FD5BC8913A02}"/>
+              </a:ext>
+            </a:extLst>
+          </p:cNvPr>
+          <p:cNvSpPr/>
+          <p:nvPr/>
+        </p:nvSpPr>
+        <p:spPr>
+          <a:xfrm>
+            <a:off x="381000" y="1418372"/>
+            <a:ext cx="11429999" cy="3839427"/>
+          </a:xfrm>
+          <a:prstGeom prst="rect">
+            <a:avLst/>
+          </a:prstGeom>
+          <a:noFill/>
+          <a:ln w="28575">
+            <a:solidFill>
+              <a:srgbClr val="E0700D"/>
+            </a:solidFill>
+          </a:ln>
+        </p:spPr>
+        <p:style>
+          <a:lnRef idx="2">
+            <a:schemeClr val="accent1">
+              <a:shade val="15000"/>
+            </a:schemeClr>
+          </a:lnRef>
+          <a:fillRef idx="1">
+            <a:schemeClr val="accent1"/>
+          </a:fillRef>
+          <a:effectRef idx="0">
+            <a:schemeClr val="accent1"/>
+          </a:effectRef>
+          <a:fontRef idx="minor">
+            <a:schemeClr val="lt1"/>
+          </a:fontRef>
+        </p:style>
+        <p:txBody>
+          <a:bodyPr rtlCol="0" anchor="ctr"/>
+          <a:lstStyle/>
+          <a:p>
+            <a:pPr algn="ctr"/>
+            <a:endParaRPr lang="en-US"/>
+          </a:p>
+        </p:txBody>
+      </p:sp>
+      <p:pic>
+        <p:nvPicPr>
+          <p:cNvPr id="10" name="Imagen 9">
+            <a:extLst>
+              <a:ext uri="{FF2B5EF4-FFF2-40B4-BE49-F238E27FC236}">
+                <a16:creationId xmlns:a16="http://schemas.microsoft.com/office/drawing/2014/main" id="{7AA86609-8BC2-1A5A-00DF-AA354E7D022E}"/>
+              </a:ext>
+            </a:extLst>
+          </p:cNvPr>
+          <p:cNvPicPr>
+            <a:picLocks noChangeAspect="1"/>
+          </p:cNvPicPr>
+          <p:nvPr/>
+        </p:nvPicPr>
+        <p:blipFill>
+          <a:blip r:embed="rId5"/>
+          <a:srcRect r="1102"/>
+          <a:stretch>
+            <a:fillRect/>
+          </a:stretch>
+        </p:blipFill>
+        <p:spPr>
+          <a:xfrm>
+            <a:off x="532006" y="1554870"/>
+            <a:ext cx="5473098" cy="3486839"/>
+          </a:xfrm>
+          <a:prstGeom prst="rect">
+            <a:avLst/>
+          </a:prstGeom>
+        </p:spPr>
+      </p:pic>
+      <p:sp>
+        <p:nvSpPr>
+          <p:cNvPr id="11" name="CuadroTexto 10">
+            <a:extLst>
+              <a:ext uri="{FF2B5EF4-FFF2-40B4-BE49-F238E27FC236}">
+                <a16:creationId xmlns:a16="http://schemas.microsoft.com/office/drawing/2014/main" id="{45E43CA7-9210-5968-B78B-45925C329253}"/>
+              </a:ext>
+            </a:extLst>
+          </p:cNvPr>
+          <p:cNvSpPr txBox="1"/>
+          <p:nvPr/>
+        </p:nvSpPr>
+        <p:spPr>
+          <a:xfrm>
+            <a:off x="685800" y="5439628"/>
+            <a:ext cx="3267113" cy="369332"/>
+          </a:xfrm>
+          <a:prstGeom prst="rect">
+            <a:avLst/>
+          </a:prstGeom>
+          <a:noFill/>
+        </p:spPr>
+        <p:txBody>
+          <a:bodyPr wrap="square">
+            <a:spAutoFit/>
+          </a:bodyPr>
+          <a:lstStyle/>
+          <a:p>
+            <a:r>
+              <a:rPr lang="en-US" dirty="0" err="1"/>
+              <a:t>slab_thickness</a:t>
+            </a:r>
+            <a:r>
+              <a:rPr lang="en-US" dirty="0"/>
+              <a:t> = 150nm</a:t>
+            </a:r>
+            <a:endParaRPr lang="es-ES" dirty="0"/>
+          </a:p>
+        </p:txBody>
+      </p:sp>
+      <p:pic>
+        <p:nvPicPr>
+          <p:cNvPr id="13" name="Imagen 12">
+            <a:extLst>
+              <a:ext uri="{FF2B5EF4-FFF2-40B4-BE49-F238E27FC236}">
+                <a16:creationId xmlns:a16="http://schemas.microsoft.com/office/drawing/2014/main" id="{85FDF6E3-3F61-832C-4589-FF828B653121}"/>
+              </a:ext>
+            </a:extLst>
+          </p:cNvPr>
+          <p:cNvPicPr>
+            <a:picLocks noChangeAspect="1"/>
+          </p:cNvPicPr>
+          <p:nvPr/>
+        </p:nvPicPr>
+        <p:blipFill>
+          <a:blip r:embed="rId6"/>
+          <a:stretch>
+            <a:fillRect/>
+          </a:stretch>
+        </p:blipFill>
+        <p:spPr>
+          <a:xfrm>
+            <a:off x="6036963" y="1554870"/>
+            <a:ext cx="5588819" cy="3486839"/>
+          </a:xfrm>
+          <a:prstGeom prst="rect">
+            <a:avLst/>
+          </a:prstGeom>
+        </p:spPr>
+      </p:pic>
+    </p:spTree>
+    <p:extLst>
+      <p:ext uri="{BB962C8B-B14F-4D97-AF65-F5344CB8AC3E}">
+        <p14:creationId xmlns:p14="http://schemas.microsoft.com/office/powerpoint/2010/main" val="1468151416"/>
+      </p:ext>
+    </p:extLst>
+  </p:cSld>
+  <p:clrMapOvr>
+    <a:masterClrMapping/>
+  </p:clrMapOvr>
+</p:sld>
+</file>
+
+<file path=ppt/slides/slide16.xml><?xml version="1.0" encoding="utf-8"?>
+<p:sld xmlns:a="http://schemas.openxmlformats.org/drawingml/2006/main" xmlns:r="http://schemas.openxmlformats.org/officeDocument/2006/relationships" xmlns:p="http://schemas.openxmlformats.org/presentationml/2006/main">
+  <p:cSld>
+    <p:spTree>
+      <p:nvGrpSpPr>
+        <p:cNvPr id="1" name="">
+          <a:extLst>
+            <a:ext uri="{FF2B5EF4-FFF2-40B4-BE49-F238E27FC236}">
+              <a16:creationId xmlns:a16="http://schemas.microsoft.com/office/drawing/2014/main" id="{39290A31-EA4D-95A6-2C5E-7D0C46CA7028}"/>
+            </a:ext>
+          </a:extLst>
+        </p:cNvPr>
+        <p:cNvGrpSpPr/>
+        <p:nvPr/>
+      </p:nvGrpSpPr>
+      <p:grpSpPr>
+        <a:xfrm>
+          <a:off x="0" y="0"/>
+          <a:ext cx="0" cy="0"/>
+          <a:chOff x="0" y="0"/>
+          <a:chExt cx="0" cy="0"/>
+        </a:xfrm>
+      </p:grpSpPr>
+      <p:sp>
+        <p:nvSpPr>
+          <p:cNvPr id="16" name="object 16">
+            <a:extLst>
+              <a:ext uri="{FF2B5EF4-FFF2-40B4-BE49-F238E27FC236}">
+                <a16:creationId xmlns:a16="http://schemas.microsoft.com/office/drawing/2014/main" id="{1B0744EA-A8E0-D40D-B1FD-4C37A7BFECC8}"/>
+              </a:ext>
+            </a:extLst>
+          </p:cNvPr>
+          <p:cNvSpPr txBox="1">
+            <a:spLocks noGrp="1"/>
+          </p:cNvSpPr>
+          <p:nvPr>
+            <p:ph type="title"/>
+          </p:nvPr>
+        </p:nvSpPr>
+        <p:spPr>
+          <a:xfrm>
+            <a:off x="685800" y="408883"/>
+            <a:ext cx="10994410" cy="1474763"/>
+          </a:xfrm>
+          <a:prstGeom prst="rect">
+            <a:avLst/>
+          </a:prstGeom>
+        </p:spPr>
+        <p:txBody>
+          <a:bodyPr vert="horz" wrap="square" lIns="0" tIns="12700" rIns="0" bIns="0" rtlCol="0">
+            <a:spAutoFit/>
+          </a:bodyPr>
+          <a:lstStyle/>
+          <a:p>
+            <a:pPr marL="12700">
+              <a:spcBef>
+                <a:spcPts val="100"/>
+              </a:spcBef>
+            </a:pPr>
+            <a:r>
+              <a:rPr lang="en-US" sz="2500" dirty="0"/>
+              <a:t>EXTRA EJERCICIO 1: </a:t>
+            </a:r>
+            <a:br>
+              <a:rPr lang="en-US" sz="2500" dirty="0"/>
+            </a:br>
+            <a:r>
+              <a:rPr lang="en-US" b="0" dirty="0"/>
+              <a:t>Repeat the LO.2. wavelength behavior simulations, considering the updated materials and dimensions</a:t>
+            </a:r>
+            <a:br>
+              <a:rPr lang="en-US" b="0" dirty="0"/>
+            </a:br>
+            <a:br>
+              <a:rPr lang="en-US" sz="2500" dirty="0"/>
+            </a:br>
+            <a:endParaRPr lang="en-US" sz="2500" b="0" dirty="0">
+              <a:latin typeface="+mj-lt"/>
+              <a:cs typeface="Lucida Sans"/>
+            </a:endParaRPr>
+          </a:p>
+        </p:txBody>
+      </p:sp>
+      <p:pic>
+        <p:nvPicPr>
+          <p:cNvPr id="83" name="Gráfico 82">
+            <a:extLst>
+              <a:ext uri="{FF2B5EF4-FFF2-40B4-BE49-F238E27FC236}">
+                <a16:creationId xmlns:a16="http://schemas.microsoft.com/office/drawing/2014/main" id="{C5AEDF8F-1E47-638E-B7AD-DE8F9D9EB363}"/>
+              </a:ext>
+            </a:extLst>
+          </p:cNvPr>
+          <p:cNvPicPr>
+            <a:picLocks noChangeAspect="1"/>
+          </p:cNvPicPr>
+          <p:nvPr/>
+        </p:nvPicPr>
+        <p:blipFill>
+          <a:blip r:embed="rId3">
+            <a:extLst>
+              <a:ext uri="{96DAC541-7B7A-43D3-8B79-37D633B846F1}">
+                <asvg:svgBlip xmlns:asvg="http://schemas.microsoft.com/office/drawing/2016/SVG/main" r:embed="rId4"/>
+              </a:ext>
+            </a:extLst>
+          </a:blip>
+          <a:stretch>
+            <a:fillRect/>
+          </a:stretch>
+        </p:blipFill>
+        <p:spPr>
+          <a:xfrm>
+            <a:off x="5045006" y="6356057"/>
+            <a:ext cx="6409575" cy="363174"/>
+          </a:xfrm>
+          <a:prstGeom prst="rect">
+            <a:avLst/>
+          </a:prstGeom>
+        </p:spPr>
+      </p:pic>
+      <p:sp>
+        <p:nvSpPr>
+          <p:cNvPr id="84" name="Marcador de número de diapositiva 83">
+            <a:extLst>
+              <a:ext uri="{FF2B5EF4-FFF2-40B4-BE49-F238E27FC236}">
+                <a16:creationId xmlns:a16="http://schemas.microsoft.com/office/drawing/2014/main" id="{0A571BAA-9282-B084-D18F-F8176D48F2F8}"/>
+              </a:ext>
+            </a:extLst>
+          </p:cNvPr>
+          <p:cNvSpPr>
+            <a:spLocks noGrp="1"/>
+          </p:cNvSpPr>
+          <p:nvPr>
+            <p:ph type="sldNum" sz="quarter" idx="7"/>
+          </p:nvPr>
+        </p:nvSpPr>
+        <p:spPr/>
+        <p:txBody>
+          <a:bodyPr/>
+          <a:lstStyle/>
+          <a:p>
+            <a:fld id="{B6F15528-21DE-4FAA-801E-634DDDAF4B2B}" type="slidenum">
+              <a:rPr lang="es-ES" smtClean="0"/>
+              <a:t>16</a:t>
+            </a:fld>
+            <a:endParaRPr lang="es-ES"/>
+          </a:p>
+        </p:txBody>
+      </p:sp>
+      <p:sp>
+        <p:nvSpPr>
+          <p:cNvPr id="3" name="Marcador de pie de página 2">
+            <a:extLst>
+              <a:ext uri="{FF2B5EF4-FFF2-40B4-BE49-F238E27FC236}">
+                <a16:creationId xmlns:a16="http://schemas.microsoft.com/office/drawing/2014/main" id="{4A75EB05-3E07-1AA7-934E-29710A8F4544}"/>
+              </a:ext>
+            </a:extLst>
+          </p:cNvPr>
+          <p:cNvSpPr>
+            <a:spLocks noGrp="1"/>
+          </p:cNvSpPr>
+          <p:nvPr>
+            <p:ph type="ftr" sz="quarter" idx="5"/>
+          </p:nvPr>
+        </p:nvSpPr>
+        <p:spPr/>
+        <p:txBody>
+          <a:bodyPr/>
+          <a:lstStyle/>
+          <a:p>
+            <a:pPr marL="12700">
+              <a:spcBef>
+                <a:spcPts val="15"/>
+              </a:spcBef>
+            </a:pPr>
+            <a:r>
+              <a:rPr lang="es-ES" spc="-5"/>
+              <a:t>LAB 1.0 WAVEGUIDES</a:t>
+            </a:r>
+            <a:endParaRPr lang="es-ES" spc="-5" dirty="0"/>
+          </a:p>
+        </p:txBody>
+      </p:sp>
+      <p:sp>
+        <p:nvSpPr>
+          <p:cNvPr id="14" name="CuadroTexto 13">
+            <a:extLst>
+              <a:ext uri="{FF2B5EF4-FFF2-40B4-BE49-F238E27FC236}">
+                <a16:creationId xmlns:a16="http://schemas.microsoft.com/office/drawing/2014/main" id="{013B78EF-DAB1-0BE3-963D-9C7ACF01DE8E}"/>
+              </a:ext>
+            </a:extLst>
+          </p:cNvPr>
+          <p:cNvSpPr txBox="1"/>
+          <p:nvPr/>
+        </p:nvSpPr>
+        <p:spPr>
+          <a:xfrm>
+            <a:off x="576943" y="1945986"/>
+            <a:ext cx="11199971" cy="2492990"/>
+          </a:xfrm>
+          <a:prstGeom prst="rect">
+            <a:avLst/>
+          </a:prstGeom>
+          <a:solidFill>
+            <a:schemeClr val="bg1">
+              <a:lumMod val="95000"/>
+            </a:schemeClr>
+          </a:solidFill>
+          <a:ln w="28575">
+            <a:solidFill>
+              <a:srgbClr val="E0700D"/>
+            </a:solidFill>
+          </a:ln>
+        </p:spPr>
+        <p:txBody>
+          <a:bodyPr wrap="square" rtlCol="0">
+            <a:spAutoFit/>
+          </a:bodyPr>
+          <a:lstStyle/>
+          <a:p>
+            <a:pPr algn="just"/>
+            <a:r>
+              <a:rPr lang="en-US" sz="1200" dirty="0">
+                <a:latin typeface="Arial" panose="020B0604020202020204" pitchFamily="34" charset="0"/>
+                <a:cs typeface="Arial" panose="020B0604020202020204" pitchFamily="34" charset="0"/>
+              </a:rPr>
+              <a:t>Comment results:</a:t>
+            </a:r>
+          </a:p>
+          <a:p>
+            <a:pPr algn="just"/>
+            <a:endParaRPr lang="en-US" sz="1200" dirty="0">
+              <a:latin typeface="Arial" panose="020B0604020202020204" pitchFamily="34" charset="0"/>
+              <a:cs typeface="Arial" panose="020B0604020202020204" pitchFamily="34" charset="0"/>
+            </a:endParaRPr>
+          </a:p>
+          <a:p>
+            <a:pPr algn="just"/>
+            <a:r>
+              <a:rPr lang="en-US" sz="1200" dirty="0">
+                <a:latin typeface="Arial" panose="020B0604020202020204" pitchFamily="34" charset="0"/>
+                <a:cs typeface="Arial" panose="020B0604020202020204" pitchFamily="34" charset="0"/>
+              </a:rPr>
+              <a:t>En </a:t>
+            </a:r>
+            <a:r>
+              <a:rPr lang="en-US" sz="1200" dirty="0" err="1">
+                <a:latin typeface="Arial" panose="020B0604020202020204" pitchFamily="34" charset="0"/>
+                <a:cs typeface="Arial" panose="020B0604020202020204" pitchFamily="34" charset="0"/>
+              </a:rPr>
+              <a:t>el</a:t>
+            </a:r>
+            <a:r>
+              <a:rPr lang="en-US" sz="1200" dirty="0">
+                <a:latin typeface="Arial" panose="020B0604020202020204" pitchFamily="34" charset="0"/>
+                <a:cs typeface="Arial" panose="020B0604020202020204" pitchFamily="34" charset="0"/>
+              </a:rPr>
+              <a:t> primer </a:t>
+            </a:r>
+            <a:r>
+              <a:rPr lang="en-US" sz="1200" dirty="0" err="1">
+                <a:latin typeface="Arial" panose="020B0604020202020204" pitchFamily="34" charset="0"/>
+                <a:cs typeface="Arial" panose="020B0604020202020204" pitchFamily="34" charset="0"/>
+              </a:rPr>
+              <a:t>ejercicio</a:t>
+            </a:r>
+            <a:r>
+              <a:rPr lang="en-US" sz="1200" dirty="0">
+                <a:latin typeface="Arial" panose="020B0604020202020204" pitchFamily="34" charset="0"/>
+                <a:cs typeface="Arial" panose="020B0604020202020204" pitchFamily="34" charset="0"/>
+              </a:rPr>
+              <a:t> extra, se </a:t>
+            </a:r>
+            <a:r>
+              <a:rPr lang="en-US" sz="1200" dirty="0" err="1">
+                <a:latin typeface="Arial" panose="020B0604020202020204" pitchFamily="34" charset="0"/>
+                <a:cs typeface="Arial" panose="020B0604020202020204" pitchFamily="34" charset="0"/>
+              </a:rPr>
+              <a:t>pide</a:t>
+            </a:r>
+            <a:r>
+              <a:rPr lang="en-US" sz="1200" dirty="0">
+                <a:latin typeface="Arial" panose="020B0604020202020204" pitchFamily="34" charset="0"/>
+                <a:cs typeface="Arial" panose="020B0604020202020204" pitchFamily="34" charset="0"/>
+              </a:rPr>
+              <a:t> </a:t>
+            </a:r>
+            <a:r>
+              <a:rPr lang="en-US" sz="1200" dirty="0" err="1">
+                <a:latin typeface="Arial" panose="020B0604020202020204" pitchFamily="34" charset="0"/>
+                <a:cs typeface="Arial" panose="020B0604020202020204" pitchFamily="34" charset="0"/>
+              </a:rPr>
+              <a:t>volver</a:t>
+            </a:r>
+            <a:r>
+              <a:rPr lang="en-US" sz="1200" dirty="0">
+                <a:latin typeface="Arial" panose="020B0604020202020204" pitchFamily="34" charset="0"/>
+                <a:cs typeface="Arial" panose="020B0604020202020204" pitchFamily="34" charset="0"/>
+              </a:rPr>
+              <a:t> a </a:t>
+            </a:r>
+            <a:r>
+              <a:rPr lang="en-US" sz="1200" dirty="0" err="1">
+                <a:latin typeface="Arial" panose="020B0604020202020204" pitchFamily="34" charset="0"/>
+                <a:cs typeface="Arial" panose="020B0604020202020204" pitchFamily="34" charset="0"/>
+              </a:rPr>
+              <a:t>simular</a:t>
+            </a:r>
+            <a:r>
+              <a:rPr lang="en-US" sz="1200" dirty="0">
+                <a:latin typeface="Arial" panose="020B0604020202020204" pitchFamily="34" charset="0"/>
+                <a:cs typeface="Arial" panose="020B0604020202020204" pitchFamily="34" charset="0"/>
+              </a:rPr>
+              <a:t> la </a:t>
+            </a:r>
+            <a:r>
+              <a:rPr lang="en-US" sz="1200" dirty="0" err="1">
+                <a:latin typeface="Arial" panose="020B0604020202020204" pitchFamily="34" charset="0"/>
+                <a:cs typeface="Arial" panose="020B0604020202020204" pitchFamily="34" charset="0"/>
+              </a:rPr>
+              <a:t>guía</a:t>
+            </a:r>
+            <a:r>
+              <a:rPr lang="en-US" sz="1200" dirty="0">
+                <a:latin typeface="Arial" panose="020B0604020202020204" pitchFamily="34" charset="0"/>
+                <a:cs typeface="Arial" panose="020B0604020202020204" pitchFamily="34" charset="0"/>
+              </a:rPr>
+              <a:t> de </a:t>
+            </a:r>
+            <a:r>
+              <a:rPr lang="en-US" sz="1200" dirty="0" err="1">
+                <a:latin typeface="Arial" panose="020B0604020202020204" pitchFamily="34" charset="0"/>
+                <a:cs typeface="Arial" panose="020B0604020202020204" pitchFamily="34" charset="0"/>
+              </a:rPr>
+              <a:t>onda</a:t>
+            </a:r>
+            <a:r>
+              <a:rPr lang="en-US" sz="1200" dirty="0">
+                <a:latin typeface="Arial" panose="020B0604020202020204" pitchFamily="34" charset="0"/>
+                <a:cs typeface="Arial" panose="020B0604020202020204" pitchFamily="34" charset="0"/>
+              </a:rPr>
+              <a:t> deep y shallow </a:t>
+            </a:r>
+            <a:r>
+              <a:rPr lang="en-US" sz="1200" dirty="0" err="1">
+                <a:latin typeface="Arial" panose="020B0604020202020204" pitchFamily="34" charset="0"/>
+                <a:cs typeface="Arial" panose="020B0604020202020204" pitchFamily="34" charset="0"/>
+              </a:rPr>
+              <a:t>en</a:t>
+            </a:r>
+            <a:r>
+              <a:rPr lang="en-US" sz="1200" dirty="0">
+                <a:latin typeface="Arial" panose="020B0604020202020204" pitchFamily="34" charset="0"/>
+                <a:cs typeface="Arial" panose="020B0604020202020204" pitchFamily="34" charset="0"/>
+              </a:rPr>
+              <a:t> </a:t>
+            </a:r>
+            <a:r>
+              <a:rPr lang="en-US" sz="1200" dirty="0" err="1">
+                <a:latin typeface="Arial" panose="020B0604020202020204" pitchFamily="34" charset="0"/>
+                <a:cs typeface="Arial" panose="020B0604020202020204" pitchFamily="34" charset="0"/>
+              </a:rPr>
+              <a:t>función</a:t>
+            </a:r>
+            <a:r>
+              <a:rPr lang="en-US" sz="1200" dirty="0">
+                <a:latin typeface="Arial" panose="020B0604020202020204" pitchFamily="34" charset="0"/>
+                <a:cs typeface="Arial" panose="020B0604020202020204" pitchFamily="34" charset="0"/>
+              </a:rPr>
+              <a:t> de sus longitudes de </a:t>
+            </a:r>
+            <a:r>
+              <a:rPr lang="en-US" sz="1200" dirty="0" err="1">
+                <a:latin typeface="Arial" panose="020B0604020202020204" pitchFamily="34" charset="0"/>
+                <a:cs typeface="Arial" panose="020B0604020202020204" pitchFamily="34" charset="0"/>
+              </a:rPr>
+              <a:t>onda</a:t>
+            </a:r>
+            <a:r>
+              <a:rPr lang="en-US" sz="1200" dirty="0">
+                <a:latin typeface="Arial" panose="020B0604020202020204" pitchFamily="34" charset="0"/>
+                <a:cs typeface="Arial" panose="020B0604020202020204" pitchFamily="34" charset="0"/>
+              </a:rPr>
+              <a:t>, </a:t>
+            </a:r>
+            <a:r>
+              <a:rPr lang="en-US" sz="1200" dirty="0" err="1">
+                <a:latin typeface="Arial" panose="020B0604020202020204" pitchFamily="34" charset="0"/>
+                <a:cs typeface="Arial" panose="020B0604020202020204" pitchFamily="34" charset="0"/>
+              </a:rPr>
+              <a:t>después</a:t>
+            </a:r>
+            <a:r>
+              <a:rPr lang="en-US" sz="1200" dirty="0">
+                <a:latin typeface="Arial" panose="020B0604020202020204" pitchFamily="34" charset="0"/>
+                <a:cs typeface="Arial" panose="020B0604020202020204" pitchFamily="34" charset="0"/>
+              </a:rPr>
+              <a:t> de </a:t>
+            </a:r>
+            <a:r>
+              <a:rPr lang="en-US" sz="1200" dirty="0" err="1">
+                <a:latin typeface="Arial" panose="020B0604020202020204" pitchFamily="34" charset="0"/>
+                <a:cs typeface="Arial" panose="020B0604020202020204" pitchFamily="34" charset="0"/>
+              </a:rPr>
+              <a:t>haber</a:t>
+            </a:r>
+            <a:r>
+              <a:rPr lang="en-US" sz="1200" dirty="0">
+                <a:latin typeface="Arial" panose="020B0604020202020204" pitchFamily="34" charset="0"/>
+                <a:cs typeface="Arial" panose="020B0604020202020204" pitchFamily="34" charset="0"/>
+              </a:rPr>
+              <a:t> </a:t>
+            </a:r>
+            <a:r>
+              <a:rPr lang="en-US" sz="1200" dirty="0" err="1">
+                <a:latin typeface="Arial" panose="020B0604020202020204" pitchFamily="34" charset="0"/>
+                <a:cs typeface="Arial" panose="020B0604020202020204" pitchFamily="34" charset="0"/>
+              </a:rPr>
+              <a:t>realizado</a:t>
+            </a:r>
+            <a:r>
+              <a:rPr lang="en-US" sz="1200" dirty="0">
+                <a:latin typeface="Arial" panose="020B0604020202020204" pitchFamily="34" charset="0"/>
+                <a:cs typeface="Arial" panose="020B0604020202020204" pitchFamily="34" charset="0"/>
+              </a:rPr>
+              <a:t> las </a:t>
+            </a:r>
+            <a:r>
+              <a:rPr lang="en-US" sz="1200" dirty="0" err="1">
+                <a:latin typeface="Arial" panose="020B0604020202020204" pitchFamily="34" charset="0"/>
+                <a:cs typeface="Arial" panose="020B0604020202020204" pitchFamily="34" charset="0"/>
+              </a:rPr>
+              <a:t>modificaciones</a:t>
+            </a:r>
+            <a:r>
+              <a:rPr lang="en-US" sz="1200" dirty="0">
+                <a:latin typeface="Arial" panose="020B0604020202020204" pitchFamily="34" charset="0"/>
+                <a:cs typeface="Arial" panose="020B0604020202020204" pitchFamily="34" charset="0"/>
+              </a:rPr>
+              <a:t> </a:t>
+            </a:r>
+            <a:r>
+              <a:rPr lang="en-US" sz="1200" dirty="0" err="1">
+                <a:latin typeface="Arial" panose="020B0604020202020204" pitchFamily="34" charset="0"/>
+                <a:cs typeface="Arial" panose="020B0604020202020204" pitchFamily="34" charset="0"/>
+              </a:rPr>
+              <a:t>mencionadas</a:t>
+            </a:r>
+            <a:r>
+              <a:rPr lang="en-US" sz="1200" dirty="0">
+                <a:latin typeface="Arial" panose="020B0604020202020204" pitchFamily="34" charset="0"/>
+                <a:cs typeface="Arial" panose="020B0604020202020204" pitchFamily="34" charset="0"/>
+              </a:rPr>
+              <a:t> </a:t>
+            </a:r>
+            <a:r>
+              <a:rPr lang="en-US" sz="1200" dirty="0" err="1">
+                <a:latin typeface="Arial" panose="020B0604020202020204" pitchFamily="34" charset="0"/>
+                <a:cs typeface="Arial" panose="020B0604020202020204" pitchFamily="34" charset="0"/>
+              </a:rPr>
+              <a:t>en</a:t>
+            </a:r>
+            <a:r>
+              <a:rPr lang="en-US" sz="1200" dirty="0">
+                <a:latin typeface="Arial" panose="020B0604020202020204" pitchFamily="34" charset="0"/>
+                <a:cs typeface="Arial" panose="020B0604020202020204" pitchFamily="34" charset="0"/>
+              </a:rPr>
+              <a:t> la </a:t>
+            </a:r>
+            <a:r>
+              <a:rPr lang="en-US" sz="1200" dirty="0" err="1">
+                <a:latin typeface="Arial" panose="020B0604020202020204" pitchFamily="34" charset="0"/>
+                <a:cs typeface="Arial" panose="020B0604020202020204" pitchFamily="34" charset="0"/>
+              </a:rPr>
+              <a:t>diapositiva</a:t>
+            </a:r>
+            <a:r>
+              <a:rPr lang="en-US" sz="1200" dirty="0">
+                <a:latin typeface="Arial" panose="020B0604020202020204" pitchFamily="34" charset="0"/>
+                <a:cs typeface="Arial" panose="020B0604020202020204" pitchFamily="34" charset="0"/>
+              </a:rPr>
+              <a:t> anterior. Como se </a:t>
+            </a:r>
+            <a:r>
+              <a:rPr lang="en-US" sz="1200" dirty="0" err="1">
+                <a:latin typeface="Arial" panose="020B0604020202020204" pitchFamily="34" charset="0"/>
+                <a:cs typeface="Arial" panose="020B0604020202020204" pitchFamily="34" charset="0"/>
+              </a:rPr>
+              <a:t>puede</a:t>
+            </a:r>
+            <a:r>
+              <a:rPr lang="en-US" sz="1200" dirty="0">
+                <a:latin typeface="Arial" panose="020B0604020202020204" pitchFamily="34" charset="0"/>
+                <a:cs typeface="Arial" panose="020B0604020202020204" pitchFamily="34" charset="0"/>
+              </a:rPr>
+              <a:t> </a:t>
+            </a:r>
+            <a:r>
+              <a:rPr lang="en-US" sz="1200" dirty="0" err="1">
+                <a:latin typeface="Arial" panose="020B0604020202020204" pitchFamily="34" charset="0"/>
+                <a:cs typeface="Arial" panose="020B0604020202020204" pitchFamily="34" charset="0"/>
+              </a:rPr>
+              <a:t>observar</a:t>
+            </a:r>
+            <a:r>
+              <a:rPr lang="en-US" sz="1200" dirty="0">
+                <a:latin typeface="Arial" panose="020B0604020202020204" pitchFamily="34" charset="0"/>
+                <a:cs typeface="Arial" panose="020B0604020202020204" pitchFamily="34" charset="0"/>
+              </a:rPr>
+              <a:t>, tanto para la </a:t>
+            </a:r>
+            <a:r>
+              <a:rPr lang="en-US" sz="1200" dirty="0" err="1">
+                <a:latin typeface="Arial" panose="020B0604020202020204" pitchFamily="34" charset="0"/>
+                <a:cs typeface="Arial" panose="020B0604020202020204" pitchFamily="34" charset="0"/>
+              </a:rPr>
+              <a:t>gráfica</a:t>
+            </a:r>
+            <a:r>
+              <a:rPr lang="en-US" sz="1200" dirty="0">
+                <a:latin typeface="Arial" panose="020B0604020202020204" pitchFamily="34" charset="0"/>
+                <a:cs typeface="Arial" panose="020B0604020202020204" pitchFamily="34" charset="0"/>
+              </a:rPr>
+              <a:t> deep </a:t>
+            </a:r>
+            <a:r>
+              <a:rPr lang="en-US" sz="1200" dirty="0" err="1">
+                <a:latin typeface="Arial" panose="020B0604020202020204" pitchFamily="34" charset="0"/>
+                <a:cs typeface="Arial" panose="020B0604020202020204" pitchFamily="34" charset="0"/>
+              </a:rPr>
+              <a:t>como</a:t>
+            </a:r>
+            <a:r>
+              <a:rPr lang="en-US" sz="1200" dirty="0">
+                <a:latin typeface="Arial" panose="020B0604020202020204" pitchFamily="34" charset="0"/>
+                <a:cs typeface="Arial" panose="020B0604020202020204" pitchFamily="34" charset="0"/>
+              </a:rPr>
+              <a:t> la shallow, </a:t>
+            </a:r>
+            <a:r>
+              <a:rPr lang="en-US" sz="1200" dirty="0" err="1">
+                <a:latin typeface="Arial" panose="020B0604020202020204" pitchFamily="34" charset="0"/>
+                <a:cs typeface="Arial" panose="020B0604020202020204" pitchFamily="34" charset="0"/>
+              </a:rPr>
+              <a:t>están</a:t>
+            </a:r>
+            <a:r>
+              <a:rPr lang="en-US" sz="1200" dirty="0">
+                <a:latin typeface="Arial" panose="020B0604020202020204" pitchFamily="34" charset="0"/>
+                <a:cs typeface="Arial" panose="020B0604020202020204" pitchFamily="34" charset="0"/>
+              </a:rPr>
+              <a:t> </a:t>
+            </a:r>
+            <a:r>
+              <a:rPr lang="en-US" sz="1200" dirty="0" err="1">
+                <a:latin typeface="Arial" panose="020B0604020202020204" pitchFamily="34" charset="0"/>
+                <a:cs typeface="Arial" panose="020B0604020202020204" pitchFamily="34" charset="0"/>
+              </a:rPr>
+              <a:t>representados</a:t>
+            </a:r>
+            <a:r>
+              <a:rPr lang="en-US" sz="1200" dirty="0">
+                <a:latin typeface="Arial" panose="020B0604020202020204" pitchFamily="34" charset="0"/>
+                <a:cs typeface="Arial" panose="020B0604020202020204" pitchFamily="34" charset="0"/>
+              </a:rPr>
+              <a:t> </a:t>
+            </a:r>
+            <a:r>
+              <a:rPr lang="en-US" sz="1200" dirty="0" err="1">
+                <a:latin typeface="Arial" panose="020B0604020202020204" pitchFamily="34" charset="0"/>
+                <a:cs typeface="Arial" panose="020B0604020202020204" pitchFamily="34" charset="0"/>
+              </a:rPr>
+              <a:t>los</a:t>
+            </a:r>
+            <a:r>
+              <a:rPr lang="en-US" sz="1200" dirty="0">
+                <a:latin typeface="Arial" panose="020B0604020202020204" pitchFamily="34" charset="0"/>
+                <a:cs typeface="Arial" panose="020B0604020202020204" pitchFamily="34" charset="0"/>
+              </a:rPr>
+              <a:t> 4 </a:t>
+            </a:r>
+            <a:r>
+              <a:rPr lang="en-US" sz="1200" dirty="0" err="1">
+                <a:latin typeface="Arial" panose="020B0604020202020204" pitchFamily="34" charset="0"/>
+                <a:cs typeface="Arial" panose="020B0604020202020204" pitchFamily="34" charset="0"/>
+              </a:rPr>
+              <a:t>primeros</a:t>
+            </a:r>
+            <a:r>
+              <a:rPr lang="en-US" sz="1200" dirty="0">
+                <a:latin typeface="Arial" panose="020B0604020202020204" pitchFamily="34" charset="0"/>
+                <a:cs typeface="Arial" panose="020B0604020202020204" pitchFamily="34" charset="0"/>
+              </a:rPr>
+              <a:t> </a:t>
+            </a:r>
+            <a:r>
+              <a:rPr lang="en-US" sz="1200" dirty="0" err="1">
+                <a:latin typeface="Arial" panose="020B0604020202020204" pitchFamily="34" charset="0"/>
+                <a:cs typeface="Arial" panose="020B0604020202020204" pitchFamily="34" charset="0"/>
+              </a:rPr>
+              <a:t>modos</a:t>
+            </a:r>
+            <a:r>
+              <a:rPr lang="en-US" sz="1200" dirty="0">
+                <a:latin typeface="Arial" panose="020B0604020202020204" pitchFamily="34" charset="0"/>
+                <a:cs typeface="Arial" panose="020B0604020202020204" pitchFamily="34" charset="0"/>
+              </a:rPr>
+              <a:t>. </a:t>
+            </a:r>
+          </a:p>
+          <a:p>
+            <a:pPr algn="just"/>
+            <a:endParaRPr lang="en-US" sz="1200" dirty="0">
+              <a:latin typeface="Arial" panose="020B0604020202020204" pitchFamily="34" charset="0"/>
+              <a:cs typeface="Arial" panose="020B0604020202020204" pitchFamily="34" charset="0"/>
+            </a:endParaRPr>
+          </a:p>
+          <a:p>
+            <a:pPr algn="just"/>
+            <a:r>
+              <a:rPr lang="en-US" sz="1200" dirty="0">
+                <a:latin typeface="Arial" panose="020B0604020202020204" pitchFamily="34" charset="0"/>
+                <a:cs typeface="Arial" panose="020B0604020202020204" pitchFamily="34" charset="0"/>
+              </a:rPr>
+              <a:t>De </a:t>
+            </a:r>
+            <a:r>
+              <a:rPr lang="en-US" sz="1200" dirty="0" err="1">
+                <a:latin typeface="Arial" panose="020B0604020202020204" pitchFamily="34" charset="0"/>
+                <a:cs typeface="Arial" panose="020B0604020202020204" pitchFamily="34" charset="0"/>
+              </a:rPr>
+              <a:t>dichos</a:t>
+            </a:r>
+            <a:r>
+              <a:rPr lang="en-US" sz="1200" dirty="0">
+                <a:latin typeface="Arial" panose="020B0604020202020204" pitchFamily="34" charset="0"/>
+                <a:cs typeface="Arial" panose="020B0604020202020204" pitchFamily="34" charset="0"/>
+              </a:rPr>
+              <a:t> </a:t>
+            </a:r>
+            <a:r>
+              <a:rPr lang="en-US" sz="1200" dirty="0" err="1">
+                <a:latin typeface="Arial" panose="020B0604020202020204" pitchFamily="34" charset="0"/>
+                <a:cs typeface="Arial" panose="020B0604020202020204" pitchFamily="34" charset="0"/>
+              </a:rPr>
+              <a:t>modos</a:t>
+            </a:r>
+            <a:r>
+              <a:rPr lang="en-US" sz="1200" dirty="0">
+                <a:latin typeface="Arial" panose="020B0604020202020204" pitchFamily="34" charset="0"/>
+                <a:cs typeface="Arial" panose="020B0604020202020204" pitchFamily="34" charset="0"/>
+              </a:rPr>
+              <a:t>, </a:t>
+            </a:r>
+            <a:r>
+              <a:rPr lang="en-US" sz="1200" dirty="0" err="1">
+                <a:latin typeface="Arial" panose="020B0604020202020204" pitchFamily="34" charset="0"/>
+                <a:cs typeface="Arial" panose="020B0604020202020204" pitchFamily="34" charset="0"/>
+              </a:rPr>
+              <a:t>en</a:t>
+            </a:r>
+            <a:r>
+              <a:rPr lang="en-US" sz="1200" dirty="0">
+                <a:latin typeface="Arial" panose="020B0604020202020204" pitchFamily="34" charset="0"/>
+                <a:cs typeface="Arial" panose="020B0604020202020204" pitchFamily="34" charset="0"/>
+              </a:rPr>
+              <a:t> la deep </a:t>
+            </a:r>
+            <a:r>
+              <a:rPr lang="en-US" sz="1200" dirty="0" err="1">
+                <a:latin typeface="Arial" panose="020B0604020202020204" pitchFamily="34" charset="0"/>
+                <a:cs typeface="Arial" panose="020B0604020202020204" pitchFamily="34" charset="0"/>
+              </a:rPr>
+              <a:t>únicamente</a:t>
+            </a:r>
+            <a:r>
+              <a:rPr lang="en-US" sz="1200" dirty="0">
+                <a:latin typeface="Arial" panose="020B0604020202020204" pitchFamily="34" charset="0"/>
+                <a:cs typeface="Arial" panose="020B0604020202020204" pitchFamily="34" charset="0"/>
+              </a:rPr>
+              <a:t> </a:t>
+            </a:r>
+            <a:r>
+              <a:rPr lang="en-US" sz="1200" dirty="0" err="1">
+                <a:latin typeface="Arial" panose="020B0604020202020204" pitchFamily="34" charset="0"/>
+                <a:cs typeface="Arial" panose="020B0604020202020204" pitchFamily="34" charset="0"/>
+              </a:rPr>
+              <a:t>están</a:t>
+            </a:r>
+            <a:r>
+              <a:rPr lang="en-US" sz="1200" dirty="0">
+                <a:latin typeface="Arial" panose="020B0604020202020204" pitchFamily="34" charset="0"/>
+                <a:cs typeface="Arial" panose="020B0604020202020204" pitchFamily="34" charset="0"/>
+              </a:rPr>
+              <a:t> </a:t>
+            </a:r>
+            <a:r>
+              <a:rPr lang="en-US" sz="1200" dirty="0" err="1">
+                <a:latin typeface="Arial" panose="020B0604020202020204" pitchFamily="34" charset="0"/>
+                <a:cs typeface="Arial" panose="020B0604020202020204" pitchFamily="34" charset="0"/>
+              </a:rPr>
+              <a:t>guiados</a:t>
+            </a:r>
+            <a:r>
+              <a:rPr lang="en-US" sz="1200" dirty="0">
+                <a:latin typeface="Arial" panose="020B0604020202020204" pitchFamily="34" charset="0"/>
+                <a:cs typeface="Arial" panose="020B0604020202020204" pitchFamily="34" charset="0"/>
+              </a:rPr>
+              <a:t> </a:t>
+            </a:r>
+            <a:r>
+              <a:rPr lang="en-US" sz="1200" dirty="0" err="1">
+                <a:latin typeface="Arial" panose="020B0604020202020204" pitchFamily="34" charset="0"/>
+                <a:cs typeface="Arial" panose="020B0604020202020204" pitchFamily="34" charset="0"/>
+              </a:rPr>
+              <a:t>los</a:t>
+            </a:r>
+            <a:r>
+              <a:rPr lang="en-US" sz="1200" dirty="0">
+                <a:latin typeface="Arial" panose="020B0604020202020204" pitchFamily="34" charset="0"/>
+                <a:cs typeface="Arial" panose="020B0604020202020204" pitchFamily="34" charset="0"/>
+              </a:rPr>
+              <a:t> </a:t>
+            </a:r>
+            <a:r>
+              <a:rPr lang="en-US" sz="1200" dirty="0" err="1">
+                <a:latin typeface="Arial" panose="020B0604020202020204" pitchFamily="34" charset="0"/>
+                <a:cs typeface="Arial" panose="020B0604020202020204" pitchFamily="34" charset="0"/>
+              </a:rPr>
+              <a:t>tres</a:t>
+            </a:r>
+            <a:r>
+              <a:rPr lang="en-US" sz="1200" dirty="0">
+                <a:latin typeface="Arial" panose="020B0604020202020204" pitchFamily="34" charset="0"/>
+                <a:cs typeface="Arial" panose="020B0604020202020204" pitchFamily="34" charset="0"/>
+              </a:rPr>
+              <a:t> </a:t>
+            </a:r>
+            <a:r>
+              <a:rPr lang="en-US" sz="1200" dirty="0" err="1">
+                <a:latin typeface="Arial" panose="020B0604020202020204" pitchFamily="34" charset="0"/>
+                <a:cs typeface="Arial" panose="020B0604020202020204" pitchFamily="34" charset="0"/>
+              </a:rPr>
+              <a:t>primeros</a:t>
+            </a:r>
+            <a:r>
+              <a:rPr lang="en-US" sz="1200" dirty="0">
+                <a:latin typeface="Arial" panose="020B0604020202020204" pitchFamily="34" charset="0"/>
+                <a:cs typeface="Arial" panose="020B0604020202020204" pitchFamily="34" charset="0"/>
+              </a:rPr>
+              <a:t>, y </a:t>
+            </a:r>
+            <a:r>
+              <a:rPr lang="en-US" sz="1200" dirty="0" err="1">
+                <a:latin typeface="Arial" panose="020B0604020202020204" pitchFamily="34" charset="0"/>
+                <a:cs typeface="Arial" panose="020B0604020202020204" pitchFamily="34" charset="0"/>
+              </a:rPr>
+              <a:t>esto</a:t>
+            </a:r>
+            <a:r>
+              <a:rPr lang="en-US" sz="1200" dirty="0">
+                <a:latin typeface="Arial" panose="020B0604020202020204" pitchFamily="34" charset="0"/>
+                <a:cs typeface="Arial" panose="020B0604020202020204" pitchFamily="34" charset="0"/>
+              </a:rPr>
+              <a:t> se </a:t>
+            </a:r>
+            <a:r>
+              <a:rPr lang="en-US" sz="1200" dirty="0" err="1">
+                <a:latin typeface="Arial" panose="020B0604020202020204" pitchFamily="34" charset="0"/>
+                <a:cs typeface="Arial" panose="020B0604020202020204" pitchFamily="34" charset="0"/>
+              </a:rPr>
+              <a:t>debe</a:t>
+            </a:r>
+            <a:r>
+              <a:rPr lang="en-US" sz="1200" dirty="0">
+                <a:latin typeface="Arial" panose="020B0604020202020204" pitchFamily="34" charset="0"/>
+                <a:cs typeface="Arial" panose="020B0604020202020204" pitchFamily="34" charset="0"/>
+              </a:rPr>
+              <a:t> a </a:t>
+            </a:r>
+            <a:r>
+              <a:rPr lang="en-US" sz="1200" dirty="0" err="1">
+                <a:latin typeface="Arial" panose="020B0604020202020204" pitchFamily="34" charset="0"/>
+                <a:cs typeface="Arial" panose="020B0604020202020204" pitchFamily="34" charset="0"/>
+              </a:rPr>
+              <a:t>que</a:t>
+            </a:r>
+            <a:r>
+              <a:rPr lang="en-US" sz="1200" dirty="0">
+                <a:latin typeface="Arial" panose="020B0604020202020204" pitchFamily="34" charset="0"/>
+                <a:cs typeface="Arial" panose="020B0604020202020204" pitchFamily="34" charset="0"/>
+              </a:rPr>
+              <a:t>, </a:t>
+            </a:r>
+            <a:r>
+              <a:rPr lang="en-US" sz="1200" dirty="0" err="1">
+                <a:latin typeface="Arial" panose="020B0604020202020204" pitchFamily="34" charset="0"/>
+                <a:cs typeface="Arial" panose="020B0604020202020204" pitchFamily="34" charset="0"/>
+              </a:rPr>
+              <a:t>tal</a:t>
+            </a:r>
+            <a:r>
+              <a:rPr lang="en-US" sz="1200" dirty="0">
+                <a:latin typeface="Arial" panose="020B0604020202020204" pitchFamily="34" charset="0"/>
+                <a:cs typeface="Arial" panose="020B0604020202020204" pitchFamily="34" charset="0"/>
+              </a:rPr>
+              <a:t> y </a:t>
+            </a:r>
+            <a:r>
+              <a:rPr lang="en-US" sz="1200" dirty="0" err="1">
+                <a:latin typeface="Arial" panose="020B0604020202020204" pitchFamily="34" charset="0"/>
+                <a:cs typeface="Arial" panose="020B0604020202020204" pitchFamily="34" charset="0"/>
+              </a:rPr>
+              <a:t>como</a:t>
+            </a:r>
+            <a:r>
+              <a:rPr lang="en-US" sz="1200" dirty="0">
+                <a:latin typeface="Arial" panose="020B0604020202020204" pitchFamily="34" charset="0"/>
+                <a:cs typeface="Arial" panose="020B0604020202020204" pitchFamily="34" charset="0"/>
+              </a:rPr>
+              <a:t> se </a:t>
+            </a:r>
+            <a:r>
+              <a:rPr lang="en-US" sz="1200" dirty="0" err="1">
+                <a:latin typeface="Arial" panose="020B0604020202020204" pitchFamily="34" charset="0"/>
+                <a:cs typeface="Arial" panose="020B0604020202020204" pitchFamily="34" charset="0"/>
+              </a:rPr>
+              <a:t>explicó</a:t>
+            </a:r>
+            <a:r>
+              <a:rPr lang="en-US" sz="1200" dirty="0">
+                <a:latin typeface="Arial" panose="020B0604020202020204" pitchFamily="34" charset="0"/>
+                <a:cs typeface="Arial" panose="020B0604020202020204" pitchFamily="34" charset="0"/>
+              </a:rPr>
+              <a:t> </a:t>
+            </a:r>
+            <a:r>
+              <a:rPr lang="en-US" sz="1200" dirty="0" err="1">
+                <a:latin typeface="Arial" panose="020B0604020202020204" pitchFamily="34" charset="0"/>
+                <a:cs typeface="Arial" panose="020B0604020202020204" pitchFamily="34" charset="0"/>
+              </a:rPr>
+              <a:t>en</a:t>
+            </a:r>
+            <a:r>
+              <a:rPr lang="en-US" sz="1200" dirty="0">
+                <a:latin typeface="Arial" panose="020B0604020202020204" pitchFamily="34" charset="0"/>
+                <a:cs typeface="Arial" panose="020B0604020202020204" pitchFamily="34" charset="0"/>
+              </a:rPr>
+              <a:t> </a:t>
+            </a:r>
+            <a:r>
+              <a:rPr lang="en-US" sz="1200" dirty="0" err="1">
+                <a:latin typeface="Arial" panose="020B0604020202020204" pitchFamily="34" charset="0"/>
+                <a:cs typeface="Arial" panose="020B0604020202020204" pitchFamily="34" charset="0"/>
+              </a:rPr>
+              <a:t>el</a:t>
+            </a:r>
+            <a:r>
+              <a:rPr lang="en-US" sz="1200" dirty="0">
+                <a:latin typeface="Arial" panose="020B0604020202020204" pitchFamily="34" charset="0"/>
+                <a:cs typeface="Arial" panose="020B0604020202020204" pitchFamily="34" charset="0"/>
+              </a:rPr>
+              <a:t> </a:t>
+            </a:r>
+            <a:r>
+              <a:rPr lang="en-US" sz="1200" dirty="0" err="1">
+                <a:latin typeface="Arial" panose="020B0604020202020204" pitchFamily="34" charset="0"/>
+                <a:cs typeface="Arial" panose="020B0604020202020204" pitchFamily="34" charset="0"/>
+              </a:rPr>
+              <a:t>ejercicio</a:t>
+            </a:r>
+            <a:r>
+              <a:rPr lang="en-US" sz="1200" dirty="0">
+                <a:latin typeface="Arial" panose="020B0604020202020204" pitchFamily="34" charset="0"/>
+                <a:cs typeface="Arial" panose="020B0604020202020204" pitchFamily="34" charset="0"/>
+              </a:rPr>
+              <a:t> 2, para </a:t>
+            </a:r>
+            <a:r>
+              <a:rPr lang="en-US" sz="1200" dirty="0" err="1">
+                <a:latin typeface="Arial" panose="020B0604020202020204" pitchFamily="34" charset="0"/>
+                <a:cs typeface="Arial" panose="020B0604020202020204" pitchFamily="34" charset="0"/>
+              </a:rPr>
+              <a:t>que</a:t>
+            </a:r>
+            <a:r>
+              <a:rPr lang="en-US" sz="1200" dirty="0">
+                <a:latin typeface="Arial" panose="020B0604020202020204" pitchFamily="34" charset="0"/>
+                <a:cs typeface="Arial" panose="020B0604020202020204" pitchFamily="34" charset="0"/>
+              </a:rPr>
+              <a:t> se </a:t>
+            </a:r>
+            <a:r>
+              <a:rPr lang="en-US" sz="1200" dirty="0" err="1">
+                <a:latin typeface="Arial" panose="020B0604020202020204" pitchFamily="34" charset="0"/>
+                <a:cs typeface="Arial" panose="020B0604020202020204" pitchFamily="34" charset="0"/>
+              </a:rPr>
+              <a:t>considere</a:t>
+            </a:r>
+            <a:r>
+              <a:rPr lang="en-US" sz="1200" dirty="0">
+                <a:latin typeface="Arial" panose="020B0604020202020204" pitchFamily="34" charset="0"/>
+                <a:cs typeface="Arial" panose="020B0604020202020204" pitchFamily="34" charset="0"/>
+              </a:rPr>
+              <a:t> </a:t>
+            </a:r>
+            <a:r>
+              <a:rPr lang="en-US" sz="1200" dirty="0" err="1">
+                <a:latin typeface="Arial" panose="020B0604020202020204" pitchFamily="34" charset="0"/>
+                <a:cs typeface="Arial" panose="020B0604020202020204" pitchFamily="34" charset="0"/>
+              </a:rPr>
+              <a:t>que</a:t>
+            </a:r>
+            <a:r>
+              <a:rPr lang="en-US" sz="1200" dirty="0">
+                <a:latin typeface="Arial" panose="020B0604020202020204" pitchFamily="34" charset="0"/>
+                <a:cs typeface="Arial" panose="020B0604020202020204" pitchFamily="34" charset="0"/>
+              </a:rPr>
+              <a:t> un modo </a:t>
+            </a:r>
+            <a:r>
+              <a:rPr lang="en-US" sz="1200" dirty="0" err="1">
+                <a:latin typeface="Arial" panose="020B0604020202020204" pitchFamily="34" charset="0"/>
+                <a:cs typeface="Arial" panose="020B0604020202020204" pitchFamily="34" charset="0"/>
+              </a:rPr>
+              <a:t>está</a:t>
+            </a:r>
+            <a:r>
+              <a:rPr lang="en-US" sz="1200" dirty="0">
+                <a:latin typeface="Arial" panose="020B0604020202020204" pitchFamily="34" charset="0"/>
+                <a:cs typeface="Arial" panose="020B0604020202020204" pitchFamily="34" charset="0"/>
+              </a:rPr>
+              <a:t> </a:t>
+            </a:r>
+            <a:r>
+              <a:rPr lang="en-US" sz="1200" dirty="0" err="1">
+                <a:latin typeface="Arial" panose="020B0604020202020204" pitchFamily="34" charset="0"/>
+                <a:cs typeface="Arial" panose="020B0604020202020204" pitchFamily="34" charset="0"/>
+              </a:rPr>
+              <a:t>guiado</a:t>
+            </a:r>
+            <a:r>
+              <a:rPr lang="en-US" sz="1200" dirty="0">
+                <a:latin typeface="Arial" panose="020B0604020202020204" pitchFamily="34" charset="0"/>
+                <a:cs typeface="Arial" panose="020B0604020202020204" pitchFamily="34" charset="0"/>
+              </a:rPr>
+              <a:t>, </a:t>
+            </a:r>
+            <a:r>
+              <a:rPr lang="en-US" sz="1200" dirty="0" err="1">
+                <a:latin typeface="Arial" panose="020B0604020202020204" pitchFamily="34" charset="0"/>
+                <a:cs typeface="Arial" panose="020B0604020202020204" pitchFamily="34" charset="0"/>
+              </a:rPr>
+              <a:t>su</a:t>
+            </a:r>
+            <a:r>
+              <a:rPr lang="en-US" sz="1200" dirty="0">
+                <a:latin typeface="Arial" panose="020B0604020202020204" pitchFamily="34" charset="0"/>
+                <a:cs typeface="Arial" panose="020B0604020202020204" pitchFamily="34" charset="0"/>
+              </a:rPr>
+              <a:t> </a:t>
+            </a:r>
+            <a:r>
+              <a:rPr lang="en-US" sz="1200" dirty="0" err="1">
+                <a:latin typeface="Arial" panose="020B0604020202020204" pitchFamily="34" charset="0"/>
+                <a:cs typeface="Arial" panose="020B0604020202020204" pitchFamily="34" charset="0"/>
+              </a:rPr>
+              <a:t>índice</a:t>
+            </a:r>
+            <a:r>
+              <a:rPr lang="en-US" sz="1200" dirty="0">
+                <a:latin typeface="Arial" panose="020B0604020202020204" pitchFamily="34" charset="0"/>
+                <a:cs typeface="Arial" panose="020B0604020202020204" pitchFamily="34" charset="0"/>
+              </a:rPr>
+              <a:t> </a:t>
+            </a:r>
+            <a:r>
+              <a:rPr lang="en-US" sz="1200" dirty="0" err="1">
+                <a:latin typeface="Arial" panose="020B0604020202020204" pitchFamily="34" charset="0"/>
+                <a:cs typeface="Arial" panose="020B0604020202020204" pitchFamily="34" charset="0"/>
+              </a:rPr>
+              <a:t>efectivo</a:t>
+            </a:r>
+            <a:r>
+              <a:rPr lang="en-US" sz="1200" dirty="0">
+                <a:latin typeface="Arial" panose="020B0604020202020204" pitchFamily="34" charset="0"/>
+                <a:cs typeface="Arial" panose="020B0604020202020204" pitchFamily="34" charset="0"/>
+              </a:rPr>
+              <a:t> </a:t>
+            </a:r>
+            <a:r>
+              <a:rPr lang="en-US" sz="1200" dirty="0" err="1">
+                <a:latin typeface="Arial" panose="020B0604020202020204" pitchFamily="34" charset="0"/>
+                <a:cs typeface="Arial" panose="020B0604020202020204" pitchFamily="34" charset="0"/>
+              </a:rPr>
+              <a:t>tiene</a:t>
+            </a:r>
+            <a:r>
+              <a:rPr lang="en-US" sz="1200" dirty="0">
+                <a:latin typeface="Arial" panose="020B0604020202020204" pitchFamily="34" charset="0"/>
+                <a:cs typeface="Arial" panose="020B0604020202020204" pitchFamily="34" charset="0"/>
+              </a:rPr>
+              <a:t> </a:t>
+            </a:r>
+            <a:r>
+              <a:rPr lang="en-US" sz="1200" dirty="0" err="1">
+                <a:latin typeface="Arial" panose="020B0604020202020204" pitchFamily="34" charset="0"/>
+                <a:cs typeface="Arial" panose="020B0604020202020204" pitchFamily="34" charset="0"/>
+              </a:rPr>
+              <a:t>que</a:t>
+            </a:r>
+            <a:r>
+              <a:rPr lang="en-US" sz="1200" dirty="0">
+                <a:latin typeface="Arial" panose="020B0604020202020204" pitchFamily="34" charset="0"/>
+                <a:cs typeface="Arial" panose="020B0604020202020204" pitchFamily="34" charset="0"/>
+              </a:rPr>
+              <a:t> ser </a:t>
+            </a:r>
+            <a:r>
+              <a:rPr lang="en-US" sz="1200" dirty="0" err="1">
+                <a:latin typeface="Arial" panose="020B0604020202020204" pitchFamily="34" charset="0"/>
+                <a:cs typeface="Arial" panose="020B0604020202020204" pitchFamily="34" charset="0"/>
+              </a:rPr>
+              <a:t>menor</a:t>
+            </a:r>
+            <a:r>
+              <a:rPr lang="en-US" sz="1200" dirty="0">
+                <a:latin typeface="Arial" panose="020B0604020202020204" pitchFamily="34" charset="0"/>
+                <a:cs typeface="Arial" panose="020B0604020202020204" pitchFamily="34" charset="0"/>
+              </a:rPr>
+              <a:t> </a:t>
+            </a:r>
+            <a:r>
+              <a:rPr lang="en-US" sz="1200" dirty="0" err="1">
+                <a:latin typeface="Arial" panose="020B0604020202020204" pitchFamily="34" charset="0"/>
+                <a:cs typeface="Arial" panose="020B0604020202020204" pitchFamily="34" charset="0"/>
+              </a:rPr>
+              <a:t>que</a:t>
+            </a:r>
+            <a:r>
+              <a:rPr lang="en-US" sz="1200" dirty="0">
+                <a:latin typeface="Arial" panose="020B0604020202020204" pitchFamily="34" charset="0"/>
+                <a:cs typeface="Arial" panose="020B0604020202020204" pitchFamily="34" charset="0"/>
+              </a:rPr>
+              <a:t> </a:t>
+            </a:r>
+            <a:r>
+              <a:rPr lang="en-US" sz="1200" dirty="0" err="1">
+                <a:latin typeface="Arial" panose="020B0604020202020204" pitchFamily="34" charset="0"/>
+                <a:cs typeface="Arial" panose="020B0604020202020204" pitchFamily="34" charset="0"/>
+              </a:rPr>
+              <a:t>el</a:t>
+            </a:r>
+            <a:r>
+              <a:rPr lang="en-US" sz="1200" dirty="0">
+                <a:latin typeface="Arial" panose="020B0604020202020204" pitchFamily="34" charset="0"/>
+                <a:cs typeface="Arial" panose="020B0604020202020204" pitchFamily="34" charset="0"/>
+              </a:rPr>
+              <a:t> del </a:t>
+            </a:r>
+            <a:r>
+              <a:rPr lang="en-US" sz="1200" dirty="0" err="1">
+                <a:latin typeface="Arial" panose="020B0604020202020204" pitchFamily="34" charset="0"/>
+                <a:cs typeface="Arial" panose="020B0604020202020204" pitchFamily="34" charset="0"/>
+              </a:rPr>
+              <a:t>núcleo</a:t>
+            </a:r>
+            <a:r>
+              <a:rPr lang="en-US" sz="1200" dirty="0">
+                <a:latin typeface="Arial" panose="020B0604020202020204" pitchFamily="34" charset="0"/>
+                <a:cs typeface="Arial" panose="020B0604020202020204" pitchFamily="34" charset="0"/>
+              </a:rPr>
+              <a:t> y mayor </a:t>
+            </a:r>
+            <a:r>
+              <a:rPr lang="en-US" sz="1200" dirty="0" err="1">
+                <a:latin typeface="Arial" panose="020B0604020202020204" pitchFamily="34" charset="0"/>
+                <a:cs typeface="Arial" panose="020B0604020202020204" pitchFamily="34" charset="0"/>
+              </a:rPr>
+              <a:t>que</a:t>
+            </a:r>
+            <a:r>
+              <a:rPr lang="en-US" sz="1200" dirty="0">
+                <a:latin typeface="Arial" panose="020B0604020202020204" pitchFamily="34" charset="0"/>
+                <a:cs typeface="Arial" panose="020B0604020202020204" pitchFamily="34" charset="0"/>
+              </a:rPr>
+              <a:t> </a:t>
+            </a:r>
+            <a:r>
+              <a:rPr lang="en-US" sz="1200" dirty="0" err="1">
+                <a:latin typeface="Arial" panose="020B0604020202020204" pitchFamily="34" charset="0"/>
+                <a:cs typeface="Arial" panose="020B0604020202020204" pitchFamily="34" charset="0"/>
+              </a:rPr>
+              <a:t>el</a:t>
+            </a:r>
+            <a:r>
+              <a:rPr lang="en-US" sz="1200" dirty="0">
+                <a:latin typeface="Arial" panose="020B0604020202020204" pitchFamily="34" charset="0"/>
+                <a:cs typeface="Arial" panose="020B0604020202020204" pitchFamily="34" charset="0"/>
+              </a:rPr>
+              <a:t> de la </a:t>
+            </a:r>
+            <a:r>
+              <a:rPr lang="en-US" sz="1200" dirty="0" err="1">
+                <a:latin typeface="Arial" panose="020B0604020202020204" pitchFamily="34" charset="0"/>
+                <a:cs typeface="Arial" panose="020B0604020202020204" pitchFamily="34" charset="0"/>
+              </a:rPr>
+              <a:t>cubierta</a:t>
+            </a:r>
+            <a:r>
+              <a:rPr lang="en-US" sz="1200" dirty="0">
+                <a:latin typeface="Arial" panose="020B0604020202020204" pitchFamily="34" charset="0"/>
+                <a:cs typeface="Arial" panose="020B0604020202020204" pitchFamily="34" charset="0"/>
+              </a:rPr>
+              <a:t>. </a:t>
+            </a:r>
+          </a:p>
+          <a:p>
+            <a:pPr algn="just"/>
+            <a:endParaRPr lang="en-US" sz="1200" dirty="0">
+              <a:latin typeface="Arial" panose="020B0604020202020204" pitchFamily="34" charset="0"/>
+              <a:cs typeface="Arial" panose="020B0604020202020204" pitchFamily="34" charset="0"/>
+            </a:endParaRPr>
+          </a:p>
+          <a:p>
+            <a:pPr algn="just"/>
+            <a:r>
+              <a:rPr lang="en-US" sz="1200" dirty="0">
+                <a:latin typeface="Arial" panose="020B0604020202020204" pitchFamily="34" charset="0"/>
+                <a:cs typeface="Arial" panose="020B0604020202020204" pitchFamily="34" charset="0"/>
+              </a:rPr>
+              <a:t>Por </a:t>
+            </a:r>
+            <a:r>
+              <a:rPr lang="en-US" sz="1200" dirty="0" err="1">
+                <a:latin typeface="Arial" panose="020B0604020202020204" pitchFamily="34" charset="0"/>
+                <a:cs typeface="Arial" panose="020B0604020202020204" pitchFamily="34" charset="0"/>
+              </a:rPr>
+              <a:t>otro</a:t>
+            </a:r>
+            <a:r>
+              <a:rPr lang="en-US" sz="1200" dirty="0">
+                <a:latin typeface="Arial" panose="020B0604020202020204" pitchFamily="34" charset="0"/>
+                <a:cs typeface="Arial" panose="020B0604020202020204" pitchFamily="34" charset="0"/>
+              </a:rPr>
+              <a:t> </a:t>
+            </a:r>
+            <a:r>
+              <a:rPr lang="en-US" sz="1200" dirty="0" err="1">
+                <a:latin typeface="Arial" panose="020B0604020202020204" pitchFamily="34" charset="0"/>
+                <a:cs typeface="Arial" panose="020B0604020202020204" pitchFamily="34" charset="0"/>
+              </a:rPr>
+              <a:t>lado</a:t>
+            </a:r>
+            <a:r>
+              <a:rPr lang="en-US" sz="1200" dirty="0">
+                <a:latin typeface="Arial" panose="020B0604020202020204" pitchFamily="34" charset="0"/>
+                <a:cs typeface="Arial" panose="020B0604020202020204" pitchFamily="34" charset="0"/>
+              </a:rPr>
+              <a:t>, para </a:t>
+            </a:r>
+            <a:r>
+              <a:rPr lang="en-US" sz="1200" dirty="0" err="1">
+                <a:latin typeface="Arial" panose="020B0604020202020204" pitchFamily="34" charset="0"/>
+                <a:cs typeface="Arial" panose="020B0604020202020204" pitchFamily="34" charset="0"/>
+              </a:rPr>
+              <a:t>el</a:t>
+            </a:r>
+            <a:r>
+              <a:rPr lang="en-US" sz="1200" dirty="0">
+                <a:latin typeface="Arial" panose="020B0604020202020204" pitchFamily="34" charset="0"/>
+                <a:cs typeface="Arial" panose="020B0604020202020204" pitchFamily="34" charset="0"/>
+              </a:rPr>
+              <a:t> </a:t>
+            </a:r>
+            <a:r>
+              <a:rPr lang="en-US" sz="1200" dirty="0" err="1">
+                <a:latin typeface="Arial" panose="020B0604020202020204" pitchFamily="34" charset="0"/>
+                <a:cs typeface="Arial" panose="020B0604020202020204" pitchFamily="34" charset="0"/>
+              </a:rPr>
+              <a:t>caso</a:t>
+            </a:r>
+            <a:r>
+              <a:rPr lang="en-US" sz="1200" dirty="0">
+                <a:latin typeface="Arial" panose="020B0604020202020204" pitchFamily="34" charset="0"/>
+                <a:cs typeface="Arial" panose="020B0604020202020204" pitchFamily="34" charset="0"/>
+              </a:rPr>
+              <a:t> de la shallow, se </a:t>
+            </a:r>
+            <a:r>
+              <a:rPr lang="en-US" sz="1200" dirty="0" err="1">
+                <a:latin typeface="Arial" panose="020B0604020202020204" pitchFamily="34" charset="0"/>
+                <a:cs typeface="Arial" panose="020B0604020202020204" pitchFamily="34" charset="0"/>
+              </a:rPr>
+              <a:t>puede</a:t>
+            </a:r>
+            <a:r>
+              <a:rPr lang="en-US" sz="1200" dirty="0">
+                <a:latin typeface="Arial" panose="020B0604020202020204" pitchFamily="34" charset="0"/>
+                <a:cs typeface="Arial" panose="020B0604020202020204" pitchFamily="34" charset="0"/>
+              </a:rPr>
+              <a:t> observer </a:t>
+            </a:r>
+            <a:r>
+              <a:rPr lang="en-US" sz="1200" dirty="0" err="1">
+                <a:latin typeface="Arial" panose="020B0604020202020204" pitchFamily="34" charset="0"/>
+                <a:cs typeface="Arial" panose="020B0604020202020204" pitchFamily="34" charset="0"/>
+              </a:rPr>
+              <a:t>como</a:t>
+            </a:r>
+            <a:r>
+              <a:rPr lang="en-US" sz="1200" dirty="0">
+                <a:latin typeface="Arial" panose="020B0604020202020204" pitchFamily="34" charset="0"/>
+                <a:cs typeface="Arial" panose="020B0604020202020204" pitchFamily="34" charset="0"/>
+              </a:rPr>
+              <a:t> se </a:t>
+            </a:r>
+            <a:r>
+              <a:rPr lang="en-US" sz="1200" dirty="0" err="1">
+                <a:latin typeface="Arial" panose="020B0604020202020204" pitchFamily="34" charset="0"/>
+                <a:cs typeface="Arial" panose="020B0604020202020204" pitchFamily="34" charset="0"/>
+              </a:rPr>
+              <a:t>propagan</a:t>
+            </a:r>
+            <a:r>
+              <a:rPr lang="en-US" sz="1200" dirty="0">
+                <a:latin typeface="Arial" panose="020B0604020202020204" pitchFamily="34" charset="0"/>
+                <a:cs typeface="Arial" panose="020B0604020202020204" pitchFamily="34" charset="0"/>
+              </a:rPr>
+              <a:t> </a:t>
+            </a:r>
+            <a:r>
+              <a:rPr lang="en-US" sz="1200" dirty="0" err="1">
+                <a:latin typeface="Arial" panose="020B0604020202020204" pitchFamily="34" charset="0"/>
+                <a:cs typeface="Arial" panose="020B0604020202020204" pitchFamily="34" charset="0"/>
+              </a:rPr>
+              <a:t>los</a:t>
+            </a:r>
+            <a:r>
+              <a:rPr lang="en-US" sz="1200" dirty="0">
+                <a:latin typeface="Arial" panose="020B0604020202020204" pitchFamily="34" charset="0"/>
+                <a:cs typeface="Arial" panose="020B0604020202020204" pitchFamily="34" charset="0"/>
+              </a:rPr>
+              <a:t> 4 </a:t>
+            </a:r>
+            <a:r>
+              <a:rPr lang="en-US" sz="1200" dirty="0" err="1">
+                <a:latin typeface="Arial" panose="020B0604020202020204" pitchFamily="34" charset="0"/>
+                <a:cs typeface="Arial" panose="020B0604020202020204" pitchFamily="34" charset="0"/>
+              </a:rPr>
+              <a:t>modos</a:t>
+            </a:r>
+            <a:r>
+              <a:rPr lang="en-US" sz="1200" dirty="0">
+                <a:latin typeface="Arial" panose="020B0604020202020204" pitchFamily="34" charset="0"/>
+                <a:cs typeface="Arial" panose="020B0604020202020204" pitchFamily="34" charset="0"/>
+              </a:rPr>
+              <a:t>, </a:t>
+            </a:r>
+            <a:r>
+              <a:rPr lang="en-US" sz="1200" dirty="0" err="1">
+                <a:latin typeface="Arial" panose="020B0604020202020204" pitchFamily="34" charset="0"/>
+                <a:cs typeface="Arial" panose="020B0604020202020204" pitchFamily="34" charset="0"/>
+              </a:rPr>
+              <a:t>debido</a:t>
+            </a:r>
+            <a:r>
+              <a:rPr lang="en-US" sz="1200" dirty="0">
+                <a:latin typeface="Arial" panose="020B0604020202020204" pitchFamily="34" charset="0"/>
+                <a:cs typeface="Arial" panose="020B0604020202020204" pitchFamily="34" charset="0"/>
+              </a:rPr>
+              <a:t> a lo </a:t>
+            </a:r>
+            <a:r>
+              <a:rPr lang="en-US" sz="1200" dirty="0" err="1">
+                <a:latin typeface="Arial" panose="020B0604020202020204" pitchFamily="34" charset="0"/>
+                <a:cs typeface="Arial" panose="020B0604020202020204" pitchFamily="34" charset="0"/>
+              </a:rPr>
+              <a:t>mencionado</a:t>
+            </a:r>
+            <a:r>
+              <a:rPr lang="en-US" sz="1200" dirty="0">
+                <a:latin typeface="Arial" panose="020B0604020202020204" pitchFamily="34" charset="0"/>
+                <a:cs typeface="Arial" panose="020B0604020202020204" pitchFamily="34" charset="0"/>
+              </a:rPr>
+              <a:t> </a:t>
+            </a:r>
+            <a:r>
+              <a:rPr lang="en-US" sz="1200" dirty="0" err="1">
+                <a:latin typeface="Arial" panose="020B0604020202020204" pitchFamily="34" charset="0"/>
+                <a:cs typeface="Arial" panose="020B0604020202020204" pitchFamily="34" charset="0"/>
+              </a:rPr>
+              <a:t>anteriormente</a:t>
+            </a:r>
+            <a:r>
+              <a:rPr lang="en-US" sz="1200" dirty="0">
+                <a:latin typeface="Arial" panose="020B0604020202020204" pitchFamily="34" charset="0"/>
+                <a:cs typeface="Arial" panose="020B0604020202020204" pitchFamily="34" charset="0"/>
+              </a:rPr>
+              <a:t>. Si </a:t>
+            </a:r>
+            <a:r>
+              <a:rPr lang="en-US" sz="1200" dirty="0" err="1">
+                <a:latin typeface="Arial" panose="020B0604020202020204" pitchFamily="34" charset="0"/>
+                <a:cs typeface="Arial" panose="020B0604020202020204" pitchFamily="34" charset="0"/>
+              </a:rPr>
+              <a:t>comparamos</a:t>
+            </a:r>
+            <a:r>
+              <a:rPr lang="en-US" sz="1200" dirty="0">
+                <a:latin typeface="Arial" panose="020B0604020202020204" pitchFamily="34" charset="0"/>
+                <a:cs typeface="Arial" panose="020B0604020202020204" pitchFamily="34" charset="0"/>
+              </a:rPr>
+              <a:t> la </a:t>
+            </a:r>
+            <a:r>
+              <a:rPr lang="en-US" sz="1200" dirty="0" err="1">
+                <a:latin typeface="Arial" panose="020B0604020202020204" pitchFamily="34" charset="0"/>
+                <a:cs typeface="Arial" panose="020B0604020202020204" pitchFamily="34" charset="0"/>
+              </a:rPr>
+              <a:t>respuesta</a:t>
+            </a:r>
+            <a:r>
+              <a:rPr lang="en-US" sz="1200" dirty="0">
+                <a:latin typeface="Arial" panose="020B0604020202020204" pitchFamily="34" charset="0"/>
+                <a:cs typeface="Arial" panose="020B0604020202020204" pitchFamily="34" charset="0"/>
+              </a:rPr>
+              <a:t> de ambas </a:t>
+            </a:r>
+            <a:r>
+              <a:rPr lang="en-US" sz="1200" dirty="0" err="1">
+                <a:latin typeface="Arial" panose="020B0604020202020204" pitchFamily="34" charset="0"/>
+                <a:cs typeface="Arial" panose="020B0604020202020204" pitchFamily="34" charset="0"/>
+              </a:rPr>
+              <a:t>guías</a:t>
+            </a:r>
+            <a:r>
+              <a:rPr lang="en-US" sz="1200" dirty="0">
+                <a:latin typeface="Arial" panose="020B0604020202020204" pitchFamily="34" charset="0"/>
+                <a:cs typeface="Arial" panose="020B0604020202020204" pitchFamily="34" charset="0"/>
+              </a:rPr>
+              <a:t>, se </a:t>
+            </a:r>
+            <a:r>
+              <a:rPr lang="en-US" sz="1200" dirty="0" err="1">
+                <a:latin typeface="Arial" panose="020B0604020202020204" pitchFamily="34" charset="0"/>
+                <a:cs typeface="Arial" panose="020B0604020202020204" pitchFamily="34" charset="0"/>
+              </a:rPr>
+              <a:t>puede</a:t>
+            </a:r>
+            <a:r>
+              <a:rPr lang="en-US" sz="1200" dirty="0">
+                <a:latin typeface="Arial" panose="020B0604020202020204" pitchFamily="34" charset="0"/>
+                <a:cs typeface="Arial" panose="020B0604020202020204" pitchFamily="34" charset="0"/>
+              </a:rPr>
+              <a:t> </a:t>
+            </a:r>
+            <a:r>
+              <a:rPr lang="en-US" sz="1200" dirty="0" err="1">
+                <a:latin typeface="Arial" panose="020B0604020202020204" pitchFamily="34" charset="0"/>
+                <a:cs typeface="Arial" panose="020B0604020202020204" pitchFamily="34" charset="0"/>
+              </a:rPr>
+              <a:t>concluir</a:t>
+            </a:r>
+            <a:r>
+              <a:rPr lang="en-US" sz="1200" dirty="0">
+                <a:latin typeface="Arial" panose="020B0604020202020204" pitchFamily="34" charset="0"/>
+                <a:cs typeface="Arial" panose="020B0604020202020204" pitchFamily="34" charset="0"/>
+              </a:rPr>
+              <a:t> </a:t>
+            </a:r>
+            <a:r>
+              <a:rPr lang="en-US" sz="1200" dirty="0" err="1">
+                <a:latin typeface="Arial" panose="020B0604020202020204" pitchFamily="34" charset="0"/>
+                <a:cs typeface="Arial" panose="020B0604020202020204" pitchFamily="34" charset="0"/>
+              </a:rPr>
+              <a:t>que</a:t>
+            </a:r>
+            <a:r>
+              <a:rPr lang="en-US" sz="1200" dirty="0">
+                <a:latin typeface="Arial" panose="020B0604020202020204" pitchFamily="34" charset="0"/>
+                <a:cs typeface="Arial" panose="020B0604020202020204" pitchFamily="34" charset="0"/>
+              </a:rPr>
+              <a:t> la </a:t>
+            </a:r>
+            <a:r>
+              <a:rPr lang="en-US" sz="1200" dirty="0" err="1">
+                <a:latin typeface="Arial" panose="020B0604020202020204" pitchFamily="34" charset="0"/>
+                <a:cs typeface="Arial" panose="020B0604020202020204" pitchFamily="34" charset="0"/>
+              </a:rPr>
+              <a:t>guía</a:t>
+            </a:r>
+            <a:r>
+              <a:rPr lang="en-US" sz="1200" dirty="0">
+                <a:latin typeface="Arial" panose="020B0604020202020204" pitchFamily="34" charset="0"/>
+                <a:cs typeface="Arial" panose="020B0604020202020204" pitchFamily="34" charset="0"/>
+              </a:rPr>
+              <a:t> shallow </a:t>
+            </a:r>
+            <a:r>
+              <a:rPr lang="en-US" sz="1200" dirty="0" err="1">
+                <a:latin typeface="Arial" panose="020B0604020202020204" pitchFamily="34" charset="0"/>
+                <a:cs typeface="Arial" panose="020B0604020202020204" pitchFamily="34" charset="0"/>
+              </a:rPr>
+              <a:t>está</a:t>
+            </a:r>
+            <a:r>
+              <a:rPr lang="en-US" sz="1200" dirty="0">
+                <a:latin typeface="Arial" panose="020B0604020202020204" pitchFamily="34" charset="0"/>
+                <a:cs typeface="Arial" panose="020B0604020202020204" pitchFamily="34" charset="0"/>
+              </a:rPr>
+              <a:t> </a:t>
+            </a:r>
+            <a:r>
+              <a:rPr lang="en-US" sz="1200" dirty="0" err="1">
+                <a:latin typeface="Arial" panose="020B0604020202020204" pitchFamily="34" charset="0"/>
+                <a:cs typeface="Arial" panose="020B0604020202020204" pitchFamily="34" charset="0"/>
+              </a:rPr>
+              <a:t>mejor</a:t>
+            </a:r>
+            <a:r>
+              <a:rPr lang="en-US" sz="1200" dirty="0">
+                <a:latin typeface="Arial" panose="020B0604020202020204" pitchFamily="34" charset="0"/>
+                <a:cs typeface="Arial" panose="020B0604020202020204" pitchFamily="34" charset="0"/>
+              </a:rPr>
+              <a:t> </a:t>
+            </a:r>
+            <a:r>
+              <a:rPr lang="en-US" sz="1200" dirty="0" err="1">
+                <a:latin typeface="Arial" panose="020B0604020202020204" pitchFamily="34" charset="0"/>
+                <a:cs typeface="Arial" panose="020B0604020202020204" pitchFamily="34" charset="0"/>
+              </a:rPr>
+              <a:t>confinada</a:t>
+            </a:r>
+            <a:r>
+              <a:rPr lang="en-US" sz="1200" dirty="0">
+                <a:latin typeface="Arial" panose="020B0604020202020204" pitchFamily="34" charset="0"/>
+                <a:cs typeface="Arial" panose="020B0604020202020204" pitchFamily="34" charset="0"/>
+              </a:rPr>
+              <a:t> </a:t>
+            </a:r>
+            <a:r>
+              <a:rPr lang="en-US" sz="1200" dirty="0" err="1">
+                <a:latin typeface="Arial" panose="020B0604020202020204" pitchFamily="34" charset="0"/>
+                <a:cs typeface="Arial" panose="020B0604020202020204" pitchFamily="34" charset="0"/>
+              </a:rPr>
+              <a:t>que</a:t>
+            </a:r>
+            <a:r>
+              <a:rPr lang="en-US" sz="1200" dirty="0">
+                <a:latin typeface="Arial" panose="020B0604020202020204" pitchFamily="34" charset="0"/>
+                <a:cs typeface="Arial" panose="020B0604020202020204" pitchFamily="34" charset="0"/>
+              </a:rPr>
+              <a:t> la deep, </a:t>
+            </a:r>
+            <a:r>
+              <a:rPr lang="en-US" sz="1200" dirty="0" err="1">
+                <a:latin typeface="Arial" panose="020B0604020202020204" pitchFamily="34" charset="0"/>
+                <a:cs typeface="Arial" panose="020B0604020202020204" pitchFamily="34" charset="0"/>
+              </a:rPr>
+              <a:t>ya</a:t>
+            </a:r>
+            <a:r>
+              <a:rPr lang="en-US" sz="1200" dirty="0">
+                <a:latin typeface="Arial" panose="020B0604020202020204" pitchFamily="34" charset="0"/>
+                <a:cs typeface="Arial" panose="020B0604020202020204" pitchFamily="34" charset="0"/>
+              </a:rPr>
+              <a:t> </a:t>
+            </a:r>
+            <a:r>
+              <a:rPr lang="en-US" sz="1200" dirty="0" err="1">
+                <a:latin typeface="Arial" panose="020B0604020202020204" pitchFamily="34" charset="0"/>
+                <a:cs typeface="Arial" panose="020B0604020202020204" pitchFamily="34" charset="0"/>
+              </a:rPr>
+              <a:t>que</a:t>
+            </a:r>
+            <a:r>
+              <a:rPr lang="en-US" sz="1200" dirty="0">
+                <a:latin typeface="Arial" panose="020B0604020202020204" pitchFamily="34" charset="0"/>
+                <a:cs typeface="Arial" panose="020B0604020202020204" pitchFamily="34" charset="0"/>
+              </a:rPr>
+              <a:t> </a:t>
+            </a:r>
+            <a:r>
+              <a:rPr lang="en-US" sz="1200" dirty="0" err="1">
+                <a:latin typeface="Arial" panose="020B0604020202020204" pitchFamily="34" charset="0"/>
+                <a:cs typeface="Arial" panose="020B0604020202020204" pitchFamily="34" charset="0"/>
+              </a:rPr>
+              <a:t>los</a:t>
+            </a:r>
+            <a:r>
+              <a:rPr lang="en-US" sz="1200" dirty="0">
+                <a:latin typeface="Arial" panose="020B0604020202020204" pitchFamily="34" charset="0"/>
+                <a:cs typeface="Arial" panose="020B0604020202020204" pitchFamily="34" charset="0"/>
+              </a:rPr>
+              <a:t> </a:t>
+            </a:r>
+            <a:r>
+              <a:rPr lang="en-US" sz="1200" dirty="0" err="1">
+                <a:latin typeface="Arial" panose="020B0604020202020204" pitchFamily="34" charset="0"/>
+                <a:cs typeface="Arial" panose="020B0604020202020204" pitchFamily="34" charset="0"/>
+              </a:rPr>
+              <a:t>índices</a:t>
+            </a:r>
+            <a:r>
+              <a:rPr lang="en-US" sz="1200" dirty="0">
+                <a:latin typeface="Arial" panose="020B0604020202020204" pitchFamily="34" charset="0"/>
+                <a:cs typeface="Arial" panose="020B0604020202020204" pitchFamily="34" charset="0"/>
+              </a:rPr>
+              <a:t> </a:t>
+            </a:r>
+            <a:r>
+              <a:rPr lang="en-US" sz="1200" dirty="0" err="1">
+                <a:latin typeface="Arial" panose="020B0604020202020204" pitchFamily="34" charset="0"/>
+                <a:cs typeface="Arial" panose="020B0604020202020204" pitchFamily="34" charset="0"/>
+              </a:rPr>
+              <a:t>efectivos</a:t>
+            </a:r>
+            <a:r>
+              <a:rPr lang="en-US" sz="1200" dirty="0">
+                <a:latin typeface="Arial" panose="020B0604020202020204" pitchFamily="34" charset="0"/>
+                <a:cs typeface="Arial" panose="020B0604020202020204" pitchFamily="34" charset="0"/>
+              </a:rPr>
+              <a:t> se </a:t>
+            </a:r>
+            <a:r>
+              <a:rPr lang="en-US" sz="1200" dirty="0" err="1">
+                <a:latin typeface="Arial" panose="020B0604020202020204" pitchFamily="34" charset="0"/>
+                <a:cs typeface="Arial" panose="020B0604020202020204" pitchFamily="34" charset="0"/>
+              </a:rPr>
+              <a:t>encuentran</a:t>
+            </a:r>
+            <a:r>
+              <a:rPr lang="en-US" sz="1200" dirty="0">
+                <a:latin typeface="Arial" panose="020B0604020202020204" pitchFamily="34" charset="0"/>
+                <a:cs typeface="Arial" panose="020B0604020202020204" pitchFamily="34" charset="0"/>
+              </a:rPr>
+              <a:t> </a:t>
+            </a:r>
+            <a:r>
+              <a:rPr lang="en-US" sz="1200" dirty="0" err="1">
+                <a:latin typeface="Arial" panose="020B0604020202020204" pitchFamily="34" charset="0"/>
+                <a:cs typeface="Arial" panose="020B0604020202020204" pitchFamily="34" charset="0"/>
+              </a:rPr>
+              <a:t>en</a:t>
+            </a:r>
+            <a:r>
+              <a:rPr lang="en-US" sz="1200" dirty="0">
+                <a:latin typeface="Arial" panose="020B0604020202020204" pitchFamily="34" charset="0"/>
+                <a:cs typeface="Arial" panose="020B0604020202020204" pitchFamily="34" charset="0"/>
+              </a:rPr>
+              <a:t> </a:t>
+            </a:r>
+            <a:r>
+              <a:rPr lang="en-US" sz="1200" dirty="0" err="1">
+                <a:latin typeface="Arial" panose="020B0604020202020204" pitchFamily="34" charset="0"/>
+                <a:cs typeface="Arial" panose="020B0604020202020204" pitchFamily="34" charset="0"/>
+              </a:rPr>
+              <a:t>el</a:t>
+            </a:r>
+            <a:r>
+              <a:rPr lang="en-US" sz="1200" dirty="0">
+                <a:latin typeface="Arial" panose="020B0604020202020204" pitchFamily="34" charset="0"/>
+                <a:cs typeface="Arial" panose="020B0604020202020204" pitchFamily="34" charset="0"/>
+              </a:rPr>
+              <a:t> </a:t>
+            </a:r>
+            <a:r>
+              <a:rPr lang="en-US" sz="1200" dirty="0" err="1">
+                <a:latin typeface="Arial" panose="020B0604020202020204" pitchFamily="34" charset="0"/>
+                <a:cs typeface="Arial" panose="020B0604020202020204" pitchFamily="34" charset="0"/>
+              </a:rPr>
+              <a:t>rango</a:t>
+            </a:r>
+            <a:r>
+              <a:rPr lang="en-US" sz="1200" dirty="0">
+                <a:latin typeface="Arial" panose="020B0604020202020204" pitchFamily="34" charset="0"/>
+                <a:cs typeface="Arial" panose="020B0604020202020204" pitchFamily="34" charset="0"/>
+              </a:rPr>
+              <a:t> de 2.5-2.7, lo </a:t>
+            </a:r>
+            <a:r>
+              <a:rPr lang="en-US" sz="1200" dirty="0" err="1">
+                <a:latin typeface="Arial" panose="020B0604020202020204" pitchFamily="34" charset="0"/>
+                <a:cs typeface="Arial" panose="020B0604020202020204" pitchFamily="34" charset="0"/>
+              </a:rPr>
+              <a:t>cual</a:t>
+            </a:r>
+            <a:r>
+              <a:rPr lang="en-US" sz="1200" dirty="0">
+                <a:latin typeface="Arial" panose="020B0604020202020204" pitchFamily="34" charset="0"/>
+                <a:cs typeface="Arial" panose="020B0604020202020204" pitchFamily="34" charset="0"/>
+              </a:rPr>
+              <a:t> es un </a:t>
+            </a:r>
+            <a:r>
+              <a:rPr lang="en-US" sz="1200" dirty="0" err="1">
+                <a:latin typeface="Arial" panose="020B0604020202020204" pitchFamily="34" charset="0"/>
+                <a:cs typeface="Arial" panose="020B0604020202020204" pitchFamily="34" charset="0"/>
+              </a:rPr>
+              <a:t>rango</a:t>
+            </a:r>
+            <a:r>
+              <a:rPr lang="en-US" sz="1200" dirty="0">
+                <a:latin typeface="Arial" panose="020B0604020202020204" pitchFamily="34" charset="0"/>
+                <a:cs typeface="Arial" panose="020B0604020202020204" pitchFamily="34" charset="0"/>
+              </a:rPr>
+              <a:t> </a:t>
+            </a:r>
+            <a:r>
+              <a:rPr lang="en-US" sz="1200" dirty="0" err="1">
+                <a:latin typeface="Arial" panose="020B0604020202020204" pitchFamily="34" charset="0"/>
+                <a:cs typeface="Arial" panose="020B0604020202020204" pitchFamily="34" charset="0"/>
+              </a:rPr>
+              <a:t>muy</a:t>
+            </a:r>
+            <a:r>
+              <a:rPr lang="en-US" sz="1200" dirty="0">
+                <a:latin typeface="Arial" panose="020B0604020202020204" pitchFamily="34" charset="0"/>
+                <a:cs typeface="Arial" panose="020B0604020202020204" pitchFamily="34" charset="0"/>
+              </a:rPr>
+              <a:t> alto (</a:t>
+            </a:r>
+            <a:r>
+              <a:rPr lang="en-US" sz="1200" dirty="0" err="1">
+                <a:latin typeface="Arial" panose="020B0604020202020204" pitchFamily="34" charset="0"/>
+                <a:cs typeface="Arial" panose="020B0604020202020204" pitchFamily="34" charset="0"/>
+              </a:rPr>
+              <a:t>si</a:t>
+            </a:r>
+            <a:r>
+              <a:rPr lang="en-US" sz="1200" dirty="0">
+                <a:latin typeface="Arial" panose="020B0604020202020204" pitchFamily="34" charset="0"/>
+                <a:cs typeface="Arial" panose="020B0604020202020204" pitchFamily="34" charset="0"/>
+              </a:rPr>
+              <a:t> lo </a:t>
+            </a:r>
+            <a:r>
+              <a:rPr lang="en-US" sz="1200" dirty="0" err="1">
+                <a:latin typeface="Arial" panose="020B0604020202020204" pitchFamily="34" charset="0"/>
+                <a:cs typeface="Arial" panose="020B0604020202020204" pitchFamily="34" charset="0"/>
+              </a:rPr>
+              <a:t>comparamos</a:t>
+            </a:r>
+            <a:r>
+              <a:rPr lang="en-US" sz="1200" dirty="0">
+                <a:latin typeface="Arial" panose="020B0604020202020204" pitchFamily="34" charset="0"/>
+                <a:cs typeface="Arial" panose="020B0604020202020204" pitchFamily="34" charset="0"/>
+              </a:rPr>
+              <a:t> con la </a:t>
+            </a:r>
+            <a:r>
+              <a:rPr lang="en-US" sz="1200" dirty="0" err="1">
+                <a:latin typeface="Arial" panose="020B0604020202020204" pitchFamily="34" charset="0"/>
+                <a:cs typeface="Arial" panose="020B0604020202020204" pitchFamily="34" charset="0"/>
+              </a:rPr>
+              <a:t>guía</a:t>
+            </a:r>
+            <a:r>
+              <a:rPr lang="en-US" sz="1200" dirty="0">
+                <a:latin typeface="Arial" panose="020B0604020202020204" pitchFamily="34" charset="0"/>
+                <a:cs typeface="Arial" panose="020B0604020202020204" pitchFamily="34" charset="0"/>
+              </a:rPr>
+              <a:t> deep con </a:t>
+            </a:r>
+            <a:r>
+              <a:rPr lang="en-US" sz="1200" dirty="0" err="1">
+                <a:latin typeface="Arial" panose="020B0604020202020204" pitchFamily="34" charset="0"/>
+                <a:cs typeface="Arial" panose="020B0604020202020204" pitchFamily="34" charset="0"/>
+              </a:rPr>
+              <a:t>núcleo</a:t>
+            </a:r>
+            <a:r>
+              <a:rPr lang="en-US" sz="1200" dirty="0">
+                <a:latin typeface="Arial" panose="020B0604020202020204" pitchFamily="34" charset="0"/>
+                <a:cs typeface="Arial" panose="020B0604020202020204" pitchFamily="34" charset="0"/>
+              </a:rPr>
+              <a:t> de Si, y las </a:t>
+            </a:r>
+            <a:r>
+              <a:rPr lang="en-US" sz="1200" dirty="0" err="1">
+                <a:latin typeface="Arial" panose="020B0604020202020204" pitchFamily="34" charset="0"/>
+                <a:cs typeface="Arial" panose="020B0604020202020204" pitchFamily="34" charset="0"/>
+              </a:rPr>
+              <a:t>guías</a:t>
+            </a:r>
+            <a:r>
+              <a:rPr lang="en-US" sz="1200" dirty="0">
+                <a:latin typeface="Arial" panose="020B0604020202020204" pitchFamily="34" charset="0"/>
+                <a:cs typeface="Arial" panose="020B0604020202020204" pitchFamily="34" charset="0"/>
+              </a:rPr>
+              <a:t> de </a:t>
+            </a:r>
+            <a:r>
+              <a:rPr lang="en-US" sz="1200" dirty="0" err="1">
+                <a:latin typeface="Arial" panose="020B0604020202020204" pitchFamily="34" charset="0"/>
+                <a:cs typeface="Arial" panose="020B0604020202020204" pitchFamily="34" charset="0"/>
+              </a:rPr>
+              <a:t>SiN</a:t>
+            </a:r>
+            <a:r>
+              <a:rPr lang="en-US" sz="1200" dirty="0">
+                <a:latin typeface="Arial" panose="020B0604020202020204" pitchFamily="34" charset="0"/>
+                <a:cs typeface="Arial" panose="020B0604020202020204" pitchFamily="34" charset="0"/>
+              </a:rPr>
+              <a:t> del </a:t>
+            </a:r>
+            <a:r>
+              <a:rPr lang="en-US" sz="1200" dirty="0" err="1">
+                <a:latin typeface="Arial" panose="020B0604020202020204" pitchFamily="34" charset="0"/>
+                <a:cs typeface="Arial" panose="020B0604020202020204" pitchFamily="34" charset="0"/>
+              </a:rPr>
+              <a:t>ejercicio</a:t>
+            </a:r>
+            <a:r>
+              <a:rPr lang="en-US" sz="1200" dirty="0">
+                <a:latin typeface="Arial" panose="020B0604020202020204" pitchFamily="34" charset="0"/>
+                <a:cs typeface="Arial" panose="020B0604020202020204" pitchFamily="34" charset="0"/>
+              </a:rPr>
+              <a:t> 2) y </a:t>
+            </a:r>
+            <a:r>
+              <a:rPr lang="en-US" sz="1200" dirty="0" err="1">
+                <a:latin typeface="Arial" panose="020B0604020202020204" pitchFamily="34" charset="0"/>
+                <a:cs typeface="Arial" panose="020B0604020202020204" pitchFamily="34" charset="0"/>
+              </a:rPr>
+              <a:t>está</a:t>
+            </a:r>
+            <a:r>
+              <a:rPr lang="en-US" sz="1200" dirty="0">
+                <a:latin typeface="Arial" panose="020B0604020202020204" pitchFamily="34" charset="0"/>
+                <a:cs typeface="Arial" panose="020B0604020202020204" pitchFamily="34" charset="0"/>
+              </a:rPr>
+              <a:t> </a:t>
+            </a:r>
+            <a:r>
+              <a:rPr lang="en-US" sz="1200" dirty="0" err="1">
+                <a:latin typeface="Arial" panose="020B0604020202020204" pitchFamily="34" charset="0"/>
+                <a:cs typeface="Arial" panose="020B0604020202020204" pitchFamily="34" charset="0"/>
+              </a:rPr>
+              <a:t>muy</a:t>
+            </a:r>
+            <a:r>
+              <a:rPr lang="en-US" sz="1200" dirty="0">
+                <a:latin typeface="Arial" panose="020B0604020202020204" pitchFamily="34" charset="0"/>
+                <a:cs typeface="Arial" panose="020B0604020202020204" pitchFamily="34" charset="0"/>
+              </a:rPr>
+              <a:t> </a:t>
+            </a:r>
+            <a:r>
+              <a:rPr lang="en-US" sz="1200" dirty="0" err="1">
+                <a:latin typeface="Arial" panose="020B0604020202020204" pitchFamily="34" charset="0"/>
+                <a:cs typeface="Arial" panose="020B0604020202020204" pitchFamily="34" charset="0"/>
+              </a:rPr>
+              <a:t>alejado</a:t>
+            </a:r>
+            <a:r>
+              <a:rPr lang="en-US" sz="1200" dirty="0">
+                <a:latin typeface="Arial" panose="020B0604020202020204" pitchFamily="34" charset="0"/>
+                <a:cs typeface="Arial" panose="020B0604020202020204" pitchFamily="34" charset="0"/>
+              </a:rPr>
+              <a:t> del </a:t>
+            </a:r>
+            <a:r>
+              <a:rPr lang="en-US" sz="1200" dirty="0" err="1">
+                <a:latin typeface="Arial" panose="020B0604020202020204" pitchFamily="34" charset="0"/>
+                <a:cs typeface="Arial" panose="020B0604020202020204" pitchFamily="34" charset="0"/>
+              </a:rPr>
+              <a:t>índice</a:t>
+            </a:r>
+            <a:r>
+              <a:rPr lang="en-US" sz="1200" dirty="0">
+                <a:latin typeface="Arial" panose="020B0604020202020204" pitchFamily="34" charset="0"/>
+                <a:cs typeface="Arial" panose="020B0604020202020204" pitchFamily="34" charset="0"/>
+              </a:rPr>
+              <a:t> de la </a:t>
+            </a:r>
+            <a:r>
+              <a:rPr lang="en-US" sz="1200" dirty="0" err="1">
+                <a:latin typeface="Arial" panose="020B0604020202020204" pitchFamily="34" charset="0"/>
+                <a:cs typeface="Arial" panose="020B0604020202020204" pitchFamily="34" charset="0"/>
+              </a:rPr>
+              <a:t>cubierta</a:t>
+            </a:r>
+            <a:r>
+              <a:rPr lang="en-US" sz="1200" dirty="0">
+                <a:latin typeface="Arial" panose="020B0604020202020204" pitchFamily="34" charset="0"/>
+                <a:cs typeface="Arial" panose="020B0604020202020204" pitchFamily="34" charset="0"/>
+              </a:rPr>
+              <a:t>.</a:t>
+            </a:r>
+          </a:p>
+          <a:p>
+            <a:pPr algn="just"/>
+            <a:endParaRPr lang="en-US" sz="1200" dirty="0">
+              <a:latin typeface="Arial" panose="020B0604020202020204" pitchFamily="34" charset="0"/>
+              <a:cs typeface="Arial" panose="020B0604020202020204" pitchFamily="34" charset="0"/>
+            </a:endParaRPr>
+          </a:p>
+        </p:txBody>
+      </p:sp>
+    </p:spTree>
+    <p:extLst>
+      <p:ext uri="{BB962C8B-B14F-4D97-AF65-F5344CB8AC3E}">
+        <p14:creationId xmlns:p14="http://schemas.microsoft.com/office/powerpoint/2010/main" val="1987762185"/>
+      </p:ext>
+    </p:extLst>
+  </p:cSld>
+  <p:clrMapOvr>
+    <a:masterClrMapping/>
+  </p:clrMapOvr>
+</p:sld>
+</file>
+
+<file path=ppt/slides/slide17.xml><?xml version="1.0" encoding="utf-8"?>
+<p:sld xmlns:a="http://schemas.openxmlformats.org/drawingml/2006/main" xmlns:r="http://schemas.openxmlformats.org/officeDocument/2006/relationships" xmlns:p="http://schemas.openxmlformats.org/presentationml/2006/main">
+  <p:cSld>
+    <p:spTree>
+      <p:nvGrpSpPr>
+        <p:cNvPr id="1" name="">
+          <a:extLst>
+            <a:ext uri="{FF2B5EF4-FFF2-40B4-BE49-F238E27FC236}">
+              <a16:creationId xmlns:a16="http://schemas.microsoft.com/office/drawing/2014/main" id="{52934364-F726-4E70-25B0-3E435D5C1DB9}"/>
+            </a:ext>
+          </a:extLst>
+        </p:cNvPr>
+        <p:cNvGrpSpPr/>
+        <p:nvPr/>
+      </p:nvGrpSpPr>
+      <p:grpSpPr>
+        <a:xfrm>
+          <a:off x="0" y="0"/>
+          <a:ext cx="0" cy="0"/>
+          <a:chOff x="0" y="0"/>
+          <a:chExt cx="0" cy="0"/>
+        </a:xfrm>
+      </p:grpSpPr>
+      <p:sp>
+        <p:nvSpPr>
+          <p:cNvPr id="16" name="object 16">
+            <a:extLst>
+              <a:ext uri="{FF2B5EF4-FFF2-40B4-BE49-F238E27FC236}">
+                <a16:creationId xmlns:a16="http://schemas.microsoft.com/office/drawing/2014/main" id="{B32125F2-72B1-EE46-EDCA-70E9C62023F6}"/>
+              </a:ext>
+            </a:extLst>
+          </p:cNvPr>
+          <p:cNvSpPr txBox="1">
+            <a:spLocks noGrp="1"/>
+          </p:cNvSpPr>
+          <p:nvPr>
+            <p:ph type="title"/>
+          </p:nvPr>
+        </p:nvSpPr>
+        <p:spPr>
+          <a:xfrm>
+            <a:off x="685800" y="408883"/>
+            <a:ext cx="10994410" cy="705321"/>
+          </a:xfrm>
+          <a:prstGeom prst="rect">
+            <a:avLst/>
+          </a:prstGeom>
+        </p:spPr>
+        <p:txBody>
+          <a:bodyPr vert="horz" wrap="square" lIns="0" tIns="12700" rIns="0" bIns="0" rtlCol="0">
+            <a:spAutoFit/>
+          </a:bodyPr>
+          <a:lstStyle/>
+          <a:p>
+            <a:pPr marL="12700">
+              <a:spcBef>
+                <a:spcPts val="100"/>
+              </a:spcBef>
+            </a:pPr>
+            <a:r>
+              <a:rPr lang="en-US" sz="2500" dirty="0"/>
+              <a:t>EXTRA EJERCICIO 2: </a:t>
+            </a:r>
+            <a:br>
+              <a:rPr lang="en-US" sz="2500" dirty="0"/>
+            </a:br>
+            <a:r>
+              <a:rPr lang="en-US" b="0" dirty="0"/>
+              <a:t>Repeat the LO.3. width dependence analysis, now sweeping in a 300nm-1um range.</a:t>
+            </a:r>
+            <a:endParaRPr lang="en-US" sz="2500" b="0" dirty="0">
+              <a:latin typeface="+mj-lt"/>
+              <a:cs typeface="Lucida Sans"/>
+            </a:endParaRPr>
+          </a:p>
+        </p:txBody>
+      </p:sp>
+      <p:pic>
+        <p:nvPicPr>
+          <p:cNvPr id="83" name="Gráfico 82">
+            <a:extLst>
+              <a:ext uri="{FF2B5EF4-FFF2-40B4-BE49-F238E27FC236}">
+                <a16:creationId xmlns:a16="http://schemas.microsoft.com/office/drawing/2014/main" id="{A97B9840-8CE3-6CFE-01BD-3EC4C6D41466}"/>
+              </a:ext>
+            </a:extLst>
+          </p:cNvPr>
+          <p:cNvPicPr>
+            <a:picLocks noChangeAspect="1"/>
+          </p:cNvPicPr>
+          <p:nvPr/>
+        </p:nvPicPr>
+        <p:blipFill>
+          <a:blip r:embed="rId3">
+            <a:extLst>
+              <a:ext uri="{96DAC541-7B7A-43D3-8B79-37D633B846F1}">
+                <asvg:svgBlip xmlns:asvg="http://schemas.microsoft.com/office/drawing/2016/SVG/main" r:embed="rId4"/>
+              </a:ext>
+            </a:extLst>
+          </a:blip>
+          <a:stretch>
+            <a:fillRect/>
+          </a:stretch>
+        </p:blipFill>
+        <p:spPr>
+          <a:xfrm>
+            <a:off x="5045006" y="6356057"/>
+            <a:ext cx="6409575" cy="363174"/>
+          </a:xfrm>
+          <a:prstGeom prst="rect">
+            <a:avLst/>
+          </a:prstGeom>
+        </p:spPr>
+      </p:pic>
+      <p:sp>
+        <p:nvSpPr>
+          <p:cNvPr id="84" name="Marcador de número de diapositiva 83">
+            <a:extLst>
+              <a:ext uri="{FF2B5EF4-FFF2-40B4-BE49-F238E27FC236}">
+                <a16:creationId xmlns:a16="http://schemas.microsoft.com/office/drawing/2014/main" id="{9D79D43A-1D27-0D6C-E491-E20AB4A63AC0}"/>
+              </a:ext>
+            </a:extLst>
+          </p:cNvPr>
+          <p:cNvSpPr>
+            <a:spLocks noGrp="1"/>
+          </p:cNvSpPr>
+          <p:nvPr>
+            <p:ph type="sldNum" sz="quarter" idx="7"/>
+          </p:nvPr>
+        </p:nvSpPr>
+        <p:spPr/>
+        <p:txBody>
+          <a:bodyPr/>
+          <a:lstStyle/>
+          <a:p>
+            <a:fld id="{B6F15528-21DE-4FAA-801E-634DDDAF4B2B}" type="slidenum">
+              <a:rPr lang="es-ES" smtClean="0"/>
+              <a:t>17</a:t>
+            </a:fld>
+            <a:endParaRPr lang="es-ES"/>
+          </a:p>
+        </p:txBody>
+      </p:sp>
+      <p:sp>
+        <p:nvSpPr>
+          <p:cNvPr id="3" name="Marcador de pie de página 2">
+            <a:extLst>
+              <a:ext uri="{FF2B5EF4-FFF2-40B4-BE49-F238E27FC236}">
+                <a16:creationId xmlns:a16="http://schemas.microsoft.com/office/drawing/2014/main" id="{B2F8AAA4-CF12-78FA-F205-48BC49E6578D}"/>
+              </a:ext>
+            </a:extLst>
+          </p:cNvPr>
+          <p:cNvSpPr>
+            <a:spLocks noGrp="1"/>
+          </p:cNvSpPr>
+          <p:nvPr>
+            <p:ph type="ftr" sz="quarter" idx="5"/>
+          </p:nvPr>
+        </p:nvSpPr>
+        <p:spPr/>
+        <p:txBody>
+          <a:bodyPr/>
+          <a:lstStyle/>
+          <a:p>
+            <a:pPr marL="12700">
+              <a:spcBef>
+                <a:spcPts val="15"/>
+              </a:spcBef>
+            </a:pPr>
+            <a:r>
+              <a:rPr lang="es-ES" spc="-5"/>
+              <a:t>LAB 1.0 WAVEGUIDES</a:t>
+            </a:r>
+            <a:endParaRPr lang="es-ES" spc="-5" dirty="0"/>
+          </a:p>
+        </p:txBody>
+      </p:sp>
+      <p:sp>
+        <p:nvSpPr>
+          <p:cNvPr id="2" name="Rectángulo 1">
+            <a:extLst>
+              <a:ext uri="{FF2B5EF4-FFF2-40B4-BE49-F238E27FC236}">
+                <a16:creationId xmlns:a16="http://schemas.microsoft.com/office/drawing/2014/main" id="{476910BF-B5E0-B625-B154-D2486D40F9AA}"/>
+              </a:ext>
+            </a:extLst>
+          </p:cNvPr>
+          <p:cNvSpPr/>
+          <p:nvPr/>
+        </p:nvSpPr>
+        <p:spPr>
+          <a:xfrm>
+            <a:off x="1752600" y="1418372"/>
+            <a:ext cx="8991600" cy="4525227"/>
+          </a:xfrm>
+          <a:prstGeom prst="rect">
+            <a:avLst/>
+          </a:prstGeom>
+          <a:noFill/>
+          <a:ln w="28575">
+            <a:solidFill>
+              <a:srgbClr val="E0700D"/>
+            </a:solidFill>
+          </a:ln>
+        </p:spPr>
+        <p:style>
+          <a:lnRef idx="2">
+            <a:schemeClr val="accent1">
+              <a:shade val="15000"/>
+            </a:schemeClr>
+          </a:lnRef>
+          <a:fillRef idx="1">
+            <a:schemeClr val="accent1"/>
+          </a:fillRef>
+          <a:effectRef idx="0">
+            <a:schemeClr val="accent1"/>
+          </a:effectRef>
+          <a:fontRef idx="minor">
+            <a:schemeClr val="lt1"/>
+          </a:fontRef>
+        </p:style>
+        <p:txBody>
+          <a:bodyPr rtlCol="0" anchor="ctr"/>
+          <a:lstStyle/>
+          <a:p>
+            <a:pPr algn="ctr"/>
+            <a:endParaRPr lang="en-US"/>
+          </a:p>
+        </p:txBody>
+      </p:sp>
+      <p:pic>
+        <p:nvPicPr>
+          <p:cNvPr id="5" name="Imagen 4">
+            <a:extLst>
+              <a:ext uri="{FF2B5EF4-FFF2-40B4-BE49-F238E27FC236}">
+                <a16:creationId xmlns:a16="http://schemas.microsoft.com/office/drawing/2014/main" id="{A294A1E6-3AE9-85A7-170D-05FDE54EDE5C}"/>
+              </a:ext>
+            </a:extLst>
+          </p:cNvPr>
+          <p:cNvPicPr>
+            <a:picLocks noChangeAspect="1"/>
+          </p:cNvPicPr>
+          <p:nvPr/>
+        </p:nvPicPr>
+        <p:blipFill>
+          <a:blip r:embed="rId5"/>
+          <a:stretch>
+            <a:fillRect/>
+          </a:stretch>
+        </p:blipFill>
+        <p:spPr>
+          <a:xfrm>
+            <a:off x="2590800" y="1492414"/>
+            <a:ext cx="7703820" cy="4298786"/>
+          </a:xfrm>
+          <a:prstGeom prst="rect">
+            <a:avLst/>
+          </a:prstGeom>
+        </p:spPr>
+      </p:pic>
+    </p:spTree>
+    <p:extLst>
+      <p:ext uri="{BB962C8B-B14F-4D97-AF65-F5344CB8AC3E}">
+        <p14:creationId xmlns:p14="http://schemas.microsoft.com/office/powerpoint/2010/main" val="1048823884"/>
+      </p:ext>
+    </p:extLst>
+  </p:cSld>
+  <p:clrMapOvr>
+    <a:masterClrMapping/>
+  </p:clrMapOvr>
+</p:sld>
+</file>
+
+<file path=ppt/slides/slide18.xml><?xml version="1.0" encoding="utf-8"?>
+<p:sld xmlns:a="http://schemas.openxmlformats.org/drawingml/2006/main" xmlns:r="http://schemas.openxmlformats.org/officeDocument/2006/relationships" xmlns:p="http://schemas.openxmlformats.org/presentationml/2006/main">
+  <p:cSld>
+    <p:spTree>
+      <p:nvGrpSpPr>
+        <p:cNvPr id="1" name="">
+          <a:extLst>
+            <a:ext uri="{FF2B5EF4-FFF2-40B4-BE49-F238E27FC236}">
+              <a16:creationId xmlns:a16="http://schemas.microsoft.com/office/drawing/2014/main" id="{1FD70A34-D4A6-783C-E5C9-550B71E5B3B4}"/>
+            </a:ext>
+          </a:extLst>
+        </p:cNvPr>
+        <p:cNvGrpSpPr/>
+        <p:nvPr/>
+      </p:nvGrpSpPr>
+      <p:grpSpPr>
+        <a:xfrm>
+          <a:off x="0" y="0"/>
+          <a:ext cx="0" cy="0"/>
+          <a:chOff x="0" y="0"/>
+          <a:chExt cx="0" cy="0"/>
+        </a:xfrm>
+      </p:grpSpPr>
+      <p:sp>
+        <p:nvSpPr>
+          <p:cNvPr id="16" name="object 16">
+            <a:extLst>
+              <a:ext uri="{FF2B5EF4-FFF2-40B4-BE49-F238E27FC236}">
+                <a16:creationId xmlns:a16="http://schemas.microsoft.com/office/drawing/2014/main" id="{667E14D4-BD77-7AEC-DAA7-97A0211426E2}"/>
+              </a:ext>
+            </a:extLst>
+          </p:cNvPr>
+          <p:cNvSpPr txBox="1">
+            <a:spLocks noGrp="1"/>
+          </p:cNvSpPr>
+          <p:nvPr>
+            <p:ph type="title"/>
+          </p:nvPr>
+        </p:nvSpPr>
+        <p:spPr>
+          <a:xfrm>
+            <a:off x="685800" y="408883"/>
+            <a:ext cx="10994410" cy="705321"/>
+          </a:xfrm>
+          <a:prstGeom prst="rect">
+            <a:avLst/>
+          </a:prstGeom>
+        </p:spPr>
+        <p:txBody>
+          <a:bodyPr vert="horz" wrap="square" lIns="0" tIns="12700" rIns="0" bIns="0" rtlCol="0">
+            <a:spAutoFit/>
+          </a:bodyPr>
+          <a:lstStyle/>
+          <a:p>
+            <a:pPr marL="12700">
+              <a:spcBef>
+                <a:spcPts val="100"/>
+              </a:spcBef>
+            </a:pPr>
+            <a:r>
+              <a:rPr lang="en-US" sz="2500" dirty="0"/>
+              <a:t>EXTRA EJERCICIO 2: </a:t>
+            </a:r>
+            <a:br>
+              <a:rPr lang="en-US" sz="2500" dirty="0"/>
+            </a:br>
+            <a:r>
+              <a:rPr lang="en-US" b="0" dirty="0"/>
+              <a:t>Repeat the LO.3. width dependence analysis, now sweeping in a 300 nm-1 um range.</a:t>
+            </a:r>
+            <a:endParaRPr lang="en-US" sz="2500" b="0" dirty="0">
+              <a:latin typeface="+mj-lt"/>
+              <a:cs typeface="Lucida Sans"/>
+            </a:endParaRPr>
+          </a:p>
+        </p:txBody>
+      </p:sp>
+      <p:pic>
+        <p:nvPicPr>
+          <p:cNvPr id="83" name="Gráfico 82">
+            <a:extLst>
+              <a:ext uri="{FF2B5EF4-FFF2-40B4-BE49-F238E27FC236}">
+                <a16:creationId xmlns:a16="http://schemas.microsoft.com/office/drawing/2014/main" id="{54AF4C12-805D-5103-5356-9242ED9DC9ED}"/>
+              </a:ext>
+            </a:extLst>
+          </p:cNvPr>
+          <p:cNvPicPr>
+            <a:picLocks noChangeAspect="1"/>
+          </p:cNvPicPr>
+          <p:nvPr/>
+        </p:nvPicPr>
+        <p:blipFill>
+          <a:blip r:embed="rId3">
+            <a:extLst>
+              <a:ext uri="{96DAC541-7B7A-43D3-8B79-37D633B846F1}">
+                <asvg:svgBlip xmlns:asvg="http://schemas.microsoft.com/office/drawing/2016/SVG/main" r:embed="rId4"/>
+              </a:ext>
+            </a:extLst>
+          </a:blip>
+          <a:stretch>
+            <a:fillRect/>
+          </a:stretch>
+        </p:blipFill>
+        <p:spPr>
+          <a:xfrm>
+            <a:off x="5045006" y="6356057"/>
+            <a:ext cx="6409575" cy="363174"/>
+          </a:xfrm>
+          <a:prstGeom prst="rect">
+            <a:avLst/>
+          </a:prstGeom>
+        </p:spPr>
+      </p:pic>
+      <p:sp>
+        <p:nvSpPr>
+          <p:cNvPr id="84" name="Marcador de número de diapositiva 83">
+            <a:extLst>
+              <a:ext uri="{FF2B5EF4-FFF2-40B4-BE49-F238E27FC236}">
+                <a16:creationId xmlns:a16="http://schemas.microsoft.com/office/drawing/2014/main" id="{A63A4406-85BA-CB34-7018-AA06F0F3BC73}"/>
+              </a:ext>
+            </a:extLst>
+          </p:cNvPr>
+          <p:cNvSpPr>
+            <a:spLocks noGrp="1"/>
+          </p:cNvSpPr>
+          <p:nvPr>
+            <p:ph type="sldNum" sz="quarter" idx="7"/>
+          </p:nvPr>
+        </p:nvSpPr>
+        <p:spPr/>
+        <p:txBody>
+          <a:bodyPr/>
+          <a:lstStyle/>
+          <a:p>
+            <a:fld id="{B6F15528-21DE-4FAA-801E-634DDDAF4B2B}" type="slidenum">
+              <a:rPr lang="es-ES" smtClean="0"/>
+              <a:t>18</a:t>
+            </a:fld>
+            <a:endParaRPr lang="es-ES"/>
+          </a:p>
+        </p:txBody>
+      </p:sp>
+      <p:sp>
+        <p:nvSpPr>
+          <p:cNvPr id="3" name="Marcador de pie de página 2">
+            <a:extLst>
+              <a:ext uri="{FF2B5EF4-FFF2-40B4-BE49-F238E27FC236}">
+                <a16:creationId xmlns:a16="http://schemas.microsoft.com/office/drawing/2014/main" id="{9064D7DB-E23A-0105-0120-F19F2883C55A}"/>
+              </a:ext>
+            </a:extLst>
+          </p:cNvPr>
+          <p:cNvSpPr>
+            <a:spLocks noGrp="1"/>
+          </p:cNvSpPr>
+          <p:nvPr>
+            <p:ph type="ftr" sz="quarter" idx="5"/>
+          </p:nvPr>
+        </p:nvSpPr>
+        <p:spPr/>
+        <p:txBody>
+          <a:bodyPr/>
+          <a:lstStyle/>
+          <a:p>
+            <a:pPr marL="12700">
+              <a:spcBef>
+                <a:spcPts val="15"/>
+              </a:spcBef>
+            </a:pPr>
+            <a:r>
+              <a:rPr lang="es-ES" spc="-5"/>
+              <a:t>LAB 1.0 WAVEGUIDES</a:t>
+            </a:r>
+            <a:endParaRPr lang="es-ES" spc="-5" dirty="0"/>
+          </a:p>
+        </p:txBody>
+      </p:sp>
+      <p:sp>
+        <p:nvSpPr>
+          <p:cNvPr id="2" name="Rectángulo 1">
+            <a:extLst>
+              <a:ext uri="{FF2B5EF4-FFF2-40B4-BE49-F238E27FC236}">
+                <a16:creationId xmlns:a16="http://schemas.microsoft.com/office/drawing/2014/main" id="{410E4050-E671-8580-AE0E-B5B14B43A399}"/>
+              </a:ext>
+            </a:extLst>
+          </p:cNvPr>
+          <p:cNvSpPr/>
+          <p:nvPr/>
+        </p:nvSpPr>
+        <p:spPr>
+          <a:xfrm>
+            <a:off x="685800" y="1831642"/>
+            <a:ext cx="10591800" cy="3253214"/>
+          </a:xfrm>
+          <a:prstGeom prst="rect">
+            <a:avLst/>
+          </a:prstGeom>
+          <a:noFill/>
+          <a:ln w="28575">
+            <a:solidFill>
+              <a:srgbClr val="E0700D"/>
+            </a:solidFill>
+          </a:ln>
+        </p:spPr>
+        <p:style>
+          <a:lnRef idx="2">
+            <a:schemeClr val="accent1">
+              <a:shade val="15000"/>
+            </a:schemeClr>
+          </a:lnRef>
+          <a:fillRef idx="1">
+            <a:schemeClr val="accent1"/>
+          </a:fillRef>
+          <a:effectRef idx="0">
+            <a:schemeClr val="accent1"/>
+          </a:effectRef>
+          <a:fontRef idx="minor">
+            <a:schemeClr val="lt1"/>
+          </a:fontRef>
+        </p:style>
+        <p:txBody>
+          <a:bodyPr rtlCol="0" anchor="ctr"/>
+          <a:lstStyle/>
+          <a:p>
+            <a:pPr algn="ctr"/>
+            <a:endParaRPr lang="en-US"/>
+          </a:p>
+        </p:txBody>
+      </p:sp>
+      <p:sp>
+        <p:nvSpPr>
+          <p:cNvPr id="6" name="CuadroTexto 5">
+            <a:extLst>
+              <a:ext uri="{FF2B5EF4-FFF2-40B4-BE49-F238E27FC236}">
+                <a16:creationId xmlns:a16="http://schemas.microsoft.com/office/drawing/2014/main" id="{39222C7F-C85C-D61F-33C8-9EF41C843043}"/>
+              </a:ext>
+            </a:extLst>
+          </p:cNvPr>
+          <p:cNvSpPr txBox="1"/>
+          <p:nvPr/>
+        </p:nvSpPr>
+        <p:spPr>
+          <a:xfrm>
+            <a:off x="685800" y="1905506"/>
+            <a:ext cx="10591800" cy="3046988"/>
+          </a:xfrm>
+          <a:prstGeom prst="rect">
+            <a:avLst/>
+          </a:prstGeom>
+          <a:noFill/>
+        </p:spPr>
+        <p:txBody>
+          <a:bodyPr wrap="square">
+            <a:spAutoFit/>
+          </a:bodyPr>
+          <a:lstStyle/>
+          <a:p>
+            <a:r>
+              <a:rPr lang="es-ES" sz="1200" dirty="0">
+                <a:latin typeface="Arial" panose="020B0604020202020204" pitchFamily="34" charset="0"/>
+                <a:cs typeface="Arial" panose="020B0604020202020204" pitchFamily="34" charset="0"/>
+              </a:rPr>
+              <a:t>En esta gráfica se representa cómo varía el índice efectivo de los cuatro primeros modos guiados al cambiar el ancho de la guía de onda entre 0.3 µm y 1 µm. Se observa que, al aumentar el ancho de la guía, el índice efectivo de todos los modos aumenta progresivamente, y esto ocurre porque una guía más ancha permite que el modo se confine mejor dentro del núcleo de silicio. </a:t>
+            </a:r>
+          </a:p>
+          <a:p>
+            <a:endParaRPr lang="es-ES" sz="1200" dirty="0">
+              <a:latin typeface="Arial" panose="020B0604020202020204" pitchFamily="34" charset="0"/>
+              <a:cs typeface="Arial" panose="020B0604020202020204" pitchFamily="34" charset="0"/>
+            </a:endParaRPr>
+          </a:p>
+          <a:p>
+            <a:r>
+              <a:rPr lang="es-ES" sz="1200" dirty="0">
+                <a:latin typeface="Arial" panose="020B0604020202020204" pitchFamily="34" charset="0"/>
+                <a:cs typeface="Arial" panose="020B0604020202020204" pitchFamily="34" charset="0"/>
+              </a:rPr>
+              <a:t>Además, también se aprecia que al aumentar el ancho comienzan a aparecer más modos guiados, lo que indica que la guía pasa de ser casi monomodo para anchos pequeños hasta 0.4 </a:t>
+            </a:r>
+            <a:r>
+              <a:rPr lang="es-ES" sz="1200" dirty="0" err="1">
+                <a:latin typeface="Arial" panose="020B0604020202020204" pitchFamily="34" charset="0"/>
+                <a:cs typeface="Arial" panose="020B0604020202020204" pitchFamily="34" charset="0"/>
+              </a:rPr>
+              <a:t>um</a:t>
+            </a:r>
+            <a:r>
+              <a:rPr lang="es-ES" sz="1200" dirty="0">
+                <a:latin typeface="Arial" panose="020B0604020202020204" pitchFamily="34" charset="0"/>
+                <a:cs typeface="Arial" panose="020B0604020202020204" pitchFamily="34" charset="0"/>
+              </a:rPr>
+              <a:t>, a soportar varios modos cuando el ancho es mayor. Se observa que el modo 0 corresponde al modo TE0,  y mantiene su polarización TE en todo el barrido: esto se debe a que es el modo fundamental y el más confinado en la guía, por lo que su polarización apenas cambia al variar el ancho. </a:t>
+            </a:r>
+          </a:p>
+          <a:p>
+            <a:endParaRPr lang="es-ES" sz="1200" dirty="0">
+              <a:latin typeface="Arial" panose="020B0604020202020204" pitchFamily="34" charset="0"/>
+              <a:cs typeface="Arial" panose="020B0604020202020204" pitchFamily="34" charset="0"/>
+            </a:endParaRPr>
+          </a:p>
+          <a:p>
+            <a:r>
+              <a:rPr lang="es-ES" sz="1200" dirty="0">
+                <a:latin typeface="Arial" panose="020B0604020202020204" pitchFamily="34" charset="0"/>
+                <a:cs typeface="Arial" panose="020B0604020202020204" pitchFamily="34" charset="0"/>
+              </a:rPr>
+              <a:t>En cambio, los modos superiores no son tan estables y su distribución de campo cambia más al modificar el ancho de la guía, por lo que pueden presentar un comportamiento más TE o más TM. Además, el </a:t>
+            </a:r>
+            <a:r>
+              <a:rPr lang="es-ES" sz="1200" dirty="0" err="1">
+                <a:latin typeface="Arial" panose="020B0604020202020204" pitchFamily="34" charset="0"/>
+                <a:cs typeface="Arial" panose="020B0604020202020204" pitchFamily="34" charset="0"/>
+              </a:rPr>
+              <a:t>modesolver</a:t>
+            </a:r>
+            <a:r>
+              <a:rPr lang="es-ES" sz="1200" dirty="0">
+                <a:latin typeface="Arial" panose="020B0604020202020204" pitchFamily="34" charset="0"/>
+                <a:cs typeface="Arial" panose="020B0604020202020204" pitchFamily="34" charset="0"/>
+              </a:rPr>
+              <a:t> ordena los modos según su índice efectivo en cada simulación, por lo que en los modos superiores la etiqueta puede cambiar cuando los valores de índice efectivo se acercan entre sí.</a:t>
+            </a:r>
+          </a:p>
+          <a:p>
+            <a:endParaRPr lang="es-ES" sz="1200" dirty="0">
+              <a:latin typeface="Arial" panose="020B0604020202020204" pitchFamily="34" charset="0"/>
+              <a:cs typeface="Arial" panose="020B0604020202020204" pitchFamily="34" charset="0"/>
+            </a:endParaRPr>
+          </a:p>
+          <a:p>
+            <a:r>
+              <a:rPr lang="es-ES" sz="1200" dirty="0">
+                <a:latin typeface="Arial" panose="020B0604020202020204" pitchFamily="34" charset="0"/>
+                <a:cs typeface="Arial" panose="020B0604020202020204" pitchFamily="34" charset="0"/>
+              </a:rPr>
+              <a:t>Como conclusión, podemos decir que los modos guiados mantienen prácticamente el mismo comportamiento tanto cuando el material del núcleo es </a:t>
+            </a:r>
+            <a:r>
+              <a:rPr lang="es-ES" sz="1200" dirty="0" err="1">
+                <a:latin typeface="Arial" panose="020B0604020202020204" pitchFamily="34" charset="0"/>
+                <a:cs typeface="Arial" panose="020B0604020202020204" pitchFamily="34" charset="0"/>
+              </a:rPr>
+              <a:t>SiN</a:t>
+            </a:r>
+            <a:r>
+              <a:rPr lang="es-ES" sz="1200" dirty="0">
+                <a:latin typeface="Arial" panose="020B0604020202020204" pitchFamily="34" charset="0"/>
+                <a:cs typeface="Arial" panose="020B0604020202020204" pitchFamily="34" charset="0"/>
+              </a:rPr>
+              <a:t>, como cuando es Si: lo único que cambiaría es que en este último, cuando dos modos tienen un índice efectivo muy similar, se intercambian el tipo de polarización. </a:t>
+            </a:r>
+          </a:p>
+        </p:txBody>
+      </p:sp>
+    </p:spTree>
+    <p:extLst>
+      <p:ext uri="{BB962C8B-B14F-4D97-AF65-F5344CB8AC3E}">
+        <p14:creationId xmlns:p14="http://schemas.microsoft.com/office/powerpoint/2010/main" val="2122776000"/>
+      </p:ext>
+    </p:extLst>
+  </p:cSld>
+  <p:clrMapOvr>
+    <a:masterClrMapping/>
+  </p:clrMapOvr>
+</p:sld>
+</file>
+
+<file path=ppt/slides/slide19.xml><?xml version="1.0" encoding="utf-8"?>
+<p:sld xmlns:a="http://schemas.openxmlformats.org/drawingml/2006/main" xmlns:r="http://schemas.openxmlformats.org/officeDocument/2006/relationships" xmlns:p="http://schemas.openxmlformats.org/presentationml/2006/main">
+  <p:cSld>
+    <p:spTree>
+      <p:nvGrpSpPr>
+        <p:cNvPr id="1" name="">
+          <a:extLst>
+            <a:ext uri="{FF2B5EF4-FFF2-40B4-BE49-F238E27FC236}">
               <a16:creationId xmlns:a16="http://schemas.microsoft.com/office/drawing/2014/main" id="{7E806822-3A24-FB58-76CE-9324C16E45EA}"/>
             </a:ext>
           </a:extLst>
@@ -8198,7 +12554,7 @@
           <a:p>
             <a:fld id="{B6F15528-21DE-4FAA-801E-634DDDAF4B2B}" type="slidenum">
               <a:rPr lang="es-ES" smtClean="0"/>
-              <a:t>14</a:t>
+              <a:t>19</a:t>
             </a:fld>
             <a:endParaRPr lang="es-ES"/>
           </a:p>
@@ -8363,8 +12719,8 @@
         </p:blipFill>
         <p:spPr>
           <a:xfrm>
-            <a:off x="609440" y="1442806"/>
-            <a:ext cx="4964255" cy="3920691"/>
+            <a:off x="685800" y="1442806"/>
+            <a:ext cx="4887895" cy="3920691"/>
           </a:xfrm>
           <a:prstGeom prst="rect">
             <a:avLst/>
@@ -8393,7 +12749,7 @@
         </p:blipFill>
         <p:spPr>
           <a:xfrm>
-            <a:off x="5777326" y="1480423"/>
+            <a:off x="5750889" y="1480423"/>
             <a:ext cx="6032086" cy="3920691"/>
           </a:xfrm>
           <a:prstGeom prst="rect">
@@ -8407,629 +12763,6 @@
         <p14:creationId xmlns:p14="http://schemas.microsoft.com/office/powerpoint/2010/main" val="2252519473"/>
       </p:ext>
     </p:extLst>
-  </p:cSld>
-  <p:clrMapOvr>
-    <a:masterClrMapping/>
-  </p:clrMapOvr>
-</p:sld>
-</file>
-
-<file path=ppt/slides/slide15.xml><?xml version="1.0" encoding="utf-8"?>
-<p:sld xmlns:a="http://schemas.openxmlformats.org/drawingml/2006/main" xmlns:r="http://schemas.openxmlformats.org/officeDocument/2006/relationships" xmlns:p="http://schemas.openxmlformats.org/presentationml/2006/main">
-  <p:cSld>
-    <p:spTree>
-      <p:nvGrpSpPr>
-        <p:cNvPr id="1" name="">
-          <a:extLst>
-            <a:ext uri="{FF2B5EF4-FFF2-40B4-BE49-F238E27FC236}">
-              <a16:creationId xmlns:a16="http://schemas.microsoft.com/office/drawing/2014/main" id="{C530346F-1C11-6CE4-0C56-1065A674B672}"/>
-            </a:ext>
-          </a:extLst>
-        </p:cNvPr>
-        <p:cNvGrpSpPr/>
-        <p:nvPr/>
-      </p:nvGrpSpPr>
-      <p:grpSpPr>
-        <a:xfrm>
-          <a:off x="0" y="0"/>
-          <a:ext cx="0" cy="0"/>
-          <a:chOff x="0" y="0"/>
-          <a:chExt cx="0" cy="0"/>
-        </a:xfrm>
-      </p:grpSpPr>
-      <p:sp>
-        <p:nvSpPr>
-          <p:cNvPr id="16" name="object 16">
-            <a:extLst>
-              <a:ext uri="{FF2B5EF4-FFF2-40B4-BE49-F238E27FC236}">
-                <a16:creationId xmlns:a16="http://schemas.microsoft.com/office/drawing/2014/main" id="{75AB3941-E729-8651-6AFB-3F9FB2BFBCF8}"/>
-              </a:ext>
-            </a:extLst>
-          </p:cNvPr>
-          <p:cNvSpPr txBox="1">
-            <a:spLocks noGrp="1"/>
-          </p:cNvSpPr>
-          <p:nvPr>
-            <p:ph type="title"/>
-          </p:nvPr>
-        </p:nvSpPr>
-        <p:spPr>
-          <a:xfrm>
-            <a:off x="583019" y="408883"/>
-            <a:ext cx="11199971" cy="1782539"/>
-          </a:xfrm>
-          <a:prstGeom prst="rect">
-            <a:avLst/>
-          </a:prstGeom>
-        </p:spPr>
-        <p:txBody>
-          <a:bodyPr vert="horz" wrap="square" lIns="0" tIns="12700" rIns="0" bIns="0" rtlCol="0">
-            <a:spAutoFit/>
-          </a:bodyPr>
-          <a:lstStyle/>
-          <a:p>
-            <a:pPr marL="12700">
-              <a:spcBef>
-                <a:spcPts val="100"/>
-              </a:spcBef>
-            </a:pPr>
-            <a:r>
-              <a:rPr lang="en-US" sz="2500" dirty="0"/>
-              <a:t>EXTRA EJERCICIO 3: </a:t>
-            </a:r>
-            <a:br>
-              <a:rPr lang="en-US" sz="2500" dirty="0"/>
-            </a:br>
-            <a:r>
-              <a:rPr lang="en-US" b="0" dirty="0"/>
-              <a:t>Find the safe radius for this technology using silicon as the core material. Consider sweeping the radius in a 5um to 30um range. </a:t>
-            </a:r>
-            <a:br>
-              <a:rPr lang="en-US" b="0" dirty="0"/>
-            </a:br>
-            <a:br>
-              <a:rPr lang="en-US" sz="2500" dirty="0"/>
-            </a:br>
-            <a:endParaRPr lang="en-US" sz="2500" b="0" dirty="0">
-              <a:latin typeface="+mj-lt"/>
-              <a:cs typeface="Lucida Sans"/>
-            </a:endParaRPr>
-          </a:p>
-        </p:txBody>
-      </p:sp>
-      <p:pic>
-        <p:nvPicPr>
-          <p:cNvPr id="83" name="Gráfico 82">
-            <a:extLst>
-              <a:ext uri="{FF2B5EF4-FFF2-40B4-BE49-F238E27FC236}">
-                <a16:creationId xmlns:a16="http://schemas.microsoft.com/office/drawing/2014/main" id="{ACC6507C-92BA-53C7-C456-8329F38B795F}"/>
-              </a:ext>
-            </a:extLst>
-          </p:cNvPr>
-          <p:cNvPicPr>
-            <a:picLocks noChangeAspect="1"/>
-          </p:cNvPicPr>
-          <p:nvPr/>
-        </p:nvPicPr>
-        <p:blipFill>
-          <a:blip r:embed="rId3">
-            <a:extLst>
-              <a:ext uri="{96DAC541-7B7A-43D3-8B79-37D633B846F1}">
-                <asvg:svgBlip xmlns:asvg="http://schemas.microsoft.com/office/drawing/2016/SVG/main" r:embed="rId4"/>
-              </a:ext>
-            </a:extLst>
-          </a:blip>
-          <a:stretch>
-            <a:fillRect/>
-          </a:stretch>
-        </p:blipFill>
-        <p:spPr>
-          <a:xfrm>
-            <a:off x="5045006" y="6356057"/>
-            <a:ext cx="6409575" cy="363174"/>
-          </a:xfrm>
-          <a:prstGeom prst="rect">
-            <a:avLst/>
-          </a:prstGeom>
-        </p:spPr>
-      </p:pic>
-      <p:sp>
-        <p:nvSpPr>
-          <p:cNvPr id="84" name="Marcador de número de diapositiva 83">
-            <a:extLst>
-              <a:ext uri="{FF2B5EF4-FFF2-40B4-BE49-F238E27FC236}">
-                <a16:creationId xmlns:a16="http://schemas.microsoft.com/office/drawing/2014/main" id="{50E4FA01-F4C5-3E20-A4C9-EDA76A24D394}"/>
-              </a:ext>
-            </a:extLst>
-          </p:cNvPr>
-          <p:cNvSpPr>
-            <a:spLocks noGrp="1"/>
-          </p:cNvSpPr>
-          <p:nvPr>
-            <p:ph type="sldNum" sz="quarter" idx="7"/>
-          </p:nvPr>
-        </p:nvSpPr>
-        <p:spPr/>
-        <p:txBody>
-          <a:bodyPr/>
-          <a:lstStyle/>
-          <a:p>
-            <a:fld id="{B6F15528-21DE-4FAA-801E-634DDDAF4B2B}" type="slidenum">
-              <a:rPr lang="es-ES" smtClean="0"/>
-              <a:t>15</a:t>
-            </a:fld>
-            <a:endParaRPr lang="es-ES"/>
-          </a:p>
-        </p:txBody>
-      </p:sp>
-      <p:sp>
-        <p:nvSpPr>
-          <p:cNvPr id="3" name="Marcador de pie de página 2">
-            <a:extLst>
-              <a:ext uri="{FF2B5EF4-FFF2-40B4-BE49-F238E27FC236}">
-                <a16:creationId xmlns:a16="http://schemas.microsoft.com/office/drawing/2014/main" id="{3683F575-02B7-209A-F54D-D143B334522B}"/>
-              </a:ext>
-            </a:extLst>
-          </p:cNvPr>
-          <p:cNvSpPr>
-            <a:spLocks noGrp="1"/>
-          </p:cNvSpPr>
-          <p:nvPr>
-            <p:ph type="ftr" sz="quarter" idx="5"/>
-          </p:nvPr>
-        </p:nvSpPr>
-        <p:spPr/>
-        <p:txBody>
-          <a:bodyPr/>
-          <a:lstStyle/>
-          <a:p>
-            <a:pPr marL="12700">
-              <a:spcBef>
-                <a:spcPts val="15"/>
-              </a:spcBef>
-            </a:pPr>
-            <a:r>
-              <a:rPr lang="es-ES" spc="-5"/>
-              <a:t>LAB 1.0 WAVEGUIDES</a:t>
-            </a:r>
-            <a:endParaRPr lang="es-ES" spc="-5" dirty="0"/>
-          </a:p>
-        </p:txBody>
-      </p:sp>
-      <p:sp>
-        <p:nvSpPr>
-          <p:cNvPr id="2" name="CuadroTexto 1">
-            <a:extLst>
-              <a:ext uri="{FF2B5EF4-FFF2-40B4-BE49-F238E27FC236}">
-                <a16:creationId xmlns:a16="http://schemas.microsoft.com/office/drawing/2014/main" id="{0B9C3132-D722-0D81-F5A5-5CA88DA6E9D0}"/>
-              </a:ext>
-            </a:extLst>
-          </p:cNvPr>
-          <p:cNvSpPr txBox="1"/>
-          <p:nvPr/>
-        </p:nvSpPr>
-        <p:spPr>
-          <a:xfrm>
-            <a:off x="583019" y="1612918"/>
-            <a:ext cx="11199971" cy="3416320"/>
-          </a:xfrm>
-          <a:prstGeom prst="rect">
-            <a:avLst/>
-          </a:prstGeom>
-          <a:solidFill>
-            <a:schemeClr val="bg1">
-              <a:lumMod val="95000"/>
-            </a:schemeClr>
-          </a:solidFill>
-          <a:ln w="28575">
-            <a:solidFill>
-              <a:srgbClr val="E0700D"/>
-            </a:solidFill>
-          </a:ln>
-        </p:spPr>
-        <p:txBody>
-          <a:bodyPr wrap="square" rtlCol="0">
-            <a:spAutoFit/>
-          </a:bodyPr>
-          <a:lstStyle/>
-          <a:p>
-            <a:pPr algn="just"/>
-            <a:r>
-              <a:rPr lang="en-US" sz="1200" dirty="0">
-                <a:latin typeface="Arial" panose="020B0604020202020204" pitchFamily="34" charset="0"/>
-                <a:cs typeface="Arial" panose="020B0604020202020204" pitchFamily="34" charset="0"/>
-              </a:rPr>
-              <a:t>Comment results, which is the safe radius?, consider safe means less than 0.1 dB/90º.</a:t>
-            </a:r>
-          </a:p>
-          <a:p>
-            <a:pPr algn="just"/>
-            <a:endParaRPr lang="en-US" sz="1200" u="sng" dirty="0">
-              <a:latin typeface="Arial" panose="020B0604020202020204" pitchFamily="34" charset="0"/>
-              <a:cs typeface="Arial" panose="020B0604020202020204" pitchFamily="34" charset="0"/>
-            </a:endParaRPr>
-          </a:p>
-          <a:p>
-            <a:r>
-              <a:rPr lang="es-ES" sz="1200" dirty="0">
-                <a:latin typeface="Arial" panose="020B0604020202020204" pitchFamily="34" charset="0"/>
-                <a:cs typeface="Arial" panose="020B0604020202020204" pitchFamily="34" charset="0"/>
-              </a:rPr>
-              <a:t>En estas nuevas simulaciones se ha sustituido el núcleo de nitruro de silicio por silicio, manteniendo el dióxido de silicio como material de la cubierta. Además, en este caso se ha considerado una pérdida de propagación mayor, de 3 dB/cm. Debido al mayor índice de refracción del silicio, el modo se encuentra mucho más confinado en el núcleo, lo que da lugar a valores de índice efectivo significativamente mayores que en el caso anterior.</a:t>
-            </a:r>
-          </a:p>
-          <a:p>
-            <a:endParaRPr lang="es-ES" sz="1200" dirty="0">
-              <a:latin typeface="Arial" panose="020B0604020202020204" pitchFamily="34" charset="0"/>
-              <a:cs typeface="Arial" panose="020B0604020202020204" pitchFamily="34" charset="0"/>
-            </a:endParaRPr>
-          </a:p>
-          <a:p>
-            <a:r>
-              <a:rPr lang="es-ES" sz="1200" dirty="0">
-                <a:latin typeface="Arial" panose="020B0604020202020204" pitchFamily="34" charset="0"/>
-                <a:cs typeface="Arial" panose="020B0604020202020204" pitchFamily="34" charset="0"/>
-              </a:rPr>
-              <a:t>En la gráfica de pérdidas de la izquierda se observa un comportamiento similar al descrito previamente: las pérdidas de modo disminuyen al aumentar el radio de curvatura, mientras que las pérdidas de propagación aumentan debido al mayor recorrido del modo. Sin embargo, al considerar una pérdida de propagación mayor, la contribución de estas pérdidas es más significativa incluso siendo radios relativamente pequeños los simulados.</a:t>
-            </a:r>
-          </a:p>
-          <a:p>
-            <a:endParaRPr lang="es-ES" sz="1200" dirty="0">
-              <a:latin typeface="Arial" panose="020B0604020202020204" pitchFamily="34" charset="0"/>
-              <a:cs typeface="Arial" panose="020B0604020202020204" pitchFamily="34" charset="0"/>
-            </a:endParaRPr>
-          </a:p>
-          <a:p>
-            <a:r>
-              <a:rPr lang="es-ES" sz="1200" dirty="0">
-                <a:latin typeface="Arial" panose="020B0604020202020204" pitchFamily="34" charset="0"/>
-                <a:cs typeface="Arial" panose="020B0604020202020204" pitchFamily="34" charset="0"/>
-              </a:rPr>
-              <a:t>Por otro lado, en la gráfica del índice efectivo en función del radio de curvatura, se observa que los valores son considerablemente mayores que en el caso del nitruro de silicio, situándose alrededor de 3. Esto se debe al mayor índice de refracción del silicio, que provoca un confinamiento más fuerte del modo dentro del núcleo. A medida que el radio de curvatura aumenta, el índice efectivo disminuye ligeramente y tiende a estabilizarse, ya que la guía se comporta cada vez más como una guía recta.</a:t>
-            </a:r>
-          </a:p>
-          <a:p>
-            <a:endParaRPr lang="es-ES" sz="1200" dirty="0">
-              <a:latin typeface="Arial" panose="020B0604020202020204" pitchFamily="34" charset="0"/>
-              <a:cs typeface="Arial" panose="020B0604020202020204" pitchFamily="34" charset="0"/>
-            </a:endParaRPr>
-          </a:p>
-          <a:p>
-            <a:r>
-              <a:rPr lang="es-ES" sz="1200" dirty="0">
-                <a:latin typeface="Arial" panose="020B0604020202020204" pitchFamily="34" charset="0"/>
-                <a:cs typeface="Arial" panose="020B0604020202020204" pitchFamily="34" charset="0"/>
-              </a:rPr>
-              <a:t>Por último, podríamos decir que el rango de radios óptimos de 10-15 </a:t>
-            </a:r>
-            <a:r>
-              <a:rPr lang="es-ES" sz="1200" dirty="0" err="1">
-                <a:latin typeface="Arial" panose="020B0604020202020204" pitchFamily="34" charset="0"/>
-                <a:cs typeface="Arial" panose="020B0604020202020204" pitchFamily="34" charset="0"/>
-              </a:rPr>
-              <a:t>um</a:t>
-            </a:r>
-            <a:r>
-              <a:rPr lang="es-ES" sz="1200" dirty="0">
-                <a:latin typeface="Arial" panose="020B0604020202020204" pitchFamily="34" charset="0"/>
-                <a:cs typeface="Arial" panose="020B0604020202020204" pitchFamily="34" charset="0"/>
-              </a:rPr>
-              <a:t>, mientras que el rango de radios seguros va a ser de todos los valores simulados como mínimo, ya que para todos estos radios, su suma de pérdidas es menor a 0.1 dB.</a:t>
-            </a:r>
-            <a:endParaRPr lang="en-US" sz="1200" dirty="0">
-              <a:latin typeface="Arial" panose="020B0604020202020204" pitchFamily="34" charset="0"/>
-              <a:cs typeface="Arial" panose="020B0604020202020204" pitchFamily="34" charset="0"/>
-            </a:endParaRPr>
-          </a:p>
-          <a:p>
-            <a:pPr algn="just"/>
-            <a:endParaRPr lang="en-US" sz="1200" dirty="0">
-              <a:latin typeface="Arial" panose="020B0604020202020204" pitchFamily="34" charset="0"/>
-              <a:cs typeface="Arial" panose="020B0604020202020204" pitchFamily="34" charset="0"/>
-            </a:endParaRPr>
-          </a:p>
-        </p:txBody>
-      </p:sp>
-    </p:spTree>
-    <p:extLst>
-      <p:ext uri="{BB962C8B-B14F-4D97-AF65-F5344CB8AC3E}">
-        <p14:creationId xmlns:p14="http://schemas.microsoft.com/office/powerpoint/2010/main" val="1950442400"/>
-      </p:ext>
-    </p:extLst>
-  </p:cSld>
-  <p:clrMapOvr>
-    <a:masterClrMapping/>
-  </p:clrMapOvr>
-</p:sld>
-</file>
-
-<file path=ppt/slides/slide16.xml><?xml version="1.0" encoding="utf-8"?>
-<p:sld xmlns:a="http://schemas.openxmlformats.org/drawingml/2006/main" xmlns:r="http://schemas.openxmlformats.org/officeDocument/2006/relationships" xmlns:p="http://schemas.openxmlformats.org/presentationml/2006/main">
-  <p:cSld>
-    <p:spTree>
-      <p:nvGrpSpPr>
-        <p:cNvPr id="1" name=""/>
-        <p:cNvGrpSpPr/>
-        <p:nvPr/>
-      </p:nvGrpSpPr>
-      <p:grpSpPr>
-        <a:xfrm>
-          <a:off x="0" y="0"/>
-          <a:ext cx="0" cy="0"/>
-          <a:chOff x="0" y="0"/>
-          <a:chExt cx="0" cy="0"/>
-        </a:xfrm>
-      </p:grpSpPr>
-      <p:sp>
-        <p:nvSpPr>
-          <p:cNvPr id="3" name="object 3"/>
-          <p:cNvSpPr/>
-          <p:nvPr/>
-        </p:nvSpPr>
-        <p:spPr>
-          <a:xfrm>
-            <a:off x="3945635" y="2636520"/>
-            <a:ext cx="8246363" cy="1584959"/>
-          </a:xfrm>
-          <a:prstGeom prst="rect">
-            <a:avLst/>
-          </a:prstGeom>
-          <a:blipFill>
-            <a:blip r:embed="rId2" cstate="print"/>
-            <a:stretch>
-              <a:fillRect/>
-            </a:stretch>
-          </a:blipFill>
-        </p:spPr>
-        <p:txBody>
-          <a:bodyPr wrap="square" lIns="0" tIns="0" rIns="0" bIns="0" rtlCol="0"/>
-          <a:lstStyle/>
-          <a:p>
-            <a:endParaRPr/>
-          </a:p>
-        </p:txBody>
-      </p:sp>
-      <p:sp>
-        <p:nvSpPr>
-          <p:cNvPr id="4" name="object 4"/>
-          <p:cNvSpPr txBox="1">
-            <a:spLocks noGrp="1"/>
-          </p:cNvSpPr>
-          <p:nvPr>
-            <p:ph type="title"/>
-          </p:nvPr>
-        </p:nvSpPr>
-        <p:spPr>
-          <a:xfrm>
-            <a:off x="4513326" y="3165729"/>
-            <a:ext cx="2233295" cy="513715"/>
-          </a:xfrm>
-          <a:prstGeom prst="rect">
-            <a:avLst/>
-          </a:prstGeom>
-        </p:spPr>
-        <p:txBody>
-          <a:bodyPr vert="horz" wrap="square" lIns="0" tIns="13335" rIns="0" bIns="0" rtlCol="0">
-            <a:spAutoFit/>
-          </a:bodyPr>
-          <a:lstStyle/>
-          <a:p>
-            <a:pPr marL="12700">
-              <a:lnSpc>
-                <a:spcPct val="100000"/>
-              </a:lnSpc>
-              <a:spcBef>
-                <a:spcPts val="105"/>
-              </a:spcBef>
-            </a:pPr>
-            <a:r>
-              <a:rPr sz="3200" b="1" spc="-5" dirty="0">
-                <a:solidFill>
-                  <a:srgbClr val="FFFFFF"/>
-                </a:solidFill>
-                <a:latin typeface="Lucida Sans"/>
-                <a:cs typeface="Lucida Sans"/>
-              </a:rPr>
-              <a:t>Thank</a:t>
-            </a:r>
-            <a:r>
-              <a:rPr sz="3200" b="1" spc="-55" dirty="0">
-                <a:solidFill>
-                  <a:srgbClr val="FFFFFF"/>
-                </a:solidFill>
-                <a:latin typeface="Lucida Sans"/>
-                <a:cs typeface="Lucida Sans"/>
-              </a:rPr>
-              <a:t> </a:t>
-            </a:r>
-            <a:r>
-              <a:rPr sz="3200" b="1" dirty="0">
-                <a:solidFill>
-                  <a:srgbClr val="FFFFFF"/>
-                </a:solidFill>
-                <a:latin typeface="Lucida Sans"/>
-                <a:cs typeface="Lucida Sans"/>
-              </a:rPr>
-              <a:t>you</a:t>
-            </a:r>
-            <a:endParaRPr sz="3200">
-              <a:latin typeface="Lucida Sans"/>
-              <a:cs typeface="Lucida Sans"/>
-            </a:endParaRPr>
-          </a:p>
-        </p:txBody>
-      </p:sp>
-      <p:sp>
-        <p:nvSpPr>
-          <p:cNvPr id="5" name="Marcador de número de diapositiva 4">
-            <a:extLst>
-              <a:ext uri="{FF2B5EF4-FFF2-40B4-BE49-F238E27FC236}">
-                <a16:creationId xmlns:a16="http://schemas.microsoft.com/office/drawing/2014/main" id="{B052DA19-AD24-7D24-2AE9-51F8F5A7F5E0}"/>
-              </a:ext>
-            </a:extLst>
-          </p:cNvPr>
-          <p:cNvSpPr>
-            <a:spLocks noGrp="1"/>
-          </p:cNvSpPr>
-          <p:nvPr>
-            <p:ph type="sldNum" sz="quarter" idx="7"/>
-          </p:nvPr>
-        </p:nvSpPr>
-        <p:spPr/>
-        <p:txBody>
-          <a:bodyPr/>
-          <a:lstStyle/>
-          <a:p>
-            <a:fld id="{B6F15528-21DE-4FAA-801E-634DDDAF4B2B}" type="slidenum">
-              <a:rPr lang="es-ES" smtClean="0"/>
-              <a:t>16</a:t>
-            </a:fld>
-            <a:endParaRPr lang="es-ES"/>
-          </a:p>
-        </p:txBody>
-      </p:sp>
-      <p:sp>
-        <p:nvSpPr>
-          <p:cNvPr id="6" name="CuadroTexto 5">
-            <a:extLst>
-              <a:ext uri="{FF2B5EF4-FFF2-40B4-BE49-F238E27FC236}">
-                <a16:creationId xmlns:a16="http://schemas.microsoft.com/office/drawing/2014/main" id="{30DB343B-A24E-A634-93E8-282DB996B142}"/>
-              </a:ext>
-            </a:extLst>
-          </p:cNvPr>
-          <p:cNvSpPr txBox="1"/>
-          <p:nvPr/>
-        </p:nvSpPr>
-        <p:spPr>
-          <a:xfrm>
-            <a:off x="1452886" y="312322"/>
-            <a:ext cx="6120880" cy="2308324"/>
-          </a:xfrm>
-          <a:prstGeom prst="rect">
-            <a:avLst/>
-          </a:prstGeom>
-          <a:noFill/>
-        </p:spPr>
-        <p:txBody>
-          <a:bodyPr wrap="square">
-            <a:spAutoFit/>
-          </a:bodyPr>
-          <a:lstStyle/>
-          <a:p>
-            <a:r>
-              <a:rPr lang="es-ES" b="1" dirty="0" err="1"/>
-              <a:t>git</a:t>
-            </a:r>
-            <a:r>
-              <a:rPr lang="es-ES" b="1" dirty="0"/>
-              <a:t> </a:t>
-            </a:r>
-            <a:r>
-              <a:rPr lang="es-ES" b="1" dirty="0" err="1"/>
-              <a:t>config</a:t>
-            </a:r>
-            <a:r>
-              <a:rPr lang="es-ES" b="1" dirty="0"/>
-              <a:t> --global user.name "{Tu nombre de usuario}"</a:t>
-            </a:r>
-            <a:endParaRPr lang="es-ES" dirty="0"/>
-          </a:p>
-          <a:p>
-            <a:r>
-              <a:rPr lang="es-ES" dirty="0"/>
-              <a:t> </a:t>
-            </a:r>
-          </a:p>
-          <a:p>
-            <a:pPr>
-              <a:buNone/>
-            </a:pPr>
-            <a:r>
-              <a:rPr lang="en-US" dirty="0">
-                <a:effectLst/>
-                <a:latin typeface="-apple-system"/>
-              </a:rPr>
-              <a:t>git add -A</a:t>
-            </a:r>
-          </a:p>
-          <a:p>
-            <a:pPr>
-              <a:buNone/>
-            </a:pPr>
-            <a:r>
-              <a:rPr lang="en-US" dirty="0">
-                <a:effectLst/>
-                <a:latin typeface="-apple-system"/>
-              </a:rPr>
-              <a:t> </a:t>
-            </a:r>
-          </a:p>
-          <a:p>
-            <a:pPr>
-              <a:buNone/>
-            </a:pPr>
-            <a:r>
-              <a:rPr lang="en-US" dirty="0">
-                <a:effectLst/>
-                <a:latin typeface="-apple-system"/>
-              </a:rPr>
-              <a:t>git commit -m "</a:t>
-            </a:r>
-            <a:r>
-              <a:rPr lang="en-US" dirty="0" err="1">
-                <a:effectLst/>
-                <a:latin typeface="-apple-system"/>
-              </a:rPr>
-              <a:t>cambios</a:t>
-            </a:r>
-            <a:r>
-              <a:rPr lang="en-US" dirty="0">
-                <a:effectLst/>
-                <a:latin typeface="-apple-system"/>
-              </a:rPr>
-              <a:t>"</a:t>
-            </a:r>
-          </a:p>
-          <a:p>
-            <a:pPr>
-              <a:buNone/>
-            </a:pPr>
-            <a:r>
-              <a:rPr lang="en-US" dirty="0">
-                <a:effectLst/>
-                <a:latin typeface="-apple-system"/>
-              </a:rPr>
-              <a:t> </a:t>
-            </a:r>
-          </a:p>
-          <a:p>
-            <a:pPr>
-              <a:buNone/>
-            </a:pPr>
-            <a:r>
-              <a:rPr lang="en-US" dirty="0">
-                <a:effectLst/>
-                <a:latin typeface="-apple-system"/>
-              </a:rPr>
-              <a:t>git push</a:t>
-            </a:r>
-          </a:p>
-          <a:p>
-            <a:pPr>
-              <a:buNone/>
-            </a:pPr>
-            <a:r>
-              <a:rPr lang="en-US" dirty="0">
-                <a:effectLst/>
-                <a:latin typeface="-apple-system"/>
-              </a:rPr>
-              <a:t> </a:t>
-            </a:r>
-            <a:endParaRPr lang="es-ES" dirty="0"/>
-          </a:p>
-        </p:txBody>
-      </p:sp>
-    </p:spTree>
   </p:cSld>
   <p:clrMapOvr>
     <a:masterClrMapping/>
@@ -10970,6 +14703,629 @@
 </p:sld>
 </file>
 
+<file path=ppt/slides/slide20.xml><?xml version="1.0" encoding="utf-8"?>
+<p:sld xmlns:a="http://schemas.openxmlformats.org/drawingml/2006/main" xmlns:r="http://schemas.openxmlformats.org/officeDocument/2006/relationships" xmlns:p="http://schemas.openxmlformats.org/presentationml/2006/main">
+  <p:cSld>
+    <p:spTree>
+      <p:nvGrpSpPr>
+        <p:cNvPr id="1" name="">
+          <a:extLst>
+            <a:ext uri="{FF2B5EF4-FFF2-40B4-BE49-F238E27FC236}">
+              <a16:creationId xmlns:a16="http://schemas.microsoft.com/office/drawing/2014/main" id="{C530346F-1C11-6CE4-0C56-1065A674B672}"/>
+            </a:ext>
+          </a:extLst>
+        </p:cNvPr>
+        <p:cNvGrpSpPr/>
+        <p:nvPr/>
+      </p:nvGrpSpPr>
+      <p:grpSpPr>
+        <a:xfrm>
+          <a:off x="0" y="0"/>
+          <a:ext cx="0" cy="0"/>
+          <a:chOff x="0" y="0"/>
+          <a:chExt cx="0" cy="0"/>
+        </a:xfrm>
+      </p:grpSpPr>
+      <p:sp>
+        <p:nvSpPr>
+          <p:cNvPr id="16" name="object 16">
+            <a:extLst>
+              <a:ext uri="{FF2B5EF4-FFF2-40B4-BE49-F238E27FC236}">
+                <a16:creationId xmlns:a16="http://schemas.microsoft.com/office/drawing/2014/main" id="{75AB3941-E729-8651-6AFB-3F9FB2BFBCF8}"/>
+              </a:ext>
+            </a:extLst>
+          </p:cNvPr>
+          <p:cNvSpPr txBox="1">
+            <a:spLocks noGrp="1"/>
+          </p:cNvSpPr>
+          <p:nvPr>
+            <p:ph type="title"/>
+          </p:nvPr>
+        </p:nvSpPr>
+        <p:spPr>
+          <a:xfrm>
+            <a:off x="583019" y="408883"/>
+            <a:ext cx="11199971" cy="1782539"/>
+          </a:xfrm>
+          <a:prstGeom prst="rect">
+            <a:avLst/>
+          </a:prstGeom>
+        </p:spPr>
+        <p:txBody>
+          <a:bodyPr vert="horz" wrap="square" lIns="0" tIns="12700" rIns="0" bIns="0" rtlCol="0">
+            <a:spAutoFit/>
+          </a:bodyPr>
+          <a:lstStyle/>
+          <a:p>
+            <a:pPr marL="12700">
+              <a:spcBef>
+                <a:spcPts val="100"/>
+              </a:spcBef>
+            </a:pPr>
+            <a:r>
+              <a:rPr lang="en-US" sz="2500" dirty="0"/>
+              <a:t>EXTRA EJERCICIO 3: </a:t>
+            </a:r>
+            <a:br>
+              <a:rPr lang="en-US" sz="2500" dirty="0"/>
+            </a:br>
+            <a:r>
+              <a:rPr lang="en-US" b="0" dirty="0"/>
+              <a:t>Find the safe radius for this technology using silicon as the core material. Consider sweeping the radius in a 5um to 30um range. </a:t>
+            </a:r>
+            <a:br>
+              <a:rPr lang="en-US" b="0" dirty="0"/>
+            </a:br>
+            <a:br>
+              <a:rPr lang="en-US" sz="2500" dirty="0"/>
+            </a:br>
+            <a:endParaRPr lang="en-US" sz="2500" b="0" dirty="0">
+              <a:latin typeface="+mj-lt"/>
+              <a:cs typeface="Lucida Sans"/>
+            </a:endParaRPr>
+          </a:p>
+        </p:txBody>
+      </p:sp>
+      <p:pic>
+        <p:nvPicPr>
+          <p:cNvPr id="83" name="Gráfico 82">
+            <a:extLst>
+              <a:ext uri="{FF2B5EF4-FFF2-40B4-BE49-F238E27FC236}">
+                <a16:creationId xmlns:a16="http://schemas.microsoft.com/office/drawing/2014/main" id="{ACC6507C-92BA-53C7-C456-8329F38B795F}"/>
+              </a:ext>
+            </a:extLst>
+          </p:cNvPr>
+          <p:cNvPicPr>
+            <a:picLocks noChangeAspect="1"/>
+          </p:cNvPicPr>
+          <p:nvPr/>
+        </p:nvPicPr>
+        <p:blipFill>
+          <a:blip r:embed="rId3">
+            <a:extLst>
+              <a:ext uri="{96DAC541-7B7A-43D3-8B79-37D633B846F1}">
+                <asvg:svgBlip xmlns:asvg="http://schemas.microsoft.com/office/drawing/2016/SVG/main" r:embed="rId4"/>
+              </a:ext>
+            </a:extLst>
+          </a:blip>
+          <a:stretch>
+            <a:fillRect/>
+          </a:stretch>
+        </p:blipFill>
+        <p:spPr>
+          <a:xfrm>
+            <a:off x="5045006" y="6356057"/>
+            <a:ext cx="6409575" cy="363174"/>
+          </a:xfrm>
+          <a:prstGeom prst="rect">
+            <a:avLst/>
+          </a:prstGeom>
+        </p:spPr>
+      </p:pic>
+      <p:sp>
+        <p:nvSpPr>
+          <p:cNvPr id="84" name="Marcador de número de diapositiva 83">
+            <a:extLst>
+              <a:ext uri="{FF2B5EF4-FFF2-40B4-BE49-F238E27FC236}">
+                <a16:creationId xmlns:a16="http://schemas.microsoft.com/office/drawing/2014/main" id="{50E4FA01-F4C5-3E20-A4C9-EDA76A24D394}"/>
+              </a:ext>
+            </a:extLst>
+          </p:cNvPr>
+          <p:cNvSpPr>
+            <a:spLocks noGrp="1"/>
+          </p:cNvSpPr>
+          <p:nvPr>
+            <p:ph type="sldNum" sz="quarter" idx="7"/>
+          </p:nvPr>
+        </p:nvSpPr>
+        <p:spPr/>
+        <p:txBody>
+          <a:bodyPr/>
+          <a:lstStyle/>
+          <a:p>
+            <a:fld id="{B6F15528-21DE-4FAA-801E-634DDDAF4B2B}" type="slidenum">
+              <a:rPr lang="es-ES" smtClean="0"/>
+              <a:t>20</a:t>
+            </a:fld>
+            <a:endParaRPr lang="es-ES"/>
+          </a:p>
+        </p:txBody>
+      </p:sp>
+      <p:sp>
+        <p:nvSpPr>
+          <p:cNvPr id="3" name="Marcador de pie de página 2">
+            <a:extLst>
+              <a:ext uri="{FF2B5EF4-FFF2-40B4-BE49-F238E27FC236}">
+                <a16:creationId xmlns:a16="http://schemas.microsoft.com/office/drawing/2014/main" id="{3683F575-02B7-209A-F54D-D143B334522B}"/>
+              </a:ext>
+            </a:extLst>
+          </p:cNvPr>
+          <p:cNvSpPr>
+            <a:spLocks noGrp="1"/>
+          </p:cNvSpPr>
+          <p:nvPr>
+            <p:ph type="ftr" sz="quarter" idx="5"/>
+          </p:nvPr>
+        </p:nvSpPr>
+        <p:spPr/>
+        <p:txBody>
+          <a:bodyPr/>
+          <a:lstStyle/>
+          <a:p>
+            <a:pPr marL="12700">
+              <a:spcBef>
+                <a:spcPts val="15"/>
+              </a:spcBef>
+            </a:pPr>
+            <a:r>
+              <a:rPr lang="es-ES" spc="-5"/>
+              <a:t>LAB 1.0 WAVEGUIDES</a:t>
+            </a:r>
+            <a:endParaRPr lang="es-ES" spc="-5" dirty="0"/>
+          </a:p>
+        </p:txBody>
+      </p:sp>
+      <p:sp>
+        <p:nvSpPr>
+          <p:cNvPr id="2" name="CuadroTexto 1">
+            <a:extLst>
+              <a:ext uri="{FF2B5EF4-FFF2-40B4-BE49-F238E27FC236}">
+                <a16:creationId xmlns:a16="http://schemas.microsoft.com/office/drawing/2014/main" id="{0B9C3132-D722-0D81-F5A5-5CA88DA6E9D0}"/>
+              </a:ext>
+            </a:extLst>
+          </p:cNvPr>
+          <p:cNvSpPr txBox="1"/>
+          <p:nvPr/>
+        </p:nvSpPr>
+        <p:spPr>
+          <a:xfrm>
+            <a:off x="583019" y="1612918"/>
+            <a:ext cx="11199971" cy="3416320"/>
+          </a:xfrm>
+          <a:prstGeom prst="rect">
+            <a:avLst/>
+          </a:prstGeom>
+          <a:solidFill>
+            <a:schemeClr val="bg1">
+              <a:lumMod val="95000"/>
+            </a:schemeClr>
+          </a:solidFill>
+          <a:ln w="28575">
+            <a:solidFill>
+              <a:srgbClr val="E0700D"/>
+            </a:solidFill>
+          </a:ln>
+        </p:spPr>
+        <p:txBody>
+          <a:bodyPr wrap="square" rtlCol="0">
+            <a:spAutoFit/>
+          </a:bodyPr>
+          <a:lstStyle/>
+          <a:p>
+            <a:pPr algn="just"/>
+            <a:r>
+              <a:rPr lang="en-US" sz="1200" dirty="0">
+                <a:latin typeface="Arial" panose="020B0604020202020204" pitchFamily="34" charset="0"/>
+                <a:cs typeface="Arial" panose="020B0604020202020204" pitchFamily="34" charset="0"/>
+              </a:rPr>
+              <a:t>Comment results, which is the safe radius?, consider safe means less than 0.1 dB/90º.</a:t>
+            </a:r>
+          </a:p>
+          <a:p>
+            <a:pPr algn="just"/>
+            <a:endParaRPr lang="en-US" sz="1200" u="sng" dirty="0">
+              <a:latin typeface="Arial" panose="020B0604020202020204" pitchFamily="34" charset="0"/>
+              <a:cs typeface="Arial" panose="020B0604020202020204" pitchFamily="34" charset="0"/>
+            </a:endParaRPr>
+          </a:p>
+          <a:p>
+            <a:r>
+              <a:rPr lang="es-ES" sz="1200" dirty="0">
+                <a:latin typeface="Arial" panose="020B0604020202020204" pitchFamily="34" charset="0"/>
+                <a:cs typeface="Arial" panose="020B0604020202020204" pitchFamily="34" charset="0"/>
+              </a:rPr>
+              <a:t>En estas nuevas simulaciones se ha sustituido el núcleo de nitruro de silicio por silicio, manteniendo el dióxido de silicio como material de la cubierta. Además, en este caso se ha considerado una pérdida de propagación mayor, de 3 dB/cm. Debido al mayor índice de refracción del silicio, el modo se encuentra mucho más confinado en el núcleo, lo que da lugar a valores de índice efectivo significativamente mayores que en el caso anterior.</a:t>
+            </a:r>
+          </a:p>
+          <a:p>
+            <a:endParaRPr lang="es-ES" sz="1200" dirty="0">
+              <a:latin typeface="Arial" panose="020B0604020202020204" pitchFamily="34" charset="0"/>
+              <a:cs typeface="Arial" panose="020B0604020202020204" pitchFamily="34" charset="0"/>
+            </a:endParaRPr>
+          </a:p>
+          <a:p>
+            <a:r>
+              <a:rPr lang="es-ES" sz="1200" dirty="0">
+                <a:latin typeface="Arial" panose="020B0604020202020204" pitchFamily="34" charset="0"/>
+                <a:cs typeface="Arial" panose="020B0604020202020204" pitchFamily="34" charset="0"/>
+              </a:rPr>
+              <a:t>En la gráfica de pérdidas de la izquierda se observa un comportamiento similar al descrito previamente: las pérdidas de modo disminuyen al aumentar el radio de curvatura, mientras que las pérdidas de propagación aumentan debido al mayor recorrido del modo. Sin embargo, al considerar una pérdida de propagación mayor, la contribución de estas pérdidas es más significativa incluso siendo radios relativamente pequeños los simulados.</a:t>
+            </a:r>
+          </a:p>
+          <a:p>
+            <a:endParaRPr lang="es-ES" sz="1200" dirty="0">
+              <a:latin typeface="Arial" panose="020B0604020202020204" pitchFamily="34" charset="0"/>
+              <a:cs typeface="Arial" panose="020B0604020202020204" pitchFamily="34" charset="0"/>
+            </a:endParaRPr>
+          </a:p>
+          <a:p>
+            <a:r>
+              <a:rPr lang="es-ES" sz="1200" dirty="0">
+                <a:latin typeface="Arial" panose="020B0604020202020204" pitchFamily="34" charset="0"/>
+                <a:cs typeface="Arial" panose="020B0604020202020204" pitchFamily="34" charset="0"/>
+              </a:rPr>
+              <a:t>Por otro lado, en la gráfica del índice efectivo en función del radio de curvatura, se observa que los valores son considerablemente mayores que en el caso del nitruro de silicio, situándose alrededor de 3. Esto se debe al mayor índice de refracción del silicio, que provoca un confinamiento más fuerte del modo dentro del núcleo. A medida que el radio de curvatura aumenta, el índice efectivo disminuye ligeramente y tiende a estabilizarse, ya que la guía se comporta cada vez más como una guía recta.</a:t>
+            </a:r>
+          </a:p>
+          <a:p>
+            <a:endParaRPr lang="es-ES" sz="1200" dirty="0">
+              <a:latin typeface="Arial" panose="020B0604020202020204" pitchFamily="34" charset="0"/>
+              <a:cs typeface="Arial" panose="020B0604020202020204" pitchFamily="34" charset="0"/>
+            </a:endParaRPr>
+          </a:p>
+          <a:p>
+            <a:r>
+              <a:rPr lang="es-ES" sz="1200" dirty="0">
+                <a:latin typeface="Arial" panose="020B0604020202020204" pitchFamily="34" charset="0"/>
+                <a:cs typeface="Arial" panose="020B0604020202020204" pitchFamily="34" charset="0"/>
+              </a:rPr>
+              <a:t>Por último, podríamos decir que el rango de radios óptimos de 10-15 </a:t>
+            </a:r>
+            <a:r>
+              <a:rPr lang="es-ES" sz="1200" dirty="0" err="1">
+                <a:latin typeface="Arial" panose="020B0604020202020204" pitchFamily="34" charset="0"/>
+                <a:cs typeface="Arial" panose="020B0604020202020204" pitchFamily="34" charset="0"/>
+              </a:rPr>
+              <a:t>um</a:t>
+            </a:r>
+            <a:r>
+              <a:rPr lang="es-ES" sz="1200" dirty="0">
+                <a:latin typeface="Arial" panose="020B0604020202020204" pitchFamily="34" charset="0"/>
+                <a:cs typeface="Arial" panose="020B0604020202020204" pitchFamily="34" charset="0"/>
+              </a:rPr>
+              <a:t>, mientras que el rango de radios seguros va a ser de todos los valores simulados como mínimo, ya que para todos estos radios, su suma de pérdidas es menor a 0.1 dB.</a:t>
+            </a:r>
+            <a:endParaRPr lang="en-US" sz="1200" dirty="0">
+              <a:latin typeface="Arial" panose="020B0604020202020204" pitchFamily="34" charset="0"/>
+              <a:cs typeface="Arial" panose="020B0604020202020204" pitchFamily="34" charset="0"/>
+            </a:endParaRPr>
+          </a:p>
+          <a:p>
+            <a:pPr algn="just"/>
+            <a:endParaRPr lang="en-US" sz="1200" dirty="0">
+              <a:latin typeface="Arial" panose="020B0604020202020204" pitchFamily="34" charset="0"/>
+              <a:cs typeface="Arial" panose="020B0604020202020204" pitchFamily="34" charset="0"/>
+            </a:endParaRPr>
+          </a:p>
+        </p:txBody>
+      </p:sp>
+    </p:spTree>
+    <p:extLst>
+      <p:ext uri="{BB962C8B-B14F-4D97-AF65-F5344CB8AC3E}">
+        <p14:creationId xmlns:p14="http://schemas.microsoft.com/office/powerpoint/2010/main" val="1950442400"/>
+      </p:ext>
+    </p:extLst>
+  </p:cSld>
+  <p:clrMapOvr>
+    <a:masterClrMapping/>
+  </p:clrMapOvr>
+</p:sld>
+</file>
+
+<file path=ppt/slides/slide21.xml><?xml version="1.0" encoding="utf-8"?>
+<p:sld xmlns:a="http://schemas.openxmlformats.org/drawingml/2006/main" xmlns:r="http://schemas.openxmlformats.org/officeDocument/2006/relationships" xmlns:p="http://schemas.openxmlformats.org/presentationml/2006/main">
+  <p:cSld>
+    <p:spTree>
+      <p:nvGrpSpPr>
+        <p:cNvPr id="1" name=""/>
+        <p:cNvGrpSpPr/>
+        <p:nvPr/>
+      </p:nvGrpSpPr>
+      <p:grpSpPr>
+        <a:xfrm>
+          <a:off x="0" y="0"/>
+          <a:ext cx="0" cy="0"/>
+          <a:chOff x="0" y="0"/>
+          <a:chExt cx="0" cy="0"/>
+        </a:xfrm>
+      </p:grpSpPr>
+      <p:sp>
+        <p:nvSpPr>
+          <p:cNvPr id="3" name="object 3"/>
+          <p:cNvSpPr/>
+          <p:nvPr/>
+        </p:nvSpPr>
+        <p:spPr>
+          <a:xfrm>
+            <a:off x="3945637" y="2655200"/>
+            <a:ext cx="8246363" cy="1584959"/>
+          </a:xfrm>
+          <a:prstGeom prst="rect">
+            <a:avLst/>
+          </a:prstGeom>
+          <a:blipFill>
+            <a:blip r:embed="rId2" cstate="print"/>
+            <a:stretch>
+              <a:fillRect/>
+            </a:stretch>
+          </a:blipFill>
+        </p:spPr>
+        <p:txBody>
+          <a:bodyPr wrap="square" lIns="0" tIns="0" rIns="0" bIns="0" rtlCol="0"/>
+          <a:lstStyle/>
+          <a:p>
+            <a:endParaRPr/>
+          </a:p>
+        </p:txBody>
+      </p:sp>
+      <p:sp>
+        <p:nvSpPr>
+          <p:cNvPr id="4" name="object 4"/>
+          <p:cNvSpPr txBox="1">
+            <a:spLocks noGrp="1"/>
+          </p:cNvSpPr>
+          <p:nvPr>
+            <p:ph type="title"/>
+          </p:nvPr>
+        </p:nvSpPr>
+        <p:spPr>
+          <a:xfrm>
+            <a:off x="4513326" y="3165729"/>
+            <a:ext cx="2233295" cy="513715"/>
+          </a:xfrm>
+          <a:prstGeom prst="rect">
+            <a:avLst/>
+          </a:prstGeom>
+        </p:spPr>
+        <p:txBody>
+          <a:bodyPr vert="horz" wrap="square" lIns="0" tIns="13335" rIns="0" bIns="0" rtlCol="0">
+            <a:spAutoFit/>
+          </a:bodyPr>
+          <a:lstStyle/>
+          <a:p>
+            <a:pPr marL="12700">
+              <a:lnSpc>
+                <a:spcPct val="100000"/>
+              </a:lnSpc>
+              <a:spcBef>
+                <a:spcPts val="105"/>
+              </a:spcBef>
+            </a:pPr>
+            <a:r>
+              <a:rPr sz="3200" b="1" spc="-5" dirty="0">
+                <a:solidFill>
+                  <a:srgbClr val="FFFFFF"/>
+                </a:solidFill>
+                <a:latin typeface="Lucida Sans"/>
+                <a:cs typeface="Lucida Sans"/>
+              </a:rPr>
+              <a:t>Thank</a:t>
+            </a:r>
+            <a:r>
+              <a:rPr sz="3200" b="1" spc="-55" dirty="0">
+                <a:solidFill>
+                  <a:srgbClr val="FFFFFF"/>
+                </a:solidFill>
+                <a:latin typeface="Lucida Sans"/>
+                <a:cs typeface="Lucida Sans"/>
+              </a:rPr>
+              <a:t> </a:t>
+            </a:r>
+            <a:r>
+              <a:rPr sz="3200" b="1" dirty="0">
+                <a:solidFill>
+                  <a:srgbClr val="FFFFFF"/>
+                </a:solidFill>
+                <a:latin typeface="Lucida Sans"/>
+                <a:cs typeface="Lucida Sans"/>
+              </a:rPr>
+              <a:t>you</a:t>
+            </a:r>
+            <a:endParaRPr sz="3200" dirty="0">
+              <a:latin typeface="Lucida Sans"/>
+              <a:cs typeface="Lucida Sans"/>
+            </a:endParaRPr>
+          </a:p>
+        </p:txBody>
+      </p:sp>
+      <p:sp>
+        <p:nvSpPr>
+          <p:cNvPr id="5" name="Marcador de número de diapositiva 4">
+            <a:extLst>
+              <a:ext uri="{FF2B5EF4-FFF2-40B4-BE49-F238E27FC236}">
+                <a16:creationId xmlns:a16="http://schemas.microsoft.com/office/drawing/2014/main" id="{B052DA19-AD24-7D24-2AE9-51F8F5A7F5E0}"/>
+              </a:ext>
+            </a:extLst>
+          </p:cNvPr>
+          <p:cNvSpPr>
+            <a:spLocks noGrp="1"/>
+          </p:cNvSpPr>
+          <p:nvPr>
+            <p:ph type="sldNum" sz="quarter" idx="7"/>
+          </p:nvPr>
+        </p:nvSpPr>
+        <p:spPr/>
+        <p:txBody>
+          <a:bodyPr/>
+          <a:lstStyle/>
+          <a:p>
+            <a:fld id="{B6F15528-21DE-4FAA-801E-634DDDAF4B2B}" type="slidenum">
+              <a:rPr lang="es-ES" smtClean="0"/>
+              <a:t>21</a:t>
+            </a:fld>
+            <a:endParaRPr lang="es-ES"/>
+          </a:p>
+        </p:txBody>
+      </p:sp>
+      <p:sp>
+        <p:nvSpPr>
+          <p:cNvPr id="6" name="CuadroTexto 5">
+            <a:extLst>
+              <a:ext uri="{FF2B5EF4-FFF2-40B4-BE49-F238E27FC236}">
+                <a16:creationId xmlns:a16="http://schemas.microsoft.com/office/drawing/2014/main" id="{30DB343B-A24E-A634-93E8-282DB996B142}"/>
+              </a:ext>
+            </a:extLst>
+          </p:cNvPr>
+          <p:cNvSpPr txBox="1"/>
+          <p:nvPr/>
+        </p:nvSpPr>
+        <p:spPr>
+          <a:xfrm>
+            <a:off x="1452886" y="312322"/>
+            <a:ext cx="6120880" cy="2308324"/>
+          </a:xfrm>
+          <a:prstGeom prst="rect">
+            <a:avLst/>
+          </a:prstGeom>
+          <a:noFill/>
+        </p:spPr>
+        <p:txBody>
+          <a:bodyPr wrap="square">
+            <a:spAutoFit/>
+          </a:bodyPr>
+          <a:lstStyle/>
+          <a:p>
+            <a:r>
+              <a:rPr lang="es-ES" b="1" dirty="0" err="1"/>
+              <a:t>git</a:t>
+            </a:r>
+            <a:r>
+              <a:rPr lang="es-ES" b="1" dirty="0"/>
+              <a:t> </a:t>
+            </a:r>
+            <a:r>
+              <a:rPr lang="es-ES" b="1" dirty="0" err="1"/>
+              <a:t>config</a:t>
+            </a:r>
+            <a:r>
+              <a:rPr lang="es-ES" b="1" dirty="0"/>
+              <a:t> --global user.name "{Tu nombre de usuario}"</a:t>
+            </a:r>
+            <a:endParaRPr lang="es-ES" dirty="0"/>
+          </a:p>
+          <a:p>
+            <a:r>
+              <a:rPr lang="es-ES" dirty="0"/>
+              <a:t> </a:t>
+            </a:r>
+          </a:p>
+          <a:p>
+            <a:pPr>
+              <a:buNone/>
+            </a:pPr>
+            <a:r>
+              <a:rPr lang="en-US" dirty="0">
+                <a:effectLst/>
+                <a:latin typeface="-apple-system"/>
+              </a:rPr>
+              <a:t>git add -A</a:t>
+            </a:r>
+          </a:p>
+          <a:p>
+            <a:pPr>
+              <a:buNone/>
+            </a:pPr>
+            <a:r>
+              <a:rPr lang="en-US" dirty="0">
+                <a:effectLst/>
+                <a:latin typeface="-apple-system"/>
+              </a:rPr>
+              <a:t> </a:t>
+            </a:r>
+          </a:p>
+          <a:p>
+            <a:pPr>
+              <a:buNone/>
+            </a:pPr>
+            <a:r>
+              <a:rPr lang="en-US" dirty="0">
+                <a:effectLst/>
+                <a:latin typeface="-apple-system"/>
+              </a:rPr>
+              <a:t>git commit -m "</a:t>
+            </a:r>
+            <a:r>
+              <a:rPr lang="en-US" dirty="0" err="1">
+                <a:effectLst/>
+                <a:latin typeface="-apple-system"/>
+              </a:rPr>
+              <a:t>cambios</a:t>
+            </a:r>
+            <a:r>
+              <a:rPr lang="en-US" dirty="0">
+                <a:effectLst/>
+                <a:latin typeface="-apple-system"/>
+              </a:rPr>
+              <a:t>"</a:t>
+            </a:r>
+          </a:p>
+          <a:p>
+            <a:pPr>
+              <a:buNone/>
+            </a:pPr>
+            <a:r>
+              <a:rPr lang="en-US" dirty="0">
+                <a:effectLst/>
+                <a:latin typeface="-apple-system"/>
+              </a:rPr>
+              <a:t> </a:t>
+            </a:r>
+          </a:p>
+          <a:p>
+            <a:pPr>
+              <a:buNone/>
+            </a:pPr>
+            <a:r>
+              <a:rPr lang="en-US" dirty="0">
+                <a:effectLst/>
+                <a:latin typeface="-apple-system"/>
+              </a:rPr>
+              <a:t>git push</a:t>
+            </a:r>
+          </a:p>
+          <a:p>
+            <a:pPr>
+              <a:buNone/>
+            </a:pPr>
+            <a:r>
+              <a:rPr lang="en-US" dirty="0">
+                <a:effectLst/>
+                <a:latin typeface="-apple-system"/>
+              </a:rPr>
+              <a:t> </a:t>
+            </a:r>
+            <a:endParaRPr lang="es-ES" dirty="0"/>
+          </a:p>
+        </p:txBody>
+      </p:sp>
+    </p:spTree>
+  </p:cSld>
+  <p:clrMapOvr>
+    <a:masterClrMapping/>
+  </p:clrMapOvr>
+</p:sld>
+</file>
+
 <file path=ppt/slides/slide3.xml><?xml version="1.0" encoding="utf-8"?>
 <p:sld xmlns:a="http://schemas.openxmlformats.org/drawingml/2006/main" xmlns:r="http://schemas.openxmlformats.org/officeDocument/2006/relationships" xmlns:p="http://schemas.openxmlformats.org/presentationml/2006/main">
   <p:cSld>
@@ -13153,114 +17509,118 @@
           </a:p>
         </p:txBody>
       </p:sp>
-      <p:sp>
-        <p:nvSpPr>
-          <p:cNvPr id="2" name="CuadroTexto 1">
+      <p:pic>
+        <p:nvPicPr>
+          <p:cNvPr id="8" name="Imagen 7">
             <a:extLst>
               <a:ext uri="{FF2B5EF4-FFF2-40B4-BE49-F238E27FC236}">
-                <a16:creationId xmlns:a16="http://schemas.microsoft.com/office/drawing/2014/main" id="{FA4BDF88-73DC-AAF8-4E1D-3CE69A3FDCD6}"/>
+                <a16:creationId xmlns:a16="http://schemas.microsoft.com/office/drawing/2014/main" id="{4290CEDA-BF0E-0765-1CCF-833DB85E2803}"/>
               </a:ext>
             </a:extLst>
           </p:cNvPr>
-          <p:cNvSpPr txBox="1"/>
+          <p:cNvPicPr>
+            <a:picLocks noChangeAspect="1"/>
+          </p:cNvPicPr>
+          <p:nvPr/>
+        </p:nvPicPr>
+        <p:blipFill>
+          <a:blip r:embed="rId5"/>
+          <a:stretch>
+            <a:fillRect/>
+          </a:stretch>
+        </p:blipFill>
+        <p:spPr>
+          <a:xfrm>
+            <a:off x="637558" y="1407136"/>
+            <a:ext cx="4800600" cy="3460360"/>
+          </a:xfrm>
+          <a:prstGeom prst="rect">
+            <a:avLst/>
+          </a:prstGeom>
+        </p:spPr>
+      </p:pic>
+      <p:sp>
+        <p:nvSpPr>
+          <p:cNvPr id="9" name="Rectángulo 8">
+            <a:extLst>
+              <a:ext uri="{FF2B5EF4-FFF2-40B4-BE49-F238E27FC236}">
+                <a16:creationId xmlns:a16="http://schemas.microsoft.com/office/drawing/2014/main" id="{8595B854-F9A4-AFC2-E7A6-8223608964F6}"/>
+              </a:ext>
+            </a:extLst>
+          </p:cNvPr>
+          <p:cNvSpPr/>
           <p:nvPr/>
         </p:nvSpPr>
         <p:spPr>
           <a:xfrm>
-            <a:off x="609441" y="4860334"/>
-            <a:ext cx="11199971" cy="1200329"/>
+            <a:off x="604902" y="1320216"/>
+            <a:ext cx="10422293" cy="3690790"/>
           </a:xfrm>
           <a:prstGeom prst="rect">
             <a:avLst/>
           </a:prstGeom>
-          <a:solidFill>
-            <a:schemeClr val="bg1">
-              <a:lumMod val="95000"/>
-            </a:schemeClr>
-          </a:solidFill>
+          <a:noFill/>
           <a:ln w="28575">
             <a:solidFill>
               <a:srgbClr val="E0700D"/>
             </a:solidFill>
           </a:ln>
         </p:spPr>
+        <p:style>
+          <a:lnRef idx="2">
+            <a:schemeClr val="accent1">
+              <a:shade val="15000"/>
+            </a:schemeClr>
+          </a:lnRef>
+          <a:fillRef idx="1">
+            <a:schemeClr val="accent1"/>
+          </a:fillRef>
+          <a:effectRef idx="0">
+            <a:schemeClr val="accent1"/>
+          </a:effectRef>
+          <a:fontRef idx="minor">
+            <a:schemeClr val="lt1"/>
+          </a:fontRef>
+        </p:style>
         <p:txBody>
-          <a:bodyPr wrap="square" rtlCol="0">
-            <a:spAutoFit/>
-          </a:bodyPr>
+          <a:bodyPr rtlCol="0" anchor="ctr"/>
           <a:lstStyle/>
           <a:p>
-            <a:pPr algn="just"/>
-            <a:r>
-              <a:rPr lang="en-US" sz="1200" dirty="0">
-                <a:latin typeface="Arial" panose="020B0604020202020204" pitchFamily="34" charset="0"/>
-                <a:cs typeface="Arial" panose="020B0604020202020204" pitchFamily="34" charset="0"/>
-              </a:rPr>
-              <a:t>Document all your results (neff, plot fields </a:t>
-            </a:r>
-            <a:r>
-              <a:rPr lang="en-US" sz="1200">
-                <a:latin typeface="Arial" panose="020B0604020202020204" pitchFamily="34" charset="0"/>
-                <a:cs typeface="Arial" panose="020B0604020202020204" pitchFamily="34" charset="0"/>
-              </a:rPr>
-              <a:t>of different modes, </a:t>
-            </a:r>
-            <a:r>
-              <a:rPr lang="en-US" sz="1200" dirty="0">
-                <a:latin typeface="Arial" panose="020B0604020202020204" pitchFamily="34" charset="0"/>
-                <a:cs typeface="Arial" panose="020B0604020202020204" pitchFamily="34" charset="0"/>
-              </a:rPr>
-              <a:t>comparison between </a:t>
-            </a:r>
-            <a:r>
-              <a:rPr lang="en-US" sz="1200">
-                <a:latin typeface="Arial" panose="020B0604020202020204" pitchFamily="34" charset="0"/>
-                <a:cs typeface="Arial" panose="020B0604020202020204" pitchFamily="34" charset="0"/>
-              </a:rPr>
-              <a:t>different polarizations…)</a:t>
-            </a:r>
-            <a:endParaRPr lang="en-US" sz="1200" dirty="0">
-              <a:latin typeface="Arial" panose="020B0604020202020204" pitchFamily="34" charset="0"/>
-              <a:cs typeface="Arial" panose="020B0604020202020204" pitchFamily="34" charset="0"/>
-            </a:endParaRPr>
-          </a:p>
-          <a:p>
-            <a:pPr algn="just"/>
-            <a:endParaRPr lang="en-US" sz="1200" dirty="0">
-              <a:latin typeface="Arial" panose="020B0604020202020204" pitchFamily="34" charset="0"/>
-              <a:cs typeface="Arial" panose="020B0604020202020204" pitchFamily="34" charset="0"/>
-            </a:endParaRPr>
-          </a:p>
-          <a:p>
-            <a:pPr algn="just"/>
-            <a:endParaRPr lang="en-US" sz="1200" dirty="0">
-              <a:latin typeface="Arial" panose="020B0604020202020204" pitchFamily="34" charset="0"/>
-              <a:cs typeface="Arial" panose="020B0604020202020204" pitchFamily="34" charset="0"/>
-            </a:endParaRPr>
-          </a:p>
-          <a:p>
-            <a:pPr algn="just"/>
-            <a:endParaRPr lang="en-US" sz="1200" dirty="0">
-              <a:latin typeface="Arial" panose="020B0604020202020204" pitchFamily="34" charset="0"/>
-              <a:cs typeface="Arial" panose="020B0604020202020204" pitchFamily="34" charset="0"/>
-            </a:endParaRPr>
-          </a:p>
-          <a:p>
-            <a:pPr algn="just"/>
-            <a:endParaRPr lang="en-US" sz="1200" dirty="0">
-              <a:latin typeface="Arial" panose="020B0604020202020204" pitchFamily="34" charset="0"/>
-              <a:cs typeface="Arial" panose="020B0604020202020204" pitchFamily="34" charset="0"/>
-            </a:endParaRPr>
-          </a:p>
-          <a:p>
-            <a:pPr algn="just"/>
-            <a:endParaRPr lang="en-US" sz="1200" dirty="0">
-              <a:latin typeface="Arial" panose="020B0604020202020204" pitchFamily="34" charset="0"/>
-              <a:cs typeface="Arial" panose="020B0604020202020204" pitchFamily="34" charset="0"/>
-            </a:endParaRPr>
+            <a:pPr algn="ctr"/>
+            <a:endParaRPr lang="en-US"/>
           </a:p>
         </p:txBody>
       </p:sp>
+      <p:pic>
+        <p:nvPicPr>
+          <p:cNvPr id="12" name="Imagen 11">
+            <a:extLst>
+              <a:ext uri="{FF2B5EF4-FFF2-40B4-BE49-F238E27FC236}">
+                <a16:creationId xmlns:a16="http://schemas.microsoft.com/office/drawing/2014/main" id="{61874B49-0E19-2A68-B2AC-5618882D4A18}"/>
+              </a:ext>
+            </a:extLst>
+          </p:cNvPr>
+          <p:cNvPicPr>
+            <a:picLocks noChangeAspect="1"/>
+          </p:cNvPicPr>
+          <p:nvPr/>
+        </p:nvPicPr>
+        <p:blipFill>
+          <a:blip r:embed="rId6"/>
+          <a:stretch>
+            <a:fillRect/>
+          </a:stretch>
+        </p:blipFill>
+        <p:spPr>
+          <a:xfrm>
+            <a:off x="5559490" y="1407136"/>
+            <a:ext cx="5327781" cy="3460360"/>
+          </a:xfrm>
+          <a:prstGeom prst="rect">
+            <a:avLst/>
+          </a:prstGeom>
+        </p:spPr>
+      </p:pic>
     </p:spTree>
     <p:extLst>
       <p:ext uri="{BB962C8B-B14F-4D97-AF65-F5344CB8AC3E}">
@@ -14830,1737 +19190,1680 @@
           </a:p>
         </p:txBody>
       </p:sp>
-      <mc:AlternateContent xmlns:mc="http://schemas.openxmlformats.org/markup-compatibility/2006" xmlns:a14="http://schemas.microsoft.com/office/drawing/2010/main">
-        <mc:Choice Requires="a14">
-          <p:sp>
-            <p:nvSpPr>
-              <p:cNvPr id="2" name="CuadroTexto 1">
-                <a:extLst>
-                  <a:ext uri="{FF2B5EF4-FFF2-40B4-BE49-F238E27FC236}">
-                    <a16:creationId xmlns:a16="http://schemas.microsoft.com/office/drawing/2014/main" id="{6D243C48-D0CB-2131-C493-8E5DFCAD1557}"/>
-                  </a:ext>
-                </a:extLst>
-              </p:cNvPr>
-              <p:cNvSpPr txBox="1"/>
-              <p:nvPr/>
-            </p:nvSpPr>
-            <p:spPr>
-              <a:xfrm>
-                <a:off x="685798" y="2183808"/>
-                <a:ext cx="11199971" cy="2456313"/>
-              </a:xfrm>
-              <a:prstGeom prst="rect">
-                <a:avLst/>
-              </a:prstGeom>
-              <a:solidFill>
-                <a:schemeClr val="bg1">
-                  <a:lumMod val="95000"/>
-                </a:schemeClr>
-              </a:solidFill>
-              <a:ln w="28575">
-                <a:solidFill>
-                  <a:srgbClr val="E0700D"/>
-                </a:solidFill>
-              </a:ln>
-            </p:spPr>
-            <p:txBody>
-              <a:bodyPr wrap="square" rtlCol="0">
-                <a:spAutoFit/>
-              </a:bodyPr>
-              <a:lstStyle/>
-              <a:p>
-                <a:pPr algn="just"/>
-                <a:r>
-                  <a:rPr lang="en-US" sz="1200" dirty="0">
-                    <a:latin typeface="Arial" panose="020B0604020202020204" pitchFamily="34" charset="0"/>
-                    <a:cs typeface="Arial" panose="020B0604020202020204" pitchFamily="34" charset="0"/>
-                  </a:rPr>
-                  <a:t>En primer </a:t>
-                </a:r>
-                <a:r>
-                  <a:rPr lang="en-US" sz="1200" dirty="0" err="1">
-                    <a:latin typeface="Arial" panose="020B0604020202020204" pitchFamily="34" charset="0"/>
-                    <a:cs typeface="Arial" panose="020B0604020202020204" pitchFamily="34" charset="0"/>
-                  </a:rPr>
-                  <a:t>lugar</a:t>
-                </a:r>
-                <a:r>
-                  <a:rPr lang="en-US" sz="1200" dirty="0">
-                    <a:latin typeface="Arial" panose="020B0604020202020204" pitchFamily="34" charset="0"/>
-                    <a:cs typeface="Arial" panose="020B0604020202020204" pitchFamily="34" charset="0"/>
-                  </a:rPr>
-                  <a:t>, </a:t>
-                </a:r>
-                <a:r>
-                  <a:rPr lang="en-US" sz="1200" dirty="0" err="1">
-                    <a:latin typeface="Arial" panose="020B0604020202020204" pitchFamily="34" charset="0"/>
-                    <a:cs typeface="Arial" panose="020B0604020202020204" pitchFamily="34" charset="0"/>
-                  </a:rPr>
-                  <a:t>podemos</a:t>
-                </a:r>
-                <a:r>
-                  <a:rPr lang="en-US" sz="1200" dirty="0">
-                    <a:latin typeface="Arial" panose="020B0604020202020204" pitchFamily="34" charset="0"/>
-                    <a:cs typeface="Arial" panose="020B0604020202020204" pitchFamily="34" charset="0"/>
-                  </a:rPr>
-                  <a:t> </a:t>
-                </a:r>
-                <a:r>
-                  <a:rPr lang="en-US" sz="1200" dirty="0" err="1">
-                    <a:latin typeface="Arial" panose="020B0604020202020204" pitchFamily="34" charset="0"/>
-                    <a:cs typeface="Arial" panose="020B0604020202020204" pitchFamily="34" charset="0"/>
-                  </a:rPr>
-                  <a:t>ver</a:t>
-                </a:r>
-                <a:r>
-                  <a:rPr lang="en-US" sz="1200" dirty="0">
-                    <a:latin typeface="Arial" panose="020B0604020202020204" pitchFamily="34" charset="0"/>
-                    <a:cs typeface="Arial" panose="020B0604020202020204" pitchFamily="34" charset="0"/>
-                  </a:rPr>
-                  <a:t> </a:t>
-                </a:r>
-                <a:r>
-                  <a:rPr lang="en-US" sz="1200" dirty="0" err="1">
-                    <a:latin typeface="Arial" panose="020B0604020202020204" pitchFamily="34" charset="0"/>
-                    <a:cs typeface="Arial" panose="020B0604020202020204" pitchFamily="34" charset="0"/>
-                  </a:rPr>
-                  <a:t>como</a:t>
-                </a:r>
-                <a:r>
-                  <a:rPr lang="en-US" sz="1200" dirty="0">
-                    <a:latin typeface="Arial" panose="020B0604020202020204" pitchFamily="34" charset="0"/>
-                    <a:cs typeface="Arial" panose="020B0604020202020204" pitchFamily="34" charset="0"/>
-                  </a:rPr>
-                  <a:t> para la </a:t>
-                </a:r>
-                <a:r>
-                  <a:rPr lang="en-US" sz="1200" dirty="0" err="1">
-                    <a:latin typeface="Arial" panose="020B0604020202020204" pitchFamily="34" charset="0"/>
-                    <a:cs typeface="Arial" panose="020B0604020202020204" pitchFamily="34" charset="0"/>
-                  </a:rPr>
-                  <a:t>guia</a:t>
-                </a:r>
-                <a:r>
-                  <a:rPr lang="en-US" sz="1200" dirty="0">
-                    <a:latin typeface="Arial" panose="020B0604020202020204" pitchFamily="34" charset="0"/>
-                    <a:cs typeface="Arial" panose="020B0604020202020204" pitchFamily="34" charset="0"/>
-                  </a:rPr>
-                  <a:t> de </a:t>
-                </a:r>
-                <a:r>
-                  <a:rPr lang="en-US" sz="1200" dirty="0" err="1">
-                    <a:latin typeface="Arial" panose="020B0604020202020204" pitchFamily="34" charset="0"/>
-                    <a:cs typeface="Arial" panose="020B0604020202020204" pitchFamily="34" charset="0"/>
-                  </a:rPr>
-                  <a:t>onda</a:t>
-                </a:r>
-                <a:r>
-                  <a:rPr lang="en-US" sz="1200" dirty="0">
-                    <a:latin typeface="Arial" panose="020B0604020202020204" pitchFamily="34" charset="0"/>
-                    <a:cs typeface="Arial" panose="020B0604020202020204" pitchFamily="34" charset="0"/>
-                  </a:rPr>
-                  <a:t> deep </a:t>
-                </a:r>
-                <a:r>
-                  <a:rPr lang="en-US" sz="1200" dirty="0" err="1">
-                    <a:latin typeface="Arial" panose="020B0604020202020204" pitchFamily="34" charset="0"/>
-                    <a:cs typeface="Arial" panose="020B0604020202020204" pitchFamily="34" charset="0"/>
-                  </a:rPr>
-                  <a:t>solamente</a:t>
-                </a:r>
-                <a:r>
-                  <a:rPr lang="en-US" sz="1200" dirty="0">
-                    <a:latin typeface="Arial" panose="020B0604020202020204" pitchFamily="34" charset="0"/>
-                    <a:cs typeface="Arial" panose="020B0604020202020204" pitchFamily="34" charset="0"/>
-                  </a:rPr>
-                  <a:t> se </a:t>
-                </a:r>
-                <a:r>
-                  <a:rPr lang="en-US" sz="1200" dirty="0" err="1">
-                    <a:latin typeface="Arial" panose="020B0604020202020204" pitchFamily="34" charset="0"/>
-                    <a:cs typeface="Arial" panose="020B0604020202020204" pitchFamily="34" charset="0"/>
-                  </a:rPr>
-                  <a:t>propaga</a:t>
-                </a:r>
-                <a:r>
-                  <a:rPr lang="en-US" sz="1200" dirty="0">
-                    <a:latin typeface="Arial" panose="020B0604020202020204" pitchFamily="34" charset="0"/>
-                    <a:cs typeface="Arial" panose="020B0604020202020204" pitchFamily="34" charset="0"/>
-                  </a:rPr>
-                  <a:t> </a:t>
-                </a:r>
-                <a:r>
-                  <a:rPr lang="en-US" sz="1200" dirty="0" err="1">
-                    <a:latin typeface="Arial" panose="020B0604020202020204" pitchFamily="34" charset="0"/>
-                    <a:cs typeface="Arial" panose="020B0604020202020204" pitchFamily="34" charset="0"/>
-                  </a:rPr>
-                  <a:t>el</a:t>
-                </a:r>
-                <a:r>
-                  <a:rPr lang="en-US" sz="1200" dirty="0">
-                    <a:latin typeface="Arial" panose="020B0604020202020204" pitchFamily="34" charset="0"/>
-                    <a:cs typeface="Arial" panose="020B0604020202020204" pitchFamily="34" charset="0"/>
-                  </a:rPr>
-                  <a:t> modo 0 y 1, </a:t>
-                </a:r>
-                <a:r>
-                  <a:rPr lang="en-US" sz="1200" dirty="0" err="1">
-                    <a:latin typeface="Arial" panose="020B0604020202020204" pitchFamily="34" charset="0"/>
-                    <a:cs typeface="Arial" panose="020B0604020202020204" pitchFamily="34" charset="0"/>
-                  </a:rPr>
-                  <a:t>mientras</a:t>
-                </a:r>
-                <a:r>
-                  <a:rPr lang="en-US" sz="1200" dirty="0">
-                    <a:latin typeface="Arial" panose="020B0604020202020204" pitchFamily="34" charset="0"/>
-                    <a:cs typeface="Arial" panose="020B0604020202020204" pitchFamily="34" charset="0"/>
-                  </a:rPr>
-                  <a:t> </a:t>
-                </a:r>
-                <a:r>
-                  <a:rPr lang="en-US" sz="1200" dirty="0" err="1">
-                    <a:latin typeface="Arial" panose="020B0604020202020204" pitchFamily="34" charset="0"/>
-                    <a:cs typeface="Arial" panose="020B0604020202020204" pitchFamily="34" charset="0"/>
-                  </a:rPr>
-                  <a:t>que</a:t>
-                </a:r>
-                <a:r>
-                  <a:rPr lang="en-US" sz="1200" dirty="0">
-                    <a:latin typeface="Arial" panose="020B0604020202020204" pitchFamily="34" charset="0"/>
-                    <a:cs typeface="Arial" panose="020B0604020202020204" pitchFamily="34" charset="0"/>
-                  </a:rPr>
-                  <a:t> </a:t>
-                </a:r>
-                <a:r>
-                  <a:rPr lang="en-US" sz="1200" dirty="0" err="1">
-                    <a:latin typeface="Arial" panose="020B0604020202020204" pitchFamily="34" charset="0"/>
-                    <a:cs typeface="Arial" panose="020B0604020202020204" pitchFamily="34" charset="0"/>
-                  </a:rPr>
-                  <a:t>por</a:t>
-                </a:r>
-                <a:r>
-                  <a:rPr lang="en-US" sz="1200" dirty="0">
-                    <a:latin typeface="Arial" panose="020B0604020202020204" pitchFamily="34" charset="0"/>
-                    <a:cs typeface="Arial" panose="020B0604020202020204" pitchFamily="34" charset="0"/>
-                  </a:rPr>
-                  <a:t> </a:t>
-                </a:r>
-                <a:r>
-                  <a:rPr lang="en-US" sz="1200" dirty="0" err="1">
-                    <a:latin typeface="Arial" panose="020B0604020202020204" pitchFamily="34" charset="0"/>
-                    <a:cs typeface="Arial" panose="020B0604020202020204" pitchFamily="34" charset="0"/>
-                  </a:rPr>
-                  <a:t>otro</a:t>
-                </a:r>
-                <a:r>
-                  <a:rPr lang="en-US" sz="1200" dirty="0">
-                    <a:latin typeface="Arial" panose="020B0604020202020204" pitchFamily="34" charset="0"/>
-                    <a:cs typeface="Arial" panose="020B0604020202020204" pitchFamily="34" charset="0"/>
-                  </a:rPr>
-                  <a:t> ado, para la </a:t>
-                </a:r>
-                <a:r>
-                  <a:rPr lang="en-US" sz="1200" dirty="0" err="1">
-                    <a:latin typeface="Arial" panose="020B0604020202020204" pitchFamily="34" charset="0"/>
-                    <a:cs typeface="Arial" panose="020B0604020202020204" pitchFamily="34" charset="0"/>
-                  </a:rPr>
-                  <a:t>guia</a:t>
-                </a:r>
-                <a:r>
-                  <a:rPr lang="en-US" sz="1200" dirty="0">
-                    <a:latin typeface="Arial" panose="020B0604020202020204" pitchFamily="34" charset="0"/>
-                    <a:cs typeface="Arial" panose="020B0604020202020204" pitchFamily="34" charset="0"/>
-                  </a:rPr>
-                  <a:t> de </a:t>
-                </a:r>
-                <a:r>
-                  <a:rPr lang="en-US" sz="1200" dirty="0" err="1">
-                    <a:latin typeface="Arial" panose="020B0604020202020204" pitchFamily="34" charset="0"/>
-                    <a:cs typeface="Arial" panose="020B0604020202020204" pitchFamily="34" charset="0"/>
-                  </a:rPr>
-                  <a:t>onda</a:t>
-                </a:r>
-                <a:r>
-                  <a:rPr lang="en-US" sz="1200" dirty="0">
-                    <a:latin typeface="Arial" panose="020B0604020202020204" pitchFamily="34" charset="0"/>
-                    <a:cs typeface="Arial" panose="020B0604020202020204" pitchFamily="34" charset="0"/>
-                  </a:rPr>
-                  <a:t> shallow se </a:t>
-                </a:r>
-                <a:r>
-                  <a:rPr lang="en-US" sz="1200" dirty="0" err="1">
-                    <a:latin typeface="Arial" panose="020B0604020202020204" pitchFamily="34" charset="0"/>
-                    <a:cs typeface="Arial" panose="020B0604020202020204" pitchFamily="34" charset="0"/>
-                  </a:rPr>
-                  <a:t>propagan</a:t>
-                </a:r>
-                <a:r>
-                  <a:rPr lang="en-US" sz="1200" dirty="0">
-                    <a:latin typeface="Arial" panose="020B0604020202020204" pitchFamily="34" charset="0"/>
-                    <a:cs typeface="Arial" panose="020B0604020202020204" pitchFamily="34" charset="0"/>
-                  </a:rPr>
-                  <a:t> </a:t>
-                </a:r>
-                <a:r>
-                  <a:rPr lang="en-US" sz="1200" dirty="0" err="1">
-                    <a:latin typeface="Arial" panose="020B0604020202020204" pitchFamily="34" charset="0"/>
-                    <a:cs typeface="Arial" panose="020B0604020202020204" pitchFamily="34" charset="0"/>
-                  </a:rPr>
-                  <a:t>todas</a:t>
-                </a:r>
-                <a:r>
-                  <a:rPr lang="en-US" sz="1200" dirty="0">
-                    <a:latin typeface="Arial" panose="020B0604020202020204" pitchFamily="34" charset="0"/>
-                    <a:cs typeface="Arial" panose="020B0604020202020204" pitchFamily="34" charset="0"/>
-                  </a:rPr>
-                  <a:t>. </a:t>
-                </a:r>
-              </a:p>
-              <a:p>
-                <a:pPr algn="just"/>
-                <a:r>
-                  <a:rPr lang="en-US" sz="1200" dirty="0">
-                    <a:latin typeface="Arial" panose="020B0604020202020204" pitchFamily="34" charset="0"/>
-                    <a:cs typeface="Arial" panose="020B0604020202020204" pitchFamily="34" charset="0"/>
-                  </a:rPr>
-                  <a:t>Para </a:t>
-                </a:r>
-                <a:r>
-                  <a:rPr lang="en-US" sz="1200" dirty="0" err="1">
-                    <a:latin typeface="Arial" panose="020B0604020202020204" pitchFamily="34" charset="0"/>
-                    <a:cs typeface="Arial" panose="020B0604020202020204" pitchFamily="34" charset="0"/>
-                  </a:rPr>
-                  <a:t>entender</a:t>
-                </a:r>
-                <a:r>
-                  <a:rPr lang="en-US" sz="1200" dirty="0">
-                    <a:latin typeface="Arial" panose="020B0604020202020204" pitchFamily="34" charset="0"/>
-                    <a:cs typeface="Arial" panose="020B0604020202020204" pitchFamily="34" charset="0"/>
-                  </a:rPr>
-                  <a:t> </a:t>
-                </a:r>
-                <a:r>
-                  <a:rPr lang="en-US" sz="1200" dirty="0" err="1">
-                    <a:latin typeface="Arial" panose="020B0604020202020204" pitchFamily="34" charset="0"/>
-                    <a:cs typeface="Arial" panose="020B0604020202020204" pitchFamily="34" charset="0"/>
-                  </a:rPr>
-                  <a:t>esto</a:t>
-                </a:r>
-                <a:r>
-                  <a:rPr lang="en-US" sz="1200" dirty="0">
-                    <a:latin typeface="Arial" panose="020B0604020202020204" pitchFamily="34" charset="0"/>
-                    <a:cs typeface="Arial" panose="020B0604020202020204" pitchFamily="34" charset="0"/>
-                  </a:rPr>
-                  <a:t>, es </a:t>
-                </a:r>
-                <a:r>
-                  <a:rPr lang="en-US" sz="1200" dirty="0" err="1">
-                    <a:latin typeface="Arial" panose="020B0604020202020204" pitchFamily="34" charset="0"/>
-                    <a:cs typeface="Arial" panose="020B0604020202020204" pitchFamily="34" charset="0"/>
-                  </a:rPr>
-                  <a:t>necesario</a:t>
-                </a:r>
-                <a:r>
-                  <a:rPr lang="en-US" sz="1200" dirty="0">
-                    <a:latin typeface="Arial" panose="020B0604020202020204" pitchFamily="34" charset="0"/>
-                    <a:cs typeface="Arial" panose="020B0604020202020204" pitchFamily="34" charset="0"/>
-                  </a:rPr>
-                  <a:t> saber </a:t>
-                </a:r>
-                <a:r>
-                  <a:rPr lang="en-US" sz="1200" dirty="0" err="1">
-                    <a:latin typeface="Arial" panose="020B0604020202020204" pitchFamily="34" charset="0"/>
-                    <a:cs typeface="Arial" panose="020B0604020202020204" pitchFamily="34" charset="0"/>
-                  </a:rPr>
-                  <a:t>que</a:t>
-                </a:r>
-                <a:r>
-                  <a:rPr lang="en-US" sz="1200" dirty="0">
-                    <a:latin typeface="Arial" panose="020B0604020202020204" pitchFamily="34" charset="0"/>
-                    <a:cs typeface="Arial" panose="020B0604020202020204" pitchFamily="34" charset="0"/>
-                  </a:rPr>
-                  <a:t> para </a:t>
-                </a:r>
-                <a:r>
-                  <a:rPr lang="en-US" sz="1200" dirty="0" err="1">
-                    <a:latin typeface="Arial" panose="020B0604020202020204" pitchFamily="34" charset="0"/>
-                    <a:cs typeface="Arial" panose="020B0604020202020204" pitchFamily="34" charset="0"/>
-                  </a:rPr>
-                  <a:t>que</a:t>
-                </a:r>
-                <a:r>
-                  <a:rPr lang="en-US" sz="1200" dirty="0">
-                    <a:latin typeface="Arial" panose="020B0604020202020204" pitchFamily="34" charset="0"/>
-                    <a:cs typeface="Arial" panose="020B0604020202020204" pitchFamily="34" charset="0"/>
-                  </a:rPr>
-                  <a:t> se </a:t>
-                </a:r>
-                <a:r>
-                  <a:rPr lang="en-US" sz="1200" dirty="0" err="1">
-                    <a:latin typeface="Arial" panose="020B0604020202020204" pitchFamily="34" charset="0"/>
-                    <a:cs typeface="Arial" panose="020B0604020202020204" pitchFamily="34" charset="0"/>
-                  </a:rPr>
-                  <a:t>considere</a:t>
-                </a:r>
-                <a:r>
-                  <a:rPr lang="en-US" sz="1200" dirty="0">
-                    <a:latin typeface="Arial" panose="020B0604020202020204" pitchFamily="34" charset="0"/>
-                    <a:cs typeface="Arial" panose="020B0604020202020204" pitchFamily="34" charset="0"/>
-                  </a:rPr>
-                  <a:t> </a:t>
-                </a:r>
-                <a:r>
-                  <a:rPr lang="en-US" sz="1200" dirty="0" err="1">
-                    <a:latin typeface="Arial" panose="020B0604020202020204" pitchFamily="34" charset="0"/>
-                    <a:cs typeface="Arial" panose="020B0604020202020204" pitchFamily="34" charset="0"/>
-                  </a:rPr>
-                  <a:t>que</a:t>
-                </a:r>
-                <a:r>
-                  <a:rPr lang="en-US" sz="1200" dirty="0">
-                    <a:latin typeface="Arial" panose="020B0604020202020204" pitchFamily="34" charset="0"/>
-                    <a:cs typeface="Arial" panose="020B0604020202020204" pitchFamily="34" charset="0"/>
-                  </a:rPr>
-                  <a:t> un modo se </a:t>
-                </a:r>
-                <a:r>
-                  <a:rPr lang="en-US" sz="1200" dirty="0" err="1">
-                    <a:latin typeface="Arial" panose="020B0604020202020204" pitchFamily="34" charset="0"/>
-                    <a:cs typeface="Arial" panose="020B0604020202020204" pitchFamily="34" charset="0"/>
-                  </a:rPr>
-                  <a:t>está</a:t>
-                </a:r>
-                <a:r>
-                  <a:rPr lang="en-US" sz="1200" dirty="0">
-                    <a:latin typeface="Arial" panose="020B0604020202020204" pitchFamily="34" charset="0"/>
-                    <a:cs typeface="Arial" panose="020B0604020202020204" pitchFamily="34" charset="0"/>
-                  </a:rPr>
-                  <a:t> propaganda, </a:t>
-                </a:r>
-                <a:r>
-                  <a:rPr lang="en-US" sz="1200" dirty="0" err="1">
-                    <a:latin typeface="Arial" panose="020B0604020202020204" pitchFamily="34" charset="0"/>
-                    <a:cs typeface="Arial" panose="020B0604020202020204" pitchFamily="34" charset="0"/>
-                  </a:rPr>
-                  <a:t>su</a:t>
-                </a:r>
-                <a:r>
-                  <a:rPr lang="en-US" sz="1200" dirty="0">
-                    <a:latin typeface="Arial" panose="020B0604020202020204" pitchFamily="34" charset="0"/>
-                    <a:cs typeface="Arial" panose="020B0604020202020204" pitchFamily="34" charset="0"/>
-                  </a:rPr>
-                  <a:t> </a:t>
-                </a:r>
-                <a:r>
-                  <a:rPr lang="en-US" sz="1200" dirty="0" err="1">
-                    <a:latin typeface="Arial" panose="020B0604020202020204" pitchFamily="34" charset="0"/>
-                    <a:cs typeface="Arial" panose="020B0604020202020204" pitchFamily="34" charset="0"/>
-                  </a:rPr>
-                  <a:t>indice</a:t>
-                </a:r>
-                <a:r>
-                  <a:rPr lang="en-US" sz="1200" dirty="0">
-                    <a:latin typeface="Arial" panose="020B0604020202020204" pitchFamily="34" charset="0"/>
-                    <a:cs typeface="Arial" panose="020B0604020202020204" pitchFamily="34" charset="0"/>
-                  </a:rPr>
-                  <a:t> </a:t>
-                </a:r>
-                <a:r>
-                  <a:rPr lang="en-US" sz="1200" dirty="0" err="1">
-                    <a:latin typeface="Arial" panose="020B0604020202020204" pitchFamily="34" charset="0"/>
-                    <a:cs typeface="Arial" panose="020B0604020202020204" pitchFamily="34" charset="0"/>
-                  </a:rPr>
-                  <a:t>efectivo</a:t>
-                </a:r>
-                <a:r>
-                  <a:rPr lang="en-US" sz="1200" dirty="0">
-                    <a:latin typeface="Arial" panose="020B0604020202020204" pitchFamily="34" charset="0"/>
-                    <a:cs typeface="Arial" panose="020B0604020202020204" pitchFamily="34" charset="0"/>
-                  </a:rPr>
-                  <a:t> </a:t>
-                </a:r>
-                <a:r>
-                  <a:rPr lang="en-US" sz="1200" dirty="0" err="1">
-                    <a:latin typeface="Arial" panose="020B0604020202020204" pitchFamily="34" charset="0"/>
-                    <a:cs typeface="Arial" panose="020B0604020202020204" pitchFamily="34" charset="0"/>
-                  </a:rPr>
-                  <a:t>tiene</a:t>
-                </a:r>
-                <a:r>
-                  <a:rPr lang="en-US" sz="1200" dirty="0">
-                    <a:latin typeface="Arial" panose="020B0604020202020204" pitchFamily="34" charset="0"/>
-                    <a:cs typeface="Arial" panose="020B0604020202020204" pitchFamily="34" charset="0"/>
-                  </a:rPr>
-                  <a:t> </a:t>
-                </a:r>
-                <a:r>
-                  <a:rPr lang="en-US" sz="1200" dirty="0" err="1">
-                    <a:latin typeface="Arial" panose="020B0604020202020204" pitchFamily="34" charset="0"/>
-                    <a:cs typeface="Arial" panose="020B0604020202020204" pitchFamily="34" charset="0"/>
-                  </a:rPr>
-                  <a:t>que</a:t>
-                </a:r>
-                <a:r>
-                  <a:rPr lang="en-US" sz="1200" dirty="0">
-                    <a:latin typeface="Arial" panose="020B0604020202020204" pitchFamily="34" charset="0"/>
-                    <a:cs typeface="Arial" panose="020B0604020202020204" pitchFamily="34" charset="0"/>
-                  </a:rPr>
-                  <a:t> </a:t>
-                </a:r>
-                <a:r>
-                  <a:rPr lang="en-US" sz="1200" dirty="0" err="1">
-                    <a:latin typeface="Arial" panose="020B0604020202020204" pitchFamily="34" charset="0"/>
-                    <a:cs typeface="Arial" panose="020B0604020202020204" pitchFamily="34" charset="0"/>
-                  </a:rPr>
-                  <a:t>menor</a:t>
-                </a:r>
-                <a:r>
-                  <a:rPr lang="en-US" sz="1200" dirty="0">
-                    <a:latin typeface="Arial" panose="020B0604020202020204" pitchFamily="34" charset="0"/>
-                    <a:cs typeface="Arial" panose="020B0604020202020204" pitchFamily="34" charset="0"/>
-                  </a:rPr>
-                  <a:t> </a:t>
-                </a:r>
-                <a:r>
-                  <a:rPr lang="en-US" sz="1200" dirty="0" err="1">
-                    <a:latin typeface="Arial" panose="020B0604020202020204" pitchFamily="34" charset="0"/>
-                    <a:cs typeface="Arial" panose="020B0604020202020204" pitchFamily="34" charset="0"/>
-                  </a:rPr>
-                  <a:t>que</a:t>
-                </a:r>
-                <a:r>
-                  <a:rPr lang="en-US" sz="1200" dirty="0">
-                    <a:latin typeface="Arial" panose="020B0604020202020204" pitchFamily="34" charset="0"/>
-                    <a:cs typeface="Arial" panose="020B0604020202020204" pitchFamily="34" charset="0"/>
-                  </a:rPr>
-                  <a:t> </a:t>
-                </a:r>
-                <a:r>
-                  <a:rPr lang="en-US" sz="1200" dirty="0" err="1">
-                    <a:latin typeface="Arial" panose="020B0604020202020204" pitchFamily="34" charset="0"/>
-                    <a:cs typeface="Arial" panose="020B0604020202020204" pitchFamily="34" charset="0"/>
-                  </a:rPr>
-                  <a:t>el</a:t>
-                </a:r>
-                <a:r>
-                  <a:rPr lang="en-US" sz="1200" dirty="0">
-                    <a:latin typeface="Arial" panose="020B0604020202020204" pitchFamily="34" charset="0"/>
-                    <a:cs typeface="Arial" panose="020B0604020202020204" pitchFamily="34" charset="0"/>
-                  </a:rPr>
-                  <a:t> del </a:t>
-                </a:r>
-                <a:r>
-                  <a:rPr lang="en-US" sz="1200" dirty="0" err="1">
-                    <a:latin typeface="Arial" panose="020B0604020202020204" pitchFamily="34" charset="0"/>
-                    <a:cs typeface="Arial" panose="020B0604020202020204" pitchFamily="34" charset="0"/>
-                  </a:rPr>
-                  <a:t>núcleo</a:t>
-                </a:r>
-                <a:r>
-                  <a:rPr lang="en-US" sz="1200" dirty="0">
-                    <a:latin typeface="Arial" panose="020B0604020202020204" pitchFamily="34" charset="0"/>
-                    <a:cs typeface="Arial" panose="020B0604020202020204" pitchFamily="34" charset="0"/>
-                  </a:rPr>
-                  <a:t> (</a:t>
-                </a:r>
-                <a:r>
-                  <a:rPr lang="en-US" sz="1200" dirty="0" err="1">
-                    <a:latin typeface="Arial" panose="020B0604020202020204" pitchFamily="34" charset="0"/>
-                    <a:cs typeface="Arial" panose="020B0604020202020204" pitchFamily="34" charset="0"/>
-                  </a:rPr>
-                  <a:t>en</a:t>
-                </a:r>
-                <a:r>
-                  <a:rPr lang="en-US" sz="1200" dirty="0">
-                    <a:latin typeface="Arial" panose="020B0604020202020204" pitchFamily="34" charset="0"/>
-                    <a:cs typeface="Arial" panose="020B0604020202020204" pitchFamily="34" charset="0"/>
-                  </a:rPr>
-                  <a:t> </a:t>
-                </a:r>
-                <a:r>
-                  <a:rPr lang="en-US" sz="1200" dirty="0" err="1">
-                    <a:latin typeface="Arial" panose="020B0604020202020204" pitchFamily="34" charset="0"/>
-                    <a:cs typeface="Arial" panose="020B0604020202020204" pitchFamily="34" charset="0"/>
-                  </a:rPr>
-                  <a:t>este</a:t>
-                </a:r>
-                <a:r>
-                  <a:rPr lang="en-US" sz="1200" dirty="0">
-                    <a:latin typeface="Arial" panose="020B0604020202020204" pitchFamily="34" charset="0"/>
-                    <a:cs typeface="Arial" panose="020B0604020202020204" pitchFamily="34" charset="0"/>
-                  </a:rPr>
-                  <a:t> </a:t>
-                </a:r>
-                <a:r>
-                  <a:rPr lang="en-US" sz="1200" dirty="0" err="1">
-                    <a:latin typeface="Arial" panose="020B0604020202020204" pitchFamily="34" charset="0"/>
-                    <a:cs typeface="Arial" panose="020B0604020202020204" pitchFamily="34" charset="0"/>
-                  </a:rPr>
-                  <a:t>caso</a:t>
-                </a:r>
-                <a:r>
-                  <a:rPr lang="en-US" sz="1200" dirty="0">
-                    <a:latin typeface="Arial" panose="020B0604020202020204" pitchFamily="34" charset="0"/>
-                    <a:cs typeface="Arial" panose="020B0604020202020204" pitchFamily="34" charset="0"/>
-                  </a:rPr>
-                  <a:t> 2), y mayor </a:t>
-                </a:r>
-                <a:r>
-                  <a:rPr lang="en-US" sz="1200" dirty="0" err="1">
-                    <a:latin typeface="Arial" panose="020B0604020202020204" pitchFamily="34" charset="0"/>
-                    <a:cs typeface="Arial" panose="020B0604020202020204" pitchFamily="34" charset="0"/>
-                  </a:rPr>
-                  <a:t>que</a:t>
-                </a:r>
-                <a:r>
-                  <a:rPr lang="en-US" sz="1200" dirty="0">
-                    <a:latin typeface="Arial" panose="020B0604020202020204" pitchFamily="34" charset="0"/>
-                    <a:cs typeface="Arial" panose="020B0604020202020204" pitchFamily="34" charset="0"/>
-                  </a:rPr>
-                  <a:t> </a:t>
-                </a:r>
-                <a:r>
-                  <a:rPr lang="en-US" sz="1200" dirty="0" err="1">
-                    <a:latin typeface="Arial" panose="020B0604020202020204" pitchFamily="34" charset="0"/>
-                    <a:cs typeface="Arial" panose="020B0604020202020204" pitchFamily="34" charset="0"/>
-                  </a:rPr>
-                  <a:t>el</a:t>
-                </a:r>
-                <a:r>
-                  <a:rPr lang="en-US" sz="1200" dirty="0">
-                    <a:latin typeface="Arial" panose="020B0604020202020204" pitchFamily="34" charset="0"/>
-                    <a:cs typeface="Arial" panose="020B0604020202020204" pitchFamily="34" charset="0"/>
-                  </a:rPr>
-                  <a:t> de la </a:t>
-                </a:r>
-                <a:r>
-                  <a:rPr lang="en-US" sz="1200" dirty="0" err="1">
-                    <a:latin typeface="Arial" panose="020B0604020202020204" pitchFamily="34" charset="0"/>
-                    <a:cs typeface="Arial" panose="020B0604020202020204" pitchFamily="34" charset="0"/>
-                  </a:rPr>
-                  <a:t>cubierta</a:t>
-                </a:r>
-                <a:r>
-                  <a:rPr lang="en-US" sz="1200" dirty="0">
-                    <a:latin typeface="Arial" panose="020B0604020202020204" pitchFamily="34" charset="0"/>
-                    <a:cs typeface="Arial" panose="020B0604020202020204" pitchFamily="34" charset="0"/>
-                  </a:rPr>
-                  <a:t>  (</a:t>
-                </a:r>
-                <a:r>
-                  <a:rPr lang="en-US" sz="1200" dirty="0" err="1">
-                    <a:latin typeface="Arial" panose="020B0604020202020204" pitchFamily="34" charset="0"/>
-                    <a:cs typeface="Arial" panose="020B0604020202020204" pitchFamily="34" charset="0"/>
-                  </a:rPr>
-                  <a:t>en</a:t>
-                </a:r>
-                <a:r>
-                  <a:rPr lang="en-US" sz="1200" dirty="0">
-                    <a:latin typeface="Arial" panose="020B0604020202020204" pitchFamily="34" charset="0"/>
-                    <a:cs typeface="Arial" panose="020B0604020202020204" pitchFamily="34" charset="0"/>
-                  </a:rPr>
-                  <a:t> </a:t>
-                </a:r>
-                <a:r>
-                  <a:rPr lang="en-US" sz="1200" dirty="0" err="1">
-                    <a:latin typeface="Arial" panose="020B0604020202020204" pitchFamily="34" charset="0"/>
-                    <a:cs typeface="Arial" panose="020B0604020202020204" pitchFamily="34" charset="0"/>
-                  </a:rPr>
-                  <a:t>este</a:t>
-                </a:r>
-                <a:r>
-                  <a:rPr lang="en-US" sz="1200" dirty="0">
-                    <a:latin typeface="Arial" panose="020B0604020202020204" pitchFamily="34" charset="0"/>
-                    <a:cs typeface="Arial" panose="020B0604020202020204" pitchFamily="34" charset="0"/>
-                  </a:rPr>
-                  <a:t> </a:t>
-                </a:r>
-                <a:r>
-                  <a:rPr lang="en-US" sz="1200" dirty="0" err="1">
-                    <a:latin typeface="Arial" panose="020B0604020202020204" pitchFamily="34" charset="0"/>
-                    <a:cs typeface="Arial" panose="020B0604020202020204" pitchFamily="34" charset="0"/>
-                  </a:rPr>
-                  <a:t>caso</a:t>
-                </a:r>
-                <a:r>
-                  <a:rPr lang="en-US" sz="1200" dirty="0">
-                    <a:latin typeface="Arial" panose="020B0604020202020204" pitchFamily="34" charset="0"/>
-                    <a:cs typeface="Arial" panose="020B0604020202020204" pitchFamily="34" charset="0"/>
-                  </a:rPr>
-                  <a:t> 1.55). </a:t>
-                </a:r>
-                <a:r>
-                  <a:rPr lang="en-US" sz="1200" dirty="0" err="1">
-                    <a:latin typeface="Arial" panose="020B0604020202020204" pitchFamily="34" charset="0"/>
-                    <a:cs typeface="Arial" panose="020B0604020202020204" pitchFamily="34" charset="0"/>
-                  </a:rPr>
-                  <a:t>Además</a:t>
-                </a:r>
-                <a:r>
-                  <a:rPr lang="en-US" sz="1200" dirty="0">
-                    <a:latin typeface="Arial" panose="020B0604020202020204" pitchFamily="34" charset="0"/>
-                    <a:cs typeface="Arial" panose="020B0604020202020204" pitchFamily="34" charset="0"/>
-                  </a:rPr>
-                  <a:t>, </a:t>
-                </a:r>
-                <a:r>
-                  <a:rPr lang="en-US" sz="1200" dirty="0" err="1">
-                    <a:latin typeface="Arial" panose="020B0604020202020204" pitchFamily="34" charset="0"/>
-                    <a:cs typeface="Arial" panose="020B0604020202020204" pitchFamily="34" charset="0"/>
-                  </a:rPr>
-                  <a:t>como</a:t>
-                </a:r>
-                <a:r>
-                  <a:rPr lang="en-US" sz="1200" dirty="0">
-                    <a:latin typeface="Arial" panose="020B0604020202020204" pitchFamily="34" charset="0"/>
-                    <a:cs typeface="Arial" panose="020B0604020202020204" pitchFamily="34" charset="0"/>
-                  </a:rPr>
-                  <a:t> </a:t>
-                </a:r>
-                <a:r>
-                  <a:rPr lang="en-US" sz="1200" dirty="0" err="1">
-                    <a:latin typeface="Arial" panose="020B0604020202020204" pitchFamily="34" charset="0"/>
-                    <a:cs typeface="Arial" panose="020B0604020202020204" pitchFamily="34" charset="0"/>
-                  </a:rPr>
-                  <a:t>hemos</a:t>
-                </a:r>
-                <a:r>
-                  <a:rPr lang="en-US" sz="1200" dirty="0">
-                    <a:latin typeface="Arial" panose="020B0604020202020204" pitchFamily="34" charset="0"/>
-                    <a:cs typeface="Arial" panose="020B0604020202020204" pitchFamily="34" charset="0"/>
-                  </a:rPr>
-                  <a:t> visto </a:t>
-                </a:r>
-                <a:r>
-                  <a:rPr lang="en-US" sz="1200" dirty="0" err="1">
-                    <a:latin typeface="Arial" panose="020B0604020202020204" pitchFamily="34" charset="0"/>
-                    <a:cs typeface="Arial" panose="020B0604020202020204" pitchFamily="34" charset="0"/>
-                  </a:rPr>
-                  <a:t>en</a:t>
-                </a:r>
-                <a:r>
-                  <a:rPr lang="en-US" sz="1200" dirty="0">
-                    <a:latin typeface="Arial" panose="020B0604020202020204" pitchFamily="34" charset="0"/>
-                    <a:cs typeface="Arial" panose="020B0604020202020204" pitchFamily="34" charset="0"/>
-                  </a:rPr>
-                  <a:t> las </a:t>
-                </a:r>
-                <a:r>
-                  <a:rPr lang="en-US" sz="1200" dirty="0" err="1">
-                    <a:latin typeface="Arial" panose="020B0604020202020204" pitchFamily="34" charset="0"/>
-                    <a:cs typeface="Arial" panose="020B0604020202020204" pitchFamily="34" charset="0"/>
-                  </a:rPr>
-                  <a:t>figuras</a:t>
-                </a:r>
-                <a:r>
-                  <a:rPr lang="en-US" sz="1200" dirty="0">
-                    <a:latin typeface="Arial" panose="020B0604020202020204" pitchFamily="34" charset="0"/>
-                    <a:cs typeface="Arial" panose="020B0604020202020204" pitchFamily="34" charset="0"/>
-                  </a:rPr>
-                  <a:t> de las cross sections, la </a:t>
-                </a:r>
-                <a:r>
-                  <a:rPr lang="en-US" sz="1200" dirty="0" err="1">
-                    <a:latin typeface="Arial" panose="020B0604020202020204" pitchFamily="34" charset="0"/>
-                    <a:cs typeface="Arial" panose="020B0604020202020204" pitchFamily="34" charset="0"/>
-                  </a:rPr>
-                  <a:t>guia</a:t>
-                </a:r>
-                <a:r>
-                  <a:rPr lang="en-US" sz="1200" dirty="0">
-                    <a:latin typeface="Arial" panose="020B0604020202020204" pitchFamily="34" charset="0"/>
-                    <a:cs typeface="Arial" panose="020B0604020202020204" pitchFamily="34" charset="0"/>
-                  </a:rPr>
-                  <a:t> shallow al </a:t>
-                </a:r>
-                <a:r>
-                  <a:rPr lang="en-US" sz="1200" dirty="0" err="1">
-                    <a:latin typeface="Arial" panose="020B0604020202020204" pitchFamily="34" charset="0"/>
-                    <a:cs typeface="Arial" panose="020B0604020202020204" pitchFamily="34" charset="0"/>
-                  </a:rPr>
-                  <a:t>tener</a:t>
-                </a:r>
-                <a:r>
-                  <a:rPr lang="en-US" sz="1200" dirty="0">
-                    <a:latin typeface="Arial" panose="020B0604020202020204" pitchFamily="34" charset="0"/>
-                    <a:cs typeface="Arial" panose="020B0604020202020204" pitchFamily="34" charset="0"/>
-                  </a:rPr>
-                  <a:t> un slab  </a:t>
-                </a:r>
-                <a:r>
-                  <a:rPr lang="en-US" sz="1200" dirty="0" err="1">
-                    <a:latin typeface="Arial" panose="020B0604020202020204" pitchFamily="34" charset="0"/>
-                    <a:cs typeface="Arial" panose="020B0604020202020204" pitchFamily="34" charset="0"/>
-                  </a:rPr>
-                  <a:t>hace</a:t>
-                </a:r>
-                <a:r>
-                  <a:rPr lang="en-US" sz="1200" dirty="0">
-                    <a:latin typeface="Arial" panose="020B0604020202020204" pitchFamily="34" charset="0"/>
-                    <a:cs typeface="Arial" panose="020B0604020202020204" pitchFamily="34" charset="0"/>
-                  </a:rPr>
-                  <a:t> </a:t>
-                </a:r>
-                <a:r>
-                  <a:rPr lang="en-US" sz="1200" dirty="0" err="1">
-                    <a:latin typeface="Arial" panose="020B0604020202020204" pitchFamily="34" charset="0"/>
-                    <a:cs typeface="Arial" panose="020B0604020202020204" pitchFamily="34" charset="0"/>
-                  </a:rPr>
-                  <a:t>que</a:t>
-                </a:r>
-                <a:r>
-                  <a:rPr lang="en-US" sz="1200" dirty="0">
-                    <a:latin typeface="Arial" panose="020B0604020202020204" pitchFamily="34" charset="0"/>
-                    <a:cs typeface="Arial" panose="020B0604020202020204" pitchFamily="34" charset="0"/>
-                  </a:rPr>
-                  <a:t> </a:t>
-                </a:r>
-                <a:r>
-                  <a:rPr lang="en-US" sz="1200" dirty="0" err="1">
-                    <a:latin typeface="Arial" panose="020B0604020202020204" pitchFamily="34" charset="0"/>
-                    <a:cs typeface="Arial" panose="020B0604020202020204" pitchFamily="34" charset="0"/>
-                  </a:rPr>
-                  <a:t>su</a:t>
-                </a:r>
-                <a:r>
-                  <a:rPr lang="en-US" sz="1200" dirty="0">
-                    <a:latin typeface="Arial" panose="020B0604020202020204" pitchFamily="34" charset="0"/>
-                    <a:cs typeface="Arial" panose="020B0604020202020204" pitchFamily="34" charset="0"/>
-                  </a:rPr>
-                  <a:t> </a:t>
-                </a:r>
-                <a:r>
-                  <a:rPr lang="en-US" sz="1200" dirty="0" err="1">
-                    <a:latin typeface="Arial" panose="020B0604020202020204" pitchFamily="34" charset="0"/>
-                    <a:cs typeface="Arial" panose="020B0604020202020204" pitchFamily="34" charset="0"/>
-                  </a:rPr>
-                  <a:t>indice</a:t>
-                </a:r>
-                <a:r>
-                  <a:rPr lang="en-US" sz="1200" dirty="0">
-                    <a:latin typeface="Arial" panose="020B0604020202020204" pitchFamily="34" charset="0"/>
-                    <a:cs typeface="Arial" panose="020B0604020202020204" pitchFamily="34" charset="0"/>
-                  </a:rPr>
-                  <a:t> </a:t>
-                </a:r>
-                <a:r>
-                  <a:rPr lang="en-US" sz="1200" dirty="0" err="1">
-                    <a:latin typeface="Arial" panose="020B0604020202020204" pitchFamily="34" charset="0"/>
-                    <a:cs typeface="Arial" panose="020B0604020202020204" pitchFamily="34" charset="0"/>
-                  </a:rPr>
-                  <a:t>efectrivo</a:t>
-                </a:r>
-                <a:r>
-                  <a:rPr lang="en-US" sz="1200" dirty="0">
-                    <a:latin typeface="Arial" panose="020B0604020202020204" pitchFamily="34" charset="0"/>
-                    <a:cs typeface="Arial" panose="020B0604020202020204" pitchFamily="34" charset="0"/>
-                  </a:rPr>
-                  <a:t> sea mayor para </a:t>
-                </a:r>
-                <a:r>
-                  <a:rPr lang="en-US" sz="1200" dirty="0" err="1">
-                    <a:latin typeface="Arial" panose="020B0604020202020204" pitchFamily="34" charset="0"/>
-                    <a:cs typeface="Arial" panose="020B0604020202020204" pitchFamily="34" charset="0"/>
-                  </a:rPr>
-                  <a:t>todos</a:t>
-                </a:r>
-                <a:r>
-                  <a:rPr lang="en-US" sz="1200" dirty="0">
-                    <a:latin typeface="Arial" panose="020B0604020202020204" pitchFamily="34" charset="0"/>
-                    <a:cs typeface="Arial" panose="020B0604020202020204" pitchFamily="34" charset="0"/>
-                  </a:rPr>
-                  <a:t> </a:t>
-                </a:r>
-                <a:r>
-                  <a:rPr lang="en-US" sz="1200" dirty="0" err="1">
-                    <a:latin typeface="Arial" panose="020B0604020202020204" pitchFamily="34" charset="0"/>
-                    <a:cs typeface="Arial" panose="020B0604020202020204" pitchFamily="34" charset="0"/>
-                  </a:rPr>
-                  <a:t>los</a:t>
-                </a:r>
-                <a:r>
-                  <a:rPr lang="en-US" sz="1200" dirty="0">
-                    <a:latin typeface="Arial" panose="020B0604020202020204" pitchFamily="34" charset="0"/>
-                    <a:cs typeface="Arial" panose="020B0604020202020204" pitchFamily="34" charset="0"/>
-                  </a:rPr>
-                  <a:t> </a:t>
-                </a:r>
-                <a:r>
-                  <a:rPr lang="en-US" sz="1200" dirty="0" err="1">
-                    <a:latin typeface="Arial" panose="020B0604020202020204" pitchFamily="34" charset="0"/>
-                    <a:cs typeface="Arial" panose="020B0604020202020204" pitchFamily="34" charset="0"/>
-                  </a:rPr>
-                  <a:t>modos</a:t>
-                </a:r>
-                <a:r>
-                  <a:rPr lang="en-US" sz="1200" dirty="0">
-                    <a:latin typeface="Arial" panose="020B0604020202020204" pitchFamily="34" charset="0"/>
-                    <a:cs typeface="Arial" panose="020B0604020202020204" pitchFamily="34" charset="0"/>
-                  </a:rPr>
-                  <a:t>, al </a:t>
-                </a:r>
-                <a:r>
-                  <a:rPr lang="en-US" sz="1200" dirty="0" err="1">
-                    <a:latin typeface="Arial" panose="020B0604020202020204" pitchFamily="34" charset="0"/>
-                    <a:cs typeface="Arial" panose="020B0604020202020204" pitchFamily="34" charset="0"/>
-                  </a:rPr>
-                  <a:t>estar</a:t>
-                </a:r>
-                <a:r>
-                  <a:rPr lang="en-US" sz="1200" dirty="0">
-                    <a:latin typeface="Arial" panose="020B0604020202020204" pitchFamily="34" charset="0"/>
-                    <a:cs typeface="Arial" panose="020B0604020202020204" pitchFamily="34" charset="0"/>
-                  </a:rPr>
-                  <a:t> </a:t>
-                </a:r>
-                <a:r>
-                  <a:rPr lang="en-US" sz="1200" dirty="0" err="1">
-                    <a:latin typeface="Arial" panose="020B0604020202020204" pitchFamily="34" charset="0"/>
-                    <a:cs typeface="Arial" panose="020B0604020202020204" pitchFamily="34" charset="0"/>
-                  </a:rPr>
-                  <a:t>mejor</a:t>
-                </a:r>
-                <a:r>
-                  <a:rPr lang="en-US" sz="1200" dirty="0">
-                    <a:latin typeface="Arial" panose="020B0604020202020204" pitchFamily="34" charset="0"/>
-                    <a:cs typeface="Arial" panose="020B0604020202020204" pitchFamily="34" charset="0"/>
-                  </a:rPr>
-                  <a:t> </a:t>
-                </a:r>
-                <a:r>
-                  <a:rPr lang="en-US" sz="1200" dirty="0" err="1">
-                    <a:latin typeface="Arial" panose="020B0604020202020204" pitchFamily="34" charset="0"/>
-                    <a:cs typeface="Arial" panose="020B0604020202020204" pitchFamily="34" charset="0"/>
-                  </a:rPr>
-                  <a:t>confinado</a:t>
-                </a:r>
-                <a:r>
-                  <a:rPr lang="en-US" sz="1200" dirty="0">
-                    <a:latin typeface="Arial" panose="020B0604020202020204" pitchFamily="34" charset="0"/>
-                    <a:cs typeface="Arial" panose="020B0604020202020204" pitchFamily="34" charset="0"/>
-                  </a:rPr>
-                  <a:t>. Por </a:t>
-                </a:r>
-                <a:r>
-                  <a:rPr lang="en-US" sz="1200" dirty="0" err="1">
-                    <a:latin typeface="Arial" panose="020B0604020202020204" pitchFamily="34" charset="0"/>
-                    <a:cs typeface="Arial" panose="020B0604020202020204" pitchFamily="34" charset="0"/>
-                  </a:rPr>
-                  <a:t>otro</a:t>
-                </a:r>
-                <a:r>
-                  <a:rPr lang="en-US" sz="1200" dirty="0">
-                    <a:latin typeface="Arial" panose="020B0604020202020204" pitchFamily="34" charset="0"/>
-                    <a:cs typeface="Arial" panose="020B0604020202020204" pitchFamily="34" charset="0"/>
-                  </a:rPr>
-                  <a:t> </a:t>
-                </a:r>
-                <a:r>
-                  <a:rPr lang="en-US" sz="1200" dirty="0" err="1">
-                    <a:latin typeface="Arial" panose="020B0604020202020204" pitchFamily="34" charset="0"/>
-                    <a:cs typeface="Arial" panose="020B0604020202020204" pitchFamily="34" charset="0"/>
-                  </a:rPr>
-                  <a:t>lado</a:t>
-                </a:r>
-                <a:r>
-                  <a:rPr lang="en-US" sz="1200" dirty="0">
-                    <a:latin typeface="Arial" panose="020B0604020202020204" pitchFamily="34" charset="0"/>
-                    <a:cs typeface="Arial" panose="020B0604020202020204" pitchFamily="34" charset="0"/>
-                  </a:rPr>
-                  <a:t>, </a:t>
-                </a:r>
-                <a:r>
-                  <a:rPr lang="en-US" sz="1200" dirty="0" err="1">
-                    <a:latin typeface="Arial" panose="020B0604020202020204" pitchFamily="34" charset="0"/>
-                    <a:cs typeface="Arial" panose="020B0604020202020204" pitchFamily="34" charset="0"/>
-                  </a:rPr>
-                  <a:t>en</a:t>
-                </a:r>
-                <a:r>
-                  <a:rPr lang="en-US" sz="1200" dirty="0">
-                    <a:latin typeface="Arial" panose="020B0604020202020204" pitchFamily="34" charset="0"/>
-                    <a:cs typeface="Arial" panose="020B0604020202020204" pitchFamily="34" charset="0"/>
-                  </a:rPr>
-                  <a:t> la deep al no </a:t>
-                </a:r>
-                <a:r>
-                  <a:rPr lang="en-US" sz="1200" dirty="0" err="1">
-                    <a:latin typeface="Arial" panose="020B0604020202020204" pitchFamily="34" charset="0"/>
-                    <a:cs typeface="Arial" panose="020B0604020202020204" pitchFamily="34" charset="0"/>
-                  </a:rPr>
-                  <a:t>tener</a:t>
-                </a:r>
-                <a:r>
-                  <a:rPr lang="en-US" sz="1200" dirty="0">
-                    <a:latin typeface="Arial" panose="020B0604020202020204" pitchFamily="34" charset="0"/>
-                    <a:cs typeface="Arial" panose="020B0604020202020204" pitchFamily="34" charset="0"/>
-                  </a:rPr>
-                  <a:t> </a:t>
-                </a:r>
-                <a:r>
-                  <a:rPr lang="en-US" sz="1200" dirty="0" err="1">
-                    <a:latin typeface="Arial" panose="020B0604020202020204" pitchFamily="34" charset="0"/>
-                    <a:cs typeface="Arial" panose="020B0604020202020204" pitchFamily="34" charset="0"/>
-                  </a:rPr>
-                  <a:t>este</a:t>
-                </a:r>
-                <a:r>
-                  <a:rPr lang="en-US" sz="1200" dirty="0">
-                    <a:latin typeface="Arial" panose="020B0604020202020204" pitchFamily="34" charset="0"/>
-                    <a:cs typeface="Arial" panose="020B0604020202020204" pitchFamily="34" charset="0"/>
-                  </a:rPr>
-                  <a:t> material, lo </a:t>
-                </a:r>
-                <a:r>
-                  <a:rPr lang="en-US" sz="1200" dirty="0" err="1">
-                    <a:latin typeface="Arial" panose="020B0604020202020204" pitchFamily="34" charset="0"/>
-                    <a:cs typeface="Arial" panose="020B0604020202020204" pitchFamily="34" charset="0"/>
-                  </a:rPr>
-                  <a:t>que</a:t>
-                </a:r>
-                <a:r>
-                  <a:rPr lang="en-US" sz="1200" dirty="0">
-                    <a:latin typeface="Arial" panose="020B0604020202020204" pitchFamily="34" charset="0"/>
-                    <a:cs typeface="Arial" panose="020B0604020202020204" pitchFamily="34" charset="0"/>
-                  </a:rPr>
-                  <a:t> hay </a:t>
-                </a:r>
-                <a:r>
-                  <a:rPr lang="en-US" sz="1200" dirty="0" err="1">
-                    <a:latin typeface="Arial" panose="020B0604020202020204" pitchFamily="34" charset="0"/>
-                    <a:cs typeface="Arial" panose="020B0604020202020204" pitchFamily="34" charset="0"/>
-                  </a:rPr>
-                  <a:t>despues</a:t>
-                </a:r>
-                <a:r>
-                  <a:rPr lang="en-US" sz="1200" dirty="0">
-                    <a:latin typeface="Arial" panose="020B0604020202020204" pitchFamily="34" charset="0"/>
-                    <a:cs typeface="Arial" panose="020B0604020202020204" pitchFamily="34" charset="0"/>
-                  </a:rPr>
-                  <a:t> del </a:t>
-                </a:r>
-                <a:r>
-                  <a:rPr lang="en-US" sz="1200" dirty="0" err="1">
-                    <a:latin typeface="Arial" panose="020B0604020202020204" pitchFamily="34" charset="0"/>
-                    <a:cs typeface="Arial" panose="020B0604020202020204" pitchFamily="34" charset="0"/>
-                  </a:rPr>
-                  <a:t>nucleo</a:t>
-                </a:r>
-                <a:r>
-                  <a:rPr lang="en-US" sz="1200" dirty="0">
-                    <a:latin typeface="Arial" panose="020B0604020202020204" pitchFamily="34" charset="0"/>
-                    <a:cs typeface="Arial" panose="020B0604020202020204" pitchFamily="34" charset="0"/>
-                  </a:rPr>
-                  <a:t> es material de Si02, </a:t>
-                </a:r>
-                <a:r>
-                  <a:rPr lang="en-US" sz="1200" dirty="0" err="1">
-                    <a:latin typeface="Arial" panose="020B0604020202020204" pitchFamily="34" charset="0"/>
-                    <a:cs typeface="Arial" panose="020B0604020202020204" pitchFamily="34" charset="0"/>
-                  </a:rPr>
-                  <a:t>por</a:t>
-                </a:r>
-                <a:r>
-                  <a:rPr lang="en-US" sz="1200" dirty="0">
-                    <a:latin typeface="Arial" panose="020B0604020202020204" pitchFamily="34" charset="0"/>
-                    <a:cs typeface="Arial" panose="020B0604020202020204" pitchFamily="34" charset="0"/>
-                  </a:rPr>
-                  <a:t> lo </a:t>
-                </a:r>
-                <a:r>
-                  <a:rPr lang="en-US" sz="1200" dirty="0" err="1">
-                    <a:latin typeface="Arial" panose="020B0604020202020204" pitchFamily="34" charset="0"/>
-                    <a:cs typeface="Arial" panose="020B0604020202020204" pitchFamily="34" charset="0"/>
-                  </a:rPr>
-                  <a:t>que</a:t>
-                </a:r>
-                <a:r>
-                  <a:rPr lang="en-US" sz="1200" dirty="0">
-                    <a:latin typeface="Arial" panose="020B0604020202020204" pitchFamily="34" charset="0"/>
-                    <a:cs typeface="Arial" panose="020B0604020202020204" pitchFamily="34" charset="0"/>
-                  </a:rPr>
-                  <a:t> </a:t>
-                </a:r>
-                <a:r>
-                  <a:rPr lang="en-US" sz="1200" dirty="0" err="1">
-                    <a:latin typeface="Arial" panose="020B0604020202020204" pitchFamily="34" charset="0"/>
-                    <a:cs typeface="Arial" panose="020B0604020202020204" pitchFamily="34" charset="0"/>
-                  </a:rPr>
-                  <a:t>su</a:t>
-                </a:r>
-                <a:r>
-                  <a:rPr lang="en-US" sz="1200" dirty="0">
-                    <a:latin typeface="Arial" panose="020B0604020202020204" pitchFamily="34" charset="0"/>
-                    <a:cs typeface="Arial" panose="020B0604020202020204" pitchFamily="34" charset="0"/>
-                  </a:rPr>
-                  <a:t> </a:t>
-                </a:r>
-                <a:r>
-                  <a:rPr lang="en-US" sz="1200" dirty="0" err="1">
-                    <a:latin typeface="Arial" panose="020B0604020202020204" pitchFamily="34" charset="0"/>
-                    <a:cs typeface="Arial" panose="020B0604020202020204" pitchFamily="34" charset="0"/>
-                  </a:rPr>
-                  <a:t>indice</a:t>
-                </a:r>
-                <a:r>
-                  <a:rPr lang="en-US" sz="1200" dirty="0">
-                    <a:latin typeface="Arial" panose="020B0604020202020204" pitchFamily="34" charset="0"/>
-                    <a:cs typeface="Arial" panose="020B0604020202020204" pitchFamily="34" charset="0"/>
-                  </a:rPr>
-                  <a:t> </a:t>
-                </a:r>
-                <a:r>
-                  <a:rPr lang="en-US" sz="1200" dirty="0" err="1">
-                    <a:latin typeface="Arial" panose="020B0604020202020204" pitchFamily="34" charset="0"/>
-                    <a:cs typeface="Arial" panose="020B0604020202020204" pitchFamily="34" charset="0"/>
-                  </a:rPr>
-                  <a:t>efectivo</a:t>
-                </a:r>
-                <a:r>
-                  <a:rPr lang="en-US" sz="1200" dirty="0">
-                    <a:latin typeface="Arial" panose="020B0604020202020204" pitchFamily="34" charset="0"/>
-                    <a:cs typeface="Arial" panose="020B0604020202020204" pitchFamily="34" charset="0"/>
-                  </a:rPr>
-                  <a:t> </a:t>
-                </a:r>
-                <a:r>
-                  <a:rPr lang="en-US" sz="1200" dirty="0" err="1">
-                    <a:latin typeface="Arial" panose="020B0604020202020204" pitchFamily="34" charset="0"/>
-                    <a:cs typeface="Arial" panose="020B0604020202020204" pitchFamily="34" charset="0"/>
-                  </a:rPr>
-                  <a:t>disminuye</a:t>
-                </a:r>
-                <a:r>
-                  <a:rPr lang="en-US" sz="1200" dirty="0">
-                    <a:latin typeface="Arial" panose="020B0604020202020204" pitchFamily="34" charset="0"/>
-                    <a:cs typeface="Arial" panose="020B0604020202020204" pitchFamily="34" charset="0"/>
-                  </a:rPr>
-                  <a:t> mas </a:t>
-                </a:r>
-                <a:r>
-                  <a:rPr lang="en-US" sz="1200" dirty="0" err="1">
-                    <a:latin typeface="Arial" panose="020B0604020202020204" pitchFamily="34" charset="0"/>
-                    <a:cs typeface="Arial" panose="020B0604020202020204" pitchFamily="34" charset="0"/>
-                  </a:rPr>
-                  <a:t>rapidamente</a:t>
-                </a:r>
-                <a:r>
-                  <a:rPr lang="en-US" sz="1200" dirty="0">
-                    <a:latin typeface="Arial" panose="020B0604020202020204" pitchFamily="34" charset="0"/>
-                    <a:cs typeface="Arial" panose="020B0604020202020204" pitchFamily="34" charset="0"/>
-                  </a:rPr>
-                  <a:t>, lo </a:t>
-                </a:r>
-                <a:r>
-                  <a:rPr lang="en-US" sz="1200" dirty="0" err="1">
-                    <a:latin typeface="Arial" panose="020B0604020202020204" pitchFamily="34" charset="0"/>
-                    <a:cs typeface="Arial" panose="020B0604020202020204" pitchFamily="34" charset="0"/>
-                  </a:rPr>
-                  <a:t>cual</a:t>
-                </a:r>
-                <a:r>
-                  <a:rPr lang="en-US" sz="1200" dirty="0">
-                    <a:latin typeface="Arial" panose="020B0604020202020204" pitchFamily="34" charset="0"/>
-                    <a:cs typeface="Arial" panose="020B0604020202020204" pitchFamily="34" charset="0"/>
-                  </a:rPr>
-                  <a:t>, </a:t>
-                </a:r>
-                <a:r>
-                  <a:rPr lang="en-US" sz="1200" dirty="0" err="1">
-                    <a:latin typeface="Arial" panose="020B0604020202020204" pitchFamily="34" charset="0"/>
-                    <a:cs typeface="Arial" panose="020B0604020202020204" pitchFamily="34" charset="0"/>
-                  </a:rPr>
-                  <a:t>por</a:t>
-                </a:r>
-                <a:r>
-                  <a:rPr lang="en-US" sz="1200" dirty="0">
-                    <a:latin typeface="Arial" panose="020B0604020202020204" pitchFamily="34" charset="0"/>
-                    <a:cs typeface="Arial" panose="020B0604020202020204" pitchFamily="34" charset="0"/>
-                  </a:rPr>
-                  <a:t> </a:t>
-                </a:r>
-                <a:r>
-                  <a:rPr lang="en-US" sz="1200" dirty="0" err="1">
-                    <a:latin typeface="Arial" panose="020B0604020202020204" pitchFamily="34" charset="0"/>
-                    <a:cs typeface="Arial" panose="020B0604020202020204" pitchFamily="34" charset="0"/>
-                  </a:rPr>
-                  <a:t>consiguiente</a:t>
-                </a:r>
-                <a:r>
-                  <a:rPr lang="en-US" sz="1200" dirty="0">
-                    <a:latin typeface="Arial" panose="020B0604020202020204" pitchFamily="34" charset="0"/>
-                    <a:cs typeface="Arial" panose="020B0604020202020204" pitchFamily="34" charset="0"/>
-                  </a:rPr>
-                  <a:t>, </a:t>
-                </a:r>
-                <a:r>
-                  <a:rPr lang="en-US" sz="1200" dirty="0" err="1">
-                    <a:latin typeface="Arial" panose="020B0604020202020204" pitchFamily="34" charset="0"/>
-                    <a:cs typeface="Arial" panose="020B0604020202020204" pitchFamily="34" charset="0"/>
-                  </a:rPr>
-                  <a:t>hace</a:t>
-                </a:r>
-                <a:r>
-                  <a:rPr lang="en-US" sz="1200" dirty="0">
-                    <a:latin typeface="Arial" panose="020B0604020202020204" pitchFamily="34" charset="0"/>
-                    <a:cs typeface="Arial" panose="020B0604020202020204" pitchFamily="34" charset="0"/>
-                  </a:rPr>
-                  <a:t> </a:t>
-                </a:r>
-                <a:r>
-                  <a:rPr lang="en-US" sz="1200" dirty="0" err="1">
-                    <a:latin typeface="Arial" panose="020B0604020202020204" pitchFamily="34" charset="0"/>
-                    <a:cs typeface="Arial" panose="020B0604020202020204" pitchFamily="34" charset="0"/>
-                  </a:rPr>
-                  <a:t>que</a:t>
-                </a:r>
-                <a:r>
-                  <a:rPr lang="en-US" sz="1200" dirty="0">
-                    <a:latin typeface="Arial" panose="020B0604020202020204" pitchFamily="34" charset="0"/>
-                    <a:cs typeface="Arial" panose="020B0604020202020204" pitchFamily="34" charset="0"/>
-                  </a:rPr>
-                  <a:t> </a:t>
-                </a:r>
-                <a:r>
-                  <a:rPr lang="en-US" sz="1200" dirty="0" err="1">
-                    <a:latin typeface="Arial" panose="020B0604020202020204" pitchFamily="34" charset="0"/>
-                    <a:cs typeface="Arial" panose="020B0604020202020204" pitchFamily="34" charset="0"/>
-                  </a:rPr>
-                  <a:t>esté</a:t>
-                </a:r>
-                <a:r>
-                  <a:rPr lang="en-US" sz="1200" dirty="0">
-                    <a:latin typeface="Arial" panose="020B0604020202020204" pitchFamily="34" charset="0"/>
-                    <a:cs typeface="Arial" panose="020B0604020202020204" pitchFamily="34" charset="0"/>
-                  </a:rPr>
-                  <a:t> </a:t>
-                </a:r>
-                <a:r>
-                  <a:rPr lang="en-US" sz="1200" dirty="0" err="1">
-                    <a:latin typeface="Arial" panose="020B0604020202020204" pitchFamily="34" charset="0"/>
-                    <a:cs typeface="Arial" panose="020B0604020202020204" pitchFamily="34" charset="0"/>
-                  </a:rPr>
-                  <a:t>menos</a:t>
-                </a:r>
-                <a:r>
-                  <a:rPr lang="en-US" sz="1200" dirty="0">
-                    <a:latin typeface="Arial" panose="020B0604020202020204" pitchFamily="34" charset="0"/>
-                    <a:cs typeface="Arial" panose="020B0604020202020204" pitchFamily="34" charset="0"/>
-                  </a:rPr>
-                  <a:t> </a:t>
-                </a:r>
-                <a:r>
-                  <a:rPr lang="en-US" sz="1200" dirty="0" err="1">
-                    <a:latin typeface="Arial" panose="020B0604020202020204" pitchFamily="34" charset="0"/>
-                    <a:cs typeface="Arial" panose="020B0604020202020204" pitchFamily="34" charset="0"/>
-                  </a:rPr>
-                  <a:t>confinado</a:t>
-                </a:r>
-                <a:r>
-                  <a:rPr lang="en-US" sz="1200" dirty="0">
-                    <a:latin typeface="Arial" panose="020B0604020202020204" pitchFamily="34" charset="0"/>
-                    <a:cs typeface="Arial" panose="020B0604020202020204" pitchFamily="34" charset="0"/>
-                  </a:rPr>
-                  <a:t>. </a:t>
-                </a:r>
-              </a:p>
-              <a:p>
-                <a:pPr algn="just"/>
-                <a:r>
-                  <a:rPr lang="es-ES" sz="1200" dirty="0"/>
-                  <a:t>Además, en las gráficas se observa que el índice efectivo disminuye ligeramente al aumentar la longitud de onda para todos los modos y en ambas guías. Esto se debe a que, a mayores longitudes de onda, el modo se desconfina más y parte del campo se extiende hacia la cubierta, reduciendo el valor de </a:t>
-                </a:r>
-                <a14:m>
-                  <m:oMath xmlns:m="http://schemas.openxmlformats.org/officeDocument/2006/math">
-                    <m:sSub>
-                      <m:sSubPr>
-                        <m:ctrlPr>
-                          <a:rPr lang="ar-AE" i="1">
-                            <a:latin typeface="Cambria Math" panose="02040503050406030204" pitchFamily="18" charset="0"/>
-                          </a:rPr>
-                        </m:ctrlPr>
-                      </m:sSubPr>
-                      <m:e>
-                        <m:r>
-                          <a:rPr lang="ar-AE" i="1">
-                            <a:latin typeface="Cambria Math" panose="02040503050406030204" pitchFamily="18" charset="0"/>
-                          </a:rPr>
-                          <m:t>𝑛</m:t>
-                        </m:r>
-                      </m:e>
-                      <m:sub>
-                        <m:r>
-                          <m:rPr>
-                            <m:nor/>
-                          </m:rPr>
-                          <a:rPr lang="es-ES" i="1"/>
-                          <m:t>eff</m:t>
-                        </m:r>
-                      </m:sub>
-                    </m:sSub>
-                  </m:oMath>
-                </a14:m>
-                <a:r>
-                  <a:rPr lang="ar-AE" sz="1200" dirty="0"/>
-                  <a:t>.</a:t>
-                </a:r>
-                <a:r>
-                  <a:rPr lang="es-ES" sz="1200" dirty="0"/>
-                  <a:t>, DEBIDO A QUE CUANDO AUMENTAMOS LAS LONGIUTDES DE ONDA AUMENTA SU TAMAÑO Y POR TANTO DISMINUUYE SU CONFINAMIENTO.</a:t>
-                </a:r>
-                <a:endParaRPr lang="en-US" sz="1200" dirty="0">
-                  <a:latin typeface="Arial" panose="020B0604020202020204" pitchFamily="34" charset="0"/>
-                  <a:cs typeface="Arial" panose="020B0604020202020204" pitchFamily="34" charset="0"/>
-                </a:endParaRPr>
-              </a:p>
-              <a:p>
-                <a:pPr algn="just"/>
-                <a:r>
-                  <a:rPr lang="en-US" sz="1200" dirty="0">
-                    <a:latin typeface="Arial" panose="020B0604020202020204" pitchFamily="34" charset="0"/>
-                    <a:cs typeface="Arial" panose="020B0604020202020204" pitchFamily="34" charset="0"/>
-                  </a:rPr>
-                  <a:t>Cabe </a:t>
-                </a:r>
-                <a:r>
-                  <a:rPr lang="en-US" sz="1200" dirty="0" err="1">
-                    <a:latin typeface="Arial" panose="020B0604020202020204" pitchFamily="34" charset="0"/>
-                    <a:cs typeface="Arial" panose="020B0604020202020204" pitchFamily="34" charset="0"/>
-                  </a:rPr>
-                  <a:t>mencionar</a:t>
-                </a:r>
-                <a:r>
-                  <a:rPr lang="en-US" sz="1200" dirty="0">
-                    <a:latin typeface="Arial" panose="020B0604020202020204" pitchFamily="34" charset="0"/>
-                    <a:cs typeface="Arial" panose="020B0604020202020204" pitchFamily="34" charset="0"/>
-                  </a:rPr>
-                  <a:t> </a:t>
-                </a:r>
-                <a:r>
-                  <a:rPr lang="en-US" sz="1200" dirty="0" err="1">
-                    <a:latin typeface="Arial" panose="020B0604020202020204" pitchFamily="34" charset="0"/>
-                    <a:cs typeface="Arial" panose="020B0604020202020204" pitchFamily="34" charset="0"/>
-                  </a:rPr>
-                  <a:t>tambien</a:t>
-                </a:r>
-                <a:r>
-                  <a:rPr lang="en-US" sz="1200" dirty="0">
-                    <a:latin typeface="Arial" panose="020B0604020202020204" pitchFamily="34" charset="0"/>
-                    <a:cs typeface="Arial" panose="020B0604020202020204" pitchFamily="34" charset="0"/>
-                  </a:rPr>
-                  <a:t> </a:t>
-                </a:r>
-                <a:r>
-                  <a:rPr lang="en-US" sz="1200" dirty="0" err="1">
-                    <a:latin typeface="Arial" panose="020B0604020202020204" pitchFamily="34" charset="0"/>
-                    <a:cs typeface="Arial" panose="020B0604020202020204" pitchFamily="34" charset="0"/>
-                  </a:rPr>
-                  <a:t>que</a:t>
-                </a:r>
-                <a:r>
-                  <a:rPr lang="en-US" sz="1200" dirty="0">
-                    <a:latin typeface="Arial" panose="020B0604020202020204" pitchFamily="34" charset="0"/>
-                    <a:cs typeface="Arial" panose="020B0604020202020204" pitchFamily="34" charset="0"/>
-                  </a:rPr>
-                  <a:t> </a:t>
-                </a:r>
-                <a:r>
-                  <a:rPr lang="en-US" sz="1200" dirty="0" err="1">
-                    <a:latin typeface="Arial" panose="020B0604020202020204" pitchFamily="34" charset="0"/>
-                    <a:cs typeface="Arial" panose="020B0604020202020204" pitchFamily="34" charset="0"/>
-                  </a:rPr>
-                  <a:t>que</a:t>
-                </a:r>
-                <a:r>
-                  <a:rPr lang="en-US" sz="1200" dirty="0">
-                    <a:latin typeface="Arial" panose="020B0604020202020204" pitchFamily="34" charset="0"/>
-                    <a:cs typeface="Arial" panose="020B0604020202020204" pitchFamily="34" charset="0"/>
-                  </a:rPr>
-                  <a:t> se </a:t>
-                </a:r>
-                <a:r>
-                  <a:rPr lang="en-US" sz="1200" dirty="0" err="1">
-                    <a:latin typeface="Arial" panose="020B0604020202020204" pitchFamily="34" charset="0"/>
-                    <a:cs typeface="Arial" panose="020B0604020202020204" pitchFamily="34" charset="0"/>
-                  </a:rPr>
-                  <a:t>propaguen</a:t>
-                </a:r>
-                <a:r>
-                  <a:rPr lang="en-US" sz="1200" dirty="0">
-                    <a:latin typeface="Arial" panose="020B0604020202020204" pitchFamily="34" charset="0"/>
-                    <a:cs typeface="Arial" panose="020B0604020202020204" pitchFamily="34" charset="0"/>
-                  </a:rPr>
-                  <a:t> </a:t>
-                </a:r>
-                <a:r>
-                  <a:rPr lang="en-US" sz="1200" dirty="0" err="1">
-                    <a:latin typeface="Arial" panose="020B0604020202020204" pitchFamily="34" charset="0"/>
-                    <a:cs typeface="Arial" panose="020B0604020202020204" pitchFamily="34" charset="0"/>
-                  </a:rPr>
-                  <a:t>todos</a:t>
-                </a:r>
-                <a:r>
-                  <a:rPr lang="en-US" sz="1200" dirty="0">
-                    <a:latin typeface="Arial" panose="020B0604020202020204" pitchFamily="34" charset="0"/>
-                    <a:cs typeface="Arial" panose="020B0604020202020204" pitchFamily="34" charset="0"/>
-                  </a:rPr>
-                  <a:t> </a:t>
-                </a:r>
-                <a:r>
-                  <a:rPr lang="en-US" sz="1200" dirty="0" err="1">
-                    <a:latin typeface="Arial" panose="020B0604020202020204" pitchFamily="34" charset="0"/>
-                    <a:cs typeface="Arial" panose="020B0604020202020204" pitchFamily="34" charset="0"/>
-                  </a:rPr>
-                  <a:t>los</a:t>
-                </a:r>
-                <a:r>
-                  <a:rPr lang="en-US" sz="1200" dirty="0">
-                    <a:latin typeface="Arial" panose="020B0604020202020204" pitchFamily="34" charset="0"/>
-                    <a:cs typeface="Arial" panose="020B0604020202020204" pitchFamily="34" charset="0"/>
-                  </a:rPr>
-                  <a:t> </a:t>
-                </a:r>
-                <a:r>
-                  <a:rPr lang="en-US" sz="1200" dirty="0" err="1">
-                    <a:latin typeface="Arial" panose="020B0604020202020204" pitchFamily="34" charset="0"/>
-                    <a:cs typeface="Arial" panose="020B0604020202020204" pitchFamily="34" charset="0"/>
-                  </a:rPr>
-                  <a:t>modos</a:t>
-                </a:r>
-                <a:r>
-                  <a:rPr lang="en-US" sz="1200" dirty="0">
-                    <a:latin typeface="Arial" panose="020B0604020202020204" pitchFamily="34" charset="0"/>
-                    <a:cs typeface="Arial" panose="020B0604020202020204" pitchFamily="34" charset="0"/>
-                  </a:rPr>
-                  <a:t> no es </a:t>
-                </a:r>
-                <a:r>
-                  <a:rPr lang="en-US" sz="1200" dirty="0" err="1">
-                    <a:latin typeface="Arial" panose="020B0604020202020204" pitchFamily="34" charset="0"/>
-                    <a:cs typeface="Arial" panose="020B0604020202020204" pitchFamily="34" charset="0"/>
-                  </a:rPr>
-                  <a:t>tampoco</a:t>
-                </a:r>
-                <a:r>
-                  <a:rPr lang="en-US" sz="1200" dirty="0">
-                    <a:latin typeface="Arial" panose="020B0604020202020204" pitchFamily="34" charset="0"/>
-                    <a:cs typeface="Arial" panose="020B0604020202020204" pitchFamily="34" charset="0"/>
-                  </a:rPr>
-                  <a:t> bueno, </a:t>
-                </a:r>
-                <a:r>
-                  <a:rPr lang="en-US" sz="1200" dirty="0" err="1">
-                    <a:latin typeface="Arial" panose="020B0604020202020204" pitchFamily="34" charset="0"/>
-                    <a:cs typeface="Arial" panose="020B0604020202020204" pitchFamily="34" charset="0"/>
-                  </a:rPr>
-                  <a:t>ya</a:t>
-                </a:r>
-                <a:r>
-                  <a:rPr lang="en-US" sz="1200" dirty="0">
-                    <a:latin typeface="Arial" panose="020B0604020202020204" pitchFamily="34" charset="0"/>
-                    <a:cs typeface="Arial" panose="020B0604020202020204" pitchFamily="34" charset="0"/>
-                  </a:rPr>
-                  <a:t> </a:t>
-                </a:r>
-                <a:r>
-                  <a:rPr lang="en-US" sz="1200" dirty="0" err="1">
-                    <a:latin typeface="Arial" panose="020B0604020202020204" pitchFamily="34" charset="0"/>
-                    <a:cs typeface="Arial" panose="020B0604020202020204" pitchFamily="34" charset="0"/>
-                  </a:rPr>
-                  <a:t>que</a:t>
-                </a:r>
-                <a:r>
-                  <a:rPr lang="en-US" sz="1200" dirty="0">
-                    <a:latin typeface="Arial" panose="020B0604020202020204" pitchFamily="34" charset="0"/>
-                    <a:cs typeface="Arial" panose="020B0604020202020204" pitchFamily="34" charset="0"/>
-                  </a:rPr>
-                  <a:t> </a:t>
-                </a:r>
-                <a:r>
-                  <a:rPr lang="en-US" sz="1200" dirty="0" err="1">
-                    <a:latin typeface="Arial" panose="020B0604020202020204" pitchFamily="34" charset="0"/>
-                    <a:cs typeface="Arial" panose="020B0604020202020204" pitchFamily="34" charset="0"/>
-                  </a:rPr>
-                  <a:t>normalmente</a:t>
-                </a:r>
-                <a:r>
-                  <a:rPr lang="en-US" sz="1200" dirty="0">
-                    <a:latin typeface="Arial" panose="020B0604020202020204" pitchFamily="34" charset="0"/>
-                    <a:cs typeface="Arial" panose="020B0604020202020204" pitchFamily="34" charset="0"/>
-                  </a:rPr>
-                  <a:t> solo </a:t>
-                </a:r>
-                <a:r>
-                  <a:rPr lang="en-US" sz="1200" dirty="0" err="1">
-                    <a:latin typeface="Arial" panose="020B0604020202020204" pitchFamily="34" charset="0"/>
-                    <a:cs typeface="Arial" panose="020B0604020202020204" pitchFamily="34" charset="0"/>
-                  </a:rPr>
-                  <a:t>deseamos</a:t>
-                </a:r>
-                <a:r>
-                  <a:rPr lang="en-US" sz="1200" dirty="0">
-                    <a:latin typeface="Arial" panose="020B0604020202020204" pitchFamily="34" charset="0"/>
-                    <a:cs typeface="Arial" panose="020B0604020202020204" pitchFamily="34" charset="0"/>
-                  </a:rPr>
-                  <a:t> </a:t>
-                </a:r>
-                <a:r>
-                  <a:rPr lang="en-US" sz="1200" dirty="0" err="1">
-                    <a:latin typeface="Arial" panose="020B0604020202020204" pitchFamily="34" charset="0"/>
-                    <a:cs typeface="Arial" panose="020B0604020202020204" pitchFamily="34" charset="0"/>
-                  </a:rPr>
-                  <a:t>que</a:t>
-                </a:r>
-                <a:r>
-                  <a:rPr lang="en-US" sz="1200" dirty="0">
-                    <a:latin typeface="Arial" panose="020B0604020202020204" pitchFamily="34" charset="0"/>
-                    <a:cs typeface="Arial" panose="020B0604020202020204" pitchFamily="34" charset="0"/>
-                  </a:rPr>
-                  <a:t> se </a:t>
-                </a:r>
-                <a:r>
-                  <a:rPr lang="en-US" sz="1200" dirty="0" err="1">
-                    <a:latin typeface="Arial" panose="020B0604020202020204" pitchFamily="34" charset="0"/>
-                    <a:cs typeface="Arial" panose="020B0604020202020204" pitchFamily="34" charset="0"/>
-                  </a:rPr>
-                  <a:t>propague</a:t>
-                </a:r>
-                <a:r>
-                  <a:rPr lang="en-US" sz="1200" dirty="0">
-                    <a:latin typeface="Arial" panose="020B0604020202020204" pitchFamily="34" charset="0"/>
-                    <a:cs typeface="Arial" panose="020B0604020202020204" pitchFamily="34" charset="0"/>
-                  </a:rPr>
-                  <a:t> uno, </a:t>
-                </a:r>
-                <a:r>
-                  <a:rPr lang="en-US" sz="1200" dirty="0" err="1">
-                    <a:latin typeface="Arial" panose="020B0604020202020204" pitchFamily="34" charset="0"/>
-                    <a:cs typeface="Arial" panose="020B0604020202020204" pitchFamily="34" charset="0"/>
-                  </a:rPr>
-                  <a:t>el</a:t>
-                </a:r>
-                <a:r>
-                  <a:rPr lang="en-US" sz="1200" dirty="0">
-                    <a:latin typeface="Arial" panose="020B0604020202020204" pitchFamily="34" charset="0"/>
-                    <a:cs typeface="Arial" panose="020B0604020202020204" pitchFamily="34" charset="0"/>
-                  </a:rPr>
-                  <a:t> </a:t>
-                </a:r>
-                <a:r>
-                  <a:rPr lang="en-US" sz="1200" dirty="0" err="1">
-                    <a:latin typeface="Arial" panose="020B0604020202020204" pitchFamily="34" charset="0"/>
-                    <a:cs typeface="Arial" panose="020B0604020202020204" pitchFamily="34" charset="0"/>
-                  </a:rPr>
-                  <a:t>hecho</a:t>
-                </a:r>
-                <a:r>
-                  <a:rPr lang="en-US" sz="1200" dirty="0">
-                    <a:latin typeface="Arial" panose="020B0604020202020204" pitchFamily="34" charset="0"/>
-                    <a:cs typeface="Arial" panose="020B0604020202020204" pitchFamily="34" charset="0"/>
-                  </a:rPr>
-                  <a:t> de </a:t>
-                </a:r>
-                <a:r>
-                  <a:rPr lang="en-US" sz="1200" dirty="0" err="1">
-                    <a:latin typeface="Arial" panose="020B0604020202020204" pitchFamily="34" charset="0"/>
-                    <a:cs typeface="Arial" panose="020B0604020202020204" pitchFamily="34" charset="0"/>
-                  </a:rPr>
-                  <a:t>que</a:t>
-                </a:r>
-                <a:r>
-                  <a:rPr lang="en-US" sz="1200" dirty="0">
-                    <a:latin typeface="Arial" panose="020B0604020202020204" pitchFamily="34" charset="0"/>
-                    <a:cs typeface="Arial" panose="020B0604020202020204" pitchFamily="34" charset="0"/>
-                  </a:rPr>
-                  <a:t> se </a:t>
-                </a:r>
-                <a:r>
-                  <a:rPr lang="en-US" sz="1200" dirty="0" err="1">
-                    <a:latin typeface="Arial" panose="020B0604020202020204" pitchFamily="34" charset="0"/>
-                    <a:cs typeface="Arial" panose="020B0604020202020204" pitchFamily="34" charset="0"/>
-                  </a:rPr>
-                  <a:t>propaguen</a:t>
-                </a:r>
-                <a:r>
-                  <a:rPr lang="en-US" sz="1200" dirty="0">
-                    <a:latin typeface="Arial" panose="020B0604020202020204" pitchFamily="34" charset="0"/>
-                    <a:cs typeface="Arial" panose="020B0604020202020204" pitchFamily="34" charset="0"/>
-                  </a:rPr>
-                  <a:t> </a:t>
-                </a:r>
-                <a:r>
-                  <a:rPr lang="en-US" sz="1200" dirty="0" err="1">
-                    <a:latin typeface="Arial" panose="020B0604020202020204" pitchFamily="34" charset="0"/>
-                    <a:cs typeface="Arial" panose="020B0604020202020204" pitchFamily="34" charset="0"/>
-                  </a:rPr>
-                  <a:t>distintos</a:t>
-                </a:r>
-                <a:r>
-                  <a:rPr lang="en-US" sz="1200" dirty="0">
-                    <a:latin typeface="Arial" panose="020B0604020202020204" pitchFamily="34" charset="0"/>
-                    <a:cs typeface="Arial" panose="020B0604020202020204" pitchFamily="34" charset="0"/>
-                  </a:rPr>
-                  <a:t> </a:t>
-                </a:r>
-                <a:r>
-                  <a:rPr lang="en-US" sz="1200" dirty="0" err="1">
-                    <a:latin typeface="Arial" panose="020B0604020202020204" pitchFamily="34" charset="0"/>
-                    <a:cs typeface="Arial" panose="020B0604020202020204" pitchFamily="34" charset="0"/>
-                  </a:rPr>
-                  <a:t>modos</a:t>
-                </a:r>
-                <a:r>
-                  <a:rPr lang="en-US" sz="1200" dirty="0">
-                    <a:latin typeface="Arial" panose="020B0604020202020204" pitchFamily="34" charset="0"/>
-                    <a:cs typeface="Arial" panose="020B0604020202020204" pitchFamily="34" charset="0"/>
-                  </a:rPr>
-                  <a:t> a la </a:t>
-                </a:r>
-                <a:r>
-                  <a:rPr lang="en-US" sz="1200" dirty="0" err="1">
-                    <a:latin typeface="Arial" panose="020B0604020202020204" pitchFamily="34" charset="0"/>
-                    <a:cs typeface="Arial" panose="020B0604020202020204" pitchFamily="34" charset="0"/>
-                  </a:rPr>
-                  <a:t>vez</a:t>
-                </a:r>
-                <a:r>
-                  <a:rPr lang="en-US" sz="1200" dirty="0">
-                    <a:latin typeface="Arial" panose="020B0604020202020204" pitchFamily="34" charset="0"/>
-                    <a:cs typeface="Arial" panose="020B0604020202020204" pitchFamily="34" charset="0"/>
-                  </a:rPr>
-                  <a:t> </a:t>
-                </a:r>
-                <a:r>
-                  <a:rPr lang="en-US" sz="1200" dirty="0" err="1">
-                    <a:latin typeface="Arial" panose="020B0604020202020204" pitchFamily="34" charset="0"/>
-                    <a:cs typeface="Arial" panose="020B0604020202020204" pitchFamily="34" charset="0"/>
-                  </a:rPr>
-                  <a:t>puede</a:t>
-                </a:r>
-                <a:r>
-                  <a:rPr lang="en-US" sz="1200" dirty="0">
-                    <a:latin typeface="Arial" panose="020B0604020202020204" pitchFamily="34" charset="0"/>
-                    <a:cs typeface="Arial" panose="020B0604020202020204" pitchFamily="34" charset="0"/>
-                  </a:rPr>
-                  <a:t> </a:t>
-                </a:r>
-                <a:r>
-                  <a:rPr lang="en-US" sz="1200" dirty="0" err="1">
-                    <a:latin typeface="Arial" panose="020B0604020202020204" pitchFamily="34" charset="0"/>
-                    <a:cs typeface="Arial" panose="020B0604020202020204" pitchFamily="34" charset="0"/>
-                  </a:rPr>
-                  <a:t>conllevar</a:t>
-                </a:r>
-                <a:r>
-                  <a:rPr lang="en-US" sz="1200" dirty="0">
-                    <a:latin typeface="Arial" panose="020B0604020202020204" pitchFamily="34" charset="0"/>
-                    <a:cs typeface="Arial" panose="020B0604020202020204" pitchFamily="34" charset="0"/>
-                  </a:rPr>
-                  <a:t> a </a:t>
-                </a:r>
-                <a:r>
-                  <a:rPr lang="en-US" sz="1200" dirty="0" err="1">
-                    <a:latin typeface="Arial" panose="020B0604020202020204" pitchFamily="34" charset="0"/>
-                    <a:cs typeface="Arial" panose="020B0604020202020204" pitchFamily="34" charset="0"/>
-                  </a:rPr>
-                  <a:t>veces</a:t>
-                </a:r>
-                <a:r>
-                  <a:rPr lang="en-US" sz="1200" dirty="0">
-                    <a:latin typeface="Arial" panose="020B0604020202020204" pitchFamily="34" charset="0"/>
-                    <a:cs typeface="Arial" panose="020B0604020202020204" pitchFamily="34" charset="0"/>
-                  </a:rPr>
-                  <a:t>  </a:t>
-                </a:r>
-                <a:r>
-                  <a:rPr lang="en-US" sz="1200" dirty="0" err="1">
-                    <a:latin typeface="Arial" panose="020B0604020202020204" pitchFamily="34" charset="0"/>
-                    <a:cs typeface="Arial" panose="020B0604020202020204" pitchFamily="34" charset="0"/>
-                  </a:rPr>
-                  <a:t>interferencias</a:t>
-                </a:r>
-                <a:r>
-                  <a:rPr lang="en-US" sz="1200" dirty="0">
-                    <a:latin typeface="Arial" panose="020B0604020202020204" pitchFamily="34" charset="0"/>
-                    <a:cs typeface="Arial" panose="020B0604020202020204" pitchFamily="34" charset="0"/>
-                  </a:rPr>
-                  <a:t> </a:t>
-                </a:r>
-                <a:r>
-                  <a:rPr lang="en-US" sz="1200" dirty="0" err="1">
-                    <a:latin typeface="Arial" panose="020B0604020202020204" pitchFamily="34" charset="0"/>
-                    <a:cs typeface="Arial" panose="020B0604020202020204" pitchFamily="34" charset="0"/>
-                  </a:rPr>
-                  <a:t>intermodales</a:t>
-                </a:r>
-                <a:r>
-                  <a:rPr lang="en-US" sz="1200" dirty="0">
-                    <a:latin typeface="Arial" panose="020B0604020202020204" pitchFamily="34" charset="0"/>
-                    <a:cs typeface="Arial" panose="020B0604020202020204" pitchFamily="34" charset="0"/>
-                  </a:rPr>
-                  <a:t>.</a:t>
-                </a:r>
-              </a:p>
-              <a:p>
-                <a:pPr algn="just"/>
-                <a:endParaRPr lang="en-US" sz="1200" dirty="0">
-                  <a:latin typeface="Arial" panose="020B0604020202020204" pitchFamily="34" charset="0"/>
-                  <a:cs typeface="Arial" panose="020B0604020202020204" pitchFamily="34" charset="0"/>
-                </a:endParaRPr>
-              </a:p>
-            </p:txBody>
-          </p:sp>
-        </mc:Choice>
-        <mc:Fallback xmlns="">
-          <p:sp>
-            <p:nvSpPr>
-              <p:cNvPr id="2" name="CuadroTexto 1">
-                <a:extLst>
-                  <a:ext uri="{FF2B5EF4-FFF2-40B4-BE49-F238E27FC236}">
-                    <a16:creationId xmlns:a16="http://schemas.microsoft.com/office/drawing/2014/main" id="{6D243C48-D0CB-2131-C493-8E5DFCAD1557}"/>
-                  </a:ext>
-                </a:extLst>
-              </p:cNvPr>
-              <p:cNvSpPr txBox="1">
-                <a:spLocks noRot="1" noChangeAspect="1" noMove="1" noResize="1" noEditPoints="1" noAdjustHandles="1" noChangeArrowheads="1" noChangeShapeType="1" noTextEdit="1"/>
-              </p:cNvSpPr>
-              <p:nvPr/>
-            </p:nvSpPr>
-            <p:spPr>
-              <a:xfrm>
-                <a:off x="685798" y="2183808"/>
-                <a:ext cx="11199971" cy="2456313"/>
-              </a:xfrm>
-              <a:prstGeom prst="rect">
-                <a:avLst/>
-              </a:prstGeom>
-              <a:blipFill>
-                <a:blip r:embed="rId5"/>
-                <a:stretch>
-                  <a:fillRect/>
-                </a:stretch>
-              </a:blipFill>
-              <a:ln w="28575">
-                <a:solidFill>
-                  <a:srgbClr val="E0700D"/>
-                </a:solidFill>
-              </a:ln>
-            </p:spPr>
-            <p:txBody>
-              <a:bodyPr/>
-              <a:lstStyle/>
-              <a:p>
-                <a:r>
-                  <a:rPr lang="es-ES">
-                    <a:noFill/>
-                  </a:rPr>
-                  <a:t> </a:t>
-                </a:r>
-              </a:p>
-            </p:txBody>
-          </p:sp>
-        </mc:Fallback>
-      </mc:AlternateContent>
+      <p:sp>
+        <p:nvSpPr>
+          <p:cNvPr id="2" name="CuadroTexto 1">
+            <a:extLst>
+              <a:ext uri="{FF2B5EF4-FFF2-40B4-BE49-F238E27FC236}">
+                <a16:creationId xmlns:a16="http://schemas.microsoft.com/office/drawing/2014/main" id="{6D243C48-D0CB-2131-C493-8E5DFCAD1557}"/>
+              </a:ext>
+            </a:extLst>
+          </p:cNvPr>
+          <p:cNvSpPr txBox="1"/>
+          <p:nvPr/>
+        </p:nvSpPr>
+        <p:spPr>
+          <a:xfrm>
+            <a:off x="685798" y="2183808"/>
+            <a:ext cx="11199971" cy="2677656"/>
+          </a:xfrm>
+          <a:prstGeom prst="rect">
+            <a:avLst/>
+          </a:prstGeom>
+          <a:solidFill>
+            <a:schemeClr val="bg1">
+              <a:lumMod val="95000"/>
+            </a:schemeClr>
+          </a:solidFill>
+          <a:ln w="28575">
+            <a:solidFill>
+              <a:srgbClr val="E0700D"/>
+            </a:solidFill>
+          </a:ln>
+        </p:spPr>
+        <p:txBody>
+          <a:bodyPr wrap="square" rtlCol="0">
+            <a:spAutoFit/>
+          </a:bodyPr>
+          <a:lstStyle/>
+          <a:p>
+            <a:pPr algn="just"/>
+            <a:r>
+              <a:rPr lang="en-US" sz="1200" dirty="0">
+                <a:latin typeface="Arial" panose="020B0604020202020204" pitchFamily="34" charset="0"/>
+                <a:cs typeface="Arial" panose="020B0604020202020204" pitchFamily="34" charset="0"/>
+              </a:rPr>
+              <a:t>En primer </a:t>
+            </a:r>
+            <a:r>
+              <a:rPr lang="en-US" sz="1200" dirty="0" err="1">
+                <a:latin typeface="Arial" panose="020B0604020202020204" pitchFamily="34" charset="0"/>
+                <a:cs typeface="Arial" panose="020B0604020202020204" pitchFamily="34" charset="0"/>
+              </a:rPr>
+              <a:t>lugar</a:t>
+            </a:r>
+            <a:r>
+              <a:rPr lang="en-US" sz="1200" dirty="0">
+                <a:latin typeface="Arial" panose="020B0604020202020204" pitchFamily="34" charset="0"/>
+                <a:cs typeface="Arial" panose="020B0604020202020204" pitchFamily="34" charset="0"/>
+              </a:rPr>
+              <a:t>, </a:t>
+            </a:r>
+            <a:r>
+              <a:rPr lang="en-US" sz="1200" dirty="0" err="1">
+                <a:latin typeface="Arial" panose="020B0604020202020204" pitchFamily="34" charset="0"/>
+                <a:cs typeface="Arial" panose="020B0604020202020204" pitchFamily="34" charset="0"/>
+              </a:rPr>
+              <a:t>podemos</a:t>
+            </a:r>
+            <a:r>
+              <a:rPr lang="en-US" sz="1200" dirty="0">
+                <a:latin typeface="Arial" panose="020B0604020202020204" pitchFamily="34" charset="0"/>
+                <a:cs typeface="Arial" panose="020B0604020202020204" pitchFamily="34" charset="0"/>
+              </a:rPr>
+              <a:t> </a:t>
+            </a:r>
+            <a:r>
+              <a:rPr lang="en-US" sz="1200" dirty="0" err="1">
+                <a:latin typeface="Arial" panose="020B0604020202020204" pitchFamily="34" charset="0"/>
+                <a:cs typeface="Arial" panose="020B0604020202020204" pitchFamily="34" charset="0"/>
+              </a:rPr>
+              <a:t>ver</a:t>
+            </a:r>
+            <a:r>
+              <a:rPr lang="en-US" sz="1200" dirty="0">
+                <a:latin typeface="Arial" panose="020B0604020202020204" pitchFamily="34" charset="0"/>
+                <a:cs typeface="Arial" panose="020B0604020202020204" pitchFamily="34" charset="0"/>
+              </a:rPr>
+              <a:t> </a:t>
+            </a:r>
+            <a:r>
+              <a:rPr lang="en-US" sz="1200" dirty="0" err="1">
+                <a:latin typeface="Arial" panose="020B0604020202020204" pitchFamily="34" charset="0"/>
+                <a:cs typeface="Arial" panose="020B0604020202020204" pitchFamily="34" charset="0"/>
+              </a:rPr>
+              <a:t>como</a:t>
+            </a:r>
+            <a:r>
+              <a:rPr lang="en-US" sz="1200" dirty="0">
+                <a:latin typeface="Arial" panose="020B0604020202020204" pitchFamily="34" charset="0"/>
+                <a:cs typeface="Arial" panose="020B0604020202020204" pitchFamily="34" charset="0"/>
+              </a:rPr>
+              <a:t> para la </a:t>
+            </a:r>
+            <a:r>
+              <a:rPr lang="en-US" sz="1200" dirty="0" err="1">
+                <a:latin typeface="Arial" panose="020B0604020202020204" pitchFamily="34" charset="0"/>
+                <a:cs typeface="Arial" panose="020B0604020202020204" pitchFamily="34" charset="0"/>
+              </a:rPr>
+              <a:t>guía</a:t>
+            </a:r>
+            <a:r>
+              <a:rPr lang="en-US" sz="1200" dirty="0">
+                <a:latin typeface="Arial" panose="020B0604020202020204" pitchFamily="34" charset="0"/>
+                <a:cs typeface="Arial" panose="020B0604020202020204" pitchFamily="34" charset="0"/>
+              </a:rPr>
+              <a:t> de </a:t>
+            </a:r>
+            <a:r>
+              <a:rPr lang="en-US" sz="1200" dirty="0" err="1">
+                <a:latin typeface="Arial" panose="020B0604020202020204" pitchFamily="34" charset="0"/>
+                <a:cs typeface="Arial" panose="020B0604020202020204" pitchFamily="34" charset="0"/>
+              </a:rPr>
+              <a:t>onda</a:t>
+            </a:r>
+            <a:r>
+              <a:rPr lang="en-US" sz="1200" dirty="0">
+                <a:latin typeface="Arial" panose="020B0604020202020204" pitchFamily="34" charset="0"/>
+                <a:cs typeface="Arial" panose="020B0604020202020204" pitchFamily="34" charset="0"/>
+              </a:rPr>
+              <a:t> deep </a:t>
+            </a:r>
+            <a:r>
+              <a:rPr lang="en-US" sz="1200" dirty="0" err="1">
+                <a:latin typeface="Arial" panose="020B0604020202020204" pitchFamily="34" charset="0"/>
+                <a:cs typeface="Arial" panose="020B0604020202020204" pitchFamily="34" charset="0"/>
+              </a:rPr>
+              <a:t>solamente</a:t>
+            </a:r>
+            <a:r>
+              <a:rPr lang="en-US" sz="1200" dirty="0">
+                <a:latin typeface="Arial" panose="020B0604020202020204" pitchFamily="34" charset="0"/>
+                <a:cs typeface="Arial" panose="020B0604020202020204" pitchFamily="34" charset="0"/>
+              </a:rPr>
+              <a:t> se </a:t>
+            </a:r>
+            <a:r>
+              <a:rPr lang="en-US" sz="1200" dirty="0" err="1">
+                <a:latin typeface="Arial" panose="020B0604020202020204" pitchFamily="34" charset="0"/>
+                <a:cs typeface="Arial" panose="020B0604020202020204" pitchFamily="34" charset="0"/>
+              </a:rPr>
+              <a:t>propaga</a:t>
+            </a:r>
+            <a:r>
+              <a:rPr lang="en-US" sz="1200" dirty="0">
+                <a:latin typeface="Arial" panose="020B0604020202020204" pitchFamily="34" charset="0"/>
+                <a:cs typeface="Arial" panose="020B0604020202020204" pitchFamily="34" charset="0"/>
+              </a:rPr>
+              <a:t> </a:t>
+            </a:r>
+            <a:r>
+              <a:rPr lang="en-US" sz="1200" dirty="0" err="1">
+                <a:latin typeface="Arial" panose="020B0604020202020204" pitchFamily="34" charset="0"/>
+                <a:cs typeface="Arial" panose="020B0604020202020204" pitchFamily="34" charset="0"/>
+              </a:rPr>
+              <a:t>el</a:t>
+            </a:r>
+            <a:r>
+              <a:rPr lang="en-US" sz="1200" dirty="0">
+                <a:latin typeface="Arial" panose="020B0604020202020204" pitchFamily="34" charset="0"/>
+                <a:cs typeface="Arial" panose="020B0604020202020204" pitchFamily="34" charset="0"/>
+              </a:rPr>
+              <a:t> modo 0 y 1, </a:t>
+            </a:r>
+            <a:r>
+              <a:rPr lang="en-US" sz="1200" dirty="0" err="1">
+                <a:latin typeface="Arial" panose="020B0604020202020204" pitchFamily="34" charset="0"/>
+                <a:cs typeface="Arial" panose="020B0604020202020204" pitchFamily="34" charset="0"/>
+              </a:rPr>
+              <a:t>mientras</a:t>
+            </a:r>
+            <a:r>
+              <a:rPr lang="en-US" sz="1200" dirty="0">
+                <a:latin typeface="Arial" panose="020B0604020202020204" pitchFamily="34" charset="0"/>
+                <a:cs typeface="Arial" panose="020B0604020202020204" pitchFamily="34" charset="0"/>
+              </a:rPr>
+              <a:t> </a:t>
+            </a:r>
+            <a:r>
+              <a:rPr lang="en-US" sz="1200" dirty="0" err="1">
+                <a:latin typeface="Arial" panose="020B0604020202020204" pitchFamily="34" charset="0"/>
+                <a:cs typeface="Arial" panose="020B0604020202020204" pitchFamily="34" charset="0"/>
+              </a:rPr>
+              <a:t>que</a:t>
+            </a:r>
+            <a:r>
+              <a:rPr lang="en-US" sz="1200" dirty="0">
+                <a:latin typeface="Arial" panose="020B0604020202020204" pitchFamily="34" charset="0"/>
+                <a:cs typeface="Arial" panose="020B0604020202020204" pitchFamily="34" charset="0"/>
+              </a:rPr>
+              <a:t> </a:t>
+            </a:r>
+            <a:r>
+              <a:rPr lang="en-US" sz="1200" dirty="0" err="1">
+                <a:latin typeface="Arial" panose="020B0604020202020204" pitchFamily="34" charset="0"/>
+                <a:cs typeface="Arial" panose="020B0604020202020204" pitchFamily="34" charset="0"/>
+              </a:rPr>
+              <a:t>por</a:t>
+            </a:r>
+            <a:r>
+              <a:rPr lang="en-US" sz="1200" dirty="0">
+                <a:latin typeface="Arial" panose="020B0604020202020204" pitchFamily="34" charset="0"/>
+                <a:cs typeface="Arial" panose="020B0604020202020204" pitchFamily="34" charset="0"/>
+              </a:rPr>
+              <a:t> </a:t>
+            </a:r>
+            <a:r>
+              <a:rPr lang="en-US" sz="1200" dirty="0" err="1">
+                <a:latin typeface="Arial" panose="020B0604020202020204" pitchFamily="34" charset="0"/>
+                <a:cs typeface="Arial" panose="020B0604020202020204" pitchFamily="34" charset="0"/>
+              </a:rPr>
+              <a:t>otro</a:t>
+            </a:r>
+            <a:r>
+              <a:rPr lang="en-US" sz="1200" dirty="0">
+                <a:latin typeface="Arial" panose="020B0604020202020204" pitchFamily="34" charset="0"/>
+                <a:cs typeface="Arial" panose="020B0604020202020204" pitchFamily="34" charset="0"/>
+              </a:rPr>
+              <a:t> </a:t>
+            </a:r>
+            <a:r>
+              <a:rPr lang="en-US" sz="1200" dirty="0" err="1">
+                <a:latin typeface="Arial" panose="020B0604020202020204" pitchFamily="34" charset="0"/>
+                <a:cs typeface="Arial" panose="020B0604020202020204" pitchFamily="34" charset="0"/>
+              </a:rPr>
+              <a:t>lado</a:t>
+            </a:r>
+            <a:r>
+              <a:rPr lang="en-US" sz="1200" dirty="0">
+                <a:latin typeface="Arial" panose="020B0604020202020204" pitchFamily="34" charset="0"/>
+                <a:cs typeface="Arial" panose="020B0604020202020204" pitchFamily="34" charset="0"/>
+              </a:rPr>
+              <a:t>, para la </a:t>
+            </a:r>
+            <a:r>
+              <a:rPr lang="en-US" sz="1200" dirty="0" err="1">
+                <a:latin typeface="Arial" panose="020B0604020202020204" pitchFamily="34" charset="0"/>
+                <a:cs typeface="Arial" panose="020B0604020202020204" pitchFamily="34" charset="0"/>
+              </a:rPr>
+              <a:t>guía</a:t>
+            </a:r>
+            <a:r>
+              <a:rPr lang="en-US" sz="1200" dirty="0">
+                <a:latin typeface="Arial" panose="020B0604020202020204" pitchFamily="34" charset="0"/>
+                <a:cs typeface="Arial" panose="020B0604020202020204" pitchFamily="34" charset="0"/>
+              </a:rPr>
+              <a:t> de </a:t>
+            </a:r>
+            <a:r>
+              <a:rPr lang="en-US" sz="1200" dirty="0" err="1">
+                <a:latin typeface="Arial" panose="020B0604020202020204" pitchFamily="34" charset="0"/>
+                <a:cs typeface="Arial" panose="020B0604020202020204" pitchFamily="34" charset="0"/>
+              </a:rPr>
+              <a:t>onda</a:t>
+            </a:r>
+            <a:r>
+              <a:rPr lang="en-US" sz="1200" dirty="0">
+                <a:latin typeface="Arial" panose="020B0604020202020204" pitchFamily="34" charset="0"/>
+                <a:cs typeface="Arial" panose="020B0604020202020204" pitchFamily="34" charset="0"/>
+              </a:rPr>
+              <a:t> shallow se </a:t>
+            </a:r>
+            <a:r>
+              <a:rPr lang="en-US" sz="1200" dirty="0" err="1">
+                <a:latin typeface="Arial" panose="020B0604020202020204" pitchFamily="34" charset="0"/>
+                <a:cs typeface="Arial" panose="020B0604020202020204" pitchFamily="34" charset="0"/>
+              </a:rPr>
+              <a:t>propagan</a:t>
+            </a:r>
+            <a:r>
+              <a:rPr lang="en-US" sz="1200" dirty="0">
+                <a:latin typeface="Arial" panose="020B0604020202020204" pitchFamily="34" charset="0"/>
+                <a:cs typeface="Arial" panose="020B0604020202020204" pitchFamily="34" charset="0"/>
+              </a:rPr>
+              <a:t> </a:t>
+            </a:r>
+            <a:r>
+              <a:rPr lang="en-US" sz="1200" dirty="0" err="1">
+                <a:latin typeface="Arial" panose="020B0604020202020204" pitchFamily="34" charset="0"/>
+                <a:cs typeface="Arial" panose="020B0604020202020204" pitchFamily="34" charset="0"/>
+              </a:rPr>
+              <a:t>todas</a:t>
+            </a:r>
+            <a:r>
+              <a:rPr lang="en-US" sz="1200" dirty="0">
+                <a:latin typeface="Arial" panose="020B0604020202020204" pitchFamily="34" charset="0"/>
+                <a:cs typeface="Arial" panose="020B0604020202020204" pitchFamily="34" charset="0"/>
+              </a:rPr>
+              <a:t>. </a:t>
+            </a:r>
+          </a:p>
+          <a:p>
+            <a:pPr algn="just"/>
+            <a:endParaRPr lang="en-US" sz="1200" dirty="0">
+              <a:latin typeface="Arial" panose="020B0604020202020204" pitchFamily="34" charset="0"/>
+              <a:cs typeface="Arial" panose="020B0604020202020204" pitchFamily="34" charset="0"/>
+            </a:endParaRPr>
+          </a:p>
+          <a:p>
+            <a:pPr algn="just"/>
+            <a:r>
+              <a:rPr lang="en-US" sz="1200" dirty="0">
+                <a:latin typeface="Arial" panose="020B0604020202020204" pitchFamily="34" charset="0"/>
+                <a:cs typeface="Arial" panose="020B0604020202020204" pitchFamily="34" charset="0"/>
+              </a:rPr>
+              <a:t>Para </a:t>
+            </a:r>
+            <a:r>
+              <a:rPr lang="en-US" sz="1200" dirty="0" err="1">
+                <a:latin typeface="Arial" panose="020B0604020202020204" pitchFamily="34" charset="0"/>
+                <a:cs typeface="Arial" panose="020B0604020202020204" pitchFamily="34" charset="0"/>
+              </a:rPr>
+              <a:t>entender</a:t>
+            </a:r>
+            <a:r>
+              <a:rPr lang="en-US" sz="1200" dirty="0">
+                <a:latin typeface="Arial" panose="020B0604020202020204" pitchFamily="34" charset="0"/>
+                <a:cs typeface="Arial" panose="020B0604020202020204" pitchFamily="34" charset="0"/>
+              </a:rPr>
+              <a:t> </a:t>
+            </a:r>
+            <a:r>
+              <a:rPr lang="en-US" sz="1200" dirty="0" err="1">
+                <a:latin typeface="Arial" panose="020B0604020202020204" pitchFamily="34" charset="0"/>
+                <a:cs typeface="Arial" panose="020B0604020202020204" pitchFamily="34" charset="0"/>
+              </a:rPr>
+              <a:t>esto</a:t>
+            </a:r>
+            <a:r>
+              <a:rPr lang="en-US" sz="1200" dirty="0">
+                <a:latin typeface="Arial" panose="020B0604020202020204" pitchFamily="34" charset="0"/>
+                <a:cs typeface="Arial" panose="020B0604020202020204" pitchFamily="34" charset="0"/>
+              </a:rPr>
+              <a:t>, es </a:t>
+            </a:r>
+            <a:r>
+              <a:rPr lang="en-US" sz="1200" dirty="0" err="1">
+                <a:latin typeface="Arial" panose="020B0604020202020204" pitchFamily="34" charset="0"/>
+                <a:cs typeface="Arial" panose="020B0604020202020204" pitchFamily="34" charset="0"/>
+              </a:rPr>
+              <a:t>necesario</a:t>
+            </a:r>
+            <a:r>
+              <a:rPr lang="en-US" sz="1200" dirty="0">
+                <a:latin typeface="Arial" panose="020B0604020202020204" pitchFamily="34" charset="0"/>
+                <a:cs typeface="Arial" panose="020B0604020202020204" pitchFamily="34" charset="0"/>
+              </a:rPr>
+              <a:t> saber </a:t>
+            </a:r>
+            <a:r>
+              <a:rPr lang="en-US" sz="1200" dirty="0" err="1">
+                <a:latin typeface="Arial" panose="020B0604020202020204" pitchFamily="34" charset="0"/>
+                <a:cs typeface="Arial" panose="020B0604020202020204" pitchFamily="34" charset="0"/>
+              </a:rPr>
+              <a:t>que</a:t>
+            </a:r>
+            <a:r>
+              <a:rPr lang="en-US" sz="1200" dirty="0">
+                <a:latin typeface="Arial" panose="020B0604020202020204" pitchFamily="34" charset="0"/>
+                <a:cs typeface="Arial" panose="020B0604020202020204" pitchFamily="34" charset="0"/>
+              </a:rPr>
+              <a:t> para </a:t>
+            </a:r>
+            <a:r>
+              <a:rPr lang="en-US" sz="1200" dirty="0" err="1">
+                <a:latin typeface="Arial" panose="020B0604020202020204" pitchFamily="34" charset="0"/>
+                <a:cs typeface="Arial" panose="020B0604020202020204" pitchFamily="34" charset="0"/>
+              </a:rPr>
+              <a:t>que</a:t>
+            </a:r>
+            <a:r>
+              <a:rPr lang="en-US" sz="1200" dirty="0">
+                <a:latin typeface="Arial" panose="020B0604020202020204" pitchFamily="34" charset="0"/>
+                <a:cs typeface="Arial" panose="020B0604020202020204" pitchFamily="34" charset="0"/>
+              </a:rPr>
+              <a:t> se </a:t>
+            </a:r>
+            <a:r>
+              <a:rPr lang="en-US" sz="1200" dirty="0" err="1">
+                <a:latin typeface="Arial" panose="020B0604020202020204" pitchFamily="34" charset="0"/>
+                <a:cs typeface="Arial" panose="020B0604020202020204" pitchFamily="34" charset="0"/>
+              </a:rPr>
+              <a:t>considere</a:t>
+            </a:r>
+            <a:r>
+              <a:rPr lang="en-US" sz="1200" dirty="0">
+                <a:latin typeface="Arial" panose="020B0604020202020204" pitchFamily="34" charset="0"/>
+                <a:cs typeface="Arial" panose="020B0604020202020204" pitchFamily="34" charset="0"/>
+              </a:rPr>
+              <a:t> </a:t>
+            </a:r>
+            <a:r>
+              <a:rPr lang="en-US" sz="1200" dirty="0" err="1">
+                <a:latin typeface="Arial" panose="020B0604020202020204" pitchFamily="34" charset="0"/>
+                <a:cs typeface="Arial" panose="020B0604020202020204" pitchFamily="34" charset="0"/>
+              </a:rPr>
+              <a:t>que</a:t>
+            </a:r>
+            <a:r>
+              <a:rPr lang="en-US" sz="1200" dirty="0">
+                <a:latin typeface="Arial" panose="020B0604020202020204" pitchFamily="34" charset="0"/>
+                <a:cs typeface="Arial" panose="020B0604020202020204" pitchFamily="34" charset="0"/>
+              </a:rPr>
+              <a:t> un modo se </a:t>
+            </a:r>
+            <a:r>
+              <a:rPr lang="en-US" sz="1200" dirty="0" err="1">
+                <a:latin typeface="Arial" panose="020B0604020202020204" pitchFamily="34" charset="0"/>
+                <a:cs typeface="Arial" panose="020B0604020202020204" pitchFamily="34" charset="0"/>
+              </a:rPr>
+              <a:t>está</a:t>
+            </a:r>
+            <a:r>
+              <a:rPr lang="en-US" sz="1200" dirty="0">
+                <a:latin typeface="Arial" panose="020B0604020202020204" pitchFamily="34" charset="0"/>
+                <a:cs typeface="Arial" panose="020B0604020202020204" pitchFamily="34" charset="0"/>
+              </a:rPr>
+              <a:t> propaganda, </a:t>
+            </a:r>
+            <a:r>
+              <a:rPr lang="en-US" sz="1200" dirty="0" err="1">
+                <a:latin typeface="Arial" panose="020B0604020202020204" pitchFamily="34" charset="0"/>
+                <a:cs typeface="Arial" panose="020B0604020202020204" pitchFamily="34" charset="0"/>
+              </a:rPr>
+              <a:t>su</a:t>
+            </a:r>
+            <a:r>
+              <a:rPr lang="en-US" sz="1200" dirty="0">
+                <a:latin typeface="Arial" panose="020B0604020202020204" pitchFamily="34" charset="0"/>
+                <a:cs typeface="Arial" panose="020B0604020202020204" pitchFamily="34" charset="0"/>
+              </a:rPr>
+              <a:t> </a:t>
+            </a:r>
+            <a:r>
+              <a:rPr lang="en-US" sz="1200" dirty="0" err="1">
+                <a:latin typeface="Arial" panose="020B0604020202020204" pitchFamily="34" charset="0"/>
+                <a:cs typeface="Arial" panose="020B0604020202020204" pitchFamily="34" charset="0"/>
+              </a:rPr>
+              <a:t>índice</a:t>
+            </a:r>
+            <a:r>
+              <a:rPr lang="en-US" sz="1200" dirty="0">
+                <a:latin typeface="Arial" panose="020B0604020202020204" pitchFamily="34" charset="0"/>
+                <a:cs typeface="Arial" panose="020B0604020202020204" pitchFamily="34" charset="0"/>
+              </a:rPr>
+              <a:t> </a:t>
+            </a:r>
+            <a:r>
+              <a:rPr lang="en-US" sz="1200" dirty="0" err="1">
+                <a:latin typeface="Arial" panose="020B0604020202020204" pitchFamily="34" charset="0"/>
+                <a:cs typeface="Arial" panose="020B0604020202020204" pitchFamily="34" charset="0"/>
+              </a:rPr>
+              <a:t>efectivo</a:t>
+            </a:r>
+            <a:r>
+              <a:rPr lang="en-US" sz="1200" dirty="0">
+                <a:latin typeface="Arial" panose="020B0604020202020204" pitchFamily="34" charset="0"/>
+                <a:cs typeface="Arial" panose="020B0604020202020204" pitchFamily="34" charset="0"/>
+              </a:rPr>
+              <a:t> </a:t>
+            </a:r>
+            <a:r>
+              <a:rPr lang="en-US" sz="1200" dirty="0" err="1">
+                <a:latin typeface="Arial" panose="020B0604020202020204" pitchFamily="34" charset="0"/>
+                <a:cs typeface="Arial" panose="020B0604020202020204" pitchFamily="34" charset="0"/>
+              </a:rPr>
+              <a:t>tiene</a:t>
+            </a:r>
+            <a:r>
+              <a:rPr lang="en-US" sz="1200" dirty="0">
+                <a:latin typeface="Arial" panose="020B0604020202020204" pitchFamily="34" charset="0"/>
+                <a:cs typeface="Arial" panose="020B0604020202020204" pitchFamily="34" charset="0"/>
+              </a:rPr>
+              <a:t> </a:t>
+            </a:r>
+            <a:r>
+              <a:rPr lang="en-US" sz="1200" dirty="0" err="1">
+                <a:latin typeface="Arial" panose="020B0604020202020204" pitchFamily="34" charset="0"/>
+                <a:cs typeface="Arial" panose="020B0604020202020204" pitchFamily="34" charset="0"/>
+              </a:rPr>
+              <a:t>que</a:t>
+            </a:r>
+            <a:r>
+              <a:rPr lang="en-US" sz="1200" dirty="0">
+                <a:latin typeface="Arial" panose="020B0604020202020204" pitchFamily="34" charset="0"/>
+                <a:cs typeface="Arial" panose="020B0604020202020204" pitchFamily="34" charset="0"/>
+              </a:rPr>
+              <a:t> ser </a:t>
+            </a:r>
+            <a:r>
+              <a:rPr lang="en-US" sz="1200" dirty="0" err="1">
+                <a:latin typeface="Arial" panose="020B0604020202020204" pitchFamily="34" charset="0"/>
+                <a:cs typeface="Arial" panose="020B0604020202020204" pitchFamily="34" charset="0"/>
+              </a:rPr>
+              <a:t>menor</a:t>
+            </a:r>
+            <a:r>
+              <a:rPr lang="en-US" sz="1200" dirty="0">
+                <a:latin typeface="Arial" panose="020B0604020202020204" pitchFamily="34" charset="0"/>
+                <a:cs typeface="Arial" panose="020B0604020202020204" pitchFamily="34" charset="0"/>
+              </a:rPr>
+              <a:t> </a:t>
+            </a:r>
+            <a:r>
+              <a:rPr lang="en-US" sz="1200" dirty="0" err="1">
+                <a:latin typeface="Arial" panose="020B0604020202020204" pitchFamily="34" charset="0"/>
+                <a:cs typeface="Arial" panose="020B0604020202020204" pitchFamily="34" charset="0"/>
+              </a:rPr>
+              <a:t>que</a:t>
+            </a:r>
+            <a:r>
+              <a:rPr lang="en-US" sz="1200" dirty="0">
+                <a:latin typeface="Arial" panose="020B0604020202020204" pitchFamily="34" charset="0"/>
+                <a:cs typeface="Arial" panose="020B0604020202020204" pitchFamily="34" charset="0"/>
+              </a:rPr>
+              <a:t> </a:t>
+            </a:r>
+            <a:r>
+              <a:rPr lang="en-US" sz="1200" dirty="0" err="1">
+                <a:latin typeface="Arial" panose="020B0604020202020204" pitchFamily="34" charset="0"/>
+                <a:cs typeface="Arial" panose="020B0604020202020204" pitchFamily="34" charset="0"/>
+              </a:rPr>
+              <a:t>el</a:t>
+            </a:r>
+            <a:r>
+              <a:rPr lang="en-US" sz="1200" dirty="0">
+                <a:latin typeface="Arial" panose="020B0604020202020204" pitchFamily="34" charset="0"/>
+                <a:cs typeface="Arial" panose="020B0604020202020204" pitchFamily="34" charset="0"/>
+              </a:rPr>
+              <a:t> del </a:t>
+            </a:r>
+            <a:r>
+              <a:rPr lang="en-US" sz="1200" dirty="0" err="1">
+                <a:latin typeface="Arial" panose="020B0604020202020204" pitchFamily="34" charset="0"/>
+                <a:cs typeface="Arial" panose="020B0604020202020204" pitchFamily="34" charset="0"/>
+              </a:rPr>
+              <a:t>núcleo</a:t>
+            </a:r>
+            <a:r>
+              <a:rPr lang="en-US" sz="1200" dirty="0">
+                <a:latin typeface="Arial" panose="020B0604020202020204" pitchFamily="34" charset="0"/>
+                <a:cs typeface="Arial" panose="020B0604020202020204" pitchFamily="34" charset="0"/>
+              </a:rPr>
+              <a:t> (</a:t>
+            </a:r>
+            <a:r>
+              <a:rPr lang="en-US" sz="1200" dirty="0" err="1">
+                <a:latin typeface="Arial" panose="020B0604020202020204" pitchFamily="34" charset="0"/>
+                <a:cs typeface="Arial" panose="020B0604020202020204" pitchFamily="34" charset="0"/>
+              </a:rPr>
+              <a:t>en</a:t>
+            </a:r>
+            <a:r>
+              <a:rPr lang="en-US" sz="1200" dirty="0">
+                <a:latin typeface="Arial" panose="020B0604020202020204" pitchFamily="34" charset="0"/>
+                <a:cs typeface="Arial" panose="020B0604020202020204" pitchFamily="34" charset="0"/>
+              </a:rPr>
+              <a:t> </a:t>
+            </a:r>
+            <a:r>
+              <a:rPr lang="en-US" sz="1200" dirty="0" err="1">
+                <a:latin typeface="Arial" panose="020B0604020202020204" pitchFamily="34" charset="0"/>
+                <a:cs typeface="Arial" panose="020B0604020202020204" pitchFamily="34" charset="0"/>
+              </a:rPr>
+              <a:t>este</a:t>
+            </a:r>
+            <a:r>
+              <a:rPr lang="en-US" sz="1200" dirty="0">
+                <a:latin typeface="Arial" panose="020B0604020202020204" pitchFamily="34" charset="0"/>
+                <a:cs typeface="Arial" panose="020B0604020202020204" pitchFamily="34" charset="0"/>
+              </a:rPr>
+              <a:t> </a:t>
+            </a:r>
+            <a:r>
+              <a:rPr lang="en-US" sz="1200" dirty="0" err="1">
+                <a:latin typeface="Arial" panose="020B0604020202020204" pitchFamily="34" charset="0"/>
+                <a:cs typeface="Arial" panose="020B0604020202020204" pitchFamily="34" charset="0"/>
+              </a:rPr>
+              <a:t>caso</a:t>
+            </a:r>
+            <a:r>
+              <a:rPr lang="en-US" sz="1200" dirty="0">
+                <a:latin typeface="Arial" panose="020B0604020202020204" pitchFamily="34" charset="0"/>
+                <a:cs typeface="Arial" panose="020B0604020202020204" pitchFamily="34" charset="0"/>
+              </a:rPr>
+              <a:t> 2), y mayor </a:t>
+            </a:r>
+            <a:r>
+              <a:rPr lang="en-US" sz="1200" dirty="0" err="1">
+                <a:latin typeface="Arial" panose="020B0604020202020204" pitchFamily="34" charset="0"/>
+                <a:cs typeface="Arial" panose="020B0604020202020204" pitchFamily="34" charset="0"/>
+              </a:rPr>
+              <a:t>que</a:t>
+            </a:r>
+            <a:r>
+              <a:rPr lang="en-US" sz="1200" dirty="0">
+                <a:latin typeface="Arial" panose="020B0604020202020204" pitchFamily="34" charset="0"/>
+                <a:cs typeface="Arial" panose="020B0604020202020204" pitchFamily="34" charset="0"/>
+              </a:rPr>
+              <a:t> </a:t>
+            </a:r>
+            <a:r>
+              <a:rPr lang="en-US" sz="1200" dirty="0" err="1">
+                <a:latin typeface="Arial" panose="020B0604020202020204" pitchFamily="34" charset="0"/>
+                <a:cs typeface="Arial" panose="020B0604020202020204" pitchFamily="34" charset="0"/>
+              </a:rPr>
+              <a:t>el</a:t>
+            </a:r>
+            <a:r>
+              <a:rPr lang="en-US" sz="1200" dirty="0">
+                <a:latin typeface="Arial" panose="020B0604020202020204" pitchFamily="34" charset="0"/>
+                <a:cs typeface="Arial" panose="020B0604020202020204" pitchFamily="34" charset="0"/>
+              </a:rPr>
+              <a:t> de la </a:t>
+            </a:r>
+            <a:r>
+              <a:rPr lang="en-US" sz="1200" dirty="0" err="1">
+                <a:latin typeface="Arial" panose="020B0604020202020204" pitchFamily="34" charset="0"/>
+                <a:cs typeface="Arial" panose="020B0604020202020204" pitchFamily="34" charset="0"/>
+              </a:rPr>
+              <a:t>cubierta</a:t>
+            </a:r>
+            <a:r>
+              <a:rPr lang="en-US" sz="1200" dirty="0">
+                <a:latin typeface="Arial" panose="020B0604020202020204" pitchFamily="34" charset="0"/>
+                <a:cs typeface="Arial" panose="020B0604020202020204" pitchFamily="34" charset="0"/>
+              </a:rPr>
+              <a:t>  (</a:t>
+            </a:r>
+            <a:r>
+              <a:rPr lang="en-US" sz="1200" dirty="0" err="1">
+                <a:latin typeface="Arial" panose="020B0604020202020204" pitchFamily="34" charset="0"/>
+                <a:cs typeface="Arial" panose="020B0604020202020204" pitchFamily="34" charset="0"/>
+              </a:rPr>
+              <a:t>en</a:t>
+            </a:r>
+            <a:r>
+              <a:rPr lang="en-US" sz="1200" dirty="0">
+                <a:latin typeface="Arial" panose="020B0604020202020204" pitchFamily="34" charset="0"/>
+                <a:cs typeface="Arial" panose="020B0604020202020204" pitchFamily="34" charset="0"/>
+              </a:rPr>
+              <a:t> </a:t>
+            </a:r>
+            <a:r>
+              <a:rPr lang="en-US" sz="1200" dirty="0" err="1">
+                <a:latin typeface="Arial" panose="020B0604020202020204" pitchFamily="34" charset="0"/>
+                <a:cs typeface="Arial" panose="020B0604020202020204" pitchFamily="34" charset="0"/>
+              </a:rPr>
+              <a:t>este</a:t>
+            </a:r>
+            <a:r>
+              <a:rPr lang="en-US" sz="1200" dirty="0">
+                <a:latin typeface="Arial" panose="020B0604020202020204" pitchFamily="34" charset="0"/>
+                <a:cs typeface="Arial" panose="020B0604020202020204" pitchFamily="34" charset="0"/>
+              </a:rPr>
+              <a:t> </a:t>
+            </a:r>
+            <a:r>
+              <a:rPr lang="en-US" sz="1200" dirty="0" err="1">
+                <a:latin typeface="Arial" panose="020B0604020202020204" pitchFamily="34" charset="0"/>
+                <a:cs typeface="Arial" panose="020B0604020202020204" pitchFamily="34" charset="0"/>
+              </a:rPr>
+              <a:t>caso</a:t>
+            </a:r>
+            <a:r>
+              <a:rPr lang="en-US" sz="1200" dirty="0">
+                <a:latin typeface="Arial" panose="020B0604020202020204" pitchFamily="34" charset="0"/>
+                <a:cs typeface="Arial" panose="020B0604020202020204" pitchFamily="34" charset="0"/>
+              </a:rPr>
+              <a:t> 1.55). </a:t>
+            </a:r>
+            <a:r>
+              <a:rPr lang="en-US" sz="1200" dirty="0" err="1">
+                <a:latin typeface="Arial" panose="020B0604020202020204" pitchFamily="34" charset="0"/>
+                <a:cs typeface="Arial" panose="020B0604020202020204" pitchFamily="34" charset="0"/>
+              </a:rPr>
+              <a:t>Además</a:t>
+            </a:r>
+            <a:r>
+              <a:rPr lang="en-US" sz="1200" dirty="0">
+                <a:latin typeface="Arial" panose="020B0604020202020204" pitchFamily="34" charset="0"/>
+                <a:cs typeface="Arial" panose="020B0604020202020204" pitchFamily="34" charset="0"/>
+              </a:rPr>
+              <a:t>, </a:t>
+            </a:r>
+            <a:r>
+              <a:rPr lang="en-US" sz="1200" dirty="0" err="1">
+                <a:latin typeface="Arial" panose="020B0604020202020204" pitchFamily="34" charset="0"/>
+                <a:cs typeface="Arial" panose="020B0604020202020204" pitchFamily="34" charset="0"/>
+              </a:rPr>
+              <a:t>como</a:t>
+            </a:r>
+            <a:r>
+              <a:rPr lang="en-US" sz="1200" dirty="0">
+                <a:latin typeface="Arial" panose="020B0604020202020204" pitchFamily="34" charset="0"/>
+                <a:cs typeface="Arial" panose="020B0604020202020204" pitchFamily="34" charset="0"/>
+              </a:rPr>
+              <a:t> </a:t>
+            </a:r>
+            <a:r>
+              <a:rPr lang="en-US" sz="1200" dirty="0" err="1">
+                <a:latin typeface="Arial" panose="020B0604020202020204" pitchFamily="34" charset="0"/>
+                <a:cs typeface="Arial" panose="020B0604020202020204" pitchFamily="34" charset="0"/>
+              </a:rPr>
+              <a:t>hemos</a:t>
+            </a:r>
+            <a:r>
+              <a:rPr lang="en-US" sz="1200" dirty="0">
+                <a:latin typeface="Arial" panose="020B0604020202020204" pitchFamily="34" charset="0"/>
+                <a:cs typeface="Arial" panose="020B0604020202020204" pitchFamily="34" charset="0"/>
+              </a:rPr>
+              <a:t> visto </a:t>
+            </a:r>
+            <a:r>
+              <a:rPr lang="en-US" sz="1200" dirty="0" err="1">
+                <a:latin typeface="Arial" panose="020B0604020202020204" pitchFamily="34" charset="0"/>
+                <a:cs typeface="Arial" panose="020B0604020202020204" pitchFamily="34" charset="0"/>
+              </a:rPr>
+              <a:t>en</a:t>
+            </a:r>
+            <a:r>
+              <a:rPr lang="en-US" sz="1200" dirty="0">
+                <a:latin typeface="Arial" panose="020B0604020202020204" pitchFamily="34" charset="0"/>
+                <a:cs typeface="Arial" panose="020B0604020202020204" pitchFamily="34" charset="0"/>
+              </a:rPr>
+              <a:t> las </a:t>
+            </a:r>
+            <a:r>
+              <a:rPr lang="en-US" sz="1200" dirty="0" err="1">
+                <a:latin typeface="Arial" panose="020B0604020202020204" pitchFamily="34" charset="0"/>
+                <a:cs typeface="Arial" panose="020B0604020202020204" pitchFamily="34" charset="0"/>
+              </a:rPr>
+              <a:t>figuras</a:t>
+            </a:r>
+            <a:r>
+              <a:rPr lang="en-US" sz="1200" dirty="0">
+                <a:latin typeface="Arial" panose="020B0604020202020204" pitchFamily="34" charset="0"/>
+                <a:cs typeface="Arial" panose="020B0604020202020204" pitchFamily="34" charset="0"/>
+              </a:rPr>
+              <a:t> de las cross sections, la </a:t>
+            </a:r>
+            <a:r>
+              <a:rPr lang="en-US" sz="1200" dirty="0" err="1">
+                <a:latin typeface="Arial" panose="020B0604020202020204" pitchFamily="34" charset="0"/>
+                <a:cs typeface="Arial" panose="020B0604020202020204" pitchFamily="34" charset="0"/>
+              </a:rPr>
+              <a:t>guía</a:t>
+            </a:r>
+            <a:r>
+              <a:rPr lang="en-US" sz="1200" dirty="0">
+                <a:latin typeface="Arial" panose="020B0604020202020204" pitchFamily="34" charset="0"/>
+                <a:cs typeface="Arial" panose="020B0604020202020204" pitchFamily="34" charset="0"/>
+              </a:rPr>
+              <a:t> shallow, al </a:t>
+            </a:r>
+            <a:r>
+              <a:rPr lang="en-US" sz="1200" dirty="0" err="1">
+                <a:latin typeface="Arial" panose="020B0604020202020204" pitchFamily="34" charset="0"/>
+                <a:cs typeface="Arial" panose="020B0604020202020204" pitchFamily="34" charset="0"/>
+              </a:rPr>
+              <a:t>tener</a:t>
+            </a:r>
+            <a:r>
+              <a:rPr lang="en-US" sz="1200" dirty="0">
+                <a:latin typeface="Arial" panose="020B0604020202020204" pitchFamily="34" charset="0"/>
+                <a:cs typeface="Arial" panose="020B0604020202020204" pitchFamily="34" charset="0"/>
+              </a:rPr>
+              <a:t> un slab  </a:t>
+            </a:r>
+            <a:r>
+              <a:rPr lang="en-US" sz="1200" dirty="0" err="1">
+                <a:latin typeface="Arial" panose="020B0604020202020204" pitchFamily="34" charset="0"/>
+                <a:cs typeface="Arial" panose="020B0604020202020204" pitchFamily="34" charset="0"/>
+              </a:rPr>
+              <a:t>hace</a:t>
+            </a:r>
+            <a:r>
+              <a:rPr lang="en-US" sz="1200" dirty="0">
+                <a:latin typeface="Arial" panose="020B0604020202020204" pitchFamily="34" charset="0"/>
+                <a:cs typeface="Arial" panose="020B0604020202020204" pitchFamily="34" charset="0"/>
+              </a:rPr>
+              <a:t> </a:t>
+            </a:r>
+            <a:r>
+              <a:rPr lang="en-US" sz="1200" dirty="0" err="1">
+                <a:latin typeface="Arial" panose="020B0604020202020204" pitchFamily="34" charset="0"/>
+                <a:cs typeface="Arial" panose="020B0604020202020204" pitchFamily="34" charset="0"/>
+              </a:rPr>
+              <a:t>que</a:t>
+            </a:r>
+            <a:r>
+              <a:rPr lang="en-US" sz="1200" dirty="0">
+                <a:latin typeface="Arial" panose="020B0604020202020204" pitchFamily="34" charset="0"/>
+                <a:cs typeface="Arial" panose="020B0604020202020204" pitchFamily="34" charset="0"/>
+              </a:rPr>
+              <a:t> </a:t>
+            </a:r>
+            <a:r>
+              <a:rPr lang="en-US" sz="1200" dirty="0" err="1">
+                <a:latin typeface="Arial" panose="020B0604020202020204" pitchFamily="34" charset="0"/>
+                <a:cs typeface="Arial" panose="020B0604020202020204" pitchFamily="34" charset="0"/>
+              </a:rPr>
+              <a:t>su</a:t>
+            </a:r>
+            <a:r>
+              <a:rPr lang="en-US" sz="1200" dirty="0">
+                <a:latin typeface="Arial" panose="020B0604020202020204" pitchFamily="34" charset="0"/>
+                <a:cs typeface="Arial" panose="020B0604020202020204" pitchFamily="34" charset="0"/>
+              </a:rPr>
+              <a:t> </a:t>
+            </a:r>
+            <a:r>
+              <a:rPr lang="en-US" sz="1200" dirty="0" err="1">
+                <a:latin typeface="Arial" panose="020B0604020202020204" pitchFamily="34" charset="0"/>
+                <a:cs typeface="Arial" panose="020B0604020202020204" pitchFamily="34" charset="0"/>
+              </a:rPr>
+              <a:t>indice</a:t>
+            </a:r>
+            <a:r>
+              <a:rPr lang="en-US" sz="1200" dirty="0">
+                <a:latin typeface="Arial" panose="020B0604020202020204" pitchFamily="34" charset="0"/>
+                <a:cs typeface="Arial" panose="020B0604020202020204" pitchFamily="34" charset="0"/>
+              </a:rPr>
+              <a:t> </a:t>
+            </a:r>
+            <a:r>
+              <a:rPr lang="en-US" sz="1200" dirty="0" err="1">
+                <a:latin typeface="Arial" panose="020B0604020202020204" pitchFamily="34" charset="0"/>
+                <a:cs typeface="Arial" panose="020B0604020202020204" pitchFamily="34" charset="0"/>
+              </a:rPr>
+              <a:t>efectivo</a:t>
+            </a:r>
+            <a:r>
+              <a:rPr lang="en-US" sz="1200" dirty="0">
+                <a:latin typeface="Arial" panose="020B0604020202020204" pitchFamily="34" charset="0"/>
+                <a:cs typeface="Arial" panose="020B0604020202020204" pitchFamily="34" charset="0"/>
+              </a:rPr>
+              <a:t> sea mayor para </a:t>
+            </a:r>
+            <a:r>
+              <a:rPr lang="en-US" sz="1200" dirty="0" err="1">
+                <a:latin typeface="Arial" panose="020B0604020202020204" pitchFamily="34" charset="0"/>
+                <a:cs typeface="Arial" panose="020B0604020202020204" pitchFamily="34" charset="0"/>
+              </a:rPr>
+              <a:t>todos</a:t>
+            </a:r>
+            <a:r>
+              <a:rPr lang="en-US" sz="1200" dirty="0">
+                <a:latin typeface="Arial" panose="020B0604020202020204" pitchFamily="34" charset="0"/>
+                <a:cs typeface="Arial" panose="020B0604020202020204" pitchFamily="34" charset="0"/>
+              </a:rPr>
+              <a:t> </a:t>
+            </a:r>
+            <a:r>
+              <a:rPr lang="en-US" sz="1200" dirty="0" err="1">
+                <a:latin typeface="Arial" panose="020B0604020202020204" pitchFamily="34" charset="0"/>
+                <a:cs typeface="Arial" panose="020B0604020202020204" pitchFamily="34" charset="0"/>
+              </a:rPr>
+              <a:t>los</a:t>
+            </a:r>
+            <a:r>
+              <a:rPr lang="en-US" sz="1200" dirty="0">
+                <a:latin typeface="Arial" panose="020B0604020202020204" pitchFamily="34" charset="0"/>
+                <a:cs typeface="Arial" panose="020B0604020202020204" pitchFamily="34" charset="0"/>
+              </a:rPr>
+              <a:t> </a:t>
+            </a:r>
+            <a:r>
+              <a:rPr lang="en-US" sz="1200" dirty="0" err="1">
+                <a:latin typeface="Arial" panose="020B0604020202020204" pitchFamily="34" charset="0"/>
+                <a:cs typeface="Arial" panose="020B0604020202020204" pitchFamily="34" charset="0"/>
+              </a:rPr>
+              <a:t>modos</a:t>
+            </a:r>
+            <a:r>
+              <a:rPr lang="en-US" sz="1200" dirty="0">
+                <a:latin typeface="Arial" panose="020B0604020202020204" pitchFamily="34" charset="0"/>
+                <a:cs typeface="Arial" panose="020B0604020202020204" pitchFamily="34" charset="0"/>
+              </a:rPr>
+              <a:t>, al </a:t>
+            </a:r>
+            <a:r>
+              <a:rPr lang="en-US" sz="1200" dirty="0" err="1">
+                <a:latin typeface="Arial" panose="020B0604020202020204" pitchFamily="34" charset="0"/>
+                <a:cs typeface="Arial" panose="020B0604020202020204" pitchFamily="34" charset="0"/>
+              </a:rPr>
+              <a:t>estar</a:t>
+            </a:r>
+            <a:r>
+              <a:rPr lang="en-US" sz="1200" dirty="0">
+                <a:latin typeface="Arial" panose="020B0604020202020204" pitchFamily="34" charset="0"/>
+                <a:cs typeface="Arial" panose="020B0604020202020204" pitchFamily="34" charset="0"/>
+              </a:rPr>
+              <a:t> </a:t>
+            </a:r>
+            <a:r>
+              <a:rPr lang="en-US" sz="1200" dirty="0" err="1">
+                <a:latin typeface="Arial" panose="020B0604020202020204" pitchFamily="34" charset="0"/>
+                <a:cs typeface="Arial" panose="020B0604020202020204" pitchFamily="34" charset="0"/>
+              </a:rPr>
+              <a:t>mejor</a:t>
+            </a:r>
+            <a:r>
+              <a:rPr lang="en-US" sz="1200" dirty="0">
+                <a:latin typeface="Arial" panose="020B0604020202020204" pitchFamily="34" charset="0"/>
+                <a:cs typeface="Arial" panose="020B0604020202020204" pitchFamily="34" charset="0"/>
+              </a:rPr>
+              <a:t> </a:t>
+            </a:r>
+            <a:r>
+              <a:rPr lang="en-US" sz="1200" dirty="0" err="1">
+                <a:latin typeface="Arial" panose="020B0604020202020204" pitchFamily="34" charset="0"/>
+                <a:cs typeface="Arial" panose="020B0604020202020204" pitchFamily="34" charset="0"/>
+              </a:rPr>
+              <a:t>confinado</a:t>
+            </a:r>
+            <a:r>
+              <a:rPr lang="en-US" sz="1200" dirty="0">
+                <a:latin typeface="Arial" panose="020B0604020202020204" pitchFamily="34" charset="0"/>
+                <a:cs typeface="Arial" panose="020B0604020202020204" pitchFamily="34" charset="0"/>
+              </a:rPr>
+              <a:t>. Por </a:t>
+            </a:r>
+            <a:r>
+              <a:rPr lang="en-US" sz="1200" dirty="0" err="1">
+                <a:latin typeface="Arial" panose="020B0604020202020204" pitchFamily="34" charset="0"/>
+                <a:cs typeface="Arial" panose="020B0604020202020204" pitchFamily="34" charset="0"/>
+              </a:rPr>
+              <a:t>otro</a:t>
+            </a:r>
+            <a:r>
+              <a:rPr lang="en-US" sz="1200" dirty="0">
+                <a:latin typeface="Arial" panose="020B0604020202020204" pitchFamily="34" charset="0"/>
+                <a:cs typeface="Arial" panose="020B0604020202020204" pitchFamily="34" charset="0"/>
+              </a:rPr>
+              <a:t> </a:t>
+            </a:r>
+            <a:r>
+              <a:rPr lang="en-US" sz="1200" dirty="0" err="1">
+                <a:latin typeface="Arial" panose="020B0604020202020204" pitchFamily="34" charset="0"/>
+                <a:cs typeface="Arial" panose="020B0604020202020204" pitchFamily="34" charset="0"/>
+              </a:rPr>
+              <a:t>lado</a:t>
+            </a:r>
+            <a:r>
+              <a:rPr lang="en-US" sz="1200" dirty="0">
+                <a:latin typeface="Arial" panose="020B0604020202020204" pitchFamily="34" charset="0"/>
+                <a:cs typeface="Arial" panose="020B0604020202020204" pitchFamily="34" charset="0"/>
+              </a:rPr>
+              <a:t>, </a:t>
+            </a:r>
+            <a:r>
+              <a:rPr lang="en-US" sz="1200" dirty="0" err="1">
+                <a:latin typeface="Arial" panose="020B0604020202020204" pitchFamily="34" charset="0"/>
+                <a:cs typeface="Arial" panose="020B0604020202020204" pitchFamily="34" charset="0"/>
+              </a:rPr>
+              <a:t>en</a:t>
+            </a:r>
+            <a:r>
+              <a:rPr lang="en-US" sz="1200" dirty="0">
+                <a:latin typeface="Arial" panose="020B0604020202020204" pitchFamily="34" charset="0"/>
+                <a:cs typeface="Arial" panose="020B0604020202020204" pitchFamily="34" charset="0"/>
+              </a:rPr>
+              <a:t> la deep al no </a:t>
+            </a:r>
+            <a:r>
+              <a:rPr lang="en-US" sz="1200" dirty="0" err="1">
+                <a:latin typeface="Arial" panose="020B0604020202020204" pitchFamily="34" charset="0"/>
+                <a:cs typeface="Arial" panose="020B0604020202020204" pitchFamily="34" charset="0"/>
+              </a:rPr>
+              <a:t>tener</a:t>
+            </a:r>
+            <a:r>
+              <a:rPr lang="en-US" sz="1200" dirty="0">
+                <a:latin typeface="Arial" panose="020B0604020202020204" pitchFamily="34" charset="0"/>
+                <a:cs typeface="Arial" panose="020B0604020202020204" pitchFamily="34" charset="0"/>
+              </a:rPr>
+              <a:t> </a:t>
+            </a:r>
+            <a:r>
+              <a:rPr lang="en-US" sz="1200" dirty="0" err="1">
+                <a:latin typeface="Arial" panose="020B0604020202020204" pitchFamily="34" charset="0"/>
+                <a:cs typeface="Arial" panose="020B0604020202020204" pitchFamily="34" charset="0"/>
+              </a:rPr>
+              <a:t>este</a:t>
+            </a:r>
+            <a:r>
+              <a:rPr lang="en-US" sz="1200" dirty="0">
+                <a:latin typeface="Arial" panose="020B0604020202020204" pitchFamily="34" charset="0"/>
+                <a:cs typeface="Arial" panose="020B0604020202020204" pitchFamily="34" charset="0"/>
+              </a:rPr>
+              <a:t> material, lo </a:t>
+            </a:r>
+            <a:r>
+              <a:rPr lang="en-US" sz="1200" dirty="0" err="1">
+                <a:latin typeface="Arial" panose="020B0604020202020204" pitchFamily="34" charset="0"/>
+                <a:cs typeface="Arial" panose="020B0604020202020204" pitchFamily="34" charset="0"/>
+              </a:rPr>
+              <a:t>que</a:t>
+            </a:r>
+            <a:r>
+              <a:rPr lang="en-US" sz="1200" dirty="0">
+                <a:latin typeface="Arial" panose="020B0604020202020204" pitchFamily="34" charset="0"/>
+                <a:cs typeface="Arial" panose="020B0604020202020204" pitchFamily="34" charset="0"/>
+              </a:rPr>
+              <a:t> hay </a:t>
+            </a:r>
+            <a:r>
+              <a:rPr lang="en-US" sz="1200" dirty="0" err="1">
+                <a:latin typeface="Arial" panose="020B0604020202020204" pitchFamily="34" charset="0"/>
+                <a:cs typeface="Arial" panose="020B0604020202020204" pitchFamily="34" charset="0"/>
+              </a:rPr>
+              <a:t>despues</a:t>
+            </a:r>
+            <a:r>
+              <a:rPr lang="en-US" sz="1200" dirty="0">
+                <a:latin typeface="Arial" panose="020B0604020202020204" pitchFamily="34" charset="0"/>
+                <a:cs typeface="Arial" panose="020B0604020202020204" pitchFamily="34" charset="0"/>
+              </a:rPr>
+              <a:t> del </a:t>
+            </a:r>
+            <a:r>
+              <a:rPr lang="en-US" sz="1200" dirty="0" err="1">
+                <a:latin typeface="Arial" panose="020B0604020202020204" pitchFamily="34" charset="0"/>
+                <a:cs typeface="Arial" panose="020B0604020202020204" pitchFamily="34" charset="0"/>
+              </a:rPr>
+              <a:t>nucleo</a:t>
+            </a:r>
+            <a:r>
+              <a:rPr lang="en-US" sz="1200" dirty="0">
+                <a:latin typeface="Arial" panose="020B0604020202020204" pitchFamily="34" charset="0"/>
+                <a:cs typeface="Arial" panose="020B0604020202020204" pitchFamily="34" charset="0"/>
+              </a:rPr>
+              <a:t> es material de Si02, </a:t>
+            </a:r>
+            <a:r>
+              <a:rPr lang="en-US" sz="1200" dirty="0" err="1">
+                <a:latin typeface="Arial" panose="020B0604020202020204" pitchFamily="34" charset="0"/>
+                <a:cs typeface="Arial" panose="020B0604020202020204" pitchFamily="34" charset="0"/>
+              </a:rPr>
+              <a:t>por</a:t>
+            </a:r>
+            <a:r>
+              <a:rPr lang="en-US" sz="1200" dirty="0">
+                <a:latin typeface="Arial" panose="020B0604020202020204" pitchFamily="34" charset="0"/>
+                <a:cs typeface="Arial" panose="020B0604020202020204" pitchFamily="34" charset="0"/>
+              </a:rPr>
+              <a:t> lo </a:t>
+            </a:r>
+            <a:r>
+              <a:rPr lang="en-US" sz="1200" dirty="0" err="1">
+                <a:latin typeface="Arial" panose="020B0604020202020204" pitchFamily="34" charset="0"/>
+                <a:cs typeface="Arial" panose="020B0604020202020204" pitchFamily="34" charset="0"/>
+              </a:rPr>
+              <a:t>que</a:t>
+            </a:r>
+            <a:r>
+              <a:rPr lang="en-US" sz="1200" dirty="0">
+                <a:latin typeface="Arial" panose="020B0604020202020204" pitchFamily="34" charset="0"/>
+                <a:cs typeface="Arial" panose="020B0604020202020204" pitchFamily="34" charset="0"/>
+              </a:rPr>
+              <a:t> </a:t>
+            </a:r>
+            <a:r>
+              <a:rPr lang="en-US" sz="1200" dirty="0" err="1">
+                <a:latin typeface="Arial" panose="020B0604020202020204" pitchFamily="34" charset="0"/>
+                <a:cs typeface="Arial" panose="020B0604020202020204" pitchFamily="34" charset="0"/>
+              </a:rPr>
+              <a:t>su</a:t>
+            </a:r>
+            <a:r>
+              <a:rPr lang="en-US" sz="1200" dirty="0">
+                <a:latin typeface="Arial" panose="020B0604020202020204" pitchFamily="34" charset="0"/>
+                <a:cs typeface="Arial" panose="020B0604020202020204" pitchFamily="34" charset="0"/>
+              </a:rPr>
+              <a:t> </a:t>
+            </a:r>
+            <a:r>
+              <a:rPr lang="en-US" sz="1200" dirty="0" err="1">
+                <a:latin typeface="Arial" panose="020B0604020202020204" pitchFamily="34" charset="0"/>
+                <a:cs typeface="Arial" panose="020B0604020202020204" pitchFamily="34" charset="0"/>
+              </a:rPr>
+              <a:t>indice</a:t>
+            </a:r>
+            <a:r>
+              <a:rPr lang="en-US" sz="1200" dirty="0">
+                <a:latin typeface="Arial" panose="020B0604020202020204" pitchFamily="34" charset="0"/>
+                <a:cs typeface="Arial" panose="020B0604020202020204" pitchFamily="34" charset="0"/>
+              </a:rPr>
+              <a:t> </a:t>
+            </a:r>
+            <a:r>
+              <a:rPr lang="en-US" sz="1200" dirty="0" err="1">
+                <a:latin typeface="Arial" panose="020B0604020202020204" pitchFamily="34" charset="0"/>
+                <a:cs typeface="Arial" panose="020B0604020202020204" pitchFamily="34" charset="0"/>
+              </a:rPr>
+              <a:t>efectivo</a:t>
+            </a:r>
+            <a:r>
+              <a:rPr lang="en-US" sz="1200" dirty="0">
+                <a:latin typeface="Arial" panose="020B0604020202020204" pitchFamily="34" charset="0"/>
+                <a:cs typeface="Arial" panose="020B0604020202020204" pitchFamily="34" charset="0"/>
+              </a:rPr>
+              <a:t> </a:t>
+            </a:r>
+            <a:r>
+              <a:rPr lang="en-US" sz="1200" dirty="0" err="1">
+                <a:latin typeface="Arial" panose="020B0604020202020204" pitchFamily="34" charset="0"/>
+                <a:cs typeface="Arial" panose="020B0604020202020204" pitchFamily="34" charset="0"/>
+              </a:rPr>
+              <a:t>disminuye</a:t>
+            </a:r>
+            <a:r>
+              <a:rPr lang="en-US" sz="1200" dirty="0">
+                <a:latin typeface="Arial" panose="020B0604020202020204" pitchFamily="34" charset="0"/>
+                <a:cs typeface="Arial" panose="020B0604020202020204" pitchFamily="34" charset="0"/>
+              </a:rPr>
+              <a:t> mas </a:t>
+            </a:r>
+            <a:r>
+              <a:rPr lang="en-US" sz="1200" dirty="0" err="1">
+                <a:latin typeface="Arial" panose="020B0604020202020204" pitchFamily="34" charset="0"/>
+                <a:cs typeface="Arial" panose="020B0604020202020204" pitchFamily="34" charset="0"/>
+              </a:rPr>
+              <a:t>rapidamente</a:t>
+            </a:r>
+            <a:r>
+              <a:rPr lang="en-US" sz="1200" dirty="0">
+                <a:latin typeface="Arial" panose="020B0604020202020204" pitchFamily="34" charset="0"/>
+                <a:cs typeface="Arial" panose="020B0604020202020204" pitchFamily="34" charset="0"/>
+              </a:rPr>
+              <a:t>, lo </a:t>
+            </a:r>
+            <a:r>
+              <a:rPr lang="en-US" sz="1200" dirty="0" err="1">
+                <a:latin typeface="Arial" panose="020B0604020202020204" pitchFamily="34" charset="0"/>
+                <a:cs typeface="Arial" panose="020B0604020202020204" pitchFamily="34" charset="0"/>
+              </a:rPr>
+              <a:t>cual</a:t>
+            </a:r>
+            <a:r>
+              <a:rPr lang="en-US" sz="1200" dirty="0">
+                <a:latin typeface="Arial" panose="020B0604020202020204" pitchFamily="34" charset="0"/>
+                <a:cs typeface="Arial" panose="020B0604020202020204" pitchFamily="34" charset="0"/>
+              </a:rPr>
+              <a:t>, </a:t>
+            </a:r>
+            <a:r>
+              <a:rPr lang="en-US" sz="1200" dirty="0" err="1">
+                <a:latin typeface="Arial" panose="020B0604020202020204" pitchFamily="34" charset="0"/>
+                <a:cs typeface="Arial" panose="020B0604020202020204" pitchFamily="34" charset="0"/>
+              </a:rPr>
+              <a:t>por</a:t>
+            </a:r>
+            <a:r>
+              <a:rPr lang="en-US" sz="1200" dirty="0">
+                <a:latin typeface="Arial" panose="020B0604020202020204" pitchFamily="34" charset="0"/>
+                <a:cs typeface="Arial" panose="020B0604020202020204" pitchFamily="34" charset="0"/>
+              </a:rPr>
+              <a:t> </a:t>
+            </a:r>
+            <a:r>
+              <a:rPr lang="en-US" sz="1200" dirty="0" err="1">
+                <a:latin typeface="Arial" panose="020B0604020202020204" pitchFamily="34" charset="0"/>
+                <a:cs typeface="Arial" panose="020B0604020202020204" pitchFamily="34" charset="0"/>
+              </a:rPr>
+              <a:t>consiguiente</a:t>
+            </a:r>
+            <a:r>
+              <a:rPr lang="en-US" sz="1200" dirty="0">
+                <a:latin typeface="Arial" panose="020B0604020202020204" pitchFamily="34" charset="0"/>
+                <a:cs typeface="Arial" panose="020B0604020202020204" pitchFamily="34" charset="0"/>
+              </a:rPr>
+              <a:t>, </a:t>
+            </a:r>
+            <a:r>
+              <a:rPr lang="en-US" sz="1200" dirty="0" err="1">
+                <a:latin typeface="Arial" panose="020B0604020202020204" pitchFamily="34" charset="0"/>
+                <a:cs typeface="Arial" panose="020B0604020202020204" pitchFamily="34" charset="0"/>
+              </a:rPr>
+              <a:t>hace</a:t>
+            </a:r>
+            <a:r>
+              <a:rPr lang="en-US" sz="1200" dirty="0">
+                <a:latin typeface="Arial" panose="020B0604020202020204" pitchFamily="34" charset="0"/>
+                <a:cs typeface="Arial" panose="020B0604020202020204" pitchFamily="34" charset="0"/>
+              </a:rPr>
+              <a:t> </a:t>
+            </a:r>
+            <a:r>
+              <a:rPr lang="en-US" sz="1200" dirty="0" err="1">
+                <a:latin typeface="Arial" panose="020B0604020202020204" pitchFamily="34" charset="0"/>
+                <a:cs typeface="Arial" panose="020B0604020202020204" pitchFamily="34" charset="0"/>
+              </a:rPr>
+              <a:t>que</a:t>
+            </a:r>
+            <a:r>
+              <a:rPr lang="en-US" sz="1200" dirty="0">
+                <a:latin typeface="Arial" panose="020B0604020202020204" pitchFamily="34" charset="0"/>
+                <a:cs typeface="Arial" panose="020B0604020202020204" pitchFamily="34" charset="0"/>
+              </a:rPr>
+              <a:t> </a:t>
+            </a:r>
+            <a:r>
+              <a:rPr lang="en-US" sz="1200" dirty="0" err="1">
+                <a:latin typeface="Arial" panose="020B0604020202020204" pitchFamily="34" charset="0"/>
+                <a:cs typeface="Arial" panose="020B0604020202020204" pitchFamily="34" charset="0"/>
+              </a:rPr>
+              <a:t>esté</a:t>
+            </a:r>
+            <a:r>
+              <a:rPr lang="en-US" sz="1200" dirty="0">
+                <a:latin typeface="Arial" panose="020B0604020202020204" pitchFamily="34" charset="0"/>
+                <a:cs typeface="Arial" panose="020B0604020202020204" pitchFamily="34" charset="0"/>
+              </a:rPr>
+              <a:t> </a:t>
+            </a:r>
+            <a:r>
+              <a:rPr lang="en-US" sz="1200" dirty="0" err="1">
+                <a:latin typeface="Arial" panose="020B0604020202020204" pitchFamily="34" charset="0"/>
+                <a:cs typeface="Arial" panose="020B0604020202020204" pitchFamily="34" charset="0"/>
+              </a:rPr>
+              <a:t>menos</a:t>
+            </a:r>
+            <a:r>
+              <a:rPr lang="en-US" sz="1200" dirty="0">
+                <a:latin typeface="Arial" panose="020B0604020202020204" pitchFamily="34" charset="0"/>
+                <a:cs typeface="Arial" panose="020B0604020202020204" pitchFamily="34" charset="0"/>
+              </a:rPr>
+              <a:t> </a:t>
+            </a:r>
+            <a:r>
+              <a:rPr lang="en-US" sz="1200" dirty="0" err="1">
+                <a:latin typeface="Arial" panose="020B0604020202020204" pitchFamily="34" charset="0"/>
+                <a:cs typeface="Arial" panose="020B0604020202020204" pitchFamily="34" charset="0"/>
+              </a:rPr>
+              <a:t>confinado</a:t>
+            </a:r>
+            <a:r>
+              <a:rPr lang="en-US" sz="1200" dirty="0">
+                <a:latin typeface="Arial" panose="020B0604020202020204" pitchFamily="34" charset="0"/>
+                <a:cs typeface="Arial" panose="020B0604020202020204" pitchFamily="34" charset="0"/>
+              </a:rPr>
+              <a:t>. </a:t>
+            </a:r>
+          </a:p>
+          <a:p>
+            <a:pPr algn="just"/>
+            <a:endParaRPr lang="en-US" sz="1200" dirty="0">
+              <a:latin typeface="Arial" panose="020B0604020202020204" pitchFamily="34" charset="0"/>
+              <a:cs typeface="Arial" panose="020B0604020202020204" pitchFamily="34" charset="0"/>
+            </a:endParaRPr>
+          </a:p>
+          <a:p>
+            <a:pPr algn="just"/>
+            <a:r>
+              <a:rPr lang="es-ES" sz="1200" dirty="0">
+                <a:latin typeface="Arial" panose="020B0604020202020204" pitchFamily="34" charset="0"/>
+                <a:cs typeface="Arial" panose="020B0604020202020204" pitchFamily="34" charset="0"/>
+              </a:rPr>
+              <a:t>Además, en las gráficas se observa que el índice efectivo disminuye ligeramente al aumentar la longitud de onda para todos los modos y en ambas guías. Esto se debe a que, a mayores longitudes de onda, el modo se desconfina más y parte del campo se extiende hacia la cubierta, reduciendo su valor.</a:t>
+            </a:r>
+          </a:p>
+          <a:p>
+            <a:pPr algn="just"/>
+            <a:endParaRPr lang="es-ES" sz="1200" dirty="0">
+              <a:latin typeface="Arial" panose="020B0604020202020204" pitchFamily="34" charset="0"/>
+              <a:cs typeface="Arial" panose="020B0604020202020204" pitchFamily="34" charset="0"/>
+            </a:endParaRPr>
+          </a:p>
+          <a:p>
+            <a:pPr algn="just"/>
+            <a:r>
+              <a:rPr lang="en-US" sz="1200" dirty="0">
+                <a:latin typeface="Arial" panose="020B0604020202020204" pitchFamily="34" charset="0"/>
+                <a:cs typeface="Arial" panose="020B0604020202020204" pitchFamily="34" charset="0"/>
+              </a:rPr>
+              <a:t>Cabe </a:t>
+            </a:r>
+            <a:r>
+              <a:rPr lang="en-US" sz="1200" dirty="0" err="1">
+                <a:latin typeface="Arial" panose="020B0604020202020204" pitchFamily="34" charset="0"/>
+                <a:cs typeface="Arial" panose="020B0604020202020204" pitchFamily="34" charset="0"/>
+              </a:rPr>
+              <a:t>mencionar</a:t>
+            </a:r>
+            <a:r>
+              <a:rPr lang="en-US" sz="1200" dirty="0">
+                <a:latin typeface="Arial" panose="020B0604020202020204" pitchFamily="34" charset="0"/>
+                <a:cs typeface="Arial" panose="020B0604020202020204" pitchFamily="34" charset="0"/>
+              </a:rPr>
+              <a:t> </a:t>
+            </a:r>
+            <a:r>
+              <a:rPr lang="en-US" sz="1200" dirty="0" err="1">
+                <a:latin typeface="Arial" panose="020B0604020202020204" pitchFamily="34" charset="0"/>
+                <a:cs typeface="Arial" panose="020B0604020202020204" pitchFamily="34" charset="0"/>
+              </a:rPr>
+              <a:t>tambien</a:t>
+            </a:r>
+            <a:r>
+              <a:rPr lang="en-US" sz="1200" dirty="0">
+                <a:latin typeface="Arial" panose="020B0604020202020204" pitchFamily="34" charset="0"/>
+                <a:cs typeface="Arial" panose="020B0604020202020204" pitchFamily="34" charset="0"/>
+              </a:rPr>
+              <a:t> </a:t>
+            </a:r>
+            <a:r>
+              <a:rPr lang="en-US" sz="1200" dirty="0" err="1">
+                <a:latin typeface="Arial" panose="020B0604020202020204" pitchFamily="34" charset="0"/>
+                <a:cs typeface="Arial" panose="020B0604020202020204" pitchFamily="34" charset="0"/>
+              </a:rPr>
+              <a:t>que</a:t>
+            </a:r>
+            <a:r>
+              <a:rPr lang="en-US" sz="1200" dirty="0">
+                <a:latin typeface="Arial" panose="020B0604020202020204" pitchFamily="34" charset="0"/>
+                <a:cs typeface="Arial" panose="020B0604020202020204" pitchFamily="34" charset="0"/>
+              </a:rPr>
+              <a:t> </a:t>
+            </a:r>
+            <a:r>
+              <a:rPr lang="en-US" sz="1200" dirty="0" err="1">
+                <a:latin typeface="Arial" panose="020B0604020202020204" pitchFamily="34" charset="0"/>
+                <a:cs typeface="Arial" panose="020B0604020202020204" pitchFamily="34" charset="0"/>
+              </a:rPr>
+              <a:t>que</a:t>
+            </a:r>
+            <a:r>
+              <a:rPr lang="en-US" sz="1200" dirty="0">
+                <a:latin typeface="Arial" panose="020B0604020202020204" pitchFamily="34" charset="0"/>
+                <a:cs typeface="Arial" panose="020B0604020202020204" pitchFamily="34" charset="0"/>
+              </a:rPr>
+              <a:t> se </a:t>
+            </a:r>
+            <a:r>
+              <a:rPr lang="en-US" sz="1200" dirty="0" err="1">
+                <a:latin typeface="Arial" panose="020B0604020202020204" pitchFamily="34" charset="0"/>
+                <a:cs typeface="Arial" panose="020B0604020202020204" pitchFamily="34" charset="0"/>
+              </a:rPr>
+              <a:t>propaguen</a:t>
+            </a:r>
+            <a:r>
+              <a:rPr lang="en-US" sz="1200" dirty="0">
+                <a:latin typeface="Arial" panose="020B0604020202020204" pitchFamily="34" charset="0"/>
+                <a:cs typeface="Arial" panose="020B0604020202020204" pitchFamily="34" charset="0"/>
+              </a:rPr>
+              <a:t> </a:t>
+            </a:r>
+            <a:r>
+              <a:rPr lang="en-US" sz="1200" dirty="0" err="1">
+                <a:latin typeface="Arial" panose="020B0604020202020204" pitchFamily="34" charset="0"/>
+                <a:cs typeface="Arial" panose="020B0604020202020204" pitchFamily="34" charset="0"/>
+              </a:rPr>
+              <a:t>todos</a:t>
+            </a:r>
+            <a:r>
+              <a:rPr lang="en-US" sz="1200" dirty="0">
+                <a:latin typeface="Arial" panose="020B0604020202020204" pitchFamily="34" charset="0"/>
+                <a:cs typeface="Arial" panose="020B0604020202020204" pitchFamily="34" charset="0"/>
+              </a:rPr>
+              <a:t> </a:t>
+            </a:r>
+            <a:r>
+              <a:rPr lang="en-US" sz="1200" dirty="0" err="1">
+                <a:latin typeface="Arial" panose="020B0604020202020204" pitchFamily="34" charset="0"/>
+                <a:cs typeface="Arial" panose="020B0604020202020204" pitchFamily="34" charset="0"/>
+              </a:rPr>
+              <a:t>los</a:t>
+            </a:r>
+            <a:r>
+              <a:rPr lang="en-US" sz="1200" dirty="0">
+                <a:latin typeface="Arial" panose="020B0604020202020204" pitchFamily="34" charset="0"/>
+                <a:cs typeface="Arial" panose="020B0604020202020204" pitchFamily="34" charset="0"/>
+              </a:rPr>
+              <a:t> </a:t>
+            </a:r>
+            <a:r>
+              <a:rPr lang="en-US" sz="1200" dirty="0" err="1">
+                <a:latin typeface="Arial" panose="020B0604020202020204" pitchFamily="34" charset="0"/>
+                <a:cs typeface="Arial" panose="020B0604020202020204" pitchFamily="34" charset="0"/>
+              </a:rPr>
+              <a:t>modos</a:t>
+            </a:r>
+            <a:r>
+              <a:rPr lang="en-US" sz="1200" dirty="0">
+                <a:latin typeface="Arial" panose="020B0604020202020204" pitchFamily="34" charset="0"/>
+                <a:cs typeface="Arial" panose="020B0604020202020204" pitchFamily="34" charset="0"/>
+              </a:rPr>
+              <a:t> no es </a:t>
+            </a:r>
+            <a:r>
+              <a:rPr lang="en-US" sz="1200" dirty="0" err="1">
+                <a:latin typeface="Arial" panose="020B0604020202020204" pitchFamily="34" charset="0"/>
+                <a:cs typeface="Arial" panose="020B0604020202020204" pitchFamily="34" charset="0"/>
+              </a:rPr>
+              <a:t>tampoco</a:t>
+            </a:r>
+            <a:r>
+              <a:rPr lang="en-US" sz="1200" dirty="0">
+                <a:latin typeface="Arial" panose="020B0604020202020204" pitchFamily="34" charset="0"/>
+                <a:cs typeface="Arial" panose="020B0604020202020204" pitchFamily="34" charset="0"/>
+              </a:rPr>
+              <a:t> bueno, </a:t>
+            </a:r>
+            <a:r>
+              <a:rPr lang="en-US" sz="1200" dirty="0" err="1">
+                <a:latin typeface="Arial" panose="020B0604020202020204" pitchFamily="34" charset="0"/>
+                <a:cs typeface="Arial" panose="020B0604020202020204" pitchFamily="34" charset="0"/>
+              </a:rPr>
+              <a:t>ya</a:t>
+            </a:r>
+            <a:r>
+              <a:rPr lang="en-US" sz="1200" dirty="0">
+                <a:latin typeface="Arial" panose="020B0604020202020204" pitchFamily="34" charset="0"/>
+                <a:cs typeface="Arial" panose="020B0604020202020204" pitchFamily="34" charset="0"/>
+              </a:rPr>
+              <a:t> </a:t>
+            </a:r>
+            <a:r>
+              <a:rPr lang="en-US" sz="1200" dirty="0" err="1">
+                <a:latin typeface="Arial" panose="020B0604020202020204" pitchFamily="34" charset="0"/>
+                <a:cs typeface="Arial" panose="020B0604020202020204" pitchFamily="34" charset="0"/>
+              </a:rPr>
+              <a:t>que</a:t>
+            </a:r>
+            <a:r>
+              <a:rPr lang="en-US" sz="1200" dirty="0">
+                <a:latin typeface="Arial" panose="020B0604020202020204" pitchFamily="34" charset="0"/>
+                <a:cs typeface="Arial" panose="020B0604020202020204" pitchFamily="34" charset="0"/>
+              </a:rPr>
+              <a:t> </a:t>
+            </a:r>
+            <a:r>
+              <a:rPr lang="en-US" sz="1200" dirty="0" err="1">
+                <a:latin typeface="Arial" panose="020B0604020202020204" pitchFamily="34" charset="0"/>
+                <a:cs typeface="Arial" panose="020B0604020202020204" pitchFamily="34" charset="0"/>
+              </a:rPr>
+              <a:t>normalmente</a:t>
+            </a:r>
+            <a:r>
+              <a:rPr lang="en-US" sz="1200" dirty="0">
+                <a:latin typeface="Arial" panose="020B0604020202020204" pitchFamily="34" charset="0"/>
+                <a:cs typeface="Arial" panose="020B0604020202020204" pitchFamily="34" charset="0"/>
+              </a:rPr>
+              <a:t> solo </a:t>
+            </a:r>
+            <a:r>
+              <a:rPr lang="en-US" sz="1200" dirty="0" err="1">
+                <a:latin typeface="Arial" panose="020B0604020202020204" pitchFamily="34" charset="0"/>
+                <a:cs typeface="Arial" panose="020B0604020202020204" pitchFamily="34" charset="0"/>
+              </a:rPr>
+              <a:t>deseamos</a:t>
+            </a:r>
+            <a:r>
+              <a:rPr lang="en-US" sz="1200" dirty="0">
+                <a:latin typeface="Arial" panose="020B0604020202020204" pitchFamily="34" charset="0"/>
+                <a:cs typeface="Arial" panose="020B0604020202020204" pitchFamily="34" charset="0"/>
+              </a:rPr>
+              <a:t> </a:t>
+            </a:r>
+            <a:r>
+              <a:rPr lang="en-US" sz="1200" dirty="0" err="1">
+                <a:latin typeface="Arial" panose="020B0604020202020204" pitchFamily="34" charset="0"/>
+                <a:cs typeface="Arial" panose="020B0604020202020204" pitchFamily="34" charset="0"/>
+              </a:rPr>
+              <a:t>que</a:t>
+            </a:r>
+            <a:r>
+              <a:rPr lang="en-US" sz="1200" dirty="0">
+                <a:latin typeface="Arial" panose="020B0604020202020204" pitchFamily="34" charset="0"/>
+                <a:cs typeface="Arial" panose="020B0604020202020204" pitchFamily="34" charset="0"/>
+              </a:rPr>
+              <a:t> se </a:t>
+            </a:r>
+            <a:r>
+              <a:rPr lang="en-US" sz="1200" dirty="0" err="1">
+                <a:latin typeface="Arial" panose="020B0604020202020204" pitchFamily="34" charset="0"/>
+                <a:cs typeface="Arial" panose="020B0604020202020204" pitchFamily="34" charset="0"/>
+              </a:rPr>
+              <a:t>propague</a:t>
+            </a:r>
+            <a:r>
+              <a:rPr lang="en-US" sz="1200" dirty="0">
+                <a:latin typeface="Arial" panose="020B0604020202020204" pitchFamily="34" charset="0"/>
+                <a:cs typeface="Arial" panose="020B0604020202020204" pitchFamily="34" charset="0"/>
+              </a:rPr>
+              <a:t> uno, </a:t>
+            </a:r>
+            <a:r>
+              <a:rPr lang="en-US" sz="1200" dirty="0" err="1">
+                <a:latin typeface="Arial" panose="020B0604020202020204" pitchFamily="34" charset="0"/>
+                <a:cs typeface="Arial" panose="020B0604020202020204" pitchFamily="34" charset="0"/>
+              </a:rPr>
+              <a:t>el</a:t>
+            </a:r>
+            <a:r>
+              <a:rPr lang="en-US" sz="1200" dirty="0">
+                <a:latin typeface="Arial" panose="020B0604020202020204" pitchFamily="34" charset="0"/>
+                <a:cs typeface="Arial" panose="020B0604020202020204" pitchFamily="34" charset="0"/>
+              </a:rPr>
+              <a:t> </a:t>
+            </a:r>
+            <a:r>
+              <a:rPr lang="en-US" sz="1200" dirty="0" err="1">
+                <a:latin typeface="Arial" panose="020B0604020202020204" pitchFamily="34" charset="0"/>
+                <a:cs typeface="Arial" panose="020B0604020202020204" pitchFamily="34" charset="0"/>
+              </a:rPr>
+              <a:t>hecho</a:t>
+            </a:r>
+            <a:r>
+              <a:rPr lang="en-US" sz="1200" dirty="0">
+                <a:latin typeface="Arial" panose="020B0604020202020204" pitchFamily="34" charset="0"/>
+                <a:cs typeface="Arial" panose="020B0604020202020204" pitchFamily="34" charset="0"/>
+              </a:rPr>
+              <a:t> de </a:t>
+            </a:r>
+            <a:r>
+              <a:rPr lang="en-US" sz="1200" dirty="0" err="1">
+                <a:latin typeface="Arial" panose="020B0604020202020204" pitchFamily="34" charset="0"/>
+                <a:cs typeface="Arial" panose="020B0604020202020204" pitchFamily="34" charset="0"/>
+              </a:rPr>
+              <a:t>que</a:t>
+            </a:r>
+            <a:r>
+              <a:rPr lang="en-US" sz="1200" dirty="0">
+                <a:latin typeface="Arial" panose="020B0604020202020204" pitchFamily="34" charset="0"/>
+                <a:cs typeface="Arial" panose="020B0604020202020204" pitchFamily="34" charset="0"/>
+              </a:rPr>
+              <a:t> se </a:t>
+            </a:r>
+            <a:r>
+              <a:rPr lang="en-US" sz="1200" dirty="0" err="1">
+                <a:latin typeface="Arial" panose="020B0604020202020204" pitchFamily="34" charset="0"/>
+                <a:cs typeface="Arial" panose="020B0604020202020204" pitchFamily="34" charset="0"/>
+              </a:rPr>
+              <a:t>propaguen</a:t>
+            </a:r>
+            <a:r>
+              <a:rPr lang="en-US" sz="1200" dirty="0">
+                <a:latin typeface="Arial" panose="020B0604020202020204" pitchFamily="34" charset="0"/>
+                <a:cs typeface="Arial" panose="020B0604020202020204" pitchFamily="34" charset="0"/>
+              </a:rPr>
+              <a:t> </a:t>
+            </a:r>
+            <a:r>
+              <a:rPr lang="en-US" sz="1200" dirty="0" err="1">
+                <a:latin typeface="Arial" panose="020B0604020202020204" pitchFamily="34" charset="0"/>
+                <a:cs typeface="Arial" panose="020B0604020202020204" pitchFamily="34" charset="0"/>
+              </a:rPr>
+              <a:t>distintos</a:t>
+            </a:r>
+            <a:r>
+              <a:rPr lang="en-US" sz="1200" dirty="0">
+                <a:latin typeface="Arial" panose="020B0604020202020204" pitchFamily="34" charset="0"/>
+                <a:cs typeface="Arial" panose="020B0604020202020204" pitchFamily="34" charset="0"/>
+              </a:rPr>
+              <a:t> </a:t>
+            </a:r>
+            <a:r>
+              <a:rPr lang="en-US" sz="1200" dirty="0" err="1">
+                <a:latin typeface="Arial" panose="020B0604020202020204" pitchFamily="34" charset="0"/>
+                <a:cs typeface="Arial" panose="020B0604020202020204" pitchFamily="34" charset="0"/>
+              </a:rPr>
+              <a:t>modos</a:t>
+            </a:r>
+            <a:r>
+              <a:rPr lang="en-US" sz="1200" dirty="0">
+                <a:latin typeface="Arial" panose="020B0604020202020204" pitchFamily="34" charset="0"/>
+                <a:cs typeface="Arial" panose="020B0604020202020204" pitchFamily="34" charset="0"/>
+              </a:rPr>
+              <a:t> a la </a:t>
+            </a:r>
+            <a:r>
+              <a:rPr lang="en-US" sz="1200" dirty="0" err="1">
+                <a:latin typeface="Arial" panose="020B0604020202020204" pitchFamily="34" charset="0"/>
+                <a:cs typeface="Arial" panose="020B0604020202020204" pitchFamily="34" charset="0"/>
+              </a:rPr>
+              <a:t>vez</a:t>
+            </a:r>
+            <a:r>
+              <a:rPr lang="en-US" sz="1200" dirty="0">
+                <a:latin typeface="Arial" panose="020B0604020202020204" pitchFamily="34" charset="0"/>
+                <a:cs typeface="Arial" panose="020B0604020202020204" pitchFamily="34" charset="0"/>
+              </a:rPr>
+              <a:t> </a:t>
+            </a:r>
+            <a:r>
+              <a:rPr lang="en-US" sz="1200" dirty="0" err="1">
+                <a:latin typeface="Arial" panose="020B0604020202020204" pitchFamily="34" charset="0"/>
+                <a:cs typeface="Arial" panose="020B0604020202020204" pitchFamily="34" charset="0"/>
+              </a:rPr>
+              <a:t>puede</a:t>
+            </a:r>
+            <a:r>
+              <a:rPr lang="en-US" sz="1200" dirty="0">
+                <a:latin typeface="Arial" panose="020B0604020202020204" pitchFamily="34" charset="0"/>
+                <a:cs typeface="Arial" panose="020B0604020202020204" pitchFamily="34" charset="0"/>
+              </a:rPr>
+              <a:t> </a:t>
+            </a:r>
+            <a:r>
+              <a:rPr lang="en-US" sz="1200" dirty="0" err="1">
+                <a:latin typeface="Arial" panose="020B0604020202020204" pitchFamily="34" charset="0"/>
+                <a:cs typeface="Arial" panose="020B0604020202020204" pitchFamily="34" charset="0"/>
+              </a:rPr>
+              <a:t>conllevar</a:t>
+            </a:r>
+            <a:r>
+              <a:rPr lang="en-US" sz="1200" dirty="0">
+                <a:latin typeface="Arial" panose="020B0604020202020204" pitchFamily="34" charset="0"/>
+                <a:cs typeface="Arial" panose="020B0604020202020204" pitchFamily="34" charset="0"/>
+              </a:rPr>
+              <a:t> a </a:t>
+            </a:r>
+            <a:r>
+              <a:rPr lang="en-US" sz="1200" dirty="0" err="1">
+                <a:latin typeface="Arial" panose="020B0604020202020204" pitchFamily="34" charset="0"/>
+                <a:cs typeface="Arial" panose="020B0604020202020204" pitchFamily="34" charset="0"/>
+              </a:rPr>
+              <a:t>veces</a:t>
+            </a:r>
+            <a:r>
+              <a:rPr lang="en-US" sz="1200" dirty="0">
+                <a:latin typeface="Arial" panose="020B0604020202020204" pitchFamily="34" charset="0"/>
+                <a:cs typeface="Arial" panose="020B0604020202020204" pitchFamily="34" charset="0"/>
+              </a:rPr>
+              <a:t>  </a:t>
+            </a:r>
+            <a:r>
+              <a:rPr lang="en-US" sz="1200" dirty="0" err="1">
+                <a:latin typeface="Arial" panose="020B0604020202020204" pitchFamily="34" charset="0"/>
+                <a:cs typeface="Arial" panose="020B0604020202020204" pitchFamily="34" charset="0"/>
+              </a:rPr>
+              <a:t>interferencias</a:t>
+            </a:r>
+            <a:r>
+              <a:rPr lang="en-US" sz="1200" dirty="0">
+                <a:latin typeface="Arial" panose="020B0604020202020204" pitchFamily="34" charset="0"/>
+                <a:cs typeface="Arial" panose="020B0604020202020204" pitchFamily="34" charset="0"/>
+              </a:rPr>
+              <a:t> </a:t>
+            </a:r>
+            <a:r>
+              <a:rPr lang="en-US" sz="1200" dirty="0" err="1">
+                <a:latin typeface="Arial" panose="020B0604020202020204" pitchFamily="34" charset="0"/>
+                <a:cs typeface="Arial" panose="020B0604020202020204" pitchFamily="34" charset="0"/>
+              </a:rPr>
+              <a:t>intermodales</a:t>
+            </a:r>
+            <a:r>
+              <a:rPr lang="en-US" sz="1200" dirty="0">
+                <a:latin typeface="Arial" panose="020B0604020202020204" pitchFamily="34" charset="0"/>
+                <a:cs typeface="Arial" panose="020B0604020202020204" pitchFamily="34" charset="0"/>
+              </a:rPr>
+              <a:t>.</a:t>
+            </a:r>
+          </a:p>
+          <a:p>
+            <a:pPr algn="just"/>
+            <a:endParaRPr lang="en-US" sz="1200" dirty="0">
+              <a:latin typeface="Arial" panose="020B0604020202020204" pitchFamily="34" charset="0"/>
+              <a:cs typeface="Arial" panose="020B0604020202020204" pitchFamily="34" charset="0"/>
+            </a:endParaRPr>
+          </a:p>
+        </p:txBody>
+      </p:sp>
       <p:sp>
         <p:nvSpPr>
           <p:cNvPr id="6" name="CuadroTexto 5">
